--- a/SEEM_project_deck.pptx
+++ b/SEEM_project_deck.pptx
@@ -19,6 +19,12 @@
     <p:sldId id="267" r:id="rId18"/>
     <p:sldId id="268" r:id="rId19"/>
     <p:sldId id="269" r:id="rId20"/>
+    <p:sldId id="270" r:id="rId21"/>
+    <p:sldId id="271" r:id="rId22"/>
+    <p:sldId id="272" r:id="rId23"/>
+    <p:sldId id="273" r:id="rId24"/>
+    <p:sldId id="274" r:id="rId25"/>
+    <p:sldId id="275" r:id="rId26"/>
   </p:sldIdLst>
   <p:sldSz cx="12191695" cy="6858000" type="screen4x3"/>
   <p:notesSz cx="6858000" cy="9144000"/>
@@ -3109,8 +3115,8 @@
         </p:nvSpPr>
         <p:spPr>
           <a:xfrm>
-            <a:off x="822960" y="1828800"/>
-            <a:ext cx="10515600" cy="1371600"/>
+            <a:off x="822960" y="1737360"/>
+            <a:ext cx="10515600" cy="1463040"/>
           </a:xfrm>
           <a:prstGeom prst="rect">
             <a:avLst/>
@@ -3124,13 +3130,13 @@
           <a:lstStyle/>
           <a:p>
             <a:r>
-              <a:rPr sz="4000" b="1">
+              <a:rPr sz="3800" b="1">
                 <a:solidFill>
                   <a:srgbClr val="1E2761"/>
                 </a:solidFill>
                 <a:latin typeface="Calibri"/>
               </a:rPr>
-              <a:t>Constitutive-model discovery for amorphous plasticity</a:t>
+              <a:t>A fitted law for yield events, and everything rebuilt from it</a:t>
             </a:r>
           </a:p>
         </p:txBody>
@@ -3143,8 +3149,8 @@
         </p:nvSpPr>
         <p:spPr>
           <a:xfrm>
-            <a:off x="822960" y="3154680"/>
-            <a:ext cx="10515600" cy="548640"/>
+            <a:off x="822960" y="3246120"/>
+            <a:ext cx="10515600" cy="822960"/>
           </a:xfrm>
           <a:prstGeom prst="rect">
             <a:avLst/>
@@ -3158,13 +3164,13 @@
           <a:lstStyle/>
           <a:p>
             <a:r>
-              <a:rPr sz="2000" b="0">
-                <a:solidFill>
-                  <a:srgbClr val="212121"/>
-                </a:solidFill>
-                <a:latin typeface="Calibri"/>
-              </a:rPr>
-              <a:t>Dataset, analysis, and an adversarial assessment of STZ-consistency</a:t>
+              <a:rPr sz="1900" b="0">
+                <a:solidFill>
+                  <a:srgbClr val="212121"/>
+                </a:solidFill>
+                <a:latin typeface="Calibri"/>
+              </a:rPr>
+              <a:t>Symbolic-regression discovery of the event-size distribution in AQS shear, the forward model built on it, and where the model fails</a:t>
             </a:r>
           </a:p>
         </p:txBody>
@@ -3177,7 +3183,7 @@
         </p:nvSpPr>
         <p:spPr>
           <a:xfrm>
-            <a:off x="822960" y="3794760"/>
+            <a:off x="822960" y="4206240"/>
             <a:ext cx="10515600" cy="411480"/>
           </a:xfrm>
           <a:prstGeom prst="rect">
@@ -3198,7 +3204,7 @@
                 </a:solidFill>
                 <a:latin typeface="Calibri"/>
               </a:rPr>
-              <a:t>SEEM project status — August 6, 2026</a:t>
+              <a:t>SEEM project status — September 4, 2026  (third pass; supersedes the August 6 deck)</a:t>
             </a:r>
           </a:p>
         </p:txBody>
@@ -3232,7 +3238,7 @@
                 </a:solidFill>
                 <a:latin typeface="Calibri"/>
               </a:rPr>
-              <a:t>AQS molecular-dynamics shear · 850 trajectories · nine preparations · 42.5M transitions</a:t>
+              <a:t>AQS molecular-dynamics shear · 850 trajectories · nine preparations · 187,468 stress drops · every number regenerated by pipeline/run_all.sh</a:t>
             </a:r>
           </a:p>
         </p:txBody>
@@ -3280,18 +3286,18 @@
             <a:r>
               <a:rPr sz="3000" b="1">
                 <a:solidFill>
-                  <a:srgbClr val="990011"/>
-                </a:solidFill>
-                <a:latin typeface="Calibri"/>
-              </a:rPr>
-              <a:t>The headline negative result</a:t>
+                  <a:srgbClr val="1E2761"/>
+                </a:solidFill>
+                <a:latin typeface="Calibri"/>
+              </a:rPr>
+              <a:t>The acid test: simulating all 850 runs</a:t>
             </a:r>
           </a:p>
         </p:txBody>
       </p:sp>
       <p:pic>
         <p:nvPicPr>
-          <p:cNvPr id="3" name="Picture 2" descr="ss_c.png"/>
+          <p:cNvPr id="3" name="Picture 2" descr="fig12_sim_stress.png"/>
           <p:cNvPicPr>
             <a:picLocks noChangeAspect="1"/>
           </p:cNvPicPr>
@@ -3305,24 +3311,48 @@
         </p:blipFill>
         <p:spPr>
           <a:xfrm>
-            <a:off x="502920" y="1325880"/>
-            <a:ext cx="5989320" cy="4142232"/>
+            <a:off x="502920" y="1227025"/>
+            <a:ext cx="5486400" cy="3855308"/>
           </a:xfrm>
           <a:prstGeom prst="rect">
             <a:avLst/>
           </a:prstGeom>
         </p:spPr>
       </p:pic>
-      <p:sp>
-        <p:nvSpPr>
-          <p:cNvPr id="4" name="TextBox 3"/>
+      <p:pic>
+        <p:nvPicPr>
+          <p:cNvPr id="4" name="Picture 3" descr="fig14_sim_peaks.png"/>
+          <p:cNvPicPr>
+            <a:picLocks noChangeAspect="1"/>
+          </p:cNvPicPr>
+          <p:nvPr/>
+        </p:nvPicPr>
+        <p:blipFill>
+          <a:blip r:embed="rId3"/>
+          <a:stretch>
+            <a:fillRect/>
+          </a:stretch>
+        </p:blipFill>
+        <p:spPr>
+          <a:xfrm>
+            <a:off x="6199632" y="1227025"/>
+            <a:ext cx="5486400" cy="3855308"/>
+          </a:xfrm>
+          <a:prstGeom prst="rect">
+            <a:avLst/>
+          </a:prstGeom>
+        </p:spPr>
+      </p:pic>
+      <p:sp>
+        <p:nvSpPr>
+          <p:cNvPr id="5" name="TextBox 4"/>
           <p:cNvSpPr txBox="1"/>
           <p:nvPr/>
         </p:nvSpPr>
         <p:spPr>
           <a:xfrm>
-            <a:off x="6766560" y="1417320"/>
-            <a:ext cx="4892040" cy="4297680"/>
+            <a:off x="640080" y="5230368"/>
+            <a:ext cx="10972800" cy="640080"/>
           </a:xfrm>
           <a:prstGeom prst="rect">
             <a:avLst/>
@@ -3335,95 +3365,21 @@
           </a:bodyPr>
           <a:lstStyle/>
           <a:p>
-            <a:pPr marL="228600" indent="-228600">
-              <a:spcAft>
-                <a:spcPts val="800"/>
-              </a:spcAft>
-              <a:buChar char="•"/>
-            </a:pPr>
-            <a:r>
-              <a:rPr sz="1400" b="0">
-                <a:solidFill>
-                  <a:srgbClr val="212121"/>
-                </a:solidFill>
-                <a:latin typeface="Calibri"/>
-              </a:rPr>
-              <a:t>At identical (u,τ), slowest- vs fastest-cooled ensembles flow at rates differing 1.25–2.04× (median 51%)</a:t>
-            </a:r>
-          </a:p>
-          <a:p>
-            <a:pPr marL="228600" indent="-228600">
-              <a:spcAft>
-                <a:spcPts val="800"/>
-              </a:spcAft>
-              <a:buChar char="•"/>
-            </a:pPr>
-            <a:r>
-              <a:rPr sz="1400" b="0">
-                <a:solidFill>
-                  <a:srgbClr val="212121"/>
-                </a:solidFill>
-                <a:latin typeface="Calibri"/>
-              </a:rPr>
-              <a:t>Same sign in all 10 well-populated shared voxels; correlation 0.988 — an offset, not scatter</a:t>
-            </a:r>
-          </a:p>
-          <a:p>
-            <a:pPr marL="228600" indent="-228600">
-              <a:spcAft>
-                <a:spcPts val="800"/>
-              </a:spcAft>
-              <a:buChar char="•"/>
-            </a:pPr>
-            <a:r>
-              <a:rPr sz="1400" b="0">
-                <a:solidFill>
-                  <a:srgbClr val="212121"/>
-                </a:solidFill>
-                <a:latin typeface="Calibri"/>
-              </a:rPr>
-              <a:t>Split-half noise floor 11.3% — the effect is 4.5× the floor</a:t>
-            </a:r>
-          </a:p>
-          <a:p>
-            <a:pPr marL="228600" indent="-228600">
-              <a:spcAft>
-                <a:spcPts val="800"/>
-              </a:spcAft>
-              <a:buChar char="•"/>
-            </a:pPr>
-            <a:r>
-              <a:rPr sz="1400" b="0">
-                <a:solidFill>
-                  <a:srgbClr val="212121"/>
-                </a:solidFill>
-                <a:latin typeface="Calibri"/>
-              </a:rPr>
-              <a:t>Accumulated plastic strain γₚ absorbs ~⅓ of the gap (51% → 37%, vs a 16% floor)</a:t>
-            </a:r>
-          </a:p>
-          <a:p>
-            <a:pPr marL="228600" indent="-228600">
-              <a:spcAft>
-                <a:spcPts val="800"/>
-              </a:spcAft>
-              <a:buChar char="•"/>
-            </a:pPr>
-            <a:r>
-              <a:rPr sz="1400" b="0">
-                <a:solidFill>
-                  <a:srgbClr val="212121"/>
-                </a:solidFill>
-                <a:latin typeface="Calibri"/>
-              </a:rPr>
-              <a:t>Remainder unexplained: back-stress and localization are the candidates</a:t>
-            </a:r>
-          </a:p>
-        </p:txBody>
-      </p:sp>
-      <p:sp>
-        <p:nvSpPr>
-          <p:cNvPr id="5" name="Rounded Rectangle 4"/>
+            <a:r>
+              <a:rPr sz="1300" b="0">
+                <a:solidFill>
+                  <a:srgbClr val="212121"/>
+                </a:solidFill>
+                <a:latin typeface="Calibri"/>
+              </a:rPr>
+              <a:t>Three arms differ only in the size law: ceiling law, TPL, empirical resampling.  Stress–strain curves, yield overshoot across 256× in cooling rate, and flow stress (±5%) all emerge; yield-peak RMS 2.5% (ceiling), 1.4% (TPL), 0.9% (empirical).</a:t>
+            </a:r>
+          </a:p>
+        </p:txBody>
+      </p:sp>
+      <p:sp>
+        <p:nvSpPr>
+          <p:cNvPr id="6" name="Rounded Rectangle 5"/>
           <p:cNvSpPr/>
           <p:nvPr/>
         </p:nvSpPr>
@@ -3480,7 +3436,7 @@
                 </a:solidFill>
                 <a:latin typeface="Calibri"/>
               </a:rPr>
-              <a:t>(u, τ) is not a sufficient state: no two-variable constitutive law — STZ-form or otherwise — can be exact for this system.</a:t>
+              <a:t>The model predicts the yield strength of a glass from its preparation to a few percent — and macroscopic curves cannot tell size laws apart; the per-event likelihood can.</a:t>
             </a:r>
           </a:p>
         </p:txBody>
@@ -3528,654 +3484,39 @@
             <a:r>
               <a:rPr sz="3000" b="1">
                 <a:solidFill>
-                  <a:srgbClr val="1E2761"/>
-                </a:solidFill>
-                <a:latin typeface="Calibri"/>
-              </a:rPr>
-              <a:t>Adversarial battery: does the activated form survive?</a:t>
-            </a:r>
-          </a:p>
-        </p:txBody>
-      </p:sp>
-      <p:graphicFrame>
-        <p:nvGraphicFramePr>
-          <p:cNvPr id="3" name="Table 2"/>
-          <p:cNvGraphicFramePr>
-            <a:graphicFrameLocks noGrp="1"/>
-          </p:cNvGraphicFramePr>
-          <p:nvPr/>
-        </p:nvGraphicFramePr>
-        <p:xfrm>
-          <a:off x="640080" y="1234440"/>
-          <a:ext cx="10881360" cy="3749039"/>
-        </p:xfrm>
-        <a:graphic>
-          <a:graphicData uri="http://schemas.openxmlformats.org/drawingml/2006/table">
-            <a:tbl>
-              <a:tblPr firstRow="1" bandRow="0">
-                <a:tableStyleId>{5C22544A-7EE6-4342-B048-85BDC9FD1C3A}</a:tableStyleId>
-              </a:tblPr>
-              <a:tblGrid>
-                <a:gridCol w="5760720"/>
-                <a:gridCol w="2651760"/>
-                <a:gridCol w="2468880"/>
-              </a:tblGrid>
-              <a:tr h="416559">
-                <a:tc>
-                  <a:txBody>
-                    <a:bodyPr/>
-                    <a:lstStyle/>
-                    <a:p>
-                      <a:r>
-                        <a:rPr sz="1300" b="1">
-                          <a:solidFill>
-                            <a:srgbClr val="FFFFFF"/>
-                          </a:solidFill>
-                          <a:latin typeface="Calibri"/>
-                        </a:rPr>
-                        <a:t>Analysis variant</a:t>
-                      </a:r>
-                    </a:p>
-                  </a:txBody>
-                  <a:tcPr marL="73152" marR="54864" marT="27432" marB="27432" anchor="ctr">
-                    <a:solidFill>
-                      <a:srgbClr val="1E2761"/>
-                    </a:solidFill>
-                  </a:tcPr>
-                </a:tc>
-                <a:tc>
-                  <a:txBody>
-                    <a:bodyPr/>
-                    <a:lstStyle/>
-                    <a:p>
-                      <a:r>
-                        <a:rPr sz="1300" b="1">
-                          <a:solidFill>
-                            <a:srgbClr val="FFFFFF"/>
-                          </a:solidFill>
-                          <a:latin typeface="Calibri"/>
-                        </a:rPr>
-                        <a:t>Λ(u) winner</a:t>
-                      </a:r>
-                    </a:p>
-                  </a:txBody>
-                  <a:tcPr marL="73152" marR="54864" marT="27432" marB="27432" anchor="ctr">
-                    <a:solidFill>
-                      <a:srgbClr val="1E2761"/>
-                    </a:solidFill>
-                  </a:tcPr>
-                </a:tc>
-                <a:tc>
-                  <a:txBody>
-                    <a:bodyPr/>
-                    <a:lstStyle/>
-                    <a:p>
-                      <a:r>
-                        <a:rPr sz="1300" b="1">
-                          <a:solidFill>
-                            <a:srgbClr val="FFFFFF"/>
-                          </a:solidFill>
-                          <a:latin typeface="Calibri"/>
-                        </a:rPr>
-                        <a:t>f(τ) winner</a:t>
-                      </a:r>
-                    </a:p>
-                  </a:txBody>
-                  <a:tcPr marL="73152" marR="54864" marT="27432" marB="27432" anchor="ctr">
-                    <a:solidFill>
-                      <a:srgbClr val="1E2761"/>
-                    </a:solidFill>
-                  </a:tcPr>
-                </a:tc>
-              </a:tr>
-              <a:tr h="416559">
-                <a:tc>
-                  <a:txBody>
-                    <a:bodyPr/>
-                    <a:lstStyle/>
-                    <a:p>
-                      <a:r>
-                        <a:rPr sz="1250" b="0">
-                          <a:solidFill>
-                            <a:srgbClr val="212121"/>
-                          </a:solidFill>
-                          <a:latin typeface="Calibri"/>
-                        </a:rPr>
-                        <a:t>Weighted fits (statistical / relative / log-space)</a:t>
-                      </a:r>
-                    </a:p>
-                  </a:txBody>
-                  <a:tcPr marL="73152" marR="54864" marT="27432" marB="27432" anchor="ctr">
-                    <a:solidFill>
-                      <a:srgbClr val="FFFFFF"/>
-                    </a:solidFill>
-                  </a:tcPr>
-                </a:tc>
-                <a:tc>
-                  <a:txBody>
-                    <a:bodyPr/>
-                    <a:lstStyle/>
-                    <a:p>
-                      <a:r>
-                        <a:rPr sz="1250" b="0">
-                          <a:solidFill>
-                            <a:srgbClr val="212121"/>
-                          </a:solidFill>
-                          <a:latin typeface="Calibri"/>
-                        </a:rPr>
-                        <a:t>activated</a:t>
-                      </a:r>
-                    </a:p>
-                  </a:txBody>
-                  <a:tcPr marL="73152" marR="54864" marT="27432" marB="27432" anchor="ctr">
-                    <a:solidFill>
-                      <a:srgbClr val="FFFFFF"/>
-                    </a:solidFill>
-                  </a:tcPr>
-                </a:tc>
-                <a:tc>
-                  <a:txBody>
-                    <a:bodyPr/>
-                    <a:lstStyle/>
-                    <a:p>
-                      <a:r>
-                        <a:rPr sz="1250" b="0">
-                          <a:solidFill>
-                            <a:srgbClr val="212121"/>
-                          </a:solidFill>
-                          <a:latin typeface="Calibri"/>
-                        </a:rPr>
-                        <a:t>activated</a:t>
-                      </a:r>
-                    </a:p>
-                  </a:txBody>
-                  <a:tcPr marL="73152" marR="54864" marT="27432" marB="27432" anchor="ctr">
-                    <a:solidFill>
-                      <a:srgbClr val="FFFFFF"/>
-                    </a:solidFill>
-                  </a:tcPr>
-                </a:tc>
-              </a:tr>
-              <a:tr h="416559">
-                <a:tc>
-                  <a:txBody>
-                    <a:bodyPr/>
-                    <a:lstStyle/>
-                    <a:p>
-                      <a:r>
-                        <a:rPr sz="1250" b="0">
-                          <a:solidFill>
-                            <a:srgbClr val="212121"/>
-                          </a:solidFill>
-                          <a:latin typeface="Calibri"/>
-                        </a:rPr>
-                        <a:t>Pre-softening voxels only (q &lt; 1)</a:t>
-                      </a:r>
-                    </a:p>
-                  </a:txBody>
-                  <a:tcPr marL="73152" marR="54864" marT="27432" marB="27432" anchor="ctr">
-                    <a:solidFill>
-                      <a:srgbClr val="FFFFFF"/>
-                    </a:solidFill>
-                  </a:tcPr>
-                </a:tc>
-                <a:tc>
-                  <a:txBody>
-                    <a:bodyPr/>
-                    <a:lstStyle/>
-                    <a:p>
-                      <a:r>
-                        <a:rPr sz="1250" b="0">
-                          <a:solidFill>
-                            <a:srgbClr val="212121"/>
-                          </a:solidFill>
-                          <a:latin typeface="Calibri"/>
-                        </a:rPr>
-                        <a:t>activated</a:t>
-                      </a:r>
-                    </a:p>
-                  </a:txBody>
-                  <a:tcPr marL="73152" marR="54864" marT="27432" marB="27432" anchor="ctr">
-                    <a:solidFill>
-                      <a:srgbClr val="FFFFFF"/>
-                    </a:solidFill>
-                  </a:tcPr>
-                </a:tc>
-                <a:tc>
-                  <a:txBody>
-                    <a:bodyPr/>
-                    <a:lstStyle/>
-                    <a:p>
-                      <a:r>
-                        <a:rPr sz="1250" b="0">
-                          <a:solidFill>
-                            <a:srgbClr val="212121"/>
-                          </a:solidFill>
-                          <a:latin typeface="Calibri"/>
-                        </a:rPr>
-                        <a:t>activated</a:t>
-                      </a:r>
-                    </a:p>
-                  </a:txBody>
-                  <a:tcPr marL="73152" marR="54864" marT="27432" marB="27432" anchor="ctr">
-                    <a:solidFill>
-                      <a:srgbClr val="FFFFFF"/>
-                    </a:solidFill>
-                  </a:tcPr>
-                </a:tc>
-              </a:tr>
-              <a:tr h="416559">
-                <a:tc>
-                  <a:txBody>
-                    <a:bodyPr/>
-                    <a:lstStyle/>
-                    <a:p>
-                      <a:r>
-                        <a:rPr sz="1250" b="0">
-                          <a:solidFill>
-                            <a:srgbClr val="212121"/>
-                          </a:solidFill>
-                          <a:latin typeface="Calibri"/>
-                        </a:rPr>
-                        <a:t>Fresh-branch modulus estimator</a:t>
-                      </a:r>
-                    </a:p>
-                  </a:txBody>
-                  <a:tcPr marL="73152" marR="54864" marT="27432" marB="27432" anchor="ctr">
-                    <a:solidFill>
-                      <a:srgbClr val="FFFFFF"/>
-                    </a:solidFill>
-                  </a:tcPr>
-                </a:tc>
-                <a:tc>
-                  <a:txBody>
-                    <a:bodyPr/>
-                    <a:lstStyle/>
-                    <a:p>
-                      <a:r>
-                        <a:rPr sz="1250" b="0">
-                          <a:solidFill>
-                            <a:srgbClr val="212121"/>
-                          </a:solidFill>
-                          <a:latin typeface="Calibri"/>
-                        </a:rPr>
-                        <a:t>activated</a:t>
-                      </a:r>
-                    </a:p>
-                  </a:txBody>
-                  <a:tcPr marL="73152" marR="54864" marT="27432" marB="27432" anchor="ctr">
-                    <a:solidFill>
-                      <a:srgbClr val="FFFFFF"/>
-                    </a:solidFill>
-                  </a:tcPr>
-                </a:tc>
-                <a:tc>
-                  <a:txBody>
-                    <a:bodyPr/>
-                    <a:lstStyle/>
-                    <a:p>
-                      <a:r>
-                        <a:rPr sz="1250" b="0">
-                          <a:solidFill>
-                            <a:srgbClr val="212121"/>
-                          </a:solidFill>
-                          <a:latin typeface="Calibri"/>
-                        </a:rPr>
-                        <a:t>activated</a:t>
-                      </a:r>
-                    </a:p>
-                  </a:txBody>
-                  <a:tcPr marL="73152" marR="54864" marT="27432" marB="27432" anchor="ctr">
-                    <a:solidFill>
-                      <a:srgbClr val="FFFFFF"/>
-                    </a:solidFill>
-                  </a:tcPr>
-                </a:tc>
-              </a:tr>
-              <a:tr h="416559">
-                <a:tc>
-                  <a:txBody>
-                    <a:bodyPr/>
-                    <a:lstStyle/>
-                    <a:p>
-                      <a:r>
-                        <a:rPr sz="1250" b="0">
-                          <a:solidFill>
-                            <a:srgbClr val="212121"/>
-                          </a:solidFill>
-                          <a:latin typeface="Calibri"/>
-                        </a:rPr>
-                        <a:t>Leave-one-out cross-validation</a:t>
-                      </a:r>
-                    </a:p>
-                  </a:txBody>
-                  <a:tcPr marL="73152" marR="54864" marT="27432" marB="27432" anchor="ctr">
-                    <a:solidFill>
-                      <a:srgbClr val="FFFFFF"/>
-                    </a:solidFill>
-                  </a:tcPr>
-                </a:tc>
-                <a:tc>
-                  <a:txBody>
-                    <a:bodyPr/>
-                    <a:lstStyle/>
-                    <a:p>
-                      <a:r>
-                        <a:rPr sz="1250" b="0">
-                          <a:solidFill>
-                            <a:srgbClr val="212121"/>
-                          </a:solidFill>
-                          <a:latin typeface="Calibri"/>
-                        </a:rPr>
-                        <a:t>activated</a:t>
-                      </a:r>
-                    </a:p>
-                  </a:txBody>
-                  <a:tcPr marL="73152" marR="54864" marT="27432" marB="27432" anchor="ctr">
-                    <a:solidFill>
-                      <a:srgbClr val="FFFFFF"/>
-                    </a:solidFill>
-                  </a:tcPr>
-                </a:tc>
-                <a:tc>
-                  <a:txBody>
-                    <a:bodyPr/>
-                    <a:lstStyle/>
-                    <a:p>
-                      <a:r>
-                        <a:rPr sz="1250" b="0">
-                          <a:solidFill>
-                            <a:srgbClr val="212121"/>
-                          </a:solidFill>
-                          <a:latin typeface="Calibri"/>
-                        </a:rPr>
-                        <a:t>activated</a:t>
-                      </a:r>
-                    </a:p>
-                  </a:txBody>
-                  <a:tcPr marL="73152" marR="54864" marT="27432" marB="27432" anchor="ctr">
-                    <a:solidFill>
-                      <a:srgbClr val="FFFFFF"/>
-                    </a:solidFill>
-                  </a:tcPr>
-                </a:tc>
-              </a:tr>
-              <a:tr h="416559">
-                <a:tc>
-                  <a:txBody>
-                    <a:bodyPr/>
-                    <a:lstStyle/>
-                    <a:p>
-                      <a:r>
-                        <a:rPr sz="1250" b="0">
-                          <a:solidFill>
-                            <a:srgbClr val="212121"/>
-                          </a:solidFill>
-                          <a:latin typeface="Calibri"/>
-                        </a:rPr>
-                        <a:t>Unweighted extraction</a:t>
-                      </a:r>
-                    </a:p>
-                  </a:txBody>
-                  <a:tcPr marL="73152" marR="54864" marT="27432" marB="27432" anchor="ctr">
-                    <a:solidFill>
-                      <a:srgbClr val="FFFFFF"/>
-                    </a:solidFill>
-                  </a:tcPr>
-                </a:tc>
-                <a:tc>
-                  <a:txBody>
-                    <a:bodyPr/>
-                    <a:lstStyle/>
-                    <a:p>
-                      <a:r>
-                        <a:rPr sz="1250" b="0">
-                          <a:solidFill>
-                            <a:srgbClr val="212121"/>
-                          </a:solidFill>
-                          <a:latin typeface="Calibri"/>
-                        </a:rPr>
-                        <a:t>power law (3.9× margin)</a:t>
-                      </a:r>
-                    </a:p>
-                  </a:txBody>
-                  <a:tcPr marL="73152" marR="54864" marT="27432" marB="27432" anchor="ctr">
-                    <a:solidFill>
-                      <a:srgbClr val="FFFFFF"/>
-                    </a:solidFill>
-                  </a:tcPr>
-                </a:tc>
-                <a:tc>
-                  <a:txBody>
-                    <a:bodyPr/>
-                    <a:lstStyle/>
-                    <a:p>
-                      <a:r>
-                        <a:rPr sz="1250" b="0">
-                          <a:solidFill>
-                            <a:srgbClr val="212121"/>
-                          </a:solidFill>
-                          <a:latin typeface="Calibri"/>
-                        </a:rPr>
-                        <a:t>power + floor</a:t>
-                      </a:r>
-                    </a:p>
-                  </a:txBody>
-                  <a:tcPr marL="73152" marR="54864" marT="27432" marB="27432" anchor="ctr">
-                    <a:solidFill>
-                      <a:srgbClr val="FFFFFF"/>
-                    </a:solidFill>
-                  </a:tcPr>
-                </a:tc>
-              </a:tr>
-              <a:tr h="416559">
-                <a:tc>
-                  <a:txBody>
-                    <a:bodyPr/>
-                    <a:lstStyle/>
-                    <a:p>
-                      <a:r>
-                        <a:rPr sz="1250" b="0">
-                          <a:solidFill>
-                            <a:srgbClr val="212121"/>
-                          </a:solidFill>
-                          <a:latin typeface="Calibri"/>
-                        </a:rPr>
-                        <a:t>300 trajectory bootstraps (unweighted)</a:t>
-                      </a:r>
-                    </a:p>
-                  </a:txBody>
-                  <a:tcPr marL="73152" marR="54864" marT="27432" marB="27432" anchor="ctr">
-                    <a:solidFill>
-                      <a:srgbClr val="FFFFFF"/>
-                    </a:solidFill>
-                  </a:tcPr>
-                </a:tc>
-                <a:tc>
-                  <a:txBody>
-                    <a:bodyPr/>
-                    <a:lstStyle/>
-                    <a:p>
-                      <a:r>
-                        <a:rPr sz="1250" b="0">
-                          <a:solidFill>
-                            <a:srgbClr val="212121"/>
-                          </a:solidFill>
-                          <a:latin typeface="Calibri"/>
-                        </a:rPr>
-                        <a:t>power 97%</a:t>
-                      </a:r>
-                    </a:p>
-                  </a:txBody>
-                  <a:tcPr marL="73152" marR="54864" marT="27432" marB="27432" anchor="ctr">
-                    <a:solidFill>
-                      <a:srgbClr val="FFFFFF"/>
-                    </a:solidFill>
-                  </a:tcPr>
-                </a:tc>
-                <a:tc>
-                  <a:txBody>
-                    <a:bodyPr/>
-                    <a:lstStyle/>
-                    <a:p>
-                      <a:r>
-                        <a:rPr sz="1250" b="0">
-                          <a:solidFill>
-                            <a:srgbClr val="212121"/>
-                          </a:solidFill>
-                          <a:latin typeface="Calibri"/>
-                        </a:rPr>
-                        <a:t>power-floor 99%</a:t>
-                      </a:r>
-                    </a:p>
-                  </a:txBody>
-                  <a:tcPr marL="73152" marR="54864" marT="27432" marB="27432" anchor="ctr">
-                    <a:solidFill>
-                      <a:srgbClr val="FFFFFF"/>
-                    </a:solidFill>
-                  </a:tcPr>
-                </a:tc>
-              </a:tr>
-              <a:tr h="416559">
-                <a:tc>
-                  <a:txBody>
-                    <a:bodyPr/>
-                    <a:lstStyle/>
-                    <a:p>
-                      <a:r>
-                        <a:rPr sz="1250" b="0">
-                          <a:solidFill>
-                            <a:srgbClr val="212121"/>
-                          </a:solidFill>
-                          <a:latin typeface="Calibri"/>
-                        </a:rPr>
-                        <a:t>u-zero shifted by ±0.003 (10% of χ*)</a:t>
-                      </a:r>
-                    </a:p>
-                  </a:txBody>
-                  <a:tcPr marL="73152" marR="54864" marT="27432" marB="27432" anchor="ctr">
-                    <a:solidFill>
-                      <a:srgbClr val="FFFFFF"/>
-                    </a:solidFill>
-                  </a:tcPr>
-                </a:tc>
-                <a:tc>
-                  <a:txBody>
-                    <a:bodyPr/>
-                    <a:lstStyle/>
-                    <a:p>
-                      <a:r>
-                        <a:rPr sz="1250" b="0">
-                          <a:solidFill>
-                            <a:srgbClr val="212121"/>
-                          </a:solidFill>
-                          <a:latin typeface="Calibri"/>
-                        </a:rPr>
-                        <a:t>flips with sign</a:t>
-                      </a:r>
-                    </a:p>
-                  </a:txBody>
-                  <a:tcPr marL="73152" marR="54864" marT="27432" marB="27432" anchor="ctr">
-                    <a:solidFill>
-                      <a:srgbClr val="FFFFFF"/>
-                    </a:solidFill>
-                  </a:tcPr>
-                </a:tc>
-                <a:tc>
-                  <a:txBody>
-                    <a:bodyPr/>
-                    <a:lstStyle/>
-                    <a:p>
-                      <a:r>
-                        <a:rPr sz="1250" b="0">
-                          <a:solidFill>
-                            <a:srgbClr val="212121"/>
-                          </a:solidFill>
-                          <a:latin typeface="Calibri"/>
-                        </a:rPr>
-                        <a:t>—</a:t>
-                      </a:r>
-                    </a:p>
-                  </a:txBody>
-                  <a:tcPr marL="73152" marR="54864" marT="27432" marB="27432" anchor="ctr">
-                    <a:solidFill>
-                      <a:srgbClr val="FFFFFF"/>
-                    </a:solidFill>
-                  </a:tcPr>
-                </a:tc>
-              </a:tr>
-              <a:tr h="416567">
-                <a:tc>
-                  <a:txBody>
-                    <a:bodyPr/>
-                    <a:lstStyle/>
-                    <a:p>
-                      <a:r>
-                        <a:rPr sz="1250" b="0">
-                          <a:solidFill>
-                            <a:srgbClr val="212121"/>
-                          </a:solidFill>
-                          <a:latin typeface="Calibri"/>
-                        </a:rPr>
-                        <a:t>Rise-only (û ≥ 0.3)</a:t>
-                      </a:r>
-                    </a:p>
-                  </a:txBody>
-                  <a:tcPr marL="73152" marR="54864" marT="27432" marB="27432" anchor="ctr">
-                    <a:solidFill>
-                      <a:srgbClr val="FFFFFF"/>
-                    </a:solidFill>
-                  </a:tcPr>
-                </a:tc>
-                <a:tc>
-                  <a:txBody>
-                    <a:bodyPr/>
-                    <a:lstStyle/>
-                    <a:p>
-                      <a:r>
-                        <a:rPr sz="1250" b="0">
-                          <a:solidFill>
-                            <a:srgbClr val="212121"/>
-                          </a:solidFill>
-                          <a:latin typeface="Calibri"/>
-                        </a:rPr>
-                        <a:t>indistinguishable</a:t>
-                      </a:r>
-                    </a:p>
-                  </a:txBody>
-                  <a:tcPr marL="73152" marR="54864" marT="27432" marB="27432" anchor="ctr">
-                    <a:solidFill>
-                      <a:srgbClr val="FFFFFF"/>
-                    </a:solidFill>
-                  </a:tcPr>
-                </a:tc>
-                <a:tc>
-                  <a:txBody>
-                    <a:bodyPr/>
-                    <a:lstStyle/>
-                    <a:p>
-                      <a:r>
-                        <a:rPr sz="1250" b="0">
-                          <a:solidFill>
-                            <a:srgbClr val="212121"/>
-                          </a:solidFill>
-                          <a:latin typeface="Calibri"/>
-                        </a:rPr>
-                        <a:t>—</a:t>
-                      </a:r>
-                    </a:p>
-                  </a:txBody>
-                  <a:tcPr marL="73152" marR="54864" marT="27432" marB="27432" anchor="ctr">
-                    <a:solidFill>
-                      <a:srgbClr val="FFFFFF"/>
-                    </a:solidFill>
-                  </a:tcPr>
-                </a:tc>
-              </a:tr>
-            </a:tbl>
-          </a:graphicData>
-        </a:graphic>
-      </p:graphicFrame>
+                  <a:srgbClr val="990011"/>
+                </a:solidFill>
+                <a:latin typeface="Calibri"/>
+              </a:rPr>
+              <a:t>The failure mode</a:t>
+            </a:r>
+          </a:p>
+        </p:txBody>
+      </p:sp>
+      <p:pic>
+        <p:nvPicPr>
+          <p:cNvPr id="3" name="Picture 2" descr="fig13_sim_energy.png"/>
+          <p:cNvPicPr>
+            <a:picLocks noChangeAspect="1"/>
+          </p:cNvPicPr>
+          <p:nvPr/>
+        </p:nvPicPr>
+        <p:blipFill>
+          <a:blip r:embed="rId2"/>
+          <a:stretch>
+            <a:fillRect/>
+          </a:stretch>
+        </p:blipFill>
+        <p:spPr>
+          <a:xfrm>
+            <a:off x="502920" y="1280777"/>
+            <a:ext cx="6309360" cy="4433604"/>
+          </a:xfrm>
+          <a:prstGeom prst="rect">
+            <a:avLst/>
+          </a:prstGeom>
+        </p:spPr>
+      </p:pic>
       <p:sp>
         <p:nvSpPr>
           <p:cNvPr id="4" name="TextBox 3"/>
@@ -4184,8 +3525,8 @@
         </p:nvSpPr>
         <p:spPr>
           <a:xfrm>
-            <a:off x="640080" y="5285232"/>
-            <a:ext cx="10972800" cy="640080"/>
+            <a:off x="7132320" y="1371600"/>
+            <a:ext cx="5056631" cy="4343400"/>
           </a:xfrm>
           <a:prstGeom prst="rect">
             <a:avLst/>
@@ -4198,14 +3539,71 @@
           </a:bodyPr>
           <a:lstStyle/>
           <a:p>
-            <a:r>
-              <a:rPr sz="1300" b="0">
-                <a:solidFill>
-                  <a:srgbClr val="6E7B85"/>
-                </a:solidFill>
-                <a:latin typeface="Calibri"/>
-              </a:rPr>
-              <a:t>Robust across every variant: growth-exponential and sinh forms always lose. Exhaustive-search knee: exp(−c/x) on weighted targets; cubic/quartic in 12 of 12 unweighted replicates.</a:t>
+            <a:pPr marL="228600" indent="-228600">
+              <a:spcAft>
+                <a:spcPts val="800"/>
+              </a:spcAft>
+              <a:buChar char="•"/>
+            </a:pPr>
+            <a:r>
+              <a:rPr sz="1400" b="0">
+                <a:solidFill>
+                  <a:srgbClr val="212121"/>
+                </a:solidFill>
+                <a:latin typeface="Calibri"/>
+              </a:rPr>
+              <a:t>The energy coordinate: good early, too convergent late</a:t>
+            </a:r>
+          </a:p>
+          <a:p>
+            <a:pPr marL="228600" indent="-228600">
+              <a:spcAft>
+                <a:spcPts val="800"/>
+              </a:spcAft>
+              <a:buChar char="•"/>
+            </a:pPr>
+            <a:r>
+              <a:rPr sz="1400" b="0">
+                <a:solidFill>
+                  <a:srgbClr val="212121"/>
+                </a:solidFill>
+                <a:latin typeface="Calibri"/>
+              </a:rPr>
+              <a:t>Preparations keep a 24% spread in mean u at γ = 0.5; the simulation keeps 4%</a:t>
+            </a:r>
+          </a:p>
+          <a:p>
+            <a:pPr marL="228600" indent="-228600">
+              <a:spcAft>
+                <a:spcPts val="800"/>
+              </a:spcAft>
+              <a:buChar char="•"/>
+            </a:pPr>
+            <a:r>
+              <a:rPr sz="1400" b="0">
+                <a:solidFill>
+                  <a:srgbClr val="212121"/>
+                </a:solidFill>
+                <a:latin typeface="Calibri"/>
+              </a:rPr>
+              <a:t>The fields are preparation-blind by construction (one map for all histories) — so this is the missing state variable of the first pass, seen macroscopically</a:t>
+            </a:r>
+          </a:p>
+          <a:p>
+            <a:pPr marL="228600" indent="-228600">
+              <a:spcAft>
+                <a:spcPts val="800"/>
+              </a:spcAft>
+              <a:buChar char="•"/>
+            </a:pPr>
+            <a:r>
+              <a:rPr sz="1400" b="0">
+                <a:solidFill>
+                  <a:srgbClr val="212121"/>
+                </a:solidFill>
+                <a:latin typeface="Calibri"/>
+              </a:rPr>
+              <a:t>Same message as the 1.71× ceiling memory: (u,τ) is not a sufficient state</a:t>
             </a:r>
           </a:p>
         </p:txBody>
@@ -4269,7 +3667,7 @@
                 </a:solidFill>
                 <a:latin typeface="Calibri"/>
               </a:rPr>
-              <a:t>The winner flips with extraction weighting and the u-zero — activated vs power law is undecidable at current systematics. The family (floor + stiff rise) is decided.</a:t>
+              <a:t>A five-times-too-small preparation spread: the one place the two-variable model fails, and the question the rest of the deck answers.</a:t>
             </a:r>
           </a:p>
         </p:txBody>
@@ -4321,14 +3719,14 @@
                 </a:solidFill>
                 <a:latin typeface="Calibri"/>
               </a:rPr>
-              <a:t>Scrutiny results</a:t>
+              <a:t>Where the preparation memory lives</a:t>
             </a:r>
           </a:p>
         </p:txBody>
       </p:sp>
       <p:pic>
         <p:nvPicPr>
-          <p:cNvPr id="3" name="Picture 2" descr="sc_a.png"/>
+          <p:cNvPr id="3" name="Picture 2" descr="fig16_memory_channels.png"/>
           <p:cNvPicPr>
             <a:picLocks noChangeAspect="1"/>
           </p:cNvPicPr>
@@ -4342,48 +3740,24 @@
         </p:blipFill>
         <p:spPr>
           <a:xfrm>
-            <a:off x="502920" y="1188720"/>
-            <a:ext cx="5577840" cy="3858768"/>
+            <a:off x="502920" y="1256096"/>
+            <a:ext cx="6309360" cy="4482966"/>
           </a:xfrm>
           <a:prstGeom prst="rect">
             <a:avLst/>
           </a:prstGeom>
         </p:spPr>
       </p:pic>
-      <p:pic>
-        <p:nvPicPr>
-          <p:cNvPr id="4" name="Picture 3" descr="sc_c.png"/>
-          <p:cNvPicPr>
-            <a:picLocks noChangeAspect="1"/>
-          </p:cNvPicPr>
-          <p:nvPr/>
-        </p:nvPicPr>
-        <p:blipFill>
-          <a:blip r:embed="rId3"/>
-          <a:stretch>
-            <a:fillRect/>
-          </a:stretch>
-        </p:blipFill>
-        <p:spPr>
-          <a:xfrm>
-            <a:off x="6172200" y="1188720"/>
-            <a:ext cx="5577840" cy="3858768"/>
-          </a:xfrm>
-          <a:prstGeom prst="rect">
-            <a:avLst/>
-          </a:prstGeom>
-        </p:spPr>
-      </p:pic>
-      <p:sp>
-        <p:nvSpPr>
-          <p:cNvPr id="5" name="TextBox 4"/>
+      <p:sp>
+        <p:nvSpPr>
+          <p:cNvPr id="4" name="TextBox 3"/>
           <p:cNvSpPr txBox="1"/>
           <p:nvPr/>
         </p:nvSpPr>
         <p:spPr>
           <a:xfrm>
-            <a:off x="640080" y="5257800"/>
-            <a:ext cx="10972800" cy="640080"/>
+            <a:off x="7132320" y="1371600"/>
+            <a:ext cx="5056631" cy="4343400"/>
           </a:xfrm>
           <a:prstGeom prst="rect">
             <a:avLst/>
@@ -4396,21 +3770,95 @@
           </a:bodyPr>
           <a:lstStyle/>
           <a:p>
-            <a:r>
-              <a:rPr sz="1350" b="0">
-                <a:solidFill>
-                  <a:srgbClr val="212121"/>
-                </a:solidFill>
-                <a:latin typeface="Calibri"/>
-              </a:rPr>
-              <a:t>Left: the same measured Λ supports c = 1.79 (activated) or n = 3.3 (power) depending on extraction.  Right: fitted barriers drift with preparation far outside statistical error (±25% of c).</a:t>
-            </a:r>
-          </a:p>
-        </p:txBody>
-      </p:sp>
-      <p:sp>
-        <p:nvSpPr>
-          <p:cNvPr id="6" name="Rounded Rectangle 5"/>
+            <a:pPr marL="228600" indent="-228600">
+              <a:spcAft>
+                <a:spcPts val="800"/>
+              </a:spcAft>
+              <a:buChar char="•"/>
+            </a:pPr>
+            <a:r>
+              <a:rPr sz="1250" b="0">
+                <a:solidFill>
+                  <a:srgbClr val="212121"/>
+                </a:solidFill>
+                <a:latin typeface="Calibri"/>
+              </a:rPr>
+              <a:t>Every channel re-measured per cooling rate at fixed cell; slope β on ln(rate) with cell fixed effects; a parity-split control gives the null</a:t>
+            </a:r>
+          </a:p>
+          <a:p>
+            <a:pPr marL="228600" indent="-228600">
+              <a:spcAft>
+                <a:spcPts val="800"/>
+              </a:spcAft>
+              <a:buChar char="•"/>
+            </a:pPr>
+            <a:r>
+              <a:rPr sz="1250" b="0">
+                <a:solidFill>
+                  <a:srgbClr val="212121"/>
+                </a:solidFill>
+                <a:latin typeface="Calibri"/>
+              </a:rPr>
+              <a:t>Event hazard: preparation-blind (β = −0.012 ± 0.002; ratio 1.005, control 1.02). Elastic drift: identical.</a:t>
+            </a:r>
+          </a:p>
+          <a:p>
+            <a:pPr marL="228600" indent="-228600">
+              <a:spcAft>
+                <a:spcPts val="800"/>
+              </a:spcAft>
+              <a:buChar char="•"/>
+            </a:pPr>
+            <a:r>
+              <a:rPr sz="1250" b="0">
+                <a:solidFill>
+                  <a:srgbClr val="212121"/>
+                </a:solidFill>
+                <a:latin typeface="Calibri"/>
+              </a:rPr>
+              <a:t>Mean event size: 1.70× (β = −0.117 ± 0.005) — the ceiling memory, measured another way; it lives in the tail (geometric mean moves only 1.20×)</a:t>
+            </a:r>
+          </a:p>
+          <a:p>
+            <a:pPr marL="228600" indent="-228600">
+              <a:spcAft>
+                <a:spcPts val="800"/>
+              </a:spcAft>
+              <a:buChar char="•"/>
+            </a:pPr>
+            <a:r>
+              <a:rPr sz="1250" b="0">
+                <a:solidFill>
+                  <a:srgbClr val="212121"/>
+                </a:solidFill>
+                <a:latin typeface="Calibri"/>
+              </a:rPr>
+              <a:t>A slow-cooled glass is triggered as often; its avalanches run further</a:t>
+            </a:r>
+          </a:p>
+          <a:p>
+            <a:pPr marL="228600" indent="-228600">
+              <a:spcAft>
+                <a:spcPts val="800"/>
+              </a:spcAft>
+              <a:buChar char="•"/>
+            </a:pPr>
+            <a:r>
+              <a:rPr sz="1250" b="0">
+                <a:solidFill>
+                  <a:srgbClr val="212121"/>
+                </a:solidFill>
+                <a:latin typeface="Calibri"/>
+              </a:rPr>
+              <a:t>73% of the per-event energy-release memory is size; 27% a secondary memory in the coupling</a:t>
+            </a:r>
+          </a:p>
+        </p:txBody>
+      </p:sp>
+      <p:sp>
+        <p:nvSpPr>
+          <p:cNvPr id="5" name="Rounded Rectangle 4"/>
           <p:cNvSpPr/>
           <p:nvPr/>
         </p:nvSpPr>
@@ -4467,7 +3915,7 @@
                 </a:solidFill>
                 <a:latin typeface="Calibri"/>
               </a:rPr>
-              <a:t>No preparation-independent formation energy at two variables — the state-insufficiency result, seen through the STZ lens.</a:t>
+              <a:t>Memory acts through event size, not event rate — against the simplest one-variable STZ reading, where preparation enters through the STZ density.</a:t>
             </a:r>
           </a:p>
         </p:txBody>
@@ -4519,45 +3967,35 @@
                 </a:solidFill>
                 <a:latin typeface="Calibri"/>
               </a:rPr>
-              <a:t>Verdict on STZ-consistency</a:t>
-            </a:r>
-          </a:p>
-        </p:txBody>
-      </p:sp>
-      <p:sp>
-        <p:nvSpPr>
-          <p:cNvPr id="3" name="TextBox 2"/>
-          <p:cNvSpPr txBox="1"/>
-          <p:nvPr/>
-        </p:nvSpPr>
-        <p:spPr>
-          <a:xfrm>
-            <a:off x="640080" y="1234440"/>
-            <a:ext cx="3566160" cy="411480"/>
+              <a:t>A one-parameter memory in the ceiling repairs the failure</a:t>
+            </a:r>
+          </a:p>
+        </p:txBody>
+      </p:sp>
+      <p:pic>
+        <p:nvPicPr>
+          <p:cNvPr id="3" name="Picture 2" descr="fig17_memory_repair.png"/>
+          <p:cNvPicPr>
+            <a:picLocks noChangeAspect="1"/>
+          </p:cNvPicPr>
+          <p:nvPr/>
+        </p:nvPicPr>
+        <p:blipFill>
+          <a:blip r:embed="rId2"/>
+          <a:stretch>
+            <a:fillRect/>
+          </a:stretch>
+        </p:blipFill>
+        <p:spPr>
+          <a:xfrm>
+            <a:off x="1437322" y="1188719"/>
+            <a:ext cx="9286875" cy="3566160"/>
           </a:xfrm>
           <a:prstGeom prst="rect">
             <a:avLst/>
           </a:prstGeom>
-          <a:noFill/>
-        </p:spPr>
-        <p:txBody>
-          <a:bodyPr wrap="square" lIns="0" rIns="0" tIns="0" bIns="0">
-            <a:spAutoFit/>
-          </a:bodyPr>
-          <a:lstStyle/>
-          <a:p>
-            <a:r>
-              <a:rPr sz="1700" b="1">
-                <a:solidFill>
-                  <a:srgbClr val="1E2761"/>
-                </a:solidFill>
-                <a:latin typeface="Calibri"/>
-              </a:rPr>
-              <a:t>SUPPORTED</a:t>
-            </a:r>
-          </a:p>
-        </p:txBody>
-      </p:sp>
+        </p:spPr>
+      </p:pic>
       <p:sp>
         <p:nvSpPr>
           <p:cNvPr id="4" name="TextBox 3"/>
@@ -4566,8 +4004,8 @@
         </p:nvSpPr>
         <p:spPr>
           <a:xfrm>
-            <a:off x="640080" y="1737360"/>
-            <a:ext cx="3566160" cy="4023360"/>
+            <a:off x="640080" y="4864608"/>
+            <a:ext cx="10972800" cy="1078991"/>
           </a:xfrm>
           <a:prstGeom prst="rect">
             <a:avLst/>
@@ -4587,13 +4025,13 @@
               <a:buChar char="•"/>
             </a:pPr>
             <a:r>
-              <a:rPr sz="1350" b="0">
-                <a:solidFill>
-                  <a:srgbClr val="212121"/>
-                </a:solidFill>
-                <a:latin typeface="Calibri"/>
-              </a:rPr>
-              <a:t>Effective-temperature phenomenology (preparation-ordered overshoot; relaxation toward a shared band)</a:t>
+              <a:rPr sz="1250" b="0">
+                <a:solidFill>
+                  <a:srgbClr val="212121"/>
+                </a:solidFill>
+                <a:latin typeface="Calibri"/>
+              </a:rPr>
+              <a:t>Single change: s_c(u,τ; rate) = s_c(u,τ)·(rate/rate_mid)^β with the one global β = −0.117; hazard, drift, aging untouched</a:t>
             </a:r>
           </a:p>
           <a:p>
@@ -4604,13 +4042,13 @@
               <a:buChar char="•"/>
             </a:pPr>
             <a:r>
-              <a:rPr sz="1350" b="0">
-                <a:solidFill>
-                  <a:srgbClr val="212121"/>
-                </a:solidFill>
-                <a:latin typeface="Calibri"/>
-              </a:rPr>
-              <a:t>Factorized structure q = Λ(u)·f(τ)</a:t>
+              <a:rPr sz="1250" b="0">
+                <a:solidFill>
+                  <a:srgbClr val="212121"/>
+                </a:solidFill>
+                <a:latin typeface="Calibri"/>
+              </a:rPr>
+              <a:t>Spread of mean u at γ = 0.5: 4.1% → 26.5% against 24% in the data; the curve tracks the data over the whole strain window; yield peaks unchanged (2.5% → 2.8%)</a:t>
             </a:r>
           </a:p>
           <a:p>
@@ -4621,270 +4059,20 @@
               <a:buChar char="•"/>
             </a:pPr>
             <a:r>
-              <a:rPr sz="1350" b="0">
-                <a:solidFill>
-                  <a:srgbClr val="212121"/>
-                </a:solidFill>
-                <a:latin typeface="Calibri"/>
-              </a:rPr>
-              <a:t>Activated Λ is one of the two surviving forms — best on the weighted pipeline</a:t>
-            </a:r>
-          </a:p>
-          <a:p>
-            <a:pPr marL="228600" indent="-228600">
-              <a:spcAft>
-                <a:spcPts val="800"/>
-              </a:spcAft>
-              <a:buChar char="•"/>
-            </a:pPr>
-            <a:r>
-              <a:rPr sz="1350" b="0">
-                <a:solidFill>
-                  <a:srgbClr val="212121"/>
-                </a:solidFill>
-                <a:latin typeface="Calibri"/>
-              </a:rPr>
-              <a:t>If activated: e_Z ≈ 0.056–0.059 per-atom PE units</a:t>
-            </a:r>
-          </a:p>
-        </p:txBody>
-      </p:sp>
-      <p:sp>
-        <p:nvSpPr>
-          <p:cNvPr id="5" name="TextBox 4"/>
-          <p:cNvSpPr txBox="1"/>
-          <p:nvPr/>
-        </p:nvSpPr>
-        <p:spPr>
-          <a:xfrm>
-            <a:off x="4434840" y="1234440"/>
-            <a:ext cx="3566160" cy="411480"/>
-          </a:xfrm>
-          <a:prstGeom prst="rect">
-            <a:avLst/>
-          </a:prstGeom>
-          <a:noFill/>
-        </p:spPr>
-        <p:txBody>
-          <a:bodyPr wrap="square" lIns="0" rIns="0" tIns="0" bIns="0">
-            <a:spAutoFit/>
-          </a:bodyPr>
-          <a:lstStyle/>
-          <a:p>
-            <a:r>
-              <a:rPr sz="1700" b="1">
-                <a:solidFill>
-                  <a:srgbClr val="6E7B85"/>
-                </a:solidFill>
-                <a:latin typeface="Calibri"/>
-              </a:rPr>
-              <a:t>NOT ESTABLISHED</a:t>
-            </a:r>
-          </a:p>
-        </p:txBody>
-      </p:sp>
-      <p:sp>
-        <p:nvSpPr>
-          <p:cNvPr id="6" name="TextBox 5"/>
-          <p:cNvSpPr txBox="1"/>
-          <p:nvPr/>
-        </p:nvSpPr>
-        <p:spPr>
-          <a:xfrm>
-            <a:off x="4434840" y="1737360"/>
-            <a:ext cx="3566160" cy="4023360"/>
-          </a:xfrm>
-          <a:prstGeom prst="rect">
-            <a:avLst/>
-          </a:prstGeom>
-          <a:noFill/>
-        </p:spPr>
-        <p:txBody>
-          <a:bodyPr wrap="square" lIns="0" rIns="0" tIns="0" bIns="0">
-            <a:spAutoFit/>
-          </a:bodyPr>
-          <a:lstStyle/>
-          <a:p>
-            <a:pPr marL="228600" indent="-228600">
-              <a:spcAft>
-                <a:spcPts val="800"/>
-              </a:spcAft>
-              <a:buChar char="•"/>
-            </a:pPr>
-            <a:r>
-              <a:rPr sz="1350" b="0">
-                <a:solidFill>
-                  <a:srgbClr val="212121"/>
-                </a:solidFill>
-                <a:latin typeface="Calibri"/>
-              </a:rPr>
-              <a:t>The Boltzmann form uniquely (degenerate with a power law; u₀ not independently known)</a:t>
-            </a:r>
-          </a:p>
-          <a:p>
-            <a:pPr marL="228600" indent="-228600">
-              <a:spcAft>
-                <a:spcPts val="800"/>
-              </a:spcAft>
-              <a:buChar char="•"/>
-            </a:pPr>
-            <a:r>
-              <a:rPr sz="1350" b="0">
-                <a:solidFill>
-                  <a:srgbClr val="212121"/>
-                </a:solidFill>
-                <a:latin typeface="Calibri"/>
-              </a:rPr>
-              <a:t>A preparation-independent formation energy</a:t>
-            </a:r>
-          </a:p>
-          <a:p>
-            <a:pPr marL="228600" indent="-228600">
-              <a:spcAft>
-                <a:spcPts val="800"/>
-              </a:spcAft>
-              <a:buChar char="•"/>
-            </a:pPr>
-            <a:r>
-              <a:rPr sz="1350" b="0">
-                <a:solidFill>
-                  <a:srgbClr val="212121"/>
-                </a:solidFill>
-                <a:latin typeface="Calibri"/>
-              </a:rPr>
-              <a:t>A common steady-state attractor — extrapolated u∞ / τ∞ retain 10% / 8.5% spreads (slide 4)</a:t>
-            </a:r>
-          </a:p>
-          <a:p>
-            <a:pPr marL="228600" indent="-228600">
-              <a:spcAft>
-                <a:spcPts val="800"/>
-              </a:spcAft>
-              <a:buChar char="•"/>
-            </a:pPr>
-            <a:r>
-              <a:rPr sz="1350" b="0">
-                <a:solidFill>
-                  <a:srgbClr val="212121"/>
-                </a:solidFill>
-                <a:latin typeface="Calibri"/>
-              </a:rPr>
-              <a:t>A canonical STZ stress factor (no evidence for a stress threshold: x₀ → 0)</a:t>
-            </a:r>
-          </a:p>
-        </p:txBody>
-      </p:sp>
-      <p:sp>
-        <p:nvSpPr>
-          <p:cNvPr id="7" name="TextBox 6"/>
-          <p:cNvSpPr txBox="1"/>
-          <p:nvPr/>
-        </p:nvSpPr>
-        <p:spPr>
-          <a:xfrm>
-            <a:off x="8229600" y="1234440"/>
-            <a:ext cx="3566160" cy="411480"/>
-          </a:xfrm>
-          <a:prstGeom prst="rect">
-            <a:avLst/>
-          </a:prstGeom>
-          <a:noFill/>
-        </p:spPr>
-        <p:txBody>
-          <a:bodyPr wrap="square" lIns="0" rIns="0" tIns="0" bIns="0">
-            <a:spAutoFit/>
-          </a:bodyPr>
-          <a:lstStyle/>
-          <a:p>
-            <a:r>
-              <a:rPr sz="1700" b="1">
-                <a:solidFill>
-                  <a:srgbClr val="990011"/>
-                </a:solidFill>
-                <a:latin typeface="Calibri"/>
-              </a:rPr>
-              <a:t>CONTRADICTED</a:t>
-            </a:r>
-          </a:p>
-        </p:txBody>
-      </p:sp>
-      <p:sp>
-        <p:nvSpPr>
-          <p:cNvPr id="8" name="TextBox 7"/>
-          <p:cNvSpPr txBox="1"/>
-          <p:nvPr/>
-        </p:nvSpPr>
-        <p:spPr>
-          <a:xfrm>
-            <a:off x="8229600" y="1737360"/>
-            <a:ext cx="3566160" cy="4023360"/>
-          </a:xfrm>
-          <a:prstGeom prst="rect">
-            <a:avLst/>
-          </a:prstGeom>
-          <a:noFill/>
-        </p:spPr>
-        <p:txBody>
-          <a:bodyPr wrap="square" lIns="0" rIns="0" tIns="0" bIns="0">
-            <a:spAutoFit/>
-          </a:bodyPr>
-          <a:lstStyle/>
-          <a:p>
-            <a:pPr marL="228600" indent="-228600">
-              <a:spcAft>
-                <a:spcPts val="800"/>
-              </a:spcAft>
-              <a:buChar char="•"/>
-            </a:pPr>
-            <a:r>
-              <a:rPr sz="1350" b="0">
-                <a:solidFill>
-                  <a:srgbClr val="212121"/>
-                </a:solidFill>
-                <a:latin typeface="Calibri"/>
-              </a:rPr>
-              <a:t>Sufficiency of any two-variable (χ, s) closure — violated at the 1.7× level</a:t>
-            </a:r>
-          </a:p>
-          <a:p>
-            <a:pPr marL="228600" indent="-228600">
-              <a:spcAft>
-                <a:spcPts val="800"/>
-              </a:spcAft>
-              <a:buChar char="•"/>
-            </a:pPr>
-            <a:r>
-              <a:rPr sz="1350" b="0">
-                <a:solidFill>
-                  <a:srgbClr val="212121"/>
-                </a:solidFill>
-                <a:latin typeface="Calibri"/>
-              </a:rPr>
-              <a:t>Constant barrier across preparations (±25% drift)</a:t>
-            </a:r>
-          </a:p>
-          <a:p>
-            <a:pPr marL="228600" indent="-228600">
-              <a:spcAft>
-                <a:spcPts val="800"/>
-              </a:spcAft>
-              <a:buChar char="•"/>
-            </a:pPr>
-            <a:r>
-              <a:rPr sz="1350" b="0">
-                <a:solidFill>
-                  <a:srgbClr val="212121"/>
-                </a:solidFill>
-                <a:latin typeface="Calibri"/>
-              </a:rPr>
-              <a:t>(Back-stress m untested: forward shear only — STZ’s own candidate for the missing variable)</a:t>
-            </a:r>
-          </a:p>
-        </p:txBody>
-      </p:sp>
-      <p:sp>
-        <p:nvSpPr>
-          <p:cNvPr id="9" name="Rounded Rectangle 8"/>
+              <a:rPr sz="1250" b="0">
+                <a:solidFill>
+                  <a:srgbClr val="212121"/>
+                </a:solidFill>
+                <a:latin typeface="Calibri"/>
+              </a:rPr>
+              <a:t>Refinements overshoot (β by u-band: 37%; per-preparation coupling: 35%); the simple statement is the defensible one</a:t>
+            </a:r>
+          </a:p>
+        </p:txBody>
+      </p:sp>
+      <p:sp>
+        <p:nvSpPr>
+          <p:cNvPr id="5" name="Rounded Rectangle 4"/>
           <p:cNvSpPr/>
           <p:nvPr/>
         </p:nvSpPr>
@@ -4941,7 +4129,7 @@
                 </a:solidFill>
                 <a:latin typeface="Calibri"/>
               </a:rPr>
-              <a:t>STZ’s structure survives; its strong claims don’t — at two state variables. The failure mode points at STZ’s own missing variable, m.</a:t>
+              <a:t>To the resolution of this dataset, the missing state variable is a single multiplicative factor on the ceiling.</a:t>
             </a:r>
           </a:p>
         </p:txBody>
@@ -4993,27 +4181,127 @@
                 </a:solidFill>
                 <a:latin typeface="Calibri"/>
               </a:rPr>
-              <a:t>Recommended next steps</a:t>
-            </a:r>
-          </a:p>
-        </p:txBody>
-      </p:sp>
-      <p:sp>
-        <p:nvSpPr>
-          <p:cNvPr id="3" name="Oval 2"/>
+              <a:t>The memory relaxes with strain</a:t>
+            </a:r>
+          </a:p>
+        </p:txBody>
+      </p:sp>
+      <p:pic>
+        <p:nvPicPr>
+          <p:cNvPr id="3" name="Picture 2" descr="fig19_memory_relaxes.png"/>
+          <p:cNvPicPr>
+            <a:picLocks noChangeAspect="1"/>
+          </p:cNvPicPr>
+          <p:nvPr/>
+        </p:nvPicPr>
+        <p:blipFill>
+          <a:blip r:embed="rId2"/>
+          <a:stretch>
+            <a:fillRect/>
+          </a:stretch>
+        </p:blipFill>
+        <p:spPr>
+          <a:xfrm>
+            <a:off x="1437322" y="1188719"/>
+            <a:ext cx="9286875" cy="3566160"/>
+          </a:xfrm>
+          <a:prstGeom prst="rect">
+            <a:avLst/>
+          </a:prstGeom>
+        </p:spPr>
+      </p:pic>
+      <p:sp>
+        <p:nvSpPr>
+          <p:cNvPr id="4" name="TextBox 3"/>
+          <p:cNvSpPr txBox="1"/>
+          <p:nvPr/>
+        </p:nvSpPr>
+        <p:spPr>
+          <a:xfrm>
+            <a:off x="640080" y="4864608"/>
+            <a:ext cx="10972800" cy="1078991"/>
+          </a:xfrm>
+          <a:prstGeom prst="rect">
+            <a:avLst/>
+          </a:prstGeom>
+          <a:noFill/>
+        </p:spPr>
+        <p:txBody>
+          <a:bodyPr wrap="square" lIns="0" rIns="0" tIns="0" bIns="0">
+            <a:spAutoFit/>
+          </a:bodyPr>
+          <a:lstStyle/>
+          <a:p>
+            <a:pPr marL="228600" indent="-228600">
+              <a:spcAft>
+                <a:spcPts val="800"/>
+              </a:spcAft>
+              <a:buChar char="•"/>
+            </a:pPr>
+            <a:r>
+              <a:rPr sz="1250" b="0">
+                <a:solidFill>
+                  <a:srgbClr val="212121"/>
+                </a:solidFill>
+                <a:latin typeface="Calibri"/>
+              </a:rPr>
+              <a:t>Nine-rate regression with a fixed effect per (cell, strain window): β = −0.21 → −0.11 → −0.05 → −0.04 from γ ≈ 0.15 to 0.45, and it falls within fixed u bands — relaxation, not state dependence; γ_r ≈ 0.18</a:t>
+            </a:r>
+          </a:p>
+          <a:p>
+            <a:pPr marL="228600" indent="-228600">
+              <a:spcAft>
+                <a:spcPts val="800"/>
+              </a:spcAft>
+              <a:buChar char="•"/>
+            </a:pPr>
+            <a:r>
+              <a:rPr sz="1250" b="0">
+                <a:solidFill>
+                  <a:srgbClr val="212121"/>
+                </a:solidFill>
+                <a:latin typeface="Calibri"/>
+              </a:rPr>
+              <a:t>Late strain: size memory 1.75× → 1.16×, hazard blind throughout; the energy-step memory only halves, a third of it in the coupling at fixed size</a:t>
+            </a:r>
+          </a:p>
+          <a:p>
+            <a:pPr marL="228600" indent="-228600">
+              <a:spcAft>
+                <a:spcPts val="800"/>
+              </a:spcAft>
+              <a:buChar char="•"/>
+            </a:pPr>
+            <a:r>
+              <a:rPr sz="1250" b="0">
+                <a:solidFill>
+                  <a:srgbClr val="212121"/>
+                </a:solidFill>
+                <a:latin typeface="Calibri"/>
+              </a:rPr>
+              <a:t>Whether that coupling memory also relaxes needs runs past γ = 0.5</a:t>
+            </a:r>
+          </a:p>
+        </p:txBody>
+      </p:sp>
+      <p:sp>
+        <p:nvSpPr>
+          <p:cNvPr id="5" name="Rounded Rectangle 4"/>
           <p:cNvSpPr/>
           <p:nvPr/>
         </p:nvSpPr>
         <p:spPr>
           <a:xfrm>
-            <a:off x="640080" y="1325880"/>
-            <a:ext cx="475488" cy="475488"/>
-          </a:xfrm>
-          <a:prstGeom prst="ellipse">
-            <a:avLst/>
+            <a:off x="548640" y="6053328"/>
+            <a:ext cx="11091672" cy="566928"/>
+          </a:xfrm>
+          <a:prstGeom prst="roundRect">
+            <a:avLst>
+              <a:gd name="adj" fmla="val 18000"/>
+            </a:avLst>
           </a:prstGeom>
           <a:solidFill>
-            <a:srgbClr val="1E2761"/>
+            <a:srgbClr val="F2F2F2"/>
           </a:solidFill>
           <a:ln>
             <a:noFill/>
@@ -5035,22 +4323,107 @@
           </a:fontRef>
         </p:style>
         <p:txBody>
-          <a:bodyPr rtlCol="0" anchor="ctr" lIns="0" rIns="0"/>
+          <a:bodyPr rtlCol="0" anchor="ctr" wrap="square" lIns="164592" rIns="164592" tIns="0" bIns="0"/>
           <a:lstStyle/>
           <a:p>
             <a:pPr algn="ctr"/>
             <a:r>
-              <a:rPr sz="2000" b="1">
-                <a:solidFill>
-                  <a:srgbClr val="FFFFFF"/>
-                </a:solidFill>
-                <a:latin typeface="Calibri"/>
-              </a:rPr>
-              <a:t>1</a:t>
-            </a:r>
-          </a:p>
-        </p:txBody>
-      </p:sp>
+              <a:rPr sz="1350" b="1">
+                <a:solidFill>
+                  <a:srgbClr val="1E2761"/>
+                </a:solidFill>
+                <a:latin typeface="Calibri"/>
+              </a:rPr>
+              <a:t>Takeaway — </a:t>
+            </a:r>
+            <a:r>
+              <a:rPr sz="1350" b="0">
+                <a:solidFill>
+                  <a:srgbClr val="212121"/>
+                </a:solidFill>
+                <a:latin typeface="Calibri"/>
+              </a:rPr>
+              <a:t>The third variable is not a frozen label: plastic strain erases it on a scale of a few tenths — now measured, not assumed.</a:t>
+            </a:r>
+          </a:p>
+        </p:txBody>
+      </p:sp>
+    </p:spTree>
+  </p:cSld>
+  <p:clrMapOvr>
+    <a:masterClrMapping/>
+  </p:clrMapOvr>
+</p:sld>
+</file>
+
+<file path=ppt/slides/slide15.xml><?xml version="1.0" encoding="utf-8"?>
+<p:sld xmlns:a="http://schemas.openxmlformats.org/drawingml/2006/main" xmlns:p="http://schemas.openxmlformats.org/presentationml/2006/main" xmlns:r="http://schemas.openxmlformats.org/officeDocument/2006/relationships">
+  <p:cSld>
+    <p:spTree>
+      <p:nvGrpSpPr>
+        <p:cNvPr id="1" name=""/>
+        <p:cNvGrpSpPr/>
+        <p:nvPr/>
+      </p:nvGrpSpPr>
+      <p:grpSpPr/>
+      <p:sp>
+        <p:nvSpPr>
+          <p:cNvPr id="2" name="TextBox 1"/>
+          <p:cNvSpPr txBox="1"/>
+          <p:nvPr/>
+        </p:nvSpPr>
+        <p:spPr>
+          <a:xfrm>
+            <a:off x="548640" y="292608"/>
+            <a:ext cx="11091672" cy="685800"/>
+          </a:xfrm>
+          <a:prstGeom prst="rect">
+            <a:avLst/>
+          </a:prstGeom>
+          <a:noFill/>
+        </p:spPr>
+        <p:txBody>
+          <a:bodyPr wrap="square" lIns="0" rIns="0" tIns="0" bIns="0">
+            <a:spAutoFit/>
+          </a:bodyPr>
+          <a:lstStyle/>
+          <a:p>
+            <a:r>
+              <a:rPr sz="3000" b="1">
+                <a:solidFill>
+                  <a:srgbClr val="1E2761"/>
+                </a:solidFill>
+                <a:latin typeface="Calibri"/>
+              </a:rPr>
+              <a:t>The slow variable, one trajectory at a time</a:t>
+            </a:r>
+          </a:p>
+        </p:txBody>
+      </p:sp>
+      <p:pic>
+        <p:nvPicPr>
+          <p:cNvPr id="3" name="Picture 2" descr="fig22_persample.png"/>
+          <p:cNvPicPr>
+            <a:picLocks noChangeAspect="1"/>
+          </p:cNvPicPr>
+          <p:nvPr/>
+        </p:nvPicPr>
+        <p:blipFill>
+          <a:blip r:embed="rId2"/>
+          <a:stretch>
+            <a:fillRect/>
+          </a:stretch>
+        </p:blipFill>
+        <p:spPr>
+          <a:xfrm>
+            <a:off x="502920" y="1366039"/>
+            <a:ext cx="6309360" cy="4263081"/>
+          </a:xfrm>
+          <a:prstGeom prst="rect">
+            <a:avLst/>
+          </a:prstGeom>
+        </p:spPr>
+      </p:pic>
       <p:sp>
         <p:nvSpPr>
           <p:cNvPr id="4" name="TextBox 3"/>
@@ -5059,8 +4432,8 @@
         </p:nvSpPr>
         <p:spPr>
           <a:xfrm>
-            <a:off x="1371600" y="1280160"/>
-            <a:ext cx="10241280" cy="777240"/>
+            <a:off x="7132320" y="1371600"/>
+            <a:ext cx="5056631" cy="4343400"/>
           </a:xfrm>
           <a:prstGeom prst="rect">
             <a:avLst/>
@@ -5068,48 +4441,98 @@
           <a:noFill/>
         </p:spPr>
         <p:txBody>
-          <a:bodyPr wrap="square" lIns="0" rIns="0" tIns="0" bIns="0" anchor="ctr">
+          <a:bodyPr wrap="square" lIns="0" rIns="0" tIns="0" bIns="0">
             <a:spAutoFit/>
           </a:bodyPr>
           <a:lstStyle/>
           <a:p>
-            <a:r>
-              <a:rPr sz="1500" b="1">
-                <a:solidFill>
-                  <a:srgbClr val="212121"/>
-                </a:solidFill>
-                <a:latin typeface="Calibri"/>
-              </a:rPr>
-              <a:t>Measure u₀ independently — </a:t>
-            </a:r>
-            <a:r>
-              <a:rPr sz="1500" b="0">
-                <a:solidFill>
-                  <a:srgbClr val="212121"/>
-                </a:solidFill>
-                <a:latin typeface="Calibri"/>
-              </a:rPr>
-              <a:t>reference / inherent-structure energy; this alone breaks the activated-vs-power degeneracy in Λ</a:t>
-            </a:r>
-          </a:p>
-        </p:txBody>
-      </p:sp>
-      <p:sp>
-        <p:nvSpPr>
-          <p:cNvPr id="5" name="Oval 4"/>
+            <a:pPr marL="228600" indent="-228600">
+              <a:spcAft>
+                <a:spcPts val="800"/>
+              </a:spcAft>
+              <a:buChar char="•"/>
+            </a:pPr>
+            <a:r>
+              <a:rPr sz="1350" b="0">
+                <a:solidFill>
+                  <a:srgbClr val="212121"/>
+                </a:solidFill>
+                <a:latin typeface="Calibri"/>
+              </a:rPr>
+              <a:t>Parameter-free prediction: apply the between-preparation relation within a preparation — each trajectory gets exp(κ·δu₀) with κ = β·d ln(rate)/du₀ = −43</a:t>
+            </a:r>
+          </a:p>
+          <a:p>
+            <a:pPr marL="228600" indent="-228600">
+              <a:spcAft>
+                <a:spcPts val="800"/>
+              </a:spcAft>
+              <a:buChar char="•"/>
+            </a:pPr>
+            <a:r>
+              <a:rPr sz="1350" b="0">
+                <a:solidFill>
+                  <a:srgbClr val="212121"/>
+                </a:solidFill>
+                <a:latin typeface="Calibri"/>
+              </a:rPr>
+              <a:t>Predicted persistence of a sample’s initial energy deviation: 0.44 / 0.27 / 0.22 / 0.17 at γ = 0.1 / 0.2 / 0.3 / 0.5</a:t>
+            </a:r>
+          </a:p>
+          <a:p>
+            <a:pPr marL="228600" indent="-228600">
+              <a:spcAft>
+                <a:spcPts val="800"/>
+              </a:spcAft>
+              <a:buChar char="•"/>
+            </a:pPr>
+            <a:r>
+              <a:rPr sz="1350" b="0">
+                <a:solidFill>
+                  <a:srgbClr val="212121"/>
+                </a:solidFill>
+                <a:latin typeface="Calibri"/>
+              </a:rPr>
+              <a:t>Data: 0.63 / 0.27 / 0.24 / 0.18.  Base model: 0.41 / 0.08 / 0.07 / 0.08.  Tripling κ overshoots.</a:t>
+            </a:r>
+          </a:p>
+          <a:p>
+            <a:pPr marL="228600" indent="-228600">
+              <a:spcAft>
+                <a:spcPts val="800"/>
+              </a:spcAft>
+              <a:buChar char="•"/>
+            </a:pPr>
+            <a:r>
+              <a:rPr sz="1350" b="0">
+                <a:solidFill>
+                  <a:srgbClr val="212121"/>
+                </a:solidFill>
+                <a:latin typeface="Calibri"/>
+              </a:rPr>
+              <a:t>Same variable, same strength, acting on individual samples</a:t>
+            </a:r>
+          </a:p>
+        </p:txBody>
+      </p:sp>
+      <p:sp>
+        <p:nvSpPr>
+          <p:cNvPr id="5" name="Rounded Rectangle 4"/>
           <p:cNvSpPr/>
           <p:nvPr/>
         </p:nvSpPr>
         <p:spPr>
           <a:xfrm>
-            <a:off x="640080" y="2194559"/>
-            <a:ext cx="475488" cy="475488"/>
-          </a:xfrm>
-          <a:prstGeom prst="ellipse">
-            <a:avLst/>
+            <a:off x="548640" y="6053328"/>
+            <a:ext cx="11091672" cy="566928"/>
+          </a:xfrm>
+          <a:prstGeom prst="roundRect">
+            <a:avLst>
+              <a:gd name="adj" fmla="val 18000"/>
+            </a:avLst>
           </a:prstGeom>
           <a:solidFill>
-            <a:srgbClr val="1E2761"/>
+            <a:srgbClr val="F2F2F2"/>
           </a:solidFill>
           <a:ln>
             <a:noFill/>
@@ -5131,32 +4554,59 @@
           </a:fontRef>
         </p:style>
         <p:txBody>
-          <a:bodyPr rtlCol="0" anchor="ctr" lIns="0" rIns="0"/>
+          <a:bodyPr rtlCol="0" anchor="ctr" wrap="square" lIns="164592" rIns="164592" tIns="0" bIns="0"/>
           <a:lstStyle/>
           <a:p>
             <a:pPr algn="ctr"/>
             <a:r>
-              <a:rPr sz="2000" b="1">
-                <a:solidFill>
-                  <a:srgbClr val="FFFFFF"/>
-                </a:solidFill>
-                <a:latin typeface="Calibri"/>
-              </a:rPr>
-              <a:t>2</a:t>
-            </a:r>
-          </a:p>
-        </p:txBody>
-      </p:sp>
-      <p:sp>
-        <p:nvSpPr>
-          <p:cNvPr id="6" name="TextBox 5"/>
+              <a:rPr sz="1350" b="1">
+                <a:solidFill>
+                  <a:srgbClr val="1E2761"/>
+                </a:solidFill>
+                <a:latin typeface="Calibri"/>
+              </a:rPr>
+              <a:t>Takeaway — </a:t>
+            </a:r>
+            <a:r>
+              <a:rPr sz="1350" b="0">
+                <a:solidFill>
+                  <a:srgbClr val="212121"/>
+                </a:solidFill>
+                <a:latin typeface="Calibri"/>
+              </a:rPr>
+              <a:t>A sample remembers its initial energy exactly as long as the preparation-level ceiling memory says it should.</a:t>
+            </a:r>
+          </a:p>
+        </p:txBody>
+      </p:sp>
+    </p:spTree>
+  </p:cSld>
+  <p:clrMapOvr>
+    <a:masterClrMapping/>
+  </p:clrMapOvr>
+</p:sld>
+</file>
+
+<file path=ppt/slides/slide16.xml><?xml version="1.0" encoding="utf-8"?>
+<p:sld xmlns:a="http://schemas.openxmlformats.org/drawingml/2006/main" xmlns:p="http://schemas.openxmlformats.org/presentationml/2006/main" xmlns:r="http://schemas.openxmlformats.org/officeDocument/2006/relationships">
+  <p:cSld>
+    <p:spTree>
+      <p:nvGrpSpPr>
+        <p:cNvPr id="1" name=""/>
+        <p:cNvGrpSpPr/>
+        <p:nvPr/>
+      </p:nvGrpSpPr>
+      <p:grpSpPr/>
+      <p:sp>
+        <p:nvSpPr>
+          <p:cNvPr id="2" name="TextBox 1"/>
           <p:cNvSpPr txBox="1"/>
           <p:nvPr/>
         </p:nvSpPr>
         <p:spPr>
           <a:xfrm>
-            <a:off x="1371600" y="2148839"/>
-            <a:ext cx="10241280" cy="777240"/>
+            <a:off x="548640" y="292608"/>
+            <a:ext cx="11091672" cy="685800"/>
           </a:xfrm>
           <a:prstGeom prst="rect">
             <a:avLst/>
@@ -5164,48 +4614,173 @@
           <a:noFill/>
         </p:spPr>
         <p:txBody>
-          <a:bodyPr wrap="square" lIns="0" rIns="0" tIns="0" bIns="0" anchor="ctr">
+          <a:bodyPr wrap="square" lIns="0" rIns="0" tIns="0" bIns="0">
             <a:spAutoFit/>
           </a:bodyPr>
           <a:lstStyle/>
           <a:p>
             <a:r>
-              <a:rPr sz="1500" b="1">
-                <a:solidFill>
-                  <a:srgbClr val="212121"/>
-                </a:solidFill>
-                <a:latin typeface="Calibri"/>
-              </a:rPr>
-              <a:t>Reverse-loading AQS from saved configurations — </a:t>
-            </a:r>
-            <a:r>
-              <a:rPr sz="1500" b="0">
-                <a:solidFill>
-                  <a:srgbClr val="212121"/>
-                </a:solidFill>
-                <a:latin typeface="Calibri"/>
-              </a:rPr>
-              <a:t>parity test for back-stress (STZ’s m); cheap relative to the original runs</a:t>
-            </a:r>
-          </a:p>
-        </p:txBody>
-      </p:sp>
-      <p:sp>
-        <p:nvSpPr>
-          <p:cNvPr id="7" name="Oval 6"/>
+              <a:rPr sz="3000" b="1">
+                <a:solidFill>
+                  <a:srgbClr val="1E2761"/>
+                </a:solidFill>
+                <a:latin typeface="Calibri"/>
+              </a:rPr>
+              <a:t>Is the ceiling just the largest event?</a:t>
+            </a:r>
+          </a:p>
+        </p:txBody>
+      </p:sp>
+      <p:pic>
+        <p:nvPicPr>
+          <p:cNvPr id="3" name="Picture 2" descr="fig18_ceiling_pinning.png"/>
+          <p:cNvPicPr>
+            <a:picLocks noChangeAspect="1"/>
+          </p:cNvPicPr>
+          <p:nvPr/>
+        </p:nvPicPr>
+        <p:blipFill>
+          <a:blip r:embed="rId2"/>
+          <a:stretch>
+            <a:fillRect/>
+          </a:stretch>
+        </p:blipFill>
+        <p:spPr>
+          <a:xfrm>
+            <a:off x="723900" y="1234440"/>
+            <a:ext cx="5867400" cy="4526280"/>
+          </a:xfrm>
+          <a:prstGeom prst="rect">
+            <a:avLst/>
+          </a:prstGeom>
+        </p:spPr>
+      </p:pic>
+      <p:sp>
+        <p:nvSpPr>
+          <p:cNvPr id="4" name="TextBox 3"/>
+          <p:cNvSpPr txBox="1"/>
+          <p:nvPr/>
+        </p:nvSpPr>
+        <p:spPr>
+          <a:xfrm>
+            <a:off x="7132320" y="1371600"/>
+            <a:ext cx="5056631" cy="4343400"/>
+          </a:xfrm>
+          <a:prstGeom prst="rect">
+            <a:avLst/>
+          </a:prstGeom>
+          <a:noFill/>
+        </p:spPr>
+        <p:txBody>
+          <a:bodyPr wrap="square" lIns="0" rIns="0" tIns="0" bIns="0">
+            <a:spAutoFit/>
+          </a:bodyPr>
+          <a:lstStyle/>
+          <a:p>
+            <a:pPr marL="228600" indent="-228600">
+              <a:spcAft>
+                <a:spcPts val="800"/>
+              </a:spcAft>
+              <a:buChar char="•"/>
+            </a:pPr>
+            <a:r>
+              <a:rPr sz="1300" b="0">
+                <a:solidFill>
+                  <a:srgbClr val="212121"/>
+                </a:solidFill>
+                <a:latin typeface="Calibri"/>
+              </a:rPr>
+              <a:t>Refit with the top 1, 5, or 1% of events removed: s_c tracks the new maximum almost one-for-one (red)</a:t>
+            </a:r>
+          </a:p>
+          <a:p>
+            <a:pPr marL="228600" indent="-228600">
+              <a:spcAft>
+                <a:spcPts val="800"/>
+              </a:spcAft>
+              <a:buChar char="•"/>
+            </a:pPr>
+            <a:r>
+              <a:rPr sz="1300" b="0">
+                <a:solidFill>
+                  <a:srgbClr val="212121"/>
+                </a:solidFill>
+                <a:latin typeface="Calibri"/>
+              </a:rPr>
+              <a:t>So does a true ceiling with m ≈ 2 at n ≈ 5,000 (green synthetics: c/s_max 1.02–1.12)</a:t>
+            </a:r>
+          </a:p>
+          <a:p>
+            <a:pPr marL="228600" indent="-228600">
+              <a:spcAft>
+                <a:spcPts val="800"/>
+              </a:spcAft>
+              <a:buChar char="•"/>
+            </a:pPr>
+            <a:r>
+              <a:rPr sz="1300" b="0">
+                <a:solidFill>
+                  <a:srgbClr val="212121"/>
+                </a:solidFill>
+                <a:latin typeface="Calibri"/>
+              </a:rPr>
+              <a:t>A true TPL under the same fit runs off to 3–350× the maximum and collapses on refit (blue)</a:t>
+            </a:r>
+          </a:p>
+          <a:p>
+            <a:pPr marL="228600" indent="-228600">
+              <a:spcAft>
+                <a:spcPts val="800"/>
+              </a:spcAft>
+              <a:buChar char="•"/>
+            </a:pPr>
+            <a:r>
+              <a:rPr sz="1300" b="0">
+                <a:solidFill>
+                  <a:srgbClr val="212121"/>
+                </a:solidFill>
+                <a:latin typeface="Calibri"/>
+              </a:rPr>
+              <a:t>Merging consecutive drop steps into single avalanches (187k → 172k): the ceiling law wins by more (ΔAIC 117–213), s_c moves &lt; 2%, k shifts +0.05</a:t>
+            </a:r>
+          </a:p>
+          <a:p>
+            <a:pPr marL="228600" indent="-228600">
+              <a:spcAft>
+                <a:spcPts val="800"/>
+              </a:spcAft>
+              <a:buChar char="•"/>
+            </a:pPr>
+            <a:r>
+              <a:rPr sz="1300" b="0">
+                <a:solidFill>
+                  <a:srgbClr val="212121"/>
+                </a:solidFill>
+                <a:latin typeface="Calibri"/>
+              </a:rPr>
+              <a:t>s_c in a cell is set by its ~10 largest events: the 6.5% bootstrap error is a floor</a:t>
+            </a:r>
+          </a:p>
+        </p:txBody>
+      </p:sp>
+      <p:sp>
+        <p:nvSpPr>
+          <p:cNvPr id="5" name="Rounded Rectangle 4"/>
           <p:cNvSpPr/>
           <p:nvPr/>
         </p:nvSpPr>
         <p:spPr>
           <a:xfrm>
-            <a:off x="640080" y="3063239"/>
-            <a:ext cx="475488" cy="475488"/>
-          </a:xfrm>
-          <a:prstGeom prst="ellipse">
-            <a:avLst/>
+            <a:off x="548640" y="6053328"/>
+            <a:ext cx="11091672" cy="566928"/>
+          </a:xfrm>
+          <a:prstGeom prst="roundRect">
+            <a:avLst>
+              <a:gd name="adj" fmla="val 18000"/>
+            </a:avLst>
           </a:prstGeom>
           <a:solidFill>
-            <a:srgbClr val="1E2761"/>
+            <a:srgbClr val="F2F2F2"/>
           </a:solidFill>
           <a:ln>
             <a:noFill/>
@@ -5227,32 +4802,59 @@
           </a:fontRef>
         </p:style>
         <p:txBody>
-          <a:bodyPr rtlCol="0" anchor="ctr" lIns="0" rIns="0"/>
+          <a:bodyPr rtlCol="0" anchor="ctr" wrap="square" lIns="164592" rIns="164592" tIns="0" bIns="0"/>
           <a:lstStyle/>
           <a:p>
             <a:pPr algn="ctr"/>
             <a:r>
-              <a:rPr sz="2000" b="1">
-                <a:solidFill>
-                  <a:srgbClr val="FFFFFF"/>
-                </a:solidFill>
-                <a:latin typeface="Calibri"/>
-              </a:rPr>
-              <a:t>3</a:t>
-            </a:r>
-          </a:p>
-        </p:txBody>
-      </p:sp>
-      <p:sp>
-        <p:nvSpPr>
-          <p:cNvPr id="8" name="TextBox 7"/>
+              <a:rPr sz="1350" b="1">
+                <a:solidFill>
+                  <a:srgbClr val="1E2761"/>
+                </a:solidFill>
+                <a:latin typeface="Calibri"/>
+              </a:rPr>
+              <a:t>Takeaway — </a:t>
+            </a:r>
+            <a:r>
+              <a:rPr sz="1350" b="0">
+                <a:solidFill>
+                  <a:srgbClr val="212121"/>
+                </a:solidFill>
+                <a:latin typeface="Calibri"/>
+              </a:rPr>
+              <a:t>The data sit on the true-ceiling line, not the exponential cloud, and the law survives the event definition.</a:t>
+            </a:r>
+          </a:p>
+        </p:txBody>
+      </p:sp>
+    </p:spTree>
+  </p:cSld>
+  <p:clrMapOvr>
+    <a:masterClrMapping/>
+  </p:clrMapOvr>
+</p:sld>
+</file>
+
+<file path=ppt/slides/slide17.xml><?xml version="1.0" encoding="utf-8"?>
+<p:sld xmlns:a="http://schemas.openxmlformats.org/drawingml/2006/main" xmlns:p="http://schemas.openxmlformats.org/presentationml/2006/main" xmlns:r="http://schemas.openxmlformats.org/officeDocument/2006/relationships">
+  <p:cSld>
+    <p:spTree>
+      <p:nvGrpSpPr>
+        <p:cNvPr id="1" name=""/>
+        <p:cNvGrpSpPr/>
+        <p:nvPr/>
+      </p:nvGrpSpPr>
+      <p:grpSpPr/>
+      <p:sp>
+        <p:nvSpPr>
+          <p:cNvPr id="2" name="TextBox 1"/>
           <p:cNvSpPr txBox="1"/>
           <p:nvPr/>
         </p:nvSpPr>
         <p:spPr>
           <a:xfrm>
-            <a:off x="1371600" y="3017520"/>
-            <a:ext cx="10241280" cy="777240"/>
+            <a:off x="548640" y="292608"/>
+            <a:ext cx="11091672" cy="685800"/>
           </a:xfrm>
           <a:prstGeom prst="rect">
             <a:avLst/>
@@ -5260,48 +4862,139 @@
           <a:noFill/>
         </p:spPr>
         <p:txBody>
-          <a:bodyPr wrap="square" lIns="0" rIns="0" tIns="0" bIns="0" anchor="ctr">
+          <a:bodyPr wrap="square" lIns="0" rIns="0" tIns="0" bIns="0">
             <a:spAutoFit/>
           </a:bodyPr>
           <a:lstStyle/>
           <a:p>
             <a:r>
-              <a:rPr sz="1500" b="1">
-                <a:solidFill>
-                  <a:srgbClr val="212121"/>
-                </a:solidFill>
-                <a:latin typeface="Calibri"/>
-              </a:rPr>
-              <a:t>Reach or bracket steady state — </a:t>
-            </a:r>
-            <a:r>
-              <a:rPr sz="1500" b="0">
-                <a:solidFill>
-                  <a:srgbClr val="212121"/>
-                </a:solidFill>
-                <a:latin typeface="Calibri"/>
-              </a:rPr>
-              <a:t>extend runs to γ ≈ 1.5, or add ensembles prepared above the attractor (ultra-fast quench) — decides common vs preparation-dependent fixed points</a:t>
-            </a:r>
-          </a:p>
-        </p:txBody>
-      </p:sp>
-      <p:sp>
-        <p:nvSpPr>
-          <p:cNvPr id="9" name="Oval 8"/>
+              <a:rPr sz="3000" b="1">
+                <a:solidFill>
+                  <a:srgbClr val="1E2761"/>
+                </a:solidFill>
+                <a:latin typeface="Calibri"/>
+              </a:rPr>
+              <a:t>Where the Markov assumption fails: aftershocks</a:t>
+            </a:r>
+          </a:p>
+        </p:txBody>
+      </p:sp>
+      <p:pic>
+        <p:nvPicPr>
+          <p:cNvPr id="3" name="Picture 2" descr="fig20_clustering.png"/>
+          <p:cNvPicPr>
+            <a:picLocks noChangeAspect="1"/>
+          </p:cNvPicPr>
+          <p:nvPr/>
+        </p:nvPicPr>
+        <p:blipFill>
+          <a:blip r:embed="rId2"/>
+          <a:stretch>
+            <a:fillRect/>
+          </a:stretch>
+        </p:blipFill>
+        <p:spPr>
+          <a:xfrm>
+            <a:off x="1437322" y="1188719"/>
+            <a:ext cx="9286875" cy="3566160"/>
+          </a:xfrm>
+          <a:prstGeom prst="rect">
+            <a:avLst/>
+          </a:prstGeom>
+        </p:spPr>
+      </p:pic>
+      <p:sp>
+        <p:nvSpPr>
+          <p:cNvPr id="4" name="TextBox 3"/>
+          <p:cNvSpPr txBox="1"/>
+          <p:nvPr/>
+        </p:nvSpPr>
+        <p:spPr>
+          <a:xfrm>
+            <a:off x="640080" y="4864608"/>
+            <a:ext cx="10972800" cy="1078991"/>
+          </a:xfrm>
+          <a:prstGeom prst="rect">
+            <a:avLst/>
+          </a:prstGeom>
+          <a:noFill/>
+        </p:spPr>
+        <p:txBody>
+          <a:bodyPr wrap="square" lIns="0" rIns="0" tIns="0" bIns="0">
+            <a:spAutoFit/>
+          </a:bodyPr>
+          <a:lstStyle/>
+          <a:p>
+            <a:pPr marL="228600" indent="-228600">
+              <a:spcAft>
+                <a:spcPts val="800"/>
+              </a:spcAft>
+              <a:buChar char="•"/>
+            </a:pPr>
+            <a:r>
+              <a:rPr sz="1250" b="0">
+                <a:solidFill>
+                  <a:srgbClr val="212121"/>
+                </a:solidFill>
+                <a:latin typeface="Calibri"/>
+              </a:rPr>
+              <a:t>At the same cell, the hazard on the step after an event is 20× the quiet baseline, decaying over ~5 steps; 14% of events sit in consecutive runs (Markov expectation 0.4%); the next event is 1.2× larger</a:t>
+            </a:r>
+          </a:p>
+          <a:p>
+            <a:pPr marL="228600" indent="-228600">
+              <a:spcAft>
+                <a:spcPts val="800"/>
+              </a:spcAft>
+              <a:buChar char="•"/>
+            </a:pPr>
+            <a:r>
+              <a:rPr sz="1250" b="0">
+                <a:solidFill>
+                  <a:srgbClr val="212121"/>
+                </a:solidFill>
+                <a:latin typeface="Calibri"/>
+              </a:rPr>
+              <a:t>Event counts per window are over-dispersed (Fano 1.3–1.6 vs the model’s 1.0) while the stress released per window is less variable (CV 0.10 vs 0.13)</a:t>
+            </a:r>
+          </a:p>
+          <a:p>
+            <a:pPr marL="228600" indent="-228600">
+              <a:spcAft>
+                <a:spcPts val="800"/>
+              </a:spcAft>
+              <a:buChar char="•"/>
+            </a:pPr>
+            <a:r>
+              <a:rPr sz="1250" b="0">
+                <a:solidFill>
+                  <a:srgbClr val="212121"/>
+                </a:solidFill>
+                <a:latin typeface="Calibri"/>
+              </a:rPr>
+              <a:t>Referenced to the last large event, the large-event hazard is 1.5× higher after 0.1–0.3 of reloading; large events are more regular (Fano 0.51 vs 0.71)</a:t>
+            </a:r>
+          </a:p>
+        </p:txBody>
+      </p:sp>
+      <p:sp>
+        <p:nvSpPr>
+          <p:cNvPr id="5" name="Rounded Rectangle 4"/>
           <p:cNvSpPr/>
           <p:nvPr/>
         </p:nvSpPr>
         <p:spPr>
           <a:xfrm>
-            <a:off x="640080" y="3931920"/>
-            <a:ext cx="475488" cy="475488"/>
-          </a:xfrm>
-          <a:prstGeom prst="ellipse">
-            <a:avLst/>
+            <a:off x="548640" y="6053328"/>
+            <a:ext cx="11091672" cy="566928"/>
+          </a:xfrm>
+          <a:prstGeom prst="roundRect">
+            <a:avLst>
+              <a:gd name="adj" fmla="val 18000"/>
+            </a:avLst>
           </a:prstGeom>
           <a:solidFill>
-            <a:srgbClr val="1E2761"/>
+            <a:srgbClr val="F2F2F2"/>
           </a:solidFill>
           <a:ln>
             <a:noFill/>
@@ -5323,32 +5016,59 @@
           </a:fontRef>
         </p:style>
         <p:txBody>
-          <a:bodyPr rtlCol="0" anchor="ctr" lIns="0" rIns="0"/>
+          <a:bodyPr rtlCol="0" anchor="ctr" wrap="square" lIns="164592" rIns="164592" tIns="0" bIns="0"/>
           <a:lstStyle/>
           <a:p>
             <a:pPr algn="ctr"/>
             <a:r>
-              <a:rPr sz="2000" b="1">
-                <a:solidFill>
-                  <a:srgbClr val="FFFFFF"/>
-                </a:solidFill>
-                <a:latin typeface="Calibri"/>
-              </a:rPr>
-              <a:t>4</a:t>
-            </a:r>
-          </a:p>
-        </p:txBody>
-      </p:sp>
-      <p:sp>
-        <p:nvSpPr>
-          <p:cNvPr id="10" name="TextBox 9"/>
+              <a:rPr sz="1350" b="1">
+                <a:solidFill>
+                  <a:srgbClr val="1E2761"/>
+                </a:solidFill>
+                <a:latin typeface="Calibri"/>
+              </a:rPr>
+              <a:t>Takeaway — </a:t>
+            </a:r>
+            <a:r>
+              <a:rPr sz="1350" b="0">
+                <a:solidFill>
+                  <a:srgbClr val="212121"/>
+                </a:solidFill>
+                <a:latin typeface="Calibri"/>
+              </a:rPr>
+              <a:t>No function of (u,τ) produces this; an aftershock term fixes the yield peaks (RMS 2.5% → 1.6%) but not the variance below.</a:t>
+            </a:r>
+          </a:p>
+        </p:txBody>
+      </p:sp>
+    </p:spTree>
+  </p:cSld>
+  <p:clrMapOvr>
+    <a:masterClrMapping/>
+  </p:clrMapOvr>
+</p:sld>
+</file>
+
+<file path=ppt/slides/slide18.xml><?xml version="1.0" encoding="utf-8"?>
+<p:sld xmlns:a="http://schemas.openxmlformats.org/drawingml/2006/main" xmlns:p="http://schemas.openxmlformats.org/presentationml/2006/main" xmlns:r="http://schemas.openxmlformats.org/officeDocument/2006/relationships">
+  <p:cSld>
+    <p:spTree>
+      <p:nvGrpSpPr>
+        <p:cNvPr id="1" name=""/>
+        <p:cNvGrpSpPr/>
+        <p:nvPr/>
+      </p:nvGrpSpPr>
+      <p:grpSpPr/>
+      <p:sp>
+        <p:nvSpPr>
+          <p:cNvPr id="2" name="TextBox 1"/>
           <p:cNvSpPr txBox="1"/>
           <p:nvPr/>
         </p:nvSpPr>
         <p:spPr>
           <a:xfrm>
-            <a:off x="1371600" y="3886200"/>
-            <a:ext cx="10241280" cy="777240"/>
+            <a:off x="548640" y="292608"/>
+            <a:ext cx="11091672" cy="685800"/>
           </a:xfrm>
           <a:prstGeom prst="rect">
             <a:avLst/>
@@ -5356,48 +5076,212 @@
           <a:noFill/>
         </p:spPr>
         <p:txBody>
-          <a:bodyPr wrap="square" lIns="0" rIns="0" tIns="0" bIns="0" anchor="ctr">
+          <a:bodyPr wrap="square" lIns="0" rIns="0" tIns="0" bIns="0">
             <a:spAutoFit/>
           </a:bodyPr>
           <a:lstStyle/>
           <a:p>
             <a:r>
-              <a:rPr sz="1500" b="1">
-                <a:solidFill>
-                  <a:srgbClr val="212121"/>
-                </a:solidFill>
-                <a:latin typeface="Calibri"/>
-              </a:rPr>
-              <a:t>Spatial fields for a subset of trajectories — </a:t>
-            </a:r>
-            <a:r>
-              <a:rPr sz="1500" b="0">
-                <a:solidFill>
-                  <a:srgbClr val="212121"/>
-                </a:solidFill>
-                <a:latin typeface="Calibri"/>
-              </a:rPr>
-              <a:t>localization vs the insufficiency result; local-threshold distribution P(x) directly</a:t>
-            </a:r>
-          </a:p>
-        </p:txBody>
-      </p:sp>
-      <p:sp>
-        <p:nvSpPr>
-          <p:cNvPr id="11" name="Oval 10"/>
+              <a:rPr sz="3000" b="1">
+                <a:solidFill>
+                  <a:srgbClr val="1E2761"/>
+                </a:solidFill>
+                <a:latin typeface="Calibri"/>
+              </a:rPr>
+              <a:t>The variance gap: ten exclusions, one open problem</a:t>
+            </a:r>
+          </a:p>
+        </p:txBody>
+      </p:sp>
+      <p:pic>
+        <p:nvPicPr>
+          <p:cNvPr id="3" name="Picture 2" descr="fig21_renewal.png"/>
+          <p:cNvPicPr>
+            <a:picLocks noChangeAspect="1"/>
+          </p:cNvPicPr>
+          <p:nvPr/>
+        </p:nvPicPr>
+        <p:blipFill>
+          <a:blip r:embed="rId2"/>
+          <a:stretch>
+            <a:fillRect/>
+          </a:stretch>
+        </p:blipFill>
+        <p:spPr>
+          <a:xfrm>
+            <a:off x="502920" y="1192560"/>
+            <a:ext cx="6766560" cy="2598359"/>
+          </a:xfrm>
+          <a:prstGeom prst="rect">
+            <a:avLst/>
+          </a:prstGeom>
+        </p:spPr>
+      </p:pic>
+      <p:sp>
+        <p:nvSpPr>
+          <p:cNvPr id="4" name="TextBox 3"/>
+          <p:cNvSpPr txBox="1"/>
+          <p:nvPr/>
+        </p:nvSpPr>
+        <p:spPr>
+          <a:xfrm>
+            <a:off x="7452360" y="1188720"/>
+            <a:ext cx="4251960" cy="2651760"/>
+          </a:xfrm>
+          <a:prstGeom prst="rect">
+            <a:avLst/>
+          </a:prstGeom>
+          <a:noFill/>
+        </p:spPr>
+        <p:txBody>
+          <a:bodyPr wrap="square" lIns="0" rIns="0" tIns="0" bIns="0">
+            <a:spAutoFit/>
+          </a:bodyPr>
+          <a:lstStyle/>
+          <a:p>
+            <a:pPr>
+              <a:spcAft>
+                <a:spcPts val="600"/>
+              </a:spcAft>
+            </a:pPr>
+            <a:r>
+              <a:rPr sz="1300" b="1">
+                <a:solidFill>
+                  <a:srgbClr val="1E2761"/>
+                </a:solidFill>
+                <a:latin typeface="Calibri"/>
+              </a:rPr>
+              <a:t>Run-to-run scatter within a preparation: model 25–30% too high</a:t>
+            </a:r>
+          </a:p>
+          <a:p>
+            <a:pPr marL="228600" indent="-228600">
+              <a:spcAft>
+                <a:spcPts val="800"/>
+              </a:spcAft>
+              <a:buChar char="•"/>
+            </a:pPr>
+            <a:r>
+              <a:rPr sz="1200" b="0">
+                <a:solidFill>
+                  <a:srgbClr val="212121"/>
+                </a:solidFill>
+                <a:latin typeface="Calibri"/>
+              </a:rPr>
+              <a:t>Not the size law, aftershock hazard, grid (42×42), renewal hazard, two-class reload hazard</a:t>
+            </a:r>
+          </a:p>
+          <a:p>
+            <a:pPr marL="228600" indent="-228600">
+              <a:spcAft>
+                <a:spcPts val="800"/>
+              </a:spcAft>
+              <a:buChar char="•"/>
+            </a:pPr>
+            <a:r>
+              <a:rPr sz="1200" b="0">
+                <a:solidFill>
+                  <a:srgbClr val="212121"/>
+                </a:solidFill>
+                <a:latin typeface="Calibri"/>
+              </a:rPr>
+              <a:t>Not size–reload coupling (+0.02), size–size coupling (−0.01), relaxation rate (identical), the per-sample slow variable, or the u-channel noise terms</a:t>
+            </a:r>
+          </a:p>
+        </p:txBody>
+      </p:sp>
+      <p:sp>
+        <p:nvSpPr>
+          <p:cNvPr id="5" name="TextBox 4"/>
+          <p:cNvSpPr txBox="1"/>
+          <p:nvPr/>
+        </p:nvSpPr>
+        <p:spPr>
+          <a:xfrm>
+            <a:off x="640080" y="3931920"/>
+            <a:ext cx="10972800" cy="2011680"/>
+          </a:xfrm>
+          <a:prstGeom prst="rect">
+            <a:avLst/>
+          </a:prstGeom>
+          <a:noFill/>
+        </p:spPr>
+        <p:txBody>
+          <a:bodyPr wrap="square" lIns="0" rIns="0" tIns="0" bIns="0">
+            <a:spAutoFit/>
+          </a:bodyPr>
+          <a:lstStyle/>
+          <a:p>
+            <a:pPr marL="228600" indent="-228600">
+              <a:spcAft>
+                <a:spcPts val="800"/>
+              </a:spcAft>
+              <a:buChar char="•"/>
+            </a:pPr>
+            <a:r>
+              <a:rPr sz="1250" b="0">
+                <a:solidFill>
+                  <a:srgbClr val="212121"/>
+                </a:solidFill>
+                <a:latin typeface="Calibri"/>
+              </a:rPr>
+              <a:t>Each candidate was run forward and scored on the same three metrics (count Fano factor, CV of stress released per window, τ scatter)</a:t>
+            </a:r>
+          </a:p>
+          <a:p>
+            <a:pPr marL="228600" indent="-228600">
+              <a:spcAft>
+                <a:spcPts val="800"/>
+              </a:spcAft>
+              <a:buChar char="•"/>
+            </a:pPr>
+            <a:r>
+              <a:rPr sz="1250" b="0">
+                <a:solidFill>
+                  <a:srgbClr val="212121"/>
+                </a:solidFill>
+                <a:latin typeface="Calibri"/>
+              </a:rPr>
+              <a:t>What survives: a driving-noise amplitude 17% too large with the same restoring force, at fixed (u,τ), that no sequence correlation the data can exhibit accounts for</a:t>
+            </a:r>
+          </a:p>
+          <a:p>
+            <a:pPr marL="228600" indent="-228600">
+              <a:spcAft>
+                <a:spcPts val="800"/>
+              </a:spcAft>
+              <a:buChar char="•"/>
+            </a:pPr>
+            <a:r>
+              <a:rPr sz="1250" b="0">
+                <a:solidFill>
+                  <a:srgbClr val="212121"/>
+                </a:solidFill>
+                <a:latin typeface="Calibri"/>
+              </a:rPr>
+              <a:t>Closing it needs a per-step observable that is not (u,τ) — the same MD output the third variable asks for</a:t>
+            </a:r>
+          </a:p>
+        </p:txBody>
+      </p:sp>
+      <p:sp>
+        <p:nvSpPr>
+          <p:cNvPr id="6" name="Rounded Rectangle 5"/>
           <p:cNvSpPr/>
           <p:nvPr/>
         </p:nvSpPr>
         <p:spPr>
           <a:xfrm>
-            <a:off x="640080" y="4800599"/>
-            <a:ext cx="475488" cy="475488"/>
-          </a:xfrm>
-          <a:prstGeom prst="ellipse">
-            <a:avLst/>
+            <a:off x="548640" y="6053328"/>
+            <a:ext cx="11091672" cy="566928"/>
+          </a:xfrm>
+          <a:prstGeom prst="roundRect">
+            <a:avLst>
+              <a:gd name="adj" fmla="val 18000"/>
+            </a:avLst>
           </a:prstGeom>
           <a:solidFill>
-            <a:srgbClr val="1E2761"/>
+            <a:srgbClr val="F2F2F2"/>
           </a:solidFill>
           <a:ln>
             <a:noFill/>
@@ -5419,75 +5303,59 @@
           </a:fontRef>
         </p:style>
         <p:txBody>
-          <a:bodyPr rtlCol="0" anchor="ctr" lIns="0" rIns="0"/>
+          <a:bodyPr rtlCol="0" anchor="ctr" wrap="square" lIns="164592" rIns="164592" tIns="0" bIns="0"/>
           <a:lstStyle/>
           <a:p>
             <a:pPr algn="ctr"/>
             <a:r>
-              <a:rPr sz="2000" b="1">
-                <a:solidFill>
-                  <a:srgbClr val="FFFFFF"/>
-                </a:solidFill>
-                <a:latin typeface="Calibri"/>
-              </a:rPr>
-              <a:t>5</a:t>
-            </a:r>
-          </a:p>
-        </p:txBody>
-      </p:sp>
-      <p:sp>
-        <p:nvSpPr>
-          <p:cNvPr id="12" name="TextBox 11"/>
+              <a:rPr sz="1350" b="1">
+                <a:solidFill>
+                  <a:srgbClr val="1E2761"/>
+                </a:solidFill>
+                <a:latin typeface="Calibri"/>
+              </a:rPr>
+              <a:t>Takeaway — </a:t>
+            </a:r>
+            <a:r>
+              <a:rPr sz="1350" b="0">
+                <a:solidFill>
+                  <a:srgbClr val="212121"/>
+                </a:solidFill>
+                <a:latin typeface="Calibri"/>
+              </a:rPr>
+              <a:t>The remaining discrepancy is bounded and named; the dataset has exhausted what it can test at fixed (u,τ).</a:t>
+            </a:r>
+          </a:p>
+        </p:txBody>
+      </p:sp>
+    </p:spTree>
+  </p:cSld>
+  <p:clrMapOvr>
+    <a:masterClrMapping/>
+  </p:clrMapOvr>
+</p:sld>
+</file>
+
+<file path=ppt/slides/slide19.xml><?xml version="1.0" encoding="utf-8"?>
+<p:sld xmlns:a="http://schemas.openxmlformats.org/drawingml/2006/main" xmlns:p="http://schemas.openxmlformats.org/presentationml/2006/main" xmlns:r="http://schemas.openxmlformats.org/officeDocument/2006/relationships">
+  <p:cSld>
+    <p:spTree>
+      <p:nvGrpSpPr>
+        <p:cNvPr id="1" name=""/>
+        <p:cNvGrpSpPr/>
+        <p:nvPr/>
+      </p:nvGrpSpPr>
+      <p:grpSpPr/>
+      <p:sp>
+        <p:nvSpPr>
+          <p:cNvPr id="2" name="TextBox 1"/>
           <p:cNvSpPr txBox="1"/>
           <p:nvPr/>
         </p:nvSpPr>
         <p:spPr>
           <a:xfrm>
-            <a:off x="1371600" y="4754879"/>
-            <a:ext cx="10241280" cy="777240"/>
-          </a:xfrm>
-          <a:prstGeom prst="rect">
-            <a:avLst/>
-          </a:prstGeom>
-          <a:noFill/>
-        </p:spPr>
-        <p:txBody>
-          <a:bodyPr wrap="square" lIns="0" rIns="0" tIns="0" bIns="0" anchor="ctr">
-            <a:spAutoFit/>
-          </a:bodyPr>
-          <a:lstStyle/>
-          <a:p>
-            <a:r>
-              <a:rPr sz="1500" b="1">
-                <a:solidFill>
-                  <a:srgbClr val="212121"/>
-                </a:solidFill>
-                <a:latin typeface="Calibri"/>
-              </a:rPr>
-              <a:t>Interim model — </a:t>
-            </a:r>
-            <a:r>
-              <a:rPr sz="1500" b="0">
-                <a:solidFill>
-                  <a:srgbClr val="212121"/>
-                </a:solidFill>
-                <a:latin typeface="Calibri"/>
-              </a:rPr>
-              <a:t>factorized activated form with preparation-parameterized coefficients — labeled history-parameterized, not constitutive</a:t>
-            </a:r>
-          </a:p>
-        </p:txBody>
-      </p:sp>
-      <p:sp>
-        <p:nvSpPr>
-          <p:cNvPr id="13" name="TextBox 12"/>
-          <p:cNvSpPr txBox="1"/>
-          <p:nvPr/>
-        </p:nvSpPr>
-        <p:spPr>
-          <a:xfrm>
-            <a:off x="640080" y="5650992"/>
-            <a:ext cx="10972800" cy="320040"/>
+            <a:off x="548640" y="292608"/>
+            <a:ext cx="11091672" cy="685800"/>
           </a:xfrm>
           <a:prstGeom prst="rect">
             <a:avLst/>
@@ -5501,20 +5369,429 @@
           <a:lstStyle/>
           <a:p>
             <a:r>
-              <a:rPr sz="1200" b="0">
+              <a:rPr sz="3000" b="1">
+                <a:solidFill>
+                  <a:srgbClr val="1E2761"/>
+                </a:solidFill>
+                <a:latin typeface="Calibri"/>
+              </a:rPr>
+              <a:t>What holds, what doesn’t</a:t>
+            </a:r>
+          </a:p>
+        </p:txBody>
+      </p:sp>
+      <p:sp>
+        <p:nvSpPr>
+          <p:cNvPr id="3" name="TextBox 2"/>
+          <p:cNvSpPr txBox="1"/>
+          <p:nvPr/>
+        </p:nvSpPr>
+        <p:spPr>
+          <a:xfrm>
+            <a:off x="640080" y="1234440"/>
+            <a:ext cx="3566160" cy="411480"/>
+          </a:xfrm>
+          <a:prstGeom prst="rect">
+            <a:avLst/>
+          </a:prstGeom>
+          <a:noFill/>
+        </p:spPr>
+        <p:txBody>
+          <a:bodyPr wrap="square" lIns="0" rIns="0" tIns="0" bIns="0">
+            <a:spAutoFit/>
+          </a:bodyPr>
+          <a:lstStyle/>
+          <a:p>
+            <a:r>
+              <a:rPr sz="1700" b="1">
+                <a:solidFill>
+                  <a:srgbClr val="1E2761"/>
+                </a:solidFill>
+                <a:latin typeface="Calibri"/>
+              </a:rPr>
+              <a:t>SUPPORTED</a:t>
+            </a:r>
+          </a:p>
+        </p:txBody>
+      </p:sp>
+      <p:sp>
+        <p:nvSpPr>
+          <p:cNvPr id="4" name="TextBox 3"/>
+          <p:cNvSpPr txBox="1"/>
+          <p:nvPr/>
+        </p:nvSpPr>
+        <p:spPr>
+          <a:xfrm>
+            <a:off x="640080" y="1737360"/>
+            <a:ext cx="3566160" cy="4114800"/>
+          </a:xfrm>
+          <a:prstGeom prst="rect">
+            <a:avLst/>
+          </a:prstGeom>
+          <a:noFill/>
+        </p:spPr>
+        <p:txBody>
+          <a:bodyPr wrap="square" lIns="0" rIns="0" tIns="0" bIns="0">
+            <a:spAutoFit/>
+          </a:bodyPr>
+          <a:lstStyle/>
+          <a:p>
+            <a:pPr marL="228600" indent="-228600">
+              <a:spcAft>
+                <a:spcPts val="800"/>
+              </a:spcAft>
+              <a:buChar char="•"/>
+            </a:pPr>
+            <a:r>
+              <a:rPr sz="1250" b="0">
+                <a:solidFill>
+                  <a:srgbClr val="212121"/>
+                </a:solidFill>
+                <a:latin typeface="Calibri"/>
+              </a:rPr>
+              <a:t>One universal size shape with a single state-dependent scale (12 cells, 100× in scale)</a:t>
+            </a:r>
+          </a:p>
+          <a:p>
+            <a:pPr marL="228600" indent="-228600">
+              <a:spcAft>
+                <a:spcPts val="800"/>
+              </a:spcAft>
+              <a:buChar char="•"/>
+            </a:pPr>
+            <a:r>
+              <a:rPr sz="1250" b="0">
+                <a:solidFill>
+                  <a:srgbClr val="212121"/>
+                </a:solidFill>
+                <a:latin typeface="Calibri"/>
+              </a:rPr>
+              <a:t>A hard ceiling, sharper than exponential (8/8 by AIC; synthetic controls both ways; robust to merged avalanches)</a:t>
+            </a:r>
+          </a:p>
+          <a:p>
+            <a:pPr marL="228600" indent="-228600">
+              <a:spcAft>
+                <a:spcPts val="800"/>
+              </a:spcAft>
+              <a:buChar char="•"/>
+            </a:pPr>
+            <a:r>
+              <a:rPr sz="1250" b="0">
+                <a:solidFill>
+                  <a:srgbClr val="212121"/>
+                </a:solidFill>
+                <a:latin typeface="Calibri"/>
+              </a:rPr>
+              <a:t>Small-size exponent k ≈ 0.9; the ceiling field factorizes (95.5%)</a:t>
+            </a:r>
+          </a:p>
+          <a:p>
+            <a:pPr marL="228600" indent="-228600">
+              <a:spcAft>
+                <a:spcPts val="800"/>
+              </a:spcAft>
+              <a:buChar char="•"/>
+            </a:pPr>
+            <a:r>
+              <a:rPr sz="1250" b="0">
+                <a:solidFill>
+                  <a:srgbClr val="212121"/>
+                </a:solidFill>
+                <a:latin typeface="Calibri"/>
+              </a:rPr>
+              <a:t>Stress–strain curves and yield peaks across 256× in cooling rate at the few-% level</a:t>
+            </a:r>
+          </a:p>
+          <a:p>
+            <a:pPr marL="228600" indent="-228600">
+              <a:spcAft>
+                <a:spcPts val="800"/>
+              </a:spcAft>
+              <a:buChar char="•"/>
+            </a:pPr>
+            <a:r>
+              <a:rPr sz="1250" b="0">
+                <a:solidFill>
+                  <a:srgbClr val="212121"/>
+                </a:solidFill>
+                <a:latin typeface="Calibri"/>
+              </a:rPr>
+              <a:t>Memory in event size only; relaxes with γ_r ≈ 0.2; parameter-free per-sample prediction</a:t>
+            </a:r>
+          </a:p>
+        </p:txBody>
+      </p:sp>
+      <p:sp>
+        <p:nvSpPr>
+          <p:cNvPr id="5" name="TextBox 4"/>
+          <p:cNvSpPr txBox="1"/>
+          <p:nvPr/>
+        </p:nvSpPr>
+        <p:spPr>
+          <a:xfrm>
+            <a:off x="4434840" y="1234440"/>
+            <a:ext cx="3566160" cy="411480"/>
+          </a:xfrm>
+          <a:prstGeom prst="rect">
+            <a:avLst/>
+          </a:prstGeom>
+          <a:noFill/>
+        </p:spPr>
+        <p:txBody>
+          <a:bodyPr wrap="square" lIns="0" rIns="0" tIns="0" bIns="0">
+            <a:spAutoFit/>
+          </a:bodyPr>
+          <a:lstStyle/>
+          <a:p>
+            <a:r>
+              <a:rPr sz="1700" b="1">
                 <a:solidFill>
                   <a:srgbClr val="6E7B85"/>
                 </a:solidFill>
                 <a:latin typeface="Calibri"/>
               </a:rPr>
-              <a:t>Full detail: REPORT.md · code: library/stz.py, library/symreg.py · all fields rebuild from one 6-second pass (trajstats.npz)</a:t>
-            </a:r>
-          </a:p>
-        </p:txBody>
-      </p:sp>
-      <p:sp>
-        <p:nvSpPr>
-          <p:cNvPr id="14" name="Rounded Rectangle 13"/>
+              <a:t>NOT ESTABLISHED</a:t>
+            </a:r>
+          </a:p>
+        </p:txBody>
+      </p:sp>
+      <p:sp>
+        <p:nvSpPr>
+          <p:cNvPr id="6" name="TextBox 5"/>
+          <p:cNvSpPr txBox="1"/>
+          <p:nvPr/>
+        </p:nvSpPr>
+        <p:spPr>
+          <a:xfrm>
+            <a:off x="4434840" y="1737360"/>
+            <a:ext cx="3566160" cy="4114800"/>
+          </a:xfrm>
+          <a:prstGeom prst="rect">
+            <a:avLst/>
+          </a:prstGeom>
+          <a:noFill/>
+        </p:spPr>
+        <p:txBody>
+          <a:bodyPr wrap="square" lIns="0" rIns="0" tIns="0" bIns="0">
+            <a:spAutoFit/>
+          </a:bodyPr>
+          <a:lstStyle/>
+          <a:p>
+            <a:pPr marL="228600" indent="-228600">
+              <a:spcAft>
+                <a:spcPts val="800"/>
+              </a:spcAft>
+              <a:buChar char="•"/>
+            </a:pPr>
+            <a:r>
+              <a:rPr sz="1250" b="0">
+                <a:solidFill>
+                  <a:srgbClr val="212121"/>
+                </a:solidFill>
+                <a:latin typeface="Calibri"/>
+              </a:rPr>
+              <a:t>Ceiling exponent m ≈ 2: order of magnitude only</a:t>
+            </a:r>
+          </a:p>
+          <a:p>
+            <a:pPr marL="228600" indent="-228600">
+              <a:spcAft>
+                <a:spcPts val="800"/>
+              </a:spcAft>
+              <a:buChar char="•"/>
+            </a:pPr>
+            <a:r>
+              <a:rPr sz="1250" b="0">
+                <a:solidFill>
+                  <a:srgbClr val="212121"/>
+                </a:solidFill>
+                <a:latin typeface="Calibri"/>
+              </a:rPr>
+              <a:t>Specific SR forms of the ceiling factors: best-of-front, not unique</a:t>
+            </a:r>
+          </a:p>
+          <a:p>
+            <a:pPr marL="228600" indent="-228600">
+              <a:spcAft>
+                <a:spcPts val="800"/>
+              </a:spcAft>
+              <a:buChar char="•"/>
+            </a:pPr>
+            <a:r>
+              <a:rPr sz="1250" b="0">
+                <a:solidFill>
+                  <a:srgbClr val="212121"/>
+                </a:solidFill>
+                <a:latin typeface="Calibri"/>
+              </a:rPr>
+              <a:t>Ceiling vs exponential in cells with &lt; 1,000 events</a:t>
+            </a:r>
+          </a:p>
+          <a:p>
+            <a:pPr marL="228600" indent="-228600">
+              <a:spcAft>
+                <a:spcPts val="800"/>
+              </a:spcAft>
+              <a:buChar char="•"/>
+            </a:pPr>
+            <a:r>
+              <a:rPr sz="1250" b="0">
+                <a:solidFill>
+                  <a:srgbClr val="212121"/>
+                </a:solidFill>
+                <a:latin typeface="Calibri"/>
+              </a:rPr>
+              <a:t>Convergence of preparations at large strain — the model’s opinion, now with a measured rate but no data past γ = 0.5</a:t>
+            </a:r>
+          </a:p>
+          <a:p>
+            <a:pPr marL="228600" indent="-228600">
+              <a:spcAft>
+                <a:spcPts val="800"/>
+              </a:spcAft>
+              <a:buChar char="•"/>
+            </a:pPr>
+            <a:r>
+              <a:rPr sz="1250" b="0">
+                <a:solidFill>
+                  <a:srgbClr val="212121"/>
+                </a:solidFill>
+                <a:latin typeface="Calibri"/>
+              </a:rPr>
+              <a:t>The system size N (unrecorded): the finite-size reading of the ceiling is untested</a:t>
+            </a:r>
+          </a:p>
+        </p:txBody>
+      </p:sp>
+      <p:sp>
+        <p:nvSpPr>
+          <p:cNvPr id="7" name="TextBox 6"/>
+          <p:cNvSpPr txBox="1"/>
+          <p:nvPr/>
+        </p:nvSpPr>
+        <p:spPr>
+          <a:xfrm>
+            <a:off x="8229600" y="1234440"/>
+            <a:ext cx="3566160" cy="411480"/>
+          </a:xfrm>
+          <a:prstGeom prst="rect">
+            <a:avLst/>
+          </a:prstGeom>
+          <a:noFill/>
+        </p:spPr>
+        <p:txBody>
+          <a:bodyPr wrap="square" lIns="0" rIns="0" tIns="0" bIns="0">
+            <a:spAutoFit/>
+          </a:bodyPr>
+          <a:lstStyle/>
+          <a:p>
+            <a:r>
+              <a:rPr sz="1700" b="1">
+                <a:solidFill>
+                  <a:srgbClr val="990011"/>
+                </a:solidFill>
+                <a:latin typeface="Calibri"/>
+              </a:rPr>
+              <a:t>CONTRADICTED</a:t>
+            </a:r>
+          </a:p>
+        </p:txBody>
+      </p:sp>
+      <p:sp>
+        <p:nvSpPr>
+          <p:cNvPr id="8" name="TextBox 7"/>
+          <p:cNvSpPr txBox="1"/>
+          <p:nvPr/>
+        </p:nvSpPr>
+        <p:spPr>
+          <a:xfrm>
+            <a:off x="8229600" y="1737360"/>
+            <a:ext cx="3566160" cy="4114800"/>
+          </a:xfrm>
+          <a:prstGeom prst="rect">
+            <a:avLst/>
+          </a:prstGeom>
+          <a:noFill/>
+        </p:spPr>
+        <p:txBody>
+          <a:bodyPr wrap="square" lIns="0" rIns="0" tIns="0" bIns="0">
+            <a:spAutoFit/>
+          </a:bodyPr>
+          <a:lstStyle/>
+          <a:p>
+            <a:pPr marL="228600" indent="-228600">
+              <a:spcAft>
+                <a:spcPts val="800"/>
+              </a:spcAft>
+              <a:buChar char="•"/>
+            </a:pPr>
+            <a:r>
+              <a:rPr sz="1250" b="0">
+                <a:solidFill>
+                  <a:srgbClr val="212121"/>
+                </a:solidFill>
+                <a:latin typeface="Calibri"/>
+              </a:rPr>
+              <a:t>(u,τ) as a sufficient state — the 1.71× ceiling memory and the 5×-underpredicted u-spread, independently</a:t>
+            </a:r>
+          </a:p>
+          <a:p>
+            <a:pPr marL="228600" indent="-228600">
+              <a:spcAft>
+                <a:spcPts val="800"/>
+              </a:spcAft>
+              <a:buChar char="•"/>
+            </a:pPr>
+            <a:r>
+              <a:rPr sz="1250" b="0">
+                <a:solidFill>
+                  <a:srgbClr val="212121"/>
+                </a:solidFill>
+                <a:latin typeface="Calibri"/>
+              </a:rPr>
+              <a:t>The step process as Markov in (u,τ) at the 10⁻⁵ strain scale — aftershocks (×20), reload-dependent large events</a:t>
+            </a:r>
+          </a:p>
+          <a:p>
+            <a:pPr marL="228600" indent="-228600">
+              <a:spcAft>
+                <a:spcPts val="800"/>
+              </a:spcAft>
+              <a:buChar char="•"/>
+            </a:pPr>
+            <a:r>
+              <a:rPr sz="1250" b="0">
+                <a:solidFill>
+                  <a:srgbClr val="212121"/>
+                </a:solidFill>
+                <a:latin typeface="Calibri"/>
+              </a:rPr>
+              <a:t>Any of ten candidate explanations for the run-to-run variance excess</a:t>
+            </a:r>
+          </a:p>
+          <a:p>
+            <a:pPr marL="228600" indent="-228600">
+              <a:spcAft>
+                <a:spcPts val="800"/>
+              </a:spcAft>
+              <a:buChar char="•"/>
+            </a:pPr>
+            <a:r>
+              <a:rPr sz="1250" b="0">
+                <a:solidFill>
+                  <a:srgbClr val="212121"/>
+                </a:solidFill>
+                <a:latin typeface="Calibri"/>
+              </a:rPr>
+              <a:t>Preparation acting through the event rate (the simplest STZ-density reading)</a:t>
+            </a:r>
+          </a:p>
+        </p:txBody>
+      </p:sp>
+      <p:sp>
+        <p:nvSpPr>
+          <p:cNvPr id="9" name="Rounded Rectangle 8"/>
           <p:cNvSpPr/>
           <p:nvPr/>
         </p:nvSpPr>
@@ -5571,7 +5848,7 @@
                 </a:solidFill>
                 <a:latin typeface="Calibri"/>
               </a:rPr>
-              <a:t>Two cheap measurements — u₀ and reverse loading — decide the questions this dataset cannot.</a:t>
+              <a:t>The law and the model built on it hold at the few-percent level; their failures are located, quantified, and point at one slow variable and one non-Markov structure.</a:t>
             </a:r>
           </a:p>
         </p:txBody>
@@ -5623,7 +5900,7 @@
                 </a:solidFill>
                 <a:latin typeface="Calibri"/>
               </a:rPr>
-              <a:t>The dataset</a:t>
+              <a:t>The dataset, and the object of study</a:t>
             </a:r>
           </a:p>
         </p:txBody>
@@ -5652,7 +5929,7 @@
           <a:p>
             <a:pPr algn="ctr"/>
             <a:r>
-              <a:rPr sz="4000" b="1">
+              <a:rPr sz="3600" b="1">
                 <a:solidFill>
                   <a:srgbClr val="1E2761"/>
                 </a:solidFill>
@@ -5722,7 +5999,7 @@
           <a:p>
             <a:pPr algn="ctr"/>
             <a:r>
-              <a:rPr sz="4000" b="1">
+              <a:rPr sz="3600" b="1">
                 <a:solidFill>
                   <a:srgbClr val="1E2761"/>
                 </a:solidFill>
@@ -5763,7 +6040,7 @@
                 </a:solidFill>
                 <a:latin typeface="Calibri"/>
               </a:rPr>
-              <a:t>cooling rates</a:t>
+              <a:t>cooling rates (256×)</a:t>
             </a:r>
           </a:p>
         </p:txBody>
@@ -5792,13 +6069,13 @@
           <a:p>
             <a:pPr algn="ctr"/>
             <a:r>
-              <a:rPr sz="4000" b="1">
+              <a:rPr sz="3600" b="1">
                 <a:solidFill>
                   <a:srgbClr val="1E2761"/>
                 </a:solidFill>
                 <a:latin typeface="Calibri"/>
               </a:rPr>
-              <a:t>42.5M</a:t>
+              <a:t>187,468</a:t>
             </a:r>
           </a:p>
         </p:txBody>
@@ -5833,7 +6110,7 @@
                 </a:solidFill>
                 <a:latin typeface="Calibri"/>
               </a:rPr>
-              <a:t>transitions</a:t>
+              <a:t>stress-drop events</a:t>
             </a:r>
           </a:p>
         </p:txBody>
@@ -5862,13 +6139,13 @@
           <a:p>
             <a:pPr algn="ctr"/>
             <a:r>
-              <a:rPr sz="4000" b="1">
+              <a:rPr sz="3600" b="1">
                 <a:solidFill>
                   <a:srgbClr val="1E2761"/>
                 </a:solidFill>
                 <a:latin typeface="Calibri"/>
               </a:rPr>
-              <a:t>γ → 0.5</a:t>
+              <a:t>105,188</a:t>
             </a:r>
           </a:p>
         </p:txBody>
@@ -5903,7 +6180,7 @@
                 </a:solidFill>
                 <a:latin typeface="Calibri"/>
               </a:rPr>
-              <a:t>strain range</a:t>
+              <a:t>aging events</a:t>
             </a:r>
           </a:p>
         </p:txBody>
@@ -5917,7 +6194,7 @@
         <p:spPr>
           <a:xfrm>
             <a:off x="640080" y="2606040"/>
-            <a:ext cx="5394960" cy="3108960"/>
+            <a:ext cx="5394960" cy="3200400"/>
           </a:xfrm>
           <a:prstGeom prst="rect">
             <a:avLst/>
@@ -5959,7 +6236,7 @@
                 </a:solidFill>
                 <a:latin typeface="Calibri"/>
               </a:rPr>
-              <a:t>Athermal quasistatic (AQS) shear of a model glass</a:t>
+              <a:t>Athermal quasistatic shear of a model glass; Δγ = 10⁻⁵, 49,999 steps per run, γ → 0.5</a:t>
             </a:r>
           </a:p>
           <a:p>
@@ -5976,7 +6253,7 @@
                 </a:solidFill>
                 <a:latin typeface="Calibri"/>
               </a:rPr>
-              <a:t>Δγ = 10⁻⁵; 49,999 steps per trajectory</a:t>
+              <a:t>Cooling rates 2×10¹⁰ → 5.12×10¹² K/s in factor-of-2 steps, ~100 samples each</a:t>
             </a:r>
           </a:p>
           <a:p>
@@ -5993,7 +6270,46 @@
                 </a:solidFill>
                 <a:latin typeface="Calibri"/>
               </a:rPr>
-              <a:t>Cooling rates 2×10¹⁰ → 5.12×10¹² K/s in factor-of-2 steps</a:t>
+              <a:t>Per step: strain, stress, potential energy, cooling rate — nothing else is recorded</a:t>
+            </a:r>
+          </a:p>
+        </p:txBody>
+      </p:sp>
+      <p:sp>
+        <p:nvSpPr>
+          <p:cNvPr id="12" name="TextBox 11"/>
+          <p:cNvSpPr txBox="1"/>
+          <p:nvPr/>
+        </p:nvSpPr>
+        <p:spPr>
+          <a:xfrm>
+            <a:off x="6355080" y="2606040"/>
+            <a:ext cx="5303520" cy="3200400"/>
+          </a:xfrm>
+          <a:prstGeom prst="rect">
+            <a:avLst/>
+          </a:prstGeom>
+          <a:noFill/>
+        </p:spPr>
+        <p:txBody>
+          <a:bodyPr wrap="square" lIns="0" rIns="0" tIns="0" bIns="0">
+            <a:spAutoFit/>
+          </a:bodyPr>
+          <a:lstStyle/>
+          <a:p>
+            <a:pPr>
+              <a:spcAft>
+                <a:spcPts val="600"/>
+              </a:spcAft>
+            </a:pPr>
+            <a:r>
+              <a:rPr sz="1600" b="1">
+                <a:solidFill>
+                  <a:srgbClr val="1E2761"/>
+                </a:solidFill>
+                <a:latin typeface="Calibri"/>
+              </a:rPr>
+              <a:t>State and events</a:t>
             </a:r>
           </a:p>
           <a:p>
@@ -6010,46 +6326,7 @@
                 </a:solidFill>
                 <a:latin typeface="Calibri"/>
               </a:rPr>
-              <a:t>100 trajectories per rate (50 at the fastest)</a:t>
-            </a:r>
-          </a:p>
-        </p:txBody>
-      </p:sp>
-      <p:sp>
-        <p:nvSpPr>
-          <p:cNvPr id="12" name="TextBox 11"/>
-          <p:cNvSpPr txBox="1"/>
-          <p:nvPr/>
-        </p:nvSpPr>
-        <p:spPr>
-          <a:xfrm>
-            <a:off x="6355080" y="2606040"/>
-            <a:ext cx="5303520" cy="3108960"/>
-          </a:xfrm>
-          <a:prstGeom prst="rect">
-            <a:avLst/>
-          </a:prstGeom>
-          <a:noFill/>
-        </p:spPr>
-        <p:txBody>
-          <a:bodyPr wrap="square" lIns="0" rIns="0" tIns="0" bIns="0">
-            <a:spAutoFit/>
-          </a:bodyPr>
-          <a:lstStyle/>
-          <a:p>
-            <a:pPr>
-              <a:spcAft>
-                <a:spcPts val="600"/>
-              </a:spcAft>
-            </a:pPr>
-            <a:r>
-              <a:rPr sz="1600" b="1">
-                <a:solidFill>
-                  <a:srgbClr val="1E2761"/>
-                </a:solidFill>
-                <a:latin typeface="Calibri"/>
-              </a:rPr>
-              <a:t>State variables and events</a:t>
+              <a:t>u = pe − u₀ (energy above the reference), τ = stress/10⁴</a:t>
             </a:r>
           </a:p>
           <a:p>
@@ -6066,7 +6343,7 @@
                 </a:solidFill>
                 <a:latin typeface="Calibri"/>
               </a:rPr>
-              <a:t>u = pe − u₀  (inherent-structure energy above reference; u₀ dataset-derived)</a:t>
+              <a:t>Stress drop: a step with dτ &lt; 0, size s = −dτ;  aging: du &lt; 0 without a drop</a:t>
             </a:r>
           </a:p>
           <a:p>
@@ -6083,41 +6360,7 @@
                 </a:solidFill>
                 <a:latin typeface="Calibri"/>
               </a:rPr>
-              <a:t>τ = stress / 10⁴</a:t>
-            </a:r>
-          </a:p>
-          <a:p>
-            <a:pPr marL="228600" indent="-228600">
-              <a:spcAft>
-                <a:spcPts val="800"/>
-              </a:spcAft>
-              <a:buChar char="•"/>
-            </a:pPr>
-            <a:r>
-              <a:rPr sz="1500" b="0">
-                <a:solidFill>
-                  <a:srgbClr val="212121"/>
-                </a:solidFill>
-                <a:latin typeface="Calibri"/>
-              </a:rPr>
-              <a:t>Event = one-step drop (dτ &lt; 0 or du &lt; 0); 0.69% of steps</a:t>
-            </a:r>
-          </a:p>
-          <a:p>
-            <a:pPr marL="228600" indent="-228600">
-              <a:spcAft>
-                <a:spcPts val="800"/>
-              </a:spcAft>
-              <a:buChar char="•"/>
-            </a:pPr>
-            <a:r>
-              <a:rPr sz="1500" b="0">
-                <a:solidFill>
-                  <a:srgbClr val="212121"/>
-                </a:solidFill>
-                <a:latin typeface="Calibri"/>
-              </a:rPr>
-              <a:t>Initial u spans 60,000× across preparations</a:t>
+              <a:t>22 × 22 grid on (u,τ): inner 20 × 20 on the 0.2–99.8% quantiles plus a catch-all ring</a:t>
             </a:r>
           </a:p>
         </p:txBody>
@@ -6181,7 +6424,613 @@
                 </a:solidFill>
                 <a:latin typeface="Calibri"/>
               </a:rPr>
-              <a:t>A preparation-resolved AQS dataset: nine cooling rates × ~100 samples — enough statistics to measure constitutive fields, not just fit curves.</a:t>
+              <a:t>The target this time is the probability distribution of yield events, P(s | u,τ) — discovered, not assumed — and everything downstream is rebuilt from it.</a:t>
+            </a:r>
+          </a:p>
+        </p:txBody>
+      </p:sp>
+    </p:spTree>
+  </p:cSld>
+  <p:clrMapOvr>
+    <a:masterClrMapping/>
+  </p:clrMapOvr>
+</p:sld>
+</file>
+
+<file path=ppt/slides/slide20.xml><?xml version="1.0" encoding="utf-8"?>
+<p:sld xmlns:a="http://schemas.openxmlformats.org/drawingml/2006/main" xmlns:p="http://schemas.openxmlformats.org/presentationml/2006/main" xmlns:r="http://schemas.openxmlformats.org/officeDocument/2006/relationships">
+  <p:cSld>
+    <p:spTree>
+      <p:nvGrpSpPr>
+        <p:cNvPr id="1" name=""/>
+        <p:cNvGrpSpPr/>
+        <p:nvPr/>
+      </p:nvGrpSpPr>
+      <p:grpSpPr/>
+      <p:sp>
+        <p:nvSpPr>
+          <p:cNvPr id="2" name="TextBox 1"/>
+          <p:cNvSpPr txBox="1"/>
+          <p:nvPr/>
+        </p:nvSpPr>
+        <p:spPr>
+          <a:xfrm>
+            <a:off x="548640" y="292608"/>
+            <a:ext cx="11091672" cy="685800"/>
+          </a:xfrm>
+          <a:prstGeom prst="rect">
+            <a:avLst/>
+          </a:prstGeom>
+          <a:noFill/>
+        </p:spPr>
+        <p:txBody>
+          <a:bodyPr wrap="square" lIns="0" rIns="0" tIns="0" bIns="0">
+            <a:spAutoFit/>
+          </a:bodyPr>
+          <a:lstStyle/>
+          <a:p>
+            <a:r>
+              <a:rPr sz="3000" b="1">
+                <a:solidFill>
+                  <a:srgbClr val="1E2761"/>
+                </a:solidFill>
+                <a:latin typeface="Calibri"/>
+              </a:rPr>
+              <a:t>Recommended next steps</a:t>
+            </a:r>
+          </a:p>
+        </p:txBody>
+      </p:sp>
+      <p:sp>
+        <p:nvSpPr>
+          <p:cNvPr id="3" name="Oval 2"/>
+          <p:cNvSpPr/>
+          <p:nvPr/>
+        </p:nvSpPr>
+        <p:spPr>
+          <a:xfrm>
+            <a:off x="685800" y="1280160"/>
+            <a:ext cx="457200" cy="457200"/>
+          </a:xfrm>
+          <a:prstGeom prst="ellipse">
+            <a:avLst/>
+          </a:prstGeom>
+          <a:solidFill>
+            <a:srgbClr val="1E2761"/>
+          </a:solidFill>
+          <a:ln>
+            <a:noFill/>
+          </a:ln>
+          <a:effectLst/>
+        </p:spPr>
+        <p:style>
+          <a:lnRef idx="1">
+            <a:schemeClr val="accent1"/>
+          </a:lnRef>
+          <a:fillRef idx="3">
+            <a:schemeClr val="accent1"/>
+          </a:fillRef>
+          <a:effectRef idx="2">
+            <a:schemeClr val="accent1"/>
+          </a:effectRef>
+          <a:fontRef idx="minor">
+            <a:schemeClr val="lt1"/>
+          </a:fontRef>
+        </p:style>
+        <p:txBody>
+          <a:bodyPr rtlCol="0" anchor="ctr" lIns="0" rIns="0"/>
+          <a:lstStyle/>
+          <a:p>
+            <a:pPr algn="ctr"/>
+            <a:r>
+              <a:rPr sz="1500" b="1">
+                <a:solidFill>
+                  <a:srgbClr val="FFFFFF"/>
+                </a:solidFill>
+                <a:latin typeface="Calibri"/>
+              </a:rPr>
+              <a:t>1</a:t>
+            </a:r>
+          </a:p>
+        </p:txBody>
+      </p:sp>
+      <p:sp>
+        <p:nvSpPr>
+          <p:cNvPr id="4" name="TextBox 3"/>
+          <p:cNvSpPr txBox="1"/>
+          <p:nvPr/>
+        </p:nvSpPr>
+        <p:spPr>
+          <a:xfrm>
+            <a:off x="1371600" y="1234440"/>
+            <a:ext cx="10241280" cy="868680"/>
+          </a:xfrm>
+          <a:prstGeom prst="rect">
+            <a:avLst/>
+          </a:prstGeom>
+          <a:noFill/>
+        </p:spPr>
+        <p:txBody>
+          <a:bodyPr wrap="square" lIns="0" rIns="0" tIns="0" bIns="0">
+            <a:spAutoFit/>
+          </a:bodyPr>
+          <a:lstStyle/>
+          <a:p>
+            <a:r>
+              <a:rPr sz="1500" b="1">
+                <a:solidFill>
+                  <a:srgbClr val="1E2761"/>
+                </a:solidFill>
+                <a:latin typeface="Calibri"/>
+              </a:rPr>
+              <a:t>A per-step structural observable from the MD</a:t>
+            </a:r>
+          </a:p>
+          <a:p>
+            <a:r>
+              <a:rPr sz="1300" b="0">
+                <a:solidFill>
+                  <a:srgbClr val="212121"/>
+                </a:solidFill>
+                <a:latin typeface="Calibri"/>
+              </a:rPr>
+              <a:t>written alongside pe (local order, soft modes): the one test is whether it absorbs the ceiling’s β = −0.117 while leaving the hazard’s β at zero; it is also the last lever on the variance gap</a:t>
+            </a:r>
+          </a:p>
+        </p:txBody>
+      </p:sp>
+      <p:sp>
+        <p:nvSpPr>
+          <p:cNvPr id="5" name="Oval 4"/>
+          <p:cNvSpPr/>
+          <p:nvPr/>
+        </p:nvSpPr>
+        <p:spPr>
+          <a:xfrm>
+            <a:off x="685800" y="2194560"/>
+            <a:ext cx="457200" cy="457200"/>
+          </a:xfrm>
+          <a:prstGeom prst="ellipse">
+            <a:avLst/>
+          </a:prstGeom>
+          <a:solidFill>
+            <a:srgbClr val="1E2761"/>
+          </a:solidFill>
+          <a:ln>
+            <a:noFill/>
+          </a:ln>
+          <a:effectLst/>
+        </p:spPr>
+        <p:style>
+          <a:lnRef idx="1">
+            <a:schemeClr val="accent1"/>
+          </a:lnRef>
+          <a:fillRef idx="3">
+            <a:schemeClr val="accent1"/>
+          </a:fillRef>
+          <a:effectRef idx="2">
+            <a:schemeClr val="accent1"/>
+          </a:effectRef>
+          <a:fontRef idx="minor">
+            <a:schemeClr val="lt1"/>
+          </a:fontRef>
+        </p:style>
+        <p:txBody>
+          <a:bodyPr rtlCol="0" anchor="ctr" lIns="0" rIns="0"/>
+          <a:lstStyle/>
+          <a:p>
+            <a:pPr algn="ctr"/>
+            <a:r>
+              <a:rPr sz="1500" b="1">
+                <a:solidFill>
+                  <a:srgbClr val="FFFFFF"/>
+                </a:solidFill>
+                <a:latin typeface="Calibri"/>
+              </a:rPr>
+              <a:t>2</a:t>
+            </a:r>
+          </a:p>
+        </p:txBody>
+      </p:sp>
+      <p:sp>
+        <p:nvSpPr>
+          <p:cNvPr id="6" name="TextBox 5"/>
+          <p:cNvSpPr txBox="1"/>
+          <p:nvPr/>
+        </p:nvSpPr>
+        <p:spPr>
+          <a:xfrm>
+            <a:off x="1371600" y="2148840"/>
+            <a:ext cx="10241280" cy="868680"/>
+          </a:xfrm>
+          <a:prstGeom prst="rect">
+            <a:avLst/>
+          </a:prstGeom>
+          <a:noFill/>
+        </p:spPr>
+        <p:txBody>
+          <a:bodyPr wrap="square" lIns="0" rIns="0" tIns="0" bIns="0">
+            <a:spAutoFit/>
+          </a:bodyPr>
+          <a:lstStyle/>
+          <a:p>
+            <a:r>
+              <a:rPr sz="1500" b="1">
+                <a:solidFill>
+                  <a:srgbClr val="1E2761"/>
+                </a:solidFill>
+                <a:latin typeface="Calibri"/>
+              </a:rPr>
+              <a:t>Runs past γ = 0.5</a:t>
+            </a:r>
+          </a:p>
+          <a:p>
+            <a:r>
+              <a:rPr sz="1300" b="0">
+                <a:solidFill>
+                  <a:srgbClr val="212121"/>
+                </a:solidFill>
+                <a:latin typeface="Calibri"/>
+              </a:rPr>
+              <a:t>one preparation to γ ≈ 2 settles whether the coupling memory relaxes like the ceiling memory, and whether preparations converge</a:t>
+            </a:r>
+          </a:p>
+        </p:txBody>
+      </p:sp>
+      <p:sp>
+        <p:nvSpPr>
+          <p:cNvPr id="7" name="Oval 6"/>
+          <p:cNvSpPr/>
+          <p:nvPr/>
+        </p:nvSpPr>
+        <p:spPr>
+          <a:xfrm>
+            <a:off x="685800" y="3108960"/>
+            <a:ext cx="457200" cy="457200"/>
+          </a:xfrm>
+          <a:prstGeom prst="ellipse">
+            <a:avLst/>
+          </a:prstGeom>
+          <a:solidFill>
+            <a:srgbClr val="1E2761"/>
+          </a:solidFill>
+          <a:ln>
+            <a:noFill/>
+          </a:ln>
+          <a:effectLst/>
+        </p:spPr>
+        <p:style>
+          <a:lnRef idx="1">
+            <a:schemeClr val="accent1"/>
+          </a:lnRef>
+          <a:fillRef idx="3">
+            <a:schemeClr val="accent1"/>
+          </a:fillRef>
+          <a:effectRef idx="2">
+            <a:schemeClr val="accent1"/>
+          </a:effectRef>
+          <a:fontRef idx="minor">
+            <a:schemeClr val="lt1"/>
+          </a:fontRef>
+        </p:style>
+        <p:txBody>
+          <a:bodyPr rtlCol="0" anchor="ctr" lIns="0" rIns="0"/>
+          <a:lstStyle/>
+          <a:p>
+            <a:pPr algn="ctr"/>
+            <a:r>
+              <a:rPr sz="1500" b="1">
+                <a:solidFill>
+                  <a:srgbClr val="FFFFFF"/>
+                </a:solidFill>
+                <a:latin typeface="Calibri"/>
+              </a:rPr>
+              <a:t>3</a:t>
+            </a:r>
+          </a:p>
+        </p:txBody>
+      </p:sp>
+      <p:sp>
+        <p:nvSpPr>
+          <p:cNvPr id="8" name="TextBox 7"/>
+          <p:cNvSpPr txBox="1"/>
+          <p:nvPr/>
+        </p:nvSpPr>
+        <p:spPr>
+          <a:xfrm>
+            <a:off x="1371600" y="3063240"/>
+            <a:ext cx="10241280" cy="868680"/>
+          </a:xfrm>
+          <a:prstGeom prst="rect">
+            <a:avLst/>
+          </a:prstGeom>
+          <a:noFill/>
+        </p:spPr>
+        <p:txBody>
+          <a:bodyPr wrap="square" lIns="0" rIns="0" tIns="0" bIns="0">
+            <a:spAutoFit/>
+          </a:bodyPr>
+          <a:lstStyle/>
+          <a:p>
+            <a:r>
+              <a:rPr sz="1500" b="1">
+                <a:solidFill>
+                  <a:srgbClr val="1E2761"/>
+                </a:solidFill>
+                <a:latin typeface="Calibri"/>
+              </a:rPr>
+              <a:t>System size N, ideally two sizes</a:t>
+            </a:r>
+          </a:p>
+          <a:p>
+            <a:r>
+              <a:rPr sz="1300" b="0">
+                <a:solidFill>
+                  <a:srgbClr val="212121"/>
+                </a:solidFill>
+                <a:latin typeface="Calibri"/>
+              </a:rPr>
+              <a:t>the finite-size reading of the ceiling s_c stands or falls with it</a:t>
+            </a:r>
+          </a:p>
+        </p:txBody>
+      </p:sp>
+      <p:sp>
+        <p:nvSpPr>
+          <p:cNvPr id="9" name="Oval 8"/>
+          <p:cNvSpPr/>
+          <p:nvPr/>
+        </p:nvSpPr>
+        <p:spPr>
+          <a:xfrm>
+            <a:off x="685800" y="4023359"/>
+            <a:ext cx="457200" cy="457200"/>
+          </a:xfrm>
+          <a:prstGeom prst="ellipse">
+            <a:avLst/>
+          </a:prstGeom>
+          <a:solidFill>
+            <a:srgbClr val="1E2761"/>
+          </a:solidFill>
+          <a:ln>
+            <a:noFill/>
+          </a:ln>
+          <a:effectLst/>
+        </p:spPr>
+        <p:style>
+          <a:lnRef idx="1">
+            <a:schemeClr val="accent1"/>
+          </a:lnRef>
+          <a:fillRef idx="3">
+            <a:schemeClr val="accent1"/>
+          </a:fillRef>
+          <a:effectRef idx="2">
+            <a:schemeClr val="accent1"/>
+          </a:effectRef>
+          <a:fontRef idx="minor">
+            <a:schemeClr val="lt1"/>
+          </a:fontRef>
+        </p:style>
+        <p:txBody>
+          <a:bodyPr rtlCol="0" anchor="ctr" lIns="0" rIns="0"/>
+          <a:lstStyle/>
+          <a:p>
+            <a:pPr algn="ctr"/>
+            <a:r>
+              <a:rPr sz="1500" b="1">
+                <a:solidFill>
+                  <a:srgbClr val="FFFFFF"/>
+                </a:solidFill>
+                <a:latin typeface="Calibri"/>
+              </a:rPr>
+              <a:t>4</a:t>
+            </a:r>
+          </a:p>
+        </p:txBody>
+      </p:sp>
+      <p:sp>
+        <p:nvSpPr>
+          <p:cNvPr id="10" name="TextBox 9"/>
+          <p:cNvSpPr txBox="1"/>
+          <p:nvPr/>
+        </p:nvSpPr>
+        <p:spPr>
+          <a:xfrm>
+            <a:off x="1371600" y="3977639"/>
+            <a:ext cx="10241280" cy="868680"/>
+          </a:xfrm>
+          <a:prstGeom prst="rect">
+            <a:avLst/>
+          </a:prstGeom>
+          <a:noFill/>
+        </p:spPr>
+        <p:txBody>
+          <a:bodyPr wrap="square" lIns="0" rIns="0" tIns="0" bIns="0">
+            <a:spAutoFit/>
+          </a:bodyPr>
+          <a:lstStyle/>
+          <a:p>
+            <a:r>
+              <a:rPr sz="1500" b="1">
+                <a:solidFill>
+                  <a:srgbClr val="1E2761"/>
+                </a:solidFill>
+                <a:latin typeface="Calibri"/>
+              </a:rPr>
+              <a:t>Reverse loading</a:t>
+            </a:r>
+          </a:p>
+          <a:p>
+            <a:r>
+              <a:rPr sz="1300" b="0">
+                <a:solidFill>
+                  <a:srgbClr val="212121"/>
+                </a:solidFill>
+                <a:latin typeface="Calibri"/>
+              </a:rPr>
+              <a:t>unchanged from the first pass — parity test for a back-stress variable</a:t>
+            </a:r>
+          </a:p>
+        </p:txBody>
+      </p:sp>
+      <p:sp>
+        <p:nvSpPr>
+          <p:cNvPr id="11" name="Oval 10"/>
+          <p:cNvSpPr/>
+          <p:nvPr/>
+        </p:nvSpPr>
+        <p:spPr>
+          <a:xfrm>
+            <a:off x="685800" y="4937759"/>
+            <a:ext cx="457200" cy="457200"/>
+          </a:xfrm>
+          <a:prstGeom prst="ellipse">
+            <a:avLst/>
+          </a:prstGeom>
+          <a:solidFill>
+            <a:srgbClr val="1E2761"/>
+          </a:solidFill>
+          <a:ln>
+            <a:noFill/>
+          </a:ln>
+          <a:effectLst/>
+        </p:spPr>
+        <p:style>
+          <a:lnRef idx="1">
+            <a:schemeClr val="accent1"/>
+          </a:lnRef>
+          <a:fillRef idx="3">
+            <a:schemeClr val="accent1"/>
+          </a:fillRef>
+          <a:effectRef idx="2">
+            <a:schemeClr val="accent1"/>
+          </a:effectRef>
+          <a:fontRef idx="minor">
+            <a:schemeClr val="lt1"/>
+          </a:fontRef>
+        </p:style>
+        <p:txBody>
+          <a:bodyPr rtlCol="0" anchor="ctr" lIns="0" rIns="0"/>
+          <a:lstStyle/>
+          <a:p>
+            <a:pPr algn="ctr"/>
+            <a:r>
+              <a:rPr sz="1500" b="1">
+                <a:solidFill>
+                  <a:srgbClr val="FFFFFF"/>
+                </a:solidFill>
+                <a:latin typeface="Calibri"/>
+              </a:rPr>
+              <a:t>5</a:t>
+            </a:r>
+          </a:p>
+        </p:txBody>
+      </p:sp>
+      <p:sp>
+        <p:nvSpPr>
+          <p:cNvPr id="12" name="TextBox 11"/>
+          <p:cNvSpPr txBox="1"/>
+          <p:nvPr/>
+        </p:nvSpPr>
+        <p:spPr>
+          <a:xfrm>
+            <a:off x="1371600" y="4892040"/>
+            <a:ext cx="10241280" cy="868680"/>
+          </a:xfrm>
+          <a:prstGeom prst="rect">
+            <a:avLst/>
+          </a:prstGeom>
+          <a:noFill/>
+        </p:spPr>
+        <p:txBody>
+          <a:bodyPr wrap="square" lIns="0" rIns="0" tIns="0" bIns="0">
+            <a:spAutoFit/>
+          </a:bodyPr>
+          <a:lstStyle/>
+          <a:p>
+            <a:r>
+              <a:rPr sz="1500" b="1">
+                <a:solidFill>
+                  <a:srgbClr val="1E2761"/>
+                </a:solidFill>
+                <a:latin typeface="Calibri"/>
+              </a:rPr>
+              <a:t>Interim model</a:t>
+            </a:r>
+          </a:p>
+          <a:p>
+            <a:r>
+              <a:rPr sz="1300" b="0">
+                <a:solidFill>
+                  <a:srgbClr val="212121"/>
+                </a:solidFill>
+                <a:latin typeface="Calibri"/>
+              </a:rPr>
+              <a:t>the ceiling law with the one-parameter preparation memory and the aftershock hazard — the yield strength of a glass from its preparation history, to a few percent</a:t>
+            </a:r>
+          </a:p>
+        </p:txBody>
+      </p:sp>
+      <p:sp>
+        <p:nvSpPr>
+          <p:cNvPr id="13" name="Rounded Rectangle 12"/>
+          <p:cNvSpPr/>
+          <p:nvPr/>
+        </p:nvSpPr>
+        <p:spPr>
+          <a:xfrm>
+            <a:off x="548640" y="6053328"/>
+            <a:ext cx="11091672" cy="566928"/>
+          </a:xfrm>
+          <a:prstGeom prst="roundRect">
+            <a:avLst>
+              <a:gd name="adj" fmla="val 18000"/>
+            </a:avLst>
+          </a:prstGeom>
+          <a:solidFill>
+            <a:srgbClr val="F2F2F2"/>
+          </a:solidFill>
+          <a:ln>
+            <a:noFill/>
+          </a:ln>
+          <a:effectLst/>
+        </p:spPr>
+        <p:style>
+          <a:lnRef idx="1">
+            <a:schemeClr val="accent1"/>
+          </a:lnRef>
+          <a:fillRef idx="3">
+            <a:schemeClr val="accent1"/>
+          </a:fillRef>
+          <a:effectRef idx="2">
+            <a:schemeClr val="accent1"/>
+          </a:effectRef>
+          <a:fontRef idx="minor">
+            <a:schemeClr val="lt1"/>
+          </a:fontRef>
+        </p:style>
+        <p:txBody>
+          <a:bodyPr rtlCol="0" anchor="ctr" wrap="square" lIns="164592" rIns="164592" tIns="0" bIns="0"/>
+          <a:lstStyle/>
+          <a:p>
+            <a:pPr algn="ctr"/>
+            <a:r>
+              <a:rPr sz="1350" b="1">
+                <a:solidFill>
+                  <a:srgbClr val="1E2761"/>
+                </a:solidFill>
+                <a:latin typeface="Calibri"/>
+              </a:rPr>
+              <a:t>Takeaway — </a:t>
+            </a:r>
+            <a:r>
+              <a:rPr sz="1350" b="0">
+                <a:solidFill>
+                  <a:srgbClr val="212121"/>
+                </a:solidFill>
+                <a:latin typeface="Calibri"/>
+              </a:rPr>
+              <a:t>Everything here is regenerated from the raw data by pipeline/run_all.sh (43 min); Figures 1–22 and the README carry the details.</a:t>
             </a:r>
           </a:p>
         </p:txBody>
@@ -6233,69 +7082,21 @@
                 </a:solidFill>
                 <a:latin typeface="Calibri"/>
               </a:rPr>
-              <a:t>Preparation phenomenology</a:t>
-            </a:r>
-          </a:p>
-        </p:txBody>
-      </p:sp>
-      <p:pic>
-        <p:nvPicPr>
-          <p:cNvPr id="3" name="Picture 2" descr="ss_a.png"/>
-          <p:cNvPicPr>
-            <a:picLocks noChangeAspect="1"/>
-          </p:cNvPicPr>
-          <p:nvPr/>
-        </p:nvPicPr>
-        <p:blipFill>
-          <a:blip r:embed="rId2"/>
-          <a:stretch>
-            <a:fillRect/>
-          </a:stretch>
-        </p:blipFill>
-        <p:spPr>
-          <a:xfrm>
-            <a:off x="502920" y="1188720"/>
-            <a:ext cx="5577840" cy="3858768"/>
-          </a:xfrm>
-          <a:prstGeom prst="rect">
-            <a:avLst/>
-          </a:prstGeom>
-        </p:spPr>
-      </p:pic>
-      <p:pic>
-        <p:nvPicPr>
-          <p:cNvPr id="4" name="Picture 3" descr="ss_b.png"/>
-          <p:cNvPicPr>
-            <a:picLocks noChangeAspect="1"/>
-          </p:cNvPicPr>
-          <p:nvPr/>
-        </p:nvPicPr>
-        <p:blipFill>
-          <a:blip r:embed="rId3"/>
-          <a:stretch>
-            <a:fillRect/>
-          </a:stretch>
-        </p:blipFill>
-        <p:spPr>
-          <a:xfrm>
-            <a:off x="6172200" y="1188720"/>
-            <a:ext cx="5577840" cy="3858768"/>
-          </a:xfrm>
-          <a:prstGeom prst="rect">
-            <a:avLst/>
-          </a:prstGeom>
-        </p:spPr>
-      </p:pic>
-      <p:sp>
-        <p:nvSpPr>
-          <p:cNvPr id="5" name="TextBox 4"/>
+              <a:t>Framework: the step process as drift + jumps</a:t>
+            </a:r>
+          </a:p>
+        </p:txBody>
+      </p:sp>
+      <p:sp>
+        <p:nvSpPr>
+          <p:cNvPr id="3" name="TextBox 2"/>
           <p:cNvSpPr txBox="1"/>
           <p:nvPr/>
         </p:nvSpPr>
         <p:spPr>
           <a:xfrm>
-            <a:off x="640080" y="5257800"/>
-            <a:ext cx="10972800" cy="640080"/>
+            <a:off x="640080" y="1234440"/>
+            <a:ext cx="5394960" cy="4480560"/>
           </a:xfrm>
           <a:prstGeom prst="rect">
             <a:avLst/>
@@ -6308,21 +7109,167 @@
           </a:bodyPr>
           <a:lstStyle/>
           <a:p>
-            <a:r>
-              <a:rPr sz="1350" b="0">
-                <a:solidFill>
-                  <a:srgbClr val="212121"/>
-                </a:solidFill>
-                <a:latin typeface="Calibri"/>
-              </a:rPr>
-              <a:t>Peak stress falls monotonically with faster cooling (1.96 → 1.30); overshoot fraction 0.45 → 0.24.  In every strain window u still drifts up and τ drifts down — all “steady-state” quantities are extrapolations.</a:t>
-            </a:r>
-          </a:p>
-        </p:txBody>
-      </p:sp>
-      <p:sp>
-        <p:nvSpPr>
-          <p:cNvPr id="6" name="Rounded Rectangle 5"/>
+            <a:pPr>
+              <a:spcAft>
+                <a:spcPts val="600"/>
+              </a:spcAft>
+            </a:pPr>
+            <a:r>
+              <a:rPr sz="1600" b="1">
+                <a:solidFill>
+                  <a:srgbClr val="1E2761"/>
+                </a:solidFill>
+                <a:latin typeface="Calibri"/>
+              </a:rPr>
+              <a:t>Three fields measured directly, per cell</a:t>
+            </a:r>
+          </a:p>
+          <a:p>
+            <a:pPr marL="228600" indent="-228600">
+              <a:spcAft>
+                <a:spcPts val="800"/>
+              </a:spcAft>
+              <a:buChar char="•"/>
+            </a:pPr>
+            <a:r>
+              <a:rPr sz="1500" b="0">
+                <a:solidFill>
+                  <a:srgbClr val="212121"/>
+                </a:solidFill>
+                <a:latin typeface="Calibri"/>
+              </a:rPr>
+              <a:t>Elastic drift 2μ(u,τ), and the energy drift on quiet steps</a:t>
+            </a:r>
+          </a:p>
+          <a:p>
+            <a:pPr marL="228600" indent="-228600">
+              <a:spcAft>
+                <a:spcPts val="800"/>
+              </a:spcAft>
+              <a:buChar char="•"/>
+            </a:pPr>
+            <a:r>
+              <a:rPr sz="1500" b="0">
+                <a:solidFill>
+                  <a:srgbClr val="212121"/>
+                </a:solidFill>
+                <a:latin typeface="Calibri"/>
+              </a:rPr>
+              <a:t>Event hazard p(u,τ): fraction of steps that drop (median 0.32% per step)</a:t>
+            </a:r>
+          </a:p>
+          <a:p>
+            <a:pPr marL="228600" indent="-228600">
+              <a:spcAft>
+                <a:spcPts val="800"/>
+              </a:spcAft>
+              <a:buChar char="•"/>
+            </a:pPr>
+            <a:r>
+              <a:rPr sz="1500" b="0">
+                <a:solidFill>
+                  <a:srgbClr val="212121"/>
+                </a:solidFill>
+                <a:latin typeface="Calibri"/>
+              </a:rPr>
+              <a:t>Energy released per event: du = a + b·s + noise, per cell; an aging channel alongside</a:t>
+            </a:r>
+          </a:p>
+        </p:txBody>
+      </p:sp>
+      <p:sp>
+        <p:nvSpPr>
+          <p:cNvPr id="4" name="TextBox 3"/>
+          <p:cNvSpPr txBox="1"/>
+          <p:nvPr/>
+        </p:nvSpPr>
+        <p:spPr>
+          <a:xfrm>
+            <a:off x="6355080" y="1234440"/>
+            <a:ext cx="5303520" cy="4480560"/>
+          </a:xfrm>
+          <a:prstGeom prst="rect">
+            <a:avLst/>
+          </a:prstGeom>
+          <a:noFill/>
+        </p:spPr>
+        <p:txBody>
+          <a:bodyPr wrap="square" lIns="0" rIns="0" tIns="0" bIns="0">
+            <a:spAutoFit/>
+          </a:bodyPr>
+          <a:lstStyle/>
+          <a:p>
+            <a:pPr>
+              <a:spcAft>
+                <a:spcPts val="600"/>
+              </a:spcAft>
+            </a:pPr>
+            <a:r>
+              <a:rPr sz="1600" b="1">
+                <a:solidFill>
+                  <a:srgbClr val="1E2761"/>
+                </a:solidFill>
+                <a:latin typeface="Calibri"/>
+              </a:rPr>
+              <a:t>One law to discover</a:t>
+            </a:r>
+          </a:p>
+          <a:p>
+            <a:pPr marL="228600" indent="-228600">
+              <a:spcAft>
+                <a:spcPts val="800"/>
+              </a:spcAft>
+              <a:buChar char="•"/>
+            </a:pPr>
+            <a:r>
+              <a:rPr sz="1500" b="0">
+                <a:solidFill>
+                  <a:srgbClr val="212121"/>
+                </a:solidFill>
+                <a:latin typeface="Calibri"/>
+              </a:rPr>
+              <a:t>The size distribution P(s | u,τ): four decades of s, 187k events</a:t>
+            </a:r>
+          </a:p>
+          <a:p>
+            <a:pPr marL="228600" indent="-228600">
+              <a:spcAft>
+                <a:spcPts val="800"/>
+              </a:spcAft>
+              <a:buChar char="•"/>
+            </a:pPr>
+            <a:r>
+              <a:rPr sz="1500" b="0">
+                <a:solidFill>
+                  <a:srgbClr val="212121"/>
+                </a:solidFill>
+                <a:latin typeface="Calibri"/>
+              </a:rPr>
+              <a:t>First pass assumed a truncated power law (TPL); this pass asks the data for the form</a:t>
+            </a:r>
+          </a:p>
+          <a:p>
+            <a:pPr marL="228600" indent="-228600">
+              <a:spcAft>
+                <a:spcPts val="800"/>
+              </a:spcAft>
+              <a:buChar char="•"/>
+            </a:pPr>
+            <a:r>
+              <a:rPr sz="1500" b="0">
+                <a:solidFill>
+                  <a:srgbClr val="212121"/>
+                </a:solidFill>
+                <a:latin typeface="Calibri"/>
+              </a:rPr>
+              <a:t>Everything downstream — mean sizes, the plastic-rate field q, full synthetic stress–strain curves — is then derived from the fitted law and compared with its measured counterpart</a:t>
+            </a:r>
+          </a:p>
+        </p:txBody>
+      </p:sp>
+      <p:sp>
+        <p:nvSpPr>
+          <p:cNvPr id="5" name="Rounded Rectangle 4"/>
           <p:cNvSpPr/>
           <p:nvPr/>
         </p:nvSpPr>
@@ -6379,7 +7326,7 @@
                 </a:solidFill>
                 <a:latin typeface="Calibri"/>
               </a:rPr>
-              <a:t>Textbook effective-temperature behavior — but no preparation reaches steady state by γ = 0.5.</a:t>
+              <a:t>Where derived and measured agree, the law carries the physics; where they disagree, we say so.</a:t>
             </a:r>
           </a:p>
         </p:txBody>
@@ -6431,69 +7378,21 @@
                 </a:solidFill>
                 <a:latin typeface="Calibri"/>
               </a:rPr>
-              <a:t>How far from steady state?</a:t>
-            </a:r>
-          </a:p>
-        </p:txBody>
-      </p:sp>
-      <p:pic>
-        <p:nvPicPr>
-          <p:cNvPr id="3" name="Picture 2" descr="ext_a.png"/>
-          <p:cNvPicPr>
-            <a:picLocks noChangeAspect="1"/>
-          </p:cNvPicPr>
-          <p:nvPr/>
-        </p:nvPicPr>
-        <p:blipFill>
-          <a:blip r:embed="rId2"/>
-          <a:stretch>
-            <a:fillRect/>
-          </a:stretch>
-        </p:blipFill>
-        <p:spPr>
-          <a:xfrm>
-            <a:off x="502920" y="1188720"/>
-            <a:ext cx="5577840" cy="3858768"/>
-          </a:xfrm>
-          <a:prstGeom prst="rect">
-            <a:avLst/>
-          </a:prstGeom>
-        </p:spPr>
-      </p:pic>
-      <p:pic>
-        <p:nvPicPr>
-          <p:cNvPr id="4" name="Picture 3" descr="ext_b.png"/>
-          <p:cNvPicPr>
-            <a:picLocks noChangeAspect="1"/>
-          </p:cNvPicPr>
-          <p:nvPr/>
-        </p:nvPicPr>
-        <p:blipFill>
-          <a:blip r:embed="rId3"/>
-          <a:stretch>
-            <a:fillRect/>
-          </a:stretch>
-        </p:blipFill>
-        <p:spPr>
-          <a:xfrm>
-            <a:off x="6172200" y="1188720"/>
-            <a:ext cx="5577840" cy="3858768"/>
-          </a:xfrm>
-          <a:prstGeom prst="rect">
-            <a:avLst/>
-          </a:prstGeom>
-        </p:spPr>
-      </p:pic>
-      <p:sp>
-        <p:nvSpPr>
-          <p:cNvPr id="5" name="TextBox 4"/>
+              <a:t>Symbolic regression, built for scrutiny</a:t>
+            </a:r>
+          </a:p>
+        </p:txBody>
+      </p:sp>
+      <p:sp>
+        <p:nvSpPr>
+          <p:cNvPr id="3" name="TextBox 2"/>
           <p:cNvSpPr txBox="1"/>
           <p:nvPr/>
         </p:nvSpPr>
         <p:spPr>
           <a:xfrm>
-            <a:off x="640080" y="5257800"/>
-            <a:ext cx="10972800" cy="640080"/>
+            <a:off x="640080" y="1234440"/>
+            <a:ext cx="5394960" cy="4480560"/>
           </a:xfrm>
           <a:prstGeom prst="rect">
             <a:avLst/>
@@ -6506,21 +7405,201 @@
           </a:bodyPr>
           <a:lstStyle/>
           <a:p>
-            <a:r>
-              <a:rPr sz="1300" b="0">
-                <a:solidFill>
-                  <a:srgbClr val="212121"/>
-                </a:solidFill>
-                <a:latin typeface="Calibri"/>
-              </a:rPr>
-              <a:t>Fits use the relaxation form effective-temperature theory itself predicts. The slowest-cooled ensemble still has 11.4% of its gap open at γ = 0.5 (γc = 0.32); 95% closure needs total strain ≈ 0.8–1.5.  Extrapolated fixed points retain a 10.2% spread in u∞ and 8.5% in flow stress — slower-than-exponential modes, or genuinely preparation-dependent attractors.</a:t>
-            </a:r>
-          </a:p>
-        </p:txBody>
-      </p:sp>
-      <p:sp>
-        <p:nvSpPr>
-          <p:cNvPr id="6" name="Rounded Rectangle 5"/>
+            <a:pPr>
+              <a:spcAft>
+                <a:spcPts val="600"/>
+              </a:spcAft>
+            </a:pPr>
+            <a:r>
+              <a:rPr sz="1600" b="1">
+                <a:solidFill>
+                  <a:srgbClr val="1E2761"/>
+                </a:solidFill>
+                <a:latin typeface="Calibri"/>
+              </a:rPr>
+              <a:t>Engine  (library/symreg.py)</a:t>
+            </a:r>
+          </a:p>
+          <a:p>
+            <a:pPr marL="228600" indent="-228600">
+              <a:spcAft>
+                <a:spcPts val="800"/>
+              </a:spcAft>
+              <a:buChar char="•"/>
+            </a:pPr>
+            <a:r>
+              <a:rPr sz="1500" b="0">
+                <a:solidFill>
+                  <a:srgbClr val="212121"/>
+                </a:solidFill>
+                <a:latin typeface="Calibri"/>
+              </a:rPr>
+              <a:t>Exhaustive enumeration of expression trees: unary exp, log, 1/x, x², √x, −x; binary + − × ÷</a:t>
+            </a:r>
+          </a:p>
+          <a:p>
+            <a:pPr marL="228600" indent="-228600">
+              <a:spcAft>
+                <a:spcPts val="800"/>
+              </a:spcAft>
+              <a:buChar char="•"/>
+            </a:pPr>
+            <a:r>
+              <a:rPr sz="1500" b="0">
+                <a:solidFill>
+                  <a:srgbClr val="212121"/>
+                </a:solidFill>
+                <a:latin typeface="Calibri"/>
+              </a:rPr>
+              <a:t>Up to two constants fitted inside the nonlinearity (Levenberg–Marquardt, 4 restarts); outer affine profiled out</a:t>
+            </a:r>
+          </a:p>
+          <a:p>
+            <a:pPr marL="228600" indent="-228600">
+              <a:spcAft>
+                <a:spcPts val="800"/>
+              </a:spcAft>
+              <a:buChar char="•"/>
+            </a:pPr>
+            <a:r>
+              <a:rPr sz="1500" b="0">
+                <a:solidFill>
+                  <a:srgbClr val="212121"/>
+                </a:solidFill>
+                <a:latin typeface="Calibri"/>
+              </a:rPr>
+              <a:t>Numerical fingerprint dedup; hard admissibility (monotone decreasing); exact Pareto fronts</a:t>
+            </a:r>
+          </a:p>
+          <a:p>
+            <a:pPr marL="228600" indent="-228600">
+              <a:spcAft>
+                <a:spcPts val="800"/>
+              </a:spcAft>
+              <a:buChar char="•"/>
+            </a:pPr>
+            <a:r>
+              <a:rPr sz="1500" b="0">
+                <a:solidFill>
+                  <a:srgbClr val="212121"/>
+                </a:solidFill>
+                <a:latin typeface="Calibri"/>
+              </a:rPr>
+              <a:t>Complexity ≤ 8: 624,936 trees → ~14,000 distinct functions → ~10,300 admissible per cell</a:t>
+            </a:r>
+          </a:p>
+        </p:txBody>
+      </p:sp>
+      <p:sp>
+        <p:nvSpPr>
+          <p:cNvPr id="4" name="TextBox 3"/>
+          <p:cNvSpPr txBox="1"/>
+          <p:nvPr/>
+        </p:nvSpPr>
+        <p:spPr>
+          <a:xfrm>
+            <a:off x="6355080" y="1234440"/>
+            <a:ext cx="5303520" cy="4480560"/>
+          </a:xfrm>
+          <a:prstGeom prst="rect">
+            <a:avLst/>
+          </a:prstGeom>
+          <a:noFill/>
+        </p:spPr>
+        <p:txBody>
+          <a:bodyPr wrap="square" lIns="0" rIns="0" tIns="0" bIns="0">
+            <a:spAutoFit/>
+          </a:bodyPr>
+          <a:lstStyle/>
+          <a:p>
+            <a:pPr>
+              <a:spcAft>
+                <a:spcPts val="600"/>
+              </a:spcAft>
+            </a:pPr>
+            <a:r>
+              <a:rPr sz="1600" b="1">
+                <a:solidFill>
+                  <a:srgbClr val="1E2761"/>
+                </a:solidFill>
+                <a:latin typeface="Calibri"/>
+              </a:rPr>
+              <a:t>Protocol on the distributions</a:t>
+            </a:r>
+          </a:p>
+          <a:p>
+            <a:pPr marL="228600" indent="-228600">
+              <a:spcAft>
+                <a:spcPts val="800"/>
+              </a:spcAft>
+              <a:buChar char="•"/>
+            </a:pPr>
+            <a:r>
+              <a:rPr sz="1500" b="0">
+                <a:solidFill>
+                  <a:srgbClr val="212121"/>
+                </a:solidFill>
+                <a:latin typeface="Calibri"/>
+              </a:rPr>
+              <a:t>Target: binned ln ρ(s) per cell, 19 log bins, Poisson errors</a:t>
+            </a:r>
+          </a:p>
+          <a:p>
+            <a:pPr marL="228600" indent="-228600">
+              <a:spcAft>
+                <a:spcPts val="800"/>
+              </a:spcAft>
+              <a:buChar char="•"/>
+            </a:pPr>
+            <a:r>
+              <a:rPr sz="1500" b="0">
+                <a:solidFill>
+                  <a:srgbClr val="212121"/>
+                </a:solidFill>
+                <a:latin typeface="Calibri"/>
+              </a:rPr>
+              <a:t>12 cells (700–7,600 events) spanning the plane, plus unweighted-bin and wider-window variants</a:t>
+            </a:r>
+          </a:p>
+          <a:p>
+            <a:pPr marL="228600" indent="-228600">
+              <a:spcAft>
+                <a:spcPts val="800"/>
+              </a:spcAft>
+              <a:buChar char="•"/>
+            </a:pPr>
+            <a:r>
+              <a:rPr sz="1500" b="0">
+                <a:solidFill>
+                  <a:srgbClr val="212121"/>
+                </a:solidFill>
+                <a:latin typeface="Calibri"/>
+              </a:rPr>
+              <a:t>Audit: the largest cell pushed to complexity 9 — 4,505,024 trees, 48,725 admissible — no new form appears</a:t>
+            </a:r>
+          </a:p>
+          <a:p>
+            <a:pPr marL="228600" indent="-228600">
+              <a:spcAft>
+                <a:spcPts val="800"/>
+              </a:spcAft>
+              <a:buChar char="•"/>
+            </a:pPr>
+            <a:r>
+              <a:rPr sz="1500" b="0">
+                <a:solidFill>
+                  <a:srgbClr val="212121"/>
+                </a:solidFill>
+                <a:latin typeface="Calibri"/>
+              </a:rPr>
+              <a:t>SR proposes; the likelihood disposes (next slides)</a:t>
+            </a:r>
+          </a:p>
+        </p:txBody>
+      </p:sp>
+      <p:sp>
+        <p:nvSpPr>
+          <p:cNvPr id="5" name="Rounded Rectangle 4"/>
           <p:cNvSpPr/>
           <p:nvPr/>
         </p:nvSpPr>
@@ -6577,7 +7656,7 @@
                 </a:solidFill>
                 <a:latin typeface="Calibri"/>
               </a:rPr>
-              <a:t>Every steady-state quantity is an extrapolation — and the extrapolated attractors do not converge: a common fixed point is assumed, not demonstrated.</a:t>
+              <a:t>Search the whole grammar, admit only monotone-decreasing densities, and let a per-event likelihood adjudicate among the Pareto knees.</a:t>
             </a:r>
           </a:p>
         </p:txBody>
@@ -6629,21 +7708,45 @@
                 </a:solidFill>
                 <a:latin typeface="Calibri"/>
               </a:rPr>
-              <a:t>Framework: measure, don’t regress</a:t>
-            </a:r>
-          </a:p>
-        </p:txBody>
-      </p:sp>
-      <p:sp>
-        <p:nvSpPr>
-          <p:cNvPr id="3" name="TextBox 2"/>
+              <a:t>The discovered law, in one cell</a:t>
+            </a:r>
+          </a:p>
+        </p:txBody>
+      </p:sp>
+      <p:pic>
+        <p:nvPicPr>
+          <p:cNvPr id="3" name="Picture 2" descr="fig01_size_law.png"/>
+          <p:cNvPicPr>
+            <a:picLocks noChangeAspect="1"/>
+          </p:cNvPicPr>
+          <p:nvPr/>
+        </p:nvPicPr>
+        <p:blipFill>
+          <a:blip r:embed="rId2"/>
+          <a:stretch>
+            <a:fillRect/>
+          </a:stretch>
+        </p:blipFill>
+        <p:spPr>
+          <a:xfrm>
+            <a:off x="524021" y="1234440"/>
+            <a:ext cx="6267156" cy="4526280"/>
+          </a:xfrm>
+          <a:prstGeom prst="rect">
+            <a:avLst/>
+          </a:prstGeom>
+        </p:spPr>
+      </p:pic>
+      <p:sp>
+        <p:nvSpPr>
+          <p:cNvPr id="4" name="TextBox 3"/>
           <p:cNvSpPr txBox="1"/>
           <p:nvPr/>
         </p:nvSpPr>
         <p:spPr>
           <a:xfrm>
-            <a:off x="640080" y="1234440"/>
-            <a:ext cx="5394960" cy="4480560"/>
+            <a:off x="7132320" y="1371600"/>
+            <a:ext cx="5056631" cy="4343400"/>
           </a:xfrm>
           <a:prstGeom prst="rect">
             <a:avLst/>
@@ -6655,22 +7758,6 @@
             <a:spAutoFit/>
           </a:bodyPr>
           <a:lstStyle/>
-          <a:p>
-            <a:pPr>
-              <a:spcAft>
-                <a:spcPts val="600"/>
-              </a:spcAft>
-            </a:pPr>
-            <a:r>
-              <a:rPr sz="1600" b="1">
-                <a:solidFill>
-                  <a:srgbClr val="1E2761"/>
-                </a:solidFill>
-                <a:latin typeface="Calibri"/>
-              </a:rPr>
-              <a:t>What fails on this data</a:t>
-            </a:r>
-          </a:p>
           <a:p>
             <a:pPr marL="228600" indent="-228600">
               <a:spcAft>
@@ -6679,13 +7766,13 @@
               <a:buChar char="•"/>
             </a:pPr>
             <a:r>
-              <a:rPr sz="1500" b="0">
-                <a:solidFill>
-                  <a:srgbClr val="212121"/>
-                </a:solidFill>
-                <a:latin typeface="Calibri"/>
-              </a:rPr>
-              <a:t>Direct sparse regression on (du/dγ, dτ/dγ): R² ≈ 0.0005 — rare large events dominate least squares</a:t>
+              <a:rPr sz="1350" b="0">
+                <a:solidFill>
+                  <a:srgbClr val="212121"/>
+                </a:solidFill>
+                <a:latin typeface="Calibri"/>
+              </a:rPr>
+              <a:t>The SR knee in the largest cells is log(1/(s+ε) − C), which rearranges to a bounded-support form:</a:t>
             </a:r>
           </a:p>
           <a:p>
@@ -6696,13 +7783,13 @@
               <a:buChar char="•"/>
             </a:pPr>
             <a:r>
-              <a:rPr sz="1500" b="0">
-                <a:solidFill>
-                  <a:srgbClr val="212121"/>
-                </a:solidFill>
-                <a:latin typeface="Calibri"/>
-              </a:rPr>
-              <a:t>Event classification scored by AUC (0.70) — the wrong scoreboard for a hazard process</a:t>
+              <a:rPr sz="1350" b="0">
+                <a:solidFill>
+                  <a:srgbClr val="212121"/>
+                </a:solidFill>
+                <a:latin typeface="Calibri"/>
+              </a:rPr>
+              <a:t>P(s | u,τ) ∝ (s_c − s)ᵐ / (s + ε)ᵏ  on 0 &lt; s &lt; s_c</a:t>
             </a:r>
           </a:p>
           <a:p>
@@ -6713,52 +7800,13 @@
               <a:buChar char="•"/>
             </a:pPr>
             <a:r>
-              <a:rPr sz="1500" b="0">
-                <a:solidFill>
-                  <a:srgbClr val="212121"/>
-                </a:solidFill>
-                <a:latin typeface="Calibri"/>
-              </a:rPr>
-              <a:t>Event-jump regression: R² ≈ 0.1 — the conditional mean of a heavy tail</a:t>
-            </a:r>
-          </a:p>
-        </p:txBody>
-      </p:sp>
-      <p:sp>
-        <p:nvSpPr>
-          <p:cNvPr id="4" name="TextBox 3"/>
-          <p:cNvSpPr txBox="1"/>
-          <p:nvPr/>
-        </p:nvSpPr>
-        <p:spPr>
-          <a:xfrm>
-            <a:off x="6355080" y="1234440"/>
-            <a:ext cx="5303520" cy="4480560"/>
-          </a:xfrm>
-          <a:prstGeom prst="rect">
-            <a:avLst/>
-          </a:prstGeom>
-          <a:noFill/>
-        </p:spPr>
-        <p:txBody>
-          <a:bodyPr wrap="square" lIns="0" rIns="0" tIns="0" bIns="0">
-            <a:spAutoFit/>
-          </a:bodyPr>
-          <a:lstStyle/>
-          <a:p>
-            <a:pPr>
-              <a:spcAft>
-                <a:spcPts val="600"/>
-              </a:spcAft>
-            </a:pPr>
-            <a:r>
-              <a:rPr sz="1600" b="1">
-                <a:solidFill>
-                  <a:srgbClr val="1E2761"/>
-                </a:solidFill>
-                <a:latin typeface="Calibri"/>
-              </a:rPr>
-              <a:t>What works: decompose the process</a:t>
+              <a:rPr sz="1350" b="0">
+                <a:solidFill>
+                  <a:srgbClr val="212121"/>
+                </a:solidFill>
+                <a:latin typeface="Calibri"/>
+              </a:rPr>
+              <a:t>k = 0.88: the small-event power law;  ε = 2.8×10⁻⁵: rounds it off below the resolution</a:t>
             </a:r>
           </a:p>
           <a:p>
@@ -6769,13 +7817,13 @@
               <a:buChar char="•"/>
             </a:pPr>
             <a:r>
-              <a:rPr sz="1500" b="0">
-                <a:solidFill>
-                  <a:srgbClr val="212121"/>
-                </a:solidFill>
-                <a:latin typeface="Calibri"/>
-              </a:rPr>
-              <a:t>Elastic modulus 2μ(u,τ) from branch slopes — two independent estimators agree to 2.3%</a:t>
+              <a:rPr sz="1350" b="0">
+                <a:solidFill>
+                  <a:srgbClr val="212121"/>
+                </a:solidFill>
+                <a:latin typeface="Calibri"/>
+              </a:rPr>
+              <a:t>s_c(u,τ): a hard ceiling — the largest event the state can produce; the density vanishes like (s_c − s)ᵐ, m ≈ 2.3</a:t>
             </a:r>
           </a:p>
           <a:p>
@@ -6786,47 +7834,13 @@
               <a:buChar char="•"/>
             </a:pPr>
             <a:r>
-              <a:rPr sz="1500" b="0">
-                <a:solidFill>
-                  <a:srgbClr val="212121"/>
-                </a:solidFill>
-                <a:latin typeface="Calibri"/>
-              </a:rPr>
-              <a:t>Plastic-rate field  q(u,τ) = 1 − (dτ/dγ) / 2μ — measured, dimensionless, O(1)</a:t>
-            </a:r>
-          </a:p>
-          <a:p>
-            <a:pPr marL="228600" indent="-228600">
-              <a:spcAft>
-                <a:spcPts val="800"/>
-              </a:spcAft>
-              <a:buChar char="•"/>
-            </a:pPr>
-            <a:r>
-              <a:rPr sz="1500" b="0">
-                <a:solidFill>
-                  <a:srgbClr val="212121"/>
-                </a:solidFill>
-                <a:latin typeface="Calibri"/>
-              </a:rPr>
-              <a:t>Event hazard and jump kernel treated as separate objects</a:t>
-            </a:r>
-          </a:p>
-          <a:p>
-            <a:pPr marL="228600" indent="-228600">
-              <a:spcAft>
-                <a:spcPts val="800"/>
-              </a:spcAft>
-              <a:buChar char="•"/>
-            </a:pPr>
-            <a:r>
-              <a:rPr sz="1500" b="0">
-                <a:solidFill>
-                  <a:srgbClr val="212121"/>
-                </a:solidFill>
-                <a:latin typeface="Calibri"/>
-              </a:rPr>
-              <a:t>Noise floors established first: 8.7% statistical (per voxel), 11.3% split-half</a:t>
+              <a:rPr sz="1350" b="0">
+                <a:solidFill>
+                  <a:srgbClr val="212121"/>
+                </a:solidFill>
+                <a:latin typeface="Calibri"/>
+              </a:rPr>
+              <a:t>The TPL’s exponential tail merely suppresses large events; the ceiling forbids them</a:t>
             </a:r>
           </a:p>
         </p:txBody>
@@ -6890,7 +7904,7 @@
                 </a:solidFill>
                 <a:latin typeface="Calibri"/>
               </a:rPr>
-              <a:t>The well-posed object is the dimensionless plastic-rate field q(u,τ); every later claim is judged against measured noise floors.</a:t>
+              <a:t>Four decades of event size in one cell follow one four-parameter law whose only state-dependent parameter is the ceiling s_c.</a:t>
             </a:r>
           </a:p>
         </p:txBody>
@@ -6942,14 +7956,14 @@
                 </a:solidFill>
                 <a:latin typeface="Calibri"/>
               </a:rPr>
-              <a:t>The measured plastic-rate field</a:t>
+              <a:t>One shape everywhere; the fronts that found it</a:t>
             </a:r>
           </a:p>
         </p:txBody>
       </p:sp>
       <p:pic>
         <p:nvPicPr>
-          <p:cNvPr id="3" name="Picture 2" descr="ss_d.png"/>
+          <p:cNvPr id="3" name="Picture 2" descr="fig02_collapse.png"/>
           <p:cNvPicPr>
             <a:picLocks noChangeAspect="1"/>
           </p:cNvPicPr>
@@ -6963,24 +7977,48 @@
         </p:blipFill>
         <p:spPr>
           <a:xfrm>
-            <a:off x="502920" y="1325880"/>
-            <a:ext cx="5989320" cy="4142232"/>
+            <a:off x="524021" y="1188720"/>
+            <a:ext cx="5444196" cy="3931920"/>
           </a:xfrm>
           <a:prstGeom prst="rect">
             <a:avLst/>
           </a:prstGeom>
         </p:spPr>
       </p:pic>
-      <p:sp>
-        <p:nvSpPr>
-          <p:cNvPr id="4" name="TextBox 3"/>
+      <p:pic>
+        <p:nvPicPr>
+          <p:cNvPr id="4" name="Picture 3" descr="fig03_pareto.png"/>
+          <p:cNvPicPr>
+            <a:picLocks noChangeAspect="1"/>
+          </p:cNvPicPr>
+          <p:nvPr/>
+        </p:nvPicPr>
+        <p:blipFill>
+          <a:blip r:embed="rId3"/>
+          <a:stretch>
+            <a:fillRect/>
+          </a:stretch>
+        </p:blipFill>
+        <p:spPr>
+          <a:xfrm>
+            <a:off x="6220733" y="1188720"/>
+            <a:ext cx="5444196" cy="3931920"/>
+          </a:xfrm>
+          <a:prstGeom prst="rect">
+            <a:avLst/>
+          </a:prstGeom>
+        </p:spPr>
+      </p:pic>
+      <p:sp>
+        <p:nvSpPr>
+          <p:cNvPr id="5" name="TextBox 4"/>
           <p:cNvSpPr txBox="1"/>
           <p:nvPr/>
         </p:nvSpPr>
         <p:spPr>
           <a:xfrm>
-            <a:off x="6766560" y="1554480"/>
-            <a:ext cx="4892040" cy="4023360"/>
+            <a:off x="640080" y="5230368"/>
+            <a:ext cx="10972800" cy="640080"/>
           </a:xfrm>
           <a:prstGeom prst="rect">
             <a:avLst/>
@@ -6993,78 +8031,21 @@
           </a:bodyPr>
           <a:lstStyle/>
           <a:p>
-            <a:pPr marL="228600" indent="-228600">
-              <a:spcAft>
-                <a:spcPts val="800"/>
-              </a:spcAft>
-              <a:buChar char="•"/>
-            </a:pPr>
-            <a:r>
-              <a:rPr sz="1500" b="0">
-                <a:solidFill>
-                  <a:srgbClr val="212121"/>
-                </a:solidFill>
-                <a:latin typeface="Calibri"/>
-              </a:rPr>
-              <a:t>Correct limits: q → 0 in the elastic corner, q → 1 at steady flow, q &gt; 1 where the ensemble softens</a:t>
-            </a:r>
-          </a:p>
-          <a:p>
-            <a:pPr marL="228600" indent="-228600">
-              <a:spcAft>
-                <a:spcPts val="800"/>
-              </a:spcAft>
-              <a:buChar char="•"/>
-            </a:pPr>
-            <a:r>
-              <a:rPr sz="1500" b="0">
-                <a:solidFill>
-                  <a:srgbClr val="212121"/>
-                </a:solidFill>
-                <a:latin typeface="Calibri"/>
-              </a:rPr>
-              <a:t>Monotone in both u and τ</a:t>
-            </a:r>
-          </a:p>
-          <a:p>
-            <a:pPr marL="228600" indent="-228600">
-              <a:spcAft>
-                <a:spcPts val="800"/>
-              </a:spcAft>
-              <a:buChar char="•"/>
-            </a:pPr>
-            <a:r>
-              <a:rPr sz="1500" b="0">
-                <a:solidFill>
-                  <a:srgbClr val="212121"/>
-                </a:solidFill>
-                <a:latin typeface="Calibri"/>
-              </a:rPr>
-              <a:t>Factorizes:  q(u,τ) ≈ Λ(u) · f(τ) — a rank-1 model leaves only 3.6–4% of log-q variance</a:t>
-            </a:r>
-          </a:p>
-          <a:p>
-            <a:pPr marL="228600" indent="-228600">
-              <a:spcAft>
-                <a:spcPts val="800"/>
-              </a:spcAft>
-              <a:buChar char="•"/>
-            </a:pPr>
-            <a:r>
-              <a:rPr sz="1500" b="0">
-                <a:solidFill>
-                  <a:srgbClr val="212121"/>
-                </a:solidFill>
-                <a:latin typeface="Calibri"/>
-              </a:rPr>
-              <a:t>Residual is ~30% multiplicative — systematic, not statistical (slide 10)</a:t>
-            </a:r>
-          </a:p>
-        </p:txBody>
-      </p:sp>
-      <p:sp>
-        <p:nvSpPr>
-          <p:cNvPr id="5" name="Rounded Rectangle 4"/>
+            <a:r>
+              <a:rPr sz="1300" b="0">
+                <a:solidFill>
+                  <a:srgbClr val="212121"/>
+                </a:solidFill>
+                <a:latin typeface="Calibri"/>
+              </a:rPr>
+              <a:t>Left: twelve cells spanning 100× in scale collapse onto one curve in s/s_c with global (k, m, ε).  Right: per-cell Pareto fronts (heights set by each cell’s own noise floor); orange, the complexity-9 audit run.</a:t>
+            </a:r>
+          </a:p>
+        </p:txBody>
+      </p:sp>
+      <p:sp>
+        <p:nvSpPr>
+          <p:cNvPr id="6" name="Rounded Rectangle 5"/>
           <p:cNvSpPr/>
           <p:nvPr/>
         </p:nvSpPr>
@@ -7121,7 +8102,7 @@
                 </a:solidFill>
                 <a:latin typeface="Calibri"/>
               </a:rPr>
-              <a:t>q behaves like a constitutive field and separates into an STZ-like product Λ(u)·f(τ) — the two factors become the discovery targets.</a:t>
+              <a:t>The state enters only through the ceiling: the shape is universal across the (u,τ) plane.</a:t>
             </a:r>
           </a:p>
         </p:txBody>
@@ -7173,21 +8154,45 @@
                 </a:solidFill>
                 <a:latin typeface="Calibri"/>
               </a:rPr>
-              <a:t>Symbolic regression, built for scrutiny</a:t>
-            </a:r>
-          </a:p>
-        </p:txBody>
-      </p:sp>
-      <p:sp>
-        <p:nvSpPr>
-          <p:cNvPr id="3" name="TextBox 2"/>
+              <a:t>SR proposes, the likelihood disposes</a:t>
+            </a:r>
+          </a:p>
+        </p:txBody>
+      </p:sp>
+      <p:pic>
+        <p:nvPicPr>
+          <p:cNvPr id="3" name="Picture 2" descr="fig04_falsifiability.png"/>
+          <p:cNvPicPr>
+            <a:picLocks noChangeAspect="1"/>
+          </p:cNvPicPr>
+          <p:nvPr/>
+        </p:nvPicPr>
+        <p:blipFill>
+          <a:blip r:embed="rId2"/>
+          <a:stretch>
+            <a:fillRect/>
+          </a:stretch>
+        </p:blipFill>
+        <p:spPr>
+          <a:xfrm>
+            <a:off x="524021" y="1234440"/>
+            <a:ext cx="6267156" cy="4526280"/>
+          </a:xfrm>
+          <a:prstGeom prst="rect">
+            <a:avLst/>
+          </a:prstGeom>
+        </p:spPr>
+      </p:pic>
+      <p:sp>
+        <p:nvSpPr>
+          <p:cNvPr id="4" name="TextBox 3"/>
           <p:cNvSpPr txBox="1"/>
           <p:nvPr/>
         </p:nvSpPr>
         <p:spPr>
           <a:xfrm>
-            <a:off x="640080" y="1234440"/>
-            <a:ext cx="5394960" cy="4480560"/>
+            <a:off x="7132320" y="1371600"/>
+            <a:ext cx="5056631" cy="4343400"/>
           </a:xfrm>
           <a:prstGeom prst="rect">
             <a:avLst/>
@@ -7199,22 +8204,6 @@
             <a:spAutoFit/>
           </a:bodyPr>
           <a:lstStyle/>
-          <a:p>
-            <a:pPr>
-              <a:spcAft>
-                <a:spcPts val="600"/>
-              </a:spcAft>
-            </a:pPr>
-            <a:r>
-              <a:rPr sz="1600" b="1">
-                <a:solidFill>
-                  <a:srgbClr val="1E2761"/>
-                </a:solidFill>
-                <a:latin typeface="Calibri"/>
-              </a:rPr>
-              <a:t>Engine  (library/symreg.py)</a:t>
-            </a:r>
-          </a:p>
           <a:p>
             <a:pPr marL="228600" indent="-228600">
               <a:spcAft>
@@ -7223,13 +8212,13 @@
               <a:buChar char="•"/>
             </a:pPr>
             <a:r>
-              <a:rPr sz="1500" b="0">
-                <a:solidFill>
-                  <a:srgbClr val="212121"/>
-                </a:solidFill>
-                <a:latin typeface="Calibri"/>
-              </a:rPr>
-              <a:t>Exhaustive enumeration of expression trees to a complexity bound — the exact Pareto front, not a GP sample</a:t>
+              <a:rPr sz="1300" b="0">
+                <a:solidFill>
+                  <a:srgbClr val="212121"/>
+                </a:solidFill>
+                <a:latin typeface="Calibri"/>
+              </a:rPr>
+              <a:t>Normalized maximum likelihood per cell, seven families, AIC and trajectory-blocked cross-validation</a:t>
             </a:r>
           </a:p>
           <a:p>
@@ -7240,13 +8229,13 @@
               <a:buChar char="•"/>
             </a:pPr>
             <a:r>
-              <a:rPr sz="1500" b="0">
-                <a:solidFill>
-                  <a:srgbClr val="212121"/>
-                </a:solidFill>
-                <a:latin typeface="Calibri"/>
-              </a:rPr>
-              <a:t>Constants fitted inside nonlinearities (variable projection)</a:t>
+              <a:rPr sz="1300" b="0">
+                <a:solidFill>
+                  <a:srgbClr val="212121"/>
+                </a:solidFill>
+                <a:latin typeface="Calibri"/>
+              </a:rPr>
+              <a:t>The ceiling law wins 8 of 8 large cells: ΔAIC 67–120 over the TPL, 300–754 over the lognormal</a:t>
             </a:r>
           </a:p>
           <a:p>
@@ -7257,13 +8246,13 @@
               <a:buChar char="•"/>
             </a:pPr>
             <a:r>
-              <a:rPr sz="1500" b="0">
-                <a:solidFill>
-                  <a:srgbClr val="212121"/>
-                </a:solidFill>
-                <a:latin typeface="Calibri"/>
-              </a:rPr>
-              <a:t>Positivity, monotonicity, and limit anchors imposed as hard admissibility filters</a:t>
+              <a:rPr sz="1300" b="0">
+                <a:solidFill>
+                  <a:srgbClr val="212121"/>
+                </a:solidFill>
+                <a:latin typeface="Calibri"/>
+              </a:rPr>
+              <a:t>A binned-least-squares favourite (√log form) was an artifact of Poisson weighting: ΔAIC ≈ +20,000 under likelihood</a:t>
             </a:r>
           </a:p>
           <a:p>
@@ -7274,52 +8263,13 @@
               <a:buChar char="•"/>
             </a:pPr>
             <a:r>
-              <a:rPr sz="1500" b="0">
-                <a:solidFill>
-                  <a:srgbClr val="212121"/>
-                </a:solidFill>
-                <a:latin typeface="Calibri"/>
-              </a:rPr>
-              <a:t>Operator-weighted complexity: exp and log cost more than + and ×</a:t>
-            </a:r>
-          </a:p>
-        </p:txBody>
-      </p:sp>
-      <p:sp>
-        <p:nvSpPr>
-          <p:cNvPr id="4" name="TextBox 3"/>
-          <p:cNvSpPr txBox="1"/>
-          <p:nvPr/>
-        </p:nvSpPr>
-        <p:spPr>
-          <a:xfrm>
-            <a:off x="6355080" y="1234440"/>
-            <a:ext cx="5303520" cy="4480560"/>
-          </a:xfrm>
-          <a:prstGeom prst="rect">
-            <a:avLst/>
-          </a:prstGeom>
-          <a:noFill/>
-        </p:spPr>
-        <p:txBody>
-          <a:bodyPr wrap="square" lIns="0" rIns="0" tIns="0" bIns="0">
-            <a:spAutoFit/>
-          </a:bodyPr>
-          <a:lstStyle/>
-          <a:p>
-            <a:pPr>
-              <a:spcAft>
-                <a:spcPts val="600"/>
-              </a:spcAft>
-            </a:pPr>
-            <a:r>
-              <a:rPr sz="1600" b="1">
-                <a:solidFill>
-                  <a:srgbClr val="1E2761"/>
-                </a:solidFill>
-                <a:latin typeface="Calibri"/>
-              </a:rPr>
-              <a:t>Guardrails</a:t>
+              <a:rPr sz="1300" b="0">
+                <a:solidFill>
+                  <a:srgbClr val="212121"/>
+                </a:solidFill>
+                <a:latin typeface="Calibri"/>
+              </a:rPr>
+              <a:t>Synthetic control, both directions: TPL-generated catalogs return a TPL verdict 5/5; ceiling-generated return a ceiling verdict 5/5 with ε and s_c recovered to a few %</a:t>
             </a:r>
           </a:p>
           <a:p>
@@ -7330,47 +8280,13 @@
               <a:buChar char="•"/>
             </a:pPr>
             <a:r>
-              <a:rPr sz="1500" b="0">
-                <a:solidFill>
-                  <a:srgbClr val="212121"/>
-                </a:solidFill>
-                <a:latin typeface="Calibri"/>
-              </a:rPr>
-              <a:t>Validated on synthetic truths: recovers 3·exp(−2/x) and 0.04·exp(x/0.22); returns a straight line when the truth is linear</a:t>
-            </a:r>
-          </a:p>
-          <a:p>
-            <a:pPr marL="228600" indent="-228600">
-              <a:spcAft>
-                <a:spcPts val="800"/>
-              </a:spcAft>
-              <a:buChar char="•"/>
-            </a:pPr>
-            <a:r>
-              <a:rPr sz="1500" b="0">
-                <a:solidFill>
-                  <a:srgbClr val="212121"/>
-                </a:solidFill>
-                <a:latin typeface="Calibri"/>
-              </a:rPr>
-              <a:t>Fixed-library SINDy (the group’s build_SEEM_library) retained as the baseline arm</a:t>
-            </a:r>
-          </a:p>
-          <a:p>
-            <a:pPr marL="228600" indent="-228600">
-              <a:spcAft>
-                <a:spcPts val="800"/>
-              </a:spcAft>
-              <a:buChar char="•"/>
-            </a:pPr>
-            <a:r>
-              <a:rPr sz="1500" b="0">
-                <a:solidFill>
-                  <a:srgbClr val="212121"/>
-                </a:solidFill>
-                <a:latin typeface="Calibri"/>
-              </a:rPr>
-              <a:t>Stopping rule: any fit that beats the measured noise floor is memorizing history, not physics</a:t>
+              <a:rPr sz="1300" b="0">
+                <a:solidFill>
+                  <a:srgbClr val="212121"/>
+                </a:solidFill>
+                <a:latin typeface="Calibri"/>
+              </a:rPr>
+              <a:t>Sparse cells (&lt; 1,000 events) cannot tell a ceiling from an exponential tail</a:t>
             </a:r>
           </a:p>
         </p:txBody>
@@ -7434,7 +8350,7 @@
                 </a:solidFill>
                 <a:latin typeface="Calibri"/>
               </a:rPr>
-              <a:t>Search the whole grammar, admit only physics-admissible expressions, and never trust a fit that beats the noise floor.</a:t>
+              <a:t>The bounded-support law is decided by per-event likelihood with falsifiability controls, not by the binned fit.</a:t>
             </a:r>
           </a:p>
         </p:txBody>
@@ -7486,14 +8402,14 @@
                 </a:solidFill>
                 <a:latin typeface="Calibri"/>
               </a:rPr>
-              <a:t>Discovered forms (weighted pipeline)</a:t>
+              <a:t>The ceiling field s_c(u,τ)</a:t>
             </a:r>
           </a:p>
         </p:txBody>
       </p:sp>
       <p:pic>
         <p:nvPicPr>
-          <p:cNvPr id="3" name="Picture 2" descr="sr_a.png"/>
+          <p:cNvPr id="3" name="Picture 2" descr="fig05_ceiling_map.png"/>
           <p:cNvPicPr>
             <a:picLocks noChangeAspect="1"/>
           </p:cNvPicPr>
@@ -7507,8 +8423,8 @@
         </p:blipFill>
         <p:spPr>
           <a:xfrm>
-            <a:off x="502920" y="1188720"/>
-            <a:ext cx="5577840" cy="3858768"/>
+            <a:off x="524021" y="1188720"/>
+            <a:ext cx="5444196" cy="3931920"/>
           </a:xfrm>
           <a:prstGeom prst="rect">
             <a:avLst/>
@@ -7517,7 +8433,7 @@
       </p:pic>
       <p:pic>
         <p:nvPicPr>
-          <p:cNvPr id="4" name="Picture 3" descr="sr_b.png"/>
+          <p:cNvPr id="4" name="Picture 3" descr="fig07_ceiling_memory.png"/>
           <p:cNvPicPr>
             <a:picLocks noChangeAspect="1"/>
           </p:cNvPicPr>
@@ -7531,8 +8447,8 @@
         </p:blipFill>
         <p:spPr>
           <a:xfrm>
-            <a:off x="6172200" y="1188720"/>
-            <a:ext cx="5577840" cy="3858768"/>
+            <a:off x="6612805" y="1188720"/>
+            <a:ext cx="4660053" cy="3931920"/>
           </a:xfrm>
           <a:prstGeom prst="rect">
             <a:avLst/>
@@ -7547,7 +8463,7 @@
         </p:nvSpPr>
         <p:spPr>
           <a:xfrm>
-            <a:off x="640080" y="5212080"/>
+            <a:off x="640080" y="5230368"/>
             <a:ext cx="10972800" cy="640080"/>
           </a:xfrm>
           <a:prstGeom prst="rect">
@@ -7561,57 +8477,21 @@
           </a:bodyPr>
           <a:lstStyle/>
           <a:p>
-            <a:pPr algn="ctr"/>
-            <a:r>
-              <a:rPr sz="1400" b="0">
-                <a:solidFill>
-                  <a:srgbClr val="212121"/>
-                </a:solidFill>
-                <a:latin typeface="Calibri"/>
-              </a:rPr>
-              <a:t>Λ(û) = 11.6·exp(−1.79/û) + 0.086        f(τ) = 43.6·exp(−4.57/τ) + 0.19        (û = u/χ*,  χ* = 0.0312)</a:t>
-            </a:r>
-          </a:p>
-        </p:txBody>
-      </p:sp>
-      <p:sp>
-        <p:nvSpPr>
-          <p:cNvPr id="6" name="TextBox 5"/>
-          <p:cNvSpPr txBox="1"/>
-          <p:nvPr/>
-        </p:nvSpPr>
-        <p:spPr>
-          <a:xfrm>
-            <a:off x="640080" y="5596128"/>
-            <a:ext cx="10972800" cy="640080"/>
-          </a:xfrm>
-          <a:prstGeom prst="rect">
-            <a:avLst/>
-          </a:prstGeom>
-          <a:noFill/>
-        </p:spPr>
-        <p:txBody>
-          <a:bodyPr wrap="square" lIns="0" rIns="0" tIns="0" bIns="0">
-            <a:spAutoFit/>
-          </a:bodyPr>
-          <a:lstStyle/>
-          <a:p>
-            <a:pPr algn="ctr"/>
-            <a:r>
-              <a:rPr sz="1250" b="0">
-                <a:solidFill>
-                  <a:srgbClr val="6E7B85"/>
-                </a:solidFill>
-                <a:latin typeface="Calibri"/>
-              </a:rPr>
-              <a:t>Exhaustive search over 4,578 admissible expressions lands on the activated form at the Pareto knee — it was not told to look for it.</a:t>
-            </a:r>
-          </a:p>
-        </p:txBody>
-      </p:sp>
-      <p:sp>
-        <p:nvSpPr>
-          <p:cNvPr id="7" name="Rounded Rectangle 6"/>
+            <a:r>
+              <a:rPr sz="1300" b="0">
+                <a:solidFill>
+                  <a:srgbClr val="212121"/>
+                </a:solidFill>
+                <a:latin typeface="Calibri"/>
+              </a:rPr>
+              <a:t>Left: 277 cells, 146× in range (0.02 cold → 3.0 in the flowing state), bootstrap error 6.5%; rank-1 factorization Λ(u)·f(τ) carries 95.5% of the log-variance.  Right: refit by preparation at fixed cell — slow-cooled glass has a 1.71× higher ceiling than fast-cooled.</a:t>
+            </a:r>
+          </a:p>
+        </p:txBody>
+      </p:sp>
+      <p:sp>
+        <p:nvSpPr>
+          <p:cNvPr id="6" name="Rounded Rectangle 5"/>
           <p:cNvSpPr/>
           <p:nvPr/>
         </p:nvSpPr>
@@ -7668,7 +8548,7 @@
                 </a:solidFill>
                 <a:latin typeface="Calibri"/>
               </a:rPr>
-              <a:t>At the Pareto knee both factors take an activated (Boltzmann-like) form — the STZ-consistent result. Conditional on the pipeline: slide 11.</a:t>
+              <a:t>All state dependence, and all preparation memory, sit in one parameter — the ceiling.</a:t>
             </a:r>
           </a:p>
         </p:txBody>
@@ -7720,14 +8600,14 @@
                 </a:solidFill>
                 <a:latin typeface="Calibri"/>
               </a:rPr>
-              <a:t>Generalization: held-out preparations</a:t>
+              <a:t>Rebuilding the plastic-rate field from the law</a:t>
             </a:r>
           </a:p>
         </p:txBody>
       </p:sp>
       <p:pic>
         <p:nvPicPr>
-          <p:cNvPr id="3" name="Picture 2" descr="sr_c.png"/>
+          <p:cNvPr id="3" name="Picture 2" descr="fig09_q_agreement.png"/>
           <p:cNvPicPr>
             <a:picLocks noChangeAspect="1"/>
           </p:cNvPicPr>
@@ -7741,8 +8621,8 @@
         </p:blipFill>
         <p:spPr>
           <a:xfrm>
-            <a:off x="502920" y="1417320"/>
-            <a:ext cx="5806440" cy="4041648"/>
+            <a:off x="891539" y="1234440"/>
+            <a:ext cx="5532120" cy="4526280"/>
           </a:xfrm>
           <a:prstGeom prst="rect">
             <a:avLst/>
@@ -7757,8 +8637,8 @@
         </p:nvSpPr>
         <p:spPr>
           <a:xfrm>
-            <a:off x="6766560" y="1554480"/>
-            <a:ext cx="4892040" cy="4023360"/>
+            <a:off x="7132320" y="1371600"/>
+            <a:ext cx="5056631" cy="4343400"/>
           </a:xfrm>
           <a:prstGeom prst="rect">
             <a:avLst/>
@@ -7778,13 +8658,13 @@
               <a:buChar char="•"/>
             </a:pPr>
             <a:r>
-              <a:rPr sz="1500" b="0">
-                <a:solidFill>
-                  <a:srgbClr val="212121"/>
-                </a:solidFill>
-                <a:latin typeface="Calibri"/>
-              </a:rPr>
-              <a:t>Train on the 7 slowest cooling rates; test on the 2 fastest</a:t>
+              <a:rPr sz="1350" b="0">
+                <a:solidFill>
+                  <a:srgbClr val="212121"/>
+                </a:solidFill>
+                <a:latin typeface="Calibri"/>
+              </a:rPr>
+              <a:t>q = 1 − ⟨dτ⟩ / (2μ Δγ), measured per cell in the first pass</a:t>
             </a:r>
           </a:p>
           <a:p>
@@ -7795,13 +8675,13 @@
               <a:buChar char="•"/>
             </a:pPr>
             <a:r>
-              <a:rPr sz="1500" b="0">
-                <a:solidFill>
-                  <a:srgbClr val="212121"/>
-                </a:solidFill>
-                <a:latin typeface="Calibri"/>
-              </a:rPr>
-              <a:t>Discovered 5-parameter model: 20.0% train / 30.7% test</a:t>
+              <a:rPr sz="1350" b="0">
+                <a:solidFill>
+                  <a:srgbClr val="212121"/>
+                </a:solidFill>
+                <a:latin typeface="Calibri"/>
+              </a:rPr>
+              <a:t>From the law: hazard × mean event size of the fitted distribution</a:t>
             </a:r>
           </a:p>
           <a:p>
@@ -7812,13 +8692,13 @@
               <a:buChar char="•"/>
             </a:pPr>
             <a:r>
-              <a:rPr sz="1500" b="0">
-                <a:solidFill>
-                  <a:srgbClr val="212121"/>
-                </a:solidFill>
-                <a:latin typeface="Calibri"/>
-              </a:rPr>
-              <a:t>15-parameter quartic: 5.7% train — below the 8.7% noise floor, i.e. memorization — 32.4% test</a:t>
+              <a:rPr sz="1350" b="0">
+                <a:solidFill>
+                  <a:srgbClr val="212121"/>
+                </a:solidFill>
+                <a:latin typeface="Calibri"/>
+              </a:rPr>
+              <a:t>Agreement: median +1.8%, RMS 17% against a 17.5% split-half noise floor — the test is saturated</a:t>
             </a:r>
           </a:p>
           <a:p>
@@ -7829,13 +8709,13 @@
               <a:buChar char="•"/>
             </a:pPr>
             <a:r>
-              <a:rPr sz="1500" b="0">
-                <a:solidFill>
-                  <a:srgbClr val="212121"/>
-                </a:solidFill>
-                <a:latin typeface="Calibri"/>
-              </a:rPr>
-              <a:t>log/exp and RBF libraries fail numerically (condition number ~10¹⁷)</a:t>
+              <a:rPr sz="1350" b="0">
+                <a:solidFill>
+                  <a:srgbClr val="212121"/>
+                </a:solidFill>
+                <a:latin typeface="Calibri"/>
+              </a:rPr>
+              <a:t>The Λ(u)·f(τ) factors of the rebuilt field are the measured ones: f(τ) ∝ τ·log(1/τ − 0.44) vs 0.43; the Λ pole at u = 0.0287 vs 0.0280</a:t>
             </a:r>
           </a:p>
           <a:p>
@@ -7846,13 +8726,13 @@
               <a:buChar char="•"/>
             </a:pPr>
             <a:r>
-              <a:rPr sz="1500" b="0">
-                <a:solidFill>
-                  <a:srgbClr val="212121"/>
-                </a:solidFill>
-                <a:latin typeface="Calibri"/>
-              </a:rPr>
-              <a:t>Both surviving models sit at the state-insufficiency ceiling</a:t>
+              <a:rPr sz="1350" b="0">
+                <a:solidFill>
+                  <a:srgbClr val="212121"/>
+                </a:solidFill>
+                <a:latin typeface="Calibri"/>
+              </a:rPr>
+              <a:t>Old κ ≈ 0.95 recovered as the mid-range slope; the x_min drift problem is gone with ε</a:t>
             </a:r>
           </a:p>
         </p:txBody>
@@ -7916,7 +8796,7 @@
                 </a:solidFill>
                 <a:latin typeface="Calibri"/>
               </a:rPr>
-              <a:t>Five interpretable parameters generalize as well as fifteen polynomial ones; training below the noise floor buys memorization, not physics.</a:t>
+              <a:t>The fitted law reproduces the first pass’s central object to within its noise floor.</a:t>
             </a:r>
           </a:p>
         </p:txBody>

--- a/SEEM_project_deck.pptx
+++ b/SEEM_project_deck.pptx
@@ -3204,7 +3204,7 @@
                 </a:solidFill>
                 <a:latin typeface="Calibri"/>
               </a:rPr>
-              <a:t>SEEM project status — September 4, 2026  (third pass; supersedes the August 6 deck)</a:t>
+              <a:t>SEEM project status, September 4, 2026  (third pass; supersedes the August 6 deck)</a:t>
             </a:r>
           </a:p>
         </p:txBody>
@@ -3290,7 +3290,7 @@
                 </a:solidFill>
                 <a:latin typeface="Calibri"/>
               </a:rPr>
-              <a:t>The acid test: simulating all 850 runs</a:t>
+              <a:t>Simulating all 850 runs</a:t>
             </a:r>
           </a:p>
         </p:txBody>
@@ -3372,7 +3372,7 @@
                 </a:solidFill>
                 <a:latin typeface="Calibri"/>
               </a:rPr>
-              <a:t>Three arms differ only in the size law: ceiling law, TPL, empirical resampling.  Stress–strain curves, yield overshoot across 256× in cooling rate, and flow stress (±5%) all emerge; yield-peak RMS 2.5% (ceiling), 1.4% (TPL), 0.9% (empirical).</a:t>
+              <a:t>Three arms differ only in the size law: ceiling law, TPL, empirical resampling.  Stress-strain curves, yield overshoot across 256× in cooling rate, and flow stress (±5%) all emerge; yield-peak RMS 2.5% (ceiling), 1.4% (TPL), 0.9% (empirical).</a:t>
             </a:r>
           </a:p>
         </p:txBody>
@@ -3427,7 +3427,7 @@
                 </a:solidFill>
                 <a:latin typeface="Calibri"/>
               </a:rPr>
-              <a:t>Takeaway — </a:t>
+              <a:t>Takeaway: </a:t>
             </a:r>
             <a:r>
               <a:rPr sz="1350" b="0">
@@ -3436,7 +3436,7 @@
                 </a:solidFill>
                 <a:latin typeface="Calibri"/>
               </a:rPr>
-              <a:t>The model predicts the yield strength of a glass from its preparation to a few percent — and macroscopic curves cannot tell size laws apart; the per-event likelihood can.</a:t>
+              <a:t>The model predicts the yield strength of a glass from its preparation to a few percent, and macroscopic curves cannot tell size laws apart. The per-event likelihood can.</a:t>
             </a:r>
           </a:p>
         </p:txBody>
@@ -3586,7 +3586,7 @@
                 </a:solidFill>
                 <a:latin typeface="Calibri"/>
               </a:rPr>
-              <a:t>The fields are preparation-blind by construction (one map for all histories) — so this is the missing state variable of the first pass, seen macroscopically</a:t>
+              <a:t>The fields are preparation-blind by construction (one map for all histories), so this is the missing state variable of the first pass, seen macroscopically</a:t>
             </a:r>
           </a:p>
           <a:p>
@@ -3658,7 +3658,7 @@
                 </a:solidFill>
                 <a:latin typeface="Calibri"/>
               </a:rPr>
-              <a:t>Takeaway — </a:t>
+              <a:t>Takeaway: </a:t>
             </a:r>
             <a:r>
               <a:rPr sz="1350" b="0">
@@ -3817,7 +3817,7 @@
                 </a:solidFill>
                 <a:latin typeface="Calibri"/>
               </a:rPr>
-              <a:t>Mean event size: 1.70× (β = −0.117 ± 0.005) — the ceiling memory, measured another way; it lives in the tail (geometric mean moves only 1.20×)</a:t>
+              <a:t>Mean event size: 1.70× (β = −0.117 ± 0.005), the ceiling memory measured another way; it lives in the tail (geometric mean moves only 1.20×)</a:t>
             </a:r>
           </a:p>
           <a:p>
@@ -3906,7 +3906,7 @@
                 </a:solidFill>
                 <a:latin typeface="Calibri"/>
               </a:rPr>
-              <a:t>Takeaway — </a:t>
+              <a:t>Takeaway: </a:t>
             </a:r>
             <a:r>
               <a:rPr sz="1350" b="0">
@@ -3915,7 +3915,7 @@
                 </a:solidFill>
                 <a:latin typeface="Calibri"/>
               </a:rPr>
-              <a:t>Memory acts through event size, not event rate — against the simplest one-variable STZ reading, where preparation enters through the STZ density.</a:t>
+              <a:t>Memory acts through event size, not event rate. That cuts against the simplest one-variable STZ reading, where preparation enters through the STZ density.</a:t>
             </a:r>
           </a:p>
         </p:txBody>
@@ -4120,7 +4120,7 @@
                 </a:solidFill>
                 <a:latin typeface="Calibri"/>
               </a:rPr>
-              <a:t>Takeaway — </a:t>
+              <a:t>Takeaway: </a:t>
             </a:r>
             <a:r>
               <a:rPr sz="1350" b="0">
@@ -4245,7 +4245,7 @@
                 </a:solidFill>
                 <a:latin typeface="Calibri"/>
               </a:rPr>
-              <a:t>Nine-rate regression with a fixed effect per (cell, strain window): β = −0.21 → −0.11 → −0.05 → −0.04 from γ ≈ 0.15 to 0.45, and it falls within fixed u bands — relaxation, not state dependence; γ_r ≈ 0.18</a:t>
+              <a:t>Nine-rate regression with a fixed effect per (cell, strain window): β = −0.21 → −0.11 → −0.05 → −0.04 from γ ≈ 0.15 to 0.45, and it falls within fixed u bands, so this is relaxation rather than state dependence; γ_r ≈ 0.18</a:t>
             </a:r>
           </a:p>
           <a:p>
@@ -4334,7 +4334,7 @@
                 </a:solidFill>
                 <a:latin typeface="Calibri"/>
               </a:rPr>
-              <a:t>Takeaway — </a:t>
+              <a:t>Takeaway: </a:t>
             </a:r>
             <a:r>
               <a:rPr sz="1350" b="0">
@@ -4343,7 +4343,7 @@
                 </a:solidFill>
                 <a:latin typeface="Calibri"/>
               </a:rPr>
-              <a:t>The third variable is not a frozen label: plastic strain erases it on a scale of a few tenths — now measured, not assumed.</a:t>
+              <a:t>The third variable is not a frozen label: plastic strain erases it on a scale of a few tenths, now measured, not assumed.</a:t>
             </a:r>
           </a:p>
         </p:txBody>
@@ -4459,7 +4459,7 @@
                 </a:solidFill>
                 <a:latin typeface="Calibri"/>
               </a:rPr>
-              <a:t>Parameter-free prediction: apply the between-preparation relation within a preparation — each trajectory gets exp(κ·δu₀) with κ = β·d ln(rate)/du₀ = −43</a:t>
+              <a:t>Parameter-free prediction: apply the between-preparation relation within a preparation, so each trajectory gets exp(κ·δu₀) with κ = β·d ln(rate)/du₀ = −43</a:t>
             </a:r>
           </a:p>
           <a:p>
@@ -4565,7 +4565,7 @@
                 </a:solidFill>
                 <a:latin typeface="Calibri"/>
               </a:rPr>
-              <a:t>Takeaway — </a:t>
+              <a:t>Takeaway: </a:t>
             </a:r>
             <a:r>
               <a:rPr sz="1350" b="0">
@@ -4707,7 +4707,7 @@
                 </a:solidFill>
                 <a:latin typeface="Calibri"/>
               </a:rPr>
-              <a:t>So does a true ceiling with m ≈ 2 at n ≈ 5,000 (green synthetics: c/s_max 1.02–1.12)</a:t>
+              <a:t>So does a true ceiling with m ≈ 2 at n ≈ 5,000 (green synthetics: c/s_max 1.02 to 1.12)</a:t>
             </a:r>
           </a:p>
           <a:p>
@@ -4724,7 +4724,7 @@
                 </a:solidFill>
                 <a:latin typeface="Calibri"/>
               </a:rPr>
-              <a:t>A true TPL under the same fit runs off to 3–350× the maximum and collapses on refit (blue)</a:t>
+              <a:t>A true TPL under the same fit runs off to 3 to 350× the maximum and collapses on refit (blue)</a:t>
             </a:r>
           </a:p>
           <a:p>
@@ -4741,7 +4741,7 @@
                 </a:solidFill>
                 <a:latin typeface="Calibri"/>
               </a:rPr>
-              <a:t>Merging consecutive drop steps into single avalanches (187k → 172k): the ceiling law wins by more (ΔAIC 117–213), s_c moves &lt; 2%, k shifts +0.05</a:t>
+              <a:t>Merging consecutive drop steps into single avalanches (187k → 172k): the ceiling law wins by more (ΔAIC 117 to 213), s_c moves &lt; 2%, k shifts +0.05</a:t>
             </a:r>
           </a:p>
           <a:p>
@@ -4813,7 +4813,7 @@
                 </a:solidFill>
                 <a:latin typeface="Calibri"/>
               </a:rPr>
-              <a:t>Takeaway — </a:t>
+              <a:t>Takeaway: </a:t>
             </a:r>
             <a:r>
               <a:rPr sz="1350" b="0">
@@ -4955,7 +4955,7 @@
                 </a:solidFill>
                 <a:latin typeface="Calibri"/>
               </a:rPr>
-              <a:t>Event counts per window are over-dispersed (Fano 1.3–1.6 vs the model’s 1.0) while the stress released per window is less variable (CV 0.10 vs 0.13)</a:t>
+              <a:t>Event counts per window are over-dispersed (Fano 1.3 to 1.6 vs the model’s 1.0) while the stress released per window is less variable (CV 0.10 vs 0.13)</a:t>
             </a:r>
           </a:p>
           <a:p>
@@ -4972,7 +4972,7 @@
                 </a:solidFill>
                 <a:latin typeface="Calibri"/>
               </a:rPr>
-              <a:t>Referenced to the last large event, the large-event hazard is 1.5× higher after 0.1–0.3 of reloading; large events are more regular (Fano 0.51 vs 0.71)</a:t>
+              <a:t>Referenced to the last large event, the large-event hazard is 1.5× higher after 0.1 to 0.3 of reloading; large events are more regular (Fano 0.51 vs 0.71)</a:t>
             </a:r>
           </a:p>
         </p:txBody>
@@ -5027,7 +5027,7 @@
                 </a:solidFill>
                 <a:latin typeface="Calibri"/>
               </a:rPr>
-              <a:t>Takeaway — </a:t>
+              <a:t>Takeaway: </a:t>
             </a:r>
             <a:r>
               <a:rPr sz="1350" b="0">
@@ -5151,7 +5151,7 @@
                 </a:solidFill>
                 <a:latin typeface="Calibri"/>
               </a:rPr>
-              <a:t>Run-to-run scatter within a preparation: model 25–30% too high</a:t>
+              <a:t>Run-to-run scatter within a preparation: model 25 to 30% too high</a:t>
             </a:r>
           </a:p>
           <a:p>
@@ -5185,7 +5185,7 @@
                 </a:solidFill>
                 <a:latin typeface="Calibri"/>
               </a:rPr>
-              <a:t>Not size–reload coupling (+0.02), size–size coupling (−0.01), relaxation rate (identical), the per-sample slow variable, or the u-channel noise terms</a:t>
+              <a:t>Not size-reload coupling (+0.02), size-size coupling (−0.01), relaxation rate (identical), the per-sample slow variable, or the u-channel noise terms</a:t>
             </a:r>
           </a:p>
         </p:txBody>
@@ -5259,7 +5259,7 @@
                 </a:solidFill>
                 <a:latin typeface="Calibri"/>
               </a:rPr>
-              <a:t>Closing it needs a per-step observable that is not (u,τ) — the same MD output the third variable asks for</a:t>
+              <a:t>Closing it needs a per-step observable that is not (u,τ), the same MD output the third variable asks for</a:t>
             </a:r>
           </a:p>
         </p:txBody>
@@ -5314,7 +5314,7 @@
                 </a:solidFill>
                 <a:latin typeface="Calibri"/>
               </a:rPr>
-              <a:t>Takeaway — </a:t>
+              <a:t>Takeaway: </a:t>
             </a:r>
             <a:r>
               <a:rPr sz="1350" b="0">
@@ -5500,7 +5500,7 @@
                 </a:solidFill>
                 <a:latin typeface="Calibri"/>
               </a:rPr>
-              <a:t>Stress–strain curves and yield peaks across 256× in cooling rate at the few-% level</a:t>
+              <a:t>Stress-strain curves and yield peaks across 256× in cooling rate at the few-% level</a:t>
             </a:r>
           </a:p>
           <a:p>
@@ -5642,7 +5642,7 @@
                 </a:solidFill>
                 <a:latin typeface="Calibri"/>
               </a:rPr>
-              <a:t>Convergence of preparations at large strain — the model’s opinion, now with a measured rate but no data past γ = 0.5</a:t>
+              <a:t>Convergence of preparations at large strain: the model predicts it, now with a measured rate, but there is no data past γ = 0.5</a:t>
             </a:r>
           </a:p>
           <a:p>
@@ -5733,7 +5733,7 @@
                 </a:solidFill>
                 <a:latin typeface="Calibri"/>
               </a:rPr>
-              <a:t>(u,τ) as a sufficient state — the 1.71× ceiling memory and the 5×-underpredicted u-spread, independently</a:t>
+              <a:t>(u,τ) as a sufficient state: the 1.71× ceiling memory and the 5×-underpredicted u-spread, independently</a:t>
             </a:r>
           </a:p>
           <a:p>
@@ -5750,7 +5750,7 @@
                 </a:solidFill>
                 <a:latin typeface="Calibri"/>
               </a:rPr>
-              <a:t>The step process as Markov in (u,τ) at the 10⁻⁵ strain scale — aftershocks (×20), reload-dependent large events</a:t>
+              <a:t>The step process as Markov in (u,τ) at the 10⁻⁵ strain scale: aftershocks (×20), reload-dependent large events</a:t>
             </a:r>
           </a:p>
           <a:p>
@@ -5839,7 +5839,7 @@
                 </a:solidFill>
                 <a:latin typeface="Calibri"/>
               </a:rPr>
-              <a:t>Takeaway — </a:t>
+              <a:t>Takeaway: </a:t>
             </a:r>
             <a:r>
               <a:rPr sz="1350" b="0">
@@ -6270,7 +6270,7 @@
                 </a:solidFill>
                 <a:latin typeface="Calibri"/>
               </a:rPr>
-              <a:t>Per step: strain, stress, potential energy, cooling rate — nothing else is recorded</a:t>
+              <a:t>Per step: strain, stress, potential energy, cooling rate. Nothing else is recorded</a:t>
             </a:r>
           </a:p>
         </p:txBody>
@@ -6360,7 +6360,7 @@
                 </a:solidFill>
                 <a:latin typeface="Calibri"/>
               </a:rPr>
-              <a:t>22 × 22 grid on (u,τ): inner 20 × 20 on the 0.2–99.8% quantiles plus a catch-all ring</a:t>
+              <a:t>22 × 22 grid on (u,τ): inner 20 × 20 on the 0.2 to 99.8% quantiles plus a catch-all ring</a:t>
             </a:r>
           </a:p>
         </p:txBody>
@@ -6415,7 +6415,7 @@
                 </a:solidFill>
                 <a:latin typeface="Calibri"/>
               </a:rPr>
-              <a:t>Takeaway — </a:t>
+              <a:t>Takeaway: </a:t>
             </a:r>
             <a:r>
               <a:rPr sz="1350" b="0">
@@ -6424,7 +6424,7 @@
                 </a:solidFill>
                 <a:latin typeface="Calibri"/>
               </a:rPr>
-              <a:t>The target this time is the probability distribution of yield events, P(s | u,τ) — discovered, not assumed — and everything downstream is rebuilt from it.</a:t>
+              <a:t>The target this time is the probability distribution of yield events, P(s | u,τ), with its form discovered rather than assumed, and everything downstream is rebuilt from it.</a:t>
             </a:r>
           </a:p>
         </p:txBody>
@@ -6868,7 +6868,7 @@
                 </a:solidFill>
                 <a:latin typeface="Calibri"/>
               </a:rPr>
-              <a:t>unchanged from the first pass — parity test for a back-stress variable</a:t>
+              <a:t>unchanged from the first pass; a parity test for a back-stress variable</a:t>
             </a:r>
           </a:p>
         </p:txBody>
@@ -6966,7 +6966,7 @@
                 </a:solidFill>
                 <a:latin typeface="Calibri"/>
               </a:rPr>
-              <a:t>the ceiling law with the one-parameter preparation memory and the aftershock hazard — the yield strength of a glass from its preparation history, to a few percent</a:t>
+              <a:t>the ceiling law with the one-parameter preparation memory and the aftershock hazard: the yield strength of a glass from its preparation history, to a few percent</a:t>
             </a:r>
           </a:p>
         </p:txBody>
@@ -7021,7 +7021,7 @@
                 </a:solidFill>
                 <a:latin typeface="Calibri"/>
               </a:rPr>
-              <a:t>Takeaway — </a:t>
+              <a:t>Takeaway: </a:t>
             </a:r>
             <a:r>
               <a:rPr sz="1350" b="0">
@@ -7030,7 +7030,7 @@
                 </a:solidFill>
                 <a:latin typeface="Calibri"/>
               </a:rPr>
-              <a:t>Everything here is regenerated from the raw data by pipeline/run_all.sh (43 min); Figures 1–22 and the README carry the details.</a:t>
+              <a:t>Everything here is regenerated from the raw data by pipeline/run_all.sh (43 min); Figures 1 to 22 and the README carry the details.</a:t>
             </a:r>
           </a:p>
         </p:txBody>
@@ -7262,7 +7262,7 @@
                 </a:solidFill>
                 <a:latin typeface="Calibri"/>
               </a:rPr>
-              <a:t>Everything downstream — mean sizes, the plastic-rate field q, full synthetic stress–strain curves — is then derived from the fitted law and compared with its measured counterpart</a:t>
+              <a:t>Everything downstream (mean sizes, the plastic-rate field q, full synthetic stress-strain curves) is then derived from the fitted law and compared with its measured counterpart</a:t>
             </a:r>
           </a:p>
         </p:txBody>
@@ -7317,7 +7317,7 @@
                 </a:solidFill>
                 <a:latin typeface="Calibri"/>
               </a:rPr>
-              <a:t>Takeaway — </a:t>
+              <a:t>Takeaway: </a:t>
             </a:r>
             <a:r>
               <a:rPr sz="1350" b="0">
@@ -7451,7 +7451,7 @@
                 </a:solidFill>
                 <a:latin typeface="Calibri"/>
               </a:rPr>
-              <a:t>Up to two constants fitted inside the nonlinearity (Levenberg–Marquardt, 4 restarts); outer affine profiled out</a:t>
+              <a:t>Up to two constants fitted inside the nonlinearity (Levenberg-Marquardt, 4 restarts); outer affine profiled out</a:t>
             </a:r>
           </a:p>
           <a:p>
@@ -7558,7 +7558,7 @@
                 </a:solidFill>
                 <a:latin typeface="Calibri"/>
               </a:rPr>
-              <a:t>12 cells (700–7,600 events) spanning the plane, plus unweighted-bin and wider-window variants</a:t>
+              <a:t>12 cells (700 to 7,600 events) spanning the plane, plus unweighted-bin and wider-window variants</a:t>
             </a:r>
           </a:p>
           <a:p>
@@ -7575,7 +7575,7 @@
                 </a:solidFill>
                 <a:latin typeface="Calibri"/>
               </a:rPr>
-              <a:t>Audit: the largest cell pushed to complexity 9 — 4,505,024 trees, 48,725 admissible — no new form appears</a:t>
+              <a:t>Audit: the largest cell pushed to complexity 9 (4,505,024 trees, 48,725 admissible); no new form appears</a:t>
             </a:r>
           </a:p>
           <a:p>
@@ -7592,7 +7592,7 @@
                 </a:solidFill>
                 <a:latin typeface="Calibri"/>
               </a:rPr>
-              <a:t>SR proposes; the likelihood disposes (next slides)</a:t>
+              <a:t>The search proposes forms; a per-event likelihood chooses among them (next slides)</a:t>
             </a:r>
           </a:p>
         </p:txBody>
@@ -7647,7 +7647,7 @@
                 </a:solidFill>
                 <a:latin typeface="Calibri"/>
               </a:rPr>
-              <a:t>Takeaway — </a:t>
+              <a:t>Takeaway: </a:t>
             </a:r>
             <a:r>
               <a:rPr sz="1350" b="0">
@@ -7823,7 +7823,7 @@
                 </a:solidFill>
                 <a:latin typeface="Calibri"/>
               </a:rPr>
-              <a:t>s_c(u,τ): a hard ceiling — the largest event the state can produce; the density vanishes like (s_c − s)ᵐ, m ≈ 2.3</a:t>
+              <a:t>s_c(u,τ): a hard ceiling, the largest event the state can produce; the density vanishes like (s_c − s)ᵐ, m ≈ 2.3</a:t>
             </a:r>
           </a:p>
           <a:p>
@@ -7895,7 +7895,7 @@
                 </a:solidFill>
                 <a:latin typeface="Calibri"/>
               </a:rPr>
-              <a:t>Takeaway — </a:t>
+              <a:t>Takeaway: </a:t>
             </a:r>
             <a:r>
               <a:rPr sz="1350" b="0">
@@ -8093,7 +8093,7 @@
                 </a:solidFill>
                 <a:latin typeface="Calibri"/>
               </a:rPr>
-              <a:t>Takeaway — </a:t>
+              <a:t>Takeaway: </a:t>
             </a:r>
             <a:r>
               <a:rPr sz="1350" b="0">
@@ -8154,7 +8154,7 @@
                 </a:solidFill>
                 <a:latin typeface="Calibri"/>
               </a:rPr>
-              <a:t>SR proposes, the likelihood disposes</a:t>
+              <a:t>The likelihood chooses among the candidate forms</a:t>
             </a:r>
           </a:p>
         </p:txBody>
@@ -8235,7 +8235,7 @@
                 </a:solidFill>
                 <a:latin typeface="Calibri"/>
               </a:rPr>
-              <a:t>The ceiling law wins 8 of 8 large cells: ΔAIC 67–120 over the TPL, 300–754 over the lognormal</a:t>
+              <a:t>The ceiling law wins 8 of 8 large cells: ΔAIC 67 to 120 over the TPL, 300 to 754 over the lognormal</a:t>
             </a:r>
           </a:p>
           <a:p>
@@ -8341,7 +8341,7 @@
                 </a:solidFill>
                 <a:latin typeface="Calibri"/>
               </a:rPr>
-              <a:t>Takeaway — </a:t>
+              <a:t>Takeaway: </a:t>
             </a:r>
             <a:r>
               <a:rPr sz="1350" b="0">
@@ -8350,7 +8350,7 @@
                 </a:solidFill>
                 <a:latin typeface="Calibri"/>
               </a:rPr>
-              <a:t>The bounded-support law is decided by per-event likelihood with falsifiability controls, not by the binned fit.</a:t>
+              <a:t>Per-event likelihood with falsifiability controls decides for the bounded-support law; the binned fit only proposed it.</a:t>
             </a:r>
           </a:p>
         </p:txBody>
@@ -8484,7 +8484,7 @@
                 </a:solidFill>
                 <a:latin typeface="Calibri"/>
               </a:rPr>
-              <a:t>Left: 277 cells, 146× in range (0.02 cold → 3.0 in the flowing state), bootstrap error 6.5%; rank-1 factorization Λ(u)·f(τ) carries 95.5% of the log-variance.  Right: refit by preparation at fixed cell — slow-cooled glass has a 1.71× higher ceiling than fast-cooled.</a:t>
+              <a:t>Left: 277 cells, 146× in range (0.02 cold → 3.0 in the flowing state), bootstrap error 6.5%; rank-1 factorization Λ(u)·f(τ) carries 95.5% of the log-variance.  Right: refit by preparation at fixed cell; slow-cooled glass has a 1.71× higher ceiling than fast-cooled.</a:t>
             </a:r>
           </a:p>
         </p:txBody>
@@ -8539,7 +8539,7 @@
                 </a:solidFill>
                 <a:latin typeface="Calibri"/>
               </a:rPr>
-              <a:t>Takeaway — </a:t>
+              <a:t>Takeaway: </a:t>
             </a:r>
             <a:r>
               <a:rPr sz="1350" b="0">
@@ -8548,7 +8548,7 @@
                 </a:solidFill>
                 <a:latin typeface="Calibri"/>
               </a:rPr>
-              <a:t>All state dependence, and all preparation memory, sit in one parameter — the ceiling.</a:t>
+              <a:t>All state dependence, and all preparation memory, sit in one parameter: the ceiling.</a:t>
             </a:r>
           </a:p>
         </p:txBody>
@@ -8698,7 +8698,7 @@
                 </a:solidFill>
                 <a:latin typeface="Calibri"/>
               </a:rPr>
-              <a:t>Agreement: median +1.8%, RMS 17% against a 17.5% split-half noise floor — the test is saturated</a:t>
+              <a:t>Agreement: median +1.8%, RMS 17% against a 17.5% split-half noise floor; the test is saturated</a:t>
             </a:r>
           </a:p>
           <a:p>
@@ -8787,7 +8787,7 @@
                 </a:solidFill>
                 <a:latin typeface="Calibri"/>
               </a:rPr>
-              <a:t>Takeaway — </a:t>
+              <a:t>Takeaway: </a:t>
             </a:r>
             <a:r>
               <a:rPr sz="1350" b="0">

--- a/SEEM_project_deck.pptx
+++ b/SEEM_project_deck.pptx
@@ -15,16 +15,6 @@
     <p:sldId id="263" r:id="rId14"/>
     <p:sldId id="264" r:id="rId15"/>
     <p:sldId id="265" r:id="rId16"/>
-    <p:sldId id="266" r:id="rId17"/>
-    <p:sldId id="267" r:id="rId18"/>
-    <p:sldId id="268" r:id="rId19"/>
-    <p:sldId id="269" r:id="rId20"/>
-    <p:sldId id="270" r:id="rId21"/>
-    <p:sldId id="271" r:id="rId22"/>
-    <p:sldId id="272" r:id="rId23"/>
-    <p:sldId id="273" r:id="rId24"/>
-    <p:sldId id="274" r:id="rId25"/>
-    <p:sldId id="275" r:id="rId26"/>
   </p:sldIdLst>
   <p:sldSz cx="12191695" cy="6858000" type="screen4x3"/>
   <p:notesSz cx="6858000" cy="9144000"/>
@@ -3130,13 +3120,13 @@
           <a:lstStyle/>
           <a:p>
             <a:r>
-              <a:rPr sz="3800" b="1">
+              <a:rPr sz="4000" b="1">
                 <a:solidFill>
                   <a:srgbClr val="1E2761"/>
                 </a:solidFill>
                 <a:latin typeface="Calibri"/>
               </a:rPr>
-              <a:t>A fitted law for yield events, and everything rebuilt from it</a:t>
+              <a:t>A fitted law for yield events</a:t>
             </a:r>
           </a:p>
         </p:txBody>
@@ -3149,7 +3139,7 @@
         </p:nvSpPr>
         <p:spPr>
           <a:xfrm>
-            <a:off x="822960" y="3246120"/>
+            <a:off x="822960" y="3200400"/>
             <a:ext cx="10515600" cy="822960"/>
           </a:xfrm>
           <a:prstGeom prst="rect">
@@ -3170,7 +3160,7 @@
                 </a:solidFill>
                 <a:latin typeface="Calibri"/>
               </a:rPr>
-              <a:t>Symbolic-regression discovery of the event-size distribution in AQS shear, the forward model built on it, and where the model fails</a:t>
+              <a:t>The variables, the symbolic-regression search, the discovered size law and how it performs, the forward model built on it, and the fix for where it fails</a:t>
             </a:r>
           </a:p>
         </p:txBody>
@@ -3204,7 +3194,7 @@
                 </a:solidFill>
                 <a:latin typeface="Calibri"/>
               </a:rPr>
-              <a:t>SEEM project status, September 4, 2026  (third pass; supersedes the August 6 deck)</a:t>
+              <a:t>SEEM project, September 4, 2026</a:t>
             </a:r>
           </a:p>
         </p:txBody>
@@ -3238,7 +3228,7 @@
                 </a:solidFill>
                 <a:latin typeface="Calibri"/>
               </a:rPr>
-              <a:t>AQS molecular-dynamics shear · 850 trajectories · nine preparations · 187,468 stress drops · every number regenerated by pipeline/run_all.sh</a:t>
+              <a:t>AQS shear of a model glass, 850 runs, nine cooling rates, 187,468 stress drops. Every number here is regenerated by pipeline/run_all.sh.</a:t>
             </a:r>
           </a:p>
         </p:txBody>
@@ -3290,14 +3280,49 @@
                 </a:solidFill>
                 <a:latin typeface="Calibri"/>
               </a:rPr>
-              <a:t>Simulating all 850 runs</a:t>
+              <a:t>The fix: a one-parameter preparation memory in the ceiling</a:t>
+            </a:r>
+          </a:p>
+        </p:txBody>
+      </p:sp>
+      <p:sp>
+        <p:nvSpPr>
+          <p:cNvPr id="3" name="TextBox 2"/>
+          <p:cNvSpPr txBox="1"/>
+          <p:nvPr/>
+        </p:nvSpPr>
+        <p:spPr>
+          <a:xfrm>
+            <a:off x="640080" y="1097280"/>
+            <a:ext cx="10972800" cy="640080"/>
+          </a:xfrm>
+          <a:prstGeom prst="rect">
+            <a:avLst/>
+          </a:prstGeom>
+          <a:noFill/>
+        </p:spPr>
+        <p:txBody>
+          <a:bodyPr wrap="square" lIns="0" rIns="0" tIns="0" bIns="0">
+            <a:spAutoFit/>
+          </a:bodyPr>
+          <a:lstStyle/>
+          <a:p>
+            <a:pPr algn="ctr"/>
+            <a:r>
+              <a:rPr sz="2200" b="0">
+                <a:solidFill>
+                  <a:srgbClr val="1E2761"/>
+                </a:solidFill>
+                <a:latin typeface="Cambria Math"/>
+              </a:rPr>
+              <a:t>s_c(u, τ; rate)  =  s_c(u, τ) · (rate / rate_mid)^β ,        β = −0.117 ± 0.005</a:t>
             </a:r>
           </a:p>
         </p:txBody>
       </p:sp>
       <p:pic>
         <p:nvPicPr>
-          <p:cNvPr id="3" name="Picture 2" descr="fig12_sim_stress.png"/>
+          <p:cNvPr id="4" name="Picture 3" descr="fig17_memory_repair.png"/>
           <p:cNvPicPr>
             <a:picLocks noChangeAspect="1"/>
           </p:cNvPicPr>
@@ -3311,38 +3336,14 @@
         </p:blipFill>
         <p:spPr>
           <a:xfrm>
-            <a:off x="502920" y="1227025"/>
-            <a:ext cx="5486400" cy="3855308"/>
+            <a:off x="502920" y="1797527"/>
+            <a:ext cx="6949440" cy="2668584"/>
           </a:xfrm>
           <a:prstGeom prst="rect">
             <a:avLst/>
           </a:prstGeom>
         </p:spPr>
       </p:pic>
-      <p:pic>
-        <p:nvPicPr>
-          <p:cNvPr id="4" name="Picture 3" descr="fig14_sim_peaks.png"/>
-          <p:cNvPicPr>
-            <a:picLocks noChangeAspect="1"/>
-          </p:cNvPicPr>
-          <p:nvPr/>
-        </p:nvPicPr>
-        <p:blipFill>
-          <a:blip r:embed="rId3"/>
-          <a:stretch>
-            <a:fillRect/>
-          </a:stretch>
-        </p:blipFill>
-        <p:spPr>
-          <a:xfrm>
-            <a:off x="6199632" y="1227025"/>
-            <a:ext cx="5486400" cy="3855308"/>
-          </a:xfrm>
-          <a:prstGeom prst="rect">
-            <a:avLst/>
-          </a:prstGeom>
-        </p:spPr>
-      </p:pic>
       <p:sp>
         <p:nvSpPr>
           <p:cNvPr id="5" name="TextBox 4"/>
@@ -3351,8 +3352,8 @@
         </p:nvSpPr>
         <p:spPr>
           <a:xfrm>
-            <a:off x="640080" y="5230368"/>
-            <a:ext cx="10972800" cy="640080"/>
+            <a:off x="7635240" y="1783080"/>
+            <a:ext cx="4069080" cy="2743200"/>
           </a:xfrm>
           <a:prstGeom prst="rect">
             <a:avLst/>
@@ -3365,21 +3366,118 @@
           </a:bodyPr>
           <a:lstStyle/>
           <a:p>
-            <a:r>
-              <a:rPr sz="1300" b="0">
+            <a:pPr marL="228600" indent="-228600">
+              <a:spcAft>
+                <a:spcPts val="800"/>
+              </a:spcAft>
+              <a:buChar char="•"/>
+            </a:pPr>
+            <a:r>
+              <a:rPr sz="1150" b="0">
                 <a:solidFill>
                   <a:srgbClr val="212121"/>
                 </a:solidFill>
                 <a:latin typeface="Calibri"/>
               </a:rPr>
-              <a:t>Three arms differ only in the size law: ceiling law, TPL, empirical resampling.  Stress-strain curves, yield overshoot across 256× in cooling rate, and flow stress (±5%) all emerge; yield-peak RMS 2.5% (ceiling), 1.4% (TPL), 0.9% (empirical).</a:t>
-            </a:r>
-          </a:p>
-        </p:txBody>
-      </p:sp>
-      <p:sp>
-        <p:nvSpPr>
-          <p:cNvPr id="6" name="Rounded Rectangle 5"/>
+              <a:t>Only the ceiling is scaled per preparation; hazard, drift, aging and the energy coupling stay as measured</a:t>
+            </a:r>
+          </a:p>
+          <a:p>
+            <a:pPr marL="228600" indent="-228600">
+              <a:spcAft>
+                <a:spcPts val="800"/>
+              </a:spcAft>
+              <a:buChar char="•"/>
+            </a:pPr>
+            <a:r>
+              <a:rPr sz="1150" b="0">
+                <a:solidFill>
+                  <a:srgbClr val="212121"/>
+                </a:solidFill>
+                <a:latin typeface="Calibri"/>
+              </a:rPr>
+              <a:t>β is the memory exponent: the slope of ln(mean event size) on ln(cooling rate) at fixed cell, with cell fixed effects. rate_mid is the middle of the nine rates, so the factors run from 1.38 (slowest) to 0.72 (fastest)</a:t>
+            </a:r>
+          </a:p>
+          <a:p>
+            <a:pPr marL="228600" indent="-228600">
+              <a:spcAft>
+                <a:spcPts val="800"/>
+              </a:spcAft>
+              <a:buChar char="•"/>
+            </a:pPr>
+            <a:r>
+              <a:rPr sz="1150" b="0">
+                <a:solidFill>
+                  <a:srgbClr val="212121"/>
+                </a:solidFill>
+                <a:latin typeface="Calibri"/>
+              </a:rPr>
+              <a:t>Why the ceiling: measured the same way, the hazard has β = −0.012 ± 0.002 and the elastic drift does not move; the memory is in the event size, and in its tail</a:t>
+            </a:r>
+          </a:p>
+        </p:txBody>
+      </p:sp>
+      <p:sp>
+        <p:nvSpPr>
+          <p:cNvPr id="6" name="TextBox 5"/>
+          <p:cNvSpPr txBox="1"/>
+          <p:nvPr/>
+        </p:nvSpPr>
+        <p:spPr>
+          <a:xfrm>
+            <a:off x="640080" y="4617720"/>
+            <a:ext cx="10972800" cy="1280160"/>
+          </a:xfrm>
+          <a:prstGeom prst="rect">
+            <a:avLst/>
+          </a:prstGeom>
+          <a:noFill/>
+        </p:spPr>
+        <p:txBody>
+          <a:bodyPr wrap="square" lIns="0" rIns="0" tIns="0" bIns="0">
+            <a:spAutoFit/>
+          </a:bodyPr>
+          <a:lstStyle/>
+          <a:p>
+            <a:pPr marL="228600" indent="-228600">
+              <a:spcAft>
+                <a:spcPts val="800"/>
+              </a:spcAft>
+              <a:buChar char="•"/>
+            </a:pPr>
+            <a:r>
+              <a:rPr sz="1200" b="0">
+                <a:solidFill>
+                  <a:srgbClr val="212121"/>
+                </a:solidFill>
+                <a:latin typeface="Calibri"/>
+              </a:rPr>
+              <a:t>Result (right panel): the spread of mean u at γ = 0.5 goes from 4.1% to 26.5% against 24% in the data, and the model tracks the data over the whole strain window; yield peaks are unchanged (RMS 2.5% → 2.8%)</a:t>
+            </a:r>
+          </a:p>
+          <a:p>
+            <a:pPr marL="228600" indent="-228600">
+              <a:spcAft>
+                <a:spcPts val="800"/>
+              </a:spcAft>
+              <a:buChar char="•"/>
+            </a:pPr>
+            <a:r>
+              <a:rPr sz="1200" b="0">
+                <a:solidFill>
+                  <a:srgbClr val="212121"/>
+                </a:solidFill>
+                <a:latin typeface="Calibri"/>
+              </a:rPr>
+              <a:t>The same relation applied within a preparation, a per-run factor exp(κ·δu₀) with κ = β · d ln(rate)/du₀ = −43 and no new parameter, predicts how long a run remembers its initial energy (0.44 / 0.27 / 0.22 / 0.17 at γ = 0.1 / 0.2 / 0.3 / 0.5, against 0.63 / 0.27 / 0.24 / 0.18 in the data). The memory also relaxes with strain, with γ_r ≈ 0.2</a:t>
+            </a:r>
+          </a:p>
+        </p:txBody>
+      </p:sp>
+      <p:sp>
+        <p:nvSpPr>
+          <p:cNvPr id="7" name="Rounded Rectangle 6"/>
           <p:cNvSpPr/>
           <p:nvPr/>
         </p:nvSpPr>
@@ -3436,2419 +3534,7 @@
                 </a:solidFill>
                 <a:latin typeface="Calibri"/>
               </a:rPr>
-              <a:t>The model predicts the yield strength of a glass from its preparation to a few percent, and macroscopic curves cannot tell size laws apart. The per-event likelihood can.</a:t>
-            </a:r>
-          </a:p>
-        </p:txBody>
-      </p:sp>
-    </p:spTree>
-  </p:cSld>
-  <p:clrMapOvr>
-    <a:masterClrMapping/>
-  </p:clrMapOvr>
-</p:sld>
-</file>
-
-<file path=ppt/slides/slide11.xml><?xml version="1.0" encoding="utf-8"?>
-<p:sld xmlns:a="http://schemas.openxmlformats.org/drawingml/2006/main" xmlns:p="http://schemas.openxmlformats.org/presentationml/2006/main" xmlns:r="http://schemas.openxmlformats.org/officeDocument/2006/relationships">
-  <p:cSld>
-    <p:spTree>
-      <p:nvGrpSpPr>
-        <p:cNvPr id="1" name=""/>
-        <p:cNvGrpSpPr/>
-        <p:nvPr/>
-      </p:nvGrpSpPr>
-      <p:grpSpPr/>
-      <p:sp>
-        <p:nvSpPr>
-          <p:cNvPr id="2" name="TextBox 1"/>
-          <p:cNvSpPr txBox="1"/>
-          <p:nvPr/>
-        </p:nvSpPr>
-        <p:spPr>
-          <a:xfrm>
-            <a:off x="548640" y="292608"/>
-            <a:ext cx="11091672" cy="685800"/>
-          </a:xfrm>
-          <a:prstGeom prst="rect">
-            <a:avLst/>
-          </a:prstGeom>
-          <a:noFill/>
-        </p:spPr>
-        <p:txBody>
-          <a:bodyPr wrap="square" lIns="0" rIns="0" tIns="0" bIns="0">
-            <a:spAutoFit/>
-          </a:bodyPr>
-          <a:lstStyle/>
-          <a:p>
-            <a:r>
-              <a:rPr sz="3000" b="1">
-                <a:solidFill>
-                  <a:srgbClr val="990011"/>
-                </a:solidFill>
-                <a:latin typeface="Calibri"/>
-              </a:rPr>
-              <a:t>The failure mode</a:t>
-            </a:r>
-          </a:p>
-        </p:txBody>
-      </p:sp>
-      <p:pic>
-        <p:nvPicPr>
-          <p:cNvPr id="3" name="Picture 2" descr="fig13_sim_energy.png"/>
-          <p:cNvPicPr>
-            <a:picLocks noChangeAspect="1"/>
-          </p:cNvPicPr>
-          <p:nvPr/>
-        </p:nvPicPr>
-        <p:blipFill>
-          <a:blip r:embed="rId2"/>
-          <a:stretch>
-            <a:fillRect/>
-          </a:stretch>
-        </p:blipFill>
-        <p:spPr>
-          <a:xfrm>
-            <a:off x="502920" y="1280777"/>
-            <a:ext cx="6309360" cy="4433604"/>
-          </a:xfrm>
-          <a:prstGeom prst="rect">
-            <a:avLst/>
-          </a:prstGeom>
-        </p:spPr>
-      </p:pic>
-      <p:sp>
-        <p:nvSpPr>
-          <p:cNvPr id="4" name="TextBox 3"/>
-          <p:cNvSpPr txBox="1"/>
-          <p:nvPr/>
-        </p:nvSpPr>
-        <p:spPr>
-          <a:xfrm>
-            <a:off x="7132320" y="1371600"/>
-            <a:ext cx="5056631" cy="4343400"/>
-          </a:xfrm>
-          <a:prstGeom prst="rect">
-            <a:avLst/>
-          </a:prstGeom>
-          <a:noFill/>
-        </p:spPr>
-        <p:txBody>
-          <a:bodyPr wrap="square" lIns="0" rIns="0" tIns="0" bIns="0">
-            <a:spAutoFit/>
-          </a:bodyPr>
-          <a:lstStyle/>
-          <a:p>
-            <a:pPr marL="228600" indent="-228600">
-              <a:spcAft>
-                <a:spcPts val="800"/>
-              </a:spcAft>
-              <a:buChar char="•"/>
-            </a:pPr>
-            <a:r>
-              <a:rPr sz="1400" b="0">
-                <a:solidFill>
-                  <a:srgbClr val="212121"/>
-                </a:solidFill>
-                <a:latin typeface="Calibri"/>
-              </a:rPr>
-              <a:t>The energy coordinate: good early, too convergent late</a:t>
-            </a:r>
-          </a:p>
-          <a:p>
-            <a:pPr marL="228600" indent="-228600">
-              <a:spcAft>
-                <a:spcPts val="800"/>
-              </a:spcAft>
-              <a:buChar char="•"/>
-            </a:pPr>
-            <a:r>
-              <a:rPr sz="1400" b="0">
-                <a:solidFill>
-                  <a:srgbClr val="212121"/>
-                </a:solidFill>
-                <a:latin typeface="Calibri"/>
-              </a:rPr>
-              <a:t>Preparations keep a 24% spread in mean u at γ = 0.5; the simulation keeps 4%</a:t>
-            </a:r>
-          </a:p>
-          <a:p>
-            <a:pPr marL="228600" indent="-228600">
-              <a:spcAft>
-                <a:spcPts val="800"/>
-              </a:spcAft>
-              <a:buChar char="•"/>
-            </a:pPr>
-            <a:r>
-              <a:rPr sz="1400" b="0">
-                <a:solidFill>
-                  <a:srgbClr val="212121"/>
-                </a:solidFill>
-                <a:latin typeface="Calibri"/>
-              </a:rPr>
-              <a:t>The fields are preparation-blind by construction (one map for all histories), so this is the missing state variable of the first pass, seen macroscopically</a:t>
-            </a:r>
-          </a:p>
-          <a:p>
-            <a:pPr marL="228600" indent="-228600">
-              <a:spcAft>
-                <a:spcPts val="800"/>
-              </a:spcAft>
-              <a:buChar char="•"/>
-            </a:pPr>
-            <a:r>
-              <a:rPr sz="1400" b="0">
-                <a:solidFill>
-                  <a:srgbClr val="212121"/>
-                </a:solidFill>
-                <a:latin typeface="Calibri"/>
-              </a:rPr>
-              <a:t>Same message as the 1.71× ceiling memory: (u,τ) is not a sufficient state</a:t>
-            </a:r>
-          </a:p>
-        </p:txBody>
-      </p:sp>
-      <p:sp>
-        <p:nvSpPr>
-          <p:cNvPr id="5" name="Rounded Rectangle 4"/>
-          <p:cNvSpPr/>
-          <p:nvPr/>
-        </p:nvSpPr>
-        <p:spPr>
-          <a:xfrm>
-            <a:off x="548640" y="6053328"/>
-            <a:ext cx="11091672" cy="566928"/>
-          </a:xfrm>
-          <a:prstGeom prst="roundRect">
-            <a:avLst>
-              <a:gd name="adj" fmla="val 18000"/>
-            </a:avLst>
-          </a:prstGeom>
-          <a:solidFill>
-            <a:srgbClr val="F2F2F2"/>
-          </a:solidFill>
-          <a:ln>
-            <a:noFill/>
-          </a:ln>
-          <a:effectLst/>
-        </p:spPr>
-        <p:style>
-          <a:lnRef idx="1">
-            <a:schemeClr val="accent1"/>
-          </a:lnRef>
-          <a:fillRef idx="3">
-            <a:schemeClr val="accent1"/>
-          </a:fillRef>
-          <a:effectRef idx="2">
-            <a:schemeClr val="accent1"/>
-          </a:effectRef>
-          <a:fontRef idx="minor">
-            <a:schemeClr val="lt1"/>
-          </a:fontRef>
-        </p:style>
-        <p:txBody>
-          <a:bodyPr rtlCol="0" anchor="ctr" wrap="square" lIns="164592" rIns="164592" tIns="0" bIns="0"/>
-          <a:lstStyle/>
-          <a:p>
-            <a:pPr algn="ctr"/>
-            <a:r>
-              <a:rPr sz="1350" b="1">
-                <a:solidFill>
-                  <a:srgbClr val="1E2761"/>
-                </a:solidFill>
-                <a:latin typeface="Calibri"/>
-              </a:rPr>
-              <a:t>Takeaway: </a:t>
-            </a:r>
-            <a:r>
-              <a:rPr sz="1350" b="0">
-                <a:solidFill>
-                  <a:srgbClr val="212121"/>
-                </a:solidFill>
-                <a:latin typeface="Calibri"/>
-              </a:rPr>
-              <a:t>A five-times-too-small preparation spread: the one place the two-variable model fails, and the question the rest of the deck answers.</a:t>
-            </a:r>
-          </a:p>
-        </p:txBody>
-      </p:sp>
-    </p:spTree>
-  </p:cSld>
-  <p:clrMapOvr>
-    <a:masterClrMapping/>
-  </p:clrMapOvr>
-</p:sld>
-</file>
-
-<file path=ppt/slides/slide12.xml><?xml version="1.0" encoding="utf-8"?>
-<p:sld xmlns:a="http://schemas.openxmlformats.org/drawingml/2006/main" xmlns:p="http://schemas.openxmlformats.org/presentationml/2006/main" xmlns:r="http://schemas.openxmlformats.org/officeDocument/2006/relationships">
-  <p:cSld>
-    <p:spTree>
-      <p:nvGrpSpPr>
-        <p:cNvPr id="1" name=""/>
-        <p:cNvGrpSpPr/>
-        <p:nvPr/>
-      </p:nvGrpSpPr>
-      <p:grpSpPr/>
-      <p:sp>
-        <p:nvSpPr>
-          <p:cNvPr id="2" name="TextBox 1"/>
-          <p:cNvSpPr txBox="1"/>
-          <p:nvPr/>
-        </p:nvSpPr>
-        <p:spPr>
-          <a:xfrm>
-            <a:off x="548640" y="292608"/>
-            <a:ext cx="11091672" cy="685800"/>
-          </a:xfrm>
-          <a:prstGeom prst="rect">
-            <a:avLst/>
-          </a:prstGeom>
-          <a:noFill/>
-        </p:spPr>
-        <p:txBody>
-          <a:bodyPr wrap="square" lIns="0" rIns="0" tIns="0" bIns="0">
-            <a:spAutoFit/>
-          </a:bodyPr>
-          <a:lstStyle/>
-          <a:p>
-            <a:r>
-              <a:rPr sz="3000" b="1">
-                <a:solidFill>
-                  <a:srgbClr val="1E2761"/>
-                </a:solidFill>
-                <a:latin typeface="Calibri"/>
-              </a:rPr>
-              <a:t>Where the preparation memory lives</a:t>
-            </a:r>
-          </a:p>
-        </p:txBody>
-      </p:sp>
-      <p:pic>
-        <p:nvPicPr>
-          <p:cNvPr id="3" name="Picture 2" descr="fig16_memory_channels.png"/>
-          <p:cNvPicPr>
-            <a:picLocks noChangeAspect="1"/>
-          </p:cNvPicPr>
-          <p:nvPr/>
-        </p:nvPicPr>
-        <p:blipFill>
-          <a:blip r:embed="rId2"/>
-          <a:stretch>
-            <a:fillRect/>
-          </a:stretch>
-        </p:blipFill>
-        <p:spPr>
-          <a:xfrm>
-            <a:off x="502920" y="1256096"/>
-            <a:ext cx="6309360" cy="4482966"/>
-          </a:xfrm>
-          <a:prstGeom prst="rect">
-            <a:avLst/>
-          </a:prstGeom>
-        </p:spPr>
-      </p:pic>
-      <p:sp>
-        <p:nvSpPr>
-          <p:cNvPr id="4" name="TextBox 3"/>
-          <p:cNvSpPr txBox="1"/>
-          <p:nvPr/>
-        </p:nvSpPr>
-        <p:spPr>
-          <a:xfrm>
-            <a:off x="7132320" y="1371600"/>
-            <a:ext cx="5056631" cy="4343400"/>
-          </a:xfrm>
-          <a:prstGeom prst="rect">
-            <a:avLst/>
-          </a:prstGeom>
-          <a:noFill/>
-        </p:spPr>
-        <p:txBody>
-          <a:bodyPr wrap="square" lIns="0" rIns="0" tIns="0" bIns="0">
-            <a:spAutoFit/>
-          </a:bodyPr>
-          <a:lstStyle/>
-          <a:p>
-            <a:pPr marL="228600" indent="-228600">
-              <a:spcAft>
-                <a:spcPts val="800"/>
-              </a:spcAft>
-              <a:buChar char="•"/>
-            </a:pPr>
-            <a:r>
-              <a:rPr sz="1250" b="0">
-                <a:solidFill>
-                  <a:srgbClr val="212121"/>
-                </a:solidFill>
-                <a:latin typeface="Calibri"/>
-              </a:rPr>
-              <a:t>Every channel re-measured per cooling rate at fixed cell; slope β on ln(rate) with cell fixed effects; a parity-split control gives the null</a:t>
-            </a:r>
-          </a:p>
-          <a:p>
-            <a:pPr marL="228600" indent="-228600">
-              <a:spcAft>
-                <a:spcPts val="800"/>
-              </a:spcAft>
-              <a:buChar char="•"/>
-            </a:pPr>
-            <a:r>
-              <a:rPr sz="1250" b="0">
-                <a:solidFill>
-                  <a:srgbClr val="212121"/>
-                </a:solidFill>
-                <a:latin typeface="Calibri"/>
-              </a:rPr>
-              <a:t>Event hazard: preparation-blind (β = −0.012 ± 0.002; ratio 1.005, control 1.02). Elastic drift: identical.</a:t>
-            </a:r>
-          </a:p>
-          <a:p>
-            <a:pPr marL="228600" indent="-228600">
-              <a:spcAft>
-                <a:spcPts val="800"/>
-              </a:spcAft>
-              <a:buChar char="•"/>
-            </a:pPr>
-            <a:r>
-              <a:rPr sz="1250" b="0">
-                <a:solidFill>
-                  <a:srgbClr val="212121"/>
-                </a:solidFill>
-                <a:latin typeface="Calibri"/>
-              </a:rPr>
-              <a:t>Mean event size: 1.70× (β = −0.117 ± 0.005), the ceiling memory measured another way; it lives in the tail (geometric mean moves only 1.20×)</a:t>
-            </a:r>
-          </a:p>
-          <a:p>
-            <a:pPr marL="228600" indent="-228600">
-              <a:spcAft>
-                <a:spcPts val="800"/>
-              </a:spcAft>
-              <a:buChar char="•"/>
-            </a:pPr>
-            <a:r>
-              <a:rPr sz="1250" b="0">
-                <a:solidFill>
-                  <a:srgbClr val="212121"/>
-                </a:solidFill>
-                <a:latin typeface="Calibri"/>
-              </a:rPr>
-              <a:t>A slow-cooled glass is triggered as often; its avalanches run further</a:t>
-            </a:r>
-          </a:p>
-          <a:p>
-            <a:pPr marL="228600" indent="-228600">
-              <a:spcAft>
-                <a:spcPts val="800"/>
-              </a:spcAft>
-              <a:buChar char="•"/>
-            </a:pPr>
-            <a:r>
-              <a:rPr sz="1250" b="0">
-                <a:solidFill>
-                  <a:srgbClr val="212121"/>
-                </a:solidFill>
-                <a:latin typeface="Calibri"/>
-              </a:rPr>
-              <a:t>73% of the per-event energy-release memory is size; 27% a secondary memory in the coupling</a:t>
-            </a:r>
-          </a:p>
-        </p:txBody>
-      </p:sp>
-      <p:sp>
-        <p:nvSpPr>
-          <p:cNvPr id="5" name="Rounded Rectangle 4"/>
-          <p:cNvSpPr/>
-          <p:nvPr/>
-        </p:nvSpPr>
-        <p:spPr>
-          <a:xfrm>
-            <a:off x="548640" y="6053328"/>
-            <a:ext cx="11091672" cy="566928"/>
-          </a:xfrm>
-          <a:prstGeom prst="roundRect">
-            <a:avLst>
-              <a:gd name="adj" fmla="val 18000"/>
-            </a:avLst>
-          </a:prstGeom>
-          <a:solidFill>
-            <a:srgbClr val="F2F2F2"/>
-          </a:solidFill>
-          <a:ln>
-            <a:noFill/>
-          </a:ln>
-          <a:effectLst/>
-        </p:spPr>
-        <p:style>
-          <a:lnRef idx="1">
-            <a:schemeClr val="accent1"/>
-          </a:lnRef>
-          <a:fillRef idx="3">
-            <a:schemeClr val="accent1"/>
-          </a:fillRef>
-          <a:effectRef idx="2">
-            <a:schemeClr val="accent1"/>
-          </a:effectRef>
-          <a:fontRef idx="minor">
-            <a:schemeClr val="lt1"/>
-          </a:fontRef>
-        </p:style>
-        <p:txBody>
-          <a:bodyPr rtlCol="0" anchor="ctr" wrap="square" lIns="164592" rIns="164592" tIns="0" bIns="0"/>
-          <a:lstStyle/>
-          <a:p>
-            <a:pPr algn="ctr"/>
-            <a:r>
-              <a:rPr sz="1350" b="1">
-                <a:solidFill>
-                  <a:srgbClr val="1E2761"/>
-                </a:solidFill>
-                <a:latin typeface="Calibri"/>
-              </a:rPr>
-              <a:t>Takeaway: </a:t>
-            </a:r>
-            <a:r>
-              <a:rPr sz="1350" b="0">
-                <a:solidFill>
-                  <a:srgbClr val="212121"/>
-                </a:solidFill>
-                <a:latin typeface="Calibri"/>
-              </a:rPr>
-              <a:t>Memory acts through event size, not event rate. That cuts against the simplest one-variable STZ reading, where preparation enters through the STZ density.</a:t>
-            </a:r>
-          </a:p>
-        </p:txBody>
-      </p:sp>
-    </p:spTree>
-  </p:cSld>
-  <p:clrMapOvr>
-    <a:masterClrMapping/>
-  </p:clrMapOvr>
-</p:sld>
-</file>
-
-<file path=ppt/slides/slide13.xml><?xml version="1.0" encoding="utf-8"?>
-<p:sld xmlns:a="http://schemas.openxmlformats.org/drawingml/2006/main" xmlns:p="http://schemas.openxmlformats.org/presentationml/2006/main" xmlns:r="http://schemas.openxmlformats.org/officeDocument/2006/relationships">
-  <p:cSld>
-    <p:spTree>
-      <p:nvGrpSpPr>
-        <p:cNvPr id="1" name=""/>
-        <p:cNvGrpSpPr/>
-        <p:nvPr/>
-      </p:nvGrpSpPr>
-      <p:grpSpPr/>
-      <p:sp>
-        <p:nvSpPr>
-          <p:cNvPr id="2" name="TextBox 1"/>
-          <p:cNvSpPr txBox="1"/>
-          <p:nvPr/>
-        </p:nvSpPr>
-        <p:spPr>
-          <a:xfrm>
-            <a:off x="548640" y="292608"/>
-            <a:ext cx="11091672" cy="685800"/>
-          </a:xfrm>
-          <a:prstGeom prst="rect">
-            <a:avLst/>
-          </a:prstGeom>
-          <a:noFill/>
-        </p:spPr>
-        <p:txBody>
-          <a:bodyPr wrap="square" lIns="0" rIns="0" tIns="0" bIns="0">
-            <a:spAutoFit/>
-          </a:bodyPr>
-          <a:lstStyle/>
-          <a:p>
-            <a:r>
-              <a:rPr sz="3000" b="1">
-                <a:solidFill>
-                  <a:srgbClr val="1E2761"/>
-                </a:solidFill>
-                <a:latin typeface="Calibri"/>
-              </a:rPr>
-              <a:t>A one-parameter memory in the ceiling repairs the failure</a:t>
-            </a:r>
-          </a:p>
-        </p:txBody>
-      </p:sp>
-      <p:pic>
-        <p:nvPicPr>
-          <p:cNvPr id="3" name="Picture 2" descr="fig17_memory_repair.png"/>
-          <p:cNvPicPr>
-            <a:picLocks noChangeAspect="1"/>
-          </p:cNvPicPr>
-          <p:nvPr/>
-        </p:nvPicPr>
-        <p:blipFill>
-          <a:blip r:embed="rId2"/>
-          <a:stretch>
-            <a:fillRect/>
-          </a:stretch>
-        </p:blipFill>
-        <p:spPr>
-          <a:xfrm>
-            <a:off x="1437322" y="1188719"/>
-            <a:ext cx="9286875" cy="3566160"/>
-          </a:xfrm>
-          <a:prstGeom prst="rect">
-            <a:avLst/>
-          </a:prstGeom>
-        </p:spPr>
-      </p:pic>
-      <p:sp>
-        <p:nvSpPr>
-          <p:cNvPr id="4" name="TextBox 3"/>
-          <p:cNvSpPr txBox="1"/>
-          <p:nvPr/>
-        </p:nvSpPr>
-        <p:spPr>
-          <a:xfrm>
-            <a:off x="640080" y="4864608"/>
-            <a:ext cx="10972800" cy="1078991"/>
-          </a:xfrm>
-          <a:prstGeom prst="rect">
-            <a:avLst/>
-          </a:prstGeom>
-          <a:noFill/>
-        </p:spPr>
-        <p:txBody>
-          <a:bodyPr wrap="square" lIns="0" rIns="0" tIns="0" bIns="0">
-            <a:spAutoFit/>
-          </a:bodyPr>
-          <a:lstStyle/>
-          <a:p>
-            <a:pPr marL="228600" indent="-228600">
-              <a:spcAft>
-                <a:spcPts val="800"/>
-              </a:spcAft>
-              <a:buChar char="•"/>
-            </a:pPr>
-            <a:r>
-              <a:rPr sz="1250" b="0">
-                <a:solidFill>
-                  <a:srgbClr val="212121"/>
-                </a:solidFill>
-                <a:latin typeface="Calibri"/>
-              </a:rPr>
-              <a:t>Single change: s_c(u,τ; rate) = s_c(u,τ)·(rate/rate_mid)^β with the one global β = −0.117; hazard, drift, aging untouched</a:t>
-            </a:r>
-          </a:p>
-          <a:p>
-            <a:pPr marL="228600" indent="-228600">
-              <a:spcAft>
-                <a:spcPts val="800"/>
-              </a:spcAft>
-              <a:buChar char="•"/>
-            </a:pPr>
-            <a:r>
-              <a:rPr sz="1250" b="0">
-                <a:solidFill>
-                  <a:srgbClr val="212121"/>
-                </a:solidFill>
-                <a:latin typeface="Calibri"/>
-              </a:rPr>
-              <a:t>Spread of mean u at γ = 0.5: 4.1% → 26.5% against 24% in the data; the curve tracks the data over the whole strain window; yield peaks unchanged (2.5% → 2.8%)</a:t>
-            </a:r>
-          </a:p>
-          <a:p>
-            <a:pPr marL="228600" indent="-228600">
-              <a:spcAft>
-                <a:spcPts val="800"/>
-              </a:spcAft>
-              <a:buChar char="•"/>
-            </a:pPr>
-            <a:r>
-              <a:rPr sz="1250" b="0">
-                <a:solidFill>
-                  <a:srgbClr val="212121"/>
-                </a:solidFill>
-                <a:latin typeface="Calibri"/>
-              </a:rPr>
-              <a:t>Refinements overshoot (β by u-band: 37%; per-preparation coupling: 35%); the simple statement is the defensible one</a:t>
-            </a:r>
-          </a:p>
-        </p:txBody>
-      </p:sp>
-      <p:sp>
-        <p:nvSpPr>
-          <p:cNvPr id="5" name="Rounded Rectangle 4"/>
-          <p:cNvSpPr/>
-          <p:nvPr/>
-        </p:nvSpPr>
-        <p:spPr>
-          <a:xfrm>
-            <a:off x="548640" y="6053328"/>
-            <a:ext cx="11091672" cy="566928"/>
-          </a:xfrm>
-          <a:prstGeom prst="roundRect">
-            <a:avLst>
-              <a:gd name="adj" fmla="val 18000"/>
-            </a:avLst>
-          </a:prstGeom>
-          <a:solidFill>
-            <a:srgbClr val="F2F2F2"/>
-          </a:solidFill>
-          <a:ln>
-            <a:noFill/>
-          </a:ln>
-          <a:effectLst/>
-        </p:spPr>
-        <p:style>
-          <a:lnRef idx="1">
-            <a:schemeClr val="accent1"/>
-          </a:lnRef>
-          <a:fillRef idx="3">
-            <a:schemeClr val="accent1"/>
-          </a:fillRef>
-          <a:effectRef idx="2">
-            <a:schemeClr val="accent1"/>
-          </a:effectRef>
-          <a:fontRef idx="minor">
-            <a:schemeClr val="lt1"/>
-          </a:fontRef>
-        </p:style>
-        <p:txBody>
-          <a:bodyPr rtlCol="0" anchor="ctr" wrap="square" lIns="164592" rIns="164592" tIns="0" bIns="0"/>
-          <a:lstStyle/>
-          <a:p>
-            <a:pPr algn="ctr"/>
-            <a:r>
-              <a:rPr sz="1350" b="1">
-                <a:solidFill>
-                  <a:srgbClr val="1E2761"/>
-                </a:solidFill>
-                <a:latin typeface="Calibri"/>
-              </a:rPr>
-              <a:t>Takeaway: </a:t>
-            </a:r>
-            <a:r>
-              <a:rPr sz="1350" b="0">
-                <a:solidFill>
-                  <a:srgbClr val="212121"/>
-                </a:solidFill>
-                <a:latin typeface="Calibri"/>
-              </a:rPr>
-              <a:t>To the resolution of this dataset, the missing state variable is a single multiplicative factor on the ceiling.</a:t>
-            </a:r>
-          </a:p>
-        </p:txBody>
-      </p:sp>
-    </p:spTree>
-  </p:cSld>
-  <p:clrMapOvr>
-    <a:masterClrMapping/>
-  </p:clrMapOvr>
-</p:sld>
-</file>
-
-<file path=ppt/slides/slide14.xml><?xml version="1.0" encoding="utf-8"?>
-<p:sld xmlns:a="http://schemas.openxmlformats.org/drawingml/2006/main" xmlns:p="http://schemas.openxmlformats.org/presentationml/2006/main" xmlns:r="http://schemas.openxmlformats.org/officeDocument/2006/relationships">
-  <p:cSld>
-    <p:spTree>
-      <p:nvGrpSpPr>
-        <p:cNvPr id="1" name=""/>
-        <p:cNvGrpSpPr/>
-        <p:nvPr/>
-      </p:nvGrpSpPr>
-      <p:grpSpPr/>
-      <p:sp>
-        <p:nvSpPr>
-          <p:cNvPr id="2" name="TextBox 1"/>
-          <p:cNvSpPr txBox="1"/>
-          <p:nvPr/>
-        </p:nvSpPr>
-        <p:spPr>
-          <a:xfrm>
-            <a:off x="548640" y="292608"/>
-            <a:ext cx="11091672" cy="685800"/>
-          </a:xfrm>
-          <a:prstGeom prst="rect">
-            <a:avLst/>
-          </a:prstGeom>
-          <a:noFill/>
-        </p:spPr>
-        <p:txBody>
-          <a:bodyPr wrap="square" lIns="0" rIns="0" tIns="0" bIns="0">
-            <a:spAutoFit/>
-          </a:bodyPr>
-          <a:lstStyle/>
-          <a:p>
-            <a:r>
-              <a:rPr sz="3000" b="1">
-                <a:solidFill>
-                  <a:srgbClr val="1E2761"/>
-                </a:solidFill>
-                <a:latin typeface="Calibri"/>
-              </a:rPr>
-              <a:t>The memory relaxes with strain</a:t>
-            </a:r>
-          </a:p>
-        </p:txBody>
-      </p:sp>
-      <p:pic>
-        <p:nvPicPr>
-          <p:cNvPr id="3" name="Picture 2" descr="fig19_memory_relaxes.png"/>
-          <p:cNvPicPr>
-            <a:picLocks noChangeAspect="1"/>
-          </p:cNvPicPr>
-          <p:nvPr/>
-        </p:nvPicPr>
-        <p:blipFill>
-          <a:blip r:embed="rId2"/>
-          <a:stretch>
-            <a:fillRect/>
-          </a:stretch>
-        </p:blipFill>
-        <p:spPr>
-          <a:xfrm>
-            <a:off x="1437322" y="1188719"/>
-            <a:ext cx="9286875" cy="3566160"/>
-          </a:xfrm>
-          <a:prstGeom prst="rect">
-            <a:avLst/>
-          </a:prstGeom>
-        </p:spPr>
-      </p:pic>
-      <p:sp>
-        <p:nvSpPr>
-          <p:cNvPr id="4" name="TextBox 3"/>
-          <p:cNvSpPr txBox="1"/>
-          <p:nvPr/>
-        </p:nvSpPr>
-        <p:spPr>
-          <a:xfrm>
-            <a:off x="640080" y="4864608"/>
-            <a:ext cx="10972800" cy="1078991"/>
-          </a:xfrm>
-          <a:prstGeom prst="rect">
-            <a:avLst/>
-          </a:prstGeom>
-          <a:noFill/>
-        </p:spPr>
-        <p:txBody>
-          <a:bodyPr wrap="square" lIns="0" rIns="0" tIns="0" bIns="0">
-            <a:spAutoFit/>
-          </a:bodyPr>
-          <a:lstStyle/>
-          <a:p>
-            <a:pPr marL="228600" indent="-228600">
-              <a:spcAft>
-                <a:spcPts val="800"/>
-              </a:spcAft>
-              <a:buChar char="•"/>
-            </a:pPr>
-            <a:r>
-              <a:rPr sz="1250" b="0">
-                <a:solidFill>
-                  <a:srgbClr val="212121"/>
-                </a:solidFill>
-                <a:latin typeface="Calibri"/>
-              </a:rPr>
-              <a:t>Nine-rate regression with a fixed effect per (cell, strain window): β = −0.21 → −0.11 → −0.05 → −0.04 from γ ≈ 0.15 to 0.45, and it falls within fixed u bands, so this is relaxation rather than state dependence; γ_r ≈ 0.18</a:t>
-            </a:r>
-          </a:p>
-          <a:p>
-            <a:pPr marL="228600" indent="-228600">
-              <a:spcAft>
-                <a:spcPts val="800"/>
-              </a:spcAft>
-              <a:buChar char="•"/>
-            </a:pPr>
-            <a:r>
-              <a:rPr sz="1250" b="0">
-                <a:solidFill>
-                  <a:srgbClr val="212121"/>
-                </a:solidFill>
-                <a:latin typeface="Calibri"/>
-              </a:rPr>
-              <a:t>Late strain: size memory 1.75× → 1.16×, hazard blind throughout; the energy-step memory only halves, a third of it in the coupling at fixed size</a:t>
-            </a:r>
-          </a:p>
-          <a:p>
-            <a:pPr marL="228600" indent="-228600">
-              <a:spcAft>
-                <a:spcPts val="800"/>
-              </a:spcAft>
-              <a:buChar char="•"/>
-            </a:pPr>
-            <a:r>
-              <a:rPr sz="1250" b="0">
-                <a:solidFill>
-                  <a:srgbClr val="212121"/>
-                </a:solidFill>
-                <a:latin typeface="Calibri"/>
-              </a:rPr>
-              <a:t>Whether that coupling memory also relaxes needs runs past γ = 0.5</a:t>
-            </a:r>
-          </a:p>
-        </p:txBody>
-      </p:sp>
-      <p:sp>
-        <p:nvSpPr>
-          <p:cNvPr id="5" name="Rounded Rectangle 4"/>
-          <p:cNvSpPr/>
-          <p:nvPr/>
-        </p:nvSpPr>
-        <p:spPr>
-          <a:xfrm>
-            <a:off x="548640" y="6053328"/>
-            <a:ext cx="11091672" cy="566928"/>
-          </a:xfrm>
-          <a:prstGeom prst="roundRect">
-            <a:avLst>
-              <a:gd name="adj" fmla="val 18000"/>
-            </a:avLst>
-          </a:prstGeom>
-          <a:solidFill>
-            <a:srgbClr val="F2F2F2"/>
-          </a:solidFill>
-          <a:ln>
-            <a:noFill/>
-          </a:ln>
-          <a:effectLst/>
-        </p:spPr>
-        <p:style>
-          <a:lnRef idx="1">
-            <a:schemeClr val="accent1"/>
-          </a:lnRef>
-          <a:fillRef idx="3">
-            <a:schemeClr val="accent1"/>
-          </a:fillRef>
-          <a:effectRef idx="2">
-            <a:schemeClr val="accent1"/>
-          </a:effectRef>
-          <a:fontRef idx="minor">
-            <a:schemeClr val="lt1"/>
-          </a:fontRef>
-        </p:style>
-        <p:txBody>
-          <a:bodyPr rtlCol="0" anchor="ctr" wrap="square" lIns="164592" rIns="164592" tIns="0" bIns="0"/>
-          <a:lstStyle/>
-          <a:p>
-            <a:pPr algn="ctr"/>
-            <a:r>
-              <a:rPr sz="1350" b="1">
-                <a:solidFill>
-                  <a:srgbClr val="1E2761"/>
-                </a:solidFill>
-                <a:latin typeface="Calibri"/>
-              </a:rPr>
-              <a:t>Takeaway: </a:t>
-            </a:r>
-            <a:r>
-              <a:rPr sz="1350" b="0">
-                <a:solidFill>
-                  <a:srgbClr val="212121"/>
-                </a:solidFill>
-                <a:latin typeface="Calibri"/>
-              </a:rPr>
-              <a:t>The third variable is not a frozen label: plastic strain erases it on a scale of a few tenths, now measured, not assumed.</a:t>
-            </a:r>
-          </a:p>
-        </p:txBody>
-      </p:sp>
-    </p:spTree>
-  </p:cSld>
-  <p:clrMapOvr>
-    <a:masterClrMapping/>
-  </p:clrMapOvr>
-</p:sld>
-</file>
-
-<file path=ppt/slides/slide15.xml><?xml version="1.0" encoding="utf-8"?>
-<p:sld xmlns:a="http://schemas.openxmlformats.org/drawingml/2006/main" xmlns:p="http://schemas.openxmlformats.org/presentationml/2006/main" xmlns:r="http://schemas.openxmlformats.org/officeDocument/2006/relationships">
-  <p:cSld>
-    <p:spTree>
-      <p:nvGrpSpPr>
-        <p:cNvPr id="1" name=""/>
-        <p:cNvGrpSpPr/>
-        <p:nvPr/>
-      </p:nvGrpSpPr>
-      <p:grpSpPr/>
-      <p:sp>
-        <p:nvSpPr>
-          <p:cNvPr id="2" name="TextBox 1"/>
-          <p:cNvSpPr txBox="1"/>
-          <p:nvPr/>
-        </p:nvSpPr>
-        <p:spPr>
-          <a:xfrm>
-            <a:off x="548640" y="292608"/>
-            <a:ext cx="11091672" cy="685800"/>
-          </a:xfrm>
-          <a:prstGeom prst="rect">
-            <a:avLst/>
-          </a:prstGeom>
-          <a:noFill/>
-        </p:spPr>
-        <p:txBody>
-          <a:bodyPr wrap="square" lIns="0" rIns="0" tIns="0" bIns="0">
-            <a:spAutoFit/>
-          </a:bodyPr>
-          <a:lstStyle/>
-          <a:p>
-            <a:r>
-              <a:rPr sz="3000" b="1">
-                <a:solidFill>
-                  <a:srgbClr val="1E2761"/>
-                </a:solidFill>
-                <a:latin typeface="Calibri"/>
-              </a:rPr>
-              <a:t>The slow variable, one trajectory at a time</a:t>
-            </a:r>
-          </a:p>
-        </p:txBody>
-      </p:sp>
-      <p:pic>
-        <p:nvPicPr>
-          <p:cNvPr id="3" name="Picture 2" descr="fig22_persample.png"/>
-          <p:cNvPicPr>
-            <a:picLocks noChangeAspect="1"/>
-          </p:cNvPicPr>
-          <p:nvPr/>
-        </p:nvPicPr>
-        <p:blipFill>
-          <a:blip r:embed="rId2"/>
-          <a:stretch>
-            <a:fillRect/>
-          </a:stretch>
-        </p:blipFill>
-        <p:spPr>
-          <a:xfrm>
-            <a:off x="502920" y="1366039"/>
-            <a:ext cx="6309360" cy="4263081"/>
-          </a:xfrm>
-          <a:prstGeom prst="rect">
-            <a:avLst/>
-          </a:prstGeom>
-        </p:spPr>
-      </p:pic>
-      <p:sp>
-        <p:nvSpPr>
-          <p:cNvPr id="4" name="TextBox 3"/>
-          <p:cNvSpPr txBox="1"/>
-          <p:nvPr/>
-        </p:nvSpPr>
-        <p:spPr>
-          <a:xfrm>
-            <a:off x="7132320" y="1371600"/>
-            <a:ext cx="5056631" cy="4343400"/>
-          </a:xfrm>
-          <a:prstGeom prst="rect">
-            <a:avLst/>
-          </a:prstGeom>
-          <a:noFill/>
-        </p:spPr>
-        <p:txBody>
-          <a:bodyPr wrap="square" lIns="0" rIns="0" tIns="0" bIns="0">
-            <a:spAutoFit/>
-          </a:bodyPr>
-          <a:lstStyle/>
-          <a:p>
-            <a:pPr marL="228600" indent="-228600">
-              <a:spcAft>
-                <a:spcPts val="800"/>
-              </a:spcAft>
-              <a:buChar char="•"/>
-            </a:pPr>
-            <a:r>
-              <a:rPr sz="1350" b="0">
-                <a:solidFill>
-                  <a:srgbClr val="212121"/>
-                </a:solidFill>
-                <a:latin typeface="Calibri"/>
-              </a:rPr>
-              <a:t>Parameter-free prediction: apply the between-preparation relation within a preparation, so each trajectory gets exp(κ·δu₀) with κ = β·d ln(rate)/du₀ = −43</a:t>
-            </a:r>
-          </a:p>
-          <a:p>
-            <a:pPr marL="228600" indent="-228600">
-              <a:spcAft>
-                <a:spcPts val="800"/>
-              </a:spcAft>
-              <a:buChar char="•"/>
-            </a:pPr>
-            <a:r>
-              <a:rPr sz="1350" b="0">
-                <a:solidFill>
-                  <a:srgbClr val="212121"/>
-                </a:solidFill>
-                <a:latin typeface="Calibri"/>
-              </a:rPr>
-              <a:t>Predicted persistence of a sample’s initial energy deviation: 0.44 / 0.27 / 0.22 / 0.17 at γ = 0.1 / 0.2 / 0.3 / 0.5</a:t>
-            </a:r>
-          </a:p>
-          <a:p>
-            <a:pPr marL="228600" indent="-228600">
-              <a:spcAft>
-                <a:spcPts val="800"/>
-              </a:spcAft>
-              <a:buChar char="•"/>
-            </a:pPr>
-            <a:r>
-              <a:rPr sz="1350" b="0">
-                <a:solidFill>
-                  <a:srgbClr val="212121"/>
-                </a:solidFill>
-                <a:latin typeface="Calibri"/>
-              </a:rPr>
-              <a:t>Data: 0.63 / 0.27 / 0.24 / 0.18.  Base model: 0.41 / 0.08 / 0.07 / 0.08.  Tripling κ overshoots.</a:t>
-            </a:r>
-          </a:p>
-          <a:p>
-            <a:pPr marL="228600" indent="-228600">
-              <a:spcAft>
-                <a:spcPts val="800"/>
-              </a:spcAft>
-              <a:buChar char="•"/>
-            </a:pPr>
-            <a:r>
-              <a:rPr sz="1350" b="0">
-                <a:solidFill>
-                  <a:srgbClr val="212121"/>
-                </a:solidFill>
-                <a:latin typeface="Calibri"/>
-              </a:rPr>
-              <a:t>Same variable, same strength, acting on individual samples</a:t>
-            </a:r>
-          </a:p>
-        </p:txBody>
-      </p:sp>
-      <p:sp>
-        <p:nvSpPr>
-          <p:cNvPr id="5" name="Rounded Rectangle 4"/>
-          <p:cNvSpPr/>
-          <p:nvPr/>
-        </p:nvSpPr>
-        <p:spPr>
-          <a:xfrm>
-            <a:off x="548640" y="6053328"/>
-            <a:ext cx="11091672" cy="566928"/>
-          </a:xfrm>
-          <a:prstGeom prst="roundRect">
-            <a:avLst>
-              <a:gd name="adj" fmla="val 18000"/>
-            </a:avLst>
-          </a:prstGeom>
-          <a:solidFill>
-            <a:srgbClr val="F2F2F2"/>
-          </a:solidFill>
-          <a:ln>
-            <a:noFill/>
-          </a:ln>
-          <a:effectLst/>
-        </p:spPr>
-        <p:style>
-          <a:lnRef idx="1">
-            <a:schemeClr val="accent1"/>
-          </a:lnRef>
-          <a:fillRef idx="3">
-            <a:schemeClr val="accent1"/>
-          </a:fillRef>
-          <a:effectRef idx="2">
-            <a:schemeClr val="accent1"/>
-          </a:effectRef>
-          <a:fontRef idx="minor">
-            <a:schemeClr val="lt1"/>
-          </a:fontRef>
-        </p:style>
-        <p:txBody>
-          <a:bodyPr rtlCol="0" anchor="ctr" wrap="square" lIns="164592" rIns="164592" tIns="0" bIns="0"/>
-          <a:lstStyle/>
-          <a:p>
-            <a:pPr algn="ctr"/>
-            <a:r>
-              <a:rPr sz="1350" b="1">
-                <a:solidFill>
-                  <a:srgbClr val="1E2761"/>
-                </a:solidFill>
-                <a:latin typeface="Calibri"/>
-              </a:rPr>
-              <a:t>Takeaway: </a:t>
-            </a:r>
-            <a:r>
-              <a:rPr sz="1350" b="0">
-                <a:solidFill>
-                  <a:srgbClr val="212121"/>
-                </a:solidFill>
-                <a:latin typeface="Calibri"/>
-              </a:rPr>
-              <a:t>A sample remembers its initial energy exactly as long as the preparation-level ceiling memory says it should.</a:t>
-            </a:r>
-          </a:p>
-        </p:txBody>
-      </p:sp>
-    </p:spTree>
-  </p:cSld>
-  <p:clrMapOvr>
-    <a:masterClrMapping/>
-  </p:clrMapOvr>
-</p:sld>
-</file>
-
-<file path=ppt/slides/slide16.xml><?xml version="1.0" encoding="utf-8"?>
-<p:sld xmlns:a="http://schemas.openxmlformats.org/drawingml/2006/main" xmlns:p="http://schemas.openxmlformats.org/presentationml/2006/main" xmlns:r="http://schemas.openxmlformats.org/officeDocument/2006/relationships">
-  <p:cSld>
-    <p:spTree>
-      <p:nvGrpSpPr>
-        <p:cNvPr id="1" name=""/>
-        <p:cNvGrpSpPr/>
-        <p:nvPr/>
-      </p:nvGrpSpPr>
-      <p:grpSpPr/>
-      <p:sp>
-        <p:nvSpPr>
-          <p:cNvPr id="2" name="TextBox 1"/>
-          <p:cNvSpPr txBox="1"/>
-          <p:nvPr/>
-        </p:nvSpPr>
-        <p:spPr>
-          <a:xfrm>
-            <a:off x="548640" y="292608"/>
-            <a:ext cx="11091672" cy="685800"/>
-          </a:xfrm>
-          <a:prstGeom prst="rect">
-            <a:avLst/>
-          </a:prstGeom>
-          <a:noFill/>
-        </p:spPr>
-        <p:txBody>
-          <a:bodyPr wrap="square" lIns="0" rIns="0" tIns="0" bIns="0">
-            <a:spAutoFit/>
-          </a:bodyPr>
-          <a:lstStyle/>
-          <a:p>
-            <a:r>
-              <a:rPr sz="3000" b="1">
-                <a:solidFill>
-                  <a:srgbClr val="1E2761"/>
-                </a:solidFill>
-                <a:latin typeface="Calibri"/>
-              </a:rPr>
-              <a:t>Is the ceiling just the largest event?</a:t>
-            </a:r>
-          </a:p>
-        </p:txBody>
-      </p:sp>
-      <p:pic>
-        <p:nvPicPr>
-          <p:cNvPr id="3" name="Picture 2" descr="fig18_ceiling_pinning.png"/>
-          <p:cNvPicPr>
-            <a:picLocks noChangeAspect="1"/>
-          </p:cNvPicPr>
-          <p:nvPr/>
-        </p:nvPicPr>
-        <p:blipFill>
-          <a:blip r:embed="rId2"/>
-          <a:stretch>
-            <a:fillRect/>
-          </a:stretch>
-        </p:blipFill>
-        <p:spPr>
-          <a:xfrm>
-            <a:off x="723900" y="1234440"/>
-            <a:ext cx="5867400" cy="4526280"/>
-          </a:xfrm>
-          <a:prstGeom prst="rect">
-            <a:avLst/>
-          </a:prstGeom>
-        </p:spPr>
-      </p:pic>
-      <p:sp>
-        <p:nvSpPr>
-          <p:cNvPr id="4" name="TextBox 3"/>
-          <p:cNvSpPr txBox="1"/>
-          <p:nvPr/>
-        </p:nvSpPr>
-        <p:spPr>
-          <a:xfrm>
-            <a:off x="7132320" y="1371600"/>
-            <a:ext cx="5056631" cy="4343400"/>
-          </a:xfrm>
-          <a:prstGeom prst="rect">
-            <a:avLst/>
-          </a:prstGeom>
-          <a:noFill/>
-        </p:spPr>
-        <p:txBody>
-          <a:bodyPr wrap="square" lIns="0" rIns="0" tIns="0" bIns="0">
-            <a:spAutoFit/>
-          </a:bodyPr>
-          <a:lstStyle/>
-          <a:p>
-            <a:pPr marL="228600" indent="-228600">
-              <a:spcAft>
-                <a:spcPts val="800"/>
-              </a:spcAft>
-              <a:buChar char="•"/>
-            </a:pPr>
-            <a:r>
-              <a:rPr sz="1300" b="0">
-                <a:solidFill>
-                  <a:srgbClr val="212121"/>
-                </a:solidFill>
-                <a:latin typeface="Calibri"/>
-              </a:rPr>
-              <a:t>Refit with the top 1, 5, or 1% of events removed: s_c tracks the new maximum almost one-for-one (red)</a:t>
-            </a:r>
-          </a:p>
-          <a:p>
-            <a:pPr marL="228600" indent="-228600">
-              <a:spcAft>
-                <a:spcPts val="800"/>
-              </a:spcAft>
-              <a:buChar char="•"/>
-            </a:pPr>
-            <a:r>
-              <a:rPr sz="1300" b="0">
-                <a:solidFill>
-                  <a:srgbClr val="212121"/>
-                </a:solidFill>
-                <a:latin typeface="Calibri"/>
-              </a:rPr>
-              <a:t>So does a true ceiling with m ≈ 2 at n ≈ 5,000 (green synthetics: c/s_max 1.02 to 1.12)</a:t>
-            </a:r>
-          </a:p>
-          <a:p>
-            <a:pPr marL="228600" indent="-228600">
-              <a:spcAft>
-                <a:spcPts val="800"/>
-              </a:spcAft>
-              <a:buChar char="•"/>
-            </a:pPr>
-            <a:r>
-              <a:rPr sz="1300" b="0">
-                <a:solidFill>
-                  <a:srgbClr val="212121"/>
-                </a:solidFill>
-                <a:latin typeface="Calibri"/>
-              </a:rPr>
-              <a:t>A true TPL under the same fit runs off to 3 to 350× the maximum and collapses on refit (blue)</a:t>
-            </a:r>
-          </a:p>
-          <a:p>
-            <a:pPr marL="228600" indent="-228600">
-              <a:spcAft>
-                <a:spcPts val="800"/>
-              </a:spcAft>
-              <a:buChar char="•"/>
-            </a:pPr>
-            <a:r>
-              <a:rPr sz="1300" b="0">
-                <a:solidFill>
-                  <a:srgbClr val="212121"/>
-                </a:solidFill>
-                <a:latin typeface="Calibri"/>
-              </a:rPr>
-              <a:t>Merging consecutive drop steps into single avalanches (187k → 172k): the ceiling law wins by more (ΔAIC 117 to 213), s_c moves &lt; 2%, k shifts +0.05</a:t>
-            </a:r>
-          </a:p>
-          <a:p>
-            <a:pPr marL="228600" indent="-228600">
-              <a:spcAft>
-                <a:spcPts val="800"/>
-              </a:spcAft>
-              <a:buChar char="•"/>
-            </a:pPr>
-            <a:r>
-              <a:rPr sz="1300" b="0">
-                <a:solidFill>
-                  <a:srgbClr val="212121"/>
-                </a:solidFill>
-                <a:latin typeface="Calibri"/>
-              </a:rPr>
-              <a:t>s_c in a cell is set by its ~10 largest events: the 6.5% bootstrap error is a floor</a:t>
-            </a:r>
-          </a:p>
-        </p:txBody>
-      </p:sp>
-      <p:sp>
-        <p:nvSpPr>
-          <p:cNvPr id="5" name="Rounded Rectangle 4"/>
-          <p:cNvSpPr/>
-          <p:nvPr/>
-        </p:nvSpPr>
-        <p:spPr>
-          <a:xfrm>
-            <a:off x="548640" y="6053328"/>
-            <a:ext cx="11091672" cy="566928"/>
-          </a:xfrm>
-          <a:prstGeom prst="roundRect">
-            <a:avLst>
-              <a:gd name="adj" fmla="val 18000"/>
-            </a:avLst>
-          </a:prstGeom>
-          <a:solidFill>
-            <a:srgbClr val="F2F2F2"/>
-          </a:solidFill>
-          <a:ln>
-            <a:noFill/>
-          </a:ln>
-          <a:effectLst/>
-        </p:spPr>
-        <p:style>
-          <a:lnRef idx="1">
-            <a:schemeClr val="accent1"/>
-          </a:lnRef>
-          <a:fillRef idx="3">
-            <a:schemeClr val="accent1"/>
-          </a:fillRef>
-          <a:effectRef idx="2">
-            <a:schemeClr val="accent1"/>
-          </a:effectRef>
-          <a:fontRef idx="minor">
-            <a:schemeClr val="lt1"/>
-          </a:fontRef>
-        </p:style>
-        <p:txBody>
-          <a:bodyPr rtlCol="0" anchor="ctr" wrap="square" lIns="164592" rIns="164592" tIns="0" bIns="0"/>
-          <a:lstStyle/>
-          <a:p>
-            <a:pPr algn="ctr"/>
-            <a:r>
-              <a:rPr sz="1350" b="1">
-                <a:solidFill>
-                  <a:srgbClr val="1E2761"/>
-                </a:solidFill>
-                <a:latin typeface="Calibri"/>
-              </a:rPr>
-              <a:t>Takeaway: </a:t>
-            </a:r>
-            <a:r>
-              <a:rPr sz="1350" b="0">
-                <a:solidFill>
-                  <a:srgbClr val="212121"/>
-                </a:solidFill>
-                <a:latin typeface="Calibri"/>
-              </a:rPr>
-              <a:t>The data sit on the true-ceiling line, not the exponential cloud, and the law survives the event definition.</a:t>
-            </a:r>
-          </a:p>
-        </p:txBody>
-      </p:sp>
-    </p:spTree>
-  </p:cSld>
-  <p:clrMapOvr>
-    <a:masterClrMapping/>
-  </p:clrMapOvr>
-</p:sld>
-</file>
-
-<file path=ppt/slides/slide17.xml><?xml version="1.0" encoding="utf-8"?>
-<p:sld xmlns:a="http://schemas.openxmlformats.org/drawingml/2006/main" xmlns:p="http://schemas.openxmlformats.org/presentationml/2006/main" xmlns:r="http://schemas.openxmlformats.org/officeDocument/2006/relationships">
-  <p:cSld>
-    <p:spTree>
-      <p:nvGrpSpPr>
-        <p:cNvPr id="1" name=""/>
-        <p:cNvGrpSpPr/>
-        <p:nvPr/>
-      </p:nvGrpSpPr>
-      <p:grpSpPr/>
-      <p:sp>
-        <p:nvSpPr>
-          <p:cNvPr id="2" name="TextBox 1"/>
-          <p:cNvSpPr txBox="1"/>
-          <p:nvPr/>
-        </p:nvSpPr>
-        <p:spPr>
-          <a:xfrm>
-            <a:off x="548640" y="292608"/>
-            <a:ext cx="11091672" cy="685800"/>
-          </a:xfrm>
-          <a:prstGeom prst="rect">
-            <a:avLst/>
-          </a:prstGeom>
-          <a:noFill/>
-        </p:spPr>
-        <p:txBody>
-          <a:bodyPr wrap="square" lIns="0" rIns="0" tIns="0" bIns="0">
-            <a:spAutoFit/>
-          </a:bodyPr>
-          <a:lstStyle/>
-          <a:p>
-            <a:r>
-              <a:rPr sz="3000" b="1">
-                <a:solidFill>
-                  <a:srgbClr val="1E2761"/>
-                </a:solidFill>
-                <a:latin typeface="Calibri"/>
-              </a:rPr>
-              <a:t>Where the Markov assumption fails: aftershocks</a:t>
-            </a:r>
-          </a:p>
-        </p:txBody>
-      </p:sp>
-      <p:pic>
-        <p:nvPicPr>
-          <p:cNvPr id="3" name="Picture 2" descr="fig20_clustering.png"/>
-          <p:cNvPicPr>
-            <a:picLocks noChangeAspect="1"/>
-          </p:cNvPicPr>
-          <p:nvPr/>
-        </p:nvPicPr>
-        <p:blipFill>
-          <a:blip r:embed="rId2"/>
-          <a:stretch>
-            <a:fillRect/>
-          </a:stretch>
-        </p:blipFill>
-        <p:spPr>
-          <a:xfrm>
-            <a:off x="1437322" y="1188719"/>
-            <a:ext cx="9286875" cy="3566160"/>
-          </a:xfrm>
-          <a:prstGeom prst="rect">
-            <a:avLst/>
-          </a:prstGeom>
-        </p:spPr>
-      </p:pic>
-      <p:sp>
-        <p:nvSpPr>
-          <p:cNvPr id="4" name="TextBox 3"/>
-          <p:cNvSpPr txBox="1"/>
-          <p:nvPr/>
-        </p:nvSpPr>
-        <p:spPr>
-          <a:xfrm>
-            <a:off x="640080" y="4864608"/>
-            <a:ext cx="10972800" cy="1078991"/>
-          </a:xfrm>
-          <a:prstGeom prst="rect">
-            <a:avLst/>
-          </a:prstGeom>
-          <a:noFill/>
-        </p:spPr>
-        <p:txBody>
-          <a:bodyPr wrap="square" lIns="0" rIns="0" tIns="0" bIns="0">
-            <a:spAutoFit/>
-          </a:bodyPr>
-          <a:lstStyle/>
-          <a:p>
-            <a:pPr marL="228600" indent="-228600">
-              <a:spcAft>
-                <a:spcPts val="800"/>
-              </a:spcAft>
-              <a:buChar char="•"/>
-            </a:pPr>
-            <a:r>
-              <a:rPr sz="1250" b="0">
-                <a:solidFill>
-                  <a:srgbClr val="212121"/>
-                </a:solidFill>
-                <a:latin typeface="Calibri"/>
-              </a:rPr>
-              <a:t>At the same cell, the hazard on the step after an event is 20× the quiet baseline, decaying over ~5 steps; 14% of events sit in consecutive runs (Markov expectation 0.4%); the next event is 1.2× larger</a:t>
-            </a:r>
-          </a:p>
-          <a:p>
-            <a:pPr marL="228600" indent="-228600">
-              <a:spcAft>
-                <a:spcPts val="800"/>
-              </a:spcAft>
-              <a:buChar char="•"/>
-            </a:pPr>
-            <a:r>
-              <a:rPr sz="1250" b="0">
-                <a:solidFill>
-                  <a:srgbClr val="212121"/>
-                </a:solidFill>
-                <a:latin typeface="Calibri"/>
-              </a:rPr>
-              <a:t>Event counts per window are over-dispersed (Fano 1.3 to 1.6 vs the model’s 1.0) while the stress released per window is less variable (CV 0.10 vs 0.13)</a:t>
-            </a:r>
-          </a:p>
-          <a:p>
-            <a:pPr marL="228600" indent="-228600">
-              <a:spcAft>
-                <a:spcPts val="800"/>
-              </a:spcAft>
-              <a:buChar char="•"/>
-            </a:pPr>
-            <a:r>
-              <a:rPr sz="1250" b="0">
-                <a:solidFill>
-                  <a:srgbClr val="212121"/>
-                </a:solidFill>
-                <a:latin typeface="Calibri"/>
-              </a:rPr>
-              <a:t>Referenced to the last large event, the large-event hazard is 1.5× higher after 0.1 to 0.3 of reloading; large events are more regular (Fano 0.51 vs 0.71)</a:t>
-            </a:r>
-          </a:p>
-        </p:txBody>
-      </p:sp>
-      <p:sp>
-        <p:nvSpPr>
-          <p:cNvPr id="5" name="Rounded Rectangle 4"/>
-          <p:cNvSpPr/>
-          <p:nvPr/>
-        </p:nvSpPr>
-        <p:spPr>
-          <a:xfrm>
-            <a:off x="548640" y="6053328"/>
-            <a:ext cx="11091672" cy="566928"/>
-          </a:xfrm>
-          <a:prstGeom prst="roundRect">
-            <a:avLst>
-              <a:gd name="adj" fmla="val 18000"/>
-            </a:avLst>
-          </a:prstGeom>
-          <a:solidFill>
-            <a:srgbClr val="F2F2F2"/>
-          </a:solidFill>
-          <a:ln>
-            <a:noFill/>
-          </a:ln>
-          <a:effectLst/>
-        </p:spPr>
-        <p:style>
-          <a:lnRef idx="1">
-            <a:schemeClr val="accent1"/>
-          </a:lnRef>
-          <a:fillRef idx="3">
-            <a:schemeClr val="accent1"/>
-          </a:fillRef>
-          <a:effectRef idx="2">
-            <a:schemeClr val="accent1"/>
-          </a:effectRef>
-          <a:fontRef idx="minor">
-            <a:schemeClr val="lt1"/>
-          </a:fontRef>
-        </p:style>
-        <p:txBody>
-          <a:bodyPr rtlCol="0" anchor="ctr" wrap="square" lIns="164592" rIns="164592" tIns="0" bIns="0"/>
-          <a:lstStyle/>
-          <a:p>
-            <a:pPr algn="ctr"/>
-            <a:r>
-              <a:rPr sz="1350" b="1">
-                <a:solidFill>
-                  <a:srgbClr val="1E2761"/>
-                </a:solidFill>
-                <a:latin typeface="Calibri"/>
-              </a:rPr>
-              <a:t>Takeaway: </a:t>
-            </a:r>
-            <a:r>
-              <a:rPr sz="1350" b="0">
-                <a:solidFill>
-                  <a:srgbClr val="212121"/>
-                </a:solidFill>
-                <a:latin typeface="Calibri"/>
-              </a:rPr>
-              <a:t>No function of (u,τ) produces this; an aftershock term fixes the yield peaks (RMS 2.5% → 1.6%) but not the variance below.</a:t>
-            </a:r>
-          </a:p>
-        </p:txBody>
-      </p:sp>
-    </p:spTree>
-  </p:cSld>
-  <p:clrMapOvr>
-    <a:masterClrMapping/>
-  </p:clrMapOvr>
-</p:sld>
-</file>
-
-<file path=ppt/slides/slide18.xml><?xml version="1.0" encoding="utf-8"?>
-<p:sld xmlns:a="http://schemas.openxmlformats.org/drawingml/2006/main" xmlns:p="http://schemas.openxmlformats.org/presentationml/2006/main" xmlns:r="http://schemas.openxmlformats.org/officeDocument/2006/relationships">
-  <p:cSld>
-    <p:spTree>
-      <p:nvGrpSpPr>
-        <p:cNvPr id="1" name=""/>
-        <p:cNvGrpSpPr/>
-        <p:nvPr/>
-      </p:nvGrpSpPr>
-      <p:grpSpPr/>
-      <p:sp>
-        <p:nvSpPr>
-          <p:cNvPr id="2" name="TextBox 1"/>
-          <p:cNvSpPr txBox="1"/>
-          <p:nvPr/>
-        </p:nvSpPr>
-        <p:spPr>
-          <a:xfrm>
-            <a:off x="548640" y="292608"/>
-            <a:ext cx="11091672" cy="685800"/>
-          </a:xfrm>
-          <a:prstGeom prst="rect">
-            <a:avLst/>
-          </a:prstGeom>
-          <a:noFill/>
-        </p:spPr>
-        <p:txBody>
-          <a:bodyPr wrap="square" lIns="0" rIns="0" tIns="0" bIns="0">
-            <a:spAutoFit/>
-          </a:bodyPr>
-          <a:lstStyle/>
-          <a:p>
-            <a:r>
-              <a:rPr sz="3000" b="1">
-                <a:solidFill>
-                  <a:srgbClr val="1E2761"/>
-                </a:solidFill>
-                <a:latin typeface="Calibri"/>
-              </a:rPr>
-              <a:t>The variance gap: ten exclusions, one open problem</a:t>
-            </a:r>
-          </a:p>
-        </p:txBody>
-      </p:sp>
-      <p:pic>
-        <p:nvPicPr>
-          <p:cNvPr id="3" name="Picture 2" descr="fig21_renewal.png"/>
-          <p:cNvPicPr>
-            <a:picLocks noChangeAspect="1"/>
-          </p:cNvPicPr>
-          <p:nvPr/>
-        </p:nvPicPr>
-        <p:blipFill>
-          <a:blip r:embed="rId2"/>
-          <a:stretch>
-            <a:fillRect/>
-          </a:stretch>
-        </p:blipFill>
-        <p:spPr>
-          <a:xfrm>
-            <a:off x="502920" y="1192560"/>
-            <a:ext cx="6766560" cy="2598359"/>
-          </a:xfrm>
-          <a:prstGeom prst="rect">
-            <a:avLst/>
-          </a:prstGeom>
-        </p:spPr>
-      </p:pic>
-      <p:sp>
-        <p:nvSpPr>
-          <p:cNvPr id="4" name="TextBox 3"/>
-          <p:cNvSpPr txBox="1"/>
-          <p:nvPr/>
-        </p:nvSpPr>
-        <p:spPr>
-          <a:xfrm>
-            <a:off x="7452360" y="1188720"/>
-            <a:ext cx="4251960" cy="2651760"/>
-          </a:xfrm>
-          <a:prstGeom prst="rect">
-            <a:avLst/>
-          </a:prstGeom>
-          <a:noFill/>
-        </p:spPr>
-        <p:txBody>
-          <a:bodyPr wrap="square" lIns="0" rIns="0" tIns="0" bIns="0">
-            <a:spAutoFit/>
-          </a:bodyPr>
-          <a:lstStyle/>
-          <a:p>
-            <a:pPr>
-              <a:spcAft>
-                <a:spcPts val="600"/>
-              </a:spcAft>
-            </a:pPr>
-            <a:r>
-              <a:rPr sz="1300" b="1">
-                <a:solidFill>
-                  <a:srgbClr val="1E2761"/>
-                </a:solidFill>
-                <a:latin typeface="Calibri"/>
-              </a:rPr>
-              <a:t>Run-to-run scatter within a preparation: model 25 to 30% too high</a:t>
-            </a:r>
-          </a:p>
-          <a:p>
-            <a:pPr marL="228600" indent="-228600">
-              <a:spcAft>
-                <a:spcPts val="800"/>
-              </a:spcAft>
-              <a:buChar char="•"/>
-            </a:pPr>
-            <a:r>
-              <a:rPr sz="1200" b="0">
-                <a:solidFill>
-                  <a:srgbClr val="212121"/>
-                </a:solidFill>
-                <a:latin typeface="Calibri"/>
-              </a:rPr>
-              <a:t>Not the size law, aftershock hazard, grid (42×42), renewal hazard, two-class reload hazard</a:t>
-            </a:r>
-          </a:p>
-          <a:p>
-            <a:pPr marL="228600" indent="-228600">
-              <a:spcAft>
-                <a:spcPts val="800"/>
-              </a:spcAft>
-              <a:buChar char="•"/>
-            </a:pPr>
-            <a:r>
-              <a:rPr sz="1200" b="0">
-                <a:solidFill>
-                  <a:srgbClr val="212121"/>
-                </a:solidFill>
-                <a:latin typeface="Calibri"/>
-              </a:rPr>
-              <a:t>Not size-reload coupling (+0.02), size-size coupling (−0.01), relaxation rate (identical), the per-sample slow variable, or the u-channel noise terms</a:t>
-            </a:r>
-          </a:p>
-        </p:txBody>
-      </p:sp>
-      <p:sp>
-        <p:nvSpPr>
-          <p:cNvPr id="5" name="TextBox 4"/>
-          <p:cNvSpPr txBox="1"/>
-          <p:nvPr/>
-        </p:nvSpPr>
-        <p:spPr>
-          <a:xfrm>
-            <a:off x="640080" y="3931920"/>
-            <a:ext cx="10972800" cy="2011680"/>
-          </a:xfrm>
-          <a:prstGeom prst="rect">
-            <a:avLst/>
-          </a:prstGeom>
-          <a:noFill/>
-        </p:spPr>
-        <p:txBody>
-          <a:bodyPr wrap="square" lIns="0" rIns="0" tIns="0" bIns="0">
-            <a:spAutoFit/>
-          </a:bodyPr>
-          <a:lstStyle/>
-          <a:p>
-            <a:pPr marL="228600" indent="-228600">
-              <a:spcAft>
-                <a:spcPts val="800"/>
-              </a:spcAft>
-              <a:buChar char="•"/>
-            </a:pPr>
-            <a:r>
-              <a:rPr sz="1250" b="0">
-                <a:solidFill>
-                  <a:srgbClr val="212121"/>
-                </a:solidFill>
-                <a:latin typeface="Calibri"/>
-              </a:rPr>
-              <a:t>Each candidate was run forward and scored on the same three metrics (count Fano factor, CV of stress released per window, τ scatter)</a:t>
-            </a:r>
-          </a:p>
-          <a:p>
-            <a:pPr marL="228600" indent="-228600">
-              <a:spcAft>
-                <a:spcPts val="800"/>
-              </a:spcAft>
-              <a:buChar char="•"/>
-            </a:pPr>
-            <a:r>
-              <a:rPr sz="1250" b="0">
-                <a:solidFill>
-                  <a:srgbClr val="212121"/>
-                </a:solidFill>
-                <a:latin typeface="Calibri"/>
-              </a:rPr>
-              <a:t>What survives: a driving-noise amplitude 17% too large with the same restoring force, at fixed (u,τ), that no sequence correlation the data can exhibit accounts for</a:t>
-            </a:r>
-          </a:p>
-          <a:p>
-            <a:pPr marL="228600" indent="-228600">
-              <a:spcAft>
-                <a:spcPts val="800"/>
-              </a:spcAft>
-              <a:buChar char="•"/>
-            </a:pPr>
-            <a:r>
-              <a:rPr sz="1250" b="0">
-                <a:solidFill>
-                  <a:srgbClr val="212121"/>
-                </a:solidFill>
-                <a:latin typeface="Calibri"/>
-              </a:rPr>
-              <a:t>Closing it needs a per-step observable that is not (u,τ), the same MD output the third variable asks for</a:t>
-            </a:r>
-          </a:p>
-        </p:txBody>
-      </p:sp>
-      <p:sp>
-        <p:nvSpPr>
-          <p:cNvPr id="6" name="Rounded Rectangle 5"/>
-          <p:cNvSpPr/>
-          <p:nvPr/>
-        </p:nvSpPr>
-        <p:spPr>
-          <a:xfrm>
-            <a:off x="548640" y="6053328"/>
-            <a:ext cx="11091672" cy="566928"/>
-          </a:xfrm>
-          <a:prstGeom prst="roundRect">
-            <a:avLst>
-              <a:gd name="adj" fmla="val 18000"/>
-            </a:avLst>
-          </a:prstGeom>
-          <a:solidFill>
-            <a:srgbClr val="F2F2F2"/>
-          </a:solidFill>
-          <a:ln>
-            <a:noFill/>
-          </a:ln>
-          <a:effectLst/>
-        </p:spPr>
-        <p:style>
-          <a:lnRef idx="1">
-            <a:schemeClr val="accent1"/>
-          </a:lnRef>
-          <a:fillRef idx="3">
-            <a:schemeClr val="accent1"/>
-          </a:fillRef>
-          <a:effectRef idx="2">
-            <a:schemeClr val="accent1"/>
-          </a:effectRef>
-          <a:fontRef idx="minor">
-            <a:schemeClr val="lt1"/>
-          </a:fontRef>
-        </p:style>
-        <p:txBody>
-          <a:bodyPr rtlCol="0" anchor="ctr" wrap="square" lIns="164592" rIns="164592" tIns="0" bIns="0"/>
-          <a:lstStyle/>
-          <a:p>
-            <a:pPr algn="ctr"/>
-            <a:r>
-              <a:rPr sz="1350" b="1">
-                <a:solidFill>
-                  <a:srgbClr val="1E2761"/>
-                </a:solidFill>
-                <a:latin typeface="Calibri"/>
-              </a:rPr>
-              <a:t>Takeaway: </a:t>
-            </a:r>
-            <a:r>
-              <a:rPr sz="1350" b="0">
-                <a:solidFill>
-                  <a:srgbClr val="212121"/>
-                </a:solidFill>
-                <a:latin typeface="Calibri"/>
-              </a:rPr>
-              <a:t>The remaining discrepancy is bounded and named; the dataset has exhausted what it can test at fixed (u,τ).</a:t>
-            </a:r>
-          </a:p>
-        </p:txBody>
-      </p:sp>
-    </p:spTree>
-  </p:cSld>
-  <p:clrMapOvr>
-    <a:masterClrMapping/>
-  </p:clrMapOvr>
-</p:sld>
-</file>
-
-<file path=ppt/slides/slide19.xml><?xml version="1.0" encoding="utf-8"?>
-<p:sld xmlns:a="http://schemas.openxmlformats.org/drawingml/2006/main" xmlns:p="http://schemas.openxmlformats.org/presentationml/2006/main" xmlns:r="http://schemas.openxmlformats.org/officeDocument/2006/relationships">
-  <p:cSld>
-    <p:spTree>
-      <p:nvGrpSpPr>
-        <p:cNvPr id="1" name=""/>
-        <p:cNvGrpSpPr/>
-        <p:nvPr/>
-      </p:nvGrpSpPr>
-      <p:grpSpPr/>
-      <p:sp>
-        <p:nvSpPr>
-          <p:cNvPr id="2" name="TextBox 1"/>
-          <p:cNvSpPr txBox="1"/>
-          <p:nvPr/>
-        </p:nvSpPr>
-        <p:spPr>
-          <a:xfrm>
-            <a:off x="548640" y="292608"/>
-            <a:ext cx="11091672" cy="685800"/>
-          </a:xfrm>
-          <a:prstGeom prst="rect">
-            <a:avLst/>
-          </a:prstGeom>
-          <a:noFill/>
-        </p:spPr>
-        <p:txBody>
-          <a:bodyPr wrap="square" lIns="0" rIns="0" tIns="0" bIns="0">
-            <a:spAutoFit/>
-          </a:bodyPr>
-          <a:lstStyle/>
-          <a:p>
-            <a:r>
-              <a:rPr sz="3000" b="1">
-                <a:solidFill>
-                  <a:srgbClr val="1E2761"/>
-                </a:solidFill>
-                <a:latin typeface="Calibri"/>
-              </a:rPr>
-              <a:t>What holds, what doesn’t</a:t>
-            </a:r>
-          </a:p>
-        </p:txBody>
-      </p:sp>
-      <p:sp>
-        <p:nvSpPr>
-          <p:cNvPr id="3" name="TextBox 2"/>
-          <p:cNvSpPr txBox="1"/>
-          <p:nvPr/>
-        </p:nvSpPr>
-        <p:spPr>
-          <a:xfrm>
-            <a:off x="640080" y="1234440"/>
-            <a:ext cx="3566160" cy="411480"/>
-          </a:xfrm>
-          <a:prstGeom prst="rect">
-            <a:avLst/>
-          </a:prstGeom>
-          <a:noFill/>
-        </p:spPr>
-        <p:txBody>
-          <a:bodyPr wrap="square" lIns="0" rIns="0" tIns="0" bIns="0">
-            <a:spAutoFit/>
-          </a:bodyPr>
-          <a:lstStyle/>
-          <a:p>
-            <a:r>
-              <a:rPr sz="1700" b="1">
-                <a:solidFill>
-                  <a:srgbClr val="1E2761"/>
-                </a:solidFill>
-                <a:latin typeface="Calibri"/>
-              </a:rPr>
-              <a:t>SUPPORTED</a:t>
-            </a:r>
-          </a:p>
-        </p:txBody>
-      </p:sp>
-      <p:sp>
-        <p:nvSpPr>
-          <p:cNvPr id="4" name="TextBox 3"/>
-          <p:cNvSpPr txBox="1"/>
-          <p:nvPr/>
-        </p:nvSpPr>
-        <p:spPr>
-          <a:xfrm>
-            <a:off x="640080" y="1737360"/>
-            <a:ext cx="3566160" cy="4114800"/>
-          </a:xfrm>
-          <a:prstGeom prst="rect">
-            <a:avLst/>
-          </a:prstGeom>
-          <a:noFill/>
-        </p:spPr>
-        <p:txBody>
-          <a:bodyPr wrap="square" lIns="0" rIns="0" tIns="0" bIns="0">
-            <a:spAutoFit/>
-          </a:bodyPr>
-          <a:lstStyle/>
-          <a:p>
-            <a:pPr marL="228600" indent="-228600">
-              <a:spcAft>
-                <a:spcPts val="800"/>
-              </a:spcAft>
-              <a:buChar char="•"/>
-            </a:pPr>
-            <a:r>
-              <a:rPr sz="1250" b="0">
-                <a:solidFill>
-                  <a:srgbClr val="212121"/>
-                </a:solidFill>
-                <a:latin typeface="Calibri"/>
-              </a:rPr>
-              <a:t>One universal size shape with a single state-dependent scale (12 cells, 100× in scale)</a:t>
-            </a:r>
-          </a:p>
-          <a:p>
-            <a:pPr marL="228600" indent="-228600">
-              <a:spcAft>
-                <a:spcPts val="800"/>
-              </a:spcAft>
-              <a:buChar char="•"/>
-            </a:pPr>
-            <a:r>
-              <a:rPr sz="1250" b="0">
-                <a:solidFill>
-                  <a:srgbClr val="212121"/>
-                </a:solidFill>
-                <a:latin typeface="Calibri"/>
-              </a:rPr>
-              <a:t>A hard ceiling, sharper than exponential (8/8 by AIC; synthetic controls both ways; robust to merged avalanches)</a:t>
-            </a:r>
-          </a:p>
-          <a:p>
-            <a:pPr marL="228600" indent="-228600">
-              <a:spcAft>
-                <a:spcPts val="800"/>
-              </a:spcAft>
-              <a:buChar char="•"/>
-            </a:pPr>
-            <a:r>
-              <a:rPr sz="1250" b="0">
-                <a:solidFill>
-                  <a:srgbClr val="212121"/>
-                </a:solidFill>
-                <a:latin typeface="Calibri"/>
-              </a:rPr>
-              <a:t>Small-size exponent k ≈ 0.9; the ceiling field factorizes (95.5%)</a:t>
-            </a:r>
-          </a:p>
-          <a:p>
-            <a:pPr marL="228600" indent="-228600">
-              <a:spcAft>
-                <a:spcPts val="800"/>
-              </a:spcAft>
-              <a:buChar char="•"/>
-            </a:pPr>
-            <a:r>
-              <a:rPr sz="1250" b="0">
-                <a:solidFill>
-                  <a:srgbClr val="212121"/>
-                </a:solidFill>
-                <a:latin typeface="Calibri"/>
-              </a:rPr>
-              <a:t>Stress-strain curves and yield peaks across 256× in cooling rate at the few-% level</a:t>
-            </a:r>
-          </a:p>
-          <a:p>
-            <a:pPr marL="228600" indent="-228600">
-              <a:spcAft>
-                <a:spcPts val="800"/>
-              </a:spcAft>
-              <a:buChar char="•"/>
-            </a:pPr>
-            <a:r>
-              <a:rPr sz="1250" b="0">
-                <a:solidFill>
-                  <a:srgbClr val="212121"/>
-                </a:solidFill>
-                <a:latin typeface="Calibri"/>
-              </a:rPr>
-              <a:t>Memory in event size only; relaxes with γ_r ≈ 0.2; parameter-free per-sample prediction</a:t>
-            </a:r>
-          </a:p>
-        </p:txBody>
-      </p:sp>
-      <p:sp>
-        <p:nvSpPr>
-          <p:cNvPr id="5" name="TextBox 4"/>
-          <p:cNvSpPr txBox="1"/>
-          <p:nvPr/>
-        </p:nvSpPr>
-        <p:spPr>
-          <a:xfrm>
-            <a:off x="4434840" y="1234440"/>
-            <a:ext cx="3566160" cy="411480"/>
-          </a:xfrm>
-          <a:prstGeom prst="rect">
-            <a:avLst/>
-          </a:prstGeom>
-          <a:noFill/>
-        </p:spPr>
-        <p:txBody>
-          <a:bodyPr wrap="square" lIns="0" rIns="0" tIns="0" bIns="0">
-            <a:spAutoFit/>
-          </a:bodyPr>
-          <a:lstStyle/>
-          <a:p>
-            <a:r>
-              <a:rPr sz="1700" b="1">
-                <a:solidFill>
-                  <a:srgbClr val="6E7B85"/>
-                </a:solidFill>
-                <a:latin typeface="Calibri"/>
-              </a:rPr>
-              <a:t>NOT ESTABLISHED</a:t>
-            </a:r>
-          </a:p>
-        </p:txBody>
-      </p:sp>
-      <p:sp>
-        <p:nvSpPr>
-          <p:cNvPr id="6" name="TextBox 5"/>
-          <p:cNvSpPr txBox="1"/>
-          <p:nvPr/>
-        </p:nvSpPr>
-        <p:spPr>
-          <a:xfrm>
-            <a:off x="4434840" y="1737360"/>
-            <a:ext cx="3566160" cy="4114800"/>
-          </a:xfrm>
-          <a:prstGeom prst="rect">
-            <a:avLst/>
-          </a:prstGeom>
-          <a:noFill/>
-        </p:spPr>
-        <p:txBody>
-          <a:bodyPr wrap="square" lIns="0" rIns="0" tIns="0" bIns="0">
-            <a:spAutoFit/>
-          </a:bodyPr>
-          <a:lstStyle/>
-          <a:p>
-            <a:pPr marL="228600" indent="-228600">
-              <a:spcAft>
-                <a:spcPts val="800"/>
-              </a:spcAft>
-              <a:buChar char="•"/>
-            </a:pPr>
-            <a:r>
-              <a:rPr sz="1250" b="0">
-                <a:solidFill>
-                  <a:srgbClr val="212121"/>
-                </a:solidFill>
-                <a:latin typeface="Calibri"/>
-              </a:rPr>
-              <a:t>Ceiling exponent m ≈ 2: order of magnitude only</a:t>
-            </a:r>
-          </a:p>
-          <a:p>
-            <a:pPr marL="228600" indent="-228600">
-              <a:spcAft>
-                <a:spcPts val="800"/>
-              </a:spcAft>
-              <a:buChar char="•"/>
-            </a:pPr>
-            <a:r>
-              <a:rPr sz="1250" b="0">
-                <a:solidFill>
-                  <a:srgbClr val="212121"/>
-                </a:solidFill>
-                <a:latin typeface="Calibri"/>
-              </a:rPr>
-              <a:t>Specific SR forms of the ceiling factors: best-of-front, not unique</a:t>
-            </a:r>
-          </a:p>
-          <a:p>
-            <a:pPr marL="228600" indent="-228600">
-              <a:spcAft>
-                <a:spcPts val="800"/>
-              </a:spcAft>
-              <a:buChar char="•"/>
-            </a:pPr>
-            <a:r>
-              <a:rPr sz="1250" b="0">
-                <a:solidFill>
-                  <a:srgbClr val="212121"/>
-                </a:solidFill>
-                <a:latin typeface="Calibri"/>
-              </a:rPr>
-              <a:t>Ceiling vs exponential in cells with &lt; 1,000 events</a:t>
-            </a:r>
-          </a:p>
-          <a:p>
-            <a:pPr marL="228600" indent="-228600">
-              <a:spcAft>
-                <a:spcPts val="800"/>
-              </a:spcAft>
-              <a:buChar char="•"/>
-            </a:pPr>
-            <a:r>
-              <a:rPr sz="1250" b="0">
-                <a:solidFill>
-                  <a:srgbClr val="212121"/>
-                </a:solidFill>
-                <a:latin typeface="Calibri"/>
-              </a:rPr>
-              <a:t>Convergence of preparations at large strain: the model predicts it, now with a measured rate, but there is no data past γ = 0.5</a:t>
-            </a:r>
-          </a:p>
-          <a:p>
-            <a:pPr marL="228600" indent="-228600">
-              <a:spcAft>
-                <a:spcPts val="800"/>
-              </a:spcAft>
-              <a:buChar char="•"/>
-            </a:pPr>
-            <a:r>
-              <a:rPr sz="1250" b="0">
-                <a:solidFill>
-                  <a:srgbClr val="212121"/>
-                </a:solidFill>
-                <a:latin typeface="Calibri"/>
-              </a:rPr>
-              <a:t>The system size N (unrecorded): the finite-size reading of the ceiling is untested</a:t>
-            </a:r>
-          </a:p>
-        </p:txBody>
-      </p:sp>
-      <p:sp>
-        <p:nvSpPr>
-          <p:cNvPr id="7" name="TextBox 6"/>
-          <p:cNvSpPr txBox="1"/>
-          <p:nvPr/>
-        </p:nvSpPr>
-        <p:spPr>
-          <a:xfrm>
-            <a:off x="8229600" y="1234440"/>
-            <a:ext cx="3566160" cy="411480"/>
-          </a:xfrm>
-          <a:prstGeom prst="rect">
-            <a:avLst/>
-          </a:prstGeom>
-          <a:noFill/>
-        </p:spPr>
-        <p:txBody>
-          <a:bodyPr wrap="square" lIns="0" rIns="0" tIns="0" bIns="0">
-            <a:spAutoFit/>
-          </a:bodyPr>
-          <a:lstStyle/>
-          <a:p>
-            <a:r>
-              <a:rPr sz="1700" b="1">
-                <a:solidFill>
-                  <a:srgbClr val="990011"/>
-                </a:solidFill>
-                <a:latin typeface="Calibri"/>
-              </a:rPr>
-              <a:t>CONTRADICTED</a:t>
-            </a:r>
-          </a:p>
-        </p:txBody>
-      </p:sp>
-      <p:sp>
-        <p:nvSpPr>
-          <p:cNvPr id="8" name="TextBox 7"/>
-          <p:cNvSpPr txBox="1"/>
-          <p:nvPr/>
-        </p:nvSpPr>
-        <p:spPr>
-          <a:xfrm>
-            <a:off x="8229600" y="1737360"/>
-            <a:ext cx="3566160" cy="4114800"/>
-          </a:xfrm>
-          <a:prstGeom prst="rect">
-            <a:avLst/>
-          </a:prstGeom>
-          <a:noFill/>
-        </p:spPr>
-        <p:txBody>
-          <a:bodyPr wrap="square" lIns="0" rIns="0" tIns="0" bIns="0">
-            <a:spAutoFit/>
-          </a:bodyPr>
-          <a:lstStyle/>
-          <a:p>
-            <a:pPr marL="228600" indent="-228600">
-              <a:spcAft>
-                <a:spcPts val="800"/>
-              </a:spcAft>
-              <a:buChar char="•"/>
-            </a:pPr>
-            <a:r>
-              <a:rPr sz="1250" b="0">
-                <a:solidFill>
-                  <a:srgbClr val="212121"/>
-                </a:solidFill>
-                <a:latin typeface="Calibri"/>
-              </a:rPr>
-              <a:t>(u,τ) as a sufficient state: the 1.71× ceiling memory and the 5×-underpredicted u-spread, independently</a:t>
-            </a:r>
-          </a:p>
-          <a:p>
-            <a:pPr marL="228600" indent="-228600">
-              <a:spcAft>
-                <a:spcPts val="800"/>
-              </a:spcAft>
-              <a:buChar char="•"/>
-            </a:pPr>
-            <a:r>
-              <a:rPr sz="1250" b="0">
-                <a:solidFill>
-                  <a:srgbClr val="212121"/>
-                </a:solidFill>
-                <a:latin typeface="Calibri"/>
-              </a:rPr>
-              <a:t>The step process as Markov in (u,τ) at the 10⁻⁵ strain scale: aftershocks (×20), reload-dependent large events</a:t>
-            </a:r>
-          </a:p>
-          <a:p>
-            <a:pPr marL="228600" indent="-228600">
-              <a:spcAft>
-                <a:spcPts val="800"/>
-              </a:spcAft>
-              <a:buChar char="•"/>
-            </a:pPr>
-            <a:r>
-              <a:rPr sz="1250" b="0">
-                <a:solidFill>
-                  <a:srgbClr val="212121"/>
-                </a:solidFill>
-                <a:latin typeface="Calibri"/>
-              </a:rPr>
-              <a:t>Any of ten candidate explanations for the run-to-run variance excess</a:t>
-            </a:r>
-          </a:p>
-          <a:p>
-            <a:pPr marL="228600" indent="-228600">
-              <a:spcAft>
-                <a:spcPts val="800"/>
-              </a:spcAft>
-              <a:buChar char="•"/>
-            </a:pPr>
-            <a:r>
-              <a:rPr sz="1250" b="0">
-                <a:solidFill>
-                  <a:srgbClr val="212121"/>
-                </a:solidFill>
-                <a:latin typeface="Calibri"/>
-              </a:rPr>
-              <a:t>Preparation acting through the event rate (the simplest STZ-density reading)</a:t>
-            </a:r>
-          </a:p>
-        </p:txBody>
-      </p:sp>
-      <p:sp>
-        <p:nvSpPr>
-          <p:cNvPr id="9" name="Rounded Rectangle 8"/>
-          <p:cNvSpPr/>
-          <p:nvPr/>
-        </p:nvSpPr>
-        <p:spPr>
-          <a:xfrm>
-            <a:off x="548640" y="6053328"/>
-            <a:ext cx="11091672" cy="566928"/>
-          </a:xfrm>
-          <a:prstGeom prst="roundRect">
-            <a:avLst>
-              <a:gd name="adj" fmla="val 18000"/>
-            </a:avLst>
-          </a:prstGeom>
-          <a:solidFill>
-            <a:srgbClr val="F2F2F2"/>
-          </a:solidFill>
-          <a:ln>
-            <a:noFill/>
-          </a:ln>
-          <a:effectLst/>
-        </p:spPr>
-        <p:style>
-          <a:lnRef idx="1">
-            <a:schemeClr val="accent1"/>
-          </a:lnRef>
-          <a:fillRef idx="3">
-            <a:schemeClr val="accent1"/>
-          </a:fillRef>
-          <a:effectRef idx="2">
-            <a:schemeClr val="accent1"/>
-          </a:effectRef>
-          <a:fontRef idx="minor">
-            <a:schemeClr val="lt1"/>
-          </a:fontRef>
-        </p:style>
-        <p:txBody>
-          <a:bodyPr rtlCol="0" anchor="ctr" wrap="square" lIns="164592" rIns="164592" tIns="0" bIns="0"/>
-          <a:lstStyle/>
-          <a:p>
-            <a:pPr algn="ctr"/>
-            <a:r>
-              <a:rPr sz="1350" b="1">
-                <a:solidFill>
-                  <a:srgbClr val="1E2761"/>
-                </a:solidFill>
-                <a:latin typeface="Calibri"/>
-              </a:rPr>
-              <a:t>Takeaway: </a:t>
-            </a:r>
-            <a:r>
-              <a:rPr sz="1350" b="0">
-                <a:solidFill>
-                  <a:srgbClr val="212121"/>
-                </a:solidFill>
-                <a:latin typeface="Calibri"/>
-              </a:rPr>
-              <a:t>The law and the model built on it hold at the few-percent level; their failures are located, quantified, and point at one slow variable and one non-Markov structure.</a:t>
+              <a:t>To the resolution of this dataset, the missing state variable is a single multiplicative factor on the ceiling, set by the preparation and erased by plastic strain.</a:t>
             </a:r>
           </a:p>
         </p:txBody>
@@ -5900,7 +3586,7 @@
                 </a:solidFill>
                 <a:latin typeface="Calibri"/>
               </a:rPr>
-              <a:t>The dataset, and the object of study</a:t>
+              <a:t>The variables</a:t>
             </a:r>
           </a:p>
         </p:txBody>
@@ -5913,8 +3599,8 @@
         </p:nvSpPr>
         <p:spPr>
           <a:xfrm>
-            <a:off x="640080" y="1143000"/>
-            <a:ext cx="2651760" cy="777240"/>
+            <a:off x="640080" y="1234440"/>
+            <a:ext cx="5394960" cy="4114800"/>
           </a:xfrm>
           <a:prstGeom prst="rect">
             <a:avLst/>
@@ -5927,15 +3613,153 @@
           </a:bodyPr>
           <a:lstStyle/>
           <a:p>
-            <a:pPr algn="ctr"/>
-            <a:r>
-              <a:rPr sz="3600" b="1">
+            <a:pPr>
+              <a:spcAft>
+                <a:spcPts val="1100"/>
+              </a:spcAft>
+            </a:pPr>
+            <a:r>
+              <a:rPr sz="1600" b="0">
                 <a:solidFill>
                   <a:srgbClr val="1E2761"/>
                 </a:solidFill>
-                <a:latin typeface="Calibri"/>
-              </a:rPr>
-              <a:t>850</a:t>
+                <a:latin typeface="Cambria Math"/>
+              </a:rPr>
+              <a:t>γ   </a:t>
+            </a:r>
+            <a:r>
+              <a:rPr sz="1500" b="0">
+                <a:solidFill>
+                  <a:srgbClr val="212121"/>
+                </a:solidFill>
+                <a:latin typeface="Calibri"/>
+              </a:rPr>
+              <a:t>applied shear strain; one step is 10⁻⁵, runs go to 0.5</a:t>
+            </a:r>
+          </a:p>
+          <a:p>
+            <a:pPr>
+              <a:spcAft>
+                <a:spcPts val="1100"/>
+              </a:spcAft>
+            </a:pPr>
+            <a:r>
+              <a:rPr sz="1600" b="0">
+                <a:solidFill>
+                  <a:srgbClr val="1E2761"/>
+                </a:solidFill>
+                <a:latin typeface="Cambria Math"/>
+              </a:rPr>
+              <a:t>τ   </a:t>
+            </a:r>
+            <a:r>
+              <a:rPr sz="1500" b="0">
+                <a:solidFill>
+                  <a:srgbClr val="212121"/>
+                </a:solidFill>
+                <a:latin typeface="Calibri"/>
+              </a:rPr>
+              <a:t>shear stress (raw stress ÷ 10⁴)</a:t>
+            </a:r>
+          </a:p>
+          <a:p>
+            <a:pPr>
+              <a:spcAft>
+                <a:spcPts val="1100"/>
+              </a:spcAft>
+            </a:pPr>
+            <a:r>
+              <a:rPr sz="1600" b="0">
+                <a:solidFill>
+                  <a:srgbClr val="1E2761"/>
+                </a:solidFill>
+                <a:latin typeface="Cambria Math"/>
+              </a:rPr>
+              <a:t>u = pe − u₀   </a:t>
+            </a:r>
+            <a:r>
+              <a:rPr sz="1500" b="0">
+                <a:solidFill>
+                  <a:srgbClr val="212121"/>
+                </a:solidFill>
+                <a:latin typeface="Calibri"/>
+              </a:rPr>
+              <a:t>potential energy per atom above the reference u₀ = −4.60752; high u is a poorly annealed glass</a:t>
+            </a:r>
+          </a:p>
+          <a:p>
+            <a:pPr>
+              <a:spcAft>
+                <a:spcPts val="1100"/>
+              </a:spcAft>
+            </a:pPr>
+            <a:r>
+              <a:rPr sz="1600" b="0">
+                <a:solidFill>
+                  <a:srgbClr val="1E2761"/>
+                </a:solidFill>
+                <a:latin typeface="Cambria Math"/>
+              </a:rPr>
+              <a:t>(u, τ)   </a:t>
+            </a:r>
+            <a:r>
+              <a:rPr sz="1500" b="0">
+                <a:solidFill>
+                  <a:srgbClr val="212121"/>
+                </a:solidFill>
+                <a:latin typeface="Calibri"/>
+              </a:rPr>
+              <a:t>the two-coordinate state of a run; every field lives on a 20 × 20 grid over this plane, plus a catch-all ring</a:t>
+            </a:r>
+          </a:p>
+          <a:p>
+            <a:pPr>
+              <a:spcAft>
+                <a:spcPts val="1100"/>
+              </a:spcAft>
+            </a:pPr>
+            <a:r>
+              <a:rPr sz="1600" b="0">
+                <a:solidFill>
+                  <a:srgbClr val="1E2761"/>
+                </a:solidFill>
+                <a:latin typeface="Cambria Math"/>
+              </a:rPr>
+              <a:t>2μ(u, τ)   </a:t>
+            </a:r>
+            <a:r>
+              <a:rPr sz="1500" b="0">
+                <a:solidFill>
+                  <a:srgbClr val="212121"/>
+                </a:solidFill>
+                <a:latin typeface="Calibri"/>
+              </a:rPr>
+              <a:t>elastic modulus, the slope dτ/dγ on elastic steps (about 20)</a:t>
+            </a:r>
+          </a:p>
+          <a:p>
+            <a:pPr>
+              <a:spcAft>
+                <a:spcPts val="1100"/>
+              </a:spcAft>
+            </a:pPr>
+            <a:r>
+              <a:rPr sz="1600" b="0">
+                <a:solidFill>
+                  <a:srgbClr val="1E2761"/>
+                </a:solidFill>
+                <a:latin typeface="Cambria Math"/>
+              </a:rPr>
+              <a:t>s = −Δτ   </a:t>
+            </a:r>
+            <a:r>
+              <a:rPr sz="1500" b="0">
+                <a:solidFill>
+                  <a:srgbClr val="212121"/>
+                </a:solidFill>
+                <a:latin typeface="Calibri"/>
+              </a:rPr>
+              <a:t>an event: a step where the stress drops, of size s; 187,468 of them, from 10⁻⁶ to 1.16</a:t>
             </a:r>
           </a:p>
         </p:txBody>
@@ -5948,8 +3772,8 @@
         </p:nvSpPr>
         <p:spPr>
           <a:xfrm>
-            <a:off x="640080" y="1901952"/>
-            <a:ext cx="2651760" cy="320040"/>
+            <a:off x="6355080" y="1234440"/>
+            <a:ext cx="5303520" cy="4114800"/>
           </a:xfrm>
           <a:prstGeom prst="rect">
             <a:avLst/>
@@ -5962,273 +3786,20 @@
           </a:bodyPr>
           <a:lstStyle/>
           <a:p>
-            <a:pPr algn="ctr"/>
-            <a:r>
-              <a:rPr sz="1300" b="0">
-                <a:solidFill>
-                  <a:srgbClr val="6E7B85"/>
-                </a:solidFill>
-                <a:latin typeface="Calibri"/>
-              </a:rPr>
-              <a:t>trajectories</a:t>
-            </a:r>
-          </a:p>
-        </p:txBody>
-      </p:sp>
-      <p:sp>
-        <p:nvSpPr>
-          <p:cNvPr id="5" name="TextBox 4"/>
-          <p:cNvSpPr txBox="1"/>
-          <p:nvPr/>
-        </p:nvSpPr>
-        <p:spPr>
-          <a:xfrm>
-            <a:off x="3429000" y="1143000"/>
-            <a:ext cx="2651760" cy="777240"/>
-          </a:xfrm>
-          <a:prstGeom prst="rect">
-            <a:avLst/>
-          </a:prstGeom>
-          <a:noFill/>
-        </p:spPr>
-        <p:txBody>
-          <a:bodyPr wrap="square" lIns="0" rIns="0" tIns="0" bIns="0">
-            <a:spAutoFit/>
-          </a:bodyPr>
-          <a:lstStyle/>
-          <a:p>
-            <a:pPr algn="ctr"/>
-            <a:r>
-              <a:rPr sz="3600" b="1">
-                <a:solidFill>
-                  <a:srgbClr val="1E2761"/>
-                </a:solidFill>
-                <a:latin typeface="Calibri"/>
-              </a:rPr>
-              <a:t>9</a:t>
-            </a:r>
-          </a:p>
-        </p:txBody>
-      </p:sp>
-      <p:sp>
-        <p:nvSpPr>
-          <p:cNvPr id="6" name="TextBox 5"/>
-          <p:cNvSpPr txBox="1"/>
-          <p:nvPr/>
-        </p:nvSpPr>
-        <p:spPr>
-          <a:xfrm>
-            <a:off x="3429000" y="1901952"/>
-            <a:ext cx="2651760" cy="320040"/>
-          </a:xfrm>
-          <a:prstGeom prst="rect">
-            <a:avLst/>
-          </a:prstGeom>
-          <a:noFill/>
-        </p:spPr>
-        <p:txBody>
-          <a:bodyPr wrap="square" lIns="0" rIns="0" tIns="0" bIns="0">
-            <a:spAutoFit/>
-          </a:bodyPr>
-          <a:lstStyle/>
-          <a:p>
-            <a:pPr algn="ctr"/>
-            <a:r>
-              <a:rPr sz="1300" b="0">
-                <a:solidFill>
-                  <a:srgbClr val="6E7B85"/>
-                </a:solidFill>
-                <a:latin typeface="Calibri"/>
-              </a:rPr>
-              <a:t>cooling rates (256×)</a:t>
-            </a:r>
-          </a:p>
-        </p:txBody>
-      </p:sp>
-      <p:sp>
-        <p:nvSpPr>
-          <p:cNvPr id="7" name="TextBox 6"/>
-          <p:cNvSpPr txBox="1"/>
-          <p:nvPr/>
-        </p:nvSpPr>
-        <p:spPr>
-          <a:xfrm>
-            <a:off x="6217920" y="1143000"/>
-            <a:ext cx="2651760" cy="777240"/>
-          </a:xfrm>
-          <a:prstGeom prst="rect">
-            <a:avLst/>
-          </a:prstGeom>
-          <a:noFill/>
-        </p:spPr>
-        <p:txBody>
-          <a:bodyPr wrap="square" lIns="0" rIns="0" tIns="0" bIns="0">
-            <a:spAutoFit/>
-          </a:bodyPr>
-          <a:lstStyle/>
-          <a:p>
-            <a:pPr algn="ctr"/>
-            <a:r>
-              <a:rPr sz="3600" b="1">
-                <a:solidFill>
-                  <a:srgbClr val="1E2761"/>
-                </a:solidFill>
-                <a:latin typeface="Calibri"/>
-              </a:rPr>
-              <a:t>187,468</a:t>
-            </a:r>
-          </a:p>
-        </p:txBody>
-      </p:sp>
-      <p:sp>
-        <p:nvSpPr>
-          <p:cNvPr id="8" name="TextBox 7"/>
-          <p:cNvSpPr txBox="1"/>
-          <p:nvPr/>
-        </p:nvSpPr>
-        <p:spPr>
-          <a:xfrm>
-            <a:off x="6217920" y="1901952"/>
-            <a:ext cx="2651760" cy="320040"/>
-          </a:xfrm>
-          <a:prstGeom prst="rect">
-            <a:avLst/>
-          </a:prstGeom>
-          <a:noFill/>
-        </p:spPr>
-        <p:txBody>
-          <a:bodyPr wrap="square" lIns="0" rIns="0" tIns="0" bIns="0">
-            <a:spAutoFit/>
-          </a:bodyPr>
-          <a:lstStyle/>
-          <a:p>
-            <a:pPr algn="ctr"/>
-            <a:r>
-              <a:rPr sz="1300" b="0">
-                <a:solidFill>
-                  <a:srgbClr val="6E7B85"/>
-                </a:solidFill>
-                <a:latin typeface="Calibri"/>
-              </a:rPr>
-              <a:t>stress-drop events</a:t>
-            </a:r>
-          </a:p>
-        </p:txBody>
-      </p:sp>
-      <p:sp>
-        <p:nvSpPr>
-          <p:cNvPr id="9" name="TextBox 8"/>
-          <p:cNvSpPr txBox="1"/>
-          <p:nvPr/>
-        </p:nvSpPr>
-        <p:spPr>
-          <a:xfrm>
-            <a:off x="9006839" y="1143000"/>
-            <a:ext cx="2651760" cy="777240"/>
-          </a:xfrm>
-          <a:prstGeom prst="rect">
-            <a:avLst/>
-          </a:prstGeom>
-          <a:noFill/>
-        </p:spPr>
-        <p:txBody>
-          <a:bodyPr wrap="square" lIns="0" rIns="0" tIns="0" bIns="0">
-            <a:spAutoFit/>
-          </a:bodyPr>
-          <a:lstStyle/>
-          <a:p>
-            <a:pPr algn="ctr"/>
-            <a:r>
-              <a:rPr sz="3600" b="1">
-                <a:solidFill>
-                  <a:srgbClr val="1E2761"/>
-                </a:solidFill>
-                <a:latin typeface="Calibri"/>
-              </a:rPr>
-              <a:t>105,188</a:t>
-            </a:r>
-          </a:p>
-        </p:txBody>
-      </p:sp>
-      <p:sp>
-        <p:nvSpPr>
-          <p:cNvPr id="10" name="TextBox 9"/>
-          <p:cNvSpPr txBox="1"/>
-          <p:nvPr/>
-        </p:nvSpPr>
-        <p:spPr>
-          <a:xfrm>
-            <a:off x="9006839" y="1901952"/>
-            <a:ext cx="2651760" cy="320040"/>
-          </a:xfrm>
-          <a:prstGeom prst="rect">
-            <a:avLst/>
-          </a:prstGeom>
-          <a:noFill/>
-        </p:spPr>
-        <p:txBody>
-          <a:bodyPr wrap="square" lIns="0" rIns="0" tIns="0" bIns="0">
-            <a:spAutoFit/>
-          </a:bodyPr>
-          <a:lstStyle/>
-          <a:p>
-            <a:pPr algn="ctr"/>
-            <a:r>
-              <a:rPr sz="1300" b="0">
-                <a:solidFill>
-                  <a:srgbClr val="6E7B85"/>
-                </a:solidFill>
-                <a:latin typeface="Calibri"/>
-              </a:rPr>
-              <a:t>aging events</a:t>
-            </a:r>
-          </a:p>
-        </p:txBody>
-      </p:sp>
-      <p:sp>
-        <p:nvSpPr>
-          <p:cNvPr id="11" name="TextBox 10"/>
-          <p:cNvSpPr txBox="1"/>
-          <p:nvPr/>
-        </p:nvSpPr>
-        <p:spPr>
-          <a:xfrm>
-            <a:off x="640080" y="2606040"/>
-            <a:ext cx="5394960" cy="3200400"/>
-          </a:xfrm>
-          <a:prstGeom prst="rect">
-            <a:avLst/>
-          </a:prstGeom>
-          <a:noFill/>
-        </p:spPr>
-        <p:txBody>
-          <a:bodyPr wrap="square" lIns="0" rIns="0" tIns="0" bIns="0">
-            <a:spAutoFit/>
-          </a:bodyPr>
-          <a:lstStyle/>
-          <a:p>
             <a:pPr>
               <a:spcAft>
-                <a:spcPts val="600"/>
+                <a:spcPts val="1100"/>
               </a:spcAft>
             </a:pPr>
             <a:r>
-              <a:rPr sz="1600" b="1">
+              <a:rPr sz="1600" b="0">
                 <a:solidFill>
                   <a:srgbClr val="1E2761"/>
                 </a:solidFill>
-                <a:latin typeface="Calibri"/>
-              </a:rPr>
-              <a:t>Protocol</a:t>
-            </a:r>
-          </a:p>
-          <a:p>
-            <a:pPr marL="228600" indent="-228600">
-              <a:spcAft>
-                <a:spcPts val="800"/>
-              </a:spcAft>
-              <a:buChar char="•"/>
-            </a:pPr>
+                <a:latin typeface="Cambria Math"/>
+              </a:rPr>
+              <a:t>p(u, τ)   </a:t>
+            </a:r>
             <a:r>
               <a:rPr sz="1500" b="0">
                 <a:solidFill>
@@ -6236,138 +3807,139 @@
                 </a:solidFill>
                 <a:latin typeface="Calibri"/>
               </a:rPr>
-              <a:t>Athermal quasistatic shear of a model glass; Δγ = 10⁻⁵, 49,999 steps per run, γ → 0.5</a:t>
-            </a:r>
-          </a:p>
-          <a:p>
-            <a:pPr marL="228600" indent="-228600">
-              <a:spcAft>
-                <a:spcPts val="800"/>
-              </a:spcAft>
-              <a:buChar char="•"/>
-            </a:pPr>
-            <a:r>
-              <a:rPr sz="1500" b="0">
-                <a:solidFill>
-                  <a:srgbClr val="212121"/>
-                </a:solidFill>
-                <a:latin typeface="Calibri"/>
-              </a:rPr>
-              <a:t>Cooling rates 2×10¹⁰ → 5.12×10¹² K/s in factor-of-2 steps, ~100 samples each</a:t>
-            </a:r>
-          </a:p>
-          <a:p>
-            <a:pPr marL="228600" indent="-228600">
-              <a:spcAft>
-                <a:spcPts val="800"/>
-              </a:spcAft>
-              <a:buChar char="•"/>
-            </a:pPr>
-            <a:r>
-              <a:rPr sz="1500" b="0">
-                <a:solidFill>
-                  <a:srgbClr val="212121"/>
-                </a:solidFill>
-                <a:latin typeface="Calibri"/>
-              </a:rPr>
-              <a:t>Per step: strain, stress, potential energy, cooling rate. Nothing else is recorded</a:t>
-            </a:r>
-          </a:p>
-        </p:txBody>
-      </p:sp>
-      <p:sp>
-        <p:nvSpPr>
-          <p:cNvPr id="12" name="TextBox 11"/>
-          <p:cNvSpPr txBox="1"/>
-          <p:nvPr/>
-        </p:nvSpPr>
-        <p:spPr>
-          <a:xfrm>
-            <a:off x="6355080" y="2606040"/>
-            <a:ext cx="5303520" cy="3200400"/>
-          </a:xfrm>
-          <a:prstGeom prst="rect">
-            <a:avLst/>
-          </a:prstGeom>
-          <a:noFill/>
-        </p:spPr>
-        <p:txBody>
-          <a:bodyPr wrap="square" lIns="0" rIns="0" tIns="0" bIns="0">
-            <a:spAutoFit/>
-          </a:bodyPr>
-          <a:lstStyle/>
+              <a:t>event hazard: the probability per step that an event fires at this state (median about 0.3% per step)</a:t>
+            </a:r>
+          </a:p>
           <a:p>
             <a:pPr>
               <a:spcAft>
-                <a:spcPts val="600"/>
+                <a:spcPts val="1100"/>
               </a:spcAft>
             </a:pPr>
             <a:r>
-              <a:rPr sz="1600" b="1">
+              <a:rPr sz="1600" b="0">
                 <a:solidFill>
                   <a:srgbClr val="1E2761"/>
                 </a:solidFill>
-                <a:latin typeface="Calibri"/>
-              </a:rPr>
-              <a:t>State and events</a:t>
-            </a:r>
-          </a:p>
-          <a:p>
-            <a:pPr marL="228600" indent="-228600">
+                <a:latin typeface="Cambria Math"/>
+              </a:rPr>
+              <a:t>P(s | u, τ)   </a:t>
+            </a:r>
+            <a:r>
+              <a:rPr sz="1500" b="0">
+                <a:solidFill>
+                  <a:srgbClr val="212121"/>
+                </a:solidFill>
+                <a:latin typeface="Calibri"/>
+              </a:rPr>
+              <a:t>the size distribution of events at a given state, the object we fit</a:t>
+            </a:r>
+          </a:p>
+          <a:p>
+            <a:pPr>
               <a:spcAft>
-                <a:spcPts val="800"/>
+                <a:spcPts val="1100"/>
               </a:spcAft>
-              <a:buChar char="•"/>
             </a:pPr>
             <a:r>
+              <a:rPr sz="1600" b="0">
+                <a:solidFill>
+                  <a:srgbClr val="1E2761"/>
+                </a:solidFill>
+                <a:latin typeface="Cambria Math"/>
+              </a:rPr>
+              <a:t>s_c(u, τ)   </a:t>
+            </a:r>
+            <a:r>
               <a:rPr sz="1500" b="0">
                 <a:solidFill>
                   <a:srgbClr val="212121"/>
                 </a:solidFill>
                 <a:latin typeface="Calibri"/>
               </a:rPr>
-              <a:t>u = pe − u₀ (energy above the reference), τ = stress/10⁴</a:t>
-            </a:r>
-          </a:p>
-          <a:p>
-            <a:pPr marL="228600" indent="-228600">
+              <a:t>the ceiling: the largest event a state can produce; the only state-dependent parameter of the law</a:t>
+            </a:r>
+          </a:p>
+          <a:p>
+            <a:pPr>
               <a:spcAft>
-                <a:spcPts val="800"/>
+                <a:spcPts val="1100"/>
               </a:spcAft>
-              <a:buChar char="•"/>
             </a:pPr>
             <a:r>
+              <a:rPr sz="1600" b="0">
+                <a:solidFill>
+                  <a:srgbClr val="1E2761"/>
+                </a:solidFill>
+                <a:latin typeface="Cambria Math"/>
+              </a:rPr>
+              <a:t>k, m, ε   </a:t>
+            </a:r>
+            <a:r>
               <a:rPr sz="1500" b="0">
                 <a:solidFill>
                   <a:srgbClr val="212121"/>
                 </a:solidFill>
                 <a:latin typeface="Calibri"/>
               </a:rPr>
-              <a:t>Stress drop: a step with dτ &lt; 0, size s = −dτ;  aging: du &lt; 0 without a drop</a:t>
-            </a:r>
-          </a:p>
-          <a:p>
-            <a:pPr marL="228600" indent="-228600">
+              <a:t>the law’s three global constants (small-size exponent, ceiling exponent, rounding scale)</a:t>
+            </a:r>
+          </a:p>
+          <a:p>
+            <a:pPr>
               <a:spcAft>
-                <a:spcPts val="800"/>
+                <a:spcPts val="1100"/>
               </a:spcAft>
-              <a:buChar char="•"/>
             </a:pPr>
             <a:r>
+              <a:rPr sz="1600" b="0">
+                <a:solidFill>
+                  <a:srgbClr val="1E2761"/>
+                </a:solidFill>
+                <a:latin typeface="Cambria Math"/>
+              </a:rPr>
+              <a:t>q(u, τ)   </a:t>
+            </a:r>
+            <a:r>
               <a:rPr sz="1500" b="0">
                 <a:solidFill>
                   <a:srgbClr val="212121"/>
                 </a:solidFill>
                 <a:latin typeface="Calibri"/>
               </a:rPr>
-              <a:t>22 × 22 grid on (u,τ): inner 20 × 20 on the 0.2 to 99.8% quantiles plus a catch-all ring</a:t>
-            </a:r>
-          </a:p>
-        </p:txBody>
-      </p:sp>
-      <p:sp>
-        <p:nvSpPr>
-          <p:cNvPr id="13" name="Rounded Rectangle 12"/>
+              <a:t>plastic fraction of the strain rate, q = 1 − (dτ/dγ)/2μ; 0 is elastic, 1 is steady flow</a:t>
+            </a:r>
+          </a:p>
+          <a:p>
+            <a:pPr>
+              <a:spcAft>
+                <a:spcPts val="1100"/>
+              </a:spcAft>
+            </a:pPr>
+            <a:r>
+              <a:rPr sz="1600" b="0">
+                <a:solidFill>
+                  <a:srgbClr val="1E2761"/>
+                </a:solidFill>
+                <a:latin typeface="Cambria Math"/>
+              </a:rPr>
+              <a:t>aging event   </a:t>
+            </a:r>
+            <a:r>
+              <a:rPr sz="1500" b="0">
+                <a:solidFill>
+                  <a:srgbClr val="212121"/>
+                </a:solidFill>
+                <a:latin typeface="Calibri"/>
+              </a:rPr>
+              <a:t>a step where u drops but τ does not (105,188); it relaxes energy without releasing stress</a:t>
+            </a:r>
+          </a:p>
+        </p:txBody>
+      </p:sp>
+      <p:sp>
+        <p:nvSpPr>
+          <p:cNvPr id="5" name="Rounded Rectangle 4"/>
           <p:cNvSpPr/>
           <p:nvPr/>
         </p:nvSpPr>
@@ -6424,613 +3996,7 @@
                 </a:solidFill>
                 <a:latin typeface="Calibri"/>
               </a:rPr>
-              <a:t>The target this time is the probability distribution of yield events, P(s | u,τ), with its form discovered rather than assumed, and everything downstream is rebuilt from it.</a:t>
-            </a:r>
-          </a:p>
-        </p:txBody>
-      </p:sp>
-    </p:spTree>
-  </p:cSld>
-  <p:clrMapOvr>
-    <a:masterClrMapping/>
-  </p:clrMapOvr>
-</p:sld>
-</file>
-
-<file path=ppt/slides/slide20.xml><?xml version="1.0" encoding="utf-8"?>
-<p:sld xmlns:a="http://schemas.openxmlformats.org/drawingml/2006/main" xmlns:p="http://schemas.openxmlformats.org/presentationml/2006/main" xmlns:r="http://schemas.openxmlformats.org/officeDocument/2006/relationships">
-  <p:cSld>
-    <p:spTree>
-      <p:nvGrpSpPr>
-        <p:cNvPr id="1" name=""/>
-        <p:cNvGrpSpPr/>
-        <p:nvPr/>
-      </p:nvGrpSpPr>
-      <p:grpSpPr/>
-      <p:sp>
-        <p:nvSpPr>
-          <p:cNvPr id="2" name="TextBox 1"/>
-          <p:cNvSpPr txBox="1"/>
-          <p:nvPr/>
-        </p:nvSpPr>
-        <p:spPr>
-          <a:xfrm>
-            <a:off x="548640" y="292608"/>
-            <a:ext cx="11091672" cy="685800"/>
-          </a:xfrm>
-          <a:prstGeom prst="rect">
-            <a:avLst/>
-          </a:prstGeom>
-          <a:noFill/>
-        </p:spPr>
-        <p:txBody>
-          <a:bodyPr wrap="square" lIns="0" rIns="0" tIns="0" bIns="0">
-            <a:spAutoFit/>
-          </a:bodyPr>
-          <a:lstStyle/>
-          <a:p>
-            <a:r>
-              <a:rPr sz="3000" b="1">
-                <a:solidFill>
-                  <a:srgbClr val="1E2761"/>
-                </a:solidFill>
-                <a:latin typeface="Calibri"/>
-              </a:rPr>
-              <a:t>Recommended next steps</a:t>
-            </a:r>
-          </a:p>
-        </p:txBody>
-      </p:sp>
-      <p:sp>
-        <p:nvSpPr>
-          <p:cNvPr id="3" name="Oval 2"/>
-          <p:cNvSpPr/>
-          <p:nvPr/>
-        </p:nvSpPr>
-        <p:spPr>
-          <a:xfrm>
-            <a:off x="685800" y="1280160"/>
-            <a:ext cx="457200" cy="457200"/>
-          </a:xfrm>
-          <a:prstGeom prst="ellipse">
-            <a:avLst/>
-          </a:prstGeom>
-          <a:solidFill>
-            <a:srgbClr val="1E2761"/>
-          </a:solidFill>
-          <a:ln>
-            <a:noFill/>
-          </a:ln>
-          <a:effectLst/>
-        </p:spPr>
-        <p:style>
-          <a:lnRef idx="1">
-            <a:schemeClr val="accent1"/>
-          </a:lnRef>
-          <a:fillRef idx="3">
-            <a:schemeClr val="accent1"/>
-          </a:fillRef>
-          <a:effectRef idx="2">
-            <a:schemeClr val="accent1"/>
-          </a:effectRef>
-          <a:fontRef idx="minor">
-            <a:schemeClr val="lt1"/>
-          </a:fontRef>
-        </p:style>
-        <p:txBody>
-          <a:bodyPr rtlCol="0" anchor="ctr" lIns="0" rIns="0"/>
-          <a:lstStyle/>
-          <a:p>
-            <a:pPr algn="ctr"/>
-            <a:r>
-              <a:rPr sz="1500" b="1">
-                <a:solidFill>
-                  <a:srgbClr val="FFFFFF"/>
-                </a:solidFill>
-                <a:latin typeface="Calibri"/>
-              </a:rPr>
-              <a:t>1</a:t>
-            </a:r>
-          </a:p>
-        </p:txBody>
-      </p:sp>
-      <p:sp>
-        <p:nvSpPr>
-          <p:cNvPr id="4" name="TextBox 3"/>
-          <p:cNvSpPr txBox="1"/>
-          <p:nvPr/>
-        </p:nvSpPr>
-        <p:spPr>
-          <a:xfrm>
-            <a:off x="1371600" y="1234440"/>
-            <a:ext cx="10241280" cy="868680"/>
-          </a:xfrm>
-          <a:prstGeom prst="rect">
-            <a:avLst/>
-          </a:prstGeom>
-          <a:noFill/>
-        </p:spPr>
-        <p:txBody>
-          <a:bodyPr wrap="square" lIns="0" rIns="0" tIns="0" bIns="0">
-            <a:spAutoFit/>
-          </a:bodyPr>
-          <a:lstStyle/>
-          <a:p>
-            <a:r>
-              <a:rPr sz="1500" b="1">
-                <a:solidFill>
-                  <a:srgbClr val="1E2761"/>
-                </a:solidFill>
-                <a:latin typeface="Calibri"/>
-              </a:rPr>
-              <a:t>A per-step structural observable from the MD</a:t>
-            </a:r>
-          </a:p>
-          <a:p>
-            <a:r>
-              <a:rPr sz="1300" b="0">
-                <a:solidFill>
-                  <a:srgbClr val="212121"/>
-                </a:solidFill>
-                <a:latin typeface="Calibri"/>
-              </a:rPr>
-              <a:t>written alongside pe (local order, soft modes): the one test is whether it absorbs the ceiling’s β = −0.117 while leaving the hazard’s β at zero; it is also the last lever on the variance gap</a:t>
-            </a:r>
-          </a:p>
-        </p:txBody>
-      </p:sp>
-      <p:sp>
-        <p:nvSpPr>
-          <p:cNvPr id="5" name="Oval 4"/>
-          <p:cNvSpPr/>
-          <p:nvPr/>
-        </p:nvSpPr>
-        <p:spPr>
-          <a:xfrm>
-            <a:off x="685800" y="2194560"/>
-            <a:ext cx="457200" cy="457200"/>
-          </a:xfrm>
-          <a:prstGeom prst="ellipse">
-            <a:avLst/>
-          </a:prstGeom>
-          <a:solidFill>
-            <a:srgbClr val="1E2761"/>
-          </a:solidFill>
-          <a:ln>
-            <a:noFill/>
-          </a:ln>
-          <a:effectLst/>
-        </p:spPr>
-        <p:style>
-          <a:lnRef idx="1">
-            <a:schemeClr val="accent1"/>
-          </a:lnRef>
-          <a:fillRef idx="3">
-            <a:schemeClr val="accent1"/>
-          </a:fillRef>
-          <a:effectRef idx="2">
-            <a:schemeClr val="accent1"/>
-          </a:effectRef>
-          <a:fontRef idx="minor">
-            <a:schemeClr val="lt1"/>
-          </a:fontRef>
-        </p:style>
-        <p:txBody>
-          <a:bodyPr rtlCol="0" anchor="ctr" lIns="0" rIns="0"/>
-          <a:lstStyle/>
-          <a:p>
-            <a:pPr algn="ctr"/>
-            <a:r>
-              <a:rPr sz="1500" b="1">
-                <a:solidFill>
-                  <a:srgbClr val="FFFFFF"/>
-                </a:solidFill>
-                <a:latin typeface="Calibri"/>
-              </a:rPr>
-              <a:t>2</a:t>
-            </a:r>
-          </a:p>
-        </p:txBody>
-      </p:sp>
-      <p:sp>
-        <p:nvSpPr>
-          <p:cNvPr id="6" name="TextBox 5"/>
-          <p:cNvSpPr txBox="1"/>
-          <p:nvPr/>
-        </p:nvSpPr>
-        <p:spPr>
-          <a:xfrm>
-            <a:off x="1371600" y="2148840"/>
-            <a:ext cx="10241280" cy="868680"/>
-          </a:xfrm>
-          <a:prstGeom prst="rect">
-            <a:avLst/>
-          </a:prstGeom>
-          <a:noFill/>
-        </p:spPr>
-        <p:txBody>
-          <a:bodyPr wrap="square" lIns="0" rIns="0" tIns="0" bIns="0">
-            <a:spAutoFit/>
-          </a:bodyPr>
-          <a:lstStyle/>
-          <a:p>
-            <a:r>
-              <a:rPr sz="1500" b="1">
-                <a:solidFill>
-                  <a:srgbClr val="1E2761"/>
-                </a:solidFill>
-                <a:latin typeface="Calibri"/>
-              </a:rPr>
-              <a:t>Runs past γ = 0.5</a:t>
-            </a:r>
-          </a:p>
-          <a:p>
-            <a:r>
-              <a:rPr sz="1300" b="0">
-                <a:solidFill>
-                  <a:srgbClr val="212121"/>
-                </a:solidFill>
-                <a:latin typeface="Calibri"/>
-              </a:rPr>
-              <a:t>one preparation to γ ≈ 2 settles whether the coupling memory relaxes like the ceiling memory, and whether preparations converge</a:t>
-            </a:r>
-          </a:p>
-        </p:txBody>
-      </p:sp>
-      <p:sp>
-        <p:nvSpPr>
-          <p:cNvPr id="7" name="Oval 6"/>
-          <p:cNvSpPr/>
-          <p:nvPr/>
-        </p:nvSpPr>
-        <p:spPr>
-          <a:xfrm>
-            <a:off x="685800" y="3108960"/>
-            <a:ext cx="457200" cy="457200"/>
-          </a:xfrm>
-          <a:prstGeom prst="ellipse">
-            <a:avLst/>
-          </a:prstGeom>
-          <a:solidFill>
-            <a:srgbClr val="1E2761"/>
-          </a:solidFill>
-          <a:ln>
-            <a:noFill/>
-          </a:ln>
-          <a:effectLst/>
-        </p:spPr>
-        <p:style>
-          <a:lnRef idx="1">
-            <a:schemeClr val="accent1"/>
-          </a:lnRef>
-          <a:fillRef idx="3">
-            <a:schemeClr val="accent1"/>
-          </a:fillRef>
-          <a:effectRef idx="2">
-            <a:schemeClr val="accent1"/>
-          </a:effectRef>
-          <a:fontRef idx="minor">
-            <a:schemeClr val="lt1"/>
-          </a:fontRef>
-        </p:style>
-        <p:txBody>
-          <a:bodyPr rtlCol="0" anchor="ctr" lIns="0" rIns="0"/>
-          <a:lstStyle/>
-          <a:p>
-            <a:pPr algn="ctr"/>
-            <a:r>
-              <a:rPr sz="1500" b="1">
-                <a:solidFill>
-                  <a:srgbClr val="FFFFFF"/>
-                </a:solidFill>
-                <a:latin typeface="Calibri"/>
-              </a:rPr>
-              <a:t>3</a:t>
-            </a:r>
-          </a:p>
-        </p:txBody>
-      </p:sp>
-      <p:sp>
-        <p:nvSpPr>
-          <p:cNvPr id="8" name="TextBox 7"/>
-          <p:cNvSpPr txBox="1"/>
-          <p:nvPr/>
-        </p:nvSpPr>
-        <p:spPr>
-          <a:xfrm>
-            <a:off x="1371600" y="3063240"/>
-            <a:ext cx="10241280" cy="868680"/>
-          </a:xfrm>
-          <a:prstGeom prst="rect">
-            <a:avLst/>
-          </a:prstGeom>
-          <a:noFill/>
-        </p:spPr>
-        <p:txBody>
-          <a:bodyPr wrap="square" lIns="0" rIns="0" tIns="0" bIns="0">
-            <a:spAutoFit/>
-          </a:bodyPr>
-          <a:lstStyle/>
-          <a:p>
-            <a:r>
-              <a:rPr sz="1500" b="1">
-                <a:solidFill>
-                  <a:srgbClr val="1E2761"/>
-                </a:solidFill>
-                <a:latin typeface="Calibri"/>
-              </a:rPr>
-              <a:t>System size N, ideally two sizes</a:t>
-            </a:r>
-          </a:p>
-          <a:p>
-            <a:r>
-              <a:rPr sz="1300" b="0">
-                <a:solidFill>
-                  <a:srgbClr val="212121"/>
-                </a:solidFill>
-                <a:latin typeface="Calibri"/>
-              </a:rPr>
-              <a:t>the finite-size reading of the ceiling s_c stands or falls with it</a:t>
-            </a:r>
-          </a:p>
-        </p:txBody>
-      </p:sp>
-      <p:sp>
-        <p:nvSpPr>
-          <p:cNvPr id="9" name="Oval 8"/>
-          <p:cNvSpPr/>
-          <p:nvPr/>
-        </p:nvSpPr>
-        <p:spPr>
-          <a:xfrm>
-            <a:off x="685800" y="4023359"/>
-            <a:ext cx="457200" cy="457200"/>
-          </a:xfrm>
-          <a:prstGeom prst="ellipse">
-            <a:avLst/>
-          </a:prstGeom>
-          <a:solidFill>
-            <a:srgbClr val="1E2761"/>
-          </a:solidFill>
-          <a:ln>
-            <a:noFill/>
-          </a:ln>
-          <a:effectLst/>
-        </p:spPr>
-        <p:style>
-          <a:lnRef idx="1">
-            <a:schemeClr val="accent1"/>
-          </a:lnRef>
-          <a:fillRef idx="3">
-            <a:schemeClr val="accent1"/>
-          </a:fillRef>
-          <a:effectRef idx="2">
-            <a:schemeClr val="accent1"/>
-          </a:effectRef>
-          <a:fontRef idx="minor">
-            <a:schemeClr val="lt1"/>
-          </a:fontRef>
-        </p:style>
-        <p:txBody>
-          <a:bodyPr rtlCol="0" anchor="ctr" lIns="0" rIns="0"/>
-          <a:lstStyle/>
-          <a:p>
-            <a:pPr algn="ctr"/>
-            <a:r>
-              <a:rPr sz="1500" b="1">
-                <a:solidFill>
-                  <a:srgbClr val="FFFFFF"/>
-                </a:solidFill>
-                <a:latin typeface="Calibri"/>
-              </a:rPr>
-              <a:t>4</a:t>
-            </a:r>
-          </a:p>
-        </p:txBody>
-      </p:sp>
-      <p:sp>
-        <p:nvSpPr>
-          <p:cNvPr id="10" name="TextBox 9"/>
-          <p:cNvSpPr txBox="1"/>
-          <p:nvPr/>
-        </p:nvSpPr>
-        <p:spPr>
-          <a:xfrm>
-            <a:off x="1371600" y="3977639"/>
-            <a:ext cx="10241280" cy="868680"/>
-          </a:xfrm>
-          <a:prstGeom prst="rect">
-            <a:avLst/>
-          </a:prstGeom>
-          <a:noFill/>
-        </p:spPr>
-        <p:txBody>
-          <a:bodyPr wrap="square" lIns="0" rIns="0" tIns="0" bIns="0">
-            <a:spAutoFit/>
-          </a:bodyPr>
-          <a:lstStyle/>
-          <a:p>
-            <a:r>
-              <a:rPr sz="1500" b="1">
-                <a:solidFill>
-                  <a:srgbClr val="1E2761"/>
-                </a:solidFill>
-                <a:latin typeface="Calibri"/>
-              </a:rPr>
-              <a:t>Reverse loading</a:t>
-            </a:r>
-          </a:p>
-          <a:p>
-            <a:r>
-              <a:rPr sz="1300" b="0">
-                <a:solidFill>
-                  <a:srgbClr val="212121"/>
-                </a:solidFill>
-                <a:latin typeface="Calibri"/>
-              </a:rPr>
-              <a:t>unchanged from the first pass; a parity test for a back-stress variable</a:t>
-            </a:r>
-          </a:p>
-        </p:txBody>
-      </p:sp>
-      <p:sp>
-        <p:nvSpPr>
-          <p:cNvPr id="11" name="Oval 10"/>
-          <p:cNvSpPr/>
-          <p:nvPr/>
-        </p:nvSpPr>
-        <p:spPr>
-          <a:xfrm>
-            <a:off x="685800" y="4937759"/>
-            <a:ext cx="457200" cy="457200"/>
-          </a:xfrm>
-          <a:prstGeom prst="ellipse">
-            <a:avLst/>
-          </a:prstGeom>
-          <a:solidFill>
-            <a:srgbClr val="1E2761"/>
-          </a:solidFill>
-          <a:ln>
-            <a:noFill/>
-          </a:ln>
-          <a:effectLst/>
-        </p:spPr>
-        <p:style>
-          <a:lnRef idx="1">
-            <a:schemeClr val="accent1"/>
-          </a:lnRef>
-          <a:fillRef idx="3">
-            <a:schemeClr val="accent1"/>
-          </a:fillRef>
-          <a:effectRef idx="2">
-            <a:schemeClr val="accent1"/>
-          </a:effectRef>
-          <a:fontRef idx="minor">
-            <a:schemeClr val="lt1"/>
-          </a:fontRef>
-        </p:style>
-        <p:txBody>
-          <a:bodyPr rtlCol="0" anchor="ctr" lIns="0" rIns="0"/>
-          <a:lstStyle/>
-          <a:p>
-            <a:pPr algn="ctr"/>
-            <a:r>
-              <a:rPr sz="1500" b="1">
-                <a:solidFill>
-                  <a:srgbClr val="FFFFFF"/>
-                </a:solidFill>
-                <a:latin typeface="Calibri"/>
-              </a:rPr>
-              <a:t>5</a:t>
-            </a:r>
-          </a:p>
-        </p:txBody>
-      </p:sp>
-      <p:sp>
-        <p:nvSpPr>
-          <p:cNvPr id="12" name="TextBox 11"/>
-          <p:cNvSpPr txBox="1"/>
-          <p:nvPr/>
-        </p:nvSpPr>
-        <p:spPr>
-          <a:xfrm>
-            <a:off x="1371600" y="4892040"/>
-            <a:ext cx="10241280" cy="868680"/>
-          </a:xfrm>
-          <a:prstGeom prst="rect">
-            <a:avLst/>
-          </a:prstGeom>
-          <a:noFill/>
-        </p:spPr>
-        <p:txBody>
-          <a:bodyPr wrap="square" lIns="0" rIns="0" tIns="0" bIns="0">
-            <a:spAutoFit/>
-          </a:bodyPr>
-          <a:lstStyle/>
-          <a:p>
-            <a:r>
-              <a:rPr sz="1500" b="1">
-                <a:solidFill>
-                  <a:srgbClr val="1E2761"/>
-                </a:solidFill>
-                <a:latin typeface="Calibri"/>
-              </a:rPr>
-              <a:t>Interim model</a:t>
-            </a:r>
-          </a:p>
-          <a:p>
-            <a:r>
-              <a:rPr sz="1300" b="0">
-                <a:solidFill>
-                  <a:srgbClr val="212121"/>
-                </a:solidFill>
-                <a:latin typeface="Calibri"/>
-              </a:rPr>
-              <a:t>the ceiling law with the one-parameter preparation memory and the aftershock hazard: the yield strength of a glass from its preparation history, to a few percent</a:t>
-            </a:r>
-          </a:p>
-        </p:txBody>
-      </p:sp>
-      <p:sp>
-        <p:nvSpPr>
-          <p:cNvPr id="13" name="Rounded Rectangle 12"/>
-          <p:cNvSpPr/>
-          <p:nvPr/>
-        </p:nvSpPr>
-        <p:spPr>
-          <a:xfrm>
-            <a:off x="548640" y="6053328"/>
-            <a:ext cx="11091672" cy="566928"/>
-          </a:xfrm>
-          <a:prstGeom prst="roundRect">
-            <a:avLst>
-              <a:gd name="adj" fmla="val 18000"/>
-            </a:avLst>
-          </a:prstGeom>
-          <a:solidFill>
-            <a:srgbClr val="F2F2F2"/>
-          </a:solidFill>
-          <a:ln>
-            <a:noFill/>
-          </a:ln>
-          <a:effectLst/>
-        </p:spPr>
-        <p:style>
-          <a:lnRef idx="1">
-            <a:schemeClr val="accent1"/>
-          </a:lnRef>
-          <a:fillRef idx="3">
-            <a:schemeClr val="accent1"/>
-          </a:fillRef>
-          <a:effectRef idx="2">
-            <a:schemeClr val="accent1"/>
-          </a:effectRef>
-          <a:fontRef idx="minor">
-            <a:schemeClr val="lt1"/>
-          </a:fontRef>
-        </p:style>
-        <p:txBody>
-          <a:bodyPr rtlCol="0" anchor="ctr" wrap="square" lIns="164592" rIns="164592" tIns="0" bIns="0"/>
-          <a:lstStyle/>
-          <a:p>
-            <a:pPr algn="ctr"/>
-            <a:r>
-              <a:rPr sz="1350" b="1">
-                <a:solidFill>
-                  <a:srgbClr val="1E2761"/>
-                </a:solidFill>
-                <a:latin typeface="Calibri"/>
-              </a:rPr>
-              <a:t>Takeaway: </a:t>
-            </a:r>
-            <a:r>
-              <a:rPr sz="1350" b="0">
-                <a:solidFill>
-                  <a:srgbClr val="212121"/>
-                </a:solidFill>
-                <a:latin typeface="Calibri"/>
-              </a:rPr>
-              <a:t>Everything here is regenerated from the raw data by pipeline/run_all.sh (43 min); Figures 1 to 22 and the README carry the details.</a:t>
+              <a:t>Each AQS step is either an elastic increment or an event. The model needs the drift, the hazard, and the size distribution of events; the last is the one we fit.</a:t>
             </a:r>
           </a:p>
         </p:txBody>
@@ -7082,7 +4048,7 @@
                 </a:solidFill>
                 <a:latin typeface="Calibri"/>
               </a:rPr>
-              <a:t>Framework: the step process as drift + jumps</a:t>
+              <a:t>The symbolic-regression library  (library/symreg.py)</a:t>
             </a:r>
           </a:p>
         </p:txBody>
@@ -7121,7 +4087,7 @@
                 </a:solidFill>
                 <a:latin typeface="Calibri"/>
               </a:rPr>
-              <a:t>Three fields measured directly, per cell</a:t>
+              <a:t>What it does</a:t>
             </a:r>
           </a:p>
           <a:p>
@@ -7138,7 +4104,7 @@
                 </a:solidFill>
                 <a:latin typeface="Calibri"/>
               </a:rPr>
-              <a:t>Elastic drift 2μ(u,τ), and the energy drift on quiet steps</a:t>
+              <a:t>Given points (x, y), it searches for a formula y = a·f(x) + b over a grammar of operators (exp, log, 1/x, x², √x, and + − × ÷) with up to two fitted constants inside f</a:t>
             </a:r>
           </a:p>
           <a:p>
@@ -7155,7 +4121,7 @@
                 </a:solidFill>
                 <a:latin typeface="Calibri"/>
               </a:rPr>
-              <a:t>Event hazard p(u,τ): fraction of steps that drop (median 0.32% per step)</a:t>
+              <a:t>For one-variable targets it enumerates every formula up to a complexity budget rather than sampling them, so "the search did not find X" is a checkable statement</a:t>
             </a:r>
           </a:p>
           <a:p>
@@ -7172,46 +4138,7 @@
                 </a:solidFill>
                 <a:latin typeface="Calibri"/>
               </a:rPr>
-              <a:t>Energy released per event: du = a + b·s + noise, per cell; an aging channel alongside</a:t>
-            </a:r>
-          </a:p>
-        </p:txBody>
-      </p:sp>
-      <p:sp>
-        <p:nvSpPr>
-          <p:cNvPr id="4" name="TextBox 3"/>
-          <p:cNvSpPr txBox="1"/>
-          <p:nvPr/>
-        </p:nvSpPr>
-        <p:spPr>
-          <a:xfrm>
-            <a:off x="6355080" y="1234440"/>
-            <a:ext cx="5303520" cy="4480560"/>
-          </a:xfrm>
-          <a:prstGeom prst="rect">
-            <a:avLst/>
-          </a:prstGeom>
-          <a:noFill/>
-        </p:spPr>
-        <p:txBody>
-          <a:bodyPr wrap="square" lIns="0" rIns="0" tIns="0" bIns="0">
-            <a:spAutoFit/>
-          </a:bodyPr>
-          <a:lstStyle/>
-          <a:p>
-            <a:pPr>
-              <a:spcAft>
-                <a:spcPts val="600"/>
-              </a:spcAft>
-            </a:pPr>
-            <a:r>
-              <a:rPr sz="1600" b="1">
-                <a:solidFill>
-                  <a:srgbClr val="1E2761"/>
-                </a:solidFill>
-                <a:latin typeface="Calibri"/>
-              </a:rPr>
-              <a:t>One law to discover</a:t>
+              <a:t>It returns the exact Pareto front: the best misfit at each complexity. The form at the knee is the candidate</a:t>
             </a:r>
           </a:p>
           <a:p>
@@ -7228,7 +4155,46 @@
                 </a:solidFill>
                 <a:latin typeface="Calibri"/>
               </a:rPr>
-              <a:t>The size distribution P(s | u,τ): four decades of s, 187k events</a:t>
+              <a:t>Physics is imposed as a filter, not a prior: here, only densities that decrease with s are admitted</a:t>
+            </a:r>
+          </a:p>
+        </p:txBody>
+      </p:sp>
+      <p:sp>
+        <p:nvSpPr>
+          <p:cNvPr id="4" name="TextBox 3"/>
+          <p:cNvSpPr txBox="1"/>
+          <p:nvPr/>
+        </p:nvSpPr>
+        <p:spPr>
+          <a:xfrm>
+            <a:off x="6355080" y="1234440"/>
+            <a:ext cx="5303520" cy="4480560"/>
+          </a:xfrm>
+          <a:prstGeom prst="rect">
+            <a:avLst/>
+          </a:prstGeom>
+          <a:noFill/>
+        </p:spPr>
+        <p:txBody>
+          <a:bodyPr wrap="square" lIns="0" rIns="0" tIns="0" bIns="0">
+            <a:spAutoFit/>
+          </a:bodyPr>
+          <a:lstStyle/>
+          <a:p>
+            <a:pPr>
+              <a:spcAft>
+                <a:spcPts val="600"/>
+              </a:spcAft>
+            </a:pPr>
+            <a:r>
+              <a:rPr sz="1600" b="1">
+                <a:solidFill>
+                  <a:srgbClr val="1E2761"/>
+                </a:solidFill>
+                <a:latin typeface="Calibri"/>
+              </a:rPr>
+              <a:t>How it was used here</a:t>
             </a:r>
           </a:p>
           <a:p>
@@ -7245,7 +4211,7 @@
                 </a:solidFill>
                 <a:latin typeface="Calibri"/>
               </a:rPr>
-              <a:t>First pass assumed a truncated power law (TPL); this pass asks the data for the form</a:t>
+              <a:t>Target: the binned log-density ln ρ(s) of event sizes in one grid cell, 19 log bins with Poisson error bars</a:t>
             </a:r>
           </a:p>
           <a:p>
@@ -7262,7 +4228,41 @@
                 </a:solidFill>
                 <a:latin typeface="Calibri"/>
               </a:rPr>
-              <a:t>Everything downstream (mean sizes, the plastic-rate field q, full synthetic stress-strain curves) is then derived from the fitted law and compared with its measured counterpart</a:t>
+              <a:t>Run on 12 cells spanning the state plane (700 to 7,600 events each), plus variants with unweighted bins and a wider size window</a:t>
+            </a:r>
+          </a:p>
+          <a:p>
+            <a:pPr marL="228600" indent="-228600">
+              <a:spcAft>
+                <a:spcPts val="800"/>
+              </a:spcAft>
+              <a:buChar char="•"/>
+            </a:pPr>
+            <a:r>
+              <a:rPr sz="1500" b="0">
+                <a:solidFill>
+                  <a:srgbClr val="212121"/>
+                </a:solidFill>
+                <a:latin typeface="Calibri"/>
+              </a:rPr>
+              <a:t>Budget: 624,936 formula trees per cell at complexity 8, about 10,300 distinct admissible functions; one audit run at complexity 9 (4.5 million trees) found nothing new</a:t>
+            </a:r>
+          </a:p>
+          <a:p>
+            <a:pPr marL="228600" indent="-228600">
+              <a:spcAft>
+                <a:spcPts val="800"/>
+              </a:spcAft>
+              <a:buChar char="•"/>
+            </a:pPr>
+            <a:r>
+              <a:rPr sz="1500" b="0">
+                <a:solidFill>
+                  <a:srgbClr val="212121"/>
+                </a:solidFill>
+                <a:latin typeface="Calibri"/>
+              </a:rPr>
+              <a:t>The search only proposes forms. Each candidate was then turned into a normalized density and judged by per-event maximum likelihood (AIC and trajectory-blocked cross-validation)</a:t>
             </a:r>
           </a:p>
         </p:txBody>
@@ -7326,7 +4326,7 @@
                 </a:solidFill>
                 <a:latin typeface="Calibri"/>
               </a:rPr>
-              <a:t>Where derived and measured agree, the law carries the physics; where they disagree, we say so.</a:t>
+              <a:t>The search is exhaustive and the selection is by likelihood, so the discovered form is neither a lucky draw nor a binning artifact.</a:t>
             </a:r>
           </a:p>
         </p:txBody>
@@ -7378,7 +4378,7 @@
                 </a:solidFill>
                 <a:latin typeface="Calibri"/>
               </a:rPr>
-              <a:t>Symbolic regression, built for scrutiny</a:t>
+              <a:t>The discovered law</a:t>
             </a:r>
           </a:p>
         </p:txBody>
@@ -7391,8 +4391,8 @@
         </p:nvSpPr>
         <p:spPr>
           <a:xfrm>
-            <a:off x="640080" y="1234440"/>
-            <a:ext cx="5394960" cy="4480560"/>
+            <a:off x="640080" y="1143000"/>
+            <a:ext cx="10972800" cy="640080"/>
           </a:xfrm>
           <a:prstGeom prst="rect">
             <a:avLst/>
@@ -7405,21 +4405,198 @@
           </a:bodyPr>
           <a:lstStyle/>
           <a:p>
+            <a:pPr algn="ctr"/>
+            <a:r>
+              <a:rPr sz="2400" b="0">
+                <a:solidFill>
+                  <a:srgbClr val="1E2761"/>
+                </a:solidFill>
+                <a:latin typeface="Cambria Math"/>
+              </a:rPr>
+              <a:t>P(s | u, τ)  =  (1/Z) · (s_c(u, τ) − s)ᵐ / (s + ε)ᵏ ,     0 &lt; s &lt; s_c</a:t>
+            </a:r>
+          </a:p>
+        </p:txBody>
+      </p:sp>
+      <p:sp>
+        <p:nvSpPr>
+          <p:cNvPr id="4" name="TextBox 3"/>
+          <p:cNvSpPr txBox="1"/>
+          <p:nvPr/>
+        </p:nvSpPr>
+        <p:spPr>
+          <a:xfrm>
+            <a:off x="640080" y="1783080"/>
+            <a:ext cx="10972800" cy="640080"/>
+          </a:xfrm>
+          <a:prstGeom prst="rect">
+            <a:avLst/>
+          </a:prstGeom>
+          <a:noFill/>
+        </p:spPr>
+        <p:txBody>
+          <a:bodyPr wrap="square" lIns="0" rIns="0" tIns="0" bIns="0">
+            <a:spAutoFit/>
+          </a:bodyPr>
+          <a:lstStyle/>
+          <a:p>
+            <a:pPr algn="ctr"/>
+            <a:r>
+              <a:rPr sz="1800" b="0">
+                <a:solidFill>
+                  <a:srgbClr val="6E7B85"/>
+                </a:solidFill>
+                <a:latin typeface="Cambria Math"/>
+              </a:rPr>
+              <a:t>k = 0.88,     m = 2.3,     ε = 2.8 × 10⁻⁵</a:t>
+            </a:r>
+          </a:p>
+        </p:txBody>
+      </p:sp>
+      <p:sp>
+        <p:nvSpPr>
+          <p:cNvPr id="5" name="TextBox 4"/>
+          <p:cNvSpPr txBox="1"/>
+          <p:nvPr/>
+        </p:nvSpPr>
+        <p:spPr>
+          <a:xfrm>
+            <a:off x="640080" y="2514600"/>
+            <a:ext cx="10972800" cy="4114800"/>
+          </a:xfrm>
+          <a:prstGeom prst="rect">
+            <a:avLst/>
+          </a:prstGeom>
+          <a:noFill/>
+        </p:spPr>
+        <p:txBody>
+          <a:bodyPr wrap="square" lIns="0" rIns="0" tIns="0" bIns="0">
+            <a:spAutoFit/>
+          </a:bodyPr>
+          <a:lstStyle/>
+          <a:p>
             <a:pPr>
               <a:spcAft>
-                <a:spcPts val="600"/>
+                <a:spcPts val="1100"/>
               </a:spcAft>
             </a:pPr>
             <a:r>
-              <a:rPr sz="1600" b="1">
+              <a:rPr sz="1500" b="0">
                 <a:solidFill>
                   <a:srgbClr val="1E2761"/>
                 </a:solidFill>
-                <a:latin typeface="Calibri"/>
-              </a:rPr>
-              <a:t>Engine  (library/symreg.py)</a:t>
-            </a:r>
-          </a:p>
+                <a:latin typeface="Cambria Math"/>
+              </a:rPr>
+              <a:t>(s + ε)⁻ᵏ   </a:t>
+            </a:r>
+            <a:r>
+              <a:rPr sz="1400" b="0">
+                <a:solidFill>
+                  <a:srgbClr val="212121"/>
+                </a:solidFill>
+                <a:latin typeface="Calibri"/>
+              </a:rPr>
+              <a:t>a power-law decay in size with exponent k ≈ 0.9: small events are far more common than large ones. The rounding scale ε flattens it below about 3 × 10⁻⁵, so the law describes every recorded event with no lower cutoff</a:t>
+            </a:r>
+          </a:p>
+          <a:p>
+            <a:pPr>
+              <a:spcAft>
+                <a:spcPts val="1100"/>
+              </a:spcAft>
+            </a:pPr>
+            <a:r>
+              <a:rPr sz="1500" b="0">
+                <a:solidFill>
+                  <a:srgbClr val="1E2761"/>
+                </a:solidFill>
+                <a:latin typeface="Cambria Math"/>
+              </a:rPr>
+              <a:t>(s_c − s)ᵐ   </a:t>
+            </a:r>
+            <a:r>
+              <a:rPr sz="1400" b="0">
+                <a:solidFill>
+                  <a:srgbClr val="212121"/>
+                </a:solidFill>
+                <a:latin typeface="Calibri"/>
+              </a:rPr>
+              <a:t>a hard ceiling: the density goes to zero at s = s_c and no event larger than s_c is possible. With m ≈ 2 it vanishes gently, so the largest observed event sits a few percent below the ceiling</a:t>
+            </a:r>
+          </a:p>
+          <a:p>
+            <a:pPr>
+              <a:spcAft>
+                <a:spcPts val="1100"/>
+              </a:spcAft>
+            </a:pPr>
+            <a:r>
+              <a:rPr sz="1500" b="0">
+                <a:solidFill>
+                  <a:srgbClr val="1E2761"/>
+                </a:solidFill>
+                <a:latin typeface="Cambria Math"/>
+              </a:rPr>
+              <a:t>s_c(u, τ)   </a:t>
+            </a:r>
+            <a:r>
+              <a:rPr sz="1400" b="0">
+                <a:solidFill>
+                  <a:srgbClr val="212121"/>
+                </a:solidFill>
+                <a:latin typeface="Calibri"/>
+              </a:rPr>
+              <a:t>the only place the state enters. It ranges 146× over the plane, from 0.02 in the cold, low-stress corner to 3 in the flowing state, and it factorizes, ln s_c ≈ (u-part) + (τ-part), at 95.5% of the variance</a:t>
+            </a:r>
+          </a:p>
+          <a:p>
+            <a:pPr>
+              <a:spcAft>
+                <a:spcPts val="1100"/>
+              </a:spcAft>
+            </a:pPr>
+            <a:r>
+              <a:rPr sz="1500" b="0">
+                <a:solidFill>
+                  <a:srgbClr val="1E2761"/>
+                </a:solidFill>
+                <a:latin typeface="Cambria Math"/>
+              </a:rPr>
+              <a:t>Z   </a:t>
+            </a:r>
+            <a:r>
+              <a:rPr sz="1400" b="0">
+                <a:solidFill>
+                  <a:srgbClr val="212121"/>
+                </a:solidFill>
+                <a:latin typeface="Calibri"/>
+              </a:rPr>
+              <a:t>the normalization, computed numerically</a:t>
+            </a:r>
+          </a:p>
+        </p:txBody>
+      </p:sp>
+      <p:sp>
+        <p:nvSpPr>
+          <p:cNvPr id="6" name="TextBox 5"/>
+          <p:cNvSpPr txBox="1"/>
+          <p:nvPr/>
+        </p:nvSpPr>
+        <p:spPr>
+          <a:xfrm>
+            <a:off x="640080" y="5074920"/>
+            <a:ext cx="10972800" cy="822960"/>
+          </a:xfrm>
+          <a:prstGeom prst="rect">
+            <a:avLst/>
+          </a:prstGeom>
+          <a:noFill/>
+        </p:spPr>
+        <p:txBody>
+          <a:bodyPr wrap="square" lIns="0" rIns="0" tIns="0" bIns="0">
+            <a:spAutoFit/>
+          </a:bodyPr>
+          <a:lstStyle/>
           <a:p>
             <a:pPr marL="228600" indent="-228600">
               <a:spcAft>
@@ -7428,178 +4605,20 @@
               <a:buChar char="•"/>
             </a:pPr>
             <a:r>
-              <a:rPr sz="1500" b="0">
+              <a:rPr sz="1300" b="0">
                 <a:solidFill>
                   <a:srgbClr val="212121"/>
                 </a:solidFill>
                 <a:latin typeface="Calibri"/>
               </a:rPr>
-              <a:t>Exhaustive enumeration of expression trees: unary exp, log, 1/x, x², √x, −x; binary + − × ÷</a:t>
-            </a:r>
-          </a:p>
-          <a:p>
-            <a:pPr marL="228600" indent="-228600">
-              <a:spcAft>
-                <a:spcPts val="800"/>
-              </a:spcAft>
-              <a:buChar char="•"/>
-            </a:pPr>
-            <a:r>
-              <a:rPr sz="1500" b="0">
-                <a:solidFill>
-                  <a:srgbClr val="212121"/>
-                </a:solidFill>
-                <a:latin typeface="Calibri"/>
-              </a:rPr>
-              <a:t>Up to two constants fitted inside the nonlinearity (Levenberg-Marquardt, 4 restarts); outer affine profiled out</a:t>
-            </a:r>
-          </a:p>
-          <a:p>
-            <a:pPr marL="228600" indent="-228600">
-              <a:spcAft>
-                <a:spcPts val="800"/>
-              </a:spcAft>
-              <a:buChar char="•"/>
-            </a:pPr>
-            <a:r>
-              <a:rPr sz="1500" b="0">
-                <a:solidFill>
-                  <a:srgbClr val="212121"/>
-                </a:solidFill>
-                <a:latin typeface="Calibri"/>
-              </a:rPr>
-              <a:t>Numerical fingerprint dedup; hard admissibility (monotone decreasing); exact Pareto fronts</a:t>
-            </a:r>
-          </a:p>
-          <a:p>
-            <a:pPr marL="228600" indent="-228600">
-              <a:spcAft>
-                <a:spcPts val="800"/>
-              </a:spcAft>
-              <a:buChar char="•"/>
-            </a:pPr>
-            <a:r>
-              <a:rPr sz="1500" b="0">
-                <a:solidFill>
-                  <a:srgbClr val="212121"/>
-                </a:solidFill>
-                <a:latin typeface="Calibri"/>
-              </a:rPr>
-              <a:t>Complexity ≤ 8: 624,936 trees → ~14,000 distinct functions → ~10,300 admissible per cell</a:t>
-            </a:r>
-          </a:p>
-        </p:txBody>
-      </p:sp>
-      <p:sp>
-        <p:nvSpPr>
-          <p:cNvPr id="4" name="TextBox 3"/>
-          <p:cNvSpPr txBox="1"/>
-          <p:nvPr/>
-        </p:nvSpPr>
-        <p:spPr>
-          <a:xfrm>
-            <a:off x="6355080" y="1234440"/>
-            <a:ext cx="5303520" cy="4480560"/>
-          </a:xfrm>
-          <a:prstGeom prst="rect">
-            <a:avLst/>
-          </a:prstGeom>
-          <a:noFill/>
-        </p:spPr>
-        <p:txBody>
-          <a:bodyPr wrap="square" lIns="0" rIns="0" tIns="0" bIns="0">
-            <a:spAutoFit/>
-          </a:bodyPr>
-          <a:lstStyle/>
-          <a:p>
-            <a:pPr>
-              <a:spcAft>
-                <a:spcPts val="600"/>
-              </a:spcAft>
-            </a:pPr>
-            <a:r>
-              <a:rPr sz="1600" b="1">
-                <a:solidFill>
-                  <a:srgbClr val="1E2761"/>
-                </a:solidFill>
-                <a:latin typeface="Calibri"/>
-              </a:rPr>
-              <a:t>Protocol on the distributions</a:t>
-            </a:r>
-          </a:p>
-          <a:p>
-            <a:pPr marL="228600" indent="-228600">
-              <a:spcAft>
-                <a:spcPts val="800"/>
-              </a:spcAft>
-              <a:buChar char="•"/>
-            </a:pPr>
-            <a:r>
-              <a:rPr sz="1500" b="0">
-                <a:solidFill>
-                  <a:srgbClr val="212121"/>
-                </a:solidFill>
-                <a:latin typeface="Calibri"/>
-              </a:rPr>
-              <a:t>Target: binned ln ρ(s) per cell, 19 log bins, Poisson errors</a:t>
-            </a:r>
-          </a:p>
-          <a:p>
-            <a:pPr marL="228600" indent="-228600">
-              <a:spcAft>
-                <a:spcPts val="800"/>
-              </a:spcAft>
-              <a:buChar char="•"/>
-            </a:pPr>
-            <a:r>
-              <a:rPr sz="1500" b="0">
-                <a:solidFill>
-                  <a:srgbClr val="212121"/>
-                </a:solidFill>
-                <a:latin typeface="Calibri"/>
-              </a:rPr>
-              <a:t>12 cells (700 to 7,600 events) spanning the plane, plus unweighted-bin and wider-window variants</a:t>
-            </a:r>
-          </a:p>
-          <a:p>
-            <a:pPr marL="228600" indent="-228600">
-              <a:spcAft>
-                <a:spcPts val="800"/>
-              </a:spcAft>
-              <a:buChar char="•"/>
-            </a:pPr>
-            <a:r>
-              <a:rPr sz="1500" b="0">
-                <a:solidFill>
-                  <a:srgbClr val="212121"/>
-                </a:solidFill>
-                <a:latin typeface="Calibri"/>
-              </a:rPr>
-              <a:t>Audit: the largest cell pushed to complexity 9 (4,505,024 trees, 48,725 admissible); no new form appears</a:t>
-            </a:r>
-          </a:p>
-          <a:p>
-            <a:pPr marL="228600" indent="-228600">
-              <a:spcAft>
-                <a:spcPts val="800"/>
-              </a:spcAft>
-              <a:buChar char="•"/>
-            </a:pPr>
-            <a:r>
-              <a:rPr sz="1500" b="0">
-                <a:solidFill>
-                  <a:srgbClr val="212121"/>
-                </a:solidFill>
-                <a:latin typeface="Calibri"/>
-              </a:rPr>
-              <a:t>The search proposes forms; a per-event likelihood chooses among them (next slides)</a:t>
-            </a:r>
-          </a:p>
-        </p:txBody>
-      </p:sp>
-      <p:sp>
-        <p:nvSpPr>
-          <p:cNvPr id="5" name="Rounded Rectangle 4"/>
+              <a:t>Compared with the usual truncated power law s⁻ᵏ e^(−s/s*): that form suppresses large events with an exponential tail but never forbids them. The search never placed it on a Pareto front, and the ceiling form beat it in every likelihood contest that follows</a:t>
+            </a:r>
+          </a:p>
+        </p:txBody>
+      </p:sp>
+      <p:sp>
+        <p:nvSpPr>
+          <p:cNvPr id="7" name="Rounded Rectangle 6"/>
           <p:cNvSpPr/>
           <p:nvPr/>
         </p:nvSpPr>
@@ -7656,7 +4675,7 @@
                 </a:solidFill>
                 <a:latin typeface="Calibri"/>
               </a:rPr>
-              <a:t>Search the whole grammar, admit only monotone-decreasing densities, and let a per-event likelihood adjudicate among the Pareto knees.</a:t>
+              <a:t>Three global constants and one state-dependent number. Everything about the state, and (later) about the preparation history, enters through the ceiling s_c.</a:t>
             </a:r>
           </a:p>
         </p:txBody>
@@ -7708,7 +4727,7 @@
                 </a:solidFill>
                 <a:latin typeface="Calibri"/>
               </a:rPr>
-              <a:t>The discovered law, in one cell</a:t>
+              <a:t>How the law performs: one cell, three candidate laws</a:t>
             </a:r>
           </a:p>
         </p:txBody>
@@ -7766,13 +4785,13 @@
               <a:buChar char="•"/>
             </a:pPr>
             <a:r>
-              <a:rPr sz="1350" b="0">
+              <a:rPr sz="1300" b="0">
                 <a:solidFill>
                   <a:srgbClr val="212121"/>
                 </a:solidFill>
                 <a:latin typeface="Calibri"/>
               </a:rPr>
-              <a:t>The SR knee in the largest cells is log(1/(s+ε) − C), which rearranges to a bounded-support form:</a:t>
+              <a:t>One well-populated cell (6,706 events), five decades of event size. The inset marks the cell on the state plane</a:t>
             </a:r>
           </a:p>
           <a:p>
@@ -7783,13 +4802,13 @@
               <a:buChar char="•"/>
             </a:pPr>
             <a:r>
-              <a:rPr sz="1350" b="0">
+              <a:rPr sz="1300" b="0">
                 <a:solidFill>
                   <a:srgbClr val="212121"/>
                 </a:solidFill>
                 <a:latin typeface="Calibri"/>
               </a:rPr>
-              <a:t>P(s | u,τ) ∝ (s_c − s)ᵐ / (s + ε)ᵏ  on 0 &lt; s &lt; s_c</a:t>
+              <a:t>Black: the measured density. Red: the ceiling law. Blue dashed: the best truncated power law (TPL). Green dotted: the best lognormal</a:t>
             </a:r>
           </a:p>
           <a:p>
@@ -7800,13 +4819,13 @@
               <a:buChar char="•"/>
             </a:pPr>
             <a:r>
-              <a:rPr sz="1350" b="0">
+              <a:rPr sz="1300" b="0">
                 <a:solidFill>
                   <a:srgbClr val="212121"/>
                 </a:solidFill>
                 <a:latin typeface="Calibri"/>
               </a:rPr>
-              <a:t>k = 0.88: the small-event power law;  ε = 2.8×10⁻⁵: rounds it off below the resolution</a:t>
+              <a:t>All three are maximum-likelihood fits of proper densities on the same events</a:t>
             </a:r>
           </a:p>
           <a:p>
@@ -7817,13 +4836,13 @@
               <a:buChar char="•"/>
             </a:pPr>
             <a:r>
-              <a:rPr sz="1350" b="0">
+              <a:rPr sz="1300" b="0">
                 <a:solidFill>
                   <a:srgbClr val="212121"/>
                 </a:solidFill>
                 <a:latin typeface="Calibri"/>
               </a:rPr>
-              <a:t>s_c(u,τ): a hard ceiling, the largest event the state can produce; the density vanishes like (s_c − s)ᵐ, m ≈ 2.3</a:t>
+              <a:t>Only the ceiling law gets both ends: the flattening below 3 × 10⁻⁵ and the abrupt stop at the dotted line (s_c). The TPL tail decays too softly and overshoots</a:t>
             </a:r>
           </a:p>
           <a:p>
@@ -7834,13 +4853,13 @@
               <a:buChar char="•"/>
             </a:pPr>
             <a:r>
-              <a:rPr sz="1350" b="0">
+              <a:rPr sz="1300" b="0">
                 <a:solidFill>
                   <a:srgbClr val="212121"/>
                 </a:solidFill>
                 <a:latin typeface="Calibri"/>
               </a:rPr>
-              <a:t>The TPL’s exponential tail merely suppresses large events; the ceiling forbids them</a:t>
+              <a:t>Over the full range the ceiling law beats the TPL by ΔAIC 200 to 345 in this kind of cell</a:t>
             </a:r>
           </a:p>
         </p:txBody>
@@ -7904,7 +4923,7 @@
                 </a:solidFill>
                 <a:latin typeface="Calibri"/>
               </a:rPr>
-              <a:t>Four decades of event size in one cell follow one four-parameter law whose only state-dependent parameter is the ceiling s_c.</a:t>
+              <a:t>At the level of individual events, the data terminate where the ceiling law says they should and where the TPL says they should not.</a:t>
             </a:r>
           </a:p>
         </p:txBody>
@@ -7956,7 +4975,7 @@
                 </a:solidFill>
                 <a:latin typeface="Calibri"/>
               </a:rPr>
-              <a:t>One shape everywhere; the fronts that found it</a:t>
+              <a:t>How the law performs: every cell, and the falsifiability control</a:t>
             </a:r>
           </a:p>
         </p:txBody>
@@ -7977,8 +4996,8 @@
         </p:blipFill>
         <p:spPr>
           <a:xfrm>
-            <a:off x="524021" y="1188720"/>
-            <a:ext cx="5444196" cy="3931920"/>
+            <a:off x="650630" y="1188720"/>
+            <a:ext cx="5190978" cy="3749039"/>
           </a:xfrm>
           <a:prstGeom prst="rect">
             <a:avLst/>
@@ -7987,7 +5006,7 @@
       </p:pic>
       <p:pic>
         <p:nvPicPr>
-          <p:cNvPr id="4" name="Picture 3" descr="fig03_pareto.png"/>
+          <p:cNvPr id="4" name="Picture 3" descr="fig04_falsifiability.png"/>
           <p:cNvPicPr>
             <a:picLocks noChangeAspect="1"/>
           </p:cNvPicPr>
@@ -8001,8 +5020,8 @@
         </p:blipFill>
         <p:spPr>
           <a:xfrm>
-            <a:off x="6220733" y="1188720"/>
-            <a:ext cx="5444196" cy="3931920"/>
+            <a:off x="6347342" y="1188720"/>
+            <a:ext cx="5190978" cy="3749039"/>
           </a:xfrm>
           <a:prstGeom prst="rect">
             <a:avLst/>
@@ -8017,8 +5036,8 @@
         </p:nvSpPr>
         <p:spPr>
           <a:xfrm>
-            <a:off x="640080" y="5230368"/>
-            <a:ext cx="10972800" cy="640080"/>
+            <a:off x="640080" y="5029200"/>
+            <a:ext cx="10972800" cy="914400"/>
           </a:xfrm>
           <a:prstGeom prst="rect">
             <a:avLst/>
@@ -8031,14 +5050,37 @@
           </a:bodyPr>
           <a:lstStyle/>
           <a:p>
-            <a:r>
-              <a:rPr sz="1300" b="0">
+            <a:pPr marL="228600" indent="-228600">
+              <a:spcAft>
+                <a:spcPts val="800"/>
+              </a:spcAft>
+              <a:buChar char="•"/>
+            </a:pPr>
+            <a:r>
+              <a:rPr sz="1250" b="0">
                 <a:solidFill>
                   <a:srgbClr val="212121"/>
                 </a:solidFill>
                 <a:latin typeface="Calibri"/>
               </a:rPr>
-              <a:t>Left: twelve cells spanning 100× in scale collapse onto one curve in s/s_c with global (k, m, ε).  Right: per-cell Pareto fronts (heights set by each cell’s own noise floor); orange, the complexity-9 audit run.</a:t>
+              <a:t>Left: twelve cells whose raw distributions differ by 100× in scale, replotted against ξ = (s+ε)/(s_c+ε) with the global (k, m, ε). They fall on one curve, including the bend into the ceiling</a:t>
+            </a:r>
+          </a:p>
+          <a:p>
+            <a:pPr marL="228600" indent="-228600">
+              <a:spcAft>
+                <a:spcPts val="800"/>
+              </a:spcAft>
+              <a:buChar char="•"/>
+            </a:pPr>
+            <a:r>
+              <a:rPr sz="1250" b="0">
+                <a:solidFill>
+                  <a:srgbClr val="212121"/>
+                </a:solidFill>
+                <a:latin typeface="Calibri"/>
+              </a:rPr>
+              <a:t>Right: the same fitting machinery on synthetic catalogs. TPL-generated data return a TPL verdict (5 of 5); ceiling-generated data return the ceiling (5 of 5). The twelve measured cells sit on the ceiling side, one sparse cell a tie. In the eight largest cells the ceiling law wins AIC 8 of 8 (ΔAIC 67 to 120 over the TPL, 300 to 754 over the lognormal)</a:t>
             </a:r>
           </a:p>
         </p:txBody>
@@ -8102,7 +5144,7 @@
                 </a:solidFill>
                 <a:latin typeface="Calibri"/>
               </a:rPr>
-              <a:t>The state enters only through the ceiling: the shape is universal across the (u,τ) plane.</a:t>
+              <a:t>One shape everywhere, a discriminator that works in both directions, and the data on one side of it.</a:t>
             </a:r>
           </a:p>
         </p:txBody>
@@ -8154,14 +5196,14 @@
                 </a:solidFill>
                 <a:latin typeface="Calibri"/>
               </a:rPr>
-              <a:t>The likelihood chooses among the candidate forms</a:t>
+              <a:t>How the law performs: the plastic-rate field, rebuilt from it</a:t>
             </a:r>
           </a:p>
         </p:txBody>
       </p:sp>
       <p:pic>
         <p:nvPicPr>
-          <p:cNvPr id="3" name="Picture 2" descr="fig04_falsifiability.png"/>
+          <p:cNvPr id="3" name="Picture 2" descr="fig09_q_agreement.png"/>
           <p:cNvPicPr>
             <a:picLocks noChangeAspect="1"/>
           </p:cNvPicPr>
@@ -8175,8 +5217,8 @@
         </p:blipFill>
         <p:spPr>
           <a:xfrm>
-            <a:off x="524021" y="1234440"/>
-            <a:ext cx="6267156" cy="4526280"/>
+            <a:off x="891539" y="1234440"/>
+            <a:ext cx="5532120" cy="4526280"/>
           </a:xfrm>
           <a:prstGeom prst="rect">
             <a:avLst/>
@@ -8218,7 +5260,7 @@
                 </a:solidFill>
                 <a:latin typeface="Calibri"/>
               </a:rPr>
-              <a:t>Normalized maximum likelihood per cell, seven families, AIC and trajectory-blocked cross-validation</a:t>
+              <a:t>q(u, τ) was measured directly in the first pass, cell by cell, as 1 − (dτ/dγ)/2μ</a:t>
             </a:r>
           </a:p>
           <a:p>
@@ -8235,7 +5277,7 @@
                 </a:solidFill>
                 <a:latin typeface="Calibri"/>
               </a:rPr>
-              <a:t>The ceiling law wins 8 of 8 large cells: ΔAIC 67 to 120 over the TPL, 300 to 754 over the lognormal</a:t>
+              <a:t>From the law it is hazard × mean event size, with the mean taken from the fitted P(s | u, τ)</a:t>
             </a:r>
           </a:p>
           <a:p>
@@ -8252,7 +5294,7 @@
                 </a:solidFill>
                 <a:latin typeface="Calibri"/>
               </a:rPr>
-              <a:t>A binned-least-squares favourite (√log form) was an artifact of Poisson weighting: ΔAIC ≈ +20,000 under likelihood</a:t>
+              <a:t>Each dot is one cell over two decades of q. The band is the statistical noise floor of this grid, 17.5% from split-half ensembles</a:t>
             </a:r>
           </a:p>
           <a:p>
@@ -8269,7 +5311,7 @@
                 </a:solidFill>
                 <a:latin typeface="Calibri"/>
               </a:rPr>
-              <a:t>Synthetic control, both directions: TPL-generated catalogs return a TPL verdict 5/5; ceiling-generated return a ceiling verdict 5/5 with ε and s_c recovered to a few %</a:t>
+              <a:t>The rebuilt field lands at median +1.8% and RMS 17%: within the noise. A better law could not score better on this test</a:t>
             </a:r>
           </a:p>
           <a:p>
@@ -8286,7 +5328,7 @@
                 </a:solidFill>
                 <a:latin typeface="Calibri"/>
               </a:rPr>
-              <a:t>Sparse cells (&lt; 1,000 events) cannot tell a ceiling from an exponential tail</a:t>
+              <a:t>Its factor structure is the measured one too: both versions factorize at 96%, with the same SR knee and nearly the same constants</a:t>
             </a:r>
           </a:p>
         </p:txBody>
@@ -8350,7 +5392,7 @@
                 </a:solidFill>
                 <a:latin typeface="Calibri"/>
               </a:rPr>
-              <a:t>Per-event likelihood with falsifiability controls decides for the bounded-support law; the binned fit only proposed it.</a:t>
+              <a:t>The fitted law reproduces the central object of the first pass to within the data’s own noise.</a:t>
             </a:r>
           </a:p>
         </p:txBody>
@@ -8402,14 +5444,14 @@
                 </a:solidFill>
                 <a:latin typeface="Calibri"/>
               </a:rPr>
-              <a:t>The ceiling field s_c(u,τ)</a:t>
+              <a:t>Running the model with the discovered law</a:t>
             </a:r>
           </a:p>
         </p:txBody>
       </p:sp>
       <p:pic>
         <p:nvPicPr>
-          <p:cNvPr id="3" name="Picture 2" descr="fig05_ceiling_map.png"/>
+          <p:cNvPr id="3" name="Picture 2" descr="fig12_sim_stress.png"/>
           <p:cNvPicPr>
             <a:picLocks noChangeAspect="1"/>
           </p:cNvPicPr>
@@ -8423,8 +5465,8 @@
         </p:blipFill>
         <p:spPr>
           <a:xfrm>
-            <a:off x="524021" y="1188720"/>
-            <a:ext cx="5444196" cy="3931920"/>
+            <a:off x="578533" y="1188720"/>
+            <a:ext cx="5335172" cy="3749039"/>
           </a:xfrm>
           <a:prstGeom prst="rect">
             <a:avLst/>
@@ -8433,7 +5475,7 @@
       </p:pic>
       <p:pic>
         <p:nvPicPr>
-          <p:cNvPr id="4" name="Picture 3" descr="fig07_ceiling_memory.png"/>
+          <p:cNvPr id="4" name="Picture 3" descr="fig14_sim_peaks.png"/>
           <p:cNvPicPr>
             <a:picLocks noChangeAspect="1"/>
           </p:cNvPicPr>
@@ -8447,8 +5489,8 @@
         </p:blipFill>
         <p:spPr>
           <a:xfrm>
-            <a:off x="6612805" y="1188720"/>
-            <a:ext cx="4660053" cy="3931920"/>
+            <a:off x="6275245" y="1188720"/>
+            <a:ext cx="5335172" cy="3749039"/>
           </a:xfrm>
           <a:prstGeom prst="rect">
             <a:avLst/>
@@ -8463,8 +5505,8 @@
         </p:nvSpPr>
         <p:spPr>
           <a:xfrm>
-            <a:off x="640080" y="5230368"/>
-            <a:ext cx="10972800" cy="640080"/>
+            <a:off x="640080" y="5029200"/>
+            <a:ext cx="10972800" cy="914400"/>
           </a:xfrm>
           <a:prstGeom prst="rect">
             <a:avLst/>
@@ -8477,14 +5519,37 @@
           </a:bodyPr>
           <a:lstStyle/>
           <a:p>
-            <a:r>
-              <a:rPr sz="1300" b="0">
+            <a:pPr marL="228600" indent="-228600">
+              <a:spcAft>
+                <a:spcPts val="800"/>
+              </a:spcAft>
+              <a:buChar char="•"/>
+            </a:pPr>
+            <a:r>
+              <a:rPr sz="1250" b="0">
                 <a:solidFill>
                   <a:srgbClr val="212121"/>
                 </a:solidFill>
                 <a:latin typeface="Calibri"/>
               </a:rPr>
-              <a:t>Left: 277 cells, 146× in range (0.02 cold → 3.0 in the flowing state), bootstrap error 6.5%; rank-1 factorization Λ(u)·f(τ) carries 95.5% of the log-variance.  Right: refit by preparation at fixed cell; slow-cooled glass has a 1.71× higher ceiling than fast-cooled.</a:t>
+              <a:t>All 850 runs simulated forward from their measured initial states at Δγ = 10⁻⁵: elastic drift at 2μ, an event with probability p(u, τ), and the event size drawn from the law at that state</a:t>
+            </a:r>
+          </a:p>
+          <a:p>
+            <a:pPr marL="228600" indent="-228600">
+              <a:spcAft>
+                <a:spcPts val="800"/>
+              </a:spcAft>
+              <a:buChar char="•"/>
+            </a:pPr>
+            <a:r>
+              <a:rPr sz="1250" b="0">
+                <a:solidFill>
+                  <a:srgbClr val="212121"/>
+                </a:solidFill>
+                <a:latin typeface="Calibri"/>
+              </a:rPr>
+              <a:t>Left: stress-strain curves for the nine preparations, MD solid and model dashed. The elastic rise, the yield overshoot across 256× in cooling rate, the post-yield decay, and the flow stress (±5%) all come out. Right: the yield peaks, RMS 2.5% (worst rate 4.3%); the TPL arm gives 1.4% and resampling the raw events 0.9%, so peaks do not discriminate size laws</a:t>
             </a:r>
           </a:p>
         </p:txBody>
@@ -8548,7 +5613,7 @@
                 </a:solidFill>
                 <a:latin typeface="Calibri"/>
               </a:rPr>
-              <a:t>All state dependence, and all preparation memory, sit in one parameter: the ceiling.</a:t>
+              <a:t>Fields measured at the single-step level predict the yield strength of a glass from its preparation to a few percent.</a:t>
             </a:r>
           </a:p>
         </p:txBody>
@@ -8596,18 +5661,18 @@
             <a:r>
               <a:rPr sz="3000" b="1">
                 <a:solidFill>
-                  <a:srgbClr val="1E2761"/>
-                </a:solidFill>
-                <a:latin typeface="Calibri"/>
-              </a:rPr>
-              <a:t>Rebuilding the plastic-rate field from the law</a:t>
+                  <a:srgbClr val="990011"/>
+                </a:solidFill>
+                <a:latin typeface="Calibri"/>
+              </a:rPr>
+              <a:t>The energy-convergence problem</a:t>
             </a:r>
           </a:p>
         </p:txBody>
       </p:sp>
       <p:pic>
         <p:nvPicPr>
-          <p:cNvPr id="3" name="Picture 2" descr="fig09_q_agreement.png"/>
+          <p:cNvPr id="3" name="Picture 2" descr="fig13_sim_energy.png"/>
           <p:cNvPicPr>
             <a:picLocks noChangeAspect="1"/>
           </p:cNvPicPr>
@@ -8621,8 +5686,8 @@
         </p:blipFill>
         <p:spPr>
           <a:xfrm>
-            <a:off x="891539" y="1234440"/>
-            <a:ext cx="5532120" cy="4526280"/>
+            <a:off x="502920" y="1280777"/>
+            <a:ext cx="6309360" cy="4433604"/>
           </a:xfrm>
           <a:prstGeom prst="rect">
             <a:avLst/>
@@ -8658,13 +5723,13 @@
               <a:buChar char="•"/>
             </a:pPr>
             <a:r>
-              <a:rPr sz="1350" b="0">
+              <a:rPr sz="1300" b="0">
                 <a:solidFill>
                   <a:srgbClr val="212121"/>
                 </a:solidFill>
                 <a:latin typeface="Calibri"/>
               </a:rPr>
-              <a:t>q = 1 − ⟨dτ⟩ / (2μ Δγ), measured per cell in the first pass</a:t>
+              <a:t>The same comparison for the energy coordinate u(γ)</a:t>
             </a:r>
           </a:p>
           <a:p>
@@ -8675,13 +5740,13 @@
               <a:buChar char="•"/>
             </a:pPr>
             <a:r>
-              <a:rPr sz="1350" b="0">
+              <a:rPr sz="1300" b="0">
                 <a:solidFill>
                   <a:srgbClr val="212121"/>
                 </a:solidFill>
                 <a:latin typeface="Calibri"/>
               </a:rPr>
-              <a:t>From the law: hazard × mean event size of the fitted distribution</a:t>
+              <a:t>Early on the model is right. Late, the dashed curves pinch together: the preparations keep a 24% spread in mean u at γ = 0.5 in the data, and 4% in the model</a:t>
             </a:r>
           </a:p>
           <a:p>
@@ -8692,13 +5757,13 @@
               <a:buChar char="•"/>
             </a:pPr>
             <a:r>
-              <a:rPr sz="1350" b="0">
+              <a:rPr sz="1300" b="0">
                 <a:solidFill>
                   <a:srgbClr val="212121"/>
                 </a:solidFill>
                 <a:latin typeface="Calibri"/>
               </a:rPr>
-              <a:t>Agreement: median +1.8%, RMS 17% against a 17.5% split-half noise floor; the test is saturated</a:t>
+              <a:t>The model’s fields are one map for all histories, so two runs at the same (u, τ) evolve identically no matter how they got there. The data say they do not: at the same (u, τ), slow-cooled glass has a 1.71× higher ceiling than fast-cooled glass</a:t>
             </a:r>
           </a:p>
           <a:p>
@@ -8709,30 +5774,13 @@
               <a:buChar char="•"/>
             </a:pPr>
             <a:r>
-              <a:rPr sz="1350" b="0">
+              <a:rPr sz="1300" b="0">
                 <a:solidFill>
                   <a:srgbClr val="212121"/>
                 </a:solidFill>
                 <a:latin typeface="Calibri"/>
               </a:rPr>
-              <a:t>The Λ(u)·f(τ) factors of the rebuilt field are the measured ones: f(τ) ∝ τ·log(1/τ − 0.44) vs 0.43; the Λ pole at u = 0.0287 vs 0.0280</a:t>
-            </a:r>
-          </a:p>
-          <a:p>
-            <a:pPr marL="228600" indent="-228600">
-              <a:spcAft>
-                <a:spcPts val="800"/>
-              </a:spcAft>
-              <a:buChar char="•"/>
-            </a:pPr>
-            <a:r>
-              <a:rPr sz="1350" b="0">
-                <a:solidFill>
-                  <a:srgbClr val="212121"/>
-                </a:solidFill>
-                <a:latin typeface="Calibri"/>
-              </a:rPr>
-              <a:t>Old κ ≈ 0.95 recovered as the mid-range slope; the x_min drift problem is gone with ε</a:t>
+              <a:t>So (u, τ) is not a sufficient state. The question is which channel of the step process carries the missing information</a:t>
             </a:r>
           </a:p>
         </p:txBody>
@@ -8796,7 +5844,7 @@
                 </a:solidFill>
                 <a:latin typeface="Calibri"/>
               </a:rPr>
-              <a:t>The fitted law reproduces the first pass’s central object to within its noise floor.</a:t>
+              <a:t>A five-times-too-small preparation spread in u: the one place the two-variable model fails.</a:t>
             </a:r>
           </a:p>
         </p:txBody>

--- a/SEEM_project_deck.pptx
+++ b/SEEM_project_deck.pptx
@@ -5,18 +5,19 @@
     <p:sldMasterId id="2147483648" r:id="rId1"/>
   </p:sldMasterIdLst>
   <p:sldIdLst>
-    <p:sldId id="256" r:id="rId7"/>
-    <p:sldId id="257" r:id="rId8"/>
-    <p:sldId id="258" r:id="rId9"/>
-    <p:sldId id="259" r:id="rId10"/>
-    <p:sldId id="260" r:id="rId11"/>
-    <p:sldId id="261" r:id="rId12"/>
-    <p:sldId id="262" r:id="rId13"/>
-    <p:sldId id="263" r:id="rId14"/>
-    <p:sldId id="264" r:id="rId15"/>
-    <p:sldId id="265" r:id="rId16"/>
+    <p:sldId id="256" r:id="rId2"/>
+    <p:sldId id="257" r:id="rId3"/>
+    <p:sldId id="258" r:id="rId4"/>
+    <p:sldId id="259" r:id="rId9"/>
+    <p:sldId id="260" r:id="rId10"/>
+    <p:sldId id="261" r:id="rId11"/>
+    <p:sldId id="262" r:id="rId8"/>
+    <p:sldId id="263" r:id="rId7"/>
+    <p:sldId id="264" r:id="rId6"/>
+    <p:sldId id="265" r:id="rId5"/>
+    <p:sldId id="266" r:id="rId16"/>
   </p:sldIdLst>
-  <p:sldSz cx="12191695" cy="6858000" type="screen4x3"/>
+  <p:sldSz cx="12192000" cy="6858000"/>
   <p:notesSz cx="6858000" cy="9144000"/>
   <p:defaultTextStyle>
     <a:defPPr>
@@ -113,6 +114,22 @@
       </a:defRPr>
     </a:lvl9pPr>
   </p:defaultTextStyle>
+  <p:extLst>
+    <p:ext uri="{EFAFB233-063F-42B5-8137-9DF3F51BA10A}">
+      <p15:sldGuideLst xmlns:p15="http://schemas.microsoft.com/office/powerpoint/2012/main">
+        <p15:guide id="1" orient="horz" pos="2160">
+          <p15:clr>
+            <a:srgbClr val="A4A3A4"/>
+          </p15:clr>
+        </p15:guide>
+        <p15:guide id="2" pos="2880">
+          <p15:clr>
+            <a:srgbClr val="A4A3A4"/>
+          </p15:clr>
+        </p15:guide>
+      </p15:sldGuideLst>
+    </p:ext>
+  </p:extLst>
 </p:presentation>
 </file>
 
@@ -154,10 +171,9 @@
           <a:lstStyle/>
           <a:p>
             <a:r>
-              <a:rPr lang="en-US" smtClean="0"/>
+              <a:rPr lang="en-US"/>
               <a:t>Click to edit Master title style</a:t>
             </a:r>
-            <a:endParaRPr lang="en-US"/>
           </a:p>
         </p:txBody>
       </p:sp>
@@ -273,10 +289,9 @@
           </a:lstStyle>
           <a:p>
             <a:r>
-              <a:rPr lang="en-US" smtClean="0"/>
+              <a:rPr lang="en-US"/>
               <a:t>Click to edit Master subtitle style</a:t>
             </a:r>
-            <a:endParaRPr lang="en-US"/>
           </a:p>
         </p:txBody>
       </p:sp>
@@ -297,7 +312,7 @@
           <a:p>
             <a:fld id="{5BCAD085-E8A6-8845-BD4E-CB4CCA059FC4}" type="datetimeFigureOut">
               <a:rPr lang="en-US" smtClean="0"/>
-              <a:t>1/27/13</a:t>
+              <a:t>9/4/26</a:t>
             </a:fld>
             <a:endParaRPr lang="en-US"/>
           </a:p>
@@ -391,10 +406,9 @@
           <a:lstStyle/>
           <a:p>
             <a:r>
-              <a:rPr lang="en-US" smtClean="0"/>
+              <a:rPr lang="en-US"/>
               <a:t>Click to edit Master title style</a:t>
             </a:r>
-            <a:endParaRPr lang="en-US"/>
           </a:p>
         </p:txBody>
       </p:sp>
@@ -415,38 +429,37 @@
           <a:p>
             <a:pPr lvl="0"/>
             <a:r>
-              <a:rPr lang="en-US" smtClean="0"/>
+              <a:rPr lang="en-US"/>
               <a:t>Click to edit Master text styles</a:t>
             </a:r>
           </a:p>
           <a:p>
             <a:pPr lvl="1"/>
             <a:r>
-              <a:rPr lang="en-US" smtClean="0"/>
+              <a:rPr lang="en-US"/>
               <a:t>Second level</a:t>
             </a:r>
           </a:p>
           <a:p>
             <a:pPr lvl="2"/>
             <a:r>
-              <a:rPr lang="en-US" smtClean="0"/>
+              <a:rPr lang="en-US"/>
               <a:t>Third level</a:t>
             </a:r>
           </a:p>
           <a:p>
             <a:pPr lvl="3"/>
             <a:r>
-              <a:rPr lang="en-US" smtClean="0"/>
+              <a:rPr lang="en-US"/>
               <a:t>Fourth level</a:t>
             </a:r>
           </a:p>
           <a:p>
             <a:pPr lvl="4"/>
             <a:r>
-              <a:rPr lang="en-US" smtClean="0"/>
+              <a:rPr lang="en-US"/>
               <a:t>Fifth level</a:t>
             </a:r>
-            <a:endParaRPr lang="en-US"/>
           </a:p>
         </p:txBody>
       </p:sp>
@@ -467,7 +480,7 @@
           <a:p>
             <a:fld id="{5BCAD085-E8A6-8845-BD4E-CB4CCA059FC4}" type="datetimeFigureOut">
               <a:rPr lang="en-US" smtClean="0"/>
-              <a:t>1/27/13</a:t>
+              <a:t>9/4/26</a:t>
             </a:fld>
             <a:endParaRPr lang="en-US"/>
           </a:p>
@@ -566,10 +579,9 @@
           <a:lstStyle/>
           <a:p>
             <a:r>
-              <a:rPr lang="en-US" smtClean="0"/>
+              <a:rPr lang="en-US"/>
               <a:t>Click to edit Master title style</a:t>
             </a:r>
-            <a:endParaRPr lang="en-US"/>
           </a:p>
         </p:txBody>
       </p:sp>
@@ -595,38 +607,37 @@
           <a:p>
             <a:pPr lvl="0"/>
             <a:r>
-              <a:rPr lang="en-US" smtClean="0"/>
+              <a:rPr lang="en-US"/>
               <a:t>Click to edit Master text styles</a:t>
             </a:r>
           </a:p>
           <a:p>
             <a:pPr lvl="1"/>
             <a:r>
-              <a:rPr lang="en-US" smtClean="0"/>
+              <a:rPr lang="en-US"/>
               <a:t>Second level</a:t>
             </a:r>
           </a:p>
           <a:p>
             <a:pPr lvl="2"/>
             <a:r>
-              <a:rPr lang="en-US" smtClean="0"/>
+              <a:rPr lang="en-US"/>
               <a:t>Third level</a:t>
             </a:r>
           </a:p>
           <a:p>
             <a:pPr lvl="3"/>
             <a:r>
-              <a:rPr lang="en-US" smtClean="0"/>
+              <a:rPr lang="en-US"/>
               <a:t>Fourth level</a:t>
             </a:r>
           </a:p>
           <a:p>
             <a:pPr lvl="4"/>
             <a:r>
-              <a:rPr lang="en-US" smtClean="0"/>
+              <a:rPr lang="en-US"/>
               <a:t>Fifth level</a:t>
             </a:r>
-            <a:endParaRPr lang="en-US"/>
           </a:p>
         </p:txBody>
       </p:sp>
@@ -647,7 +658,7 @@
           <a:p>
             <a:fld id="{5BCAD085-E8A6-8845-BD4E-CB4CCA059FC4}" type="datetimeFigureOut">
               <a:rPr lang="en-US" smtClean="0"/>
-              <a:t>1/27/13</a:t>
+              <a:t>9/4/26</a:t>
             </a:fld>
             <a:endParaRPr lang="en-US"/>
           </a:p>
@@ -741,10 +752,9 @@
           <a:lstStyle/>
           <a:p>
             <a:r>
-              <a:rPr lang="en-US" smtClean="0"/>
+              <a:rPr lang="en-US"/>
               <a:t>Click to edit Master title style</a:t>
             </a:r>
-            <a:endParaRPr lang="en-US"/>
           </a:p>
         </p:txBody>
       </p:sp>
@@ -765,38 +775,37 @@
           <a:p>
             <a:pPr lvl="0"/>
             <a:r>
-              <a:rPr lang="en-US" smtClean="0"/>
+              <a:rPr lang="en-US"/>
               <a:t>Click to edit Master text styles</a:t>
             </a:r>
           </a:p>
           <a:p>
             <a:pPr lvl="1"/>
             <a:r>
-              <a:rPr lang="en-US" smtClean="0"/>
+              <a:rPr lang="en-US"/>
               <a:t>Second level</a:t>
             </a:r>
           </a:p>
           <a:p>
             <a:pPr lvl="2"/>
             <a:r>
-              <a:rPr lang="en-US" smtClean="0"/>
+              <a:rPr lang="en-US"/>
               <a:t>Third level</a:t>
             </a:r>
           </a:p>
           <a:p>
             <a:pPr lvl="3"/>
             <a:r>
-              <a:rPr lang="en-US" smtClean="0"/>
+              <a:rPr lang="en-US"/>
               <a:t>Fourth level</a:t>
             </a:r>
           </a:p>
           <a:p>
             <a:pPr lvl="4"/>
             <a:r>
-              <a:rPr lang="en-US" smtClean="0"/>
+              <a:rPr lang="en-US"/>
               <a:t>Fifth level</a:t>
             </a:r>
-            <a:endParaRPr lang="en-US"/>
           </a:p>
         </p:txBody>
       </p:sp>
@@ -817,7 +826,7 @@
           <a:p>
             <a:fld id="{5BCAD085-E8A6-8845-BD4E-CB4CCA059FC4}" type="datetimeFigureOut">
               <a:rPr lang="en-US" smtClean="0"/>
-              <a:t>1/27/13</a:t>
+              <a:t>9/4/26</a:t>
             </a:fld>
             <a:endParaRPr lang="en-US"/>
           </a:p>
@@ -920,10 +929,9 @@
           </a:lstStyle>
           <a:p>
             <a:r>
-              <a:rPr lang="en-US" smtClean="0"/>
+              <a:rPr lang="en-US"/>
               <a:t>Click to edit Master title style</a:t>
             </a:r>
-            <a:endParaRPr lang="en-US"/>
           </a:p>
         </p:txBody>
       </p:sp>
@@ -1040,7 +1048,7 @@
           <a:p>
             <a:pPr lvl="0"/>
             <a:r>
-              <a:rPr lang="en-US" smtClean="0"/>
+              <a:rPr lang="en-US"/>
               <a:t>Click to edit Master text styles</a:t>
             </a:r>
           </a:p>
@@ -1063,7 +1071,7 @@
           <a:p>
             <a:fld id="{5BCAD085-E8A6-8845-BD4E-CB4CCA059FC4}" type="datetimeFigureOut">
               <a:rPr lang="en-US" smtClean="0"/>
-              <a:t>1/27/13</a:t>
+              <a:t>9/4/26</a:t>
             </a:fld>
             <a:endParaRPr lang="en-US"/>
           </a:p>
@@ -1157,10 +1165,9 @@
           <a:lstStyle/>
           <a:p>
             <a:r>
-              <a:rPr lang="en-US" smtClean="0"/>
+              <a:rPr lang="en-US"/>
               <a:t>Click to edit Master title style</a:t>
             </a:r>
-            <a:endParaRPr lang="en-US"/>
           </a:p>
         </p:txBody>
       </p:sp>
@@ -1214,38 +1221,37 @@
           <a:p>
             <a:pPr lvl="0"/>
             <a:r>
-              <a:rPr lang="en-US" smtClean="0"/>
+              <a:rPr lang="en-US"/>
               <a:t>Click to edit Master text styles</a:t>
             </a:r>
           </a:p>
           <a:p>
             <a:pPr lvl="1"/>
             <a:r>
-              <a:rPr lang="en-US" smtClean="0"/>
+              <a:rPr lang="en-US"/>
               <a:t>Second level</a:t>
             </a:r>
           </a:p>
           <a:p>
             <a:pPr lvl="2"/>
             <a:r>
-              <a:rPr lang="en-US" smtClean="0"/>
+              <a:rPr lang="en-US"/>
               <a:t>Third level</a:t>
             </a:r>
           </a:p>
           <a:p>
             <a:pPr lvl="3"/>
             <a:r>
-              <a:rPr lang="en-US" smtClean="0"/>
+              <a:rPr lang="en-US"/>
               <a:t>Fourth level</a:t>
             </a:r>
           </a:p>
           <a:p>
             <a:pPr lvl="4"/>
             <a:r>
-              <a:rPr lang="en-US" smtClean="0"/>
+              <a:rPr lang="en-US"/>
               <a:t>Fifth level</a:t>
             </a:r>
-            <a:endParaRPr lang="en-US"/>
           </a:p>
         </p:txBody>
       </p:sp>
@@ -1299,38 +1305,37 @@
           <a:p>
             <a:pPr lvl="0"/>
             <a:r>
-              <a:rPr lang="en-US" smtClean="0"/>
+              <a:rPr lang="en-US"/>
               <a:t>Click to edit Master text styles</a:t>
             </a:r>
           </a:p>
           <a:p>
             <a:pPr lvl="1"/>
             <a:r>
-              <a:rPr lang="en-US" smtClean="0"/>
+              <a:rPr lang="en-US"/>
               <a:t>Second level</a:t>
             </a:r>
           </a:p>
           <a:p>
             <a:pPr lvl="2"/>
             <a:r>
-              <a:rPr lang="en-US" smtClean="0"/>
+              <a:rPr lang="en-US"/>
               <a:t>Third level</a:t>
             </a:r>
           </a:p>
           <a:p>
             <a:pPr lvl="3"/>
             <a:r>
-              <a:rPr lang="en-US" smtClean="0"/>
+              <a:rPr lang="en-US"/>
               <a:t>Fourth level</a:t>
             </a:r>
           </a:p>
           <a:p>
             <a:pPr lvl="4"/>
             <a:r>
-              <a:rPr lang="en-US" smtClean="0"/>
+              <a:rPr lang="en-US"/>
               <a:t>Fifth level</a:t>
             </a:r>
-            <a:endParaRPr lang="en-US"/>
           </a:p>
         </p:txBody>
       </p:sp>
@@ -1351,7 +1356,7 @@
           <a:p>
             <a:fld id="{5BCAD085-E8A6-8845-BD4E-CB4CCA059FC4}" type="datetimeFigureOut">
               <a:rPr lang="en-US" smtClean="0"/>
-              <a:t>1/27/13</a:t>
+              <a:t>9/4/26</a:t>
             </a:fld>
             <a:endParaRPr lang="en-US"/>
           </a:p>
@@ -1449,10 +1454,9 @@
           </a:lstStyle>
           <a:p>
             <a:r>
-              <a:rPr lang="en-US" smtClean="0"/>
+              <a:rPr lang="en-US"/>
               <a:t>Click to edit Master title style</a:t>
             </a:r>
-            <a:endParaRPr lang="en-US"/>
           </a:p>
         </p:txBody>
       </p:sp>
@@ -1515,7 +1519,7 @@
           <a:p>
             <a:pPr lvl="0"/>
             <a:r>
-              <a:rPr lang="en-US" smtClean="0"/>
+              <a:rPr lang="en-US"/>
               <a:t>Click to edit Master text styles</a:t>
             </a:r>
           </a:p>
@@ -1571,38 +1575,37 @@
           <a:p>
             <a:pPr lvl="0"/>
             <a:r>
-              <a:rPr lang="en-US" smtClean="0"/>
+              <a:rPr lang="en-US"/>
               <a:t>Click to edit Master text styles</a:t>
             </a:r>
           </a:p>
           <a:p>
             <a:pPr lvl="1"/>
             <a:r>
-              <a:rPr lang="en-US" smtClean="0"/>
+              <a:rPr lang="en-US"/>
               <a:t>Second level</a:t>
             </a:r>
           </a:p>
           <a:p>
             <a:pPr lvl="2"/>
             <a:r>
-              <a:rPr lang="en-US" smtClean="0"/>
+              <a:rPr lang="en-US"/>
               <a:t>Third level</a:t>
             </a:r>
           </a:p>
           <a:p>
             <a:pPr lvl="3"/>
             <a:r>
-              <a:rPr lang="en-US" smtClean="0"/>
+              <a:rPr lang="en-US"/>
               <a:t>Fourth level</a:t>
             </a:r>
           </a:p>
           <a:p>
             <a:pPr lvl="4"/>
             <a:r>
-              <a:rPr lang="en-US" smtClean="0"/>
+              <a:rPr lang="en-US"/>
               <a:t>Fifth level</a:t>
             </a:r>
-            <a:endParaRPr lang="en-US"/>
           </a:p>
         </p:txBody>
       </p:sp>
@@ -1665,7 +1668,7 @@
           <a:p>
             <a:pPr lvl="0"/>
             <a:r>
-              <a:rPr lang="en-US" smtClean="0"/>
+              <a:rPr lang="en-US"/>
               <a:t>Click to edit Master text styles</a:t>
             </a:r>
           </a:p>
@@ -1721,38 +1724,37 @@
           <a:p>
             <a:pPr lvl="0"/>
             <a:r>
-              <a:rPr lang="en-US" smtClean="0"/>
+              <a:rPr lang="en-US"/>
               <a:t>Click to edit Master text styles</a:t>
             </a:r>
           </a:p>
           <a:p>
             <a:pPr lvl="1"/>
             <a:r>
-              <a:rPr lang="en-US" smtClean="0"/>
+              <a:rPr lang="en-US"/>
               <a:t>Second level</a:t>
             </a:r>
           </a:p>
           <a:p>
             <a:pPr lvl="2"/>
             <a:r>
-              <a:rPr lang="en-US" smtClean="0"/>
+              <a:rPr lang="en-US"/>
               <a:t>Third level</a:t>
             </a:r>
           </a:p>
           <a:p>
             <a:pPr lvl="3"/>
             <a:r>
-              <a:rPr lang="en-US" smtClean="0"/>
+              <a:rPr lang="en-US"/>
               <a:t>Fourth level</a:t>
             </a:r>
           </a:p>
           <a:p>
             <a:pPr lvl="4"/>
             <a:r>
-              <a:rPr lang="en-US" smtClean="0"/>
+              <a:rPr lang="en-US"/>
               <a:t>Fifth level</a:t>
             </a:r>
-            <a:endParaRPr lang="en-US"/>
           </a:p>
         </p:txBody>
       </p:sp>
@@ -1773,7 +1775,7 @@
           <a:p>
             <a:fld id="{5BCAD085-E8A6-8845-BD4E-CB4CCA059FC4}" type="datetimeFigureOut">
               <a:rPr lang="en-US" smtClean="0"/>
-              <a:t>1/27/13</a:t>
+              <a:t>9/4/26</a:t>
             </a:fld>
             <a:endParaRPr lang="en-US"/>
           </a:p>
@@ -1867,10 +1869,9 @@
           <a:lstStyle/>
           <a:p>
             <a:r>
-              <a:rPr lang="en-US" smtClean="0"/>
+              <a:rPr lang="en-US"/>
               <a:t>Click to edit Master title style</a:t>
             </a:r>
-            <a:endParaRPr lang="en-US"/>
           </a:p>
         </p:txBody>
       </p:sp>
@@ -1891,7 +1892,7 @@
           <a:p>
             <a:fld id="{5BCAD085-E8A6-8845-BD4E-CB4CCA059FC4}" type="datetimeFigureOut">
               <a:rPr lang="en-US" smtClean="0"/>
-              <a:t>1/27/13</a:t>
+              <a:t>9/4/26</a:t>
             </a:fld>
             <a:endParaRPr lang="en-US"/>
           </a:p>
@@ -1986,7 +1987,7 @@
           <a:p>
             <a:fld id="{5BCAD085-E8A6-8845-BD4E-CB4CCA059FC4}" type="datetimeFigureOut">
               <a:rPr lang="en-US" smtClean="0"/>
-              <a:t>1/27/13</a:t>
+              <a:t>9/4/26</a:t>
             </a:fld>
             <a:endParaRPr lang="en-US"/>
           </a:p>
@@ -2089,10 +2090,9 @@
           </a:lstStyle>
           <a:p>
             <a:r>
-              <a:rPr lang="en-US" smtClean="0"/>
+              <a:rPr lang="en-US"/>
               <a:t>Click to edit Master title style</a:t>
             </a:r>
-            <a:endParaRPr lang="en-US"/>
           </a:p>
         </p:txBody>
       </p:sp>
@@ -2146,38 +2146,37 @@
           <a:p>
             <a:pPr lvl="0"/>
             <a:r>
-              <a:rPr lang="en-US" smtClean="0"/>
+              <a:rPr lang="en-US"/>
               <a:t>Click to edit Master text styles</a:t>
             </a:r>
           </a:p>
           <a:p>
             <a:pPr lvl="1"/>
             <a:r>
-              <a:rPr lang="en-US" smtClean="0"/>
+              <a:rPr lang="en-US"/>
               <a:t>Second level</a:t>
             </a:r>
           </a:p>
           <a:p>
             <a:pPr lvl="2"/>
             <a:r>
-              <a:rPr lang="en-US" smtClean="0"/>
+              <a:rPr lang="en-US"/>
               <a:t>Third level</a:t>
             </a:r>
           </a:p>
           <a:p>
             <a:pPr lvl="3"/>
             <a:r>
-              <a:rPr lang="en-US" smtClean="0"/>
+              <a:rPr lang="en-US"/>
               <a:t>Fourth level</a:t>
             </a:r>
           </a:p>
           <a:p>
             <a:pPr lvl="4"/>
             <a:r>
-              <a:rPr lang="en-US" smtClean="0"/>
+              <a:rPr lang="en-US"/>
               <a:t>Fifth level</a:t>
             </a:r>
-            <a:endParaRPr lang="en-US"/>
           </a:p>
         </p:txBody>
       </p:sp>
@@ -2240,7 +2239,7 @@
           <a:p>
             <a:pPr lvl="0"/>
             <a:r>
-              <a:rPr lang="en-US" smtClean="0"/>
+              <a:rPr lang="en-US"/>
               <a:t>Click to edit Master text styles</a:t>
             </a:r>
           </a:p>
@@ -2263,7 +2262,7 @@
           <a:p>
             <a:fld id="{5BCAD085-E8A6-8845-BD4E-CB4CCA059FC4}" type="datetimeFigureOut">
               <a:rPr lang="en-US" smtClean="0"/>
-              <a:t>1/27/13</a:t>
+              <a:t>9/4/26</a:t>
             </a:fld>
             <a:endParaRPr lang="en-US"/>
           </a:p>
@@ -2366,10 +2365,9 @@
           </a:lstStyle>
           <a:p>
             <a:r>
-              <a:rPr lang="en-US" smtClean="0"/>
+              <a:rPr lang="en-US"/>
               <a:t>Click to edit Master title style</a:t>
             </a:r>
-            <a:endParaRPr lang="en-US"/>
           </a:p>
         </p:txBody>
       </p:sp>
@@ -2493,7 +2491,7 @@
           <a:p>
             <a:pPr lvl="0"/>
             <a:r>
-              <a:rPr lang="en-US" smtClean="0"/>
+              <a:rPr lang="en-US"/>
               <a:t>Click to edit Master text styles</a:t>
             </a:r>
           </a:p>
@@ -2516,7 +2514,7 @@
           <a:p>
             <a:fld id="{5BCAD085-E8A6-8845-BD4E-CB4CCA059FC4}" type="datetimeFigureOut">
               <a:rPr lang="en-US" smtClean="0"/>
-              <a:t>1/27/13</a:t>
+              <a:t>9/4/26</a:t>
             </a:fld>
             <a:endParaRPr lang="en-US"/>
           </a:p>
@@ -2625,10 +2623,9 @@
           <a:lstStyle/>
           <a:p>
             <a:r>
-              <a:rPr lang="en-US" smtClean="0"/>
+              <a:rPr lang="en-US"/>
               <a:t>Click to edit Master title style</a:t>
             </a:r>
-            <a:endParaRPr lang="en-US"/>
           </a:p>
         </p:txBody>
       </p:sp>
@@ -2659,38 +2656,37 @@
           <a:p>
             <a:pPr lvl="0"/>
             <a:r>
-              <a:rPr lang="en-US" smtClean="0"/>
+              <a:rPr lang="en-US"/>
               <a:t>Click to edit Master text styles</a:t>
             </a:r>
           </a:p>
           <a:p>
             <a:pPr lvl="1"/>
             <a:r>
-              <a:rPr lang="en-US" smtClean="0"/>
+              <a:rPr lang="en-US"/>
               <a:t>Second level</a:t>
             </a:r>
           </a:p>
           <a:p>
             <a:pPr lvl="2"/>
             <a:r>
-              <a:rPr lang="en-US" smtClean="0"/>
+              <a:rPr lang="en-US"/>
               <a:t>Third level</a:t>
             </a:r>
           </a:p>
           <a:p>
             <a:pPr lvl="3"/>
             <a:r>
-              <a:rPr lang="en-US" smtClean="0"/>
+              <a:rPr lang="en-US"/>
               <a:t>Fourth level</a:t>
             </a:r>
           </a:p>
           <a:p>
             <a:pPr lvl="4"/>
             <a:r>
-              <a:rPr lang="en-US" smtClean="0"/>
+              <a:rPr lang="en-US"/>
               <a:t>Fifth level</a:t>
             </a:r>
-            <a:endParaRPr lang="en-US"/>
           </a:p>
         </p:txBody>
       </p:sp>
@@ -2729,7 +2725,7 @@
           <a:p>
             <a:fld id="{5BCAD085-E8A6-8845-BD4E-CB4CCA059FC4}" type="datetimeFigureOut">
               <a:rPr lang="en-US" smtClean="0"/>
-              <a:t>1/27/13</a:t>
+              <a:t>9/4/26</a:t>
             </a:fld>
             <a:endParaRPr lang="en-US"/>
           </a:p>
@@ -3088,7 +3084,7 @@
 </file>
 
 <file path=ppt/slides/slide1.xml><?xml version="1.0" encoding="utf-8"?>
-<p:sld xmlns:a="http://schemas.openxmlformats.org/drawingml/2006/main" xmlns:p="http://schemas.openxmlformats.org/presentationml/2006/main" xmlns:r="http://schemas.openxmlformats.org/officeDocument/2006/relationships">
+<p:sld xmlns:a="http://schemas.openxmlformats.org/drawingml/2006/main" xmlns:r="http://schemas.openxmlformats.org/officeDocument/2006/relationships" xmlns:p="http://schemas.openxmlformats.org/presentationml/2006/main">
   <p:cSld>
     <p:spTree>
       <p:nvGrpSpPr>
@@ -3096,7 +3092,14 @@
         <p:cNvGrpSpPr/>
         <p:nvPr/>
       </p:nvGrpSpPr>
-      <p:grpSpPr/>
+      <p:grpSpPr>
+        <a:xfrm>
+          <a:off x="0" y="0"/>
+          <a:ext cx="0" cy="0"/>
+          <a:chOff x="0" y="0"/>
+          <a:chExt cx="0" cy="0"/>
+        </a:xfrm>
+      </p:grpSpPr>
       <p:sp>
         <p:nvSpPr>
           <p:cNvPr id="2" name="TextBox 1"/>
@@ -3106,7 +3109,7 @@
         <p:spPr>
           <a:xfrm>
             <a:off x="822960" y="1737360"/>
-            <a:ext cx="10515600" cy="1463040"/>
+            <a:ext cx="10515600" cy="615553"/>
           </a:xfrm>
           <a:prstGeom prst="rect">
             <a:avLst/>
@@ -3114,33 +3117,39 @@
           <a:noFill/>
         </p:spPr>
         <p:txBody>
-          <a:bodyPr wrap="square" lIns="0" rIns="0" tIns="0" bIns="0">
+          <a:bodyPr wrap="square" lIns="0" tIns="0" rIns="0" bIns="0">
             <a:spAutoFit/>
           </a:bodyPr>
           <a:lstStyle/>
           <a:p>
             <a:r>
-              <a:rPr sz="4000" b="1">
+              <a:rPr lang="en-US" sz="4000" b="1" dirty="0">
                 <a:solidFill>
                   <a:srgbClr val="1E2761"/>
                 </a:solidFill>
                 <a:latin typeface="Calibri"/>
               </a:rPr>
-              <a:t>A fitted law for yield events</a:t>
-            </a:r>
-          </a:p>
-        </p:txBody>
-      </p:sp>
-      <p:sp>
-        <p:nvSpPr>
-          <p:cNvPr id="3" name="TextBox 2"/>
+              <a:t>SEEM</a:t>
+            </a:r>
+            <a:endParaRPr sz="4000" b="1" dirty="0">
+              <a:solidFill>
+                <a:srgbClr val="1E2761"/>
+              </a:solidFill>
+              <a:latin typeface="Calibri"/>
+            </a:endParaRPr>
+          </a:p>
+        </p:txBody>
+      </p:sp>
+      <p:sp>
+        <p:nvSpPr>
+          <p:cNvPr id="4" name="TextBox 3"/>
           <p:cNvSpPr txBox="1"/>
           <p:nvPr/>
         </p:nvSpPr>
         <p:spPr>
           <a:xfrm>
-            <a:off x="822960" y="3200400"/>
-            <a:ext cx="10515600" cy="822960"/>
+            <a:off x="822960" y="4206240"/>
+            <a:ext cx="10515600" cy="230832"/>
           </a:xfrm>
           <a:prstGeom prst="rect">
             <a:avLst/>
@@ -3148,87 +3157,28 @@
           <a:noFill/>
         </p:spPr>
         <p:txBody>
-          <a:bodyPr wrap="square" lIns="0" rIns="0" tIns="0" bIns="0">
+          <a:bodyPr wrap="square" lIns="0" tIns="0" rIns="0" bIns="0">
             <a:spAutoFit/>
           </a:bodyPr>
           <a:lstStyle/>
           <a:p>
             <a:r>
-              <a:rPr sz="1900" b="0">
-                <a:solidFill>
-                  <a:srgbClr val="212121"/>
-                </a:solidFill>
-                <a:latin typeface="Calibri"/>
-              </a:rPr>
-              <a:t>The variables, the symbolic-regression search, the discovered size law and how it performs, the forward model built on it, and the fix for where it fails</a:t>
-            </a:r>
-          </a:p>
-        </p:txBody>
-      </p:sp>
-      <p:sp>
-        <p:nvSpPr>
-          <p:cNvPr id="4" name="TextBox 3"/>
-          <p:cNvSpPr txBox="1"/>
-          <p:nvPr/>
-        </p:nvSpPr>
-        <p:spPr>
-          <a:xfrm>
-            <a:off x="822960" y="4206240"/>
-            <a:ext cx="10515600" cy="411480"/>
-          </a:xfrm>
-          <a:prstGeom prst="rect">
-            <a:avLst/>
-          </a:prstGeom>
-          <a:noFill/>
-        </p:spPr>
-        <p:txBody>
-          <a:bodyPr wrap="square" lIns="0" rIns="0" tIns="0" bIns="0">
-            <a:spAutoFit/>
-          </a:bodyPr>
-          <a:lstStyle/>
-          <a:p>
-            <a:r>
-              <a:rPr sz="1500" b="0">
+              <a:rPr lang="en-US" sz="1500" b="0" dirty="0">
                 <a:solidFill>
                   <a:srgbClr val="6E7B85"/>
                 </a:solidFill>
                 <a:latin typeface="Calibri"/>
               </a:rPr>
-              <a:t>SEEM project, September 4, 2026</a:t>
-            </a:r>
-          </a:p>
-        </p:txBody>
-      </p:sp>
-      <p:sp>
-        <p:nvSpPr>
-          <p:cNvPr id="5" name="TextBox 4"/>
-          <p:cNvSpPr txBox="1"/>
-          <p:nvPr/>
-        </p:nvSpPr>
-        <p:spPr>
-          <a:xfrm>
-            <a:off x="822960" y="5943600"/>
-            <a:ext cx="10515600" cy="365760"/>
-          </a:xfrm>
-          <a:prstGeom prst="rect">
-            <a:avLst/>
-          </a:prstGeom>
-          <a:noFill/>
-        </p:spPr>
-        <p:txBody>
-          <a:bodyPr wrap="square" lIns="0" rIns="0" tIns="0" bIns="0">
-            <a:spAutoFit/>
-          </a:bodyPr>
-          <a:lstStyle/>
-          <a:p>
-            <a:r>
-              <a:rPr sz="1300" b="0">
+              <a:t>SEEM/LYS Meeting - </a:t>
+            </a:r>
+            <a:r>
+              <a:rPr sz="1500" b="0" dirty="0">
                 <a:solidFill>
                   <a:srgbClr val="6E7B85"/>
                 </a:solidFill>
                 <a:latin typeface="Calibri"/>
               </a:rPr>
-              <a:t>AQS shear of a model glass, 850 runs, nine cooling rates, 187,468 stress drops. Every number here is regenerated by pipeline/run_all.sh.</a:t>
+              <a:t>September 4, 2026</a:t>
             </a:r>
           </a:p>
         </p:txBody>
@@ -3276,6 +3226,242 @@
             <a:r>
               <a:rPr sz="3000" b="1">
                 <a:solidFill>
+                  <a:srgbClr val="990011"/>
+                </a:solidFill>
+                <a:latin typeface="Calibri"/>
+              </a:rPr>
+              <a:t>The energy-convergence problem</a:t>
+            </a:r>
+          </a:p>
+        </p:txBody>
+      </p:sp>
+      <p:pic>
+        <p:nvPicPr>
+          <p:cNvPr id="3" name="Picture 2" descr="fig13_sim_energy.png"/>
+          <p:cNvPicPr>
+            <a:picLocks noChangeAspect="1"/>
+          </p:cNvPicPr>
+          <p:nvPr/>
+        </p:nvPicPr>
+        <p:blipFill>
+          <a:blip r:embed="rId2"/>
+          <a:stretch>
+            <a:fillRect/>
+          </a:stretch>
+        </p:blipFill>
+        <p:spPr>
+          <a:xfrm>
+            <a:off x="502920" y="1257917"/>
+            <a:ext cx="6309360" cy="4433604"/>
+          </a:xfrm>
+          <a:prstGeom prst="rect">
+            <a:avLst/>
+          </a:prstGeom>
+        </p:spPr>
+      </p:pic>
+      <p:sp>
+        <p:nvSpPr>
+          <p:cNvPr id="4" name="TextBox 3"/>
+          <p:cNvSpPr txBox="1"/>
+          <p:nvPr/>
+        </p:nvSpPr>
+        <p:spPr>
+          <a:xfrm>
+            <a:off x="7086600" y="1280160"/>
+            <a:ext cx="4572000" cy="4572000"/>
+          </a:xfrm>
+          <a:prstGeom prst="rect">
+            <a:avLst/>
+          </a:prstGeom>
+          <a:noFill/>
+        </p:spPr>
+        <p:txBody>
+          <a:bodyPr wrap="square" lIns="0" rIns="0" tIns="0" bIns="0">
+            <a:spAutoFit/>
+          </a:bodyPr>
+          <a:lstStyle/>
+          <a:p>
+            <a:pPr>
+              <a:spcAft>
+                <a:spcPts val="600"/>
+              </a:spcAft>
+            </a:pPr>
+            <a:r>
+              <a:rPr sz="1600" b="1">
+                <a:solidFill>
+                  <a:srgbClr val="1E2761"/>
+                </a:solidFill>
+                <a:latin typeface="Calibri"/>
+              </a:rPr>
+              <a:t>The same comparison for u(γ)</a:t>
+            </a:r>
+          </a:p>
+          <a:p>
+            <a:pPr marL="228600" indent="-228600">
+              <a:spcAft>
+                <a:spcPts val="800"/>
+              </a:spcAft>
+              <a:buChar char="•"/>
+            </a:pPr>
+            <a:r>
+              <a:rPr sz="1400" b="0">
+                <a:solidFill>
+                  <a:srgbClr val="212121"/>
+                </a:solidFill>
+                <a:latin typeface="Calibri"/>
+              </a:rPr>
+              <a:t>Early: right. Late: the dashed curves </a:t>
+            </a:r>
+            <a:r>
+              <a:rPr sz="1400" b="1">
+                <a:solidFill>
+                  <a:srgbClr val="212121"/>
+                </a:solidFill>
+                <a:latin typeface="Calibri"/>
+              </a:rPr>
+              <a:t>pinch together</a:t>
+            </a:r>
+          </a:p>
+          <a:p>
+            <a:pPr marL="228600" indent="-228600">
+              <a:spcAft>
+                <a:spcPts val="800"/>
+              </a:spcAft>
+              <a:buChar char="•"/>
+            </a:pPr>
+            <a:r>
+              <a:rPr sz="1400" b="0">
+                <a:solidFill>
+                  <a:srgbClr val="212121"/>
+                </a:solidFill>
+                <a:latin typeface="Calibri"/>
+              </a:rPr>
+              <a:t>Spread of mean u across preparations at γ = 0.5: </a:t>
+            </a:r>
+            <a:r>
+              <a:rPr sz="1400" b="1">
+                <a:solidFill>
+                  <a:srgbClr val="212121"/>
+                </a:solidFill>
+                <a:latin typeface="Calibri"/>
+              </a:rPr>
+              <a:t>24% in the data, 4% in the model</a:t>
+            </a:r>
+          </a:p>
+          <a:p>
+            <a:pPr marL="228600" indent="-228600">
+              <a:spcAft>
+                <a:spcPts val="800"/>
+              </a:spcAft>
+              <a:buChar char="•"/>
+            </a:pPr>
+            <a:r>
+              <a:rPr sz="1400" b="0">
+                <a:solidFill>
+                  <a:srgbClr val="212121"/>
+                </a:solidFill>
+                <a:latin typeface="Calibri"/>
+              </a:rPr>
+              <a:t>The fields are one map for all histories, so two runs at the same (u, τ) evolve identically however they got there</a:t>
+            </a:r>
+          </a:p>
+          <a:p>
+            <a:pPr marL="228600" indent="-228600">
+              <a:spcAft>
+                <a:spcPts val="800"/>
+              </a:spcAft>
+              <a:buChar char="•"/>
+            </a:pPr>
+            <a:r>
+              <a:rPr sz="1400" b="0">
+                <a:solidFill>
+                  <a:srgbClr val="212121"/>
+                </a:solidFill>
+                <a:latin typeface="Calibri"/>
+              </a:rPr>
+              <a:t>The data disagree: at the same (u, τ), slow-cooled glass has a </a:t>
+            </a:r>
+            <a:r>
+              <a:rPr sz="1400" b="1">
+                <a:solidFill>
+                  <a:srgbClr val="212121"/>
+                </a:solidFill>
+                <a:latin typeface="Calibri"/>
+              </a:rPr>
+              <a:t>1.71× higher ceiling</a:t>
+            </a:r>
+            <a:r>
+              <a:rPr sz="1400" b="0">
+                <a:solidFill>
+                  <a:srgbClr val="212121"/>
+                </a:solidFill>
+                <a:latin typeface="Calibri"/>
+              </a:rPr>
+              <a:t> than fast-cooled</a:t>
+            </a:r>
+          </a:p>
+          <a:p>
+            <a:pPr marL="228600" indent="-228600">
+              <a:spcAft>
+                <a:spcPts val="800"/>
+              </a:spcAft>
+              <a:buChar char="•"/>
+            </a:pPr>
+            <a:r>
+              <a:rPr sz="1400" b="0">
+                <a:solidFill>
+                  <a:srgbClr val="212121"/>
+                </a:solidFill>
+                <a:latin typeface="Calibri"/>
+              </a:rPr>
+              <a:t>So (u, τ) is not a sufficient state. Which channel carries the missing information?</a:t>
+            </a:r>
+          </a:p>
+        </p:txBody>
+      </p:sp>
+    </p:spTree>
+  </p:cSld>
+  <p:clrMapOvr>
+    <a:masterClrMapping/>
+  </p:clrMapOvr>
+</p:sld>
+</file>
+
+<file path=ppt/slides/slide11.xml><?xml version="1.0" encoding="utf-8"?>
+<p:sld xmlns:a="http://schemas.openxmlformats.org/drawingml/2006/main" xmlns:p="http://schemas.openxmlformats.org/presentationml/2006/main" xmlns:r="http://schemas.openxmlformats.org/officeDocument/2006/relationships">
+  <p:cSld>
+    <p:spTree>
+      <p:nvGrpSpPr>
+        <p:cNvPr id="1" name=""/>
+        <p:cNvGrpSpPr/>
+        <p:nvPr/>
+      </p:nvGrpSpPr>
+      <p:grpSpPr/>
+      <p:sp>
+        <p:nvSpPr>
+          <p:cNvPr id="2" name="TextBox 1"/>
+          <p:cNvSpPr txBox="1"/>
+          <p:nvPr/>
+        </p:nvSpPr>
+        <p:spPr>
+          <a:xfrm>
+            <a:off x="548640" y="292608"/>
+            <a:ext cx="11091672" cy="685800"/>
+          </a:xfrm>
+          <a:prstGeom prst="rect">
+            <a:avLst/>
+          </a:prstGeom>
+          <a:noFill/>
+        </p:spPr>
+        <p:txBody>
+          <a:bodyPr wrap="square" lIns="0" rIns="0" tIns="0" bIns="0">
+            <a:spAutoFit/>
+          </a:bodyPr>
+          <a:lstStyle/>
+          <a:p>
+            <a:r>
+              <a:rPr sz="3000" b="1">
+                <a:solidFill>
                   <a:srgbClr val="1E2761"/>
                 </a:solidFill>
                 <a:latin typeface="Calibri"/>
@@ -3293,7 +3479,7 @@
         </p:nvSpPr>
         <p:spPr>
           <a:xfrm>
-            <a:off x="640080" y="1097280"/>
+            <a:off x="640080" y="1051560"/>
             <a:ext cx="10972800" cy="640080"/>
           </a:xfrm>
           <a:prstGeom prst="rect">
@@ -3336,7 +3522,7 @@
         </p:blipFill>
         <p:spPr>
           <a:xfrm>
-            <a:off x="502920" y="1797527"/>
+            <a:off x="502920" y="1751807"/>
             <a:ext cx="6949440" cy="2668584"/>
           </a:xfrm>
           <a:prstGeom prst="rect">
@@ -3352,8 +3538,8 @@
         </p:nvSpPr>
         <p:spPr>
           <a:xfrm>
-            <a:off x="7635240" y="1783080"/>
-            <a:ext cx="4069080" cy="2743200"/>
+            <a:off x="7635240" y="1737360"/>
+            <a:ext cx="4069080" cy="2834640"/>
           </a:xfrm>
           <a:prstGeom prst="rect">
             <a:avLst/>
@@ -3366,6 +3552,22 @@
           </a:bodyPr>
           <a:lstStyle/>
           <a:p>
+            <a:pPr>
+              <a:spcAft>
+                <a:spcPts val="600"/>
+              </a:spcAft>
+            </a:pPr>
+            <a:r>
+              <a:rPr sz="1600" b="1">
+                <a:solidFill>
+                  <a:srgbClr val="1E2761"/>
+                </a:solidFill>
+                <a:latin typeface="Calibri"/>
+              </a:rPr>
+              <a:t>Reading the equation</a:t>
+            </a:r>
+          </a:p>
+          <a:p>
             <a:pPr marL="228600" indent="-228600">
               <a:spcAft>
                 <a:spcPts val="800"/>
@@ -3373,13 +3575,13 @@
               <a:buChar char="•"/>
             </a:pPr>
             <a:r>
-              <a:rPr sz="1150" b="0">
-                <a:solidFill>
-                  <a:srgbClr val="212121"/>
-                </a:solidFill>
-                <a:latin typeface="Calibri"/>
-              </a:rPr>
-              <a:t>Only the ceiling is scaled per preparation; hazard, drift, aging and the energy coupling stay as measured</a:t>
+              <a:rPr sz="1250" b="0">
+                <a:solidFill>
+                  <a:srgbClr val="212121"/>
+                </a:solidFill>
+                <a:latin typeface="Calibri"/>
+              </a:rPr>
+              <a:t>Only the ceiling is scaled per preparation; hazard, drift, aging, energy coupling unchanged</a:t>
             </a:r>
           </a:p>
           <a:p>
@@ -3390,13 +3592,22 @@
               <a:buChar char="•"/>
             </a:pPr>
             <a:r>
-              <a:rPr sz="1150" b="0">
-                <a:solidFill>
-                  <a:srgbClr val="212121"/>
-                </a:solidFill>
-                <a:latin typeface="Calibri"/>
-              </a:rPr>
-              <a:t>β is the memory exponent: the slope of ln(mean event size) on ln(cooling rate) at fixed cell, with cell fixed effects. rate_mid is the middle of the nine rates, so the factors run from 1.38 (slowest) to 0.72 (fastest)</a:t>
+              <a:rPr sz="1250" b="1">
+                <a:solidFill>
+                  <a:srgbClr val="212121"/>
+                </a:solidFill>
+                <a:latin typeface="Calibri"/>
+              </a:rPr>
+              <a:t>β</a:t>
+            </a:r>
+            <a:r>
+              <a:rPr sz="1250" b="0">
+                <a:solidFill>
+                  <a:srgbClr val="212121"/>
+                </a:solidFill>
+                <a:latin typeface="Calibri"/>
+              </a:rPr>
+              <a:t>: slope of ln(mean event size) on ln(cooling rate) at fixed cell, with cell fixed effects</a:t>
             </a:r>
           </a:p>
           <a:p>
@@ -3407,13 +3618,39 @@
               <a:buChar char="•"/>
             </a:pPr>
             <a:r>
-              <a:rPr sz="1150" b="0">
-                <a:solidFill>
-                  <a:srgbClr val="212121"/>
-                </a:solidFill>
-                <a:latin typeface="Calibri"/>
-              </a:rPr>
-              <a:t>Why the ceiling: measured the same way, the hazard has β = −0.012 ± 0.002 and the elastic drift does not move; the memory is in the event size, and in its tail</a:t>
+              <a:rPr sz="1250" b="1">
+                <a:solidFill>
+                  <a:srgbClr val="212121"/>
+                </a:solidFill>
+                <a:latin typeface="Calibri"/>
+              </a:rPr>
+              <a:t>rate_mid</a:t>
+            </a:r>
+            <a:r>
+              <a:rPr sz="1250" b="0">
+                <a:solidFill>
+                  <a:srgbClr val="212121"/>
+                </a:solidFill>
+                <a:latin typeface="Calibri"/>
+              </a:rPr>
+              <a:t>: the middle of the nine rates; factors run 1.38 (slowest) to 0.72 (fastest)</a:t>
+            </a:r>
+          </a:p>
+          <a:p>
+            <a:pPr marL="228600" indent="-228600">
+              <a:spcAft>
+                <a:spcPts val="800"/>
+              </a:spcAft>
+              <a:buChar char="•"/>
+            </a:pPr>
+            <a:r>
+              <a:rPr sz="1250" b="0">
+                <a:solidFill>
+                  <a:srgbClr val="212121"/>
+                </a:solidFill>
+                <a:latin typeface="Calibri"/>
+              </a:rPr>
+              <a:t>Why the ceiling: the hazard has β = −0.012 ± 0.002 and the drift does not move; the memory is in event size, in the tail</a:t>
             </a:r>
           </a:p>
         </p:txBody>
@@ -3427,7 +3664,7 @@
         <p:spPr>
           <a:xfrm>
             <a:off x="640080" y="4617720"/>
-            <a:ext cx="10972800" cy="1280160"/>
+            <a:ext cx="10972800" cy="1371600"/>
           </a:xfrm>
           <a:prstGeom prst="rect">
             <a:avLst/>
@@ -3440,6 +3677,22 @@
           </a:bodyPr>
           <a:lstStyle/>
           <a:p>
+            <a:pPr>
+              <a:spcAft>
+                <a:spcPts val="600"/>
+              </a:spcAft>
+            </a:pPr>
+            <a:r>
+              <a:rPr sz="1600" b="1">
+                <a:solidFill>
+                  <a:srgbClr val="1E2761"/>
+                </a:solidFill>
+                <a:latin typeface="Calibri"/>
+              </a:rPr>
+              <a:t>Result</a:t>
+            </a:r>
+          </a:p>
+          <a:p>
             <a:pPr marL="228600" indent="-228600">
               <a:spcAft>
                 <a:spcPts val="800"/>
@@ -3447,13 +3700,31 @@
               <a:buChar char="•"/>
             </a:pPr>
             <a:r>
-              <a:rPr sz="1200" b="0">
-                <a:solidFill>
-                  <a:srgbClr val="212121"/>
-                </a:solidFill>
-                <a:latin typeface="Calibri"/>
-              </a:rPr>
-              <a:t>Result (right panel): the spread of mean u at γ = 0.5 goes from 4.1% to 26.5% against 24% in the data, and the model tracks the data over the whole strain window; yield peaks are unchanged (RMS 2.5% → 2.8%)</a:t>
+              <a:rPr sz="1250" b="0">
+                <a:solidFill>
+                  <a:srgbClr val="212121"/>
+                </a:solidFill>
+                <a:latin typeface="Calibri"/>
+              </a:rPr>
+              <a:t>Spread of mean u at γ = 0.5: </a:t>
+            </a:r>
+            <a:r>
+              <a:rPr sz="1250" b="1">
+                <a:solidFill>
+                  <a:srgbClr val="212121"/>
+                </a:solidFill>
+                <a:latin typeface="Calibri"/>
+              </a:rPr>
+              <a:t>4.1% → 26.5%</a:t>
+            </a:r>
+            <a:r>
+              <a:rPr sz="1250" b="0">
+                <a:solidFill>
+                  <a:srgbClr val="212121"/>
+                </a:solidFill>
+                <a:latin typeface="Calibri"/>
+              </a:rPr>
+              <a:t>, against 24% in the data, tracking the data across the strain window; yield peaks unchanged (RMS 2.5% → 2.8%)</a:t>
             </a:r>
           </a:p>
           <a:p>
@@ -3464,77 +3735,13 @@
               <a:buChar char="•"/>
             </a:pPr>
             <a:r>
-              <a:rPr sz="1200" b="0">
-                <a:solidFill>
-                  <a:srgbClr val="212121"/>
-                </a:solidFill>
-                <a:latin typeface="Calibri"/>
-              </a:rPr>
-              <a:t>The same relation applied within a preparation, a per-run factor exp(κ·δu₀) with κ = β · d ln(rate)/du₀ = −43 and no new parameter, predicts how long a run remembers its initial energy (0.44 / 0.27 / 0.22 / 0.17 at γ = 0.1 / 0.2 / 0.3 / 0.5, against 0.63 / 0.27 / 0.24 / 0.18 in the data). The memory also relaxes with strain, with γ_r ≈ 0.2</a:t>
-            </a:r>
-          </a:p>
-        </p:txBody>
-      </p:sp>
-      <p:sp>
-        <p:nvSpPr>
-          <p:cNvPr id="7" name="Rounded Rectangle 6"/>
-          <p:cNvSpPr/>
-          <p:nvPr/>
-        </p:nvSpPr>
-        <p:spPr>
-          <a:xfrm>
-            <a:off x="548640" y="6053328"/>
-            <a:ext cx="11091672" cy="566928"/>
-          </a:xfrm>
-          <a:prstGeom prst="roundRect">
-            <a:avLst>
-              <a:gd name="adj" fmla="val 18000"/>
-            </a:avLst>
-          </a:prstGeom>
-          <a:solidFill>
-            <a:srgbClr val="F2F2F2"/>
-          </a:solidFill>
-          <a:ln>
-            <a:noFill/>
-          </a:ln>
-          <a:effectLst/>
-        </p:spPr>
-        <p:style>
-          <a:lnRef idx="1">
-            <a:schemeClr val="accent1"/>
-          </a:lnRef>
-          <a:fillRef idx="3">
-            <a:schemeClr val="accent1"/>
-          </a:fillRef>
-          <a:effectRef idx="2">
-            <a:schemeClr val="accent1"/>
-          </a:effectRef>
-          <a:fontRef idx="minor">
-            <a:schemeClr val="lt1"/>
-          </a:fontRef>
-        </p:style>
-        <p:txBody>
-          <a:bodyPr rtlCol="0" anchor="ctr" wrap="square" lIns="164592" rIns="164592" tIns="0" bIns="0"/>
-          <a:lstStyle/>
-          <a:p>
-            <a:pPr algn="ctr"/>
-            <a:r>
-              <a:rPr sz="1350" b="1">
-                <a:solidFill>
-                  <a:srgbClr val="1E2761"/>
-                </a:solidFill>
-                <a:latin typeface="Calibri"/>
-              </a:rPr>
-              <a:t>Takeaway: </a:t>
-            </a:r>
-            <a:r>
-              <a:rPr sz="1350" b="0">
-                <a:solidFill>
-                  <a:srgbClr val="212121"/>
-                </a:solidFill>
-                <a:latin typeface="Calibri"/>
-              </a:rPr>
-              <a:t>To the resolution of this dataset, the missing state variable is a single multiplicative factor on the ceiling, set by the preparation and erased by plastic strain.</a:t>
+              <a:rPr sz="1250" b="0">
+                <a:solidFill>
+                  <a:srgbClr val="212121"/>
+                </a:solidFill>
+                <a:latin typeface="Calibri"/>
+              </a:rPr>
+              <a:t>Within a preparation the same relation, exp(κ·δu₀) with κ = β · d ln(rate)/du₀ = −43 and no new parameter, predicts how long a run remembers its initial energy: 0.44 / 0.27 / 0.22 / 0.17 at γ = 0.1 / 0.2 / 0.3 / 0.5 (data 0.63 / 0.27 / 0.24 / 0.18). The memory relaxes with strain, γ_r ≈ 0.2</a:t>
             </a:r>
           </a:p>
         </p:txBody>
@@ -3548,7 +3755,7 @@
 </file>
 
 <file path=ppt/slides/slide2.xml><?xml version="1.0" encoding="utf-8"?>
-<p:sld xmlns:a="http://schemas.openxmlformats.org/drawingml/2006/main" xmlns:p="http://schemas.openxmlformats.org/presentationml/2006/main" xmlns:r="http://schemas.openxmlformats.org/officeDocument/2006/relationships">
+<p:sld xmlns:a="http://schemas.openxmlformats.org/drawingml/2006/main" xmlns:r="http://schemas.openxmlformats.org/officeDocument/2006/relationships" xmlns:p="http://schemas.openxmlformats.org/presentationml/2006/main">
   <p:cSld>
     <p:spTree>
       <p:nvGrpSpPr>
@@ -3556,7 +3763,853 @@
         <p:cNvGrpSpPr/>
         <p:nvPr/>
       </p:nvGrpSpPr>
-      <p:grpSpPr/>
+      <p:grpSpPr>
+        <a:xfrm>
+          <a:off x="0" y="0"/>
+          <a:ext cx="0" cy="0"/>
+          <a:chOff x="0" y="0"/>
+          <a:chExt cx="0" cy="0"/>
+        </a:xfrm>
+      </p:grpSpPr>
+      <p:sp>
+        <p:nvSpPr>
+          <p:cNvPr id="2" name="TextBox 1"/>
+          <p:cNvSpPr txBox="1"/>
+          <p:nvPr/>
+        </p:nvSpPr>
+        <p:spPr>
+          <a:xfrm>
+            <a:off x="548640" y="292608"/>
+            <a:ext cx="11091672" cy="461665"/>
+          </a:xfrm>
+          <a:prstGeom prst="rect">
+            <a:avLst/>
+          </a:prstGeom>
+          <a:noFill/>
+        </p:spPr>
+        <p:txBody>
+          <a:bodyPr wrap="square" lIns="0" tIns="0" rIns="0" bIns="0">
+            <a:spAutoFit/>
+          </a:bodyPr>
+          <a:lstStyle/>
+          <a:p>
+            <a:r>
+              <a:rPr lang="en-US" sz="3000" b="1" dirty="0">
+                <a:solidFill>
+                  <a:srgbClr val="1E2761"/>
+                </a:solidFill>
+                <a:latin typeface="Calibri"/>
+              </a:rPr>
+              <a:t>Variables</a:t>
+            </a:r>
+            <a:endParaRPr sz="3000" b="1" dirty="0">
+              <a:solidFill>
+                <a:srgbClr val="1E2761"/>
+              </a:solidFill>
+              <a:latin typeface="Calibri"/>
+            </a:endParaRPr>
+          </a:p>
+        </p:txBody>
+      </p:sp>
+      <p:sp>
+        <p:nvSpPr>
+          <p:cNvPr id="3" name="TextBox 2"/>
+          <p:cNvSpPr txBox="1"/>
+          <p:nvPr/>
+        </p:nvSpPr>
+        <p:spPr>
+          <a:xfrm>
+            <a:off x="640080" y="1234440"/>
+            <a:ext cx="5394960" cy="2182649"/>
+          </a:xfrm>
+          <a:prstGeom prst="rect">
+            <a:avLst/>
+          </a:prstGeom>
+          <a:noFill/>
+        </p:spPr>
+        <p:txBody>
+          <a:bodyPr wrap="square" lIns="0" tIns="0" rIns="0" bIns="0">
+            <a:spAutoFit/>
+          </a:bodyPr>
+          <a:lstStyle/>
+          <a:p>
+            <a:pPr>
+              <a:spcAft>
+                <a:spcPts val="1100"/>
+              </a:spcAft>
+            </a:pPr>
+            <a:r>
+              <a:rPr sz="1600" b="0" dirty="0" err="1">
+                <a:solidFill>
+                  <a:srgbClr val="1E2761"/>
+                </a:solidFill>
+                <a:latin typeface="Cambria Math"/>
+              </a:rPr>
+              <a:t>γ</a:t>
+            </a:r>
+            <a:r>
+              <a:rPr sz="1600" b="0" dirty="0">
+                <a:solidFill>
+                  <a:srgbClr val="1E2761"/>
+                </a:solidFill>
+                <a:latin typeface="Cambria Math"/>
+              </a:rPr>
+              <a:t>   </a:t>
+            </a:r>
+            <a:r>
+              <a:rPr sz="1500" b="0" dirty="0">
+                <a:solidFill>
+                  <a:srgbClr val="212121"/>
+                </a:solidFill>
+                <a:latin typeface="Calibri"/>
+              </a:rPr>
+              <a:t>applied shear strain; one step is 10⁻⁵, runs go to 0.5</a:t>
+            </a:r>
+          </a:p>
+          <a:p>
+            <a:pPr>
+              <a:spcAft>
+                <a:spcPts val="1100"/>
+              </a:spcAft>
+            </a:pPr>
+            <a:r>
+              <a:rPr sz="1600" b="0" dirty="0" err="1">
+                <a:solidFill>
+                  <a:srgbClr val="1E2761"/>
+                </a:solidFill>
+                <a:latin typeface="Cambria Math"/>
+              </a:rPr>
+              <a:t>τ</a:t>
+            </a:r>
+            <a:r>
+              <a:rPr sz="1600" b="0" dirty="0">
+                <a:solidFill>
+                  <a:srgbClr val="1E2761"/>
+                </a:solidFill>
+                <a:latin typeface="Cambria Math"/>
+              </a:rPr>
+              <a:t>   </a:t>
+            </a:r>
+            <a:r>
+              <a:rPr sz="1500" b="0" dirty="0">
+                <a:solidFill>
+                  <a:srgbClr val="212121"/>
+                </a:solidFill>
+                <a:latin typeface="Calibri"/>
+              </a:rPr>
+              <a:t>shear stress (raw stress ÷ 10⁴)</a:t>
+            </a:r>
+          </a:p>
+          <a:p>
+            <a:pPr>
+              <a:spcAft>
+                <a:spcPts val="1100"/>
+              </a:spcAft>
+            </a:pPr>
+            <a:r>
+              <a:rPr sz="1600" b="0" dirty="0">
+                <a:solidFill>
+                  <a:srgbClr val="1E2761"/>
+                </a:solidFill>
+                <a:latin typeface="Cambria Math"/>
+              </a:rPr>
+              <a:t>u = pe − u₀   </a:t>
+            </a:r>
+            <a:r>
+              <a:rPr lang="en-US" sz="1500" b="0" dirty="0">
+                <a:solidFill>
+                  <a:srgbClr val="212121"/>
+                </a:solidFill>
+                <a:latin typeface="Calibri"/>
+              </a:rPr>
+              <a:t>PE/</a:t>
+            </a:r>
+            <a:r>
+              <a:rPr sz="1500" b="0" dirty="0">
+                <a:solidFill>
+                  <a:srgbClr val="212121"/>
+                </a:solidFill>
+                <a:latin typeface="Calibri"/>
+              </a:rPr>
+              <a:t>atom above the reference u₀ = −4.60752</a:t>
+            </a:r>
+          </a:p>
+          <a:p>
+            <a:pPr>
+              <a:spcAft>
+                <a:spcPts val="1100"/>
+              </a:spcAft>
+            </a:pPr>
+            <a:r>
+              <a:rPr sz="1600" b="0" dirty="0">
+                <a:solidFill>
+                  <a:srgbClr val="1E2761"/>
+                </a:solidFill>
+                <a:latin typeface="Cambria Math"/>
+              </a:rPr>
+              <a:t>(u, </a:t>
+            </a:r>
+            <a:r>
+              <a:rPr sz="1600" b="0" dirty="0" err="1">
+                <a:solidFill>
+                  <a:srgbClr val="1E2761"/>
+                </a:solidFill>
+                <a:latin typeface="Cambria Math"/>
+              </a:rPr>
+              <a:t>τ</a:t>
+            </a:r>
+            <a:r>
+              <a:rPr sz="1600" b="0" dirty="0">
+                <a:solidFill>
+                  <a:srgbClr val="1E2761"/>
+                </a:solidFill>
+                <a:latin typeface="Cambria Math"/>
+              </a:rPr>
+              <a:t>) </a:t>
+            </a:r>
+            <a:r>
+              <a:rPr sz="1500" b="0" dirty="0">
+                <a:solidFill>
+                  <a:srgbClr val="212121"/>
+                </a:solidFill>
+                <a:latin typeface="Calibri"/>
+              </a:rPr>
+              <a:t>two-coordinate state of a run; 20 × 20 grid</a:t>
+            </a:r>
+          </a:p>
+          <a:p>
+            <a:pPr>
+              <a:spcAft>
+                <a:spcPts val="1100"/>
+              </a:spcAft>
+            </a:pPr>
+            <a:r>
+              <a:rPr sz="1600" b="0" dirty="0">
+                <a:solidFill>
+                  <a:srgbClr val="1E2761"/>
+                </a:solidFill>
+                <a:latin typeface="Cambria Math"/>
+              </a:rPr>
+              <a:t>2μ(u, </a:t>
+            </a:r>
+            <a:r>
+              <a:rPr sz="1600" b="0" dirty="0" err="1">
+                <a:solidFill>
+                  <a:srgbClr val="1E2761"/>
+                </a:solidFill>
+                <a:latin typeface="Cambria Math"/>
+              </a:rPr>
+              <a:t>τ</a:t>
+            </a:r>
+            <a:r>
+              <a:rPr sz="1600" b="0" dirty="0">
+                <a:solidFill>
+                  <a:srgbClr val="1E2761"/>
+                </a:solidFill>
+                <a:latin typeface="Cambria Math"/>
+              </a:rPr>
+              <a:t>)   </a:t>
+            </a:r>
+            <a:r>
+              <a:rPr sz="1500" b="0" dirty="0">
+                <a:solidFill>
+                  <a:srgbClr val="212121"/>
+                </a:solidFill>
+                <a:latin typeface="Calibri"/>
+              </a:rPr>
+              <a:t>elastic modulus</a:t>
+            </a:r>
+          </a:p>
+          <a:p>
+            <a:pPr>
+              <a:spcAft>
+                <a:spcPts val="1100"/>
+              </a:spcAft>
+            </a:pPr>
+            <a:r>
+              <a:rPr sz="1600" b="0" dirty="0">
+                <a:solidFill>
+                  <a:srgbClr val="1E2761"/>
+                </a:solidFill>
+                <a:latin typeface="Cambria Math"/>
+              </a:rPr>
+              <a:t>s = −</a:t>
+            </a:r>
+            <a:r>
+              <a:rPr sz="1600" b="0" dirty="0" err="1">
+                <a:solidFill>
+                  <a:srgbClr val="1E2761"/>
+                </a:solidFill>
+                <a:latin typeface="Cambria Math"/>
+              </a:rPr>
+              <a:t>Δτ</a:t>
+            </a:r>
+            <a:r>
+              <a:rPr sz="1600" b="0" dirty="0">
+                <a:solidFill>
+                  <a:srgbClr val="1E2761"/>
+                </a:solidFill>
+                <a:latin typeface="Cambria Math"/>
+              </a:rPr>
+              <a:t> </a:t>
+            </a:r>
+            <a:r>
+              <a:rPr lang="en-US" sz="1600" b="0" dirty="0">
+                <a:solidFill>
+                  <a:srgbClr val="1E2761"/>
+                </a:solidFill>
+                <a:latin typeface="Cambria Math"/>
+              </a:rPr>
+              <a:t>  </a:t>
+            </a:r>
+            <a:r>
+              <a:rPr lang="en-US" sz="1500" b="0" dirty="0">
+                <a:solidFill>
+                  <a:srgbClr val="212121"/>
+                </a:solidFill>
+                <a:latin typeface="Calibri"/>
+              </a:rPr>
+              <a:t>an </a:t>
+            </a:r>
+            <a:r>
+              <a:rPr sz="1500" b="0" dirty="0">
+                <a:solidFill>
+                  <a:srgbClr val="212121"/>
+                </a:solidFill>
+                <a:latin typeface="Calibri"/>
+              </a:rPr>
+              <a:t>event: a step where the stress drops, of size s</a:t>
+            </a:r>
+          </a:p>
+        </p:txBody>
+      </p:sp>
+      <p:sp>
+        <p:nvSpPr>
+          <p:cNvPr id="4" name="TextBox 3"/>
+          <p:cNvSpPr txBox="1"/>
+          <p:nvPr/>
+        </p:nvSpPr>
+        <p:spPr>
+          <a:xfrm>
+            <a:off x="6355080" y="1234440"/>
+            <a:ext cx="5303520" cy="3172663"/>
+          </a:xfrm>
+          <a:prstGeom prst="rect">
+            <a:avLst/>
+          </a:prstGeom>
+          <a:noFill/>
+        </p:spPr>
+        <p:txBody>
+          <a:bodyPr wrap="square" lIns="0" tIns="0" rIns="0" bIns="0">
+            <a:spAutoFit/>
+          </a:bodyPr>
+          <a:lstStyle/>
+          <a:p>
+            <a:pPr>
+              <a:spcAft>
+                <a:spcPts val="1100"/>
+              </a:spcAft>
+            </a:pPr>
+            <a:r>
+              <a:rPr lang="el-GR" sz="1600" dirty="0">
+                <a:solidFill>
+                  <a:srgbClr val="1E2761"/>
+                </a:solidFill>
+                <a:latin typeface="Cambria Math"/>
+              </a:rPr>
+              <a:t>ρ(</a:t>
+            </a:r>
+            <a:r>
+              <a:rPr lang="en-US" sz="1600" dirty="0">
+                <a:solidFill>
+                  <a:srgbClr val="1E2761"/>
+                </a:solidFill>
+                <a:latin typeface="Cambria Math"/>
+              </a:rPr>
+              <a:t>s) </a:t>
+            </a:r>
+            <a:r>
+              <a:rPr lang="en-US" sz="1600" b="1" dirty="0">
+                <a:solidFill>
+                  <a:srgbClr val="212121"/>
+                </a:solidFill>
+              </a:rPr>
+              <a:t>density of events </a:t>
+            </a:r>
+            <a:r>
+              <a:rPr lang="en-US" sz="1600" dirty="0">
+                <a:solidFill>
+                  <a:srgbClr val="212121"/>
+                </a:solidFill>
+              </a:rPr>
+              <a:t>of size s</a:t>
+            </a:r>
+            <a:endParaRPr lang="en-US" sz="1600" b="0" dirty="0">
+              <a:solidFill>
+                <a:srgbClr val="1E2761"/>
+              </a:solidFill>
+              <a:latin typeface="Cambria Math"/>
+            </a:endParaRPr>
+          </a:p>
+          <a:p>
+            <a:pPr>
+              <a:spcAft>
+                <a:spcPts val="1100"/>
+              </a:spcAft>
+            </a:pPr>
+            <a:r>
+              <a:rPr sz="1600" b="0" dirty="0">
+                <a:solidFill>
+                  <a:srgbClr val="1E2761"/>
+                </a:solidFill>
+                <a:latin typeface="Cambria Math"/>
+              </a:rPr>
+              <a:t>p(u, </a:t>
+            </a:r>
+            <a:r>
+              <a:rPr sz="1600" b="0" dirty="0" err="1">
+                <a:solidFill>
+                  <a:srgbClr val="1E2761"/>
+                </a:solidFill>
+                <a:latin typeface="Cambria Math"/>
+              </a:rPr>
+              <a:t>τ</a:t>
+            </a:r>
+            <a:r>
+              <a:rPr sz="1600" b="0" dirty="0">
+                <a:solidFill>
+                  <a:srgbClr val="1E2761"/>
+                </a:solidFill>
+                <a:latin typeface="Cambria Math"/>
+              </a:rPr>
+              <a:t>) </a:t>
+            </a:r>
+            <a:r>
+              <a:rPr sz="1500" b="1" dirty="0">
+                <a:solidFill>
+                  <a:srgbClr val="212121"/>
+                </a:solidFill>
+                <a:latin typeface="Calibri"/>
+              </a:rPr>
+              <a:t>probability per step </a:t>
+            </a:r>
+            <a:r>
+              <a:rPr sz="1500" b="0" dirty="0">
+                <a:solidFill>
+                  <a:srgbClr val="212121"/>
+                </a:solidFill>
+                <a:latin typeface="Calibri"/>
+              </a:rPr>
+              <a:t>that an </a:t>
+            </a:r>
+            <a:r>
+              <a:rPr lang="en-US" sz="1500" b="0" dirty="0">
+                <a:solidFill>
+                  <a:srgbClr val="212121"/>
+                </a:solidFill>
+                <a:latin typeface="Calibri"/>
+              </a:rPr>
+              <a:t>event occurs</a:t>
+            </a:r>
+            <a:endParaRPr sz="1500" b="0" dirty="0">
+              <a:solidFill>
+                <a:srgbClr val="212121"/>
+              </a:solidFill>
+              <a:latin typeface="Calibri"/>
+            </a:endParaRPr>
+          </a:p>
+          <a:p>
+            <a:pPr>
+              <a:spcAft>
+                <a:spcPts val="1100"/>
+              </a:spcAft>
+            </a:pPr>
+            <a:r>
+              <a:rPr sz="1600" b="0" dirty="0">
+                <a:solidFill>
+                  <a:srgbClr val="1E2761"/>
+                </a:solidFill>
+                <a:latin typeface="Cambria Math"/>
+              </a:rPr>
+              <a:t>P(s | u, </a:t>
+            </a:r>
+            <a:r>
+              <a:rPr sz="1600" b="0" dirty="0" err="1">
+                <a:solidFill>
+                  <a:srgbClr val="1E2761"/>
+                </a:solidFill>
+                <a:latin typeface="Cambria Math"/>
+              </a:rPr>
+              <a:t>τ</a:t>
+            </a:r>
+            <a:r>
+              <a:rPr sz="1600" b="0" dirty="0">
+                <a:solidFill>
+                  <a:srgbClr val="1E2761"/>
+                </a:solidFill>
+                <a:latin typeface="Cambria Math"/>
+              </a:rPr>
+              <a:t>) </a:t>
+            </a:r>
+            <a:r>
+              <a:rPr sz="1500" b="1" dirty="0">
+                <a:solidFill>
+                  <a:srgbClr val="212121"/>
+                </a:solidFill>
+                <a:latin typeface="Calibri"/>
+              </a:rPr>
+              <a:t>size distribution of events </a:t>
+            </a:r>
+            <a:r>
+              <a:rPr sz="1500" b="0" dirty="0">
+                <a:solidFill>
+                  <a:srgbClr val="212121"/>
+                </a:solidFill>
+                <a:latin typeface="Calibri"/>
+              </a:rPr>
+              <a:t>at a given state</a:t>
+            </a:r>
+          </a:p>
+          <a:p>
+            <a:pPr>
+              <a:spcAft>
+                <a:spcPts val="1100"/>
+              </a:spcAft>
+            </a:pPr>
+            <a:r>
+              <a:rPr sz="1600" b="0" dirty="0" err="1">
+                <a:solidFill>
+                  <a:srgbClr val="1E2761"/>
+                </a:solidFill>
+                <a:latin typeface="Cambria Math"/>
+              </a:rPr>
+              <a:t>s_c</a:t>
+            </a:r>
+            <a:r>
+              <a:rPr sz="1600" b="0" dirty="0">
+                <a:solidFill>
+                  <a:srgbClr val="1E2761"/>
+                </a:solidFill>
+                <a:latin typeface="Cambria Math"/>
+              </a:rPr>
+              <a:t>(u, </a:t>
+            </a:r>
+            <a:r>
+              <a:rPr sz="1600" b="0" dirty="0" err="1">
+                <a:solidFill>
+                  <a:srgbClr val="1E2761"/>
+                </a:solidFill>
+                <a:latin typeface="Cambria Math"/>
+              </a:rPr>
+              <a:t>τ</a:t>
+            </a:r>
+            <a:r>
+              <a:rPr sz="1600" b="0" dirty="0">
+                <a:solidFill>
+                  <a:srgbClr val="1E2761"/>
+                </a:solidFill>
+                <a:latin typeface="Cambria Math"/>
+              </a:rPr>
+              <a:t>) </a:t>
+            </a:r>
+            <a:r>
+              <a:rPr sz="1500" b="1" dirty="0">
+                <a:solidFill>
+                  <a:srgbClr val="212121"/>
+                </a:solidFill>
+                <a:latin typeface="Calibri"/>
+              </a:rPr>
+              <a:t>the largest event </a:t>
+            </a:r>
+            <a:r>
+              <a:rPr sz="1500" b="0" dirty="0">
+                <a:solidFill>
+                  <a:srgbClr val="212121"/>
+                </a:solidFill>
+                <a:latin typeface="Calibri"/>
+              </a:rPr>
+              <a:t>a state can produce</a:t>
+            </a:r>
+          </a:p>
+          <a:p>
+            <a:pPr>
+              <a:spcAft>
+                <a:spcPts val="1100"/>
+              </a:spcAft>
+            </a:pPr>
+            <a:r>
+              <a:rPr sz="1600" b="0" dirty="0">
+                <a:solidFill>
+                  <a:srgbClr val="1E2761"/>
+                </a:solidFill>
+                <a:latin typeface="Cambria Math"/>
+              </a:rPr>
+              <a:t>k, m, </a:t>
+            </a:r>
+            <a:r>
+              <a:rPr sz="1600" b="0" dirty="0" err="1">
+                <a:solidFill>
+                  <a:srgbClr val="1E2761"/>
+                </a:solidFill>
+                <a:latin typeface="Cambria Math"/>
+              </a:rPr>
+              <a:t>ε</a:t>
+            </a:r>
+            <a:r>
+              <a:rPr sz="1600" b="0" dirty="0">
+                <a:solidFill>
+                  <a:srgbClr val="1E2761"/>
+                </a:solidFill>
+                <a:latin typeface="Cambria Math"/>
+              </a:rPr>
+              <a:t>   </a:t>
+            </a:r>
+            <a:r>
+              <a:rPr sz="1500" b="1" dirty="0">
+                <a:solidFill>
+                  <a:srgbClr val="212121"/>
+                </a:solidFill>
+                <a:latin typeface="Calibri"/>
+              </a:rPr>
+              <a:t>constants </a:t>
+            </a:r>
+            <a:endParaRPr lang="en-US" sz="1500" b="1" dirty="0">
+              <a:solidFill>
+                <a:srgbClr val="212121"/>
+              </a:solidFill>
+              <a:latin typeface="Calibri"/>
+            </a:endParaRPr>
+          </a:p>
+          <a:p>
+            <a:pPr>
+              <a:spcAft>
+                <a:spcPts val="1100"/>
+              </a:spcAft>
+            </a:pPr>
+            <a:r>
+              <a:rPr sz="1600" b="0" dirty="0">
+                <a:solidFill>
+                  <a:srgbClr val="1E2761"/>
+                </a:solidFill>
+                <a:latin typeface="Cambria Math"/>
+              </a:rPr>
+              <a:t>q(u, </a:t>
+            </a:r>
+            <a:r>
+              <a:rPr sz="1600" b="0" dirty="0" err="1">
+                <a:solidFill>
+                  <a:srgbClr val="1E2761"/>
+                </a:solidFill>
+                <a:latin typeface="Cambria Math"/>
+              </a:rPr>
+              <a:t>τ</a:t>
+            </a:r>
+            <a:r>
+              <a:rPr sz="1600" b="0" dirty="0">
+                <a:solidFill>
+                  <a:srgbClr val="1E2761"/>
+                </a:solidFill>
+                <a:latin typeface="Cambria Math"/>
+              </a:rPr>
+              <a:t>)   </a:t>
+            </a:r>
+            <a:r>
+              <a:rPr sz="1500" b="0" dirty="0">
+                <a:solidFill>
+                  <a:srgbClr val="212121"/>
+                </a:solidFill>
+                <a:latin typeface="Calibri"/>
+              </a:rPr>
+              <a:t>plastic fraction of the strain rate</a:t>
+            </a:r>
+            <a:r>
+              <a:rPr lang="en-US" sz="1500" dirty="0">
+                <a:solidFill>
+                  <a:srgbClr val="212121"/>
+                </a:solidFill>
+                <a:latin typeface="Calibri"/>
+              </a:rPr>
+              <a:t>:</a:t>
+            </a:r>
+            <a:r>
+              <a:rPr sz="1500" b="0" dirty="0">
+                <a:solidFill>
+                  <a:srgbClr val="212121"/>
+                </a:solidFill>
+                <a:latin typeface="Calibri"/>
+              </a:rPr>
+              <a:t> 0</a:t>
+            </a:r>
+            <a:r>
+              <a:rPr lang="en-US" sz="1500" b="0" dirty="0">
+                <a:solidFill>
+                  <a:srgbClr val="212121"/>
+                </a:solidFill>
+                <a:latin typeface="Calibri"/>
+              </a:rPr>
+              <a:t>-&gt;</a:t>
+            </a:r>
+            <a:r>
+              <a:rPr sz="1500" b="0" dirty="0">
+                <a:solidFill>
+                  <a:srgbClr val="212121"/>
+                </a:solidFill>
+                <a:latin typeface="Calibri"/>
+              </a:rPr>
+              <a:t>elastic, 1</a:t>
+            </a:r>
+            <a:r>
+              <a:rPr lang="en-US" sz="1500" b="0" dirty="0">
+                <a:solidFill>
+                  <a:srgbClr val="212121"/>
+                </a:solidFill>
+                <a:latin typeface="Calibri"/>
+              </a:rPr>
+              <a:t>-&gt;</a:t>
+            </a:r>
+            <a:r>
+              <a:rPr sz="1500" b="0" dirty="0">
+                <a:solidFill>
+                  <a:srgbClr val="212121"/>
+                </a:solidFill>
+                <a:latin typeface="Calibri"/>
+              </a:rPr>
+              <a:t>steady </a:t>
+            </a:r>
+            <a:r>
+              <a:rPr lang="en-US" sz="1500" b="0" dirty="0">
+                <a:solidFill>
+                  <a:srgbClr val="212121"/>
+                </a:solidFill>
+                <a:latin typeface="Calibri"/>
+              </a:rPr>
+              <a:t>state</a:t>
+            </a:r>
+          </a:p>
+          <a:p>
+            <a:pPr>
+              <a:spcAft>
+                <a:spcPts val="1100"/>
+              </a:spcAft>
+            </a:pPr>
+            <a:r>
+              <a:rPr lang="en-US" sz="1500" dirty="0">
+                <a:solidFill>
+                  <a:srgbClr val="212121"/>
+                </a:solidFill>
+                <a:latin typeface="Calibri"/>
+              </a:rPr>
+              <a:t>	eq.-&gt; </a:t>
+            </a:r>
+            <a:r>
+              <a:rPr lang="en-US" sz="1500" dirty="0">
+                <a:solidFill>
+                  <a:srgbClr val="212121"/>
+                </a:solidFill>
+              </a:rPr>
+              <a:t>q = 1 − (d</a:t>
+            </a:r>
+            <a:r>
+              <a:rPr lang="el-GR" sz="1500" dirty="0">
+                <a:solidFill>
+                  <a:srgbClr val="212121"/>
+                </a:solidFill>
+              </a:rPr>
+              <a:t>τ/</a:t>
+            </a:r>
+            <a:r>
+              <a:rPr lang="en-US" sz="1500" dirty="0">
+                <a:solidFill>
+                  <a:srgbClr val="212121"/>
+                </a:solidFill>
+              </a:rPr>
+              <a:t>d</a:t>
+            </a:r>
+            <a:r>
+              <a:rPr lang="el-GR" sz="1500" dirty="0">
+                <a:solidFill>
+                  <a:srgbClr val="212121"/>
+                </a:solidFill>
+              </a:rPr>
+              <a:t>γ)/2μ</a:t>
+            </a:r>
+            <a:endParaRPr sz="1500" b="0" dirty="0">
+              <a:solidFill>
+                <a:srgbClr val="212121"/>
+              </a:solidFill>
+              <a:latin typeface="Calibri"/>
+            </a:endParaRPr>
+          </a:p>
+          <a:p>
+            <a:pPr>
+              <a:spcAft>
+                <a:spcPts val="1100"/>
+              </a:spcAft>
+            </a:pPr>
+            <a:r>
+              <a:rPr sz="1600" b="0" dirty="0">
+                <a:solidFill>
+                  <a:srgbClr val="1E2761"/>
+                </a:solidFill>
+                <a:latin typeface="Cambria Math"/>
+              </a:rPr>
+              <a:t>aging event   </a:t>
+            </a:r>
+            <a:r>
+              <a:rPr sz="1500" b="0" dirty="0">
+                <a:solidFill>
+                  <a:srgbClr val="212121"/>
+                </a:solidFill>
+                <a:latin typeface="Calibri"/>
+              </a:rPr>
+              <a:t>a step where u drops but </a:t>
+            </a:r>
+            <a:r>
+              <a:rPr sz="1500" b="0" dirty="0" err="1">
+                <a:solidFill>
+                  <a:srgbClr val="212121"/>
+                </a:solidFill>
+                <a:latin typeface="Calibri"/>
+              </a:rPr>
+              <a:t>τ</a:t>
+            </a:r>
+            <a:r>
+              <a:rPr sz="1500" b="0" dirty="0">
+                <a:solidFill>
+                  <a:srgbClr val="212121"/>
+                </a:solidFill>
+                <a:latin typeface="Calibri"/>
+              </a:rPr>
+              <a:t> does not (105,188); it relaxes energy without releasing stress</a:t>
+            </a:r>
+          </a:p>
+        </p:txBody>
+      </p:sp>
+    </p:spTree>
+  </p:cSld>
+  <p:clrMapOvr>
+    <a:masterClrMapping/>
+  </p:clrMapOvr>
+</p:sld>
+</file>
+
+<file path=ppt/slides/slide3.xml><?xml version="1.0" encoding="utf-8"?>
+<p:sld xmlns:a="http://schemas.openxmlformats.org/drawingml/2006/main" xmlns:r="http://schemas.openxmlformats.org/officeDocument/2006/relationships" xmlns:p="http://schemas.openxmlformats.org/presentationml/2006/main">
+  <p:cSld>
+    <p:spTree>
+      <p:nvGrpSpPr>
+        <p:cNvPr id="1" name=""/>
+        <p:cNvGrpSpPr/>
+        <p:nvPr/>
+      </p:nvGrpSpPr>
+      <p:grpSpPr>
+        <a:xfrm>
+          <a:off x="0" y="0"/>
+          <a:ext cx="0" cy="0"/>
+          <a:chOff x="0" y="0"/>
+          <a:chExt cx="0" cy="0"/>
+        </a:xfrm>
+      </p:grpSpPr>
       <p:sp>
         <p:nvSpPr>
           <p:cNvPr id="2" name="TextBox 1"/>
@@ -3574,7 +4627,7 @@
           <a:noFill/>
         </p:spPr>
         <p:txBody>
-          <a:bodyPr wrap="square" lIns="0" rIns="0" tIns="0" bIns="0">
+          <a:bodyPr wrap="square" lIns="0" tIns="0" rIns="0" bIns="0">
             <a:spAutoFit/>
           </a:bodyPr>
           <a:lstStyle/>
@@ -3586,7 +4639,7 @@
                 </a:solidFill>
                 <a:latin typeface="Calibri"/>
               </a:rPr>
-              <a:t>The variables</a:t>
+              <a:t>The symbolic-regression library  (library/symreg.py)</a:t>
             </a:r>
           </a:p>
         </p:txBody>
@@ -3600,7 +4653,7 @@
         <p:spPr>
           <a:xfrm>
             <a:off x="640080" y="1234440"/>
-            <a:ext cx="5394960" cy="4114800"/>
+            <a:ext cx="11000232" cy="1554272"/>
           </a:xfrm>
           <a:prstGeom prst="rect">
             <a:avLst/>
@@ -3608,158 +4661,161 @@
           <a:noFill/>
         </p:spPr>
         <p:txBody>
-          <a:bodyPr wrap="square" lIns="0" rIns="0" tIns="0" bIns="0">
+          <a:bodyPr wrap="square" lIns="0" tIns="0" rIns="0" bIns="0">
             <a:spAutoFit/>
           </a:bodyPr>
           <a:lstStyle/>
           <a:p>
             <a:pPr>
               <a:spcAft>
-                <a:spcPts val="1100"/>
+                <a:spcPts val="600"/>
               </a:spcAft>
             </a:pPr>
             <a:r>
-              <a:rPr sz="1600" b="0">
+              <a:rPr sz="1600" b="1" dirty="0">
                 <a:solidFill>
                   <a:srgbClr val="1E2761"/>
                 </a:solidFill>
-                <a:latin typeface="Cambria Math"/>
-              </a:rPr>
-              <a:t>γ   </a:t>
-            </a:r>
-            <a:r>
-              <a:rPr sz="1500" b="0">
-                <a:solidFill>
-                  <a:srgbClr val="212121"/>
-                </a:solidFill>
-                <a:latin typeface="Calibri"/>
-              </a:rPr>
-              <a:t>applied shear strain; one step is 10⁻⁵, runs go to 0.5</a:t>
-            </a:r>
-          </a:p>
-          <a:p>
-            <a:pPr>
+                <a:latin typeface="Calibri"/>
+              </a:rPr>
+              <a:t>What it does</a:t>
+            </a:r>
+          </a:p>
+          <a:p>
+            <a:pPr marL="228600" indent="-228600">
               <a:spcAft>
-                <a:spcPts val="1100"/>
+                <a:spcPts val="800"/>
               </a:spcAft>
+              <a:buChar char="•"/>
             </a:pPr>
             <a:r>
-              <a:rPr sz="1600" b="0">
-                <a:solidFill>
-                  <a:srgbClr val="1E2761"/>
-                </a:solidFill>
-                <a:latin typeface="Cambria Math"/>
-              </a:rPr>
-              <a:t>τ   </a:t>
-            </a:r>
-            <a:r>
-              <a:rPr sz="1500" b="0">
-                <a:solidFill>
-                  <a:srgbClr val="212121"/>
-                </a:solidFill>
-                <a:latin typeface="Calibri"/>
-              </a:rPr>
-              <a:t>shear stress (raw stress ÷ 10⁴)</a:t>
-            </a:r>
-          </a:p>
-          <a:p>
-            <a:pPr>
+              <a:rPr sz="1500" b="0" dirty="0">
+                <a:solidFill>
+                  <a:srgbClr val="212121"/>
+                </a:solidFill>
+                <a:latin typeface="Calibri"/>
+              </a:rPr>
+              <a:t>Given points (x, y), it searches for a formula y = </a:t>
+            </a:r>
+            <a:r>
+              <a:rPr sz="1500" b="0" dirty="0" err="1">
+                <a:solidFill>
+                  <a:srgbClr val="212121"/>
+                </a:solidFill>
+                <a:latin typeface="Calibri"/>
+              </a:rPr>
+              <a:t>a·f</a:t>
+            </a:r>
+            <a:r>
+              <a:rPr sz="1500" b="0" dirty="0">
+                <a:solidFill>
+                  <a:srgbClr val="212121"/>
+                </a:solidFill>
+                <a:latin typeface="Calibri"/>
+              </a:rPr>
+              <a:t>(x) + b </a:t>
+            </a:r>
+            <a:endParaRPr lang="en-US" sz="1500" b="0" dirty="0">
+              <a:solidFill>
+                <a:srgbClr val="212121"/>
+              </a:solidFill>
+              <a:latin typeface="Calibri"/>
+            </a:endParaRPr>
+          </a:p>
+          <a:p>
+            <a:pPr marL="228600" indent="-228600">
               <a:spcAft>
-                <a:spcPts val="1100"/>
+                <a:spcPts val="800"/>
               </a:spcAft>
+              <a:buChar char="•"/>
             </a:pPr>
             <a:r>
-              <a:rPr sz="1600" b="0">
-                <a:solidFill>
-                  <a:srgbClr val="1E2761"/>
-                </a:solidFill>
-                <a:latin typeface="Cambria Math"/>
-              </a:rPr>
-              <a:t>u = pe − u₀   </a:t>
-            </a:r>
-            <a:r>
-              <a:rPr sz="1500" b="0">
-                <a:solidFill>
-                  <a:srgbClr val="212121"/>
-                </a:solidFill>
-                <a:latin typeface="Calibri"/>
-              </a:rPr>
-              <a:t>potential energy per atom above the reference u₀ = −4.60752; high u is a poorly annealed glass</a:t>
-            </a:r>
-          </a:p>
-          <a:p>
-            <a:pPr>
+              <a:rPr lang="en-US" sz="1500" b="0" dirty="0">
+                <a:solidFill>
+                  <a:srgbClr val="212121"/>
+                </a:solidFill>
+                <a:latin typeface="Calibri"/>
+              </a:rPr>
+              <a:t>Uses </a:t>
+            </a:r>
+            <a:r>
+              <a:rPr sz="1500" b="0" dirty="0">
+                <a:solidFill>
+                  <a:srgbClr val="212121"/>
+                </a:solidFill>
+                <a:latin typeface="Calibri"/>
+              </a:rPr>
+              <a:t>a </a:t>
+            </a:r>
+            <a:r>
+              <a:rPr lang="en-US" sz="1500" b="0" dirty="0">
+                <a:solidFill>
+                  <a:srgbClr val="212121"/>
+                </a:solidFill>
+                <a:latin typeface="Calibri"/>
+              </a:rPr>
+              <a:t>library</a:t>
+            </a:r>
+            <a:r>
+              <a:rPr sz="1500" b="0" dirty="0">
+                <a:solidFill>
+                  <a:srgbClr val="212121"/>
+                </a:solidFill>
+                <a:latin typeface="Calibri"/>
+              </a:rPr>
+              <a:t> of operators (exp, log, 1/x, x², √x, and + − × ÷) with up to two fitted constants inside f</a:t>
+            </a:r>
+          </a:p>
+          <a:p>
+            <a:pPr marL="228600" indent="-228600">
               <a:spcAft>
-                <a:spcPts val="1100"/>
+                <a:spcPts val="800"/>
               </a:spcAft>
+              <a:buChar char="•"/>
             </a:pPr>
             <a:r>
-              <a:rPr sz="1600" b="0">
-                <a:solidFill>
-                  <a:srgbClr val="1E2761"/>
-                </a:solidFill>
-                <a:latin typeface="Cambria Math"/>
-              </a:rPr>
-              <a:t>(u, τ)   </a:t>
-            </a:r>
-            <a:r>
-              <a:rPr sz="1500" b="0">
-                <a:solidFill>
-                  <a:srgbClr val="212121"/>
-                </a:solidFill>
-                <a:latin typeface="Calibri"/>
-              </a:rPr>
-              <a:t>the two-coordinate state of a run; every field lives on a 20 × 20 grid over this plane, plus a catch-all ring</a:t>
-            </a:r>
-          </a:p>
-          <a:p>
-            <a:pPr>
+              <a:rPr lang="en-US" sz="1500" b="0" dirty="0">
+                <a:solidFill>
+                  <a:srgbClr val="212121"/>
+                </a:solidFill>
+                <a:latin typeface="Calibri"/>
+              </a:rPr>
+              <a:t>E</a:t>
+            </a:r>
+            <a:r>
+              <a:rPr sz="1500" b="0" dirty="0">
+                <a:solidFill>
+                  <a:srgbClr val="212121"/>
+                </a:solidFill>
+                <a:latin typeface="Calibri"/>
+              </a:rPr>
+              <a:t>numerates every formula up to a complexity budget</a:t>
+            </a:r>
+          </a:p>
+          <a:p>
+            <a:pPr marL="228600" indent="-228600">
               <a:spcAft>
-                <a:spcPts val="1100"/>
+                <a:spcPts val="800"/>
               </a:spcAft>
+              <a:buChar char="•"/>
             </a:pPr>
             <a:r>
-              <a:rPr sz="1600" b="0">
-                <a:solidFill>
-                  <a:srgbClr val="1E2761"/>
-                </a:solidFill>
-                <a:latin typeface="Cambria Math"/>
-              </a:rPr>
-              <a:t>2μ(u, τ)   </a:t>
-            </a:r>
-            <a:r>
-              <a:rPr sz="1500" b="0">
-                <a:solidFill>
-                  <a:srgbClr val="212121"/>
-                </a:solidFill>
-                <a:latin typeface="Calibri"/>
-              </a:rPr>
-              <a:t>elastic modulus, the slope dτ/dγ on elastic steps (about 20)</a:t>
-            </a:r>
-          </a:p>
-          <a:p>
-            <a:pPr>
-              <a:spcAft>
-                <a:spcPts val="1100"/>
-              </a:spcAft>
-            </a:pPr>
-            <a:r>
-              <a:rPr sz="1600" b="0">
-                <a:solidFill>
-                  <a:srgbClr val="1E2761"/>
-                </a:solidFill>
-                <a:latin typeface="Cambria Math"/>
-              </a:rPr>
-              <a:t>s = −Δτ   </a:t>
-            </a:r>
-            <a:r>
-              <a:rPr sz="1500" b="0">
-                <a:solidFill>
-                  <a:srgbClr val="212121"/>
-                </a:solidFill>
-                <a:latin typeface="Calibri"/>
-              </a:rPr>
-              <a:t>an event: a step where the stress drops, of size s; 187,468 of them, from 10⁻⁶ to 1.16</a:t>
+              <a:rPr lang="en-US" sz="1500" b="0" dirty="0">
+                <a:solidFill>
+                  <a:srgbClr val="212121"/>
+                </a:solidFill>
+                <a:latin typeface="Calibri"/>
+              </a:rPr>
+              <a:t>R</a:t>
+            </a:r>
+            <a:r>
+              <a:rPr sz="1500" b="0" dirty="0">
+                <a:solidFill>
+                  <a:srgbClr val="212121"/>
+                </a:solidFill>
+                <a:latin typeface="Calibri"/>
+              </a:rPr>
+              <a:t>eturns the exact Pareto front: the best misfit at each complexity</a:t>
             </a:r>
           </a:p>
         </p:txBody>
@@ -3772,8 +4828,8 @@
         </p:nvSpPr>
         <p:spPr>
           <a:xfrm>
-            <a:off x="6355080" y="1234440"/>
-            <a:ext cx="5303520" cy="4114800"/>
+            <a:off x="640080" y="3086100"/>
+            <a:ext cx="11018520" cy="1554272"/>
           </a:xfrm>
           <a:prstGeom prst="rect">
             <a:avLst/>
@@ -3781,296 +4837,7 @@
           <a:noFill/>
         </p:spPr>
         <p:txBody>
-          <a:bodyPr wrap="square" lIns="0" rIns="0" tIns="0" bIns="0">
-            <a:spAutoFit/>
-          </a:bodyPr>
-          <a:lstStyle/>
-          <a:p>
-            <a:pPr>
-              <a:spcAft>
-                <a:spcPts val="1100"/>
-              </a:spcAft>
-            </a:pPr>
-            <a:r>
-              <a:rPr sz="1600" b="0">
-                <a:solidFill>
-                  <a:srgbClr val="1E2761"/>
-                </a:solidFill>
-                <a:latin typeface="Cambria Math"/>
-              </a:rPr>
-              <a:t>p(u, τ)   </a:t>
-            </a:r>
-            <a:r>
-              <a:rPr sz="1500" b="0">
-                <a:solidFill>
-                  <a:srgbClr val="212121"/>
-                </a:solidFill>
-                <a:latin typeface="Calibri"/>
-              </a:rPr>
-              <a:t>event hazard: the probability per step that an event fires at this state (median about 0.3% per step)</a:t>
-            </a:r>
-          </a:p>
-          <a:p>
-            <a:pPr>
-              <a:spcAft>
-                <a:spcPts val="1100"/>
-              </a:spcAft>
-            </a:pPr>
-            <a:r>
-              <a:rPr sz="1600" b="0">
-                <a:solidFill>
-                  <a:srgbClr val="1E2761"/>
-                </a:solidFill>
-                <a:latin typeface="Cambria Math"/>
-              </a:rPr>
-              <a:t>P(s | u, τ)   </a:t>
-            </a:r>
-            <a:r>
-              <a:rPr sz="1500" b="0">
-                <a:solidFill>
-                  <a:srgbClr val="212121"/>
-                </a:solidFill>
-                <a:latin typeface="Calibri"/>
-              </a:rPr>
-              <a:t>the size distribution of events at a given state, the object we fit</a:t>
-            </a:r>
-          </a:p>
-          <a:p>
-            <a:pPr>
-              <a:spcAft>
-                <a:spcPts val="1100"/>
-              </a:spcAft>
-            </a:pPr>
-            <a:r>
-              <a:rPr sz="1600" b="0">
-                <a:solidFill>
-                  <a:srgbClr val="1E2761"/>
-                </a:solidFill>
-                <a:latin typeface="Cambria Math"/>
-              </a:rPr>
-              <a:t>s_c(u, τ)   </a:t>
-            </a:r>
-            <a:r>
-              <a:rPr sz="1500" b="0">
-                <a:solidFill>
-                  <a:srgbClr val="212121"/>
-                </a:solidFill>
-                <a:latin typeface="Calibri"/>
-              </a:rPr>
-              <a:t>the ceiling: the largest event a state can produce; the only state-dependent parameter of the law</a:t>
-            </a:r>
-          </a:p>
-          <a:p>
-            <a:pPr>
-              <a:spcAft>
-                <a:spcPts val="1100"/>
-              </a:spcAft>
-            </a:pPr>
-            <a:r>
-              <a:rPr sz="1600" b="0">
-                <a:solidFill>
-                  <a:srgbClr val="1E2761"/>
-                </a:solidFill>
-                <a:latin typeface="Cambria Math"/>
-              </a:rPr>
-              <a:t>k, m, ε   </a:t>
-            </a:r>
-            <a:r>
-              <a:rPr sz="1500" b="0">
-                <a:solidFill>
-                  <a:srgbClr val="212121"/>
-                </a:solidFill>
-                <a:latin typeface="Calibri"/>
-              </a:rPr>
-              <a:t>the law’s three global constants (small-size exponent, ceiling exponent, rounding scale)</a:t>
-            </a:r>
-          </a:p>
-          <a:p>
-            <a:pPr>
-              <a:spcAft>
-                <a:spcPts val="1100"/>
-              </a:spcAft>
-            </a:pPr>
-            <a:r>
-              <a:rPr sz="1600" b="0">
-                <a:solidFill>
-                  <a:srgbClr val="1E2761"/>
-                </a:solidFill>
-                <a:latin typeface="Cambria Math"/>
-              </a:rPr>
-              <a:t>q(u, τ)   </a:t>
-            </a:r>
-            <a:r>
-              <a:rPr sz="1500" b="0">
-                <a:solidFill>
-                  <a:srgbClr val="212121"/>
-                </a:solidFill>
-                <a:latin typeface="Calibri"/>
-              </a:rPr>
-              <a:t>plastic fraction of the strain rate, q = 1 − (dτ/dγ)/2μ; 0 is elastic, 1 is steady flow</a:t>
-            </a:r>
-          </a:p>
-          <a:p>
-            <a:pPr>
-              <a:spcAft>
-                <a:spcPts val="1100"/>
-              </a:spcAft>
-            </a:pPr>
-            <a:r>
-              <a:rPr sz="1600" b="0">
-                <a:solidFill>
-                  <a:srgbClr val="1E2761"/>
-                </a:solidFill>
-                <a:latin typeface="Cambria Math"/>
-              </a:rPr>
-              <a:t>aging event   </a:t>
-            </a:r>
-            <a:r>
-              <a:rPr sz="1500" b="0">
-                <a:solidFill>
-                  <a:srgbClr val="212121"/>
-                </a:solidFill>
-                <a:latin typeface="Calibri"/>
-              </a:rPr>
-              <a:t>a step where u drops but τ does not (105,188); it relaxes energy without releasing stress</a:t>
-            </a:r>
-          </a:p>
-        </p:txBody>
-      </p:sp>
-      <p:sp>
-        <p:nvSpPr>
-          <p:cNvPr id="5" name="Rounded Rectangle 4"/>
-          <p:cNvSpPr/>
-          <p:nvPr/>
-        </p:nvSpPr>
-        <p:spPr>
-          <a:xfrm>
-            <a:off x="548640" y="6053328"/>
-            <a:ext cx="11091672" cy="566928"/>
-          </a:xfrm>
-          <a:prstGeom prst="roundRect">
-            <a:avLst>
-              <a:gd name="adj" fmla="val 18000"/>
-            </a:avLst>
-          </a:prstGeom>
-          <a:solidFill>
-            <a:srgbClr val="F2F2F2"/>
-          </a:solidFill>
-          <a:ln>
-            <a:noFill/>
-          </a:ln>
-          <a:effectLst/>
-        </p:spPr>
-        <p:style>
-          <a:lnRef idx="1">
-            <a:schemeClr val="accent1"/>
-          </a:lnRef>
-          <a:fillRef idx="3">
-            <a:schemeClr val="accent1"/>
-          </a:fillRef>
-          <a:effectRef idx="2">
-            <a:schemeClr val="accent1"/>
-          </a:effectRef>
-          <a:fontRef idx="minor">
-            <a:schemeClr val="lt1"/>
-          </a:fontRef>
-        </p:style>
-        <p:txBody>
-          <a:bodyPr rtlCol="0" anchor="ctr" wrap="square" lIns="164592" rIns="164592" tIns="0" bIns="0"/>
-          <a:lstStyle/>
-          <a:p>
-            <a:pPr algn="ctr"/>
-            <a:r>
-              <a:rPr sz="1350" b="1">
-                <a:solidFill>
-                  <a:srgbClr val="1E2761"/>
-                </a:solidFill>
-                <a:latin typeface="Calibri"/>
-              </a:rPr>
-              <a:t>Takeaway: </a:t>
-            </a:r>
-            <a:r>
-              <a:rPr sz="1350" b="0">
-                <a:solidFill>
-                  <a:srgbClr val="212121"/>
-                </a:solidFill>
-                <a:latin typeface="Calibri"/>
-              </a:rPr>
-              <a:t>Each AQS step is either an elastic increment or an event. The model needs the drift, the hazard, and the size distribution of events; the last is the one we fit.</a:t>
-            </a:r>
-          </a:p>
-        </p:txBody>
-      </p:sp>
-    </p:spTree>
-  </p:cSld>
-  <p:clrMapOvr>
-    <a:masterClrMapping/>
-  </p:clrMapOvr>
-</p:sld>
-</file>
-
-<file path=ppt/slides/slide3.xml><?xml version="1.0" encoding="utf-8"?>
-<p:sld xmlns:a="http://schemas.openxmlformats.org/drawingml/2006/main" xmlns:p="http://schemas.openxmlformats.org/presentationml/2006/main" xmlns:r="http://schemas.openxmlformats.org/officeDocument/2006/relationships">
-  <p:cSld>
-    <p:spTree>
-      <p:nvGrpSpPr>
-        <p:cNvPr id="1" name=""/>
-        <p:cNvGrpSpPr/>
-        <p:nvPr/>
-      </p:nvGrpSpPr>
-      <p:grpSpPr/>
-      <p:sp>
-        <p:nvSpPr>
-          <p:cNvPr id="2" name="TextBox 1"/>
-          <p:cNvSpPr txBox="1"/>
-          <p:nvPr/>
-        </p:nvSpPr>
-        <p:spPr>
-          <a:xfrm>
-            <a:off x="548640" y="292608"/>
-            <a:ext cx="11091672" cy="685800"/>
-          </a:xfrm>
-          <a:prstGeom prst="rect">
-            <a:avLst/>
-          </a:prstGeom>
-          <a:noFill/>
-        </p:spPr>
-        <p:txBody>
-          <a:bodyPr wrap="square" lIns="0" rIns="0" tIns="0" bIns="0">
-            <a:spAutoFit/>
-          </a:bodyPr>
-          <a:lstStyle/>
-          <a:p>
-            <a:r>
-              <a:rPr sz="3000" b="1">
-                <a:solidFill>
-                  <a:srgbClr val="1E2761"/>
-                </a:solidFill>
-                <a:latin typeface="Calibri"/>
-              </a:rPr>
-              <a:t>The symbolic-regression library  (library/symreg.py)</a:t>
-            </a:r>
-          </a:p>
-        </p:txBody>
-      </p:sp>
-      <p:sp>
-        <p:nvSpPr>
-          <p:cNvPr id="3" name="TextBox 2"/>
-          <p:cNvSpPr txBox="1"/>
-          <p:nvPr/>
-        </p:nvSpPr>
-        <p:spPr>
-          <a:xfrm>
-            <a:off x="640080" y="1234440"/>
-            <a:ext cx="5394960" cy="4480560"/>
-          </a:xfrm>
-          <a:prstGeom prst="rect">
-            <a:avLst/>
-          </a:prstGeom>
-          <a:noFill/>
-        </p:spPr>
-        <p:txBody>
-          <a:bodyPr wrap="square" lIns="0" rIns="0" tIns="0" bIns="0">
+          <a:bodyPr wrap="square" lIns="0" tIns="0" rIns="0" bIns="0">
             <a:spAutoFit/>
           </a:bodyPr>
           <a:lstStyle/>
@@ -4081,13 +4848,13 @@
               </a:spcAft>
             </a:pPr>
             <a:r>
-              <a:rPr sz="1600" b="1">
+              <a:rPr sz="1600" b="1" dirty="0">
                 <a:solidFill>
                   <a:srgbClr val="1E2761"/>
                 </a:solidFill>
                 <a:latin typeface="Calibri"/>
               </a:rPr>
-              <a:t>What it does</a:t>
+              <a:t>How it was used here</a:t>
             </a:r>
           </a:p>
           <a:p>
@@ -4098,13 +4865,66 @@
               <a:buChar char="•"/>
             </a:pPr>
             <a:r>
-              <a:rPr sz="1500" b="0">
-                <a:solidFill>
-                  <a:srgbClr val="212121"/>
-                </a:solidFill>
-                <a:latin typeface="Calibri"/>
-              </a:rPr>
-              <a:t>Given points (x, y), it searches for a formula y = a·f(x) + b over a grammar of operators (exp, log, 1/x, x², √x, and + − × ÷) with up to two fitted constants inside f</a:t>
+              <a:rPr sz="1500" b="0" dirty="0">
+                <a:solidFill>
+                  <a:srgbClr val="212121"/>
+                </a:solidFill>
+                <a:latin typeface="Calibri"/>
+              </a:rPr>
+              <a:t>Target: the </a:t>
+            </a:r>
+            <a:r>
+              <a:rPr lang="en-US" sz="1500" b="0" dirty="0">
+                <a:solidFill>
+                  <a:srgbClr val="212121"/>
+                </a:solidFill>
+                <a:latin typeface="Calibri"/>
+              </a:rPr>
+              <a:t>(20)</a:t>
+            </a:r>
+            <a:r>
+              <a:rPr lang="en-US" sz="1500" dirty="0">
+                <a:solidFill>
+                  <a:srgbClr val="212121"/>
+                </a:solidFill>
+              </a:rPr>
+              <a:t>binned </a:t>
+            </a:r>
+            <a:r>
+              <a:rPr sz="1500" b="1" dirty="0">
+                <a:solidFill>
+                  <a:srgbClr val="212121"/>
+                </a:solidFill>
+                <a:latin typeface="Calibri"/>
+              </a:rPr>
+              <a:t>log-density ln </a:t>
+            </a:r>
+            <a:r>
+              <a:rPr sz="1500" b="1" dirty="0" err="1">
+                <a:solidFill>
+                  <a:srgbClr val="212121"/>
+                </a:solidFill>
+                <a:latin typeface="Calibri"/>
+              </a:rPr>
+              <a:t>ρ</a:t>
+            </a:r>
+            <a:r>
+              <a:rPr sz="1500" b="1" dirty="0">
+                <a:solidFill>
+                  <a:srgbClr val="212121"/>
+                </a:solidFill>
+                <a:latin typeface="Calibri"/>
+              </a:rPr>
+              <a:t>(s) </a:t>
+            </a:r>
+            <a:r>
+              <a:rPr sz="1500" b="0" dirty="0">
+                <a:solidFill>
+                  <a:srgbClr val="212121"/>
+                </a:solidFill>
+                <a:latin typeface="Calibri"/>
+              </a:rPr>
+              <a:t>in one grid cell</a:t>
             </a:r>
           </a:p>
           <a:p>
@@ -4115,13 +4935,31 @@
               <a:buChar char="•"/>
             </a:pPr>
             <a:r>
-              <a:rPr sz="1500" b="0">
-                <a:solidFill>
-                  <a:srgbClr val="212121"/>
-                </a:solidFill>
-                <a:latin typeface="Calibri"/>
-              </a:rPr>
-              <a:t>For one-variable targets it enumerates every formula up to a complexity budget rather than sampling them, so "the search did not find X" is a checkable statement</a:t>
+              <a:rPr sz="1500" b="0" dirty="0">
+                <a:solidFill>
+                  <a:srgbClr val="212121"/>
+                </a:solidFill>
+                <a:latin typeface="Calibri"/>
+              </a:rPr>
+              <a:t>Run on 12 cells spanning the state plane (700 </a:t>
+            </a:r>
+            <a:r>
+              <a:rPr lang="en-US" sz="1500" b="0" dirty="0">
+                <a:solidFill>
+                  <a:srgbClr val="212121"/>
+                </a:solidFill>
+                <a:latin typeface="Calibri"/>
+              </a:rPr>
+              <a:t>-</a:t>
+            </a:r>
+            <a:r>
+              <a:rPr sz="1500" b="0" dirty="0">
+                <a:solidFill>
+                  <a:srgbClr val="212121"/>
+                </a:solidFill>
+                <a:latin typeface="Calibri"/>
+              </a:rPr>
+              <a:t> 7,600 events each), plus variants with unweighted bins and a wider size window</a:t>
             </a:r>
           </a:p>
           <a:p>
@@ -4132,202 +4970,115 @@
               <a:buChar char="•"/>
             </a:pPr>
             <a:r>
-              <a:rPr sz="1500" b="0">
-                <a:solidFill>
-                  <a:srgbClr val="212121"/>
-                </a:solidFill>
-                <a:latin typeface="Calibri"/>
-              </a:rPr>
-              <a:t>It returns the exact Pareto front: the best misfit at each complexity. The form at the knee is the candidate</a:t>
-            </a:r>
-          </a:p>
-          <a:p>
-            <a:pPr marL="228600" indent="-228600">
+              <a:rPr sz="1500" b="0" dirty="0">
+                <a:solidFill>
+                  <a:srgbClr val="212121"/>
+                </a:solidFill>
+                <a:latin typeface="Calibri"/>
+              </a:rPr>
+              <a:t>Budget</a:t>
+            </a:r>
+            <a:r>
+              <a:rPr lang="en-US" sz="1500" b="0" dirty="0">
+                <a:solidFill>
+                  <a:srgbClr val="212121"/>
+                </a:solidFill>
+                <a:latin typeface="Calibri"/>
+              </a:rPr>
+              <a:t> a complexity of 8</a:t>
+            </a:r>
+            <a:r>
+              <a:rPr sz="1500" b="0" dirty="0">
+                <a:solidFill>
+                  <a:srgbClr val="212121"/>
+                </a:solidFill>
+                <a:latin typeface="Calibri"/>
+              </a:rPr>
+              <a:t>: 624,936 formula trees per cel</a:t>
+            </a:r>
+            <a:r>
+              <a:rPr lang="en-US" sz="1500" b="0" dirty="0">
+                <a:solidFill>
+                  <a:srgbClr val="212121"/>
+                </a:solidFill>
+                <a:latin typeface="Calibri"/>
+              </a:rPr>
+              <a:t>l</a:t>
+            </a:r>
+            <a:r>
+              <a:rPr sz="1500" b="0" dirty="0">
+                <a:solidFill>
+                  <a:srgbClr val="212121"/>
+                </a:solidFill>
+                <a:latin typeface="Calibri"/>
+              </a:rPr>
+              <a:t>, </a:t>
+            </a:r>
+            <a:r>
+              <a:rPr lang="en-US" sz="1500" b="0" dirty="0">
+                <a:solidFill>
+                  <a:srgbClr val="212121"/>
+                </a:solidFill>
+                <a:latin typeface="Calibri"/>
+              </a:rPr>
+              <a:t>~</a:t>
+            </a:r>
+            <a:r>
+              <a:rPr sz="1500" b="0" dirty="0">
+                <a:solidFill>
+                  <a:srgbClr val="212121"/>
+                </a:solidFill>
+                <a:latin typeface="Calibri"/>
+              </a:rPr>
+              <a:t>10,300 distinct admissible functions </a:t>
+            </a:r>
+            <a:endParaRPr lang="en-US" sz="1500" b="0" dirty="0">
+              <a:solidFill>
+                <a:srgbClr val="212121"/>
+              </a:solidFill>
+              <a:latin typeface="Calibri"/>
+            </a:endParaRPr>
+          </a:p>
+          <a:p>
+            <a:pPr marL="685800" lvl="1" indent="-228600">
               <a:spcAft>
                 <a:spcPts val="800"/>
               </a:spcAft>
               <a:buChar char="•"/>
             </a:pPr>
             <a:r>
-              <a:rPr sz="1500" b="0">
-                <a:solidFill>
-                  <a:srgbClr val="212121"/>
-                </a:solidFill>
-                <a:latin typeface="Calibri"/>
-              </a:rPr>
-              <a:t>Physics is imposed as a filter, not a prior: here, only densities that decrease with s are admitted</a:t>
-            </a:r>
-          </a:p>
-        </p:txBody>
-      </p:sp>
-      <p:sp>
-        <p:nvSpPr>
-          <p:cNvPr id="4" name="TextBox 3"/>
-          <p:cNvSpPr txBox="1"/>
-          <p:nvPr/>
-        </p:nvSpPr>
-        <p:spPr>
-          <a:xfrm>
-            <a:off x="6355080" y="1234440"/>
-            <a:ext cx="5303520" cy="4480560"/>
-          </a:xfrm>
-          <a:prstGeom prst="rect">
-            <a:avLst/>
-          </a:prstGeom>
-          <a:noFill/>
-        </p:spPr>
-        <p:txBody>
-          <a:bodyPr wrap="square" lIns="0" rIns="0" tIns="0" bIns="0">
-            <a:spAutoFit/>
-          </a:bodyPr>
-          <a:lstStyle/>
-          <a:p>
-            <a:pPr>
-              <a:spcAft>
-                <a:spcPts val="600"/>
-              </a:spcAft>
-            </a:pPr>
-            <a:r>
-              <a:rPr sz="1600" b="1">
-                <a:solidFill>
-                  <a:srgbClr val="1E2761"/>
-                </a:solidFill>
-                <a:latin typeface="Calibri"/>
-              </a:rPr>
-              <a:t>How it was used here</a:t>
-            </a:r>
-          </a:p>
-          <a:p>
-            <a:pPr marL="228600" indent="-228600">
-              <a:spcAft>
-                <a:spcPts val="800"/>
-              </a:spcAft>
-              <a:buChar char="•"/>
-            </a:pPr>
-            <a:r>
-              <a:rPr sz="1500" b="0">
-                <a:solidFill>
-                  <a:srgbClr val="212121"/>
-                </a:solidFill>
-                <a:latin typeface="Calibri"/>
-              </a:rPr>
-              <a:t>Target: the binned log-density ln ρ(s) of event sizes in one grid cell, 19 log bins with Poisson error bars</a:t>
-            </a:r>
-          </a:p>
-          <a:p>
-            <a:pPr marL="228600" indent="-228600">
-              <a:spcAft>
-                <a:spcPts val="800"/>
-              </a:spcAft>
-              <a:buChar char="•"/>
-            </a:pPr>
-            <a:r>
-              <a:rPr sz="1500" b="0">
-                <a:solidFill>
-                  <a:srgbClr val="212121"/>
-                </a:solidFill>
-                <a:latin typeface="Calibri"/>
-              </a:rPr>
-              <a:t>Run on 12 cells spanning the state plane (700 to 7,600 events each), plus variants with unweighted bins and a wider size window</a:t>
-            </a:r>
-          </a:p>
-          <a:p>
-            <a:pPr marL="228600" indent="-228600">
-              <a:spcAft>
-                <a:spcPts val="800"/>
-              </a:spcAft>
-              <a:buChar char="•"/>
-            </a:pPr>
-            <a:r>
-              <a:rPr sz="1500" b="0">
-                <a:solidFill>
-                  <a:srgbClr val="212121"/>
-                </a:solidFill>
-                <a:latin typeface="Calibri"/>
-              </a:rPr>
-              <a:t>Budget: 624,936 formula trees per cell at complexity 8, about 10,300 distinct admissible functions; one audit run at complexity 9 (4.5 million trees) found nothing new</a:t>
-            </a:r>
-          </a:p>
-          <a:p>
-            <a:pPr marL="228600" indent="-228600">
-              <a:spcAft>
-                <a:spcPts val="800"/>
-              </a:spcAft>
-              <a:buChar char="•"/>
-            </a:pPr>
-            <a:r>
-              <a:rPr sz="1500" b="0">
-                <a:solidFill>
-                  <a:srgbClr val="212121"/>
-                </a:solidFill>
-                <a:latin typeface="Calibri"/>
-              </a:rPr>
-              <a:t>The search only proposes forms. Each candidate was then turned into a normalized density and judged by per-event maximum likelihood (AIC and trajectory-blocked cross-validation)</a:t>
-            </a:r>
-          </a:p>
-        </p:txBody>
-      </p:sp>
-      <p:sp>
-        <p:nvSpPr>
-          <p:cNvPr id="5" name="Rounded Rectangle 4"/>
-          <p:cNvSpPr/>
-          <p:nvPr/>
-        </p:nvSpPr>
-        <p:spPr>
-          <a:xfrm>
-            <a:off x="548640" y="6053328"/>
-            <a:ext cx="11091672" cy="566928"/>
-          </a:xfrm>
-          <a:prstGeom prst="roundRect">
-            <a:avLst>
-              <a:gd name="adj" fmla="val 18000"/>
-            </a:avLst>
-          </a:prstGeom>
-          <a:solidFill>
-            <a:srgbClr val="F2F2F2"/>
-          </a:solidFill>
-          <a:ln>
-            <a:noFill/>
-          </a:ln>
-          <a:effectLst/>
-        </p:spPr>
-        <p:style>
-          <a:lnRef idx="1">
-            <a:schemeClr val="accent1"/>
-          </a:lnRef>
-          <a:fillRef idx="3">
-            <a:schemeClr val="accent1"/>
-          </a:fillRef>
-          <a:effectRef idx="2">
-            <a:schemeClr val="accent1"/>
-          </a:effectRef>
-          <a:fontRef idx="minor">
-            <a:schemeClr val="lt1"/>
-          </a:fontRef>
-        </p:style>
-        <p:txBody>
-          <a:bodyPr rtlCol="0" anchor="ctr" wrap="square" lIns="164592" rIns="164592" tIns="0" bIns="0"/>
-          <a:lstStyle/>
-          <a:p>
-            <a:pPr algn="ctr"/>
-            <a:r>
-              <a:rPr sz="1350" b="1">
-                <a:solidFill>
-                  <a:srgbClr val="1E2761"/>
-                </a:solidFill>
-                <a:latin typeface="Calibri"/>
-              </a:rPr>
-              <a:t>Takeaway: </a:t>
-            </a:r>
-            <a:r>
-              <a:rPr sz="1350" b="0">
-                <a:solidFill>
-                  <a:srgbClr val="212121"/>
-                </a:solidFill>
-                <a:latin typeface="Calibri"/>
-              </a:rPr>
-              <a:t>The search is exhaustive and the selection is by likelihood, so the discovered form is neither a lucky draw nor a binning artifact.</a:t>
-            </a:r>
+              <a:rPr lang="en-US" sz="1500" b="0" dirty="0">
+                <a:solidFill>
+                  <a:srgbClr val="212121"/>
+                </a:solidFill>
+                <a:latin typeface="Calibri"/>
+              </a:rPr>
+              <a:t>Just to check – another </a:t>
+            </a:r>
+            <a:r>
+              <a:rPr sz="1500" b="0" dirty="0">
+                <a:solidFill>
+                  <a:srgbClr val="212121"/>
+                </a:solidFill>
+                <a:latin typeface="Calibri"/>
+              </a:rPr>
+              <a:t>run at complexity 9 (4.5 million trees) </a:t>
+            </a:r>
+            <a:r>
+              <a:rPr lang="en-US" sz="1500" b="0" dirty="0">
+                <a:solidFill>
+                  <a:srgbClr val="212121"/>
+                </a:solidFill>
+                <a:latin typeface="Calibri"/>
+              </a:rPr>
+              <a:t>shows only mild improvement</a:t>
+            </a:r>
+            <a:endParaRPr sz="1500" b="0" dirty="0">
+              <a:solidFill>
+                <a:srgbClr val="212121"/>
+              </a:solidFill>
+              <a:latin typeface="Calibri"/>
+            </a:endParaRPr>
           </a:p>
         </p:txBody>
       </p:sp>
@@ -4378,7 +5129,7 @@
                 </a:solidFill>
                 <a:latin typeface="Calibri"/>
               </a:rPr>
-              <a:t>The discovered law</a:t>
+              <a:t>What the search finds at each complexity budget</a:t>
             </a:r>
           </a:p>
         </p:txBody>
@@ -4391,8 +5142,8 @@
         </p:nvSpPr>
         <p:spPr>
           <a:xfrm>
-            <a:off x="640080" y="1143000"/>
-            <a:ext cx="10972800" cy="640080"/>
+            <a:off x="640080" y="1097280"/>
+            <a:ext cx="10972800" cy="365760"/>
           </a:xfrm>
           <a:prstGeom prst="rect">
             <a:avLst/>
@@ -4405,29 +5156,776 @@
           </a:bodyPr>
           <a:lstStyle/>
           <a:p>
-            <a:pPr algn="ctr"/>
-            <a:r>
-              <a:rPr sz="2400" b="0">
+            <a:r>
+              <a:rPr sz="1600" b="1">
                 <a:solidFill>
                   <a:srgbClr val="1E2761"/>
                 </a:solidFill>
-                <a:latin typeface="Cambria Math"/>
-              </a:rPr>
-              <a:t>P(s | u, τ)  =  (1/Z) · (s_c(u, τ) − s)ᵐ / (s + ε)ᵏ ,     0 &lt; s &lt; s_c</a:t>
-            </a:r>
-          </a:p>
-        </p:txBody>
-      </p:sp>
-      <p:sp>
-        <p:nvSpPr>
-          <p:cNvPr id="4" name="TextBox 3"/>
+                <a:latin typeface="Calibri"/>
+              </a:rPr>
+              <a:t>The audited cell (6,706 events): best formula for ln ρ(s) at each complexity, and its RMS misfit</a:t>
+            </a:r>
+          </a:p>
+        </p:txBody>
+      </p:sp>
+      <p:graphicFrame>
+        <p:nvGraphicFramePr>
+          <p:cNvPr id="4" name="Table 3"/>
+          <p:cNvGraphicFramePr>
+            <a:graphicFrameLocks noGrp="1"/>
+          </p:cNvGraphicFramePr>
+          <p:nvPr/>
+        </p:nvGraphicFramePr>
+        <p:xfrm>
+          <a:off x="640080" y="1554480"/>
+          <a:ext cx="10881360" cy="2788920"/>
+        </p:xfrm>
+        <a:graphic>
+          <a:graphicData uri="http://schemas.openxmlformats.org/drawingml/2006/table">
+            <a:tbl>
+              <a:tblPr firstRow="1" bandRow="0">
+                <a:tableStyleId>{5C22544A-7EE6-4342-B048-85BDC9FD1C3A}</a:tableStyleId>
+              </a:tblPr>
+              <a:tblGrid>
+                <a:gridCol w="914400"/>
+                <a:gridCol w="3291840"/>
+                <a:gridCol w="914400"/>
+                <a:gridCol w="5760720"/>
+              </a:tblGrid>
+              <a:tr h="348615">
+                <a:tc>
+                  <a:txBody>
+                    <a:bodyPr/>
+                    <a:lstStyle/>
+                    <a:p>
+                      <a:r>
+                        <a:rPr sz="1300" b="1">
+                          <a:solidFill>
+                            <a:srgbClr val="FFFFFF"/>
+                          </a:solidFill>
+                          <a:latin typeface="Calibri"/>
+                        </a:rPr>
+                        <a:t>budget</a:t>
+                      </a:r>
+                    </a:p>
+                  </a:txBody>
+                  <a:tcPr marL="73152" marR="54864" marT="27432" marB="27432" anchor="ctr">
+                    <a:solidFill>
+                      <a:srgbClr val="1E2761"/>
+                    </a:solidFill>
+                  </a:tcPr>
+                </a:tc>
+                <a:tc>
+                  <a:txBody>
+                    <a:bodyPr/>
+                    <a:lstStyle/>
+                    <a:p>
+                      <a:r>
+                        <a:rPr sz="1300" b="1">
+                          <a:solidFill>
+                            <a:srgbClr val="FFFFFF"/>
+                          </a:solidFill>
+                          <a:latin typeface="Calibri"/>
+                        </a:rPr>
+                        <a:t>form found</a:t>
+                      </a:r>
+                    </a:p>
+                  </a:txBody>
+                  <a:tcPr marL="73152" marR="54864" marT="27432" marB="27432" anchor="ctr">
+                    <a:solidFill>
+                      <a:srgbClr val="1E2761"/>
+                    </a:solidFill>
+                  </a:tcPr>
+                </a:tc>
+                <a:tc>
+                  <a:txBody>
+                    <a:bodyPr/>
+                    <a:lstStyle/>
+                    <a:p>
+                      <a:r>
+                        <a:rPr sz="1300" b="1">
+                          <a:solidFill>
+                            <a:srgbClr val="FFFFFF"/>
+                          </a:solidFill>
+                          <a:latin typeface="Calibri"/>
+                        </a:rPr>
+                        <a:t>misfit</a:t>
+                      </a:r>
+                    </a:p>
+                  </a:txBody>
+                  <a:tcPr marL="73152" marR="54864" marT="27432" marB="27432" anchor="ctr">
+                    <a:solidFill>
+                      <a:srgbClr val="1E2761"/>
+                    </a:solidFill>
+                  </a:tcPr>
+                </a:tc>
+                <a:tc>
+                  <a:txBody>
+                    <a:bodyPr/>
+                    <a:lstStyle/>
+                    <a:p>
+                      <a:r>
+                        <a:rPr sz="1300" b="1">
+                          <a:solidFill>
+                            <a:srgbClr val="FFFFFF"/>
+                          </a:solidFill>
+                          <a:latin typeface="Calibri"/>
+                        </a:rPr>
+                        <a:t>what it is</a:t>
+                      </a:r>
+                    </a:p>
+                  </a:txBody>
+                  <a:tcPr marL="73152" marR="54864" marT="27432" marB="27432" anchor="ctr">
+                    <a:solidFill>
+                      <a:srgbClr val="1E2761"/>
+                    </a:solidFill>
+                  </a:tcPr>
+                </a:tc>
+              </a:tr>
+              <a:tr h="348615">
+                <a:tc>
+                  <a:txBody>
+                    <a:bodyPr/>
+                    <a:lstStyle/>
+                    <a:p>
+                      <a:r>
+                        <a:rPr sz="1300" b="0">
+                          <a:solidFill>
+                            <a:srgbClr val="212121"/>
+                          </a:solidFill>
+                          <a:latin typeface="Calibri"/>
+                        </a:rPr>
+                        <a:t>1</a:t>
+                      </a:r>
+                    </a:p>
+                  </a:txBody>
+                  <a:tcPr marL="73152" marR="54864" marT="27432" marB="27432" anchor="ctr">
+                    <a:solidFill>
+                      <a:srgbClr val="FFFFFF"/>
+                    </a:solidFill>
+                  </a:tcPr>
+                </a:tc>
+                <a:tc>
+                  <a:txBody>
+                    <a:bodyPr/>
+                    <a:lstStyle/>
+                    <a:p>
+                      <a:r>
+                        <a:rPr sz="1400" b="0">
+                          <a:solidFill>
+                            <a:srgbClr val="1E2761"/>
+                          </a:solidFill>
+                          <a:latin typeface="Cambria Math"/>
+                        </a:rPr>
+                        <a:t>s</a:t>
+                      </a:r>
+                    </a:p>
+                  </a:txBody>
+                  <a:tcPr marL="73152" marR="54864" marT="27432" marB="27432" anchor="ctr">
+                    <a:solidFill>
+                      <a:srgbClr val="FFFFFF"/>
+                    </a:solidFill>
+                  </a:tcPr>
+                </a:tc>
+                <a:tc>
+                  <a:txBody>
+                    <a:bodyPr/>
+                    <a:lstStyle/>
+                    <a:p>
+                      <a:r>
+                        <a:rPr sz="1300" b="0">
+                          <a:solidFill>
+                            <a:srgbClr val="212121"/>
+                          </a:solidFill>
+                          <a:latin typeface="Calibri"/>
+                        </a:rPr>
+                        <a:t>1.22</a:t>
+                      </a:r>
+                    </a:p>
+                  </a:txBody>
+                  <a:tcPr marL="73152" marR="54864" marT="27432" marB="27432" anchor="ctr">
+                    <a:solidFill>
+                      <a:srgbClr val="FFFFFF"/>
+                    </a:solidFill>
+                  </a:tcPr>
+                </a:tc>
+                <a:tc>
+                  <a:txBody>
+                    <a:bodyPr/>
+                    <a:lstStyle/>
+                    <a:p>
+                      <a:r>
+                        <a:rPr sz="1300" b="0">
+                          <a:solidFill>
+                            <a:srgbClr val="212121"/>
+                          </a:solidFill>
+                          <a:latin typeface="Calibri"/>
+                        </a:rPr>
+                        <a:t>a straight line</a:t>
+                      </a:r>
+                    </a:p>
+                  </a:txBody>
+                  <a:tcPr marL="73152" marR="54864" marT="27432" marB="27432" anchor="ctr">
+                    <a:solidFill>
+                      <a:srgbClr val="FFFFFF"/>
+                    </a:solidFill>
+                  </a:tcPr>
+                </a:tc>
+              </a:tr>
+              <a:tr h="348615">
+                <a:tc>
+                  <a:txBody>
+                    <a:bodyPr/>
+                    <a:lstStyle/>
+                    <a:p>
+                      <a:r>
+                        <a:rPr sz="1300" b="0">
+                          <a:solidFill>
+                            <a:srgbClr val="212121"/>
+                          </a:solidFill>
+                          <a:latin typeface="Calibri"/>
+                        </a:rPr>
+                        <a:t>3</a:t>
+                      </a:r>
+                    </a:p>
+                  </a:txBody>
+                  <a:tcPr marL="73152" marR="54864" marT="27432" marB="27432" anchor="ctr">
+                    <a:solidFill>
+                      <a:srgbClr val="FFFFFF"/>
+                    </a:solidFill>
+                  </a:tcPr>
+                </a:tc>
+                <a:tc>
+                  <a:txBody>
+                    <a:bodyPr/>
+                    <a:lstStyle/>
+                    <a:p>
+                      <a:r>
+                        <a:rPr sz="1400" b="0">
+                          <a:solidFill>
+                            <a:srgbClr val="1E2761"/>
+                          </a:solidFill>
+                          <a:latin typeface="Cambria Math"/>
+                        </a:rPr>
+                        <a:t>log s</a:t>
+                      </a:r>
+                    </a:p>
+                  </a:txBody>
+                  <a:tcPr marL="73152" marR="54864" marT="27432" marB="27432" anchor="ctr">
+                    <a:solidFill>
+                      <a:srgbClr val="FFFFFF"/>
+                    </a:solidFill>
+                  </a:tcPr>
+                </a:tc>
+                <a:tc>
+                  <a:txBody>
+                    <a:bodyPr/>
+                    <a:lstStyle/>
+                    <a:p>
+                      <a:r>
+                        <a:rPr sz="1300" b="0">
+                          <a:solidFill>
+                            <a:srgbClr val="212121"/>
+                          </a:solidFill>
+                          <a:latin typeface="Calibri"/>
+                        </a:rPr>
+                        <a:t>0.30</a:t>
+                      </a:r>
+                    </a:p>
+                  </a:txBody>
+                  <a:tcPr marL="73152" marR="54864" marT="27432" marB="27432" anchor="ctr">
+                    <a:solidFill>
+                      <a:srgbClr val="FFFFFF"/>
+                    </a:solidFill>
+                  </a:tcPr>
+                </a:tc>
+                <a:tc>
+                  <a:txBody>
+                    <a:bodyPr/>
+                    <a:lstStyle/>
+                    <a:p>
+                      <a:r>
+                        <a:rPr sz="1300" b="0">
+                          <a:solidFill>
+                            <a:srgbClr val="212121"/>
+                          </a:solidFill>
+                          <a:latin typeface="Calibri"/>
+                        </a:rPr>
+                        <a:t>a pure power law, ρ ∝ s⁻ᵏ</a:t>
+                      </a:r>
+                    </a:p>
+                  </a:txBody>
+                  <a:tcPr marL="73152" marR="54864" marT="27432" marB="27432" anchor="ctr">
+                    <a:solidFill>
+                      <a:srgbClr val="FFFFFF"/>
+                    </a:solidFill>
+                  </a:tcPr>
+                </a:tc>
+              </a:tr>
+              <a:tr h="348615">
+                <a:tc>
+                  <a:txBody>
+                    <a:bodyPr/>
+                    <a:lstStyle/>
+                    <a:p>
+                      <a:r>
+                        <a:rPr sz="1300" b="0">
+                          <a:solidFill>
+                            <a:srgbClr val="212121"/>
+                          </a:solidFill>
+                          <a:latin typeface="Calibri"/>
+                        </a:rPr>
+                        <a:t>5</a:t>
+                      </a:r>
+                    </a:p>
+                  </a:txBody>
+                  <a:tcPr marL="73152" marR="54864" marT="27432" marB="27432" anchor="ctr">
+                    <a:solidFill>
+                      <a:srgbClr val="FFFFFF"/>
+                    </a:solidFill>
+                  </a:tcPr>
+                </a:tc>
+                <a:tc>
+                  <a:txBody>
+                    <a:bodyPr/>
+                    <a:lstStyle/>
+                    <a:p>
+                      <a:r>
+                        <a:rPr sz="1400" b="0">
+                          <a:solidFill>
+                            <a:srgbClr val="1E2761"/>
+                          </a:solidFill>
+                          <a:latin typeface="Cambria Math"/>
+                        </a:rPr>
+                        <a:t>log(s + 4.6×10⁻⁴)</a:t>
+                      </a:r>
+                    </a:p>
+                  </a:txBody>
+                  <a:tcPr marL="73152" marR="54864" marT="27432" marB="27432" anchor="ctr">
+                    <a:solidFill>
+                      <a:srgbClr val="FFFFFF"/>
+                    </a:solidFill>
+                  </a:tcPr>
+                </a:tc>
+                <a:tc>
+                  <a:txBody>
+                    <a:bodyPr/>
+                    <a:lstStyle/>
+                    <a:p>
+                      <a:r>
+                        <a:rPr sz="1300" b="0">
+                          <a:solidFill>
+                            <a:srgbClr val="212121"/>
+                          </a:solidFill>
+                          <a:latin typeface="Calibri"/>
+                        </a:rPr>
+                        <a:t>0.21</a:t>
+                      </a:r>
+                    </a:p>
+                  </a:txBody>
+                  <a:tcPr marL="73152" marR="54864" marT="27432" marB="27432" anchor="ctr">
+                    <a:solidFill>
+                      <a:srgbClr val="FFFFFF"/>
+                    </a:solidFill>
+                  </a:tcPr>
+                </a:tc>
+                <a:tc>
+                  <a:txBody>
+                    <a:bodyPr/>
+                    <a:lstStyle/>
+                    <a:p>
+                      <a:r>
+                        <a:rPr sz="1300" b="0">
+                          <a:solidFill>
+                            <a:srgbClr val="212121"/>
+                          </a:solidFill>
+                          <a:latin typeface="Calibri"/>
+                        </a:rPr>
+                        <a:t>a power law rounded off at small s</a:t>
+                      </a:r>
+                    </a:p>
+                  </a:txBody>
+                  <a:tcPr marL="73152" marR="54864" marT="27432" marB="27432" anchor="ctr">
+                    <a:solidFill>
+                      <a:srgbClr val="FFFFFF"/>
+                    </a:solidFill>
+                  </a:tcPr>
+                </a:tc>
+              </a:tr>
+              <a:tr h="348615">
+                <a:tc>
+                  <a:txBody>
+                    <a:bodyPr/>
+                    <a:lstStyle/>
+                    <a:p>
+                      <a:r>
+                        <a:rPr sz="1300" b="0">
+                          <a:solidFill>
+                            <a:srgbClr val="212121"/>
+                          </a:solidFill>
+                          <a:latin typeface="Calibri"/>
+                        </a:rPr>
+                        <a:t>6</a:t>
+                      </a:r>
+                    </a:p>
+                  </a:txBody>
+                  <a:tcPr marL="73152" marR="54864" marT="27432" marB="27432" anchor="ctr">
+                    <a:solidFill>
+                      <a:srgbClr val="FFFFFF"/>
+                    </a:solidFill>
+                  </a:tcPr>
+                </a:tc>
+                <a:tc>
+                  <a:txBody>
+                    <a:bodyPr/>
+                    <a:lstStyle/>
+                    <a:p>
+                      <a:r>
+                        <a:rPr sz="1400" b="0">
+                          <a:solidFill>
+                            <a:srgbClr val="1E2761"/>
+                          </a:solidFill>
+                          <a:latin typeface="Cambria Math"/>
+                        </a:rPr>
+                        <a:t>√log(1/s)</a:t>
+                      </a:r>
+                    </a:p>
+                  </a:txBody>
+                  <a:tcPr marL="73152" marR="54864" marT="27432" marB="27432" anchor="ctr">
+                    <a:solidFill>
+                      <a:srgbClr val="FFFFFF"/>
+                    </a:solidFill>
+                  </a:tcPr>
+                </a:tc>
+                <a:tc>
+                  <a:txBody>
+                    <a:bodyPr/>
+                    <a:lstStyle/>
+                    <a:p>
+                      <a:r>
+                        <a:rPr sz="1300" b="0">
+                          <a:solidFill>
+                            <a:srgbClr val="212121"/>
+                          </a:solidFill>
+                          <a:latin typeface="Calibri"/>
+                        </a:rPr>
+                        <a:t>0.143</a:t>
+                      </a:r>
+                    </a:p>
+                  </a:txBody>
+                  <a:tcPr marL="73152" marR="54864" marT="27432" marB="27432" anchor="ctr">
+                    <a:solidFill>
+                      <a:srgbClr val="FFFFFF"/>
+                    </a:solidFill>
+                  </a:tcPr>
+                </a:tc>
+                <a:tc>
+                  <a:txBody>
+                    <a:bodyPr/>
+                    <a:lstStyle/>
+                    <a:p>
+                      <a:r>
+                        <a:rPr sz="1300" b="0">
+                          <a:solidFill>
+                            <a:srgbClr val="212121"/>
+                          </a:solidFill>
+                          <a:latin typeface="Calibri"/>
+                        </a:rPr>
+                        <a:t>the √log family: fits the bins, fails the likelihood test (ΔAIC ≈ +20,000)</a:t>
+                      </a:r>
+                    </a:p>
+                  </a:txBody>
+                  <a:tcPr marL="73152" marR="54864" marT="27432" marB="27432" anchor="ctr">
+                    <a:solidFill>
+                      <a:srgbClr val="FFFFFF"/>
+                    </a:solidFill>
+                  </a:tcPr>
+                </a:tc>
+              </a:tr>
+              <a:tr h="348615">
+                <a:tc>
+                  <a:txBody>
+                    <a:bodyPr/>
+                    <a:lstStyle/>
+                    <a:p>
+                      <a:r>
+                        <a:rPr sz="1300" b="0">
+                          <a:solidFill>
+                            <a:srgbClr val="212121"/>
+                          </a:solidFill>
+                          <a:latin typeface="Calibri"/>
+                        </a:rPr>
+                        <a:t>7</a:t>
+                      </a:r>
+                    </a:p>
+                  </a:txBody>
+                  <a:tcPr marL="73152" marR="54864" marT="27432" marB="27432" anchor="ctr">
+                    <a:solidFill>
+                      <a:srgbClr val="FFFFFF"/>
+                    </a:solidFill>
+                  </a:tcPr>
+                </a:tc>
+                <a:tc>
+                  <a:txBody>
+                    <a:bodyPr/>
+                    <a:lstStyle/>
+                    <a:p>
+                      <a:r>
+                        <a:rPr sz="1400" b="0">
+                          <a:solidFill>
+                            <a:srgbClr val="1E2761"/>
+                          </a:solidFill>
+                          <a:latin typeface="Cambria Math"/>
+                        </a:rPr>
+                        <a:t>√log(0.79/s)</a:t>
+                      </a:r>
+                    </a:p>
+                  </a:txBody>
+                  <a:tcPr marL="73152" marR="54864" marT="27432" marB="27432" anchor="ctr">
+                    <a:solidFill>
+                      <a:srgbClr val="FFFFFF"/>
+                    </a:solidFill>
+                  </a:tcPr>
+                </a:tc>
+                <a:tc>
+                  <a:txBody>
+                    <a:bodyPr/>
+                    <a:lstStyle/>
+                    <a:p>
+                      <a:r>
+                        <a:rPr sz="1300" b="0">
+                          <a:solidFill>
+                            <a:srgbClr val="212121"/>
+                          </a:solidFill>
+                          <a:latin typeface="Calibri"/>
+                        </a:rPr>
+                        <a:t>0.142</a:t>
+                      </a:r>
+                    </a:p>
+                  </a:txBody>
+                  <a:tcPr marL="73152" marR="54864" marT="27432" marB="27432" anchor="ctr">
+                    <a:solidFill>
+                      <a:srgbClr val="FFFFFF"/>
+                    </a:solidFill>
+                  </a:tcPr>
+                </a:tc>
+                <a:tc>
+                  <a:txBody>
+                    <a:bodyPr/>
+                    <a:lstStyle/>
+                    <a:p>
+                      <a:r>
+                        <a:rPr sz="1300" b="0">
+                          <a:solidFill>
+                            <a:srgbClr val="212121"/>
+                          </a:solidFill>
+                          <a:latin typeface="Calibri"/>
+                        </a:rPr>
+                        <a:t>same family, one constant added</a:t>
+                      </a:r>
+                    </a:p>
+                  </a:txBody>
+                  <a:tcPr marL="73152" marR="54864" marT="27432" marB="27432" anchor="ctr">
+                    <a:solidFill>
+                      <a:srgbClr val="FFFFFF"/>
+                    </a:solidFill>
+                  </a:tcPr>
+                </a:tc>
+              </a:tr>
+              <a:tr h="348615">
+                <a:tc>
+                  <a:txBody>
+                    <a:bodyPr/>
+                    <a:lstStyle/>
+                    <a:p>
+                      <a:r>
+                        <a:rPr sz="1300" b="0">
+                          <a:solidFill>
+                            <a:srgbClr val="212121"/>
+                          </a:solidFill>
+                          <a:latin typeface="Calibri"/>
+                        </a:rPr>
+                        <a:t>8</a:t>
+                      </a:r>
+                    </a:p>
+                  </a:txBody>
+                  <a:tcPr marL="73152" marR="54864" marT="27432" marB="27432" anchor="ctr">
+                    <a:solidFill>
+                      <a:srgbClr val="FFFFFF"/>
+                    </a:solidFill>
+                  </a:tcPr>
+                </a:tc>
+                <a:tc>
+                  <a:txBody>
+                    <a:bodyPr/>
+                    <a:lstStyle/>
+                    <a:p>
+                      <a:r>
+                        <a:rPr sz="1400" b="0">
+                          <a:solidFill>
+                            <a:srgbClr val="1E2761"/>
+                          </a:solidFill>
+                          <a:latin typeface="Cambria Math"/>
+                        </a:rPr>
+                        <a:t>log(1/(s + 1.6×10⁻⁴) − 2.25)</a:t>
+                      </a:r>
+                    </a:p>
+                  </a:txBody>
+                  <a:tcPr marL="73152" marR="54864" marT="27432" marB="27432" anchor="ctr">
+                    <a:solidFill>
+                      <a:srgbClr val="FFFFFF"/>
+                    </a:solidFill>
+                  </a:tcPr>
+                </a:tc>
+                <a:tc>
+                  <a:txBody>
+                    <a:bodyPr/>
+                    <a:lstStyle/>
+                    <a:p>
+                      <a:r>
+                        <a:rPr sz="1300" b="0">
+                          <a:solidFill>
+                            <a:srgbClr val="212121"/>
+                          </a:solidFill>
+                          <a:latin typeface="Calibri"/>
+                        </a:rPr>
+                        <a:t>0.118</a:t>
+                      </a:r>
+                    </a:p>
+                  </a:txBody>
+                  <a:tcPr marL="73152" marR="54864" marT="27432" marB="27432" anchor="ctr">
+                    <a:solidFill>
+                      <a:srgbClr val="FFFFFF"/>
+                    </a:solidFill>
+                  </a:tcPr>
+                </a:tc>
+                <a:tc>
+                  <a:txBody>
+                    <a:bodyPr/>
+                    <a:lstStyle/>
+                    <a:p>
+                      <a:r>
+                        <a:rPr sz="1300" b="0">
+                          <a:solidFill>
+                            <a:srgbClr val="212121"/>
+                          </a:solidFill>
+                          <a:latin typeface="Calibri"/>
+                        </a:rPr>
+                        <a:t>the ceiling law (below)</a:t>
+                      </a:r>
+                    </a:p>
+                  </a:txBody>
+                  <a:tcPr marL="73152" marR="54864" marT="27432" marB="27432" anchor="ctr">
+                    <a:solidFill>
+                      <a:srgbClr val="FFFFFF"/>
+                    </a:solidFill>
+                  </a:tcPr>
+                </a:tc>
+              </a:tr>
+              <a:tr h="348615">
+                <a:tc>
+                  <a:txBody>
+                    <a:bodyPr/>
+                    <a:lstStyle/>
+                    <a:p>
+                      <a:r>
+                        <a:rPr sz="1300" b="0">
+                          <a:solidFill>
+                            <a:srgbClr val="212121"/>
+                          </a:solidFill>
+                          <a:latin typeface="Calibri"/>
+                        </a:rPr>
+                        <a:t>9</a:t>
+                      </a:r>
+                    </a:p>
+                  </a:txBody>
+                  <a:tcPr marL="73152" marR="54864" marT="27432" marB="27432" anchor="ctr">
+                    <a:solidFill>
+                      <a:srgbClr val="FFFFFF"/>
+                    </a:solidFill>
+                  </a:tcPr>
+                </a:tc>
+                <a:tc>
+                  <a:txBody>
+                    <a:bodyPr/>
+                    <a:lstStyle/>
+                    <a:p>
+                      <a:r>
+                        <a:rPr sz="1400" b="0">
+                          <a:solidFill>
+                            <a:srgbClr val="1E2761"/>
+                          </a:solidFill>
+                          <a:latin typeface="Cambria Math"/>
+                        </a:rPr>
+                        <a:t>s + √(−0.93 − log s)</a:t>
+                      </a:r>
+                    </a:p>
+                  </a:txBody>
+                  <a:tcPr marL="73152" marR="54864" marT="27432" marB="27432" anchor="ctr">
+                    <a:solidFill>
+                      <a:srgbClr val="FFFFFF"/>
+                    </a:solidFill>
+                  </a:tcPr>
+                </a:tc>
+                <a:tc>
+                  <a:txBody>
+                    <a:bodyPr/>
+                    <a:lstStyle/>
+                    <a:p>
+                      <a:r>
+                        <a:rPr sz="1300" b="0">
+                          <a:solidFill>
+                            <a:srgbClr val="212121"/>
+                          </a:solidFill>
+                          <a:latin typeface="Calibri"/>
+                        </a:rPr>
+                        <a:t>0.103</a:t>
+                      </a:r>
+                    </a:p>
+                  </a:txBody>
+                  <a:tcPr marL="73152" marR="54864" marT="27432" marB="27432" anchor="ctr">
+                    <a:solidFill>
+                      <a:srgbClr val="FFFFFF"/>
+                    </a:solidFill>
+                  </a:tcPr>
+                </a:tc>
+                <a:tc>
+                  <a:txBody>
+                    <a:bodyPr/>
+                    <a:lstStyle/>
+                    <a:p>
+                      <a:r>
+                        <a:rPr sz="1300" b="0">
+                          <a:solidFill>
+                            <a:srgbClr val="212121"/>
+                          </a:solidFill>
+                          <a:latin typeface="Calibri"/>
+                        </a:rPr>
+                        <a:t>the √log family again, with a linear term; still loses under likelihood</a:t>
+                      </a:r>
+                    </a:p>
+                  </a:txBody>
+                  <a:tcPr marL="73152" marR="54864" marT="27432" marB="27432" anchor="ctr">
+                    <a:solidFill>
+                      <a:srgbClr val="FFFFFF"/>
+                    </a:solidFill>
+                  </a:tcPr>
+                </a:tc>
+              </a:tr>
+            </a:tbl>
+          </a:graphicData>
+        </a:graphic>
+      </p:graphicFrame>
+      <p:sp>
+        <p:nvSpPr>
+          <p:cNvPr id="5" name="TextBox 4"/>
           <p:cNvSpPr txBox="1"/>
           <p:nvPr/>
         </p:nvSpPr>
         <p:spPr>
           <a:xfrm>
-            <a:off x="640080" y="1783080"/>
-            <a:ext cx="10972800" cy="640080"/>
+            <a:off x="640080" y="4526280"/>
+            <a:ext cx="10972800" cy="1737360"/>
           </a:xfrm>
           <a:prstGeom prst="rect">
             <a:avLst/>
@@ -4440,163 +5938,21 @@
           </a:bodyPr>
           <a:lstStyle/>
           <a:p>
-            <a:pPr algn="ctr"/>
-            <a:r>
-              <a:rPr sz="1800" b="0">
-                <a:solidFill>
-                  <a:srgbClr val="6E7B85"/>
-                </a:solidFill>
-                <a:latin typeface="Cambria Math"/>
-              </a:rPr>
-              <a:t>k = 0.88,     m = 2.3,     ε = 2.8 × 10⁻⁵</a:t>
-            </a:r>
-          </a:p>
-        </p:txBody>
-      </p:sp>
-      <p:sp>
-        <p:nvSpPr>
-          <p:cNvPr id="5" name="TextBox 4"/>
-          <p:cNvSpPr txBox="1"/>
-          <p:nvPr/>
-        </p:nvSpPr>
-        <p:spPr>
-          <a:xfrm>
-            <a:off x="640080" y="2514600"/>
-            <a:ext cx="10972800" cy="4114800"/>
-          </a:xfrm>
-          <a:prstGeom prst="rect">
-            <a:avLst/>
-          </a:prstGeom>
-          <a:noFill/>
-        </p:spPr>
-        <p:txBody>
-          <a:bodyPr wrap="square" lIns="0" rIns="0" tIns="0" bIns="0">
-            <a:spAutoFit/>
-          </a:bodyPr>
-          <a:lstStyle/>
-          <a:p>
             <a:pPr>
               <a:spcAft>
-                <a:spcPts val="1100"/>
+                <a:spcPts val="600"/>
               </a:spcAft>
             </a:pPr>
             <a:r>
-              <a:rPr sz="1500" b="0">
+              <a:rPr sz="1600" b="1">
                 <a:solidFill>
                   <a:srgbClr val="1E2761"/>
                 </a:solidFill>
-                <a:latin typeface="Cambria Math"/>
-              </a:rPr>
-              <a:t>(s + ε)⁻ᵏ   </a:t>
-            </a:r>
-            <a:r>
-              <a:rPr sz="1400" b="0">
-                <a:solidFill>
-                  <a:srgbClr val="212121"/>
-                </a:solidFill>
-                <a:latin typeface="Calibri"/>
-              </a:rPr>
-              <a:t>a power-law decay in size with exponent k ≈ 0.9: small events are far more common than large ones. The rounding scale ε flattens it below about 3 × 10⁻⁵, so the law describes every recorded event with no lower cutoff</a:t>
-            </a:r>
-          </a:p>
-          <a:p>
-            <a:pPr>
-              <a:spcAft>
-                <a:spcPts val="1100"/>
-              </a:spcAft>
-            </a:pPr>
-            <a:r>
-              <a:rPr sz="1500" b="0">
-                <a:solidFill>
-                  <a:srgbClr val="1E2761"/>
-                </a:solidFill>
-                <a:latin typeface="Cambria Math"/>
-              </a:rPr>
-              <a:t>(s_c − s)ᵐ   </a:t>
-            </a:r>
-            <a:r>
-              <a:rPr sz="1400" b="0">
-                <a:solidFill>
-                  <a:srgbClr val="212121"/>
-                </a:solidFill>
-                <a:latin typeface="Calibri"/>
-              </a:rPr>
-              <a:t>a hard ceiling: the density goes to zero at s = s_c and no event larger than s_c is possible. With m ≈ 2 it vanishes gently, so the largest observed event sits a few percent below the ceiling</a:t>
-            </a:r>
-          </a:p>
-          <a:p>
-            <a:pPr>
-              <a:spcAft>
-                <a:spcPts val="1100"/>
-              </a:spcAft>
-            </a:pPr>
-            <a:r>
-              <a:rPr sz="1500" b="0">
-                <a:solidFill>
-                  <a:srgbClr val="1E2761"/>
-                </a:solidFill>
-                <a:latin typeface="Cambria Math"/>
-              </a:rPr>
-              <a:t>s_c(u, τ)   </a:t>
-            </a:r>
-            <a:r>
-              <a:rPr sz="1400" b="0">
-                <a:solidFill>
-                  <a:srgbClr val="212121"/>
-                </a:solidFill>
-                <a:latin typeface="Calibri"/>
-              </a:rPr>
-              <a:t>the only place the state enters. It ranges 146× over the plane, from 0.02 in the cold, low-stress corner to 3 in the flowing state, and it factorizes, ln s_c ≈ (u-part) + (τ-part), at 95.5% of the variance</a:t>
-            </a:r>
-          </a:p>
-          <a:p>
-            <a:pPr>
-              <a:spcAft>
-                <a:spcPts val="1100"/>
-              </a:spcAft>
-            </a:pPr>
-            <a:r>
-              <a:rPr sz="1500" b="0">
-                <a:solidFill>
-                  <a:srgbClr val="1E2761"/>
-                </a:solidFill>
-                <a:latin typeface="Cambria Math"/>
-              </a:rPr>
-              <a:t>Z   </a:t>
-            </a:r>
-            <a:r>
-              <a:rPr sz="1400" b="0">
-                <a:solidFill>
-                  <a:srgbClr val="212121"/>
-                </a:solidFill>
-                <a:latin typeface="Calibri"/>
-              </a:rPr>
-              <a:t>the normalization, computed numerically</a:t>
-            </a:r>
-          </a:p>
-        </p:txBody>
-      </p:sp>
-      <p:sp>
-        <p:nvSpPr>
-          <p:cNvPr id="6" name="TextBox 5"/>
-          <p:cNvSpPr txBox="1"/>
-          <p:nvPr/>
-        </p:nvSpPr>
-        <p:spPr>
-          <a:xfrm>
-            <a:off x="640080" y="5074920"/>
-            <a:ext cx="10972800" cy="822960"/>
-          </a:xfrm>
-          <a:prstGeom prst="rect">
-            <a:avLst/>
-          </a:prstGeom>
-          <a:noFill/>
-        </p:spPr>
-        <p:txBody>
-          <a:bodyPr wrap="square" lIns="0" rIns="0" tIns="0" bIns="0">
-            <a:spAutoFit/>
-          </a:bodyPr>
-          <a:lstStyle/>
+                <a:latin typeface="Calibri"/>
+              </a:rPr>
+              <a:t>How the complexity-8 form becomes the law</a:t>
+            </a:r>
+          </a:p>
           <a:p>
             <a:pPr marL="228600" indent="-228600">
               <a:spcAft>
@@ -4605,77 +5961,74 @@
               <a:buChar char="•"/>
             </a:pPr>
             <a:r>
-              <a:rPr sz="1300" b="0">
-                <a:solidFill>
-                  <a:srgbClr val="212121"/>
-                </a:solidFill>
-                <a:latin typeface="Calibri"/>
-              </a:rPr>
-              <a:t>Compared with the usual truncated power law s⁻ᵏ e^(−s/s*): that form suppresses large events with an exponential tail but never forbids them. The search never placed it on a Pareto front, and the ceiling form beat it in every likelihood contest that follows</a:t>
-            </a:r>
-          </a:p>
-        </p:txBody>
-      </p:sp>
-      <p:sp>
-        <p:nvSpPr>
-          <p:cNvPr id="7" name="Rounded Rectangle 6"/>
-          <p:cNvSpPr/>
-          <p:nvPr/>
-        </p:nvSpPr>
-        <p:spPr>
-          <a:xfrm>
-            <a:off x="548640" y="6053328"/>
-            <a:ext cx="11091672" cy="566928"/>
-          </a:xfrm>
-          <a:prstGeom prst="roundRect">
-            <a:avLst>
-              <a:gd name="adj" fmla="val 18000"/>
-            </a:avLst>
-          </a:prstGeom>
-          <a:solidFill>
-            <a:srgbClr val="F2F2F2"/>
-          </a:solidFill>
-          <a:ln>
-            <a:noFill/>
-          </a:ln>
-          <a:effectLst/>
-        </p:spPr>
-        <p:style>
-          <a:lnRef idx="1">
-            <a:schemeClr val="accent1"/>
-          </a:lnRef>
-          <a:fillRef idx="3">
-            <a:schemeClr val="accent1"/>
-          </a:fillRef>
-          <a:effectRef idx="2">
-            <a:schemeClr val="accent1"/>
-          </a:effectRef>
-          <a:fontRef idx="minor">
-            <a:schemeClr val="lt1"/>
-          </a:fontRef>
-        </p:style>
-        <p:txBody>
-          <a:bodyPr rtlCol="0" anchor="ctr" wrap="square" lIns="164592" rIns="164592" tIns="0" bIns="0"/>
-          <a:lstStyle/>
-          <a:p>
-            <a:pPr algn="ctr"/>
-            <a:r>
-              <a:rPr sz="1350" b="1">
-                <a:solidFill>
-                  <a:srgbClr val="1E2761"/>
-                </a:solidFill>
-                <a:latin typeface="Calibri"/>
-              </a:rPr>
-              <a:t>Takeaway: </a:t>
-            </a:r>
-            <a:r>
-              <a:rPr sz="1350" b="0">
-                <a:solidFill>
-                  <a:srgbClr val="212121"/>
-                </a:solidFill>
-                <a:latin typeface="Calibri"/>
-              </a:rPr>
-              <a:t>Three global constants and one state-dependent number. Everything about the state, and (later) about the preparation history, enters through the ceiling s_c.</a:t>
+              <a:rPr sz="1400" b="0">
+                <a:solidFill>
+                  <a:srgbClr val="212121"/>
+                </a:solidFill>
+                <a:latin typeface="Calibri"/>
+              </a:rPr>
+              <a:t>The fit is ln ρ = a·f(s) + b with f = log(1/(s + ε) − C).  Exponentiating: </a:t>
+            </a:r>
+            <a:r>
+              <a:rPr sz="1400" b="1">
+                <a:solidFill>
+                  <a:srgbClr val="212121"/>
+                </a:solidFill>
+                <a:latin typeface="Calibri"/>
+              </a:rPr>
+              <a:t>ρ ∝ [1/(s + ε) − C]ᵃ = [C(s_c − s)/(s + ε)]ᵃ</a:t>
+            </a:r>
+            <a:r>
+              <a:rPr sz="1400" b="0">
+                <a:solidFill>
+                  <a:srgbClr val="212121"/>
+                </a:solidFill>
+                <a:latin typeface="Calibri"/>
+              </a:rPr>
+              <a:t> with </a:t>
+            </a:r>
+            <a:r>
+              <a:rPr sz="1400" b="1">
+                <a:solidFill>
+                  <a:srgbClr val="212121"/>
+                </a:solidFill>
+                <a:latin typeface="Calibri"/>
+              </a:rPr>
+              <a:t>s_c = 1/C − ε</a:t>
+            </a:r>
+          </a:p>
+          <a:p>
+            <a:pPr marL="228600" indent="-228600">
+              <a:spcAft>
+                <a:spcPts val="800"/>
+              </a:spcAft>
+              <a:buChar char="•"/>
+            </a:pPr>
+            <a:r>
+              <a:rPr sz="1400" b="0">
+                <a:solidFill>
+                  <a:srgbClr val="212121"/>
+                </a:solidFill>
+                <a:latin typeface="Calibri"/>
+              </a:rPr>
+              <a:t>So the search hands over a bounded form with tied exponents, m = k = a.  The likelihood stage then frees m from k (8 of 8 cells prefer it)</a:t>
+            </a:r>
+          </a:p>
+          <a:p>
+            <a:pPr marL="228600" indent="-228600">
+              <a:spcAft>
+                <a:spcPts val="800"/>
+              </a:spcAft>
+              <a:buChar char="•"/>
+            </a:pPr>
+            <a:r>
+              <a:rPr sz="1400" b="0">
+                <a:solidFill>
+                  <a:srgbClr val="212121"/>
+                </a:solidFill>
+                <a:latin typeface="Calibri"/>
+              </a:rPr>
+              <a:t>Complexity 9 still lowers the misfit, but only by promoting a family the likelihood had already rejected. No new family appears, and the complexity-8 knee is unchanged</a:t>
             </a:r>
           </a:p>
         </p:txBody>
@@ -4727,45 +6080,21 @@
                 </a:solidFill>
                 <a:latin typeface="Calibri"/>
               </a:rPr>
-              <a:t>How the law performs: one cell, three candidate laws</a:t>
-            </a:r>
-          </a:p>
-        </p:txBody>
-      </p:sp>
-      <p:pic>
-        <p:nvPicPr>
-          <p:cNvPr id="3" name="Picture 2" descr="fig01_size_law.png"/>
-          <p:cNvPicPr>
-            <a:picLocks noChangeAspect="1"/>
-          </p:cNvPicPr>
+              <a:t>The discovered law</a:t>
+            </a:r>
+          </a:p>
+        </p:txBody>
+      </p:sp>
+      <p:sp>
+        <p:nvSpPr>
+          <p:cNvPr id="3" name="TextBox 2"/>
+          <p:cNvSpPr txBox="1"/>
           <p:nvPr/>
-        </p:nvPicPr>
-        <p:blipFill>
-          <a:blip r:embed="rId2"/>
-          <a:stretch>
-            <a:fillRect/>
-          </a:stretch>
-        </p:blipFill>
+        </p:nvSpPr>
         <p:spPr>
           <a:xfrm>
-            <a:off x="524021" y="1234440"/>
-            <a:ext cx="6267156" cy="4526280"/>
-          </a:xfrm>
-          <a:prstGeom prst="rect">
-            <a:avLst/>
-          </a:prstGeom>
-        </p:spPr>
-      </p:pic>
-      <p:sp>
-        <p:nvSpPr>
-          <p:cNvPr id="4" name="TextBox 3"/>
-          <p:cNvSpPr txBox="1"/>
-          <p:nvPr/>
-        </p:nvSpPr>
-        <p:spPr>
-          <a:xfrm>
-            <a:off x="7132320" y="1371600"/>
-            <a:ext cx="5056631" cy="4343400"/>
+            <a:off x="640080" y="1097280"/>
+            <a:ext cx="10972800" cy="640080"/>
           </a:xfrm>
           <a:prstGeom prst="rect">
             <a:avLst/>
@@ -4778,6 +6107,242 @@
           </a:bodyPr>
           <a:lstStyle/>
           <a:p>
+            <a:pPr algn="ctr"/>
+            <a:r>
+              <a:rPr sz="2400" b="0">
+                <a:solidFill>
+                  <a:srgbClr val="1E2761"/>
+                </a:solidFill>
+                <a:latin typeface="Cambria Math"/>
+              </a:rPr>
+              <a:t>P(s | u, τ)  =  (1/Z) · (s_c(u, τ) − s)ᵐ / (s + ε)ᵏ ,     0 &lt; s &lt; s_c</a:t>
+            </a:r>
+          </a:p>
+        </p:txBody>
+      </p:sp>
+      <p:sp>
+        <p:nvSpPr>
+          <p:cNvPr id="4" name="TextBox 3"/>
+          <p:cNvSpPr txBox="1"/>
+          <p:nvPr/>
+        </p:nvSpPr>
+        <p:spPr>
+          <a:xfrm>
+            <a:off x="640080" y="1737360"/>
+            <a:ext cx="10972800" cy="640080"/>
+          </a:xfrm>
+          <a:prstGeom prst="rect">
+            <a:avLst/>
+          </a:prstGeom>
+          <a:noFill/>
+        </p:spPr>
+        <p:txBody>
+          <a:bodyPr wrap="square" lIns="0" rIns="0" tIns="0" bIns="0">
+            <a:spAutoFit/>
+          </a:bodyPr>
+          <a:lstStyle/>
+          <a:p>
+            <a:pPr algn="ctr"/>
+            <a:r>
+              <a:rPr sz="1800" b="0">
+                <a:solidFill>
+                  <a:srgbClr val="6E7B85"/>
+                </a:solidFill>
+                <a:latin typeface="Cambria Math"/>
+              </a:rPr>
+              <a:t>k = 0.88,     m = 2.3,     ε = 2.8 × 10⁻⁵</a:t>
+            </a:r>
+          </a:p>
+        </p:txBody>
+      </p:sp>
+      <p:sp>
+        <p:nvSpPr>
+          <p:cNvPr id="5" name="TextBox 4"/>
+          <p:cNvSpPr txBox="1"/>
+          <p:nvPr/>
+        </p:nvSpPr>
+        <p:spPr>
+          <a:xfrm>
+            <a:off x="640080" y="2514600"/>
+            <a:ext cx="10972800" cy="4114800"/>
+          </a:xfrm>
+          <a:prstGeom prst="rect">
+            <a:avLst/>
+          </a:prstGeom>
+          <a:noFill/>
+        </p:spPr>
+        <p:txBody>
+          <a:bodyPr wrap="square" lIns="0" rIns="0" tIns="0" bIns="0">
+            <a:spAutoFit/>
+          </a:bodyPr>
+          <a:lstStyle/>
+          <a:p>
+            <a:pPr>
+              <a:spcAft>
+                <a:spcPts val="1100"/>
+              </a:spcAft>
+            </a:pPr>
+            <a:r>
+              <a:rPr sz="1600" b="0">
+                <a:solidFill>
+                  <a:srgbClr val="1E2761"/>
+                </a:solidFill>
+                <a:latin typeface="Cambria Math"/>
+              </a:rPr>
+              <a:t>(s + ε)⁻ᵏ   </a:t>
+            </a:r>
+            <a:r>
+              <a:rPr sz="1500" b="1">
+                <a:solidFill>
+                  <a:srgbClr val="212121"/>
+                </a:solidFill>
+                <a:latin typeface="Calibri"/>
+              </a:rPr>
+              <a:t>power-law decay</a:t>
+            </a:r>
+            <a:r>
+              <a:rPr sz="1500" b="0">
+                <a:solidFill>
+                  <a:srgbClr val="212121"/>
+                </a:solidFill>
+                <a:latin typeface="Calibri"/>
+              </a:rPr>
+              <a:t> with exponent k ≈ 0.9; ε rounds it off below about 3 × 10⁻⁵, so there is no lower cutoff</a:t>
+            </a:r>
+          </a:p>
+          <a:p>
+            <a:pPr>
+              <a:spcAft>
+                <a:spcPts val="1100"/>
+              </a:spcAft>
+            </a:pPr>
+            <a:r>
+              <a:rPr sz="1600" b="0">
+                <a:solidFill>
+                  <a:srgbClr val="1E2761"/>
+                </a:solidFill>
+                <a:latin typeface="Cambria Math"/>
+              </a:rPr>
+              <a:t>(s_c − s)ᵐ   </a:t>
+            </a:r>
+            <a:r>
+              <a:rPr sz="1500" b="1">
+                <a:solidFill>
+                  <a:srgbClr val="212121"/>
+                </a:solidFill>
+                <a:latin typeface="Calibri"/>
+              </a:rPr>
+              <a:t>hard ceiling</a:t>
+            </a:r>
+            <a:r>
+              <a:rPr sz="1500" b="0">
+                <a:solidFill>
+                  <a:srgbClr val="212121"/>
+                </a:solidFill>
+                <a:latin typeface="Calibri"/>
+              </a:rPr>
+              <a:t>: density is zero at s = s_c. With m ≈ 2 it vanishes gently, so the largest observed event sits a few percent below s_c</a:t>
+            </a:r>
+          </a:p>
+          <a:p>
+            <a:pPr>
+              <a:spcAft>
+                <a:spcPts val="1100"/>
+              </a:spcAft>
+            </a:pPr>
+            <a:r>
+              <a:rPr sz="1600" b="0">
+                <a:solidFill>
+                  <a:srgbClr val="1E2761"/>
+                </a:solidFill>
+                <a:latin typeface="Cambria Math"/>
+              </a:rPr>
+              <a:t>s_c(u, τ)   </a:t>
+            </a:r>
+            <a:r>
+              <a:rPr sz="1500" b="1">
+                <a:solidFill>
+                  <a:srgbClr val="212121"/>
+                </a:solidFill>
+                <a:latin typeface="Calibri"/>
+              </a:rPr>
+              <a:t>the only place the state enters</a:t>
+            </a:r>
+            <a:r>
+              <a:rPr sz="1500" b="0">
+                <a:solidFill>
+                  <a:srgbClr val="212121"/>
+                </a:solidFill>
+                <a:latin typeface="Calibri"/>
+              </a:rPr>
+              <a:t>: 146× range over the plane (0.02 cold and unloaded, 3 in flow); ln s_c ≈ (u-part) + (τ-part) at 95.5% of the variance</a:t>
+            </a:r>
+          </a:p>
+          <a:p>
+            <a:pPr>
+              <a:spcAft>
+                <a:spcPts val="1100"/>
+              </a:spcAft>
+            </a:pPr>
+            <a:r>
+              <a:rPr sz="1600" b="0">
+                <a:solidFill>
+                  <a:srgbClr val="1E2761"/>
+                </a:solidFill>
+                <a:latin typeface="Cambria Math"/>
+              </a:rPr>
+              <a:t>Z   </a:t>
+            </a:r>
+            <a:r>
+              <a:rPr sz="1500" b="0">
+                <a:solidFill>
+                  <a:srgbClr val="212121"/>
+                </a:solidFill>
+                <a:latin typeface="Calibri"/>
+              </a:rPr>
+              <a:t>normalization, computed numerically</a:t>
+            </a:r>
+          </a:p>
+        </p:txBody>
+      </p:sp>
+      <p:sp>
+        <p:nvSpPr>
+          <p:cNvPr id="6" name="TextBox 5"/>
+          <p:cNvSpPr txBox="1"/>
+          <p:nvPr/>
+        </p:nvSpPr>
+        <p:spPr>
+          <a:xfrm>
+            <a:off x="640080" y="4709160"/>
+            <a:ext cx="10972800" cy="1280160"/>
+          </a:xfrm>
+          <a:prstGeom prst="rect">
+            <a:avLst/>
+          </a:prstGeom>
+          <a:noFill/>
+        </p:spPr>
+        <p:txBody>
+          <a:bodyPr wrap="square" lIns="0" rIns="0" tIns="0" bIns="0">
+            <a:spAutoFit/>
+          </a:bodyPr>
+          <a:lstStyle/>
+          <a:p>
+            <a:pPr>
+              <a:spcAft>
+                <a:spcPts val="600"/>
+              </a:spcAft>
+            </a:pPr>
+            <a:r>
+              <a:rPr sz="1600" b="1">
+                <a:solidFill>
+                  <a:srgbClr val="1E2761"/>
+                </a:solidFill>
+                <a:latin typeface="Calibri"/>
+              </a:rPr>
+              <a:t>Versus the usual truncated power law  s⁻ᵏ e^(−s/s*)</a:t>
+            </a:r>
+          </a:p>
+          <a:p>
             <a:pPr marL="228600" indent="-228600">
               <a:spcAft>
                 <a:spcPts val="800"/>
@@ -4785,13 +6350,13 @@
               <a:buChar char="•"/>
             </a:pPr>
             <a:r>
-              <a:rPr sz="1300" b="0">
-                <a:solidFill>
-                  <a:srgbClr val="212121"/>
-                </a:solidFill>
-                <a:latin typeface="Calibri"/>
-              </a:rPr>
-              <a:t>One well-populated cell (6,706 events), five decades of event size. The inset marks the cell on the state plane</a:t>
+              <a:rPr sz="1400" b="0">
+                <a:solidFill>
+                  <a:srgbClr val="212121"/>
+                </a:solidFill>
+                <a:latin typeface="Calibri"/>
+              </a:rPr>
+              <a:t>An exponential tail suppresses large events but never forbids them</a:t>
             </a:r>
           </a:p>
           <a:p>
@@ -4802,128 +6367,13 @@
               <a:buChar char="•"/>
             </a:pPr>
             <a:r>
-              <a:rPr sz="1300" b="0">
-                <a:solidFill>
-                  <a:srgbClr val="212121"/>
-                </a:solidFill>
-                <a:latin typeface="Calibri"/>
-              </a:rPr>
-              <a:t>Black: the measured density. Red: the ceiling law. Blue dashed: the best truncated power law (TPL). Green dotted: the best lognormal</a:t>
-            </a:r>
-          </a:p>
-          <a:p>
-            <a:pPr marL="228600" indent="-228600">
-              <a:spcAft>
-                <a:spcPts val="800"/>
-              </a:spcAft>
-              <a:buChar char="•"/>
-            </a:pPr>
-            <a:r>
-              <a:rPr sz="1300" b="0">
-                <a:solidFill>
-                  <a:srgbClr val="212121"/>
-                </a:solidFill>
-                <a:latin typeface="Calibri"/>
-              </a:rPr>
-              <a:t>All three are maximum-likelihood fits of proper densities on the same events</a:t>
-            </a:r>
-          </a:p>
-          <a:p>
-            <a:pPr marL="228600" indent="-228600">
-              <a:spcAft>
-                <a:spcPts val="800"/>
-              </a:spcAft>
-              <a:buChar char="•"/>
-            </a:pPr>
-            <a:r>
-              <a:rPr sz="1300" b="0">
-                <a:solidFill>
-                  <a:srgbClr val="212121"/>
-                </a:solidFill>
-                <a:latin typeface="Calibri"/>
-              </a:rPr>
-              <a:t>Only the ceiling law gets both ends: the flattening below 3 × 10⁻⁵ and the abrupt stop at the dotted line (s_c). The TPL tail decays too softly and overshoots</a:t>
-            </a:r>
-          </a:p>
-          <a:p>
-            <a:pPr marL="228600" indent="-228600">
-              <a:spcAft>
-                <a:spcPts val="800"/>
-              </a:spcAft>
-              <a:buChar char="•"/>
-            </a:pPr>
-            <a:r>
-              <a:rPr sz="1300" b="0">
-                <a:solidFill>
-                  <a:srgbClr val="212121"/>
-                </a:solidFill>
-                <a:latin typeface="Calibri"/>
-              </a:rPr>
-              <a:t>Over the full range the ceiling law beats the TPL by ΔAIC 200 to 345 in this kind of cell</a:t>
-            </a:r>
-          </a:p>
-        </p:txBody>
-      </p:sp>
-      <p:sp>
-        <p:nvSpPr>
-          <p:cNvPr id="5" name="Rounded Rectangle 4"/>
-          <p:cNvSpPr/>
-          <p:nvPr/>
-        </p:nvSpPr>
-        <p:spPr>
-          <a:xfrm>
-            <a:off x="548640" y="6053328"/>
-            <a:ext cx="11091672" cy="566928"/>
-          </a:xfrm>
-          <a:prstGeom prst="roundRect">
-            <a:avLst>
-              <a:gd name="adj" fmla="val 18000"/>
-            </a:avLst>
-          </a:prstGeom>
-          <a:solidFill>
-            <a:srgbClr val="F2F2F2"/>
-          </a:solidFill>
-          <a:ln>
-            <a:noFill/>
-          </a:ln>
-          <a:effectLst/>
-        </p:spPr>
-        <p:style>
-          <a:lnRef idx="1">
-            <a:schemeClr val="accent1"/>
-          </a:lnRef>
-          <a:fillRef idx="3">
-            <a:schemeClr val="accent1"/>
-          </a:fillRef>
-          <a:effectRef idx="2">
-            <a:schemeClr val="accent1"/>
-          </a:effectRef>
-          <a:fontRef idx="minor">
-            <a:schemeClr val="lt1"/>
-          </a:fontRef>
-        </p:style>
-        <p:txBody>
-          <a:bodyPr rtlCol="0" anchor="ctr" wrap="square" lIns="164592" rIns="164592" tIns="0" bIns="0"/>
-          <a:lstStyle/>
-          <a:p>
-            <a:pPr algn="ctr"/>
-            <a:r>
-              <a:rPr sz="1350" b="1">
-                <a:solidFill>
-                  <a:srgbClr val="1E2761"/>
-                </a:solidFill>
-                <a:latin typeface="Calibri"/>
-              </a:rPr>
-              <a:t>Takeaway: </a:t>
-            </a:r>
-            <a:r>
-              <a:rPr sz="1350" b="0">
-                <a:solidFill>
-                  <a:srgbClr val="212121"/>
-                </a:solidFill>
-                <a:latin typeface="Calibri"/>
-              </a:rPr>
-              <a:t>At the level of individual events, the data terminate where the ceiling law says they should and where the TPL says they should not.</a:t>
+              <a:rPr sz="1400" b="0">
+                <a:solidFill>
+                  <a:srgbClr val="212121"/>
+                </a:solidFill>
+                <a:latin typeface="Calibri"/>
+              </a:rPr>
+              <a:t>It sits inside the search space at complexity 7 and never made a Pareto front; it loses every likelihood contest that follows</a:t>
             </a:r>
           </a:p>
         </p:txBody>
@@ -4975,7 +6425,252 @@
                 </a:solidFill>
                 <a:latin typeface="Calibri"/>
               </a:rPr>
-              <a:t>How the law performs: every cell, and the falsifiability control</a:t>
+              <a:t>Performance: one cell, three candidate laws</a:t>
+            </a:r>
+          </a:p>
+        </p:txBody>
+      </p:sp>
+      <p:pic>
+        <p:nvPicPr>
+          <p:cNvPr id="3" name="Picture 2" descr="fig01_size_law.png"/>
+          <p:cNvPicPr>
+            <a:picLocks noChangeAspect="1"/>
+          </p:cNvPicPr>
+          <p:nvPr/>
+        </p:nvPicPr>
+        <p:blipFill>
+          <a:blip r:embed="rId2"/>
+          <a:stretch>
+            <a:fillRect/>
+          </a:stretch>
+        </p:blipFill>
+        <p:spPr>
+          <a:xfrm>
+            <a:off x="502920" y="1196340"/>
+            <a:ext cx="6309360" cy="4556760"/>
+          </a:xfrm>
+          <a:prstGeom prst="rect">
+            <a:avLst/>
+          </a:prstGeom>
+        </p:spPr>
+      </p:pic>
+      <p:sp>
+        <p:nvSpPr>
+          <p:cNvPr id="4" name="TextBox 3"/>
+          <p:cNvSpPr txBox="1"/>
+          <p:nvPr/>
+        </p:nvSpPr>
+        <p:spPr>
+          <a:xfrm>
+            <a:off x="7086600" y="1280160"/>
+            <a:ext cx="4572000" cy="4572000"/>
+          </a:xfrm>
+          <a:prstGeom prst="rect">
+            <a:avLst/>
+          </a:prstGeom>
+          <a:noFill/>
+        </p:spPr>
+        <p:txBody>
+          <a:bodyPr wrap="square" lIns="0" rIns="0" tIns="0" bIns="0">
+            <a:spAutoFit/>
+          </a:bodyPr>
+          <a:lstStyle/>
+          <a:p>
+            <a:pPr>
+              <a:spcAft>
+                <a:spcPts val="600"/>
+              </a:spcAft>
+            </a:pPr>
+            <a:r>
+              <a:rPr sz="1600" b="1">
+                <a:solidFill>
+                  <a:srgbClr val="1E2761"/>
+                </a:solidFill>
+                <a:latin typeface="Calibri"/>
+              </a:rPr>
+              <a:t>The largest cell, 6,706 events, five decades of s</a:t>
+            </a:r>
+          </a:p>
+          <a:p>
+            <a:pPr marL="228600" indent="-228600">
+              <a:spcAft>
+                <a:spcPts val="800"/>
+              </a:spcAft>
+              <a:buChar char="•"/>
+            </a:pPr>
+            <a:r>
+              <a:rPr sz="1400" b="0">
+                <a:solidFill>
+                  <a:srgbClr val="212121"/>
+                </a:solidFill>
+                <a:latin typeface="Calibri"/>
+              </a:rPr>
+              <a:t>Black: measured density. </a:t>
+            </a:r>
+            <a:r>
+              <a:rPr sz="1400" b="1">
+                <a:solidFill>
+                  <a:srgbClr val="212121"/>
+                </a:solidFill>
+                <a:latin typeface="Calibri"/>
+              </a:rPr>
+              <a:t>Red: ceiling law</a:t>
+            </a:r>
+            <a:r>
+              <a:rPr sz="1400" b="0">
+                <a:solidFill>
+                  <a:srgbClr val="212121"/>
+                </a:solidFill>
+                <a:latin typeface="Calibri"/>
+              </a:rPr>
+              <a:t>. Blue dashed: best truncated power law (TPL). Green dotted: best lognormal</a:t>
+            </a:r>
+          </a:p>
+          <a:p>
+            <a:pPr marL="228600" indent="-228600">
+              <a:spcAft>
+                <a:spcPts val="800"/>
+              </a:spcAft>
+              <a:buChar char="•"/>
+            </a:pPr>
+            <a:r>
+              <a:rPr sz="1400" b="0">
+                <a:solidFill>
+                  <a:srgbClr val="212121"/>
+                </a:solidFill>
+                <a:latin typeface="Calibri"/>
+              </a:rPr>
+              <a:t>All three are maximum-likelihood fits of proper densities on the same events</a:t>
+            </a:r>
+          </a:p>
+          <a:p>
+            <a:pPr marL="228600" indent="-228600">
+              <a:spcAft>
+                <a:spcPts val="800"/>
+              </a:spcAft>
+              <a:buChar char="•"/>
+            </a:pPr>
+            <a:r>
+              <a:rPr sz="1400" b="0">
+                <a:solidFill>
+                  <a:srgbClr val="212121"/>
+                </a:solidFill>
+                <a:latin typeface="Calibri"/>
+              </a:rPr>
+              <a:t>Only the ceiling law gets </a:t>
+            </a:r>
+            <a:r>
+              <a:rPr sz="1400" b="1">
+                <a:solidFill>
+                  <a:srgbClr val="212121"/>
+                </a:solidFill>
+                <a:latin typeface="Calibri"/>
+              </a:rPr>
+              <a:t>both ends</a:t>
+            </a:r>
+            <a:r>
+              <a:rPr sz="1400" b="0">
+                <a:solidFill>
+                  <a:srgbClr val="212121"/>
+                </a:solidFill>
+                <a:latin typeface="Calibri"/>
+              </a:rPr>
+              <a:t>: the flattening below 3 × 10⁻⁵ and the stop at the dotted line (s_c)</a:t>
+            </a:r>
+          </a:p>
+          <a:p>
+            <a:pPr marL="228600" indent="-228600">
+              <a:spcAft>
+                <a:spcPts val="800"/>
+              </a:spcAft>
+              <a:buChar char="•"/>
+            </a:pPr>
+            <a:r>
+              <a:rPr sz="1400" b="0">
+                <a:solidFill>
+                  <a:srgbClr val="212121"/>
+                </a:solidFill>
+                <a:latin typeface="Calibri"/>
+              </a:rPr>
+              <a:t>The TPL tail decays too softly and overshoots</a:t>
+            </a:r>
+          </a:p>
+          <a:p>
+            <a:pPr marL="228600" indent="-228600">
+              <a:spcAft>
+                <a:spcPts val="800"/>
+              </a:spcAft>
+              <a:buChar char="•"/>
+            </a:pPr>
+            <a:r>
+              <a:rPr sz="1400" b="0">
+                <a:solidFill>
+                  <a:srgbClr val="212121"/>
+                </a:solidFill>
+                <a:latin typeface="Calibri"/>
+              </a:rPr>
+              <a:t>Full range: ceiling law over TPL by </a:t>
+            </a:r>
+            <a:r>
+              <a:rPr sz="1400" b="1">
+                <a:solidFill>
+                  <a:srgbClr val="212121"/>
+                </a:solidFill>
+                <a:latin typeface="Calibri"/>
+              </a:rPr>
+              <a:t>ΔAIC 200 to 345</a:t>
+            </a:r>
+          </a:p>
+        </p:txBody>
+      </p:sp>
+    </p:spTree>
+  </p:cSld>
+  <p:clrMapOvr>
+    <a:masterClrMapping/>
+  </p:clrMapOvr>
+</p:sld>
+</file>
+
+<file path=ppt/slides/slide7.xml><?xml version="1.0" encoding="utf-8"?>
+<p:sld xmlns:a="http://schemas.openxmlformats.org/drawingml/2006/main" xmlns:p="http://schemas.openxmlformats.org/presentationml/2006/main" xmlns:r="http://schemas.openxmlformats.org/officeDocument/2006/relationships">
+  <p:cSld>
+    <p:spTree>
+      <p:nvGrpSpPr>
+        <p:cNvPr id="1" name=""/>
+        <p:cNvGrpSpPr/>
+        <p:nvPr/>
+      </p:nvGrpSpPr>
+      <p:grpSpPr/>
+      <p:sp>
+        <p:nvSpPr>
+          <p:cNvPr id="2" name="TextBox 1"/>
+          <p:cNvSpPr txBox="1"/>
+          <p:nvPr/>
+        </p:nvSpPr>
+        <p:spPr>
+          <a:xfrm>
+            <a:off x="548640" y="292608"/>
+            <a:ext cx="11091672" cy="685800"/>
+          </a:xfrm>
+          <a:prstGeom prst="rect">
+            <a:avLst/>
+          </a:prstGeom>
+          <a:noFill/>
+        </p:spPr>
+        <p:txBody>
+          <a:bodyPr wrap="square" lIns="0" rIns="0" tIns="0" bIns="0">
+            <a:spAutoFit/>
+          </a:bodyPr>
+          <a:lstStyle/>
+          <a:p>
+            <a:r>
+              <a:rPr sz="3000" b="1">
+                <a:solidFill>
+                  <a:srgbClr val="1E2761"/>
+                </a:solidFill>
+                <a:latin typeface="Calibri"/>
+              </a:rPr>
+              <a:t>Performance: every cell, and a control</a:t>
             </a:r>
           </a:p>
         </p:txBody>
@@ -4996,8 +6691,8 @@
         </p:blipFill>
         <p:spPr>
           <a:xfrm>
-            <a:off x="650630" y="1188720"/>
-            <a:ext cx="5190978" cy="3749039"/>
+            <a:off x="618978" y="1143000"/>
+            <a:ext cx="5254283" cy="3794760"/>
           </a:xfrm>
           <a:prstGeom prst="rect">
             <a:avLst/>
@@ -5020,8 +6715,8 @@
         </p:blipFill>
         <p:spPr>
           <a:xfrm>
-            <a:off x="6347342" y="1188720"/>
-            <a:ext cx="5190978" cy="3749039"/>
+            <a:off x="6315690" y="1143000"/>
+            <a:ext cx="5254283" cy="3794760"/>
           </a:xfrm>
           <a:prstGeom prst="rect">
             <a:avLst/>
@@ -5037,7 +6732,7 @@
         <p:spPr>
           <a:xfrm>
             <a:off x="640080" y="5029200"/>
-            <a:ext cx="10972800" cy="914400"/>
+            <a:ext cx="5394960" cy="1737360"/>
           </a:xfrm>
           <a:prstGeom prst="rect">
             <a:avLst/>
@@ -5050,6 +6745,22 @@
           </a:bodyPr>
           <a:lstStyle/>
           <a:p>
+            <a:pPr>
+              <a:spcAft>
+                <a:spcPts val="600"/>
+              </a:spcAft>
+            </a:pPr>
+            <a:r>
+              <a:rPr sz="1600" b="1">
+                <a:solidFill>
+                  <a:srgbClr val="1E2761"/>
+                </a:solidFill>
+                <a:latin typeface="Calibri"/>
+              </a:rPr>
+              <a:t>Left: the collapse</a:t>
+            </a:r>
+          </a:p>
+          <a:p>
             <a:pPr marL="228600" indent="-228600">
               <a:spcAft>
                 <a:spcPts val="800"/>
@@ -5057,13 +6768,70 @@
               <a:buChar char="•"/>
             </a:pPr>
             <a:r>
-              <a:rPr sz="1250" b="0">
-                <a:solidFill>
-                  <a:srgbClr val="212121"/>
-                </a:solidFill>
-                <a:latin typeface="Calibri"/>
-              </a:rPr>
-              <a:t>Left: twelve cells whose raw distributions differ by 100× in scale, replotted against ξ = (s+ε)/(s_c+ε) with the global (k, m, ε). They fall on one curve, including the bend into the ceiling</a:t>
+              <a:rPr sz="1350" b="0">
+                <a:solidFill>
+                  <a:srgbClr val="212121"/>
+                </a:solidFill>
+                <a:latin typeface="Calibri"/>
+              </a:rPr>
+              <a:t>Twelve cells, 100× apart in scale, plotted against </a:t>
+            </a:r>
+            <a:r>
+              <a:rPr sz="1350" b="1">
+                <a:solidFill>
+                  <a:srgbClr val="212121"/>
+                </a:solidFill>
+                <a:latin typeface="Calibri"/>
+              </a:rPr>
+              <a:t>ξ = (s+ε)/(s_c+ε)</a:t>
+            </a:r>
+            <a:r>
+              <a:rPr sz="1350" b="0">
+                <a:solidFill>
+                  <a:srgbClr val="212121"/>
+                </a:solidFill>
+                <a:latin typeface="Calibri"/>
+              </a:rPr>
+              <a:t> with the global (k, m, ε): one curve, including the bend into the ceiling</a:t>
+            </a:r>
+          </a:p>
+        </p:txBody>
+      </p:sp>
+      <p:sp>
+        <p:nvSpPr>
+          <p:cNvPr id="6" name="TextBox 5"/>
+          <p:cNvSpPr txBox="1"/>
+          <p:nvPr/>
+        </p:nvSpPr>
+        <p:spPr>
+          <a:xfrm>
+            <a:off x="6355080" y="5029200"/>
+            <a:ext cx="5303520" cy="1737360"/>
+          </a:xfrm>
+          <a:prstGeom prst="rect">
+            <a:avLst/>
+          </a:prstGeom>
+          <a:noFill/>
+        </p:spPr>
+        <p:txBody>
+          <a:bodyPr wrap="square" lIns="0" rIns="0" tIns="0" bIns="0">
+            <a:spAutoFit/>
+          </a:bodyPr>
+          <a:lstStyle/>
+          <a:p>
+            <a:pPr>
+              <a:spcAft>
+                <a:spcPts val="600"/>
+              </a:spcAft>
+            </a:pPr>
+            <a:r>
+              <a:rPr sz="1600" b="1">
+                <a:solidFill>
+                  <a:srgbClr val="1E2761"/>
+                </a:solidFill>
+                <a:latin typeface="Calibri"/>
+              </a:rPr>
+              <a:t>Right: the same machinery on synthetic data</a:t>
             </a:r>
           </a:p>
           <a:p>
@@ -5074,178 +6842,15 @@
               <a:buChar char="•"/>
             </a:pPr>
             <a:r>
-              <a:rPr sz="1250" b="0">
-                <a:solidFill>
-                  <a:srgbClr val="212121"/>
-                </a:solidFill>
-                <a:latin typeface="Calibri"/>
-              </a:rPr>
-              <a:t>Right: the same fitting machinery on synthetic catalogs. TPL-generated data return a TPL verdict (5 of 5); ceiling-generated data return the ceiling (5 of 5). The twelve measured cells sit on the ceiling side, one sparse cell a tie. In the eight largest cells the ceiling law wins AIC 8 of 8 (ΔAIC 67 to 120 over the TPL, 300 to 754 over the lognormal)</a:t>
-            </a:r>
-          </a:p>
-        </p:txBody>
-      </p:sp>
-      <p:sp>
-        <p:nvSpPr>
-          <p:cNvPr id="6" name="Rounded Rectangle 5"/>
-          <p:cNvSpPr/>
-          <p:nvPr/>
-        </p:nvSpPr>
-        <p:spPr>
-          <a:xfrm>
-            <a:off x="548640" y="6053328"/>
-            <a:ext cx="11091672" cy="566928"/>
-          </a:xfrm>
-          <a:prstGeom prst="roundRect">
-            <a:avLst>
-              <a:gd name="adj" fmla="val 18000"/>
-            </a:avLst>
-          </a:prstGeom>
-          <a:solidFill>
-            <a:srgbClr val="F2F2F2"/>
-          </a:solidFill>
-          <a:ln>
-            <a:noFill/>
-          </a:ln>
-          <a:effectLst/>
-        </p:spPr>
-        <p:style>
-          <a:lnRef idx="1">
-            <a:schemeClr val="accent1"/>
-          </a:lnRef>
-          <a:fillRef idx="3">
-            <a:schemeClr val="accent1"/>
-          </a:fillRef>
-          <a:effectRef idx="2">
-            <a:schemeClr val="accent1"/>
-          </a:effectRef>
-          <a:fontRef idx="minor">
-            <a:schemeClr val="lt1"/>
-          </a:fontRef>
-        </p:style>
-        <p:txBody>
-          <a:bodyPr rtlCol="0" anchor="ctr" wrap="square" lIns="164592" rIns="164592" tIns="0" bIns="0"/>
-          <a:lstStyle/>
-          <a:p>
-            <a:pPr algn="ctr"/>
-            <a:r>
-              <a:rPr sz="1350" b="1">
-                <a:solidFill>
-                  <a:srgbClr val="1E2761"/>
-                </a:solidFill>
-                <a:latin typeface="Calibri"/>
-              </a:rPr>
-              <a:t>Takeaway: </a:t>
-            </a:r>
-            <a:r>
               <a:rPr sz="1350" b="0">
                 <a:solidFill>
                   <a:srgbClr val="212121"/>
                 </a:solidFill>
                 <a:latin typeface="Calibri"/>
               </a:rPr>
-              <a:t>One shape everywhere, a discriminator that works in both directions, and the data on one side of it.</a:t>
-            </a:r>
-          </a:p>
-        </p:txBody>
-      </p:sp>
-    </p:spTree>
-  </p:cSld>
-  <p:clrMapOvr>
-    <a:masterClrMapping/>
-  </p:clrMapOvr>
-</p:sld>
-</file>
-
-<file path=ppt/slides/slide7.xml><?xml version="1.0" encoding="utf-8"?>
-<p:sld xmlns:a="http://schemas.openxmlformats.org/drawingml/2006/main" xmlns:p="http://schemas.openxmlformats.org/presentationml/2006/main" xmlns:r="http://schemas.openxmlformats.org/officeDocument/2006/relationships">
-  <p:cSld>
-    <p:spTree>
-      <p:nvGrpSpPr>
-        <p:cNvPr id="1" name=""/>
-        <p:cNvGrpSpPr/>
-        <p:nvPr/>
-      </p:nvGrpSpPr>
-      <p:grpSpPr/>
-      <p:sp>
-        <p:nvSpPr>
-          <p:cNvPr id="2" name="TextBox 1"/>
-          <p:cNvSpPr txBox="1"/>
-          <p:nvPr/>
-        </p:nvSpPr>
-        <p:spPr>
-          <a:xfrm>
-            <a:off x="548640" y="292608"/>
-            <a:ext cx="11091672" cy="685800"/>
-          </a:xfrm>
-          <a:prstGeom prst="rect">
-            <a:avLst/>
-          </a:prstGeom>
-          <a:noFill/>
-        </p:spPr>
-        <p:txBody>
-          <a:bodyPr wrap="square" lIns="0" rIns="0" tIns="0" bIns="0">
-            <a:spAutoFit/>
-          </a:bodyPr>
-          <a:lstStyle/>
-          <a:p>
-            <a:r>
-              <a:rPr sz="3000" b="1">
-                <a:solidFill>
-                  <a:srgbClr val="1E2761"/>
-                </a:solidFill>
-                <a:latin typeface="Calibri"/>
-              </a:rPr>
-              <a:t>How the law performs: the plastic-rate field, rebuilt from it</a:t>
-            </a:r>
-          </a:p>
-        </p:txBody>
-      </p:sp>
-      <p:pic>
-        <p:nvPicPr>
-          <p:cNvPr id="3" name="Picture 2" descr="fig09_q_agreement.png"/>
-          <p:cNvPicPr>
-            <a:picLocks noChangeAspect="1"/>
-          </p:cNvPicPr>
-          <p:nvPr/>
-        </p:nvPicPr>
-        <p:blipFill>
-          <a:blip r:embed="rId2"/>
-          <a:stretch>
-            <a:fillRect/>
-          </a:stretch>
-        </p:blipFill>
-        <p:spPr>
-          <a:xfrm>
-            <a:off x="891539" y="1234440"/>
-            <a:ext cx="5532120" cy="4526280"/>
-          </a:xfrm>
-          <a:prstGeom prst="rect">
-            <a:avLst/>
-          </a:prstGeom>
-        </p:spPr>
-      </p:pic>
-      <p:sp>
-        <p:nvSpPr>
-          <p:cNvPr id="4" name="TextBox 3"/>
-          <p:cNvSpPr txBox="1"/>
-          <p:nvPr/>
-        </p:nvSpPr>
-        <p:spPr>
-          <a:xfrm>
-            <a:off x="7132320" y="1371600"/>
-            <a:ext cx="5056631" cy="4343400"/>
-          </a:xfrm>
-          <a:prstGeom prst="rect">
-            <a:avLst/>
-          </a:prstGeom>
-          <a:noFill/>
-        </p:spPr>
-        <p:txBody>
-          <a:bodyPr wrap="square" lIns="0" rIns="0" tIns="0" bIns="0">
-            <a:spAutoFit/>
-          </a:bodyPr>
-          <a:lstStyle/>
+              <a:t>TPL-generated catalogs return a TPL verdict, 5 of 5; ceiling-generated return the ceiling, 5 of 5</a:t>
+            </a:r>
+          </a:p>
           <a:p>
             <a:pPr marL="228600" indent="-228600">
               <a:spcAft>
@@ -5254,136 +6859,22 @@
               <a:buChar char="•"/>
             </a:pPr>
             <a:r>
-              <a:rPr sz="1300" b="0">
-                <a:solidFill>
-                  <a:srgbClr val="212121"/>
-                </a:solidFill>
-                <a:latin typeface="Calibri"/>
-              </a:rPr>
-              <a:t>q(u, τ) was measured directly in the first pass, cell by cell, as 1 − (dτ/dγ)/2μ</a:t>
-            </a:r>
-          </a:p>
-          <a:p>
-            <a:pPr marL="228600" indent="-228600">
-              <a:spcAft>
-                <a:spcPts val="800"/>
-              </a:spcAft>
-              <a:buChar char="•"/>
-            </a:pPr>
-            <a:r>
-              <a:rPr sz="1300" b="0">
-                <a:solidFill>
-                  <a:srgbClr val="212121"/>
-                </a:solidFill>
-                <a:latin typeface="Calibri"/>
-              </a:rPr>
-              <a:t>From the law it is hazard × mean event size, with the mean taken from the fitted P(s | u, τ)</a:t>
-            </a:r>
-          </a:p>
-          <a:p>
-            <a:pPr marL="228600" indent="-228600">
-              <a:spcAft>
-                <a:spcPts val="800"/>
-              </a:spcAft>
-              <a:buChar char="•"/>
-            </a:pPr>
-            <a:r>
-              <a:rPr sz="1300" b="0">
-                <a:solidFill>
-                  <a:srgbClr val="212121"/>
-                </a:solidFill>
-                <a:latin typeface="Calibri"/>
-              </a:rPr>
-              <a:t>Each dot is one cell over two decades of q. The band is the statistical noise floor of this grid, 17.5% from split-half ensembles</a:t>
-            </a:r>
-          </a:p>
-          <a:p>
-            <a:pPr marL="228600" indent="-228600">
-              <a:spcAft>
-                <a:spcPts val="800"/>
-              </a:spcAft>
-              <a:buChar char="•"/>
-            </a:pPr>
-            <a:r>
-              <a:rPr sz="1300" b="0">
-                <a:solidFill>
-                  <a:srgbClr val="212121"/>
-                </a:solidFill>
-                <a:latin typeface="Calibri"/>
-              </a:rPr>
-              <a:t>The rebuilt field lands at median +1.8% and RMS 17%: within the noise. A better law could not score better on this test</a:t>
-            </a:r>
-          </a:p>
-          <a:p>
-            <a:pPr marL="228600" indent="-228600">
-              <a:spcAft>
-                <a:spcPts val="800"/>
-              </a:spcAft>
-              <a:buChar char="•"/>
-            </a:pPr>
-            <a:r>
-              <a:rPr sz="1300" b="0">
-                <a:solidFill>
-                  <a:srgbClr val="212121"/>
-                </a:solidFill>
-                <a:latin typeface="Calibri"/>
-              </a:rPr>
-              <a:t>Its factor structure is the measured one too: both versions factorize at 96%, with the same SR knee and nearly the same constants</a:t>
-            </a:r>
-          </a:p>
-        </p:txBody>
-      </p:sp>
-      <p:sp>
-        <p:nvSpPr>
-          <p:cNvPr id="5" name="Rounded Rectangle 4"/>
-          <p:cNvSpPr/>
-          <p:nvPr/>
-        </p:nvSpPr>
-        <p:spPr>
-          <a:xfrm>
-            <a:off x="548640" y="6053328"/>
-            <a:ext cx="11091672" cy="566928"/>
-          </a:xfrm>
-          <a:prstGeom prst="roundRect">
-            <a:avLst>
-              <a:gd name="adj" fmla="val 18000"/>
-            </a:avLst>
-          </a:prstGeom>
-          <a:solidFill>
-            <a:srgbClr val="F2F2F2"/>
-          </a:solidFill>
-          <a:ln>
-            <a:noFill/>
-          </a:ln>
-          <a:effectLst/>
-        </p:spPr>
-        <p:style>
-          <a:lnRef idx="1">
-            <a:schemeClr val="accent1"/>
-          </a:lnRef>
-          <a:fillRef idx="3">
-            <a:schemeClr val="accent1"/>
-          </a:fillRef>
-          <a:effectRef idx="2">
-            <a:schemeClr val="accent1"/>
-          </a:effectRef>
-          <a:fontRef idx="minor">
-            <a:schemeClr val="lt1"/>
-          </a:fontRef>
-        </p:style>
-        <p:txBody>
-          <a:bodyPr rtlCol="0" anchor="ctr" wrap="square" lIns="164592" rIns="164592" tIns="0" bIns="0"/>
-          <a:lstStyle/>
-          <a:p>
-            <a:pPr algn="ctr"/>
+              <a:rPr sz="1350" b="0">
+                <a:solidFill>
+                  <a:srgbClr val="212121"/>
+                </a:solidFill>
+                <a:latin typeface="Calibri"/>
+              </a:rPr>
+              <a:t>Measured cells sit on the ceiling side; in the 8 largest, </a:t>
+            </a:r>
             <a:r>
               <a:rPr sz="1350" b="1">
                 <a:solidFill>
-                  <a:srgbClr val="1E2761"/>
-                </a:solidFill>
-                <a:latin typeface="Calibri"/>
-              </a:rPr>
-              <a:t>Takeaway: </a:t>
+                  <a:srgbClr val="212121"/>
+                </a:solidFill>
+                <a:latin typeface="Calibri"/>
+              </a:rPr>
+              <a:t>AIC 8 of 8</a:t>
             </a:r>
             <a:r>
               <a:rPr sz="1350" b="0">
@@ -5392,7 +6883,7 @@
                 </a:solidFill>
                 <a:latin typeface="Calibri"/>
               </a:rPr>
-              <a:t>The fitted law reproduces the central object of the first pass to within the data’s own noise.</a:t>
+              <a:t> (ΔAIC 67 to 120 over TPL, 300 to 754 over lognormal)</a:t>
             </a:r>
           </a:p>
         </p:txBody>
@@ -5444,6 +6935,278 @@
                 </a:solidFill>
                 <a:latin typeface="Calibri"/>
               </a:rPr>
+              <a:t>Performance: the plastic-rate field, rebuilt from the law</a:t>
+            </a:r>
+          </a:p>
+        </p:txBody>
+      </p:sp>
+      <p:pic>
+        <p:nvPicPr>
+          <p:cNvPr id="3" name="Picture 2" descr="fig09_q_agreement.png"/>
+          <p:cNvPicPr>
+            <a:picLocks noChangeAspect="1"/>
+          </p:cNvPicPr>
+          <p:nvPr/>
+        </p:nvPicPr>
+        <p:blipFill>
+          <a:blip r:embed="rId2"/>
+          <a:stretch>
+            <a:fillRect/>
+          </a:stretch>
+        </p:blipFill>
+        <p:spPr>
+          <a:xfrm>
+            <a:off x="635000" y="1188720"/>
+            <a:ext cx="5588000" cy="4572000"/>
+          </a:xfrm>
+          <a:prstGeom prst="rect">
+            <a:avLst/>
+          </a:prstGeom>
+        </p:spPr>
+      </p:pic>
+      <p:sp>
+        <p:nvSpPr>
+          <p:cNvPr id="4" name="TextBox 3"/>
+          <p:cNvSpPr txBox="1"/>
+          <p:nvPr/>
+        </p:nvSpPr>
+        <p:spPr>
+          <a:xfrm>
+            <a:off x="6675120" y="1280160"/>
+            <a:ext cx="4983480" cy="4572000"/>
+          </a:xfrm>
+          <a:prstGeom prst="rect">
+            <a:avLst/>
+          </a:prstGeom>
+          <a:noFill/>
+        </p:spPr>
+        <p:txBody>
+          <a:bodyPr wrap="square" lIns="0" rIns="0" tIns="0" bIns="0">
+            <a:spAutoFit/>
+          </a:bodyPr>
+          <a:lstStyle/>
+          <a:p>
+            <a:pPr>
+              <a:spcAft>
+                <a:spcPts val="600"/>
+              </a:spcAft>
+            </a:pPr>
+            <a:r>
+              <a:rPr sz="1600" b="1">
+                <a:solidFill>
+                  <a:srgbClr val="1E2761"/>
+                </a:solidFill>
+                <a:latin typeface="Calibri"/>
+              </a:rPr>
+              <a:t>Measured q against q from the law</a:t>
+            </a:r>
+          </a:p>
+          <a:p>
+            <a:pPr marL="228600" indent="-228600">
+              <a:spcAft>
+                <a:spcPts val="800"/>
+              </a:spcAft>
+              <a:buChar char="•"/>
+            </a:pPr>
+            <a:r>
+              <a:rPr sz="1400" b="0">
+                <a:solidFill>
+                  <a:srgbClr val="212121"/>
+                </a:solidFill>
+                <a:latin typeface="Calibri"/>
+              </a:rPr>
+              <a:t>Measured: </a:t>
+            </a:r>
+            <a:r>
+              <a:rPr sz="1400" b="1">
+                <a:solidFill>
+                  <a:srgbClr val="212121"/>
+                </a:solidFill>
+                <a:latin typeface="Calibri"/>
+              </a:rPr>
+              <a:t>q = 1 − (dτ/dγ)/2μ</a:t>
+            </a:r>
+            <a:r>
+              <a:rPr sz="1400" b="0">
+                <a:solidFill>
+                  <a:srgbClr val="212121"/>
+                </a:solidFill>
+                <a:latin typeface="Calibri"/>
+              </a:rPr>
+              <a:t> per cell, first pass</a:t>
+            </a:r>
+          </a:p>
+          <a:p>
+            <a:pPr marL="228600" indent="-228600">
+              <a:spcAft>
+                <a:spcPts val="800"/>
+              </a:spcAft>
+              <a:buChar char="•"/>
+            </a:pPr>
+            <a:r>
+              <a:rPr sz="1400" b="0">
+                <a:solidFill>
+                  <a:srgbClr val="212121"/>
+                </a:solidFill>
+                <a:latin typeface="Calibri"/>
+              </a:rPr>
+              <a:t>From the law: </a:t>
+            </a:r>
+            <a:r>
+              <a:rPr sz="1400" b="1">
+                <a:solidFill>
+                  <a:srgbClr val="212121"/>
+                </a:solidFill>
+                <a:latin typeface="Calibri"/>
+              </a:rPr>
+              <a:t>hazard × mean event size</a:t>
+            </a:r>
+            <a:r>
+              <a:rPr sz="1400" b="0">
+                <a:solidFill>
+                  <a:srgbClr val="212121"/>
+                </a:solidFill>
+                <a:latin typeface="Calibri"/>
+              </a:rPr>
+              <a:t>, the mean taken from the fitted P(s | u, τ)</a:t>
+            </a:r>
+          </a:p>
+          <a:p>
+            <a:pPr marL="228600" indent="-228600">
+              <a:spcAft>
+                <a:spcPts val="800"/>
+              </a:spcAft>
+              <a:buChar char="•"/>
+            </a:pPr>
+            <a:r>
+              <a:rPr sz="1400" b="0">
+                <a:solidFill>
+                  <a:srgbClr val="212121"/>
+                </a:solidFill>
+                <a:latin typeface="Calibri"/>
+              </a:rPr>
+              <a:t>One dot per cell, two decades of q; band = statistical noise floor of this grid, </a:t>
+            </a:r>
+            <a:r>
+              <a:rPr sz="1400" b="1">
+                <a:solidFill>
+                  <a:srgbClr val="212121"/>
+                </a:solidFill>
+                <a:latin typeface="Calibri"/>
+              </a:rPr>
+              <a:t>17.5%</a:t>
+            </a:r>
+            <a:r>
+              <a:rPr sz="1400" b="0">
+                <a:solidFill>
+                  <a:srgbClr val="212121"/>
+                </a:solidFill>
+                <a:latin typeface="Calibri"/>
+              </a:rPr>
+              <a:t> (split-half ensembles)</a:t>
+            </a:r>
+          </a:p>
+          <a:p>
+            <a:pPr marL="228600" indent="-228600">
+              <a:spcAft>
+                <a:spcPts val="800"/>
+              </a:spcAft>
+              <a:buChar char="•"/>
+            </a:pPr>
+            <a:r>
+              <a:rPr sz="1400" b="0">
+                <a:solidFill>
+                  <a:srgbClr val="212121"/>
+                </a:solidFill>
+                <a:latin typeface="Calibri"/>
+              </a:rPr>
+              <a:t>Rebuilt field: </a:t>
+            </a:r>
+            <a:r>
+              <a:rPr sz="1400" b="1">
+                <a:solidFill>
+                  <a:srgbClr val="212121"/>
+                </a:solidFill>
+                <a:latin typeface="Calibri"/>
+              </a:rPr>
+              <a:t>median +1.8%, RMS 17%</a:t>
+            </a:r>
+            <a:r>
+              <a:rPr sz="1400" b="0">
+                <a:solidFill>
+                  <a:srgbClr val="212121"/>
+                </a:solidFill>
+                <a:latin typeface="Calibri"/>
+              </a:rPr>
+              <a:t>, within the noise. A better law could not score better here</a:t>
+            </a:r>
+          </a:p>
+          <a:p>
+            <a:pPr marL="228600" indent="-228600">
+              <a:spcAft>
+                <a:spcPts val="800"/>
+              </a:spcAft>
+              <a:buChar char="•"/>
+            </a:pPr>
+            <a:r>
+              <a:rPr sz="1400" b="0">
+                <a:solidFill>
+                  <a:srgbClr val="212121"/>
+                </a:solidFill>
+                <a:latin typeface="Calibri"/>
+              </a:rPr>
+              <a:t>Same factor structure: both versions factorize at 96%, same SR knee, nearly the same constants</a:t>
+            </a:r>
+          </a:p>
+        </p:txBody>
+      </p:sp>
+    </p:spTree>
+  </p:cSld>
+  <p:clrMapOvr>
+    <a:masterClrMapping/>
+  </p:clrMapOvr>
+</p:sld>
+</file>
+
+<file path=ppt/slides/slide9.xml><?xml version="1.0" encoding="utf-8"?>
+<p:sld xmlns:a="http://schemas.openxmlformats.org/drawingml/2006/main" xmlns:p="http://schemas.openxmlformats.org/presentationml/2006/main" xmlns:r="http://schemas.openxmlformats.org/officeDocument/2006/relationships">
+  <p:cSld>
+    <p:spTree>
+      <p:nvGrpSpPr>
+        <p:cNvPr id="1" name=""/>
+        <p:cNvGrpSpPr/>
+        <p:nvPr/>
+      </p:nvGrpSpPr>
+      <p:grpSpPr/>
+      <p:sp>
+        <p:nvSpPr>
+          <p:cNvPr id="2" name="TextBox 1"/>
+          <p:cNvSpPr txBox="1"/>
+          <p:nvPr/>
+        </p:nvSpPr>
+        <p:spPr>
+          <a:xfrm>
+            <a:off x="548640" y="292608"/>
+            <a:ext cx="11091672" cy="685800"/>
+          </a:xfrm>
+          <a:prstGeom prst="rect">
+            <a:avLst/>
+          </a:prstGeom>
+          <a:noFill/>
+        </p:spPr>
+        <p:txBody>
+          <a:bodyPr wrap="square" lIns="0" rIns="0" tIns="0" bIns="0">
+            <a:spAutoFit/>
+          </a:bodyPr>
+          <a:lstStyle/>
+          <a:p>
+            <a:r>
+              <a:rPr sz="3000" b="1">
+                <a:solidFill>
+                  <a:srgbClr val="1E2761"/>
+                </a:solidFill>
+                <a:latin typeface="Calibri"/>
+              </a:rPr>
               <a:t>Running the model with the discovered law</a:t>
             </a:r>
           </a:p>
@@ -5465,8 +7228,8 @@
         </p:blipFill>
         <p:spPr>
           <a:xfrm>
-            <a:off x="578533" y="1188720"/>
-            <a:ext cx="5335172" cy="3749039"/>
+            <a:off x="546002" y="1143000"/>
+            <a:ext cx="5400235" cy="3794760"/>
           </a:xfrm>
           <a:prstGeom prst="rect">
             <a:avLst/>
@@ -5489,8 +7252,8 @@
         </p:blipFill>
         <p:spPr>
           <a:xfrm>
-            <a:off x="6275245" y="1188720"/>
-            <a:ext cx="5335172" cy="3749039"/>
+            <a:off x="6242714" y="1143000"/>
+            <a:ext cx="5400235" cy="3794760"/>
           </a:xfrm>
           <a:prstGeom prst="rect">
             <a:avLst/>
@@ -5506,7 +7269,7 @@
         <p:spPr>
           <a:xfrm>
             <a:off x="640080" y="5029200"/>
-            <a:ext cx="10972800" cy="914400"/>
+            <a:ext cx="5394960" cy="1737360"/>
           </a:xfrm>
           <a:prstGeom prst="rect">
             <a:avLst/>
@@ -5519,6 +7282,22 @@
           </a:bodyPr>
           <a:lstStyle/>
           <a:p>
+            <a:pPr>
+              <a:spcAft>
+                <a:spcPts val="600"/>
+              </a:spcAft>
+            </a:pPr>
+            <a:r>
+              <a:rPr sz="1600" b="1">
+                <a:solidFill>
+                  <a:srgbClr val="1E2761"/>
+                </a:solidFill>
+                <a:latin typeface="Calibri"/>
+              </a:rPr>
+              <a:t>All 850 runs, forward from their measured initial states</a:t>
+            </a:r>
+          </a:p>
+          <a:p>
             <a:pPr marL="228600" indent="-228600">
               <a:spcAft>
                 <a:spcPts val="800"/>
@@ -5526,13 +7305,13 @@
               <a:buChar char="•"/>
             </a:pPr>
             <a:r>
-              <a:rPr sz="1250" b="0">
-                <a:solidFill>
-                  <a:srgbClr val="212121"/>
-                </a:solidFill>
-                <a:latin typeface="Calibri"/>
-              </a:rPr>
-              <a:t>All 850 runs simulated forward from their measured initial states at Δγ = 10⁻⁵: elastic drift at 2μ, an event with probability p(u, τ), and the event size drawn from the law at that state</a:t>
+              <a:rPr sz="1350" b="0">
+                <a:solidFill>
+                  <a:srgbClr val="212121"/>
+                </a:solidFill>
+                <a:latin typeface="Calibri"/>
+              </a:rPr>
+              <a:t>Each step at Δγ = 10⁻⁵: elastic drift at 2μ, an event with probability p(u, τ), size drawn from the law</a:t>
             </a:r>
           </a:p>
           <a:p>
@@ -5543,109 +7322,45 @@
               <a:buChar char="•"/>
             </a:pPr>
             <a:r>
-              <a:rPr sz="1250" b="0">
-                <a:solidFill>
-                  <a:srgbClr val="212121"/>
-                </a:solidFill>
-                <a:latin typeface="Calibri"/>
-              </a:rPr>
-              <a:t>Left: stress-strain curves for the nine preparations, MD solid and model dashed. The elastic rise, the yield overshoot across 256× in cooling rate, the post-yield decay, and the flow stress (±5%) all come out. Right: the yield peaks, RMS 2.5% (worst rate 4.3%); the TPL arm gives 1.4% and resampling the raw events 0.9%, so peaks do not discriminate size laws</a:t>
-            </a:r>
-          </a:p>
-        </p:txBody>
-      </p:sp>
-      <p:sp>
-        <p:nvSpPr>
-          <p:cNvPr id="6" name="Rounded Rectangle 5"/>
-          <p:cNvSpPr/>
+              <a:rPr sz="1350" b="0">
+                <a:solidFill>
+                  <a:srgbClr val="212121"/>
+                </a:solidFill>
+                <a:latin typeface="Calibri"/>
+              </a:rPr>
+              <a:t>MD solid, model dashed: elastic rise, </a:t>
+            </a:r>
+            <a:r>
+              <a:rPr sz="1350" b="1">
+                <a:solidFill>
+                  <a:srgbClr val="212121"/>
+                </a:solidFill>
+                <a:latin typeface="Calibri"/>
+              </a:rPr>
+              <a:t>yield overshoot across 256× in cooling rate</a:t>
+            </a:r>
+            <a:r>
+              <a:rPr sz="1350" b="0">
+                <a:solidFill>
+                  <a:srgbClr val="212121"/>
+                </a:solidFill>
+                <a:latin typeface="Calibri"/>
+              </a:rPr>
+              <a:t>, post-yield decay, flow stress (±5%)</a:t>
+            </a:r>
+          </a:p>
+        </p:txBody>
+      </p:sp>
+      <p:sp>
+        <p:nvSpPr>
+          <p:cNvPr id="6" name="TextBox 5"/>
+          <p:cNvSpPr txBox="1"/>
           <p:nvPr/>
         </p:nvSpPr>
         <p:spPr>
           <a:xfrm>
-            <a:off x="548640" y="6053328"/>
-            <a:ext cx="11091672" cy="566928"/>
-          </a:xfrm>
-          <a:prstGeom prst="roundRect">
-            <a:avLst>
-              <a:gd name="adj" fmla="val 18000"/>
-            </a:avLst>
-          </a:prstGeom>
-          <a:solidFill>
-            <a:srgbClr val="F2F2F2"/>
-          </a:solidFill>
-          <a:ln>
-            <a:noFill/>
-          </a:ln>
-          <a:effectLst/>
-        </p:spPr>
-        <p:style>
-          <a:lnRef idx="1">
-            <a:schemeClr val="accent1"/>
-          </a:lnRef>
-          <a:fillRef idx="3">
-            <a:schemeClr val="accent1"/>
-          </a:fillRef>
-          <a:effectRef idx="2">
-            <a:schemeClr val="accent1"/>
-          </a:effectRef>
-          <a:fontRef idx="minor">
-            <a:schemeClr val="lt1"/>
-          </a:fontRef>
-        </p:style>
-        <p:txBody>
-          <a:bodyPr rtlCol="0" anchor="ctr" wrap="square" lIns="164592" rIns="164592" tIns="0" bIns="0"/>
-          <a:lstStyle/>
-          <a:p>
-            <a:pPr algn="ctr"/>
-            <a:r>
-              <a:rPr sz="1350" b="1">
-                <a:solidFill>
-                  <a:srgbClr val="1E2761"/>
-                </a:solidFill>
-                <a:latin typeface="Calibri"/>
-              </a:rPr>
-              <a:t>Takeaway: </a:t>
-            </a:r>
-            <a:r>
-              <a:rPr sz="1350" b="0">
-                <a:solidFill>
-                  <a:srgbClr val="212121"/>
-                </a:solidFill>
-                <a:latin typeface="Calibri"/>
-              </a:rPr>
-              <a:t>Fields measured at the single-step level predict the yield strength of a glass from its preparation to a few percent.</a:t>
-            </a:r>
-          </a:p>
-        </p:txBody>
-      </p:sp>
-    </p:spTree>
-  </p:cSld>
-  <p:clrMapOvr>
-    <a:masterClrMapping/>
-  </p:clrMapOvr>
-</p:sld>
-</file>
-
-<file path=ppt/slides/slide9.xml><?xml version="1.0" encoding="utf-8"?>
-<p:sld xmlns:a="http://schemas.openxmlformats.org/drawingml/2006/main" xmlns:p="http://schemas.openxmlformats.org/presentationml/2006/main" xmlns:r="http://schemas.openxmlformats.org/officeDocument/2006/relationships">
-  <p:cSld>
-    <p:spTree>
-      <p:nvGrpSpPr>
-        <p:cNvPr id="1" name=""/>
-        <p:cNvGrpSpPr/>
-        <p:nvPr/>
-      </p:nvGrpSpPr>
-      <p:grpSpPr/>
-      <p:sp>
-        <p:nvSpPr>
-          <p:cNvPr id="2" name="TextBox 1"/>
-          <p:cNvSpPr txBox="1"/>
-          <p:nvPr/>
-        </p:nvSpPr>
-        <p:spPr>
-          <a:xfrm>
-            <a:off x="548640" y="292608"/>
-            <a:ext cx="11091672" cy="685800"/>
+            <a:off x="6355080" y="5029200"/>
+            <a:ext cx="5303520" cy="1737360"/>
           </a:xfrm>
           <a:prstGeom prst="rect">
             <a:avLst/>
@@ -5658,63 +7373,21 @@
           </a:bodyPr>
           <a:lstStyle/>
           <a:p>
-            <a:r>
-              <a:rPr sz="3000" b="1">
-                <a:solidFill>
-                  <a:srgbClr val="990011"/>
-                </a:solidFill>
-                <a:latin typeface="Calibri"/>
-              </a:rPr>
-              <a:t>The energy-convergence problem</a:t>
-            </a:r>
-          </a:p>
-        </p:txBody>
-      </p:sp>
-      <p:pic>
-        <p:nvPicPr>
-          <p:cNvPr id="3" name="Picture 2" descr="fig13_sim_energy.png"/>
-          <p:cNvPicPr>
-            <a:picLocks noChangeAspect="1"/>
-          </p:cNvPicPr>
-          <p:nvPr/>
-        </p:nvPicPr>
-        <p:blipFill>
-          <a:blip r:embed="rId2"/>
-          <a:stretch>
-            <a:fillRect/>
-          </a:stretch>
-        </p:blipFill>
-        <p:spPr>
-          <a:xfrm>
-            <a:off x="502920" y="1280777"/>
-            <a:ext cx="6309360" cy="4433604"/>
-          </a:xfrm>
-          <a:prstGeom prst="rect">
-            <a:avLst/>
-          </a:prstGeom>
-        </p:spPr>
-      </p:pic>
-      <p:sp>
-        <p:nvSpPr>
-          <p:cNvPr id="4" name="TextBox 3"/>
-          <p:cNvSpPr txBox="1"/>
-          <p:nvPr/>
-        </p:nvSpPr>
-        <p:spPr>
-          <a:xfrm>
-            <a:off x="7132320" y="1371600"/>
-            <a:ext cx="5056631" cy="4343400"/>
-          </a:xfrm>
-          <a:prstGeom prst="rect">
-            <a:avLst/>
-          </a:prstGeom>
-          <a:noFill/>
-        </p:spPr>
-        <p:txBody>
-          <a:bodyPr wrap="square" lIns="0" rIns="0" tIns="0" bIns="0">
-            <a:spAutoFit/>
-          </a:bodyPr>
-          <a:lstStyle/>
+            <a:pPr>
+              <a:spcAft>
+                <a:spcPts val="600"/>
+              </a:spcAft>
+            </a:pPr>
+            <a:r>
+              <a:rPr sz="1600" b="1">
+                <a:solidFill>
+                  <a:srgbClr val="1E2761"/>
+                </a:solidFill>
+                <a:latin typeface="Calibri"/>
+              </a:rPr>
+              <a:t>The 850 yield peaks</a:t>
+            </a:r>
+          </a:p>
           <a:p>
             <a:pPr marL="228600" indent="-228600">
               <a:spcAft>
@@ -5723,13 +7396,31 @@
               <a:buChar char="•"/>
             </a:pPr>
             <a:r>
-              <a:rPr sz="1300" b="0">
-                <a:solidFill>
-                  <a:srgbClr val="212121"/>
-                </a:solidFill>
-                <a:latin typeface="Calibri"/>
-              </a:rPr>
-              <a:t>The same comparison for the energy coordinate u(γ)</a:t>
+              <a:rPr sz="1350" b="0">
+                <a:solidFill>
+                  <a:srgbClr val="212121"/>
+                </a:solidFill>
+                <a:latin typeface="Calibri"/>
+              </a:rPr>
+              <a:t>Ceiling law </a:t>
+            </a:r>
+            <a:r>
+              <a:rPr sz="1350" b="1">
+                <a:solidFill>
+                  <a:srgbClr val="212121"/>
+                </a:solidFill>
+                <a:latin typeface="Calibri"/>
+              </a:rPr>
+              <a:t>RMS 2.5%</a:t>
+            </a:r>
+            <a:r>
+              <a:rPr sz="1350" b="0">
+                <a:solidFill>
+                  <a:srgbClr val="212121"/>
+                </a:solidFill>
+                <a:latin typeface="Calibri"/>
+              </a:rPr>
+              <a:t> (worst rate 4.3%); TPL 1.4%; raw-event resampling 0.9%</a:t>
             </a:r>
           </a:p>
           <a:p>
@@ -5740,111 +7431,13 @@
               <a:buChar char="•"/>
             </a:pPr>
             <a:r>
-              <a:rPr sz="1300" b="0">
-                <a:solidFill>
-                  <a:srgbClr val="212121"/>
-                </a:solidFill>
-                <a:latin typeface="Calibri"/>
-              </a:rPr>
-              <a:t>Early on the model is right. Late, the dashed curves pinch together: the preparations keep a 24% spread in mean u at γ = 0.5 in the data, and 4% in the model</a:t>
-            </a:r>
-          </a:p>
-          <a:p>
-            <a:pPr marL="228600" indent="-228600">
-              <a:spcAft>
-                <a:spcPts val="800"/>
-              </a:spcAft>
-              <a:buChar char="•"/>
-            </a:pPr>
-            <a:r>
-              <a:rPr sz="1300" b="0">
-                <a:solidFill>
-                  <a:srgbClr val="212121"/>
-                </a:solidFill>
-                <a:latin typeface="Calibri"/>
-              </a:rPr>
-              <a:t>The model’s fields are one map for all histories, so two runs at the same (u, τ) evolve identically no matter how they got there. The data say they do not: at the same (u, τ), slow-cooled glass has a 1.71× higher ceiling than fast-cooled glass</a:t>
-            </a:r>
-          </a:p>
-          <a:p>
-            <a:pPr marL="228600" indent="-228600">
-              <a:spcAft>
-                <a:spcPts val="800"/>
-              </a:spcAft>
-              <a:buChar char="•"/>
-            </a:pPr>
-            <a:r>
-              <a:rPr sz="1300" b="0">
-                <a:solidFill>
-                  <a:srgbClr val="212121"/>
-                </a:solidFill>
-                <a:latin typeface="Calibri"/>
-              </a:rPr>
-              <a:t>So (u, τ) is not a sufficient state. The question is which channel of the step process carries the missing information</a:t>
-            </a:r>
-          </a:p>
-        </p:txBody>
-      </p:sp>
-      <p:sp>
-        <p:nvSpPr>
-          <p:cNvPr id="5" name="Rounded Rectangle 4"/>
-          <p:cNvSpPr/>
-          <p:nvPr/>
-        </p:nvSpPr>
-        <p:spPr>
-          <a:xfrm>
-            <a:off x="548640" y="6053328"/>
-            <a:ext cx="11091672" cy="566928"/>
-          </a:xfrm>
-          <a:prstGeom prst="roundRect">
-            <a:avLst>
-              <a:gd name="adj" fmla="val 18000"/>
-            </a:avLst>
-          </a:prstGeom>
-          <a:solidFill>
-            <a:srgbClr val="F2F2F2"/>
-          </a:solidFill>
-          <a:ln>
-            <a:noFill/>
-          </a:ln>
-          <a:effectLst/>
-        </p:spPr>
-        <p:style>
-          <a:lnRef idx="1">
-            <a:schemeClr val="accent1"/>
-          </a:lnRef>
-          <a:fillRef idx="3">
-            <a:schemeClr val="accent1"/>
-          </a:fillRef>
-          <a:effectRef idx="2">
-            <a:schemeClr val="accent1"/>
-          </a:effectRef>
-          <a:fontRef idx="minor">
-            <a:schemeClr val="lt1"/>
-          </a:fontRef>
-        </p:style>
-        <p:txBody>
-          <a:bodyPr rtlCol="0" anchor="ctr" wrap="square" lIns="164592" rIns="164592" tIns="0" bIns="0"/>
-          <a:lstStyle/>
-          <a:p>
-            <a:pPr algn="ctr"/>
-            <a:r>
-              <a:rPr sz="1350" b="1">
-                <a:solidFill>
-                  <a:srgbClr val="1E2761"/>
-                </a:solidFill>
-                <a:latin typeface="Calibri"/>
-              </a:rPr>
-              <a:t>Takeaway: </a:t>
-            </a:r>
-            <a:r>
               <a:rPr sz="1350" b="0">
                 <a:solidFill>
                   <a:srgbClr val="212121"/>
                 </a:solidFill>
                 <a:latin typeface="Calibri"/>
               </a:rPr>
-              <a:t>A five-times-too-small preparation spread in u: the one place the two-variable model fails.</a:t>
+              <a:t>Peaks feel only the mean event size, so they do not discriminate size laws</a:t>
             </a:r>
           </a:p>
         </p:txBody>

--- a/SEEM_project_deck.pptx
+++ b/SEEM_project_deck.pptx
@@ -4,18 +4,25 @@
   <p:sldMasterIdLst>
     <p:sldMasterId id="2147483648" r:id="rId1"/>
   </p:sldMasterIdLst>
+  <p:notesMasterIdLst>
+    <p:notesMasterId r:id="rId16"/>
+  </p:notesMasterIdLst>
   <p:sldIdLst>
     <p:sldId id="256" r:id="rId2"/>
-    <p:sldId id="257" r:id="rId3"/>
-    <p:sldId id="258" r:id="rId4"/>
-    <p:sldId id="259" r:id="rId9"/>
-    <p:sldId id="260" r:id="rId10"/>
-    <p:sldId id="261" r:id="rId11"/>
-    <p:sldId id="262" r:id="rId8"/>
-    <p:sldId id="263" r:id="rId7"/>
-    <p:sldId id="264" r:id="rId6"/>
-    <p:sldId id="265" r:id="rId5"/>
-    <p:sldId id="266" r:id="rId16"/>
+    <p:sldId id="267" r:id="rId3"/>
+    <p:sldId id="268" r:id="rId4"/>
+    <p:sldId id="269" r:id="rId5"/>
+    <p:sldId id="257" r:id="rId6"/>
+    <p:sldId id="258" r:id="rId7"/>
+    <p:sldId id="259" r:id="rId8"/>
+    <p:sldId id="270" r:id="rId15"/>
+    <p:sldId id="261" r:id="rId10"/>
+    <p:sldId id="271" r:id="rId14"/>
+    <p:sldId id="272" r:id="rId13"/>
+    <p:sldId id="273" r:id="rId12"/>
+    <p:sldId id="274" r:id="rId11"/>
+    <p:sldId id="275" r:id="rId9"/>
+    <p:sldId id="276" r:id="rId21"/>
   </p:sldIdLst>
   <p:sldSz cx="12192000" cy="6858000"/>
   <p:notesSz cx="6858000" cy="9144000"/>
@@ -131,6 +138,439 @@
     </p:ext>
   </p:extLst>
 </p:presentation>
+</file>
+
+<file path=ppt/notesMasters/notesMaster1.xml><?xml version="1.0" encoding="utf-8"?>
+<p:notesMaster xmlns:a="http://schemas.openxmlformats.org/drawingml/2006/main" xmlns:r="http://schemas.openxmlformats.org/officeDocument/2006/relationships" xmlns:p="http://schemas.openxmlformats.org/presentationml/2006/main">
+  <p:cSld>
+    <p:bg>
+      <p:bgRef idx="1001">
+        <a:schemeClr val="bg1"/>
+      </p:bgRef>
+    </p:bg>
+    <p:spTree>
+      <p:nvGrpSpPr>
+        <p:cNvPr id="1" name=""/>
+        <p:cNvGrpSpPr/>
+        <p:nvPr/>
+      </p:nvGrpSpPr>
+      <p:grpSpPr>
+        <a:xfrm>
+          <a:off x="0" y="0"/>
+          <a:ext cx="0" cy="0"/>
+          <a:chOff x="0" y="0"/>
+          <a:chExt cx="0" cy="0"/>
+        </a:xfrm>
+      </p:grpSpPr>
+      <p:sp>
+        <p:nvSpPr>
+          <p:cNvPr id="2" name="Header Placeholder 1"/>
+          <p:cNvSpPr>
+            <a:spLocks noGrp="1"/>
+          </p:cNvSpPr>
+          <p:nvPr>
+            <p:ph type="hdr" sz="quarter"/>
+          </p:nvPr>
+        </p:nvSpPr>
+        <p:spPr>
+          <a:xfrm>
+            <a:off x="0" y="0"/>
+            <a:ext cx="2971800" cy="458788"/>
+          </a:xfrm>
+          <a:prstGeom prst="rect">
+            <a:avLst/>
+          </a:prstGeom>
+        </p:spPr>
+        <p:txBody>
+          <a:bodyPr vert="horz" lIns="91440" tIns="45720" rIns="91440" bIns="45720" rtlCol="0"/>
+          <a:lstStyle>
+            <a:lvl1pPr algn="l">
+              <a:defRPr sz="1200"/>
+            </a:lvl1pPr>
+          </a:lstStyle>
+          <a:p>
+            <a:endParaRPr lang="en-US"/>
+          </a:p>
+        </p:txBody>
+      </p:sp>
+      <p:sp>
+        <p:nvSpPr>
+          <p:cNvPr id="3" name="Date Placeholder 2"/>
+          <p:cNvSpPr>
+            <a:spLocks noGrp="1"/>
+          </p:cNvSpPr>
+          <p:nvPr>
+            <p:ph type="dt" idx="1"/>
+          </p:nvPr>
+        </p:nvSpPr>
+        <p:spPr>
+          <a:xfrm>
+            <a:off x="3884613" y="0"/>
+            <a:ext cx="2971800" cy="458788"/>
+          </a:xfrm>
+          <a:prstGeom prst="rect">
+            <a:avLst/>
+          </a:prstGeom>
+        </p:spPr>
+        <p:txBody>
+          <a:bodyPr vert="horz" lIns="91440" tIns="45720" rIns="91440" bIns="45720" rtlCol="0"/>
+          <a:lstStyle>
+            <a:lvl1pPr algn="r">
+              <a:defRPr sz="1200"/>
+            </a:lvl1pPr>
+          </a:lstStyle>
+          <a:p>
+            <a:fld id="{3D556A4C-1FD7-434B-80AC-C9E232A2F4A8}" type="datetimeFigureOut">
+              <a:rPr lang="en-US" smtClean="0"/>
+              <a:t>9/4/26</a:t>
+            </a:fld>
+            <a:endParaRPr lang="en-US"/>
+          </a:p>
+        </p:txBody>
+      </p:sp>
+      <p:sp>
+        <p:nvSpPr>
+          <p:cNvPr id="4" name="Slide Image Placeholder 3"/>
+          <p:cNvSpPr>
+            <a:spLocks noGrp="1" noRot="1" noChangeAspect="1"/>
+          </p:cNvSpPr>
+          <p:nvPr>
+            <p:ph type="sldImg" idx="2"/>
+          </p:nvPr>
+        </p:nvSpPr>
+        <p:spPr>
+          <a:xfrm>
+            <a:off x="685800" y="1143000"/>
+            <a:ext cx="5486400" cy="3086100"/>
+          </a:xfrm>
+          <a:prstGeom prst="rect">
+            <a:avLst/>
+          </a:prstGeom>
+          <a:noFill/>
+          <a:ln w="12700">
+            <a:solidFill>
+              <a:prstClr val="black"/>
+            </a:solidFill>
+          </a:ln>
+        </p:spPr>
+        <p:txBody>
+          <a:bodyPr vert="horz" lIns="91440" tIns="45720" rIns="91440" bIns="45720" rtlCol="0" anchor="ctr"/>
+          <a:lstStyle/>
+          <a:p>
+            <a:endParaRPr lang="en-US"/>
+          </a:p>
+        </p:txBody>
+      </p:sp>
+      <p:sp>
+        <p:nvSpPr>
+          <p:cNvPr id="5" name="Notes Placeholder 4"/>
+          <p:cNvSpPr>
+            <a:spLocks noGrp="1"/>
+          </p:cNvSpPr>
+          <p:nvPr>
+            <p:ph type="body" sz="quarter" idx="3"/>
+          </p:nvPr>
+        </p:nvSpPr>
+        <p:spPr>
+          <a:xfrm>
+            <a:off x="685800" y="4400550"/>
+            <a:ext cx="5486400" cy="3600450"/>
+          </a:xfrm>
+          <a:prstGeom prst="rect">
+            <a:avLst/>
+          </a:prstGeom>
+        </p:spPr>
+        <p:txBody>
+          <a:bodyPr vert="horz" lIns="91440" tIns="45720" rIns="91440" bIns="45720" rtlCol="0"/>
+          <a:lstStyle/>
+          <a:p>
+            <a:pPr lvl="0"/>
+            <a:r>
+              <a:rPr lang="en-US"/>
+              <a:t>Click to edit Master text styles</a:t>
+            </a:r>
+          </a:p>
+          <a:p>
+            <a:pPr lvl="1"/>
+            <a:r>
+              <a:rPr lang="en-US"/>
+              <a:t>Second level</a:t>
+            </a:r>
+          </a:p>
+          <a:p>
+            <a:pPr lvl="2"/>
+            <a:r>
+              <a:rPr lang="en-US"/>
+              <a:t>Third level</a:t>
+            </a:r>
+          </a:p>
+          <a:p>
+            <a:pPr lvl="3"/>
+            <a:r>
+              <a:rPr lang="en-US"/>
+              <a:t>Fourth level</a:t>
+            </a:r>
+          </a:p>
+          <a:p>
+            <a:pPr lvl="4"/>
+            <a:r>
+              <a:rPr lang="en-US"/>
+              <a:t>Fifth level</a:t>
+            </a:r>
+          </a:p>
+        </p:txBody>
+      </p:sp>
+      <p:sp>
+        <p:nvSpPr>
+          <p:cNvPr id="6" name="Footer Placeholder 5"/>
+          <p:cNvSpPr>
+            <a:spLocks noGrp="1"/>
+          </p:cNvSpPr>
+          <p:nvPr>
+            <p:ph type="ftr" sz="quarter" idx="4"/>
+          </p:nvPr>
+        </p:nvSpPr>
+        <p:spPr>
+          <a:xfrm>
+            <a:off x="0" y="8685213"/>
+            <a:ext cx="2971800" cy="458787"/>
+          </a:xfrm>
+          <a:prstGeom prst="rect">
+            <a:avLst/>
+          </a:prstGeom>
+        </p:spPr>
+        <p:txBody>
+          <a:bodyPr vert="horz" lIns="91440" tIns="45720" rIns="91440" bIns="45720" rtlCol="0" anchor="b"/>
+          <a:lstStyle>
+            <a:lvl1pPr algn="l">
+              <a:defRPr sz="1200"/>
+            </a:lvl1pPr>
+          </a:lstStyle>
+          <a:p>
+            <a:endParaRPr lang="en-US"/>
+          </a:p>
+        </p:txBody>
+      </p:sp>
+      <p:sp>
+        <p:nvSpPr>
+          <p:cNvPr id="7" name="Slide Number Placeholder 6"/>
+          <p:cNvSpPr>
+            <a:spLocks noGrp="1"/>
+          </p:cNvSpPr>
+          <p:nvPr>
+            <p:ph type="sldNum" sz="quarter" idx="5"/>
+          </p:nvPr>
+        </p:nvSpPr>
+        <p:spPr>
+          <a:xfrm>
+            <a:off x="3884613" y="8685213"/>
+            <a:ext cx="2971800" cy="458787"/>
+          </a:xfrm>
+          <a:prstGeom prst="rect">
+            <a:avLst/>
+          </a:prstGeom>
+        </p:spPr>
+        <p:txBody>
+          <a:bodyPr vert="horz" lIns="91440" tIns="45720" rIns="91440" bIns="45720" rtlCol="0" anchor="b"/>
+          <a:lstStyle>
+            <a:lvl1pPr algn="r">
+              <a:defRPr sz="1200"/>
+            </a:lvl1pPr>
+          </a:lstStyle>
+          <a:p>
+            <a:fld id="{93A96F5B-8A98-3E49-846B-DE69B9356157}" type="slidenum">
+              <a:rPr lang="en-US" smtClean="0"/>
+              <a:t>‹#›</a:t>
+            </a:fld>
+            <a:endParaRPr lang="en-US"/>
+          </a:p>
+        </p:txBody>
+      </p:sp>
+    </p:spTree>
+    <p:extLst>
+      <p:ext uri="{BB962C8B-B14F-4D97-AF65-F5344CB8AC3E}">
+        <p14:creationId xmlns:p14="http://schemas.microsoft.com/office/powerpoint/2010/main" val="1786408941"/>
+      </p:ext>
+    </p:extLst>
+  </p:cSld>
+  <p:clrMap bg1="lt1" tx1="dk1" bg2="lt2" tx2="dk2" accent1="accent1" accent2="accent2" accent3="accent3" accent4="accent4" accent5="accent5" accent6="accent6" hlink="hlink" folHlink="folHlink"/>
+  <p:notesStyle>
+    <a:lvl1pPr marL="0" algn="l" defTabSz="914400" rtl="0" eaLnBrk="1" latinLnBrk="0" hangingPunct="1">
+      <a:defRPr sz="1200" kern="1200">
+        <a:solidFill>
+          <a:schemeClr val="tx1"/>
+        </a:solidFill>
+        <a:latin typeface="+mn-lt"/>
+        <a:ea typeface="+mn-ea"/>
+        <a:cs typeface="+mn-cs"/>
+      </a:defRPr>
+    </a:lvl1pPr>
+    <a:lvl2pPr marL="457200" algn="l" defTabSz="914400" rtl="0" eaLnBrk="1" latinLnBrk="0" hangingPunct="1">
+      <a:defRPr sz="1200" kern="1200">
+        <a:solidFill>
+          <a:schemeClr val="tx1"/>
+        </a:solidFill>
+        <a:latin typeface="+mn-lt"/>
+        <a:ea typeface="+mn-ea"/>
+        <a:cs typeface="+mn-cs"/>
+      </a:defRPr>
+    </a:lvl2pPr>
+    <a:lvl3pPr marL="914400" algn="l" defTabSz="914400" rtl="0" eaLnBrk="1" latinLnBrk="0" hangingPunct="1">
+      <a:defRPr sz="1200" kern="1200">
+        <a:solidFill>
+          <a:schemeClr val="tx1"/>
+        </a:solidFill>
+        <a:latin typeface="+mn-lt"/>
+        <a:ea typeface="+mn-ea"/>
+        <a:cs typeface="+mn-cs"/>
+      </a:defRPr>
+    </a:lvl3pPr>
+    <a:lvl4pPr marL="1371600" algn="l" defTabSz="914400" rtl="0" eaLnBrk="1" latinLnBrk="0" hangingPunct="1">
+      <a:defRPr sz="1200" kern="1200">
+        <a:solidFill>
+          <a:schemeClr val="tx1"/>
+        </a:solidFill>
+        <a:latin typeface="+mn-lt"/>
+        <a:ea typeface="+mn-ea"/>
+        <a:cs typeface="+mn-cs"/>
+      </a:defRPr>
+    </a:lvl4pPr>
+    <a:lvl5pPr marL="1828800" algn="l" defTabSz="914400" rtl="0" eaLnBrk="1" latinLnBrk="0" hangingPunct="1">
+      <a:defRPr sz="1200" kern="1200">
+        <a:solidFill>
+          <a:schemeClr val="tx1"/>
+        </a:solidFill>
+        <a:latin typeface="+mn-lt"/>
+        <a:ea typeface="+mn-ea"/>
+        <a:cs typeface="+mn-cs"/>
+      </a:defRPr>
+    </a:lvl5pPr>
+    <a:lvl6pPr marL="2286000" algn="l" defTabSz="914400" rtl="0" eaLnBrk="1" latinLnBrk="0" hangingPunct="1">
+      <a:defRPr sz="1200" kern="1200">
+        <a:solidFill>
+          <a:schemeClr val="tx1"/>
+        </a:solidFill>
+        <a:latin typeface="+mn-lt"/>
+        <a:ea typeface="+mn-ea"/>
+        <a:cs typeface="+mn-cs"/>
+      </a:defRPr>
+    </a:lvl6pPr>
+    <a:lvl7pPr marL="2743200" algn="l" defTabSz="914400" rtl="0" eaLnBrk="1" latinLnBrk="0" hangingPunct="1">
+      <a:defRPr sz="1200" kern="1200">
+        <a:solidFill>
+          <a:schemeClr val="tx1"/>
+        </a:solidFill>
+        <a:latin typeface="+mn-lt"/>
+        <a:ea typeface="+mn-ea"/>
+        <a:cs typeface="+mn-cs"/>
+      </a:defRPr>
+    </a:lvl7pPr>
+    <a:lvl8pPr marL="3200400" algn="l" defTabSz="914400" rtl="0" eaLnBrk="1" latinLnBrk="0" hangingPunct="1">
+      <a:defRPr sz="1200" kern="1200">
+        <a:solidFill>
+          <a:schemeClr val="tx1"/>
+        </a:solidFill>
+        <a:latin typeface="+mn-lt"/>
+        <a:ea typeface="+mn-ea"/>
+        <a:cs typeface="+mn-cs"/>
+      </a:defRPr>
+    </a:lvl8pPr>
+    <a:lvl9pPr marL="3657600" algn="l" defTabSz="914400" rtl="0" eaLnBrk="1" latinLnBrk="0" hangingPunct="1">
+      <a:defRPr sz="1200" kern="1200">
+        <a:solidFill>
+          <a:schemeClr val="tx1"/>
+        </a:solidFill>
+        <a:latin typeface="+mn-lt"/>
+        <a:ea typeface="+mn-ea"/>
+        <a:cs typeface="+mn-cs"/>
+      </a:defRPr>
+    </a:lvl9pPr>
+  </p:notesStyle>
+</p:notesMaster>
+</file>
+
+<file path=ppt/notesSlides/notesSlide1.xml><?xml version="1.0" encoding="utf-8"?>
+<p:notes xmlns:a="http://schemas.openxmlformats.org/drawingml/2006/main" xmlns:r="http://schemas.openxmlformats.org/officeDocument/2006/relationships" xmlns:p="http://schemas.openxmlformats.org/presentationml/2006/main">
+  <p:cSld>
+    <p:spTree>
+      <p:nvGrpSpPr>
+        <p:cNvPr id="1" name=""/>
+        <p:cNvGrpSpPr/>
+        <p:nvPr/>
+      </p:nvGrpSpPr>
+      <p:grpSpPr>
+        <a:xfrm>
+          <a:off x="0" y="0"/>
+          <a:ext cx="0" cy="0"/>
+          <a:chOff x="0" y="0"/>
+          <a:chExt cx="0" cy="0"/>
+        </a:xfrm>
+      </p:grpSpPr>
+      <p:sp>
+        <p:nvSpPr>
+          <p:cNvPr id="2" name="Slide Image Placeholder 1"/>
+          <p:cNvSpPr>
+            <a:spLocks noGrp="1" noRot="1" noChangeAspect="1"/>
+          </p:cNvSpPr>
+          <p:nvPr>
+            <p:ph type="sldImg"/>
+          </p:nvPr>
+        </p:nvSpPr>
+        <p:spPr/>
+      </p:sp>
+      <p:sp>
+        <p:nvSpPr>
+          <p:cNvPr id="3" name="Notes Placeholder 2"/>
+          <p:cNvSpPr>
+            <a:spLocks noGrp="1"/>
+          </p:cNvSpPr>
+          <p:nvPr>
+            <p:ph type="body" idx="1"/>
+          </p:nvPr>
+        </p:nvSpPr>
+        <p:spPr/>
+        <p:txBody>
+          <a:bodyPr/>
+          <a:lstStyle/>
+          <a:p>
+            <a:endParaRPr lang="en-US" dirty="0"/>
+          </a:p>
+        </p:txBody>
+      </p:sp>
+      <p:sp>
+        <p:nvSpPr>
+          <p:cNvPr id="4" name="Slide Number Placeholder 3"/>
+          <p:cNvSpPr>
+            <a:spLocks noGrp="1"/>
+          </p:cNvSpPr>
+          <p:nvPr>
+            <p:ph type="sldNum" sz="quarter" idx="5"/>
+          </p:nvPr>
+        </p:nvSpPr>
+        <p:spPr/>
+        <p:txBody>
+          <a:bodyPr/>
+          <a:lstStyle/>
+          <a:p>
+            <a:fld id="{93A96F5B-8A98-3E49-846B-DE69B9356157}" type="slidenum">
+              <a:rPr lang="en-US" smtClean="0"/>
+              <a:t>7</a:t>
+            </a:fld>
+            <a:endParaRPr lang="en-US"/>
+          </a:p>
+        </p:txBody>
+      </p:sp>
+    </p:spTree>
+    <p:extLst>
+      <p:ext uri="{BB962C8B-B14F-4D97-AF65-F5344CB8AC3E}">
+        <p14:creationId xmlns:p14="http://schemas.microsoft.com/office/powerpoint/2010/main" val="3905396881"/>
+      </p:ext>
+    </p:extLst>
+  </p:cSld>
+  <p:clrMapOvr>
+    <a:masterClrMapping/>
+  </p:clrMapOvr>
+</p:notes>
 </file>
 
 <file path=ppt/slideLayouts/slideLayout1.xml><?xml version="1.0" encoding="utf-8"?>
@@ -3109,7 +3549,7 @@
         <p:spPr>
           <a:xfrm>
             <a:off x="822960" y="1737360"/>
-            <a:ext cx="10515600" cy="615553"/>
+            <a:ext cx="10515600" cy="1231106"/>
           </a:xfrm>
           <a:prstGeom prst="rect">
             <a:avLst/>
@@ -3129,7 +3569,18 @@
                 </a:solidFill>
                 <a:latin typeface="Calibri"/>
               </a:rPr>
-              <a:t>SEEM</a:t>
+              <a:t>SEEM – Symbolic Regression </a:t>
+            </a:r>
+          </a:p>
+          <a:p>
+            <a:r>
+              <a:rPr lang="en-US" sz="4000" b="1" dirty="0">
+                <a:solidFill>
+                  <a:srgbClr val="1E2761"/>
+                </a:solidFill>
+                <a:latin typeface="Calibri"/>
+              </a:rPr>
+              <a:t>for Constitutive Law Discovery</a:t>
             </a:r>
             <a:endParaRPr sz="4000" b="1" dirty="0">
               <a:solidFill>
@@ -3192,6 +3643,1022 @@
 </file>
 
 <file path=ppt/slides/slide10.xml><?xml version="1.0" encoding="utf-8"?>
+<p:sld xmlns:a="http://schemas.openxmlformats.org/drawingml/2006/main" xmlns:p="http://schemas.openxmlformats.org/presentationml/2006/main" xmlns:r="http://schemas.openxmlformats.org/officeDocument/2006/relationships">
+  <p:cSld>
+    <p:spTree>
+      <p:nvGrpSpPr>
+        <p:cNvPr id="1" name=""/>
+        <p:cNvGrpSpPr/>
+        <p:nvPr/>
+      </p:nvGrpSpPr>
+      <p:grpSpPr/>
+      <p:sp>
+        <p:nvSpPr>
+          <p:cNvPr id="2" name="TextBox 1"/>
+          <p:cNvSpPr txBox="1"/>
+          <p:nvPr/>
+        </p:nvSpPr>
+        <p:spPr>
+          <a:xfrm>
+            <a:off x="548640" y="292608"/>
+            <a:ext cx="11091672" cy="685800"/>
+          </a:xfrm>
+          <a:prstGeom prst="rect">
+            <a:avLst/>
+          </a:prstGeom>
+          <a:noFill/>
+        </p:spPr>
+        <p:txBody>
+          <a:bodyPr wrap="square" lIns="0" rIns="0" tIns="0" bIns="0">
+            <a:spAutoFit/>
+          </a:bodyPr>
+          <a:lstStyle/>
+          <a:p>
+            <a:r>
+              <a:rPr sz="3000" b="1">
+                <a:solidFill>
+                  <a:srgbClr val="1E2761"/>
+                </a:solidFill>
+                <a:latin typeface="Calibri"/>
+              </a:rPr>
+              <a:t>Where the likelihood margin comes from</a:t>
+            </a:r>
+          </a:p>
+        </p:txBody>
+      </p:sp>
+      <p:pic>
+        <p:nvPicPr>
+          <p:cNvPr id="3" name="Picture 2" descr="fig24_ldw_residuals.png"/>
+          <p:cNvPicPr>
+            <a:picLocks noChangeAspect="1"/>
+          </p:cNvPicPr>
+          <p:nvPr/>
+        </p:nvPicPr>
+        <p:blipFill>
+          <a:blip r:embed="rId2"/>
+          <a:stretch>
+            <a:fillRect/>
+          </a:stretch>
+        </p:blipFill>
+        <p:spPr>
+          <a:xfrm>
+            <a:off x="1199197" y="1143000"/>
+            <a:ext cx="9763124" cy="3749039"/>
+          </a:xfrm>
+          <a:prstGeom prst="rect">
+            <a:avLst/>
+          </a:prstGeom>
+        </p:spPr>
+      </p:pic>
+      <p:sp>
+        <p:nvSpPr>
+          <p:cNvPr id="4" name="TextBox 3"/>
+          <p:cNvSpPr txBox="1"/>
+          <p:nvPr/>
+        </p:nvSpPr>
+        <p:spPr>
+          <a:xfrm>
+            <a:off x="640080" y="4983480"/>
+            <a:ext cx="5394960" cy="1737360"/>
+          </a:xfrm>
+          <a:prstGeom prst="rect">
+            <a:avLst/>
+          </a:prstGeom>
+          <a:noFill/>
+        </p:spPr>
+        <p:txBody>
+          <a:bodyPr wrap="square" lIns="0" rIns="0" tIns="0" bIns="0">
+            <a:spAutoFit/>
+          </a:bodyPr>
+          <a:lstStyle/>
+          <a:p>
+            <a:pPr>
+              <a:spcAft>
+                <a:spcPts val="600"/>
+              </a:spcAft>
+            </a:pPr>
+            <a:r>
+              <a:rPr sz="1600" b="1">
+                <a:solidFill>
+                  <a:srgbClr val="1E2761"/>
+                </a:solidFill>
+                <a:latin typeface="Calibri"/>
+              </a:rPr>
+              <a:t>Left: residuals per size bin, largest cell</a:t>
+            </a:r>
+          </a:p>
+          <a:p>
+            <a:pPr marL="228600" indent="-228600">
+              <a:spcAft>
+                <a:spcPts val="800"/>
+              </a:spcAft>
+              <a:buChar char="•"/>
+            </a:pPr>
+            <a:r>
+              <a:rPr sz="1300" b="0">
+                <a:solidFill>
+                  <a:srgbClr val="212121"/>
+                </a:solidFill>
+                <a:latin typeface="Calibri"/>
+              </a:rPr>
+              <a:t>Measured density divided by each fitted density, with Poisson error bars. The Budrikis form runs 30% low at 3 × 10⁻⁴ and 30% high through 10⁻³ to 10⁻², the bend the exp(C√u) factor puts in; the TPL has the same wave, smaller</a:t>
+            </a:r>
+          </a:p>
+        </p:txBody>
+      </p:sp>
+      <p:sp>
+        <p:nvSpPr>
+          <p:cNvPr id="5" name="TextBox 4"/>
+          <p:cNvSpPr txBox="1"/>
+          <p:nvPr/>
+        </p:nvSpPr>
+        <p:spPr>
+          <a:xfrm>
+            <a:off x="6355080" y="4983480"/>
+            <a:ext cx="5303520" cy="1737360"/>
+          </a:xfrm>
+          <a:prstGeom prst="rect">
+            <a:avLst/>
+          </a:prstGeom>
+          <a:noFill/>
+        </p:spPr>
+        <p:txBody>
+          <a:bodyPr wrap="square" lIns="0" rIns="0" tIns="0" bIns="0">
+            <a:spAutoFit/>
+          </a:bodyPr>
+          <a:lstStyle/>
+          <a:p>
+            <a:pPr>
+              <a:spcAft>
+                <a:spcPts val="600"/>
+              </a:spcAft>
+            </a:pPr>
+            <a:r>
+              <a:rPr sz="1600" b="1">
+                <a:solidFill>
+                  <a:srgbClr val="1E2761"/>
+                </a:solidFill>
+                <a:latin typeface="Calibri"/>
+              </a:rPr>
+              <a:t>Right: log-likelihood gain of the ceiling law, accumulated over events</a:t>
+            </a:r>
+          </a:p>
+          <a:p>
+            <a:pPr marL="228600" indent="-228600">
+              <a:spcAft>
+                <a:spcPts val="800"/>
+              </a:spcAft>
+              <a:buChar char="•"/>
+            </a:pPr>
+            <a:r>
+              <a:rPr sz="1300" b="0">
+                <a:solidFill>
+                  <a:srgbClr val="212121"/>
+                </a:solidFill>
+                <a:latin typeface="Calibri"/>
+              </a:rPr>
+              <a:t>Both rivals win below 10⁻³ and lose it back, and more, between 10⁻³ and 10⁻¹, where most events sit. Totals: </a:t>
+            </a:r>
+            <a:r>
+              <a:rPr sz="1300" b="1">
+                <a:solidFill>
+                  <a:srgbClr val="212121"/>
+                </a:solidFill>
+                <a:latin typeface="Calibri"/>
+              </a:rPr>
+              <a:t>+62 over the TPL (ΔAIC +120), +106 over Budrikis (ΔAIC +208)</a:t>
+            </a:r>
+          </a:p>
+        </p:txBody>
+      </p:sp>
+    </p:spTree>
+  </p:cSld>
+  <p:clrMapOvr>
+    <a:masterClrMapping/>
+  </p:clrMapOvr>
+</p:sld>
+</file>
+
+<file path=ppt/slides/slide11.xml><?xml version="1.0" encoding="utf-8"?>
+<p:sld xmlns:a="http://schemas.openxmlformats.org/drawingml/2006/main" xmlns:p="http://schemas.openxmlformats.org/presentationml/2006/main" xmlns:r="http://schemas.openxmlformats.org/officeDocument/2006/relationships">
+  <p:cSld>
+    <p:spTree>
+      <p:nvGrpSpPr>
+        <p:cNvPr id="1" name=""/>
+        <p:cNvGrpSpPr/>
+        <p:nvPr/>
+      </p:nvGrpSpPr>
+      <p:grpSpPr/>
+      <p:sp>
+        <p:nvSpPr>
+          <p:cNvPr id="2" name="TextBox 1"/>
+          <p:cNvSpPr txBox="1"/>
+          <p:nvPr/>
+        </p:nvSpPr>
+        <p:spPr>
+          <a:xfrm>
+            <a:off x="548640" y="292608"/>
+            <a:ext cx="11091672" cy="685800"/>
+          </a:xfrm>
+          <a:prstGeom prst="rect">
+            <a:avLst/>
+          </a:prstGeom>
+          <a:noFill/>
+        </p:spPr>
+        <p:txBody>
+          <a:bodyPr wrap="square" lIns="0" rIns="0" tIns="0" bIns="0">
+            <a:spAutoFit/>
+          </a:bodyPr>
+          <a:lstStyle/>
+          <a:p>
+            <a:r>
+              <a:rPr sz="3000" b="1">
+                <a:solidFill>
+                  <a:srgbClr val="1E2761"/>
+                </a:solidFill>
+                <a:latin typeface="Calibri"/>
+              </a:rPr>
+              <a:t>Performance: every cell, and a control</a:t>
+            </a:r>
+          </a:p>
+        </p:txBody>
+      </p:sp>
+      <p:pic>
+        <p:nvPicPr>
+          <p:cNvPr id="3" name="Picture 2" descr="fig02_collapse.png"/>
+          <p:cNvPicPr>
+            <a:picLocks noChangeAspect="1"/>
+          </p:cNvPicPr>
+          <p:nvPr/>
+        </p:nvPicPr>
+        <p:blipFill>
+          <a:blip r:embed="rId2"/>
+          <a:stretch>
+            <a:fillRect/>
+          </a:stretch>
+        </p:blipFill>
+        <p:spPr>
+          <a:xfrm>
+            <a:off x="618978" y="1143000"/>
+            <a:ext cx="5254283" cy="3794760"/>
+          </a:xfrm>
+          <a:prstGeom prst="rect">
+            <a:avLst/>
+          </a:prstGeom>
+        </p:spPr>
+      </p:pic>
+      <p:pic>
+        <p:nvPicPr>
+          <p:cNvPr id="4" name="Picture 3" descr="fig04_falsifiability.png"/>
+          <p:cNvPicPr>
+            <a:picLocks noChangeAspect="1"/>
+          </p:cNvPicPr>
+          <p:nvPr/>
+        </p:nvPicPr>
+        <p:blipFill>
+          <a:blip r:embed="rId3"/>
+          <a:stretch>
+            <a:fillRect/>
+          </a:stretch>
+        </p:blipFill>
+        <p:spPr>
+          <a:xfrm>
+            <a:off x="6315690" y="1143000"/>
+            <a:ext cx="5254283" cy="3794760"/>
+          </a:xfrm>
+          <a:prstGeom prst="rect">
+            <a:avLst/>
+          </a:prstGeom>
+        </p:spPr>
+      </p:pic>
+      <p:sp>
+        <p:nvSpPr>
+          <p:cNvPr id="5" name="TextBox 4"/>
+          <p:cNvSpPr txBox="1"/>
+          <p:nvPr/>
+        </p:nvSpPr>
+        <p:spPr>
+          <a:xfrm>
+            <a:off x="640080" y="5029200"/>
+            <a:ext cx="5394960" cy="1737360"/>
+          </a:xfrm>
+          <a:prstGeom prst="rect">
+            <a:avLst/>
+          </a:prstGeom>
+          <a:noFill/>
+        </p:spPr>
+        <p:txBody>
+          <a:bodyPr wrap="square" lIns="0" rIns="0" tIns="0" bIns="0">
+            <a:spAutoFit/>
+          </a:bodyPr>
+          <a:lstStyle/>
+          <a:p>
+            <a:pPr>
+              <a:spcAft>
+                <a:spcPts val="600"/>
+              </a:spcAft>
+            </a:pPr>
+            <a:r>
+              <a:rPr sz="1600" b="1">
+                <a:solidFill>
+                  <a:srgbClr val="1E2761"/>
+                </a:solidFill>
+                <a:latin typeface="Calibri"/>
+              </a:rPr>
+              <a:t>Left: the collapse</a:t>
+            </a:r>
+          </a:p>
+          <a:p>
+            <a:pPr marL="228600" indent="-228600">
+              <a:spcAft>
+                <a:spcPts val="800"/>
+              </a:spcAft>
+              <a:buChar char="•"/>
+            </a:pPr>
+            <a:r>
+              <a:rPr sz="1350" b="0">
+                <a:solidFill>
+                  <a:srgbClr val="212121"/>
+                </a:solidFill>
+                <a:latin typeface="Calibri"/>
+              </a:rPr>
+              <a:t>Twelve cells, 100× apart in scale, plotted against </a:t>
+            </a:r>
+            <a:r>
+              <a:rPr sz="1350" b="1">
+                <a:solidFill>
+                  <a:srgbClr val="212121"/>
+                </a:solidFill>
+                <a:latin typeface="Calibri"/>
+              </a:rPr>
+              <a:t>ξ = (s+ε)/(s_c+ε)</a:t>
+            </a:r>
+            <a:r>
+              <a:rPr sz="1350" b="0">
+                <a:solidFill>
+                  <a:srgbClr val="212121"/>
+                </a:solidFill>
+                <a:latin typeface="Calibri"/>
+              </a:rPr>
+              <a:t> with the global (k, m, ε): one curve, including the bend into the ceiling</a:t>
+            </a:r>
+          </a:p>
+        </p:txBody>
+      </p:sp>
+      <p:sp>
+        <p:nvSpPr>
+          <p:cNvPr id="6" name="TextBox 5"/>
+          <p:cNvSpPr txBox="1"/>
+          <p:nvPr/>
+        </p:nvSpPr>
+        <p:spPr>
+          <a:xfrm>
+            <a:off x="6355080" y="5029200"/>
+            <a:ext cx="5303520" cy="1737360"/>
+          </a:xfrm>
+          <a:prstGeom prst="rect">
+            <a:avLst/>
+          </a:prstGeom>
+          <a:noFill/>
+        </p:spPr>
+        <p:txBody>
+          <a:bodyPr wrap="square" lIns="0" rIns="0" tIns="0" bIns="0">
+            <a:spAutoFit/>
+          </a:bodyPr>
+          <a:lstStyle/>
+          <a:p>
+            <a:pPr>
+              <a:spcAft>
+                <a:spcPts val="600"/>
+              </a:spcAft>
+            </a:pPr>
+            <a:r>
+              <a:rPr sz="1600" b="1">
+                <a:solidFill>
+                  <a:srgbClr val="1E2761"/>
+                </a:solidFill>
+                <a:latin typeface="Calibri"/>
+              </a:rPr>
+              <a:t>Right: the same machinery on synthetic data</a:t>
+            </a:r>
+          </a:p>
+          <a:p>
+            <a:pPr marL="228600" indent="-228600">
+              <a:spcAft>
+                <a:spcPts val="800"/>
+              </a:spcAft>
+              <a:buChar char="•"/>
+            </a:pPr>
+            <a:r>
+              <a:rPr sz="1350" b="0">
+                <a:solidFill>
+                  <a:srgbClr val="212121"/>
+                </a:solidFill>
+                <a:latin typeface="Calibri"/>
+              </a:rPr>
+              <a:t>TPL-generated catalogs return a TPL verdict, 5 of 5; ceiling-generated return the ceiling, 5 of 5</a:t>
+            </a:r>
+          </a:p>
+          <a:p>
+            <a:pPr marL="228600" indent="-228600">
+              <a:spcAft>
+                <a:spcPts val="800"/>
+              </a:spcAft>
+              <a:buChar char="•"/>
+            </a:pPr>
+            <a:r>
+              <a:rPr sz="1350" b="0">
+                <a:solidFill>
+                  <a:srgbClr val="212121"/>
+                </a:solidFill>
+                <a:latin typeface="Calibri"/>
+              </a:rPr>
+              <a:t>Measured cells sit on the ceiling side; in the 8 largest, </a:t>
+            </a:r>
+            <a:r>
+              <a:rPr sz="1350" b="1">
+                <a:solidFill>
+                  <a:srgbClr val="212121"/>
+                </a:solidFill>
+                <a:latin typeface="Calibri"/>
+              </a:rPr>
+              <a:t>AIC 8 of 8</a:t>
+            </a:r>
+            <a:r>
+              <a:rPr sz="1350" b="0">
+                <a:solidFill>
+                  <a:srgbClr val="212121"/>
+                </a:solidFill>
+                <a:latin typeface="Calibri"/>
+              </a:rPr>
+              <a:t> (ΔAIC 67 to 120 over TPL, 300 to 754 over lognormal)</a:t>
+            </a:r>
+          </a:p>
+        </p:txBody>
+      </p:sp>
+    </p:spTree>
+  </p:cSld>
+  <p:clrMapOvr>
+    <a:masterClrMapping/>
+  </p:clrMapOvr>
+</p:sld>
+</file>
+
+<file path=ppt/slides/slide12.xml><?xml version="1.0" encoding="utf-8"?>
+<p:sld xmlns:a="http://schemas.openxmlformats.org/drawingml/2006/main" xmlns:p="http://schemas.openxmlformats.org/presentationml/2006/main" xmlns:r="http://schemas.openxmlformats.org/officeDocument/2006/relationships">
+  <p:cSld>
+    <p:spTree>
+      <p:nvGrpSpPr>
+        <p:cNvPr id="1" name=""/>
+        <p:cNvGrpSpPr/>
+        <p:nvPr/>
+      </p:nvGrpSpPr>
+      <p:grpSpPr/>
+      <p:sp>
+        <p:nvSpPr>
+          <p:cNvPr id="2" name="TextBox 1"/>
+          <p:cNvSpPr txBox="1"/>
+          <p:nvPr/>
+        </p:nvSpPr>
+        <p:spPr>
+          <a:xfrm>
+            <a:off x="548640" y="292608"/>
+            <a:ext cx="11091672" cy="685800"/>
+          </a:xfrm>
+          <a:prstGeom prst="rect">
+            <a:avLst/>
+          </a:prstGeom>
+          <a:noFill/>
+        </p:spPr>
+        <p:txBody>
+          <a:bodyPr wrap="square" lIns="0" rIns="0" tIns="0" bIns="0">
+            <a:spAutoFit/>
+          </a:bodyPr>
+          <a:lstStyle/>
+          <a:p>
+            <a:r>
+              <a:rPr sz="3000" b="1">
+                <a:solidFill>
+                  <a:srgbClr val="1E2761"/>
+                </a:solidFill>
+                <a:latin typeface="Calibri"/>
+              </a:rPr>
+              <a:t>Performance: the plastic-rate field, rebuilt from the law</a:t>
+            </a:r>
+          </a:p>
+        </p:txBody>
+      </p:sp>
+      <p:pic>
+        <p:nvPicPr>
+          <p:cNvPr id="3" name="Picture 2" descr="fig09_q_agreement.png"/>
+          <p:cNvPicPr>
+            <a:picLocks noChangeAspect="1"/>
+          </p:cNvPicPr>
+          <p:nvPr/>
+        </p:nvPicPr>
+        <p:blipFill>
+          <a:blip r:embed="rId2"/>
+          <a:stretch>
+            <a:fillRect/>
+          </a:stretch>
+        </p:blipFill>
+        <p:spPr>
+          <a:xfrm>
+            <a:off x="635000" y="1188720"/>
+            <a:ext cx="5588000" cy="4572000"/>
+          </a:xfrm>
+          <a:prstGeom prst="rect">
+            <a:avLst/>
+          </a:prstGeom>
+        </p:spPr>
+      </p:pic>
+      <p:sp>
+        <p:nvSpPr>
+          <p:cNvPr id="4" name="TextBox 3"/>
+          <p:cNvSpPr txBox="1"/>
+          <p:nvPr/>
+        </p:nvSpPr>
+        <p:spPr>
+          <a:xfrm>
+            <a:off x="6675120" y="1280160"/>
+            <a:ext cx="4983480" cy="4572000"/>
+          </a:xfrm>
+          <a:prstGeom prst="rect">
+            <a:avLst/>
+          </a:prstGeom>
+          <a:noFill/>
+        </p:spPr>
+        <p:txBody>
+          <a:bodyPr wrap="square" lIns="0" rIns="0" tIns="0" bIns="0">
+            <a:spAutoFit/>
+          </a:bodyPr>
+          <a:lstStyle/>
+          <a:p>
+            <a:pPr>
+              <a:spcAft>
+                <a:spcPts val="600"/>
+              </a:spcAft>
+            </a:pPr>
+            <a:r>
+              <a:rPr sz="1600" b="1">
+                <a:solidFill>
+                  <a:srgbClr val="1E2761"/>
+                </a:solidFill>
+                <a:latin typeface="Calibri"/>
+              </a:rPr>
+              <a:t>Measured q against q from the law</a:t>
+            </a:r>
+          </a:p>
+          <a:p>
+            <a:pPr marL="228600" indent="-228600">
+              <a:spcAft>
+                <a:spcPts val="800"/>
+              </a:spcAft>
+              <a:buChar char="•"/>
+            </a:pPr>
+            <a:r>
+              <a:rPr sz="1400" b="0">
+                <a:solidFill>
+                  <a:srgbClr val="212121"/>
+                </a:solidFill>
+                <a:latin typeface="Calibri"/>
+              </a:rPr>
+              <a:t>Measured: </a:t>
+            </a:r>
+            <a:r>
+              <a:rPr sz="1400" b="1">
+                <a:solidFill>
+                  <a:srgbClr val="212121"/>
+                </a:solidFill>
+                <a:latin typeface="Calibri"/>
+              </a:rPr>
+              <a:t>q = 1 − (dτ/dγ)/2μ</a:t>
+            </a:r>
+            <a:r>
+              <a:rPr sz="1400" b="0">
+                <a:solidFill>
+                  <a:srgbClr val="212121"/>
+                </a:solidFill>
+                <a:latin typeface="Calibri"/>
+              </a:rPr>
+              <a:t> per cell, first pass</a:t>
+            </a:r>
+          </a:p>
+          <a:p>
+            <a:pPr marL="228600" indent="-228600">
+              <a:spcAft>
+                <a:spcPts val="800"/>
+              </a:spcAft>
+              <a:buChar char="•"/>
+            </a:pPr>
+            <a:r>
+              <a:rPr sz="1400" b="0">
+                <a:solidFill>
+                  <a:srgbClr val="212121"/>
+                </a:solidFill>
+                <a:latin typeface="Calibri"/>
+              </a:rPr>
+              <a:t>From the law: </a:t>
+            </a:r>
+            <a:r>
+              <a:rPr sz="1400" b="1">
+                <a:solidFill>
+                  <a:srgbClr val="212121"/>
+                </a:solidFill>
+                <a:latin typeface="Calibri"/>
+              </a:rPr>
+              <a:t>hazard × mean event size</a:t>
+            </a:r>
+            <a:r>
+              <a:rPr sz="1400" b="0">
+                <a:solidFill>
+                  <a:srgbClr val="212121"/>
+                </a:solidFill>
+                <a:latin typeface="Calibri"/>
+              </a:rPr>
+              <a:t>, the mean taken from the fitted P(s | u, τ)</a:t>
+            </a:r>
+          </a:p>
+          <a:p>
+            <a:pPr marL="228600" indent="-228600">
+              <a:spcAft>
+                <a:spcPts val="800"/>
+              </a:spcAft>
+              <a:buChar char="•"/>
+            </a:pPr>
+            <a:r>
+              <a:rPr sz="1400" b="0">
+                <a:solidFill>
+                  <a:srgbClr val="212121"/>
+                </a:solidFill>
+                <a:latin typeface="Calibri"/>
+              </a:rPr>
+              <a:t>One dot per cell, two decades of q; band = statistical noise floor of this grid, </a:t>
+            </a:r>
+            <a:r>
+              <a:rPr sz="1400" b="1">
+                <a:solidFill>
+                  <a:srgbClr val="212121"/>
+                </a:solidFill>
+                <a:latin typeface="Calibri"/>
+              </a:rPr>
+              <a:t>17.5%</a:t>
+            </a:r>
+            <a:r>
+              <a:rPr sz="1400" b="0">
+                <a:solidFill>
+                  <a:srgbClr val="212121"/>
+                </a:solidFill>
+                <a:latin typeface="Calibri"/>
+              </a:rPr>
+              <a:t> (split-half ensembles)</a:t>
+            </a:r>
+          </a:p>
+          <a:p>
+            <a:pPr marL="228600" indent="-228600">
+              <a:spcAft>
+                <a:spcPts val="800"/>
+              </a:spcAft>
+              <a:buChar char="•"/>
+            </a:pPr>
+            <a:r>
+              <a:rPr sz="1400" b="0">
+                <a:solidFill>
+                  <a:srgbClr val="212121"/>
+                </a:solidFill>
+                <a:latin typeface="Calibri"/>
+              </a:rPr>
+              <a:t>Rebuilt field: </a:t>
+            </a:r>
+            <a:r>
+              <a:rPr sz="1400" b="1">
+                <a:solidFill>
+                  <a:srgbClr val="212121"/>
+                </a:solidFill>
+                <a:latin typeface="Calibri"/>
+              </a:rPr>
+              <a:t>median +1.8%, RMS 17%</a:t>
+            </a:r>
+            <a:r>
+              <a:rPr sz="1400" b="0">
+                <a:solidFill>
+                  <a:srgbClr val="212121"/>
+                </a:solidFill>
+                <a:latin typeface="Calibri"/>
+              </a:rPr>
+              <a:t>, within the noise. A better law could not score better here</a:t>
+            </a:r>
+          </a:p>
+          <a:p>
+            <a:pPr marL="228600" indent="-228600">
+              <a:spcAft>
+                <a:spcPts val="800"/>
+              </a:spcAft>
+              <a:buChar char="•"/>
+            </a:pPr>
+            <a:r>
+              <a:rPr sz="1400" b="0">
+                <a:solidFill>
+                  <a:srgbClr val="212121"/>
+                </a:solidFill>
+                <a:latin typeface="Calibri"/>
+              </a:rPr>
+              <a:t>Same factor structure: both versions factorize at 96%, same SR knee, nearly the same constants</a:t>
+            </a:r>
+          </a:p>
+        </p:txBody>
+      </p:sp>
+    </p:spTree>
+  </p:cSld>
+  <p:clrMapOvr>
+    <a:masterClrMapping/>
+  </p:clrMapOvr>
+</p:sld>
+</file>
+
+<file path=ppt/slides/slide13.xml><?xml version="1.0" encoding="utf-8"?>
+<p:sld xmlns:a="http://schemas.openxmlformats.org/drawingml/2006/main" xmlns:p="http://schemas.openxmlformats.org/presentationml/2006/main" xmlns:r="http://schemas.openxmlformats.org/officeDocument/2006/relationships">
+  <p:cSld>
+    <p:spTree>
+      <p:nvGrpSpPr>
+        <p:cNvPr id="1" name=""/>
+        <p:cNvGrpSpPr/>
+        <p:nvPr/>
+      </p:nvGrpSpPr>
+      <p:grpSpPr/>
+      <p:sp>
+        <p:nvSpPr>
+          <p:cNvPr id="2" name="TextBox 1"/>
+          <p:cNvSpPr txBox="1"/>
+          <p:nvPr/>
+        </p:nvSpPr>
+        <p:spPr>
+          <a:xfrm>
+            <a:off x="548640" y="292608"/>
+            <a:ext cx="11091672" cy="685800"/>
+          </a:xfrm>
+          <a:prstGeom prst="rect">
+            <a:avLst/>
+          </a:prstGeom>
+          <a:noFill/>
+        </p:spPr>
+        <p:txBody>
+          <a:bodyPr wrap="square" lIns="0" rIns="0" tIns="0" bIns="0">
+            <a:spAutoFit/>
+          </a:bodyPr>
+          <a:lstStyle/>
+          <a:p>
+            <a:r>
+              <a:rPr sz="3000" b="1">
+                <a:solidFill>
+                  <a:srgbClr val="1E2761"/>
+                </a:solidFill>
+                <a:latin typeface="Calibri"/>
+              </a:rPr>
+              <a:t>Running the model with the discovered law</a:t>
+            </a:r>
+          </a:p>
+        </p:txBody>
+      </p:sp>
+      <p:pic>
+        <p:nvPicPr>
+          <p:cNvPr id="3" name="Picture 2" descr="fig12_sim_stress.png"/>
+          <p:cNvPicPr>
+            <a:picLocks noChangeAspect="1"/>
+          </p:cNvPicPr>
+          <p:nvPr/>
+        </p:nvPicPr>
+        <p:blipFill>
+          <a:blip r:embed="rId2"/>
+          <a:stretch>
+            <a:fillRect/>
+          </a:stretch>
+        </p:blipFill>
+        <p:spPr>
+          <a:xfrm>
+            <a:off x="546002" y="1143000"/>
+            <a:ext cx="5400235" cy="3794760"/>
+          </a:xfrm>
+          <a:prstGeom prst="rect">
+            <a:avLst/>
+          </a:prstGeom>
+        </p:spPr>
+      </p:pic>
+      <p:pic>
+        <p:nvPicPr>
+          <p:cNvPr id="4" name="Picture 3" descr="fig14_sim_peaks.png"/>
+          <p:cNvPicPr>
+            <a:picLocks noChangeAspect="1"/>
+          </p:cNvPicPr>
+          <p:nvPr/>
+        </p:nvPicPr>
+        <p:blipFill>
+          <a:blip r:embed="rId3"/>
+          <a:stretch>
+            <a:fillRect/>
+          </a:stretch>
+        </p:blipFill>
+        <p:spPr>
+          <a:xfrm>
+            <a:off x="6242714" y="1143000"/>
+            <a:ext cx="5400235" cy="3794760"/>
+          </a:xfrm>
+          <a:prstGeom prst="rect">
+            <a:avLst/>
+          </a:prstGeom>
+        </p:spPr>
+      </p:pic>
+      <p:sp>
+        <p:nvSpPr>
+          <p:cNvPr id="5" name="TextBox 4"/>
+          <p:cNvSpPr txBox="1"/>
+          <p:nvPr/>
+        </p:nvSpPr>
+        <p:spPr>
+          <a:xfrm>
+            <a:off x="640080" y="5029200"/>
+            <a:ext cx="5394960" cy="1737360"/>
+          </a:xfrm>
+          <a:prstGeom prst="rect">
+            <a:avLst/>
+          </a:prstGeom>
+          <a:noFill/>
+        </p:spPr>
+        <p:txBody>
+          <a:bodyPr wrap="square" lIns="0" rIns="0" tIns="0" bIns="0">
+            <a:spAutoFit/>
+          </a:bodyPr>
+          <a:lstStyle/>
+          <a:p>
+            <a:pPr>
+              <a:spcAft>
+                <a:spcPts val="600"/>
+              </a:spcAft>
+            </a:pPr>
+            <a:r>
+              <a:rPr sz="1600" b="1">
+                <a:solidFill>
+                  <a:srgbClr val="1E2761"/>
+                </a:solidFill>
+                <a:latin typeface="Calibri"/>
+              </a:rPr>
+              <a:t>All 850 runs, forward from their measured initial states</a:t>
+            </a:r>
+          </a:p>
+          <a:p>
+            <a:pPr marL="228600" indent="-228600">
+              <a:spcAft>
+                <a:spcPts val="800"/>
+              </a:spcAft>
+              <a:buChar char="•"/>
+            </a:pPr>
+            <a:r>
+              <a:rPr sz="1350" b="0">
+                <a:solidFill>
+                  <a:srgbClr val="212121"/>
+                </a:solidFill>
+                <a:latin typeface="Calibri"/>
+              </a:rPr>
+              <a:t>Each step at Δγ = 10⁻⁵: elastic drift at 2μ, an event with probability p(u, τ), size drawn from the law</a:t>
+            </a:r>
+          </a:p>
+          <a:p>
+            <a:pPr marL="228600" indent="-228600">
+              <a:spcAft>
+                <a:spcPts val="800"/>
+              </a:spcAft>
+              <a:buChar char="•"/>
+            </a:pPr>
+            <a:r>
+              <a:rPr sz="1350" b="0">
+                <a:solidFill>
+                  <a:srgbClr val="212121"/>
+                </a:solidFill>
+                <a:latin typeface="Calibri"/>
+              </a:rPr>
+              <a:t>MD solid, model dashed: elastic rise, </a:t>
+            </a:r>
+            <a:r>
+              <a:rPr sz="1350" b="1">
+                <a:solidFill>
+                  <a:srgbClr val="212121"/>
+                </a:solidFill>
+                <a:latin typeface="Calibri"/>
+              </a:rPr>
+              <a:t>yield overshoot across 256× in cooling rate</a:t>
+            </a:r>
+            <a:r>
+              <a:rPr sz="1350" b="0">
+                <a:solidFill>
+                  <a:srgbClr val="212121"/>
+                </a:solidFill>
+                <a:latin typeface="Calibri"/>
+              </a:rPr>
+              <a:t>, post-yield decay, flow stress (±5%)</a:t>
+            </a:r>
+          </a:p>
+        </p:txBody>
+      </p:sp>
+      <p:sp>
+        <p:nvSpPr>
+          <p:cNvPr id="6" name="TextBox 5"/>
+          <p:cNvSpPr txBox="1"/>
+          <p:nvPr/>
+        </p:nvSpPr>
+        <p:spPr>
+          <a:xfrm>
+            <a:off x="6355080" y="5029200"/>
+            <a:ext cx="5303520" cy="1737360"/>
+          </a:xfrm>
+          <a:prstGeom prst="rect">
+            <a:avLst/>
+          </a:prstGeom>
+          <a:noFill/>
+        </p:spPr>
+        <p:txBody>
+          <a:bodyPr wrap="square" lIns="0" rIns="0" tIns="0" bIns="0">
+            <a:spAutoFit/>
+          </a:bodyPr>
+          <a:lstStyle/>
+          <a:p>
+            <a:pPr>
+              <a:spcAft>
+                <a:spcPts val="600"/>
+              </a:spcAft>
+            </a:pPr>
+            <a:r>
+              <a:rPr sz="1600" b="1">
+                <a:solidFill>
+                  <a:srgbClr val="1E2761"/>
+                </a:solidFill>
+                <a:latin typeface="Calibri"/>
+              </a:rPr>
+              <a:t>The 850 yield peaks</a:t>
+            </a:r>
+          </a:p>
+          <a:p>
+            <a:pPr marL="228600" indent="-228600">
+              <a:spcAft>
+                <a:spcPts val="800"/>
+              </a:spcAft>
+              <a:buChar char="•"/>
+            </a:pPr>
+            <a:r>
+              <a:rPr sz="1350" b="0">
+                <a:solidFill>
+                  <a:srgbClr val="212121"/>
+                </a:solidFill>
+                <a:latin typeface="Calibri"/>
+              </a:rPr>
+              <a:t>Ceiling law </a:t>
+            </a:r>
+            <a:r>
+              <a:rPr sz="1350" b="1">
+                <a:solidFill>
+                  <a:srgbClr val="212121"/>
+                </a:solidFill>
+                <a:latin typeface="Calibri"/>
+              </a:rPr>
+              <a:t>RMS 2.5%</a:t>
+            </a:r>
+            <a:r>
+              <a:rPr sz="1350" b="0">
+                <a:solidFill>
+                  <a:srgbClr val="212121"/>
+                </a:solidFill>
+                <a:latin typeface="Calibri"/>
+              </a:rPr>
+              <a:t> (worst rate 4.3%); TPL 1.4%; raw-event resampling 0.9%</a:t>
+            </a:r>
+          </a:p>
+          <a:p>
+            <a:pPr marL="228600" indent="-228600">
+              <a:spcAft>
+                <a:spcPts val="800"/>
+              </a:spcAft>
+              <a:buChar char="•"/>
+            </a:pPr>
+            <a:r>
+              <a:rPr sz="1350" b="0">
+                <a:solidFill>
+                  <a:srgbClr val="212121"/>
+                </a:solidFill>
+                <a:latin typeface="Calibri"/>
+              </a:rPr>
+              <a:t>Peaks feel only the mean event size, so they do not discriminate size laws</a:t>
+            </a:r>
+          </a:p>
+        </p:txBody>
+      </p:sp>
+    </p:spTree>
+  </p:cSld>
+  <p:clrMapOvr>
+    <a:masterClrMapping/>
+  </p:clrMapOvr>
+</p:sld>
+</file>
+
+<file path=ppt/slides/slide14.xml><?xml version="1.0" encoding="utf-8"?>
 <p:sld xmlns:a="http://schemas.openxmlformats.org/drawingml/2006/main" xmlns:p="http://schemas.openxmlformats.org/presentationml/2006/main" xmlns:r="http://schemas.openxmlformats.org/officeDocument/2006/relationships">
   <p:cSld>
     <p:spTree>
@@ -3427,7 +4894,7 @@
 </p:sld>
 </file>
 
-<file path=ppt/slides/slide11.xml><?xml version="1.0" encoding="utf-8"?>
+<file path=ppt/slides/slide15.xml><?xml version="1.0" encoding="utf-8"?>
 <p:sld xmlns:a="http://schemas.openxmlformats.org/drawingml/2006/main" xmlns:p="http://schemas.openxmlformats.org/presentationml/2006/main" xmlns:r="http://schemas.openxmlformats.org/officeDocument/2006/relationships">
   <p:cSld>
     <p:spTree>
@@ -3771,821 +5238,42 @@
           <a:chExt cx="0" cy="0"/>
         </a:xfrm>
       </p:grpSpPr>
-      <p:sp>
-        <p:nvSpPr>
-          <p:cNvPr id="2" name="TextBox 1"/>
-          <p:cNvSpPr txBox="1"/>
+      <p:pic>
+        <p:nvPicPr>
+          <p:cNvPr id="3" name="Picture 2">
+            <a:extLst>
+              <a:ext uri="{FF2B5EF4-FFF2-40B4-BE49-F238E27FC236}">
+                <a16:creationId xmlns:a16="http://schemas.microsoft.com/office/drawing/2014/main" id="{F5ACF36E-3DEB-EA88-2966-222F8DC4CE72}"/>
+              </a:ext>
+            </a:extLst>
+          </p:cNvPr>
+          <p:cNvPicPr>
+            <a:picLocks noChangeAspect="1"/>
+          </p:cNvPicPr>
           <p:nvPr/>
-        </p:nvSpPr>
+        </p:nvPicPr>
+        <p:blipFill>
+          <a:blip r:embed="rId2"/>
+          <a:stretch>
+            <a:fillRect/>
+          </a:stretch>
+        </p:blipFill>
         <p:spPr>
           <a:xfrm>
-            <a:off x="548640" y="292608"/>
-            <a:ext cx="11091672" cy="461665"/>
+            <a:off x="1852823" y="1615600"/>
+            <a:ext cx="8486353" cy="3626799"/>
           </a:xfrm>
           <a:prstGeom prst="rect">
             <a:avLst/>
           </a:prstGeom>
-          <a:noFill/>
         </p:spPr>
-        <p:txBody>
-          <a:bodyPr wrap="square" lIns="0" tIns="0" rIns="0" bIns="0">
-            <a:spAutoFit/>
-          </a:bodyPr>
-          <a:lstStyle/>
-          <a:p>
-            <a:r>
-              <a:rPr lang="en-US" sz="3000" b="1" dirty="0">
-                <a:solidFill>
-                  <a:srgbClr val="1E2761"/>
-                </a:solidFill>
-                <a:latin typeface="Calibri"/>
-              </a:rPr>
-              <a:t>Variables</a:t>
-            </a:r>
-            <a:endParaRPr sz="3000" b="1" dirty="0">
-              <a:solidFill>
-                <a:srgbClr val="1E2761"/>
-              </a:solidFill>
-              <a:latin typeface="Calibri"/>
-            </a:endParaRPr>
-          </a:p>
-        </p:txBody>
-      </p:sp>
-      <p:sp>
-        <p:nvSpPr>
-          <p:cNvPr id="3" name="TextBox 2"/>
-          <p:cNvSpPr txBox="1"/>
-          <p:nvPr/>
-        </p:nvSpPr>
-        <p:spPr>
-          <a:xfrm>
-            <a:off x="640080" y="1234440"/>
-            <a:ext cx="5394960" cy="2182649"/>
-          </a:xfrm>
-          <a:prstGeom prst="rect">
-            <a:avLst/>
-          </a:prstGeom>
-          <a:noFill/>
-        </p:spPr>
-        <p:txBody>
-          <a:bodyPr wrap="square" lIns="0" tIns="0" rIns="0" bIns="0">
-            <a:spAutoFit/>
-          </a:bodyPr>
-          <a:lstStyle/>
-          <a:p>
-            <a:pPr>
-              <a:spcAft>
-                <a:spcPts val="1100"/>
-              </a:spcAft>
-            </a:pPr>
-            <a:r>
-              <a:rPr sz="1600" b="0" dirty="0" err="1">
-                <a:solidFill>
-                  <a:srgbClr val="1E2761"/>
-                </a:solidFill>
-                <a:latin typeface="Cambria Math"/>
-              </a:rPr>
-              <a:t>γ</a:t>
-            </a:r>
-            <a:r>
-              <a:rPr sz="1600" b="0" dirty="0">
-                <a:solidFill>
-                  <a:srgbClr val="1E2761"/>
-                </a:solidFill>
-                <a:latin typeface="Cambria Math"/>
-              </a:rPr>
-              <a:t>   </a:t>
-            </a:r>
-            <a:r>
-              <a:rPr sz="1500" b="0" dirty="0">
-                <a:solidFill>
-                  <a:srgbClr val="212121"/>
-                </a:solidFill>
-                <a:latin typeface="Calibri"/>
-              </a:rPr>
-              <a:t>applied shear strain; one step is 10⁻⁵, runs go to 0.5</a:t>
-            </a:r>
-          </a:p>
-          <a:p>
-            <a:pPr>
-              <a:spcAft>
-                <a:spcPts val="1100"/>
-              </a:spcAft>
-            </a:pPr>
-            <a:r>
-              <a:rPr sz="1600" b="0" dirty="0" err="1">
-                <a:solidFill>
-                  <a:srgbClr val="1E2761"/>
-                </a:solidFill>
-                <a:latin typeface="Cambria Math"/>
-              </a:rPr>
-              <a:t>τ</a:t>
-            </a:r>
-            <a:r>
-              <a:rPr sz="1600" b="0" dirty="0">
-                <a:solidFill>
-                  <a:srgbClr val="1E2761"/>
-                </a:solidFill>
-                <a:latin typeface="Cambria Math"/>
-              </a:rPr>
-              <a:t>   </a:t>
-            </a:r>
-            <a:r>
-              <a:rPr sz="1500" b="0" dirty="0">
-                <a:solidFill>
-                  <a:srgbClr val="212121"/>
-                </a:solidFill>
-                <a:latin typeface="Calibri"/>
-              </a:rPr>
-              <a:t>shear stress (raw stress ÷ 10⁴)</a:t>
-            </a:r>
-          </a:p>
-          <a:p>
-            <a:pPr>
-              <a:spcAft>
-                <a:spcPts val="1100"/>
-              </a:spcAft>
-            </a:pPr>
-            <a:r>
-              <a:rPr sz="1600" b="0" dirty="0">
-                <a:solidFill>
-                  <a:srgbClr val="1E2761"/>
-                </a:solidFill>
-                <a:latin typeface="Cambria Math"/>
-              </a:rPr>
-              <a:t>u = pe − u₀   </a:t>
-            </a:r>
-            <a:r>
-              <a:rPr lang="en-US" sz="1500" b="0" dirty="0">
-                <a:solidFill>
-                  <a:srgbClr val="212121"/>
-                </a:solidFill>
-                <a:latin typeface="Calibri"/>
-              </a:rPr>
-              <a:t>PE/</a:t>
-            </a:r>
-            <a:r>
-              <a:rPr sz="1500" b="0" dirty="0">
-                <a:solidFill>
-                  <a:srgbClr val="212121"/>
-                </a:solidFill>
-                <a:latin typeface="Calibri"/>
-              </a:rPr>
-              <a:t>atom above the reference u₀ = −4.60752</a:t>
-            </a:r>
-          </a:p>
-          <a:p>
-            <a:pPr>
-              <a:spcAft>
-                <a:spcPts val="1100"/>
-              </a:spcAft>
-            </a:pPr>
-            <a:r>
-              <a:rPr sz="1600" b="0" dirty="0">
-                <a:solidFill>
-                  <a:srgbClr val="1E2761"/>
-                </a:solidFill>
-                <a:latin typeface="Cambria Math"/>
-              </a:rPr>
-              <a:t>(u, </a:t>
-            </a:r>
-            <a:r>
-              <a:rPr sz="1600" b="0" dirty="0" err="1">
-                <a:solidFill>
-                  <a:srgbClr val="1E2761"/>
-                </a:solidFill>
-                <a:latin typeface="Cambria Math"/>
-              </a:rPr>
-              <a:t>τ</a:t>
-            </a:r>
-            <a:r>
-              <a:rPr sz="1600" b="0" dirty="0">
-                <a:solidFill>
-                  <a:srgbClr val="1E2761"/>
-                </a:solidFill>
-                <a:latin typeface="Cambria Math"/>
-              </a:rPr>
-              <a:t>) </a:t>
-            </a:r>
-            <a:r>
-              <a:rPr sz="1500" b="0" dirty="0">
-                <a:solidFill>
-                  <a:srgbClr val="212121"/>
-                </a:solidFill>
-                <a:latin typeface="Calibri"/>
-              </a:rPr>
-              <a:t>two-coordinate state of a run; 20 × 20 grid</a:t>
-            </a:r>
-          </a:p>
-          <a:p>
-            <a:pPr>
-              <a:spcAft>
-                <a:spcPts val="1100"/>
-              </a:spcAft>
-            </a:pPr>
-            <a:r>
-              <a:rPr sz="1600" b="0" dirty="0">
-                <a:solidFill>
-                  <a:srgbClr val="1E2761"/>
-                </a:solidFill>
-                <a:latin typeface="Cambria Math"/>
-              </a:rPr>
-              <a:t>2μ(u, </a:t>
-            </a:r>
-            <a:r>
-              <a:rPr sz="1600" b="0" dirty="0" err="1">
-                <a:solidFill>
-                  <a:srgbClr val="1E2761"/>
-                </a:solidFill>
-                <a:latin typeface="Cambria Math"/>
-              </a:rPr>
-              <a:t>τ</a:t>
-            </a:r>
-            <a:r>
-              <a:rPr sz="1600" b="0" dirty="0">
-                <a:solidFill>
-                  <a:srgbClr val="1E2761"/>
-                </a:solidFill>
-                <a:latin typeface="Cambria Math"/>
-              </a:rPr>
-              <a:t>)   </a:t>
-            </a:r>
-            <a:r>
-              <a:rPr sz="1500" b="0" dirty="0">
-                <a:solidFill>
-                  <a:srgbClr val="212121"/>
-                </a:solidFill>
-                <a:latin typeface="Calibri"/>
-              </a:rPr>
-              <a:t>elastic modulus</a:t>
-            </a:r>
-          </a:p>
-          <a:p>
-            <a:pPr>
-              <a:spcAft>
-                <a:spcPts val="1100"/>
-              </a:spcAft>
-            </a:pPr>
-            <a:r>
-              <a:rPr sz="1600" b="0" dirty="0">
-                <a:solidFill>
-                  <a:srgbClr val="1E2761"/>
-                </a:solidFill>
-                <a:latin typeface="Cambria Math"/>
-              </a:rPr>
-              <a:t>s = −</a:t>
-            </a:r>
-            <a:r>
-              <a:rPr sz="1600" b="0" dirty="0" err="1">
-                <a:solidFill>
-                  <a:srgbClr val="1E2761"/>
-                </a:solidFill>
-                <a:latin typeface="Cambria Math"/>
-              </a:rPr>
-              <a:t>Δτ</a:t>
-            </a:r>
-            <a:r>
-              <a:rPr sz="1600" b="0" dirty="0">
-                <a:solidFill>
-                  <a:srgbClr val="1E2761"/>
-                </a:solidFill>
-                <a:latin typeface="Cambria Math"/>
-              </a:rPr>
-              <a:t> </a:t>
-            </a:r>
-            <a:r>
-              <a:rPr lang="en-US" sz="1600" b="0" dirty="0">
-                <a:solidFill>
-                  <a:srgbClr val="1E2761"/>
-                </a:solidFill>
-                <a:latin typeface="Cambria Math"/>
-              </a:rPr>
-              <a:t>  </a:t>
-            </a:r>
-            <a:r>
-              <a:rPr lang="en-US" sz="1500" b="0" dirty="0">
-                <a:solidFill>
-                  <a:srgbClr val="212121"/>
-                </a:solidFill>
-                <a:latin typeface="Calibri"/>
-              </a:rPr>
-              <a:t>an </a:t>
-            </a:r>
-            <a:r>
-              <a:rPr sz="1500" b="0" dirty="0">
-                <a:solidFill>
-                  <a:srgbClr val="212121"/>
-                </a:solidFill>
-                <a:latin typeface="Calibri"/>
-              </a:rPr>
-              <a:t>event: a step where the stress drops, of size s</a:t>
-            </a:r>
-          </a:p>
-        </p:txBody>
-      </p:sp>
-      <p:sp>
-        <p:nvSpPr>
-          <p:cNvPr id="4" name="TextBox 3"/>
-          <p:cNvSpPr txBox="1"/>
-          <p:nvPr/>
-        </p:nvSpPr>
-        <p:spPr>
-          <a:xfrm>
-            <a:off x="6355080" y="1234440"/>
-            <a:ext cx="5303520" cy="3172663"/>
-          </a:xfrm>
-          <a:prstGeom prst="rect">
-            <a:avLst/>
-          </a:prstGeom>
-          <a:noFill/>
-        </p:spPr>
-        <p:txBody>
-          <a:bodyPr wrap="square" lIns="0" tIns="0" rIns="0" bIns="0">
-            <a:spAutoFit/>
-          </a:bodyPr>
-          <a:lstStyle/>
-          <a:p>
-            <a:pPr>
-              <a:spcAft>
-                <a:spcPts val="1100"/>
-              </a:spcAft>
-            </a:pPr>
-            <a:r>
-              <a:rPr lang="el-GR" sz="1600" dirty="0">
-                <a:solidFill>
-                  <a:srgbClr val="1E2761"/>
-                </a:solidFill>
-                <a:latin typeface="Cambria Math"/>
-              </a:rPr>
-              <a:t>ρ(</a:t>
-            </a:r>
-            <a:r>
-              <a:rPr lang="en-US" sz="1600" dirty="0">
-                <a:solidFill>
-                  <a:srgbClr val="1E2761"/>
-                </a:solidFill>
-                <a:latin typeface="Cambria Math"/>
-              </a:rPr>
-              <a:t>s) </a:t>
-            </a:r>
-            <a:r>
-              <a:rPr lang="en-US" sz="1600" b="1" dirty="0">
-                <a:solidFill>
-                  <a:srgbClr val="212121"/>
-                </a:solidFill>
-              </a:rPr>
-              <a:t>density of events </a:t>
-            </a:r>
-            <a:r>
-              <a:rPr lang="en-US" sz="1600" dirty="0">
-                <a:solidFill>
-                  <a:srgbClr val="212121"/>
-                </a:solidFill>
-              </a:rPr>
-              <a:t>of size s</a:t>
-            </a:r>
-            <a:endParaRPr lang="en-US" sz="1600" b="0" dirty="0">
-              <a:solidFill>
-                <a:srgbClr val="1E2761"/>
-              </a:solidFill>
-              <a:latin typeface="Cambria Math"/>
-            </a:endParaRPr>
-          </a:p>
-          <a:p>
-            <a:pPr>
-              <a:spcAft>
-                <a:spcPts val="1100"/>
-              </a:spcAft>
-            </a:pPr>
-            <a:r>
-              <a:rPr sz="1600" b="0" dirty="0">
-                <a:solidFill>
-                  <a:srgbClr val="1E2761"/>
-                </a:solidFill>
-                <a:latin typeface="Cambria Math"/>
-              </a:rPr>
-              <a:t>p(u, </a:t>
-            </a:r>
-            <a:r>
-              <a:rPr sz="1600" b="0" dirty="0" err="1">
-                <a:solidFill>
-                  <a:srgbClr val="1E2761"/>
-                </a:solidFill>
-                <a:latin typeface="Cambria Math"/>
-              </a:rPr>
-              <a:t>τ</a:t>
-            </a:r>
-            <a:r>
-              <a:rPr sz="1600" b="0" dirty="0">
-                <a:solidFill>
-                  <a:srgbClr val="1E2761"/>
-                </a:solidFill>
-                <a:latin typeface="Cambria Math"/>
-              </a:rPr>
-              <a:t>) </a:t>
-            </a:r>
-            <a:r>
-              <a:rPr sz="1500" b="1" dirty="0">
-                <a:solidFill>
-                  <a:srgbClr val="212121"/>
-                </a:solidFill>
-                <a:latin typeface="Calibri"/>
-              </a:rPr>
-              <a:t>probability per step </a:t>
-            </a:r>
-            <a:r>
-              <a:rPr sz="1500" b="0" dirty="0">
-                <a:solidFill>
-                  <a:srgbClr val="212121"/>
-                </a:solidFill>
-                <a:latin typeface="Calibri"/>
-              </a:rPr>
-              <a:t>that an </a:t>
-            </a:r>
-            <a:r>
-              <a:rPr lang="en-US" sz="1500" b="0" dirty="0">
-                <a:solidFill>
-                  <a:srgbClr val="212121"/>
-                </a:solidFill>
-                <a:latin typeface="Calibri"/>
-              </a:rPr>
-              <a:t>event occurs</a:t>
-            </a:r>
-            <a:endParaRPr sz="1500" b="0" dirty="0">
-              <a:solidFill>
-                <a:srgbClr val="212121"/>
-              </a:solidFill>
-              <a:latin typeface="Calibri"/>
-            </a:endParaRPr>
-          </a:p>
-          <a:p>
-            <a:pPr>
-              <a:spcAft>
-                <a:spcPts val="1100"/>
-              </a:spcAft>
-            </a:pPr>
-            <a:r>
-              <a:rPr sz="1600" b="0" dirty="0">
-                <a:solidFill>
-                  <a:srgbClr val="1E2761"/>
-                </a:solidFill>
-                <a:latin typeface="Cambria Math"/>
-              </a:rPr>
-              <a:t>P(s | u, </a:t>
-            </a:r>
-            <a:r>
-              <a:rPr sz="1600" b="0" dirty="0" err="1">
-                <a:solidFill>
-                  <a:srgbClr val="1E2761"/>
-                </a:solidFill>
-                <a:latin typeface="Cambria Math"/>
-              </a:rPr>
-              <a:t>τ</a:t>
-            </a:r>
-            <a:r>
-              <a:rPr sz="1600" b="0" dirty="0">
-                <a:solidFill>
-                  <a:srgbClr val="1E2761"/>
-                </a:solidFill>
-                <a:latin typeface="Cambria Math"/>
-              </a:rPr>
-              <a:t>) </a:t>
-            </a:r>
-            <a:r>
-              <a:rPr sz="1500" b="1" dirty="0">
-                <a:solidFill>
-                  <a:srgbClr val="212121"/>
-                </a:solidFill>
-                <a:latin typeface="Calibri"/>
-              </a:rPr>
-              <a:t>size distribution of events </a:t>
-            </a:r>
-            <a:r>
-              <a:rPr sz="1500" b="0" dirty="0">
-                <a:solidFill>
-                  <a:srgbClr val="212121"/>
-                </a:solidFill>
-                <a:latin typeface="Calibri"/>
-              </a:rPr>
-              <a:t>at a given state</a:t>
-            </a:r>
-          </a:p>
-          <a:p>
-            <a:pPr>
-              <a:spcAft>
-                <a:spcPts val="1100"/>
-              </a:spcAft>
-            </a:pPr>
-            <a:r>
-              <a:rPr sz="1600" b="0" dirty="0" err="1">
-                <a:solidFill>
-                  <a:srgbClr val="1E2761"/>
-                </a:solidFill>
-                <a:latin typeface="Cambria Math"/>
-              </a:rPr>
-              <a:t>s_c</a:t>
-            </a:r>
-            <a:r>
-              <a:rPr sz="1600" b="0" dirty="0">
-                <a:solidFill>
-                  <a:srgbClr val="1E2761"/>
-                </a:solidFill>
-                <a:latin typeface="Cambria Math"/>
-              </a:rPr>
-              <a:t>(u, </a:t>
-            </a:r>
-            <a:r>
-              <a:rPr sz="1600" b="0" dirty="0" err="1">
-                <a:solidFill>
-                  <a:srgbClr val="1E2761"/>
-                </a:solidFill>
-                <a:latin typeface="Cambria Math"/>
-              </a:rPr>
-              <a:t>τ</a:t>
-            </a:r>
-            <a:r>
-              <a:rPr sz="1600" b="0" dirty="0">
-                <a:solidFill>
-                  <a:srgbClr val="1E2761"/>
-                </a:solidFill>
-                <a:latin typeface="Cambria Math"/>
-              </a:rPr>
-              <a:t>) </a:t>
-            </a:r>
-            <a:r>
-              <a:rPr sz="1500" b="1" dirty="0">
-                <a:solidFill>
-                  <a:srgbClr val="212121"/>
-                </a:solidFill>
-                <a:latin typeface="Calibri"/>
-              </a:rPr>
-              <a:t>the largest event </a:t>
-            </a:r>
-            <a:r>
-              <a:rPr sz="1500" b="0" dirty="0">
-                <a:solidFill>
-                  <a:srgbClr val="212121"/>
-                </a:solidFill>
-                <a:latin typeface="Calibri"/>
-              </a:rPr>
-              <a:t>a state can produce</a:t>
-            </a:r>
-          </a:p>
-          <a:p>
-            <a:pPr>
-              <a:spcAft>
-                <a:spcPts val="1100"/>
-              </a:spcAft>
-            </a:pPr>
-            <a:r>
-              <a:rPr sz="1600" b="0" dirty="0">
-                <a:solidFill>
-                  <a:srgbClr val="1E2761"/>
-                </a:solidFill>
-                <a:latin typeface="Cambria Math"/>
-              </a:rPr>
-              <a:t>k, m, </a:t>
-            </a:r>
-            <a:r>
-              <a:rPr sz="1600" b="0" dirty="0" err="1">
-                <a:solidFill>
-                  <a:srgbClr val="1E2761"/>
-                </a:solidFill>
-                <a:latin typeface="Cambria Math"/>
-              </a:rPr>
-              <a:t>ε</a:t>
-            </a:r>
-            <a:r>
-              <a:rPr sz="1600" b="0" dirty="0">
-                <a:solidFill>
-                  <a:srgbClr val="1E2761"/>
-                </a:solidFill>
-                <a:latin typeface="Cambria Math"/>
-              </a:rPr>
-              <a:t>   </a:t>
-            </a:r>
-            <a:r>
-              <a:rPr sz="1500" b="1" dirty="0">
-                <a:solidFill>
-                  <a:srgbClr val="212121"/>
-                </a:solidFill>
-                <a:latin typeface="Calibri"/>
-              </a:rPr>
-              <a:t>constants </a:t>
-            </a:r>
-            <a:endParaRPr lang="en-US" sz="1500" b="1" dirty="0">
-              <a:solidFill>
-                <a:srgbClr val="212121"/>
-              </a:solidFill>
-              <a:latin typeface="Calibri"/>
-            </a:endParaRPr>
-          </a:p>
-          <a:p>
-            <a:pPr>
-              <a:spcAft>
-                <a:spcPts val="1100"/>
-              </a:spcAft>
-            </a:pPr>
-            <a:r>
-              <a:rPr sz="1600" b="0" dirty="0">
-                <a:solidFill>
-                  <a:srgbClr val="1E2761"/>
-                </a:solidFill>
-                <a:latin typeface="Cambria Math"/>
-              </a:rPr>
-              <a:t>q(u, </a:t>
-            </a:r>
-            <a:r>
-              <a:rPr sz="1600" b="0" dirty="0" err="1">
-                <a:solidFill>
-                  <a:srgbClr val="1E2761"/>
-                </a:solidFill>
-                <a:latin typeface="Cambria Math"/>
-              </a:rPr>
-              <a:t>τ</a:t>
-            </a:r>
-            <a:r>
-              <a:rPr sz="1600" b="0" dirty="0">
-                <a:solidFill>
-                  <a:srgbClr val="1E2761"/>
-                </a:solidFill>
-                <a:latin typeface="Cambria Math"/>
-              </a:rPr>
-              <a:t>)   </a:t>
-            </a:r>
-            <a:r>
-              <a:rPr sz="1500" b="0" dirty="0">
-                <a:solidFill>
-                  <a:srgbClr val="212121"/>
-                </a:solidFill>
-                <a:latin typeface="Calibri"/>
-              </a:rPr>
-              <a:t>plastic fraction of the strain rate</a:t>
-            </a:r>
-            <a:r>
-              <a:rPr lang="en-US" sz="1500" dirty="0">
-                <a:solidFill>
-                  <a:srgbClr val="212121"/>
-                </a:solidFill>
-                <a:latin typeface="Calibri"/>
-              </a:rPr>
-              <a:t>:</a:t>
-            </a:r>
-            <a:r>
-              <a:rPr sz="1500" b="0" dirty="0">
-                <a:solidFill>
-                  <a:srgbClr val="212121"/>
-                </a:solidFill>
-                <a:latin typeface="Calibri"/>
-              </a:rPr>
-              <a:t> 0</a:t>
-            </a:r>
-            <a:r>
-              <a:rPr lang="en-US" sz="1500" b="0" dirty="0">
-                <a:solidFill>
-                  <a:srgbClr val="212121"/>
-                </a:solidFill>
-                <a:latin typeface="Calibri"/>
-              </a:rPr>
-              <a:t>-&gt;</a:t>
-            </a:r>
-            <a:r>
-              <a:rPr sz="1500" b="0" dirty="0">
-                <a:solidFill>
-                  <a:srgbClr val="212121"/>
-                </a:solidFill>
-                <a:latin typeface="Calibri"/>
-              </a:rPr>
-              <a:t>elastic, 1</a:t>
-            </a:r>
-            <a:r>
-              <a:rPr lang="en-US" sz="1500" b="0" dirty="0">
-                <a:solidFill>
-                  <a:srgbClr val="212121"/>
-                </a:solidFill>
-                <a:latin typeface="Calibri"/>
-              </a:rPr>
-              <a:t>-&gt;</a:t>
-            </a:r>
-            <a:r>
-              <a:rPr sz="1500" b="0" dirty="0">
-                <a:solidFill>
-                  <a:srgbClr val="212121"/>
-                </a:solidFill>
-                <a:latin typeface="Calibri"/>
-              </a:rPr>
-              <a:t>steady </a:t>
-            </a:r>
-            <a:r>
-              <a:rPr lang="en-US" sz="1500" b="0" dirty="0">
-                <a:solidFill>
-                  <a:srgbClr val="212121"/>
-                </a:solidFill>
-                <a:latin typeface="Calibri"/>
-              </a:rPr>
-              <a:t>state</a:t>
-            </a:r>
-          </a:p>
-          <a:p>
-            <a:pPr>
-              <a:spcAft>
-                <a:spcPts val="1100"/>
-              </a:spcAft>
-            </a:pPr>
-            <a:r>
-              <a:rPr lang="en-US" sz="1500" dirty="0">
-                <a:solidFill>
-                  <a:srgbClr val="212121"/>
-                </a:solidFill>
-                <a:latin typeface="Calibri"/>
-              </a:rPr>
-              <a:t>	eq.-&gt; </a:t>
-            </a:r>
-            <a:r>
-              <a:rPr lang="en-US" sz="1500" dirty="0">
-                <a:solidFill>
-                  <a:srgbClr val="212121"/>
-                </a:solidFill>
-              </a:rPr>
-              <a:t>q = 1 − (d</a:t>
-            </a:r>
-            <a:r>
-              <a:rPr lang="el-GR" sz="1500" dirty="0">
-                <a:solidFill>
-                  <a:srgbClr val="212121"/>
-                </a:solidFill>
-              </a:rPr>
-              <a:t>τ/</a:t>
-            </a:r>
-            <a:r>
-              <a:rPr lang="en-US" sz="1500" dirty="0">
-                <a:solidFill>
-                  <a:srgbClr val="212121"/>
-                </a:solidFill>
-              </a:rPr>
-              <a:t>d</a:t>
-            </a:r>
-            <a:r>
-              <a:rPr lang="el-GR" sz="1500" dirty="0">
-                <a:solidFill>
-                  <a:srgbClr val="212121"/>
-                </a:solidFill>
-              </a:rPr>
-              <a:t>γ)/2μ</a:t>
-            </a:r>
-            <a:endParaRPr sz="1500" b="0" dirty="0">
-              <a:solidFill>
-                <a:srgbClr val="212121"/>
-              </a:solidFill>
-              <a:latin typeface="Calibri"/>
-            </a:endParaRPr>
-          </a:p>
-          <a:p>
-            <a:pPr>
-              <a:spcAft>
-                <a:spcPts val="1100"/>
-              </a:spcAft>
-            </a:pPr>
-            <a:r>
-              <a:rPr sz="1600" b="0" dirty="0">
-                <a:solidFill>
-                  <a:srgbClr val="1E2761"/>
-                </a:solidFill>
-                <a:latin typeface="Cambria Math"/>
-              </a:rPr>
-              <a:t>aging event   </a:t>
-            </a:r>
-            <a:r>
-              <a:rPr sz="1500" b="0" dirty="0">
-                <a:solidFill>
-                  <a:srgbClr val="212121"/>
-                </a:solidFill>
-                <a:latin typeface="Calibri"/>
-              </a:rPr>
-              <a:t>a step where u drops but </a:t>
-            </a:r>
-            <a:r>
-              <a:rPr sz="1500" b="0" dirty="0" err="1">
-                <a:solidFill>
-                  <a:srgbClr val="212121"/>
-                </a:solidFill>
-                <a:latin typeface="Calibri"/>
-              </a:rPr>
-              <a:t>τ</a:t>
-            </a:r>
-            <a:r>
-              <a:rPr sz="1500" b="0" dirty="0">
-                <a:solidFill>
-                  <a:srgbClr val="212121"/>
-                </a:solidFill>
-                <a:latin typeface="Calibri"/>
-              </a:rPr>
-              <a:t> does not (105,188); it relaxes energy without releasing stress</a:t>
-            </a:r>
-          </a:p>
-        </p:txBody>
-      </p:sp>
+      </p:pic>
     </p:spTree>
+    <p:extLst>
+      <p:ext uri="{BB962C8B-B14F-4D97-AF65-F5344CB8AC3E}">
+        <p14:creationId xmlns:p14="http://schemas.microsoft.com/office/powerpoint/2010/main" val="1062623640"/>
+      </p:ext>
+    </p:extLst>
   </p:cSld>
   <p:clrMapOvr>
     <a:masterClrMapping/>
@@ -4610,6 +5298,1282 @@
           <a:chExt cx="0" cy="0"/>
         </a:xfrm>
       </p:grpSpPr>
+      <p:pic>
+        <p:nvPicPr>
+          <p:cNvPr id="3" name="Picture 2">
+            <a:extLst>
+              <a:ext uri="{FF2B5EF4-FFF2-40B4-BE49-F238E27FC236}">
+                <a16:creationId xmlns:a16="http://schemas.microsoft.com/office/drawing/2014/main" id="{618DF928-620E-5150-16B6-DAF177D1222C}"/>
+              </a:ext>
+            </a:extLst>
+          </p:cNvPr>
+          <p:cNvPicPr>
+            <a:picLocks noChangeAspect="1"/>
+          </p:cNvPicPr>
+          <p:nvPr/>
+        </p:nvPicPr>
+        <p:blipFill>
+          <a:blip r:embed="rId2"/>
+          <a:stretch>
+            <a:fillRect/>
+          </a:stretch>
+        </p:blipFill>
+        <p:spPr>
+          <a:xfrm>
+            <a:off x="748921" y="603885"/>
+            <a:ext cx="10694158" cy="5650230"/>
+          </a:xfrm>
+          <a:prstGeom prst="rect">
+            <a:avLst/>
+          </a:prstGeom>
+        </p:spPr>
+      </p:pic>
+    </p:spTree>
+    <p:extLst>
+      <p:ext uri="{BB962C8B-B14F-4D97-AF65-F5344CB8AC3E}">
+        <p14:creationId xmlns:p14="http://schemas.microsoft.com/office/powerpoint/2010/main" val="2722914318"/>
+      </p:ext>
+    </p:extLst>
+  </p:cSld>
+  <p:clrMapOvr>
+    <a:masterClrMapping/>
+  </p:clrMapOvr>
+</p:sld>
+</file>
+
+<file path=ppt/slides/slide4.xml><?xml version="1.0" encoding="utf-8"?>
+<p:sld xmlns:a="http://schemas.openxmlformats.org/drawingml/2006/main" xmlns:r="http://schemas.openxmlformats.org/officeDocument/2006/relationships" xmlns:p="http://schemas.openxmlformats.org/presentationml/2006/main">
+  <p:cSld>
+    <p:spTree>
+      <p:nvGrpSpPr>
+        <p:cNvPr id="1" name=""/>
+        <p:cNvGrpSpPr/>
+        <p:nvPr/>
+      </p:nvGrpSpPr>
+      <p:grpSpPr>
+        <a:xfrm>
+          <a:off x="0" y="0"/>
+          <a:ext cx="0" cy="0"/>
+          <a:chOff x="0" y="0"/>
+          <a:chExt cx="0" cy="0"/>
+        </a:xfrm>
+      </p:grpSpPr>
+      <p:grpSp>
+        <p:nvGrpSpPr>
+          <p:cNvPr id="5" name="Group 4">
+            <a:extLst>
+              <a:ext uri="{FF2B5EF4-FFF2-40B4-BE49-F238E27FC236}">
+                <a16:creationId xmlns:a16="http://schemas.microsoft.com/office/drawing/2014/main" id="{71ED3E02-89F8-CBE8-0616-E295031E4CB3}"/>
+              </a:ext>
+            </a:extLst>
+          </p:cNvPr>
+          <p:cNvGrpSpPr/>
+          <p:nvPr/>
+        </p:nvGrpSpPr>
+        <p:grpSpPr>
+          <a:xfrm>
+            <a:off x="0" y="0"/>
+            <a:ext cx="6785610" cy="914624"/>
+            <a:chOff x="2091690" y="2312670"/>
+            <a:chExt cx="6785610" cy="914624"/>
+          </a:xfrm>
+        </p:grpSpPr>
+        <p:pic>
+          <p:nvPicPr>
+            <p:cNvPr id="2" name="Picture 1">
+              <a:extLst>
+                <a:ext uri="{FF2B5EF4-FFF2-40B4-BE49-F238E27FC236}">
+                  <a16:creationId xmlns:a16="http://schemas.microsoft.com/office/drawing/2014/main" id="{2B4D5B55-F1EF-1E32-59E7-8879AB6FB744}"/>
+                </a:ext>
+              </a:extLst>
+            </p:cNvPr>
+            <p:cNvPicPr>
+              <a:picLocks noChangeAspect="1"/>
+            </p:cNvPicPr>
+            <p:nvPr/>
+          </p:nvPicPr>
+          <p:blipFill>
+            <a:blip r:embed="rId2"/>
+            <a:srcRect t="-1" b="8369"/>
+            <a:stretch>
+              <a:fillRect/>
+            </a:stretch>
+          </p:blipFill>
+          <p:spPr>
+            <a:xfrm>
+              <a:off x="2628900" y="2715260"/>
+              <a:ext cx="6248400" cy="512034"/>
+            </a:xfrm>
+            <a:prstGeom prst="rect">
+              <a:avLst/>
+            </a:prstGeom>
+          </p:spPr>
+        </p:pic>
+        <p:pic>
+          <p:nvPicPr>
+            <p:cNvPr id="4" name="Picture 3">
+              <a:extLst>
+                <a:ext uri="{FF2B5EF4-FFF2-40B4-BE49-F238E27FC236}">
+                  <a16:creationId xmlns:a16="http://schemas.microsoft.com/office/drawing/2014/main" id="{DB278F5B-D3BF-CD2A-4AB6-6A4CB9505D97}"/>
+                </a:ext>
+              </a:extLst>
+            </p:cNvPr>
+            <p:cNvPicPr>
+              <a:picLocks noChangeAspect="1"/>
+            </p:cNvPicPr>
+            <p:nvPr/>
+          </p:nvPicPr>
+          <p:blipFill>
+            <a:blip r:embed="rId3"/>
+            <a:stretch>
+              <a:fillRect/>
+            </a:stretch>
+          </p:blipFill>
+          <p:spPr>
+            <a:xfrm>
+              <a:off x="2091690" y="2312670"/>
+              <a:ext cx="3048000" cy="647700"/>
+            </a:xfrm>
+            <a:prstGeom prst="rect">
+              <a:avLst/>
+            </a:prstGeom>
+          </p:spPr>
+        </p:pic>
+      </p:grpSp>
+      <p:sp>
+        <p:nvSpPr>
+          <p:cNvPr id="6" name="TextBox 5">
+            <a:extLst>
+              <a:ext uri="{FF2B5EF4-FFF2-40B4-BE49-F238E27FC236}">
+                <a16:creationId xmlns:a16="http://schemas.microsoft.com/office/drawing/2014/main" id="{C7C8B0C8-CB97-3B61-B118-AAFB741DAEB0}"/>
+              </a:ext>
+            </a:extLst>
+          </p:cNvPr>
+          <p:cNvSpPr txBox="1"/>
+          <p:nvPr/>
+        </p:nvSpPr>
+        <p:spPr>
+          <a:xfrm>
+            <a:off x="5503209" y="1132548"/>
+            <a:ext cx="2196692" cy="369332"/>
+          </a:xfrm>
+          <a:prstGeom prst="rect">
+            <a:avLst/>
+          </a:prstGeom>
+          <a:noFill/>
+        </p:spPr>
+        <p:txBody>
+          <a:bodyPr wrap="none" rtlCol="0">
+            <a:spAutoFit/>
+          </a:bodyPr>
+          <a:lstStyle/>
+          <a:p>
+            <a:r>
+              <a:rPr lang="en-US" b="1" dirty="0"/>
+              <a:t>Truncated power law</a:t>
+            </a:r>
+          </a:p>
+        </p:txBody>
+      </p:sp>
+      <p:cxnSp>
+        <p:nvCxnSpPr>
+          <p:cNvPr id="8" name="Straight Arrow Connector 7">
+            <a:extLst>
+              <a:ext uri="{FF2B5EF4-FFF2-40B4-BE49-F238E27FC236}">
+                <a16:creationId xmlns:a16="http://schemas.microsoft.com/office/drawing/2014/main" id="{B1661309-06C9-CDCD-7642-2067366BA790}"/>
+              </a:ext>
+            </a:extLst>
+          </p:cNvPr>
+          <p:cNvCxnSpPr/>
+          <p:nvPr/>
+        </p:nvCxnSpPr>
+        <p:spPr>
+          <a:xfrm flipH="1" flipV="1">
+            <a:off x="4931709" y="1023586"/>
+            <a:ext cx="571500" cy="217924"/>
+          </a:xfrm>
+          <a:prstGeom prst="straightConnector1">
+            <a:avLst/>
+          </a:prstGeom>
+          <a:ln>
+            <a:tailEnd type="triangle"/>
+          </a:ln>
+        </p:spPr>
+        <p:style>
+          <a:lnRef idx="2">
+            <a:schemeClr val="accent1"/>
+          </a:lnRef>
+          <a:fillRef idx="0">
+            <a:schemeClr val="accent1"/>
+          </a:fillRef>
+          <a:effectRef idx="1">
+            <a:schemeClr val="accent1"/>
+          </a:effectRef>
+          <a:fontRef idx="minor">
+            <a:schemeClr val="tx1"/>
+          </a:fontRef>
+        </p:style>
+      </p:cxnSp>
+      <p:cxnSp>
+        <p:nvCxnSpPr>
+          <p:cNvPr id="10" name="Straight Connector 9">
+            <a:extLst>
+              <a:ext uri="{FF2B5EF4-FFF2-40B4-BE49-F238E27FC236}">
+                <a16:creationId xmlns:a16="http://schemas.microsoft.com/office/drawing/2014/main" id="{8E661651-B1C7-34B4-2245-7E76A8DED53C}"/>
+              </a:ext>
+            </a:extLst>
+          </p:cNvPr>
+          <p:cNvCxnSpPr/>
+          <p:nvPr/>
+        </p:nvCxnSpPr>
+        <p:spPr>
+          <a:xfrm>
+            <a:off x="3491529" y="951012"/>
+            <a:ext cx="2274570" cy="0"/>
+          </a:xfrm>
+          <a:prstGeom prst="line">
+            <a:avLst/>
+          </a:prstGeom>
+        </p:spPr>
+        <p:style>
+          <a:lnRef idx="2">
+            <a:schemeClr val="accent1"/>
+          </a:lnRef>
+          <a:fillRef idx="0">
+            <a:schemeClr val="accent1"/>
+          </a:fillRef>
+          <a:effectRef idx="1">
+            <a:schemeClr val="accent1"/>
+          </a:effectRef>
+          <a:fontRef idx="minor">
+            <a:schemeClr val="tx1"/>
+          </a:fontRef>
+        </p:style>
+      </p:cxnSp>
+      <p:sp>
+        <p:nvSpPr>
+          <p:cNvPr id="14" name="TextBox 13">
+            <a:extLst>
+              <a:ext uri="{FF2B5EF4-FFF2-40B4-BE49-F238E27FC236}">
+                <a16:creationId xmlns:a16="http://schemas.microsoft.com/office/drawing/2014/main" id="{A58133CD-C581-EAAD-2C79-B487D2B9B9D9}"/>
+              </a:ext>
+            </a:extLst>
+          </p:cNvPr>
+          <p:cNvSpPr txBox="1"/>
+          <p:nvPr/>
+        </p:nvSpPr>
+        <p:spPr>
+          <a:xfrm>
+            <a:off x="3736658" y="1575479"/>
+            <a:ext cx="6097904" cy="369332"/>
+          </a:xfrm>
+          <a:prstGeom prst="rect">
+            <a:avLst/>
+          </a:prstGeom>
+          <a:noFill/>
+        </p:spPr>
+        <p:txBody>
+          <a:bodyPr wrap="square">
+            <a:spAutoFit/>
+          </a:bodyPr>
+          <a:lstStyle/>
+          <a:p>
+            <a:r>
+              <a:rPr lang="en-US" b="1" dirty="0"/>
+              <a:t>“we find that a simple exponential tail does not fit our data.”</a:t>
+            </a:r>
+          </a:p>
+        </p:txBody>
+      </p:sp>
+      <p:grpSp>
+        <p:nvGrpSpPr>
+          <p:cNvPr id="17" name="Group 16">
+            <a:extLst>
+              <a:ext uri="{FF2B5EF4-FFF2-40B4-BE49-F238E27FC236}">
+                <a16:creationId xmlns:a16="http://schemas.microsoft.com/office/drawing/2014/main" id="{F1F8297E-6DE9-015C-5677-EEFEACE21229}"/>
+              </a:ext>
+            </a:extLst>
+          </p:cNvPr>
+          <p:cNvGrpSpPr/>
+          <p:nvPr/>
+        </p:nvGrpSpPr>
+        <p:grpSpPr>
+          <a:xfrm>
+            <a:off x="3491529" y="2018410"/>
+            <a:ext cx="5975032" cy="4840168"/>
+            <a:chOff x="3736658" y="2006151"/>
+            <a:chExt cx="5975032" cy="4840168"/>
+          </a:xfrm>
+        </p:grpSpPr>
+        <p:pic>
+          <p:nvPicPr>
+            <p:cNvPr id="12" name="Picture 11">
+              <a:extLst>
+                <a:ext uri="{FF2B5EF4-FFF2-40B4-BE49-F238E27FC236}">
+                  <a16:creationId xmlns:a16="http://schemas.microsoft.com/office/drawing/2014/main" id="{268981AE-42DC-5848-D612-D1B4CCEF9DD8}"/>
+                </a:ext>
+              </a:extLst>
+            </p:cNvPr>
+            <p:cNvPicPr>
+              <a:picLocks noChangeAspect="1"/>
+            </p:cNvPicPr>
+            <p:nvPr/>
+          </p:nvPicPr>
+          <p:blipFill>
+            <a:blip r:embed="rId4"/>
+            <a:srcRect t="1069" b="1"/>
+            <a:stretch>
+              <a:fillRect/>
+            </a:stretch>
+          </p:blipFill>
+          <p:spPr>
+            <a:xfrm>
+              <a:off x="3859530" y="2327632"/>
+              <a:ext cx="5852160" cy="4518687"/>
+            </a:xfrm>
+            <a:prstGeom prst="rect">
+              <a:avLst/>
+            </a:prstGeom>
+          </p:spPr>
+        </p:pic>
+        <p:pic>
+          <p:nvPicPr>
+            <p:cNvPr id="16" name="Picture 15">
+              <a:extLst>
+                <a:ext uri="{FF2B5EF4-FFF2-40B4-BE49-F238E27FC236}">
+                  <a16:creationId xmlns:a16="http://schemas.microsoft.com/office/drawing/2014/main" id="{CF2C66DA-6313-68C6-8DCC-986ABD024676}"/>
+                </a:ext>
+              </a:extLst>
+            </p:cNvPr>
+            <p:cNvPicPr>
+              <a:picLocks noChangeAspect="1"/>
+            </p:cNvPicPr>
+            <p:nvPr/>
+          </p:nvPicPr>
+          <p:blipFill>
+            <a:blip r:embed="rId5"/>
+            <a:stretch>
+              <a:fillRect/>
+            </a:stretch>
+          </p:blipFill>
+          <p:spPr>
+            <a:xfrm>
+              <a:off x="3736658" y="2006151"/>
+              <a:ext cx="647700" cy="520700"/>
+            </a:xfrm>
+            <a:prstGeom prst="rect">
+              <a:avLst/>
+            </a:prstGeom>
+          </p:spPr>
+        </p:pic>
+      </p:grpSp>
+      <p:cxnSp>
+        <p:nvCxnSpPr>
+          <p:cNvPr id="19" name="Straight Connector 18">
+            <a:extLst>
+              <a:ext uri="{FF2B5EF4-FFF2-40B4-BE49-F238E27FC236}">
+                <a16:creationId xmlns:a16="http://schemas.microsoft.com/office/drawing/2014/main" id="{1D21D286-4AB7-B23B-A0B1-405099AE2D74}"/>
+              </a:ext>
+            </a:extLst>
+          </p:cNvPr>
+          <p:cNvCxnSpPr>
+            <a:cxnSpLocks/>
+          </p:cNvCxnSpPr>
+          <p:nvPr/>
+        </p:nvCxnSpPr>
+        <p:spPr>
+          <a:xfrm>
+            <a:off x="8381999" y="2539110"/>
+            <a:ext cx="1042997" cy="0"/>
+          </a:xfrm>
+          <a:prstGeom prst="line">
+            <a:avLst/>
+          </a:prstGeom>
+        </p:spPr>
+        <p:style>
+          <a:lnRef idx="2">
+            <a:schemeClr val="accent1"/>
+          </a:lnRef>
+          <a:fillRef idx="0">
+            <a:schemeClr val="accent1"/>
+          </a:fillRef>
+          <a:effectRef idx="1">
+            <a:schemeClr val="accent1"/>
+          </a:effectRef>
+          <a:fontRef idx="minor">
+            <a:schemeClr val="tx1"/>
+          </a:fontRef>
+        </p:style>
+      </p:cxnSp>
+    </p:spTree>
+    <p:extLst>
+      <p:ext uri="{BB962C8B-B14F-4D97-AF65-F5344CB8AC3E}">
+        <p14:creationId xmlns:p14="http://schemas.microsoft.com/office/powerpoint/2010/main" val="1975909919"/>
+      </p:ext>
+    </p:extLst>
+  </p:cSld>
+  <p:clrMapOvr>
+    <a:masterClrMapping/>
+  </p:clrMapOvr>
+</p:sld>
+</file>
+
+<file path=ppt/slides/slide5.xml><?xml version="1.0" encoding="utf-8"?>
+<p:sld xmlns:a="http://schemas.openxmlformats.org/drawingml/2006/main" xmlns:r="http://schemas.openxmlformats.org/officeDocument/2006/relationships" xmlns:p="http://schemas.openxmlformats.org/presentationml/2006/main">
+  <p:cSld>
+    <p:spTree>
+      <p:nvGrpSpPr>
+        <p:cNvPr id="1" name=""/>
+        <p:cNvGrpSpPr/>
+        <p:nvPr/>
+      </p:nvGrpSpPr>
+      <p:grpSpPr>
+        <a:xfrm>
+          <a:off x="0" y="0"/>
+          <a:ext cx="0" cy="0"/>
+          <a:chOff x="0" y="0"/>
+          <a:chExt cx="0" cy="0"/>
+        </a:xfrm>
+      </p:grpSpPr>
+      <p:sp>
+        <p:nvSpPr>
+          <p:cNvPr id="2" name="TextBox 1"/>
+          <p:cNvSpPr txBox="1"/>
+          <p:nvPr/>
+        </p:nvSpPr>
+        <p:spPr>
+          <a:xfrm>
+            <a:off x="548640" y="292608"/>
+            <a:ext cx="11091672" cy="461665"/>
+          </a:xfrm>
+          <a:prstGeom prst="rect">
+            <a:avLst/>
+          </a:prstGeom>
+          <a:noFill/>
+        </p:spPr>
+        <p:txBody>
+          <a:bodyPr wrap="square" lIns="0" tIns="0" rIns="0" bIns="0">
+            <a:spAutoFit/>
+          </a:bodyPr>
+          <a:lstStyle/>
+          <a:p>
+            <a:r>
+              <a:rPr lang="en-US" sz="3000" b="1" dirty="0">
+                <a:solidFill>
+                  <a:srgbClr val="1E2761"/>
+                </a:solidFill>
+                <a:latin typeface="Calibri"/>
+              </a:rPr>
+              <a:t>Variables</a:t>
+            </a:r>
+            <a:endParaRPr sz="3000" b="1" dirty="0">
+              <a:solidFill>
+                <a:srgbClr val="1E2761"/>
+              </a:solidFill>
+              <a:latin typeface="Calibri"/>
+            </a:endParaRPr>
+          </a:p>
+        </p:txBody>
+      </p:sp>
+      <p:sp>
+        <p:nvSpPr>
+          <p:cNvPr id="3" name="TextBox 2"/>
+          <p:cNvSpPr txBox="1"/>
+          <p:nvPr/>
+        </p:nvSpPr>
+        <p:spPr>
+          <a:xfrm>
+            <a:off x="640080" y="1234440"/>
+            <a:ext cx="5394960" cy="2182649"/>
+          </a:xfrm>
+          <a:prstGeom prst="rect">
+            <a:avLst/>
+          </a:prstGeom>
+          <a:noFill/>
+        </p:spPr>
+        <p:txBody>
+          <a:bodyPr wrap="square" lIns="0" tIns="0" rIns="0" bIns="0">
+            <a:spAutoFit/>
+          </a:bodyPr>
+          <a:lstStyle/>
+          <a:p>
+            <a:pPr>
+              <a:spcAft>
+                <a:spcPts val="1100"/>
+              </a:spcAft>
+            </a:pPr>
+            <a:r>
+              <a:rPr sz="1600" b="0" dirty="0" err="1">
+                <a:solidFill>
+                  <a:srgbClr val="1E2761"/>
+                </a:solidFill>
+                <a:latin typeface="Cambria Math"/>
+              </a:rPr>
+              <a:t>γ</a:t>
+            </a:r>
+            <a:r>
+              <a:rPr sz="1600" b="0" dirty="0">
+                <a:solidFill>
+                  <a:srgbClr val="1E2761"/>
+                </a:solidFill>
+                <a:latin typeface="Cambria Math"/>
+              </a:rPr>
+              <a:t>   </a:t>
+            </a:r>
+            <a:r>
+              <a:rPr sz="1500" b="0" dirty="0">
+                <a:solidFill>
+                  <a:srgbClr val="212121"/>
+                </a:solidFill>
+                <a:latin typeface="Calibri"/>
+              </a:rPr>
+              <a:t>applied shear strain; one step is 10⁻⁵, runs go to 0.5</a:t>
+            </a:r>
+          </a:p>
+          <a:p>
+            <a:pPr>
+              <a:spcAft>
+                <a:spcPts val="1100"/>
+              </a:spcAft>
+            </a:pPr>
+            <a:r>
+              <a:rPr sz="1600" b="0" dirty="0" err="1">
+                <a:solidFill>
+                  <a:srgbClr val="1E2761"/>
+                </a:solidFill>
+                <a:latin typeface="Cambria Math"/>
+              </a:rPr>
+              <a:t>τ</a:t>
+            </a:r>
+            <a:r>
+              <a:rPr sz="1600" b="0" dirty="0">
+                <a:solidFill>
+                  <a:srgbClr val="1E2761"/>
+                </a:solidFill>
+                <a:latin typeface="Cambria Math"/>
+              </a:rPr>
+              <a:t>   </a:t>
+            </a:r>
+            <a:r>
+              <a:rPr sz="1500" b="0" dirty="0">
+                <a:solidFill>
+                  <a:srgbClr val="212121"/>
+                </a:solidFill>
+                <a:latin typeface="Calibri"/>
+              </a:rPr>
+              <a:t>shear stress (raw stress ÷ 10⁴)</a:t>
+            </a:r>
+          </a:p>
+          <a:p>
+            <a:pPr>
+              <a:spcAft>
+                <a:spcPts val="1100"/>
+              </a:spcAft>
+            </a:pPr>
+            <a:r>
+              <a:rPr sz="1600" b="0" dirty="0">
+                <a:solidFill>
+                  <a:srgbClr val="1E2761"/>
+                </a:solidFill>
+                <a:latin typeface="Cambria Math"/>
+              </a:rPr>
+              <a:t>u = pe − u₀   </a:t>
+            </a:r>
+            <a:r>
+              <a:rPr lang="en-US" sz="1500" b="0" dirty="0">
+                <a:solidFill>
+                  <a:srgbClr val="212121"/>
+                </a:solidFill>
+                <a:latin typeface="Calibri"/>
+              </a:rPr>
+              <a:t>PE/</a:t>
+            </a:r>
+            <a:r>
+              <a:rPr sz="1500" b="0" dirty="0">
+                <a:solidFill>
+                  <a:srgbClr val="212121"/>
+                </a:solidFill>
+                <a:latin typeface="Calibri"/>
+              </a:rPr>
+              <a:t>atom above the reference u₀ = −4.60752</a:t>
+            </a:r>
+          </a:p>
+          <a:p>
+            <a:pPr>
+              <a:spcAft>
+                <a:spcPts val="1100"/>
+              </a:spcAft>
+            </a:pPr>
+            <a:r>
+              <a:rPr sz="1600" b="0" dirty="0">
+                <a:solidFill>
+                  <a:srgbClr val="1E2761"/>
+                </a:solidFill>
+                <a:latin typeface="Cambria Math"/>
+              </a:rPr>
+              <a:t>(u, </a:t>
+            </a:r>
+            <a:r>
+              <a:rPr sz="1600" b="0" dirty="0" err="1">
+                <a:solidFill>
+                  <a:srgbClr val="1E2761"/>
+                </a:solidFill>
+                <a:latin typeface="Cambria Math"/>
+              </a:rPr>
+              <a:t>τ</a:t>
+            </a:r>
+            <a:r>
+              <a:rPr sz="1600" b="0" dirty="0">
+                <a:solidFill>
+                  <a:srgbClr val="1E2761"/>
+                </a:solidFill>
+                <a:latin typeface="Cambria Math"/>
+              </a:rPr>
+              <a:t>) </a:t>
+            </a:r>
+            <a:r>
+              <a:rPr sz="1500" b="0" dirty="0">
+                <a:solidFill>
+                  <a:srgbClr val="212121"/>
+                </a:solidFill>
+                <a:latin typeface="Calibri"/>
+              </a:rPr>
+              <a:t>two-coordinate state of a run; 20 × 20 grid</a:t>
+            </a:r>
+          </a:p>
+          <a:p>
+            <a:pPr>
+              <a:spcAft>
+                <a:spcPts val="1100"/>
+              </a:spcAft>
+            </a:pPr>
+            <a:r>
+              <a:rPr sz="1600" b="0" dirty="0">
+                <a:solidFill>
+                  <a:srgbClr val="1E2761"/>
+                </a:solidFill>
+                <a:latin typeface="Cambria Math"/>
+              </a:rPr>
+              <a:t>2μ(u, </a:t>
+            </a:r>
+            <a:r>
+              <a:rPr sz="1600" b="0" dirty="0" err="1">
+                <a:solidFill>
+                  <a:srgbClr val="1E2761"/>
+                </a:solidFill>
+                <a:latin typeface="Cambria Math"/>
+              </a:rPr>
+              <a:t>τ</a:t>
+            </a:r>
+            <a:r>
+              <a:rPr sz="1600" b="0" dirty="0">
+                <a:solidFill>
+                  <a:srgbClr val="1E2761"/>
+                </a:solidFill>
+                <a:latin typeface="Cambria Math"/>
+              </a:rPr>
+              <a:t>)   </a:t>
+            </a:r>
+            <a:r>
+              <a:rPr sz="1500" b="0" dirty="0">
+                <a:solidFill>
+                  <a:srgbClr val="212121"/>
+                </a:solidFill>
+                <a:latin typeface="Calibri"/>
+              </a:rPr>
+              <a:t>elastic modulus</a:t>
+            </a:r>
+          </a:p>
+          <a:p>
+            <a:pPr>
+              <a:spcAft>
+                <a:spcPts val="1100"/>
+              </a:spcAft>
+            </a:pPr>
+            <a:r>
+              <a:rPr sz="1600" b="0" dirty="0">
+                <a:solidFill>
+                  <a:srgbClr val="1E2761"/>
+                </a:solidFill>
+                <a:latin typeface="Cambria Math"/>
+              </a:rPr>
+              <a:t>s = −</a:t>
+            </a:r>
+            <a:r>
+              <a:rPr sz="1600" b="0" dirty="0" err="1">
+                <a:solidFill>
+                  <a:srgbClr val="1E2761"/>
+                </a:solidFill>
+                <a:latin typeface="Cambria Math"/>
+              </a:rPr>
+              <a:t>Δτ</a:t>
+            </a:r>
+            <a:r>
+              <a:rPr sz="1600" b="0" dirty="0">
+                <a:solidFill>
+                  <a:srgbClr val="1E2761"/>
+                </a:solidFill>
+                <a:latin typeface="Cambria Math"/>
+              </a:rPr>
+              <a:t> </a:t>
+            </a:r>
+            <a:r>
+              <a:rPr lang="en-US" sz="1600" b="0" dirty="0">
+                <a:solidFill>
+                  <a:srgbClr val="1E2761"/>
+                </a:solidFill>
+                <a:latin typeface="Cambria Math"/>
+              </a:rPr>
+              <a:t>  </a:t>
+            </a:r>
+            <a:r>
+              <a:rPr lang="en-US" sz="1500" b="0" dirty="0">
+                <a:solidFill>
+                  <a:srgbClr val="212121"/>
+                </a:solidFill>
+                <a:latin typeface="Calibri"/>
+              </a:rPr>
+              <a:t>an </a:t>
+            </a:r>
+            <a:r>
+              <a:rPr sz="1500" b="0" dirty="0">
+                <a:solidFill>
+                  <a:srgbClr val="212121"/>
+                </a:solidFill>
+                <a:latin typeface="Calibri"/>
+              </a:rPr>
+              <a:t>event: a step where the stress drops, of size s</a:t>
+            </a:r>
+          </a:p>
+        </p:txBody>
+      </p:sp>
+      <p:sp>
+        <p:nvSpPr>
+          <p:cNvPr id="4" name="TextBox 3"/>
+          <p:cNvSpPr txBox="1"/>
+          <p:nvPr/>
+        </p:nvSpPr>
+        <p:spPr>
+          <a:xfrm>
+            <a:off x="6355080" y="1234440"/>
+            <a:ext cx="5303520" cy="3172663"/>
+          </a:xfrm>
+          <a:prstGeom prst="rect">
+            <a:avLst/>
+          </a:prstGeom>
+          <a:noFill/>
+        </p:spPr>
+        <p:txBody>
+          <a:bodyPr wrap="square" lIns="0" tIns="0" rIns="0" bIns="0">
+            <a:spAutoFit/>
+          </a:bodyPr>
+          <a:lstStyle/>
+          <a:p>
+            <a:pPr>
+              <a:spcAft>
+                <a:spcPts val="1100"/>
+              </a:spcAft>
+            </a:pPr>
+            <a:r>
+              <a:rPr lang="el-GR" sz="1600" dirty="0">
+                <a:solidFill>
+                  <a:srgbClr val="1E2761"/>
+                </a:solidFill>
+                <a:latin typeface="Cambria Math"/>
+              </a:rPr>
+              <a:t>ρ(</a:t>
+            </a:r>
+            <a:r>
+              <a:rPr lang="en-US" sz="1600" dirty="0">
+                <a:solidFill>
+                  <a:srgbClr val="1E2761"/>
+                </a:solidFill>
+                <a:latin typeface="Cambria Math"/>
+              </a:rPr>
+              <a:t>s) </a:t>
+            </a:r>
+            <a:r>
+              <a:rPr lang="en-US" sz="1600" b="1" dirty="0">
+                <a:solidFill>
+                  <a:srgbClr val="212121"/>
+                </a:solidFill>
+              </a:rPr>
+              <a:t>density of events </a:t>
+            </a:r>
+            <a:r>
+              <a:rPr lang="en-US" sz="1600" dirty="0">
+                <a:solidFill>
+                  <a:srgbClr val="212121"/>
+                </a:solidFill>
+              </a:rPr>
+              <a:t>of size s</a:t>
+            </a:r>
+            <a:endParaRPr lang="en-US" sz="1600" b="0" dirty="0">
+              <a:solidFill>
+                <a:srgbClr val="1E2761"/>
+              </a:solidFill>
+              <a:latin typeface="Cambria Math"/>
+            </a:endParaRPr>
+          </a:p>
+          <a:p>
+            <a:pPr>
+              <a:spcAft>
+                <a:spcPts val="1100"/>
+              </a:spcAft>
+            </a:pPr>
+            <a:r>
+              <a:rPr sz="1600" b="0" dirty="0">
+                <a:solidFill>
+                  <a:srgbClr val="1E2761"/>
+                </a:solidFill>
+                <a:latin typeface="Cambria Math"/>
+              </a:rPr>
+              <a:t>p(u, </a:t>
+            </a:r>
+            <a:r>
+              <a:rPr sz="1600" b="0" dirty="0" err="1">
+                <a:solidFill>
+                  <a:srgbClr val="1E2761"/>
+                </a:solidFill>
+                <a:latin typeface="Cambria Math"/>
+              </a:rPr>
+              <a:t>τ</a:t>
+            </a:r>
+            <a:r>
+              <a:rPr sz="1600" b="0" dirty="0">
+                <a:solidFill>
+                  <a:srgbClr val="1E2761"/>
+                </a:solidFill>
+                <a:latin typeface="Cambria Math"/>
+              </a:rPr>
+              <a:t>) </a:t>
+            </a:r>
+            <a:r>
+              <a:rPr sz="1500" b="1" dirty="0">
+                <a:solidFill>
+                  <a:srgbClr val="212121"/>
+                </a:solidFill>
+                <a:latin typeface="Calibri"/>
+              </a:rPr>
+              <a:t>probability per step </a:t>
+            </a:r>
+            <a:r>
+              <a:rPr sz="1500" b="0" dirty="0">
+                <a:solidFill>
+                  <a:srgbClr val="212121"/>
+                </a:solidFill>
+                <a:latin typeface="Calibri"/>
+              </a:rPr>
+              <a:t>that an </a:t>
+            </a:r>
+            <a:r>
+              <a:rPr lang="en-US" sz="1500" b="0" dirty="0">
+                <a:solidFill>
+                  <a:srgbClr val="212121"/>
+                </a:solidFill>
+                <a:latin typeface="Calibri"/>
+              </a:rPr>
+              <a:t>event occurs</a:t>
+            </a:r>
+            <a:endParaRPr sz="1500" b="0" dirty="0">
+              <a:solidFill>
+                <a:srgbClr val="212121"/>
+              </a:solidFill>
+              <a:latin typeface="Calibri"/>
+            </a:endParaRPr>
+          </a:p>
+          <a:p>
+            <a:pPr>
+              <a:spcAft>
+                <a:spcPts val="1100"/>
+              </a:spcAft>
+            </a:pPr>
+            <a:r>
+              <a:rPr sz="1600" b="0" dirty="0">
+                <a:solidFill>
+                  <a:srgbClr val="1E2761"/>
+                </a:solidFill>
+                <a:latin typeface="Cambria Math"/>
+              </a:rPr>
+              <a:t>P(s | u, </a:t>
+            </a:r>
+            <a:r>
+              <a:rPr sz="1600" b="0" dirty="0" err="1">
+                <a:solidFill>
+                  <a:srgbClr val="1E2761"/>
+                </a:solidFill>
+                <a:latin typeface="Cambria Math"/>
+              </a:rPr>
+              <a:t>τ</a:t>
+            </a:r>
+            <a:r>
+              <a:rPr sz="1600" b="0" dirty="0">
+                <a:solidFill>
+                  <a:srgbClr val="1E2761"/>
+                </a:solidFill>
+                <a:latin typeface="Cambria Math"/>
+              </a:rPr>
+              <a:t>) </a:t>
+            </a:r>
+            <a:r>
+              <a:rPr sz="1500" b="1" dirty="0">
+                <a:solidFill>
+                  <a:srgbClr val="212121"/>
+                </a:solidFill>
+                <a:latin typeface="Calibri"/>
+              </a:rPr>
+              <a:t>size distribution of events </a:t>
+            </a:r>
+            <a:r>
+              <a:rPr sz="1500" b="0" dirty="0">
+                <a:solidFill>
+                  <a:srgbClr val="212121"/>
+                </a:solidFill>
+                <a:latin typeface="Calibri"/>
+              </a:rPr>
+              <a:t>at a given state</a:t>
+            </a:r>
+          </a:p>
+          <a:p>
+            <a:pPr>
+              <a:spcAft>
+                <a:spcPts val="1100"/>
+              </a:spcAft>
+            </a:pPr>
+            <a:r>
+              <a:rPr sz="1600" b="0" dirty="0" err="1">
+                <a:solidFill>
+                  <a:srgbClr val="1E2761"/>
+                </a:solidFill>
+                <a:latin typeface="Cambria Math"/>
+              </a:rPr>
+              <a:t>s_c</a:t>
+            </a:r>
+            <a:r>
+              <a:rPr sz="1600" b="0" dirty="0">
+                <a:solidFill>
+                  <a:srgbClr val="1E2761"/>
+                </a:solidFill>
+                <a:latin typeface="Cambria Math"/>
+              </a:rPr>
+              <a:t>(u, </a:t>
+            </a:r>
+            <a:r>
+              <a:rPr sz="1600" b="0" dirty="0" err="1">
+                <a:solidFill>
+                  <a:srgbClr val="1E2761"/>
+                </a:solidFill>
+                <a:latin typeface="Cambria Math"/>
+              </a:rPr>
+              <a:t>τ</a:t>
+            </a:r>
+            <a:r>
+              <a:rPr sz="1600" b="0" dirty="0">
+                <a:solidFill>
+                  <a:srgbClr val="1E2761"/>
+                </a:solidFill>
+                <a:latin typeface="Cambria Math"/>
+              </a:rPr>
+              <a:t>) </a:t>
+            </a:r>
+            <a:r>
+              <a:rPr sz="1500" b="1" dirty="0">
+                <a:solidFill>
+                  <a:srgbClr val="212121"/>
+                </a:solidFill>
+                <a:latin typeface="Calibri"/>
+              </a:rPr>
+              <a:t>the largest event </a:t>
+            </a:r>
+            <a:r>
+              <a:rPr sz="1500" b="0" dirty="0">
+                <a:solidFill>
+                  <a:srgbClr val="212121"/>
+                </a:solidFill>
+                <a:latin typeface="Calibri"/>
+              </a:rPr>
+              <a:t>a state can produce</a:t>
+            </a:r>
+          </a:p>
+          <a:p>
+            <a:pPr>
+              <a:spcAft>
+                <a:spcPts val="1100"/>
+              </a:spcAft>
+            </a:pPr>
+            <a:r>
+              <a:rPr sz="1600" b="0" dirty="0">
+                <a:solidFill>
+                  <a:srgbClr val="1E2761"/>
+                </a:solidFill>
+                <a:latin typeface="Cambria Math"/>
+              </a:rPr>
+              <a:t>k, m, </a:t>
+            </a:r>
+            <a:r>
+              <a:rPr sz="1600" b="0" dirty="0" err="1">
+                <a:solidFill>
+                  <a:srgbClr val="1E2761"/>
+                </a:solidFill>
+                <a:latin typeface="Cambria Math"/>
+              </a:rPr>
+              <a:t>ε</a:t>
+            </a:r>
+            <a:r>
+              <a:rPr sz="1600" b="0" dirty="0">
+                <a:solidFill>
+                  <a:srgbClr val="1E2761"/>
+                </a:solidFill>
+                <a:latin typeface="Cambria Math"/>
+              </a:rPr>
+              <a:t>   </a:t>
+            </a:r>
+            <a:r>
+              <a:rPr sz="1500" b="1" dirty="0">
+                <a:solidFill>
+                  <a:srgbClr val="212121"/>
+                </a:solidFill>
+                <a:latin typeface="Calibri"/>
+              </a:rPr>
+              <a:t>constants </a:t>
+            </a:r>
+            <a:endParaRPr lang="en-US" sz="1500" b="1" dirty="0">
+              <a:solidFill>
+                <a:srgbClr val="212121"/>
+              </a:solidFill>
+              <a:latin typeface="Calibri"/>
+            </a:endParaRPr>
+          </a:p>
+          <a:p>
+            <a:pPr>
+              <a:spcAft>
+                <a:spcPts val="1100"/>
+              </a:spcAft>
+            </a:pPr>
+            <a:r>
+              <a:rPr sz="1600" b="0" dirty="0">
+                <a:solidFill>
+                  <a:srgbClr val="1E2761"/>
+                </a:solidFill>
+                <a:latin typeface="Cambria Math"/>
+              </a:rPr>
+              <a:t>q(u, </a:t>
+            </a:r>
+            <a:r>
+              <a:rPr sz="1600" b="0" dirty="0" err="1">
+                <a:solidFill>
+                  <a:srgbClr val="1E2761"/>
+                </a:solidFill>
+                <a:latin typeface="Cambria Math"/>
+              </a:rPr>
+              <a:t>τ</a:t>
+            </a:r>
+            <a:r>
+              <a:rPr sz="1600" b="0" dirty="0">
+                <a:solidFill>
+                  <a:srgbClr val="1E2761"/>
+                </a:solidFill>
+                <a:latin typeface="Cambria Math"/>
+              </a:rPr>
+              <a:t>)   </a:t>
+            </a:r>
+            <a:r>
+              <a:rPr sz="1500" b="0" dirty="0">
+                <a:solidFill>
+                  <a:srgbClr val="212121"/>
+                </a:solidFill>
+                <a:latin typeface="Calibri"/>
+              </a:rPr>
+              <a:t>plastic fraction of the strain rate</a:t>
+            </a:r>
+            <a:r>
+              <a:rPr lang="en-US" sz="1500" dirty="0">
+                <a:solidFill>
+                  <a:srgbClr val="212121"/>
+                </a:solidFill>
+                <a:latin typeface="Calibri"/>
+              </a:rPr>
+              <a:t>:</a:t>
+            </a:r>
+            <a:r>
+              <a:rPr sz="1500" b="0" dirty="0">
+                <a:solidFill>
+                  <a:srgbClr val="212121"/>
+                </a:solidFill>
+                <a:latin typeface="Calibri"/>
+              </a:rPr>
+              <a:t> 0</a:t>
+            </a:r>
+            <a:r>
+              <a:rPr lang="en-US" sz="1500" b="0" dirty="0">
+                <a:solidFill>
+                  <a:srgbClr val="212121"/>
+                </a:solidFill>
+                <a:latin typeface="Calibri"/>
+              </a:rPr>
+              <a:t>-&gt;</a:t>
+            </a:r>
+            <a:r>
+              <a:rPr sz="1500" b="0" dirty="0">
+                <a:solidFill>
+                  <a:srgbClr val="212121"/>
+                </a:solidFill>
+                <a:latin typeface="Calibri"/>
+              </a:rPr>
+              <a:t>elastic, 1</a:t>
+            </a:r>
+            <a:r>
+              <a:rPr lang="en-US" sz="1500" b="0" dirty="0">
+                <a:solidFill>
+                  <a:srgbClr val="212121"/>
+                </a:solidFill>
+                <a:latin typeface="Calibri"/>
+              </a:rPr>
+              <a:t>-&gt;</a:t>
+            </a:r>
+            <a:r>
+              <a:rPr sz="1500" b="0" dirty="0">
+                <a:solidFill>
+                  <a:srgbClr val="212121"/>
+                </a:solidFill>
+                <a:latin typeface="Calibri"/>
+              </a:rPr>
+              <a:t>steady </a:t>
+            </a:r>
+            <a:r>
+              <a:rPr lang="en-US" sz="1500" b="0" dirty="0">
+                <a:solidFill>
+                  <a:srgbClr val="212121"/>
+                </a:solidFill>
+                <a:latin typeface="Calibri"/>
+              </a:rPr>
+              <a:t>state</a:t>
+            </a:r>
+          </a:p>
+          <a:p>
+            <a:pPr>
+              <a:spcAft>
+                <a:spcPts val="1100"/>
+              </a:spcAft>
+            </a:pPr>
+            <a:r>
+              <a:rPr lang="en-US" sz="1500" dirty="0">
+                <a:solidFill>
+                  <a:srgbClr val="212121"/>
+                </a:solidFill>
+                <a:latin typeface="Calibri"/>
+              </a:rPr>
+              <a:t>	eq.-&gt; </a:t>
+            </a:r>
+            <a:r>
+              <a:rPr lang="en-US" sz="1500" dirty="0">
+                <a:solidFill>
+                  <a:srgbClr val="212121"/>
+                </a:solidFill>
+              </a:rPr>
+              <a:t>q = 1 − (d</a:t>
+            </a:r>
+            <a:r>
+              <a:rPr lang="el-GR" sz="1500" dirty="0">
+                <a:solidFill>
+                  <a:srgbClr val="212121"/>
+                </a:solidFill>
+              </a:rPr>
+              <a:t>τ/</a:t>
+            </a:r>
+            <a:r>
+              <a:rPr lang="en-US" sz="1500" dirty="0">
+                <a:solidFill>
+                  <a:srgbClr val="212121"/>
+                </a:solidFill>
+              </a:rPr>
+              <a:t>d</a:t>
+            </a:r>
+            <a:r>
+              <a:rPr lang="el-GR" sz="1500" dirty="0">
+                <a:solidFill>
+                  <a:srgbClr val="212121"/>
+                </a:solidFill>
+              </a:rPr>
+              <a:t>γ)/2μ</a:t>
+            </a:r>
+            <a:endParaRPr sz="1500" b="0" dirty="0">
+              <a:solidFill>
+                <a:srgbClr val="212121"/>
+              </a:solidFill>
+              <a:latin typeface="Calibri"/>
+            </a:endParaRPr>
+          </a:p>
+          <a:p>
+            <a:pPr>
+              <a:spcAft>
+                <a:spcPts val="1100"/>
+              </a:spcAft>
+            </a:pPr>
+            <a:r>
+              <a:rPr sz="1600" b="0" dirty="0">
+                <a:solidFill>
+                  <a:srgbClr val="1E2761"/>
+                </a:solidFill>
+                <a:latin typeface="Cambria Math"/>
+              </a:rPr>
+              <a:t>aging event   </a:t>
+            </a:r>
+            <a:r>
+              <a:rPr sz="1500" b="0" dirty="0">
+                <a:solidFill>
+                  <a:srgbClr val="212121"/>
+                </a:solidFill>
+                <a:latin typeface="Calibri"/>
+              </a:rPr>
+              <a:t>a step where u drops but </a:t>
+            </a:r>
+            <a:r>
+              <a:rPr sz="1500" b="0" dirty="0" err="1">
+                <a:solidFill>
+                  <a:srgbClr val="212121"/>
+                </a:solidFill>
+                <a:latin typeface="Calibri"/>
+              </a:rPr>
+              <a:t>τ</a:t>
+            </a:r>
+            <a:r>
+              <a:rPr sz="1500" b="0" dirty="0">
+                <a:solidFill>
+                  <a:srgbClr val="212121"/>
+                </a:solidFill>
+                <a:latin typeface="Calibri"/>
+              </a:rPr>
+              <a:t> does not (105,188); it relaxes energy without releasing stress</a:t>
+            </a:r>
+          </a:p>
+        </p:txBody>
+      </p:sp>
+    </p:spTree>
+  </p:cSld>
+  <p:clrMapOvr>
+    <a:masterClrMapping/>
+  </p:clrMapOvr>
+</p:sld>
+</file>
+
+<file path=ppt/slides/slide6.xml><?xml version="1.0" encoding="utf-8"?>
+<p:sld xmlns:a="http://schemas.openxmlformats.org/drawingml/2006/main" xmlns:r="http://schemas.openxmlformats.org/officeDocument/2006/relationships" xmlns:p="http://schemas.openxmlformats.org/presentationml/2006/main">
+  <p:cSld>
+    <p:spTree>
+      <p:nvGrpSpPr>
+        <p:cNvPr id="1" name=""/>
+        <p:cNvGrpSpPr/>
+        <p:nvPr/>
+      </p:nvGrpSpPr>
+      <p:grpSpPr>
+        <a:xfrm>
+          <a:off x="0" y="0"/>
+          <a:ext cx="0" cy="0"/>
+          <a:chOff x="0" y="0"/>
+          <a:chExt cx="0" cy="0"/>
+        </a:xfrm>
+      </p:grpSpPr>
       <p:sp>
         <p:nvSpPr>
           <p:cNvPr id="2" name="TextBox 1"/>
@@ -4633,13 +6597,31 @@
           <a:lstStyle/>
           <a:p>
             <a:r>
-              <a:rPr sz="3000" b="1">
+              <a:rPr sz="3000" b="1" dirty="0">
                 <a:solidFill>
                   <a:srgbClr val="1E2761"/>
                 </a:solidFill>
                 <a:latin typeface="Calibri"/>
               </a:rPr>
-              <a:t>The symbolic-regression library  (library/symreg.py)</a:t>
+              <a:t>The symbolic-regression library  (library/</a:t>
+            </a:r>
+            <a:r>
+              <a:rPr sz="3000" b="1" dirty="0" err="1">
+                <a:solidFill>
+                  <a:srgbClr val="1E2761"/>
+                </a:solidFill>
+                <a:latin typeface="Calibri"/>
+              </a:rPr>
+              <a:t>symreg.py</a:t>
+            </a:r>
+            <a:r>
+              <a:rPr sz="3000" b="1" dirty="0">
+                <a:solidFill>
+                  <a:srgbClr val="1E2761"/>
+                </a:solidFill>
+                <a:latin typeface="Calibri"/>
+              </a:rPr>
+              <a:t>)</a:t>
             </a:r>
           </a:p>
         </p:txBody>
@@ -5090,8 +7072,8 @@
 </p:sld>
 </file>
 
-<file path=ppt/slides/slide4.xml><?xml version="1.0" encoding="utf-8"?>
-<p:sld xmlns:a="http://schemas.openxmlformats.org/drawingml/2006/main" xmlns:p="http://schemas.openxmlformats.org/presentationml/2006/main" xmlns:r="http://schemas.openxmlformats.org/officeDocument/2006/relationships">
+<file path=ppt/slides/slide7.xml><?xml version="1.0" encoding="utf-8"?>
+<p:sld xmlns:a="http://schemas.openxmlformats.org/drawingml/2006/main" xmlns:r="http://schemas.openxmlformats.org/officeDocument/2006/relationships" xmlns:p="http://schemas.openxmlformats.org/presentationml/2006/main">
   <p:cSld>
     <p:spTree>
       <p:nvGrpSpPr>
@@ -5099,7 +7081,14 @@
         <p:cNvGrpSpPr/>
         <p:nvPr/>
       </p:nvGrpSpPr>
-      <p:grpSpPr/>
+      <p:grpSpPr>
+        <a:xfrm>
+          <a:off x="0" y="0"/>
+          <a:ext cx="0" cy="0"/>
+          <a:chOff x="0" y="0"/>
+          <a:chExt cx="0" cy="0"/>
+        </a:xfrm>
+      </p:grpSpPr>
       <p:sp>
         <p:nvSpPr>
           <p:cNvPr id="2" name="TextBox 1"/>
@@ -5109,7 +7098,7 @@
         <p:spPr>
           <a:xfrm>
             <a:off x="548640" y="292608"/>
-            <a:ext cx="11091672" cy="685800"/>
+            <a:ext cx="11091672" cy="461665"/>
           </a:xfrm>
           <a:prstGeom prst="rect">
             <a:avLst/>
@@ -5117,54 +7106,26 @@
           <a:noFill/>
         </p:spPr>
         <p:txBody>
-          <a:bodyPr wrap="square" lIns="0" rIns="0" tIns="0" bIns="0">
+          <a:bodyPr wrap="square" lIns="0" tIns="0" rIns="0" bIns="0">
             <a:spAutoFit/>
           </a:bodyPr>
           <a:lstStyle/>
           <a:p>
             <a:r>
-              <a:rPr sz="3000" b="1">
+              <a:rPr lang="en-US" sz="3000" b="1" dirty="0">
                 <a:solidFill>
                   <a:srgbClr val="1E2761"/>
                 </a:solidFill>
                 <a:latin typeface="Calibri"/>
               </a:rPr>
-              <a:t>What the search finds at each complexity budget</a:t>
-            </a:r>
-          </a:p>
-        </p:txBody>
-      </p:sp>
-      <p:sp>
-        <p:nvSpPr>
-          <p:cNvPr id="3" name="TextBox 2"/>
-          <p:cNvSpPr txBox="1"/>
-          <p:nvPr/>
-        </p:nvSpPr>
-        <p:spPr>
-          <a:xfrm>
-            <a:off x="640080" y="1097280"/>
-            <a:ext cx="10972800" cy="365760"/>
-          </a:xfrm>
-          <a:prstGeom prst="rect">
-            <a:avLst/>
-          </a:prstGeom>
-          <a:noFill/>
-        </p:spPr>
-        <p:txBody>
-          <a:bodyPr wrap="square" lIns="0" rIns="0" tIns="0" bIns="0">
-            <a:spAutoFit/>
-          </a:bodyPr>
-          <a:lstStyle/>
-          <a:p>
-            <a:r>
-              <a:rPr sz="1600" b="1">
-                <a:solidFill>
-                  <a:srgbClr val="1E2761"/>
-                </a:solidFill>
-                <a:latin typeface="Calibri"/>
-              </a:rPr>
-              <a:t>The audited cell (6,706 events): best formula for ln ρ(s) at each complexity, and its RMS misfit</a:t>
-            </a:r>
+              <a:t>Symbolic Regression at Each Complexity</a:t>
+            </a:r>
+            <a:endParaRPr sz="3000" b="1" dirty="0">
+              <a:solidFill>
+                <a:srgbClr val="1E2761"/>
+              </a:solidFill>
+              <a:latin typeface="Calibri"/>
+            </a:endParaRPr>
           </a:p>
         </p:txBody>
       </p:sp>
@@ -5174,23 +7135,53 @@
           <p:cNvGraphicFramePr>
             <a:graphicFrameLocks noGrp="1"/>
           </p:cNvGraphicFramePr>
-          <p:nvPr/>
+          <p:nvPr>
+            <p:extLst>
+              <p:ext uri="{D42A27DB-BD31-4B8C-83A1-F6EECF244321}">
+                <p14:modId xmlns:p14="http://schemas.microsoft.com/office/powerpoint/2010/main" val="517392100"/>
+              </p:ext>
+            </p:extLst>
+          </p:nvPr>
         </p:nvGraphicFramePr>
         <p:xfrm>
-          <a:off x="640080" y="1554480"/>
-          <a:ext cx="10881360" cy="2788920"/>
+          <a:off x="640080" y="1245816"/>
+          <a:ext cx="11091672" cy="2788920"/>
         </p:xfrm>
         <a:graphic>
           <a:graphicData uri="http://schemas.openxmlformats.org/drawingml/2006/table">
             <a:tbl>
-              <a:tblPr firstRow="1" bandRow="0">
+              <a:tblPr firstRow="1">
                 <a:tableStyleId>{5C22544A-7EE6-4342-B048-85BDC9FD1C3A}</a:tableStyleId>
               </a:tblPr>
               <a:tblGrid>
-                <a:gridCol w="914400"/>
-                <a:gridCol w="3291840"/>
-                <a:gridCol w="914400"/>
-                <a:gridCol w="5760720"/>
+                <a:gridCol w="932073">
+                  <a:extLst>
+                    <a:ext uri="{9D8B030D-6E8A-4147-A177-3AD203B41FA5}">
+                      <a16:colId xmlns:a16="http://schemas.microsoft.com/office/drawing/2014/main" val="20000"/>
+                    </a:ext>
+                  </a:extLst>
+                </a:gridCol>
+                <a:gridCol w="3355464">
+                  <a:extLst>
+                    <a:ext uri="{9D8B030D-6E8A-4147-A177-3AD203B41FA5}">
+                      <a16:colId xmlns:a16="http://schemas.microsoft.com/office/drawing/2014/main" val="20001"/>
+                    </a:ext>
+                  </a:extLst>
+                </a:gridCol>
+                <a:gridCol w="932073">
+                  <a:extLst>
+                    <a:ext uri="{9D8B030D-6E8A-4147-A177-3AD203B41FA5}">
+                      <a16:colId xmlns:a16="http://schemas.microsoft.com/office/drawing/2014/main" val="20002"/>
+                    </a:ext>
+                  </a:extLst>
+                </a:gridCol>
+                <a:gridCol w="5872062">
+                  <a:extLst>
+                    <a:ext uri="{9D8B030D-6E8A-4147-A177-3AD203B41FA5}">
+                      <a16:colId xmlns:a16="http://schemas.microsoft.com/office/drawing/2014/main" val="20003"/>
+                    </a:ext>
+                  </a:extLst>
+                </a:gridCol>
               </a:tblGrid>
               <a:tr h="348615">
                 <a:tc>
@@ -5281,6 +7272,11 @@
                     </a:solidFill>
                   </a:tcPr>
                 </a:tc>
+                <a:extLst>
+                  <a:ext uri="{0D108BD9-81ED-4DB2-BD59-A6C34878D82A}">
+                    <a16:rowId xmlns:a16="http://schemas.microsoft.com/office/drawing/2014/main" val="10000"/>
+                  </a:ext>
+                </a:extLst>
               </a:tr>
               <a:tr h="348615">
                 <a:tc>
@@ -5371,6 +7367,11 @@
                     </a:solidFill>
                   </a:tcPr>
                 </a:tc>
+                <a:extLst>
+                  <a:ext uri="{0D108BD9-81ED-4DB2-BD59-A6C34878D82A}">
+                    <a16:rowId xmlns:a16="http://schemas.microsoft.com/office/drawing/2014/main" val="10001"/>
+                  </a:ext>
+                </a:extLst>
               </a:tr>
               <a:tr h="348615">
                 <a:tc>
@@ -5445,13 +7446,31 @@
                     <a:lstStyle/>
                     <a:p>
                       <a:r>
-                        <a:rPr sz="1300" b="0">
+                        <a:rPr sz="1300" b="0" dirty="0">
                           <a:solidFill>
                             <a:srgbClr val="212121"/>
                           </a:solidFill>
                           <a:latin typeface="Calibri"/>
                         </a:rPr>
-                        <a:t>a pure power law, ρ ∝ s⁻ᵏ</a:t>
+                        <a:t>pure power law, </a:t>
+                      </a:r>
+                      <a:r>
+                        <a:rPr sz="1300" b="0" dirty="0" err="1">
+                          <a:solidFill>
+                            <a:srgbClr val="212121"/>
+                          </a:solidFill>
+                          <a:latin typeface="Calibri"/>
+                        </a:rPr>
+                        <a:t>ρ</a:t>
+                      </a:r>
+                      <a:r>
+                        <a:rPr sz="1300" b="0" dirty="0">
+                          <a:solidFill>
+                            <a:srgbClr val="212121"/>
+                          </a:solidFill>
+                          <a:latin typeface="Calibri"/>
+                        </a:rPr>
+                        <a:t> ∝ s⁻ᵏ</a:t>
                       </a:r>
                     </a:p>
                   </a:txBody>
@@ -5461,6 +7480,11 @@
                     </a:solidFill>
                   </a:tcPr>
                 </a:tc>
+                <a:extLst>
+                  <a:ext uri="{0D108BD9-81ED-4DB2-BD59-A6C34878D82A}">
+                    <a16:rowId xmlns:a16="http://schemas.microsoft.com/office/drawing/2014/main" val="10002"/>
+                  </a:ext>
+                </a:extLst>
               </a:tr>
               <a:tr h="348615">
                 <a:tc>
@@ -5535,13 +7559,13 @@
                     <a:lstStyle/>
                     <a:p>
                       <a:r>
-                        <a:rPr sz="1300" b="0">
+                        <a:rPr sz="1300" b="0" dirty="0">
                           <a:solidFill>
                             <a:srgbClr val="212121"/>
                           </a:solidFill>
                           <a:latin typeface="Calibri"/>
                         </a:rPr>
-                        <a:t>a power law rounded off at small s</a:t>
+                        <a:t>power law rounded off at small s</a:t>
                       </a:r>
                     </a:p>
                   </a:txBody>
@@ -5551,6 +7575,11 @@
                     </a:solidFill>
                   </a:tcPr>
                 </a:tc>
+                <a:extLst>
+                  <a:ext uri="{0D108BD9-81ED-4DB2-BD59-A6C34878D82A}">
+                    <a16:rowId xmlns:a16="http://schemas.microsoft.com/office/drawing/2014/main" val="10003"/>
+                  </a:ext>
+                </a:extLst>
               </a:tr>
               <a:tr h="348615">
                 <a:tc>
@@ -5625,14 +7654,29 @@
                     <a:lstStyle/>
                     <a:p>
                       <a:r>
-                        <a:rPr sz="1300" b="0">
+                        <a:rPr sz="1300" b="0" dirty="0">
                           <a:solidFill>
                             <a:srgbClr val="212121"/>
                           </a:solidFill>
                           <a:latin typeface="Calibri"/>
                         </a:rPr>
-                        <a:t>the √log family: fits the bins, fails the likelihood test (ΔAIC ≈ +20,000)</a:t>
+                        <a:t>fails the likelihood test (ΔAIC ≈ +20,000)</a:t>
                       </a:r>
+                      <a:r>
+                        <a:rPr lang="en-US" sz="1300" b="0" dirty="0">
+                          <a:solidFill>
+                            <a:srgbClr val="212121"/>
+                          </a:solidFill>
+                          <a:latin typeface="+mn-lt"/>
+                        </a:rPr>
+                        <a:t> [Akaike information criterion, for next time]</a:t>
+                      </a:r>
+                      <a:endParaRPr sz="1300" b="0" dirty="0">
+                        <a:solidFill>
+                          <a:srgbClr val="212121"/>
+                        </a:solidFill>
+                        <a:latin typeface="Calibri"/>
+                      </a:endParaRPr>
                     </a:p>
                   </a:txBody>
                   <a:tcPr marL="73152" marR="54864" marT="27432" marB="27432" anchor="ctr">
@@ -5641,6 +7685,11 @@
                     </a:solidFill>
                   </a:tcPr>
                 </a:tc>
+                <a:extLst>
+                  <a:ext uri="{0D108BD9-81ED-4DB2-BD59-A6C34878D82A}">
+                    <a16:rowId xmlns:a16="http://schemas.microsoft.com/office/drawing/2014/main" val="10004"/>
+                  </a:ext>
+                </a:extLst>
               </a:tr>
               <a:tr h="348615">
                 <a:tc>
@@ -5715,14 +7764,29 @@
                     <a:lstStyle/>
                     <a:p>
                       <a:r>
-                        <a:rPr sz="1300" b="0">
+                        <a:rPr sz="1300" b="0" dirty="0">
                           <a:solidFill>
                             <a:srgbClr val="212121"/>
                           </a:solidFill>
                           <a:latin typeface="Calibri"/>
                         </a:rPr>
-                        <a:t>same family, one constant added</a:t>
+                        <a:t>same </a:t>
                       </a:r>
+                      <a:r>
+                        <a:rPr lang="en-US" sz="1300" b="0" dirty="0">
+                          <a:solidFill>
+                            <a:srgbClr val="212121"/>
+                          </a:solidFill>
+                          <a:latin typeface="Calibri"/>
+                        </a:rPr>
+                        <a:t>as above</a:t>
+                      </a:r>
+                      <a:endParaRPr sz="1300" b="0" dirty="0">
+                        <a:solidFill>
+                          <a:srgbClr val="212121"/>
+                        </a:solidFill>
+                        <a:latin typeface="Calibri"/>
+                      </a:endParaRPr>
                     </a:p>
                   </a:txBody>
                   <a:tcPr marL="73152" marR="54864" marT="27432" marB="27432" anchor="ctr">
@@ -5731,6 +7795,11 @@
                     </a:solidFill>
                   </a:tcPr>
                 </a:tc>
+                <a:extLst>
+                  <a:ext uri="{0D108BD9-81ED-4DB2-BD59-A6C34878D82A}">
+                    <a16:rowId xmlns:a16="http://schemas.microsoft.com/office/drawing/2014/main" val="10005"/>
+                  </a:ext>
+                </a:extLst>
               </a:tr>
               <a:tr h="348615">
                 <a:tc>
@@ -5821,6 +7890,11 @@
                     </a:solidFill>
                   </a:tcPr>
                 </a:tc>
+                <a:extLst>
+                  <a:ext uri="{0D108BD9-81ED-4DB2-BD59-A6C34878D82A}">
+                    <a16:rowId xmlns:a16="http://schemas.microsoft.com/office/drawing/2014/main" val="10006"/>
+                  </a:ext>
+                </a:extLst>
               </a:tr>
               <a:tr h="348615">
                 <a:tc>
@@ -5895,13 +7969,58 @@
                     <a:lstStyle/>
                     <a:p>
                       <a:r>
-                        <a:rPr sz="1300" b="0">
+                        <a:rPr lang="en-US" sz="1300" b="0" dirty="0">
                           <a:solidFill>
                             <a:srgbClr val="212121"/>
                           </a:solidFill>
                           <a:latin typeface="Calibri"/>
                         </a:rPr>
-                        <a:t>the √log family again, with a linear term; still loses under likelihood</a:t>
+                        <a:t>same as earlier</a:t>
+                      </a:r>
+                      <a:r>
+                        <a:rPr sz="1300" b="0" dirty="0">
+                          <a:solidFill>
+                            <a:srgbClr val="212121"/>
+                          </a:solidFill>
+                          <a:latin typeface="Calibri"/>
+                        </a:rPr>
+                        <a:t>, </a:t>
+                      </a:r>
+                      <a:r>
+                        <a:rPr lang="en-US" sz="1300" b="0" dirty="0">
+                          <a:solidFill>
+                            <a:srgbClr val="212121"/>
+                          </a:solidFill>
+                          <a:latin typeface="Calibri"/>
+                        </a:rPr>
+                        <a:t>now </a:t>
+                      </a:r>
+                      <a:r>
+                        <a:rPr sz="1300" b="0" dirty="0">
+                          <a:solidFill>
+                            <a:srgbClr val="212121"/>
+                          </a:solidFill>
+                          <a:latin typeface="Calibri"/>
+                        </a:rPr>
+                        <a:t>with a</a:t>
+                      </a:r>
+                      <a:r>
+                        <a:rPr lang="en-US" sz="1300" b="0" dirty="0">
+                          <a:solidFill>
+                            <a:srgbClr val="212121"/>
+                          </a:solidFill>
+                          <a:latin typeface="Calibri"/>
+                        </a:rPr>
+                        <a:t>nother </a:t>
+                      </a:r>
+                      <a:r>
+                        <a:rPr sz="1300" b="0" dirty="0">
+                          <a:solidFill>
+                            <a:srgbClr val="212121"/>
+                          </a:solidFill>
+                          <a:latin typeface="Calibri"/>
+                        </a:rPr>
+                        <a:t>term; still loses under likelihood</a:t>
                       </a:r>
                     </a:p>
                   </a:txBody>
@@ -5911,6 +8030,11 @@
                     </a:solidFill>
                   </a:tcPr>
                 </a:tc>
+                <a:extLst>
+                  <a:ext uri="{0D108BD9-81ED-4DB2-BD59-A6C34878D82A}">
+                    <a16:rowId xmlns:a16="http://schemas.microsoft.com/office/drawing/2014/main" val="10007"/>
+                  </a:ext>
+                </a:extLst>
               </a:tr>
             </a:tbl>
           </a:graphicData>
@@ -5933,7 +8057,7 @@
           <a:noFill/>
         </p:spPr>
         <p:txBody>
-          <a:bodyPr wrap="square" lIns="0" rIns="0" tIns="0" bIns="0">
+          <a:bodyPr wrap="square" lIns="0" tIns="0" rIns="0" bIns="0">
             <a:spAutoFit/>
           </a:bodyPr>
           <a:lstStyle/>
@@ -5944,7 +8068,7 @@
               </a:spcAft>
             </a:pPr>
             <a:r>
-              <a:rPr sz="1600" b="1">
+              <a:rPr sz="1600" b="1" dirty="0">
                 <a:solidFill>
                   <a:srgbClr val="1E2761"/>
                 </a:solidFill>
@@ -5961,25 +8085,124 @@
               <a:buChar char="•"/>
             </a:pPr>
             <a:r>
-              <a:rPr sz="1400" b="0">
-                <a:solidFill>
-                  <a:srgbClr val="212121"/>
-                </a:solidFill>
-                <a:latin typeface="Calibri"/>
-              </a:rPr>
-              <a:t>The fit is ln ρ = a·f(s) + b with f = log(1/(s + ε) − C).  Exponentiating: </a:t>
-            </a:r>
-            <a:r>
-              <a:rPr sz="1400" b="1">
-                <a:solidFill>
-                  <a:srgbClr val="212121"/>
-                </a:solidFill>
-                <a:latin typeface="Calibri"/>
-              </a:rPr>
-              <a:t>ρ ∝ [1/(s + ε) − C]ᵃ = [C(s_c − s)/(s + ε)]ᵃ</a:t>
-            </a:r>
-            <a:r>
-              <a:rPr sz="1400" b="0">
+              <a:rPr sz="1400" b="0" dirty="0">
+                <a:solidFill>
+                  <a:srgbClr val="212121"/>
+                </a:solidFill>
+                <a:latin typeface="Calibri"/>
+              </a:rPr>
+              <a:t>The fit is ln </a:t>
+            </a:r>
+            <a:r>
+              <a:rPr sz="1400" b="0" dirty="0" err="1">
+                <a:solidFill>
+                  <a:srgbClr val="212121"/>
+                </a:solidFill>
+                <a:latin typeface="Calibri"/>
+              </a:rPr>
+              <a:t>ρ</a:t>
+            </a:r>
+            <a:r>
+              <a:rPr sz="1400" b="0" dirty="0">
+                <a:solidFill>
+                  <a:srgbClr val="212121"/>
+                </a:solidFill>
+                <a:latin typeface="Calibri"/>
+              </a:rPr>
+              <a:t> = </a:t>
+            </a:r>
+            <a:r>
+              <a:rPr sz="1400" b="0" dirty="0" err="1">
+                <a:solidFill>
+                  <a:srgbClr val="212121"/>
+                </a:solidFill>
+                <a:latin typeface="Calibri"/>
+              </a:rPr>
+              <a:t>a·f</a:t>
+            </a:r>
+            <a:r>
+              <a:rPr sz="1400" b="0" dirty="0">
+                <a:solidFill>
+                  <a:srgbClr val="212121"/>
+                </a:solidFill>
+                <a:latin typeface="Calibri"/>
+              </a:rPr>
+              <a:t>(s) + b with f = log(1/(s + </a:t>
+            </a:r>
+            <a:r>
+              <a:rPr sz="1400" b="0" dirty="0" err="1">
+                <a:solidFill>
+                  <a:srgbClr val="212121"/>
+                </a:solidFill>
+                <a:latin typeface="Calibri"/>
+              </a:rPr>
+              <a:t>ε</a:t>
+            </a:r>
+            <a:r>
+              <a:rPr sz="1400" b="0" dirty="0">
+                <a:solidFill>
+                  <a:srgbClr val="212121"/>
+                </a:solidFill>
+                <a:latin typeface="Calibri"/>
+              </a:rPr>
+              <a:t>) − C).  Exponentiating: </a:t>
+            </a:r>
+            <a:r>
+              <a:rPr sz="1400" b="1" dirty="0" err="1">
+                <a:solidFill>
+                  <a:srgbClr val="212121"/>
+                </a:solidFill>
+                <a:latin typeface="Calibri"/>
+              </a:rPr>
+              <a:t>ρ</a:t>
+            </a:r>
+            <a:r>
+              <a:rPr sz="1400" b="1" dirty="0">
+                <a:solidFill>
+                  <a:srgbClr val="212121"/>
+                </a:solidFill>
+                <a:latin typeface="Calibri"/>
+              </a:rPr>
+              <a:t> ∝ [1/(s + </a:t>
+            </a:r>
+            <a:r>
+              <a:rPr sz="1400" b="1" dirty="0" err="1">
+                <a:solidFill>
+                  <a:srgbClr val="212121"/>
+                </a:solidFill>
+                <a:latin typeface="Calibri"/>
+              </a:rPr>
+              <a:t>ε</a:t>
+            </a:r>
+            <a:r>
+              <a:rPr sz="1400" b="1" dirty="0">
+                <a:solidFill>
+                  <a:srgbClr val="212121"/>
+                </a:solidFill>
+                <a:latin typeface="Calibri"/>
+              </a:rPr>
+              <a:t>) − C]ᵃ = [C(s_c − s)/(s + </a:t>
+            </a:r>
+            <a:r>
+              <a:rPr sz="1400" b="1" dirty="0" err="1">
+                <a:solidFill>
+                  <a:srgbClr val="212121"/>
+                </a:solidFill>
+                <a:latin typeface="Calibri"/>
+              </a:rPr>
+              <a:t>ε</a:t>
+            </a:r>
+            <a:r>
+              <a:rPr sz="1400" b="1" dirty="0">
+                <a:solidFill>
+                  <a:srgbClr val="212121"/>
+                </a:solidFill>
+                <a:latin typeface="Calibri"/>
+              </a:rPr>
+              <a:t>)]ᵃ</a:t>
+            </a:r>
+            <a:r>
+              <a:rPr sz="1400" b="0" dirty="0">
                 <a:solidFill>
                   <a:srgbClr val="212121"/>
                 </a:solidFill>
@@ -5988,14 +8211,29 @@
               <a:t> with </a:t>
             </a:r>
             <a:r>
-              <a:rPr sz="1400" b="1">
-                <a:solidFill>
-                  <a:srgbClr val="212121"/>
-                </a:solidFill>
-                <a:latin typeface="Calibri"/>
-              </a:rPr>
-              <a:t>s_c = 1/C − ε</a:t>
-            </a:r>
+              <a:rPr sz="1400" b="1" dirty="0">
+                <a:solidFill>
+                  <a:srgbClr val="212121"/>
+                </a:solidFill>
+                <a:latin typeface="Calibri"/>
+              </a:rPr>
+              <a:t>s_c = 1/C − </a:t>
+            </a:r>
+            <a:r>
+              <a:rPr sz="1400" b="1" dirty="0" err="1">
+                <a:solidFill>
+                  <a:srgbClr val="212121"/>
+                </a:solidFill>
+                <a:latin typeface="Calibri"/>
+              </a:rPr>
+              <a:t>ε</a:t>
+            </a:r>
+            <a:endParaRPr sz="1400" b="1" dirty="0">
+              <a:solidFill>
+                <a:srgbClr val="212121"/>
+              </a:solidFill>
+              <a:latin typeface="Calibri"/>
+            </a:endParaRPr>
           </a:p>
           <a:p>
             <a:pPr marL="228600" indent="-228600">
@@ -6005,7 +8243,7 @@
               <a:buChar char="•"/>
             </a:pPr>
             <a:r>
-              <a:rPr sz="1400" b="0">
+              <a:rPr sz="1400" b="0" dirty="0">
                 <a:solidFill>
                   <a:srgbClr val="212121"/>
                 </a:solidFill>
@@ -6022,7 +8260,7 @@
               <a:buChar char="•"/>
             </a:pPr>
             <a:r>
-              <a:rPr sz="1400" b="0">
+              <a:rPr sz="1400" b="0" dirty="0">
                 <a:solidFill>
                   <a:srgbClr val="212121"/>
                 </a:solidFill>
@@ -6041,8 +8279,8 @@
 </p:sld>
 </file>
 
-<file path=ppt/slides/slide5.xml><?xml version="1.0" encoding="utf-8"?>
-<p:sld xmlns:a="http://schemas.openxmlformats.org/drawingml/2006/main" xmlns:p="http://schemas.openxmlformats.org/presentationml/2006/main" xmlns:r="http://schemas.openxmlformats.org/officeDocument/2006/relationships">
+<file path=ppt/slides/slide8.xml><?xml version="1.0" encoding="utf-8"?>
+<p:sld xmlns:a="http://schemas.openxmlformats.org/drawingml/2006/main" xmlns:r="http://schemas.openxmlformats.org/officeDocument/2006/relationships" xmlns:p="http://schemas.openxmlformats.org/presentationml/2006/main">
   <p:cSld>
     <p:spTree>
       <p:nvGrpSpPr>
@@ -6050,7 +8288,14 @@
         <p:cNvGrpSpPr/>
         <p:nvPr/>
       </p:nvGrpSpPr>
-      <p:grpSpPr/>
+      <p:grpSpPr>
+        <a:xfrm>
+          <a:off x="0" y="0"/>
+          <a:ext cx="0" cy="0"/>
+          <a:chOff x="0" y="0"/>
+          <a:chExt cx="0" cy="0"/>
+        </a:xfrm>
+      </p:grpSpPr>
       <p:sp>
         <p:nvSpPr>
           <p:cNvPr id="2" name="TextBox 1"/>
@@ -6068,7 +8313,7 @@
           <a:noFill/>
         </p:spPr>
         <p:txBody>
-          <a:bodyPr wrap="square" lIns="0" rIns="0" tIns="0" bIns="0">
+          <a:bodyPr wrap="square" lIns="0" tIns="0" rIns="0" bIns="0">
             <a:spAutoFit/>
           </a:bodyPr>
           <a:lstStyle/>
@@ -6080,380 +8325,11 @@
                 </a:solidFill>
                 <a:latin typeface="Calibri"/>
               </a:rPr>
-              <a:t>The discovered law</a:t>
-            </a:r>
-          </a:p>
-        </p:txBody>
-      </p:sp>
-      <p:sp>
-        <p:nvSpPr>
-          <p:cNvPr id="3" name="TextBox 2"/>
-          <p:cNvSpPr txBox="1"/>
-          <p:nvPr/>
-        </p:nvSpPr>
-        <p:spPr>
-          <a:xfrm>
-            <a:off x="640080" y="1097280"/>
-            <a:ext cx="10972800" cy="640080"/>
-          </a:xfrm>
-          <a:prstGeom prst="rect">
-            <a:avLst/>
-          </a:prstGeom>
-          <a:noFill/>
-        </p:spPr>
-        <p:txBody>
-          <a:bodyPr wrap="square" lIns="0" rIns="0" tIns="0" bIns="0">
-            <a:spAutoFit/>
-          </a:bodyPr>
-          <a:lstStyle/>
-          <a:p>
-            <a:pPr algn="ctr"/>
-            <a:r>
-              <a:rPr sz="2400" b="0">
-                <a:solidFill>
-                  <a:srgbClr val="1E2761"/>
-                </a:solidFill>
-                <a:latin typeface="Cambria Math"/>
-              </a:rPr>
-              <a:t>P(s | u, τ)  =  (1/Z) · (s_c(u, τ) − s)ᵐ / (s + ε)ᵏ ,     0 &lt; s &lt; s_c</a:t>
-            </a:r>
-          </a:p>
-        </p:txBody>
-      </p:sp>
-      <p:sp>
-        <p:nvSpPr>
-          <p:cNvPr id="4" name="TextBox 3"/>
-          <p:cNvSpPr txBox="1"/>
-          <p:nvPr/>
-        </p:nvSpPr>
-        <p:spPr>
-          <a:xfrm>
-            <a:off x="640080" y="1737360"/>
-            <a:ext cx="10972800" cy="640080"/>
-          </a:xfrm>
-          <a:prstGeom prst="rect">
-            <a:avLst/>
-          </a:prstGeom>
-          <a:noFill/>
-        </p:spPr>
-        <p:txBody>
-          <a:bodyPr wrap="square" lIns="0" rIns="0" tIns="0" bIns="0">
-            <a:spAutoFit/>
-          </a:bodyPr>
-          <a:lstStyle/>
-          <a:p>
-            <a:pPr algn="ctr"/>
-            <a:r>
-              <a:rPr sz="1800" b="0">
-                <a:solidFill>
-                  <a:srgbClr val="6E7B85"/>
-                </a:solidFill>
-                <a:latin typeface="Cambria Math"/>
-              </a:rPr>
-              <a:t>k = 0.88,     m = 2.3,     ε = 2.8 × 10⁻⁵</a:t>
-            </a:r>
-          </a:p>
-        </p:txBody>
-      </p:sp>
-      <p:sp>
-        <p:nvSpPr>
-          <p:cNvPr id="5" name="TextBox 4"/>
-          <p:cNvSpPr txBox="1"/>
-          <p:nvPr/>
-        </p:nvSpPr>
-        <p:spPr>
-          <a:xfrm>
-            <a:off x="640080" y="2514600"/>
-            <a:ext cx="10972800" cy="4114800"/>
-          </a:xfrm>
-          <a:prstGeom prst="rect">
-            <a:avLst/>
-          </a:prstGeom>
-          <a:noFill/>
-        </p:spPr>
-        <p:txBody>
-          <a:bodyPr wrap="square" lIns="0" rIns="0" tIns="0" bIns="0">
-            <a:spAutoFit/>
-          </a:bodyPr>
-          <a:lstStyle/>
-          <a:p>
-            <a:pPr>
-              <a:spcAft>
-                <a:spcPts val="1100"/>
-              </a:spcAft>
-            </a:pPr>
-            <a:r>
-              <a:rPr sz="1600" b="0">
-                <a:solidFill>
-                  <a:srgbClr val="1E2761"/>
-                </a:solidFill>
-                <a:latin typeface="Cambria Math"/>
-              </a:rPr>
-              <a:t>(s + ε)⁻ᵏ   </a:t>
-            </a:r>
-            <a:r>
-              <a:rPr sz="1500" b="1">
-                <a:solidFill>
-                  <a:srgbClr val="212121"/>
-                </a:solidFill>
-                <a:latin typeface="Calibri"/>
-              </a:rPr>
-              <a:t>power-law decay</a:t>
-            </a:r>
-            <a:r>
-              <a:rPr sz="1500" b="0">
-                <a:solidFill>
-                  <a:srgbClr val="212121"/>
-                </a:solidFill>
-                <a:latin typeface="Calibri"/>
-              </a:rPr>
-              <a:t> with exponent k ≈ 0.9; ε rounds it off below about 3 × 10⁻⁵, so there is no lower cutoff</a:t>
-            </a:r>
-          </a:p>
-          <a:p>
-            <a:pPr>
-              <a:spcAft>
-                <a:spcPts val="1100"/>
-              </a:spcAft>
-            </a:pPr>
-            <a:r>
-              <a:rPr sz="1600" b="0">
-                <a:solidFill>
-                  <a:srgbClr val="1E2761"/>
-                </a:solidFill>
-                <a:latin typeface="Cambria Math"/>
-              </a:rPr>
-              <a:t>(s_c − s)ᵐ   </a:t>
-            </a:r>
-            <a:r>
-              <a:rPr sz="1500" b="1">
-                <a:solidFill>
-                  <a:srgbClr val="212121"/>
-                </a:solidFill>
-                <a:latin typeface="Calibri"/>
-              </a:rPr>
-              <a:t>hard ceiling</a:t>
-            </a:r>
-            <a:r>
-              <a:rPr sz="1500" b="0">
-                <a:solidFill>
-                  <a:srgbClr val="212121"/>
-                </a:solidFill>
-                <a:latin typeface="Calibri"/>
-              </a:rPr>
-              <a:t>: density is zero at s = s_c. With m ≈ 2 it vanishes gently, so the largest observed event sits a few percent below s_c</a:t>
-            </a:r>
-          </a:p>
-          <a:p>
-            <a:pPr>
-              <a:spcAft>
-                <a:spcPts val="1100"/>
-              </a:spcAft>
-            </a:pPr>
-            <a:r>
-              <a:rPr sz="1600" b="0">
-                <a:solidFill>
-                  <a:srgbClr val="1E2761"/>
-                </a:solidFill>
-                <a:latin typeface="Cambria Math"/>
-              </a:rPr>
-              <a:t>s_c(u, τ)   </a:t>
-            </a:r>
-            <a:r>
-              <a:rPr sz="1500" b="1">
-                <a:solidFill>
-                  <a:srgbClr val="212121"/>
-                </a:solidFill>
-                <a:latin typeface="Calibri"/>
-              </a:rPr>
-              <a:t>the only place the state enters</a:t>
-            </a:r>
-            <a:r>
-              <a:rPr sz="1500" b="0">
-                <a:solidFill>
-                  <a:srgbClr val="212121"/>
-                </a:solidFill>
-                <a:latin typeface="Calibri"/>
-              </a:rPr>
-              <a:t>: 146× range over the plane (0.02 cold and unloaded, 3 in flow); ln s_c ≈ (u-part) + (τ-part) at 95.5% of the variance</a:t>
-            </a:r>
-          </a:p>
-          <a:p>
-            <a:pPr>
-              <a:spcAft>
-                <a:spcPts val="1100"/>
-              </a:spcAft>
-            </a:pPr>
-            <a:r>
-              <a:rPr sz="1600" b="0">
-                <a:solidFill>
-                  <a:srgbClr val="1E2761"/>
-                </a:solidFill>
-                <a:latin typeface="Cambria Math"/>
-              </a:rPr>
-              <a:t>Z   </a:t>
-            </a:r>
-            <a:r>
-              <a:rPr sz="1500" b="0">
-                <a:solidFill>
-                  <a:srgbClr val="212121"/>
-                </a:solidFill>
-                <a:latin typeface="Calibri"/>
-              </a:rPr>
-              <a:t>normalization, computed numerically</a:t>
-            </a:r>
-          </a:p>
-        </p:txBody>
-      </p:sp>
-      <p:sp>
-        <p:nvSpPr>
-          <p:cNvPr id="6" name="TextBox 5"/>
-          <p:cNvSpPr txBox="1"/>
-          <p:nvPr/>
-        </p:nvSpPr>
-        <p:spPr>
-          <a:xfrm>
-            <a:off x="640080" y="4709160"/>
-            <a:ext cx="10972800" cy="1280160"/>
-          </a:xfrm>
-          <a:prstGeom prst="rect">
-            <a:avLst/>
-          </a:prstGeom>
-          <a:noFill/>
-        </p:spPr>
-        <p:txBody>
-          <a:bodyPr wrap="square" lIns="0" rIns="0" tIns="0" bIns="0">
-            <a:spAutoFit/>
-          </a:bodyPr>
-          <a:lstStyle/>
-          <a:p>
-            <a:pPr>
-              <a:spcAft>
-                <a:spcPts val="600"/>
-              </a:spcAft>
-            </a:pPr>
-            <a:r>
-              <a:rPr sz="1600" b="1">
-                <a:solidFill>
-                  <a:srgbClr val="1E2761"/>
-                </a:solidFill>
-                <a:latin typeface="Calibri"/>
-              </a:rPr>
-              <a:t>Versus the usual truncated power law  s⁻ᵏ e^(−s/s*)</a:t>
-            </a:r>
-          </a:p>
-          <a:p>
-            <a:pPr marL="228600" indent="-228600">
-              <a:spcAft>
-                <a:spcPts val="800"/>
-              </a:spcAft>
-              <a:buChar char="•"/>
-            </a:pPr>
-            <a:r>
-              <a:rPr sz="1400" b="0">
-                <a:solidFill>
-                  <a:srgbClr val="212121"/>
-                </a:solidFill>
-                <a:latin typeface="Calibri"/>
-              </a:rPr>
-              <a:t>An exponential tail suppresses large events but never forbids them</a:t>
-            </a:r>
-          </a:p>
-          <a:p>
-            <a:pPr marL="228600" indent="-228600">
-              <a:spcAft>
-                <a:spcPts val="800"/>
-              </a:spcAft>
-              <a:buChar char="•"/>
-            </a:pPr>
-            <a:r>
-              <a:rPr sz="1400" b="0">
-                <a:solidFill>
-                  <a:srgbClr val="212121"/>
-                </a:solidFill>
-                <a:latin typeface="Calibri"/>
-              </a:rPr>
-              <a:t>It sits inside the search space at complexity 7 and never made a Pareto front; it loses every likelihood contest that follows</a:t>
-            </a:r>
-          </a:p>
-        </p:txBody>
-      </p:sp>
-    </p:spTree>
-  </p:cSld>
-  <p:clrMapOvr>
-    <a:masterClrMapping/>
-  </p:clrMapOvr>
-</p:sld>
-</file>
-
-<file path=ppt/slides/slide6.xml><?xml version="1.0" encoding="utf-8"?>
-<p:sld xmlns:a="http://schemas.openxmlformats.org/drawingml/2006/main" xmlns:p="http://schemas.openxmlformats.org/presentationml/2006/main" xmlns:r="http://schemas.openxmlformats.org/officeDocument/2006/relationships">
-  <p:cSld>
-    <p:spTree>
-      <p:nvGrpSpPr>
-        <p:cNvPr id="1" name=""/>
-        <p:cNvGrpSpPr/>
-        <p:nvPr/>
-      </p:nvGrpSpPr>
-      <p:grpSpPr/>
-      <p:sp>
-        <p:nvSpPr>
-          <p:cNvPr id="2" name="TextBox 1"/>
-          <p:cNvSpPr txBox="1"/>
-          <p:nvPr/>
-        </p:nvSpPr>
-        <p:spPr>
-          <a:xfrm>
-            <a:off x="548640" y="292608"/>
-            <a:ext cx="11091672" cy="685800"/>
-          </a:xfrm>
-          <a:prstGeom prst="rect">
-            <a:avLst/>
-          </a:prstGeom>
-          <a:noFill/>
-        </p:spPr>
-        <p:txBody>
-          <a:bodyPr wrap="square" lIns="0" rIns="0" tIns="0" bIns="0">
-            <a:spAutoFit/>
-          </a:bodyPr>
-          <a:lstStyle/>
-          <a:p>
-            <a:r>
-              <a:rPr sz="3000" b="1">
-                <a:solidFill>
-                  <a:srgbClr val="1E2761"/>
-                </a:solidFill>
-                <a:latin typeface="Calibri"/>
-              </a:rPr>
               <a:t>Performance: one cell, three candidate laws</a:t>
             </a:r>
           </a:p>
         </p:txBody>
       </p:sp>
-      <p:pic>
-        <p:nvPicPr>
-          <p:cNvPr id="3" name="Picture 2" descr="fig01_size_law.png"/>
-          <p:cNvPicPr>
-            <a:picLocks noChangeAspect="1"/>
-          </p:cNvPicPr>
-          <p:nvPr/>
-        </p:nvPicPr>
-        <p:blipFill>
-          <a:blip r:embed="rId2"/>
-          <a:stretch>
-            <a:fillRect/>
-          </a:stretch>
-        </p:blipFill>
-        <p:spPr>
-          <a:xfrm>
-            <a:off x="502920" y="1196340"/>
-            <a:ext cx="6309360" cy="4556760"/>
-          </a:xfrm>
-          <a:prstGeom prst="rect">
-            <a:avLst/>
-          </a:prstGeom>
-        </p:spPr>
-      </p:pic>
       <p:sp>
         <p:nvSpPr>
           <p:cNvPr id="4" name="TextBox 3"/>
@@ -6471,7 +8347,7 @@
           <a:noFill/>
         </p:spPr>
         <p:txBody>
-          <a:bodyPr wrap="square" lIns="0" rIns="0" tIns="0" bIns="0">
+          <a:bodyPr wrap="square" lIns="0" tIns="0" rIns="0" bIns="0">
             <a:spAutoFit/>
           </a:bodyPr>
           <a:lstStyle/>
@@ -6623,85 +8499,9 @@
           </a:p>
         </p:txBody>
       </p:sp>
-    </p:spTree>
-  </p:cSld>
-  <p:clrMapOvr>
-    <a:masterClrMapping/>
-  </p:clrMapOvr>
-</p:sld>
-</file>
-
-<file path=ppt/slides/slide7.xml><?xml version="1.0" encoding="utf-8"?>
-<p:sld xmlns:a="http://schemas.openxmlformats.org/drawingml/2006/main" xmlns:p="http://schemas.openxmlformats.org/presentationml/2006/main" xmlns:r="http://schemas.openxmlformats.org/officeDocument/2006/relationships">
-  <p:cSld>
-    <p:spTree>
-      <p:nvGrpSpPr>
-        <p:cNvPr id="1" name=""/>
-        <p:cNvGrpSpPr/>
-        <p:nvPr/>
-      </p:nvGrpSpPr>
-      <p:grpSpPr/>
-      <p:sp>
-        <p:nvSpPr>
-          <p:cNvPr id="2" name="TextBox 1"/>
-          <p:cNvSpPr txBox="1"/>
-          <p:nvPr/>
-        </p:nvSpPr>
-        <p:spPr>
-          <a:xfrm>
-            <a:off x="548640" y="292608"/>
-            <a:ext cx="11091672" cy="685800"/>
-          </a:xfrm>
-          <a:prstGeom prst="rect">
-            <a:avLst/>
-          </a:prstGeom>
-          <a:noFill/>
-        </p:spPr>
-        <p:txBody>
-          <a:bodyPr wrap="square" lIns="0" rIns="0" tIns="0" bIns="0">
-            <a:spAutoFit/>
-          </a:bodyPr>
-          <a:lstStyle/>
-          <a:p>
-            <a:r>
-              <a:rPr sz="3000" b="1">
-                <a:solidFill>
-                  <a:srgbClr val="1E2761"/>
-                </a:solidFill>
-                <a:latin typeface="Calibri"/>
-              </a:rPr>
-              <a:t>Performance: every cell, and a control</a:t>
-            </a:r>
-          </a:p>
-        </p:txBody>
-      </p:sp>
       <p:pic>
         <p:nvPicPr>
-          <p:cNvPr id="3" name="Picture 2" descr="fig02_collapse.png"/>
-          <p:cNvPicPr>
-            <a:picLocks noChangeAspect="1"/>
-          </p:cNvPicPr>
-          <p:nvPr/>
-        </p:nvPicPr>
-        <p:blipFill>
-          <a:blip r:embed="rId2"/>
-          <a:stretch>
-            <a:fillRect/>
-          </a:stretch>
-        </p:blipFill>
-        <p:spPr>
-          <a:xfrm>
-            <a:off x="618978" y="1143000"/>
-            <a:ext cx="5254283" cy="3794760"/>
-          </a:xfrm>
-          <a:prstGeom prst="rect">
-            <a:avLst/>
-          </a:prstGeom>
-        </p:spPr>
-      </p:pic>
-      <p:pic>
-        <p:nvPicPr>
-          <p:cNvPr id="4" name="Picture 3" descr="fig04_falsifiability.png"/>
+          <p:cNvPr id="5" name="Picture 4" descr="fig01_size_law.png"/>
           <p:cNvPicPr>
             <a:picLocks noChangeAspect="1"/>
           </p:cNvPicPr>
@@ -6715,451 +8515,14 @@
         </p:blipFill>
         <p:spPr>
           <a:xfrm>
-            <a:off x="6315690" y="1143000"/>
-            <a:ext cx="5254283" cy="3794760"/>
+            <a:off x="338328" y="978408"/>
+            <a:ext cx="6748272" cy="4873752"/>
           </a:xfrm>
           <a:prstGeom prst="rect">
             <a:avLst/>
           </a:prstGeom>
         </p:spPr>
       </p:pic>
-      <p:sp>
-        <p:nvSpPr>
-          <p:cNvPr id="5" name="TextBox 4"/>
-          <p:cNvSpPr txBox="1"/>
-          <p:nvPr/>
-        </p:nvSpPr>
-        <p:spPr>
-          <a:xfrm>
-            <a:off x="640080" y="5029200"/>
-            <a:ext cx="5394960" cy="1737360"/>
-          </a:xfrm>
-          <a:prstGeom prst="rect">
-            <a:avLst/>
-          </a:prstGeom>
-          <a:noFill/>
-        </p:spPr>
-        <p:txBody>
-          <a:bodyPr wrap="square" lIns="0" rIns="0" tIns="0" bIns="0">
-            <a:spAutoFit/>
-          </a:bodyPr>
-          <a:lstStyle/>
-          <a:p>
-            <a:pPr>
-              <a:spcAft>
-                <a:spcPts val="600"/>
-              </a:spcAft>
-            </a:pPr>
-            <a:r>
-              <a:rPr sz="1600" b="1">
-                <a:solidFill>
-                  <a:srgbClr val="1E2761"/>
-                </a:solidFill>
-                <a:latin typeface="Calibri"/>
-              </a:rPr>
-              <a:t>Left: the collapse</a:t>
-            </a:r>
-          </a:p>
-          <a:p>
-            <a:pPr marL="228600" indent="-228600">
-              <a:spcAft>
-                <a:spcPts val="800"/>
-              </a:spcAft>
-              <a:buChar char="•"/>
-            </a:pPr>
-            <a:r>
-              <a:rPr sz="1350" b="0">
-                <a:solidFill>
-                  <a:srgbClr val="212121"/>
-                </a:solidFill>
-                <a:latin typeface="Calibri"/>
-              </a:rPr>
-              <a:t>Twelve cells, 100× apart in scale, plotted against </a:t>
-            </a:r>
-            <a:r>
-              <a:rPr sz="1350" b="1">
-                <a:solidFill>
-                  <a:srgbClr val="212121"/>
-                </a:solidFill>
-                <a:latin typeface="Calibri"/>
-              </a:rPr>
-              <a:t>ξ = (s+ε)/(s_c+ε)</a:t>
-            </a:r>
-            <a:r>
-              <a:rPr sz="1350" b="0">
-                <a:solidFill>
-                  <a:srgbClr val="212121"/>
-                </a:solidFill>
-                <a:latin typeface="Calibri"/>
-              </a:rPr>
-              <a:t> with the global (k, m, ε): one curve, including the bend into the ceiling</a:t>
-            </a:r>
-          </a:p>
-        </p:txBody>
-      </p:sp>
-      <p:sp>
-        <p:nvSpPr>
-          <p:cNvPr id="6" name="TextBox 5"/>
-          <p:cNvSpPr txBox="1"/>
-          <p:nvPr/>
-        </p:nvSpPr>
-        <p:spPr>
-          <a:xfrm>
-            <a:off x="6355080" y="5029200"/>
-            <a:ext cx="5303520" cy="1737360"/>
-          </a:xfrm>
-          <a:prstGeom prst="rect">
-            <a:avLst/>
-          </a:prstGeom>
-          <a:noFill/>
-        </p:spPr>
-        <p:txBody>
-          <a:bodyPr wrap="square" lIns="0" rIns="0" tIns="0" bIns="0">
-            <a:spAutoFit/>
-          </a:bodyPr>
-          <a:lstStyle/>
-          <a:p>
-            <a:pPr>
-              <a:spcAft>
-                <a:spcPts val="600"/>
-              </a:spcAft>
-            </a:pPr>
-            <a:r>
-              <a:rPr sz="1600" b="1">
-                <a:solidFill>
-                  <a:srgbClr val="1E2761"/>
-                </a:solidFill>
-                <a:latin typeface="Calibri"/>
-              </a:rPr>
-              <a:t>Right: the same machinery on synthetic data</a:t>
-            </a:r>
-          </a:p>
-          <a:p>
-            <a:pPr marL="228600" indent="-228600">
-              <a:spcAft>
-                <a:spcPts val="800"/>
-              </a:spcAft>
-              <a:buChar char="•"/>
-            </a:pPr>
-            <a:r>
-              <a:rPr sz="1350" b="0">
-                <a:solidFill>
-                  <a:srgbClr val="212121"/>
-                </a:solidFill>
-                <a:latin typeface="Calibri"/>
-              </a:rPr>
-              <a:t>TPL-generated catalogs return a TPL verdict, 5 of 5; ceiling-generated return the ceiling, 5 of 5</a:t>
-            </a:r>
-          </a:p>
-          <a:p>
-            <a:pPr marL="228600" indent="-228600">
-              <a:spcAft>
-                <a:spcPts val="800"/>
-              </a:spcAft>
-              <a:buChar char="•"/>
-            </a:pPr>
-            <a:r>
-              <a:rPr sz="1350" b="0">
-                <a:solidFill>
-                  <a:srgbClr val="212121"/>
-                </a:solidFill>
-                <a:latin typeface="Calibri"/>
-              </a:rPr>
-              <a:t>Measured cells sit on the ceiling side; in the 8 largest, </a:t>
-            </a:r>
-            <a:r>
-              <a:rPr sz="1350" b="1">
-                <a:solidFill>
-                  <a:srgbClr val="212121"/>
-                </a:solidFill>
-                <a:latin typeface="Calibri"/>
-              </a:rPr>
-              <a:t>AIC 8 of 8</a:t>
-            </a:r>
-            <a:r>
-              <a:rPr sz="1350" b="0">
-                <a:solidFill>
-                  <a:srgbClr val="212121"/>
-                </a:solidFill>
-                <a:latin typeface="Calibri"/>
-              </a:rPr>
-              <a:t> (ΔAIC 67 to 120 over TPL, 300 to 754 over lognormal)</a:t>
-            </a:r>
-          </a:p>
-        </p:txBody>
-      </p:sp>
-    </p:spTree>
-  </p:cSld>
-  <p:clrMapOvr>
-    <a:masterClrMapping/>
-  </p:clrMapOvr>
-</p:sld>
-</file>
-
-<file path=ppt/slides/slide8.xml><?xml version="1.0" encoding="utf-8"?>
-<p:sld xmlns:a="http://schemas.openxmlformats.org/drawingml/2006/main" xmlns:p="http://schemas.openxmlformats.org/presentationml/2006/main" xmlns:r="http://schemas.openxmlformats.org/officeDocument/2006/relationships">
-  <p:cSld>
-    <p:spTree>
-      <p:nvGrpSpPr>
-        <p:cNvPr id="1" name=""/>
-        <p:cNvGrpSpPr/>
-        <p:nvPr/>
-      </p:nvGrpSpPr>
-      <p:grpSpPr/>
-      <p:sp>
-        <p:nvSpPr>
-          <p:cNvPr id="2" name="TextBox 1"/>
-          <p:cNvSpPr txBox="1"/>
-          <p:nvPr/>
-        </p:nvSpPr>
-        <p:spPr>
-          <a:xfrm>
-            <a:off x="548640" y="292608"/>
-            <a:ext cx="11091672" cy="685800"/>
-          </a:xfrm>
-          <a:prstGeom prst="rect">
-            <a:avLst/>
-          </a:prstGeom>
-          <a:noFill/>
-        </p:spPr>
-        <p:txBody>
-          <a:bodyPr wrap="square" lIns="0" rIns="0" tIns="0" bIns="0">
-            <a:spAutoFit/>
-          </a:bodyPr>
-          <a:lstStyle/>
-          <a:p>
-            <a:r>
-              <a:rPr sz="3000" b="1">
-                <a:solidFill>
-                  <a:srgbClr val="1E2761"/>
-                </a:solidFill>
-                <a:latin typeface="Calibri"/>
-              </a:rPr>
-              <a:t>Performance: the plastic-rate field, rebuilt from the law</a:t>
-            </a:r>
-          </a:p>
-        </p:txBody>
-      </p:sp>
-      <p:pic>
-        <p:nvPicPr>
-          <p:cNvPr id="3" name="Picture 2" descr="fig09_q_agreement.png"/>
-          <p:cNvPicPr>
-            <a:picLocks noChangeAspect="1"/>
-          </p:cNvPicPr>
-          <p:nvPr/>
-        </p:nvPicPr>
-        <p:blipFill>
-          <a:blip r:embed="rId2"/>
-          <a:stretch>
-            <a:fillRect/>
-          </a:stretch>
-        </p:blipFill>
-        <p:spPr>
-          <a:xfrm>
-            <a:off x="635000" y="1188720"/>
-            <a:ext cx="5588000" cy="4572000"/>
-          </a:xfrm>
-          <a:prstGeom prst="rect">
-            <a:avLst/>
-          </a:prstGeom>
-        </p:spPr>
-      </p:pic>
-      <p:sp>
-        <p:nvSpPr>
-          <p:cNvPr id="4" name="TextBox 3"/>
-          <p:cNvSpPr txBox="1"/>
-          <p:nvPr/>
-        </p:nvSpPr>
-        <p:spPr>
-          <a:xfrm>
-            <a:off x="6675120" y="1280160"/>
-            <a:ext cx="4983480" cy="4572000"/>
-          </a:xfrm>
-          <a:prstGeom prst="rect">
-            <a:avLst/>
-          </a:prstGeom>
-          <a:noFill/>
-        </p:spPr>
-        <p:txBody>
-          <a:bodyPr wrap="square" lIns="0" rIns="0" tIns="0" bIns="0">
-            <a:spAutoFit/>
-          </a:bodyPr>
-          <a:lstStyle/>
-          <a:p>
-            <a:pPr>
-              <a:spcAft>
-                <a:spcPts val="600"/>
-              </a:spcAft>
-            </a:pPr>
-            <a:r>
-              <a:rPr sz="1600" b="1">
-                <a:solidFill>
-                  <a:srgbClr val="1E2761"/>
-                </a:solidFill>
-                <a:latin typeface="Calibri"/>
-              </a:rPr>
-              <a:t>Measured q against q from the law</a:t>
-            </a:r>
-          </a:p>
-          <a:p>
-            <a:pPr marL="228600" indent="-228600">
-              <a:spcAft>
-                <a:spcPts val="800"/>
-              </a:spcAft>
-              <a:buChar char="•"/>
-            </a:pPr>
-            <a:r>
-              <a:rPr sz="1400" b="0">
-                <a:solidFill>
-                  <a:srgbClr val="212121"/>
-                </a:solidFill>
-                <a:latin typeface="Calibri"/>
-              </a:rPr>
-              <a:t>Measured: </a:t>
-            </a:r>
-            <a:r>
-              <a:rPr sz="1400" b="1">
-                <a:solidFill>
-                  <a:srgbClr val="212121"/>
-                </a:solidFill>
-                <a:latin typeface="Calibri"/>
-              </a:rPr>
-              <a:t>q = 1 − (dτ/dγ)/2μ</a:t>
-            </a:r>
-            <a:r>
-              <a:rPr sz="1400" b="0">
-                <a:solidFill>
-                  <a:srgbClr val="212121"/>
-                </a:solidFill>
-                <a:latin typeface="Calibri"/>
-              </a:rPr>
-              <a:t> per cell, first pass</a:t>
-            </a:r>
-          </a:p>
-          <a:p>
-            <a:pPr marL="228600" indent="-228600">
-              <a:spcAft>
-                <a:spcPts val="800"/>
-              </a:spcAft>
-              <a:buChar char="•"/>
-            </a:pPr>
-            <a:r>
-              <a:rPr sz="1400" b="0">
-                <a:solidFill>
-                  <a:srgbClr val="212121"/>
-                </a:solidFill>
-                <a:latin typeface="Calibri"/>
-              </a:rPr>
-              <a:t>From the law: </a:t>
-            </a:r>
-            <a:r>
-              <a:rPr sz="1400" b="1">
-                <a:solidFill>
-                  <a:srgbClr val="212121"/>
-                </a:solidFill>
-                <a:latin typeface="Calibri"/>
-              </a:rPr>
-              <a:t>hazard × mean event size</a:t>
-            </a:r>
-            <a:r>
-              <a:rPr sz="1400" b="0">
-                <a:solidFill>
-                  <a:srgbClr val="212121"/>
-                </a:solidFill>
-                <a:latin typeface="Calibri"/>
-              </a:rPr>
-              <a:t>, the mean taken from the fitted P(s | u, τ)</a:t>
-            </a:r>
-          </a:p>
-          <a:p>
-            <a:pPr marL="228600" indent="-228600">
-              <a:spcAft>
-                <a:spcPts val="800"/>
-              </a:spcAft>
-              <a:buChar char="•"/>
-            </a:pPr>
-            <a:r>
-              <a:rPr sz="1400" b="0">
-                <a:solidFill>
-                  <a:srgbClr val="212121"/>
-                </a:solidFill>
-                <a:latin typeface="Calibri"/>
-              </a:rPr>
-              <a:t>One dot per cell, two decades of q; band = statistical noise floor of this grid, </a:t>
-            </a:r>
-            <a:r>
-              <a:rPr sz="1400" b="1">
-                <a:solidFill>
-                  <a:srgbClr val="212121"/>
-                </a:solidFill>
-                <a:latin typeface="Calibri"/>
-              </a:rPr>
-              <a:t>17.5%</a:t>
-            </a:r>
-            <a:r>
-              <a:rPr sz="1400" b="0">
-                <a:solidFill>
-                  <a:srgbClr val="212121"/>
-                </a:solidFill>
-                <a:latin typeface="Calibri"/>
-              </a:rPr>
-              <a:t> (split-half ensembles)</a:t>
-            </a:r>
-          </a:p>
-          <a:p>
-            <a:pPr marL="228600" indent="-228600">
-              <a:spcAft>
-                <a:spcPts val="800"/>
-              </a:spcAft>
-              <a:buChar char="•"/>
-            </a:pPr>
-            <a:r>
-              <a:rPr sz="1400" b="0">
-                <a:solidFill>
-                  <a:srgbClr val="212121"/>
-                </a:solidFill>
-                <a:latin typeface="Calibri"/>
-              </a:rPr>
-              <a:t>Rebuilt field: </a:t>
-            </a:r>
-            <a:r>
-              <a:rPr sz="1400" b="1">
-                <a:solidFill>
-                  <a:srgbClr val="212121"/>
-                </a:solidFill>
-                <a:latin typeface="Calibri"/>
-              </a:rPr>
-              <a:t>median +1.8%, RMS 17%</a:t>
-            </a:r>
-            <a:r>
-              <a:rPr sz="1400" b="0">
-                <a:solidFill>
-                  <a:srgbClr val="212121"/>
-                </a:solidFill>
-                <a:latin typeface="Calibri"/>
-              </a:rPr>
-              <a:t>, within the noise. A better law could not score better here</a:t>
-            </a:r>
-          </a:p>
-          <a:p>
-            <a:pPr marL="228600" indent="-228600">
-              <a:spcAft>
-                <a:spcPts val="800"/>
-              </a:spcAft>
-              <a:buChar char="•"/>
-            </a:pPr>
-            <a:r>
-              <a:rPr sz="1400" b="0">
-                <a:solidFill>
-                  <a:srgbClr val="212121"/>
-                </a:solidFill>
-                <a:latin typeface="Calibri"/>
-              </a:rPr>
-              <a:t>Same factor structure: both versions factorize at 96%, same SR knee, nearly the same constants</a:t>
-            </a:r>
-          </a:p>
-        </p:txBody>
-      </p:sp>
     </p:spTree>
   </p:cSld>
   <p:clrMapOvr>
@@ -7207,69 +8570,21 @@
                 </a:solidFill>
                 <a:latin typeface="Calibri"/>
               </a:rPr>
-              <a:t>Running the model with the discovered law</a:t>
-            </a:r>
-          </a:p>
-        </p:txBody>
-      </p:sp>
-      <p:pic>
-        <p:nvPicPr>
-          <p:cNvPr id="3" name="Picture 2" descr="fig12_sim_stress.png"/>
-          <p:cNvPicPr>
-            <a:picLocks noChangeAspect="1"/>
-          </p:cNvPicPr>
+              <a:t>The discovered law</a:t>
+            </a:r>
+          </a:p>
+        </p:txBody>
+      </p:sp>
+      <p:sp>
+        <p:nvSpPr>
+          <p:cNvPr id="3" name="TextBox 2"/>
+          <p:cNvSpPr txBox="1"/>
           <p:nvPr/>
-        </p:nvPicPr>
-        <p:blipFill>
-          <a:blip r:embed="rId2"/>
-          <a:stretch>
-            <a:fillRect/>
-          </a:stretch>
-        </p:blipFill>
+        </p:nvSpPr>
         <p:spPr>
           <a:xfrm>
-            <a:off x="546002" y="1143000"/>
-            <a:ext cx="5400235" cy="3794760"/>
-          </a:xfrm>
-          <a:prstGeom prst="rect">
-            <a:avLst/>
-          </a:prstGeom>
-        </p:spPr>
-      </p:pic>
-      <p:pic>
-        <p:nvPicPr>
-          <p:cNvPr id="4" name="Picture 3" descr="fig14_sim_peaks.png"/>
-          <p:cNvPicPr>
-            <a:picLocks noChangeAspect="1"/>
-          </p:cNvPicPr>
-          <p:nvPr/>
-        </p:nvPicPr>
-        <p:blipFill>
-          <a:blip r:embed="rId3"/>
-          <a:stretch>
-            <a:fillRect/>
-          </a:stretch>
-        </p:blipFill>
-        <p:spPr>
-          <a:xfrm>
-            <a:off x="6242714" y="1143000"/>
-            <a:ext cx="5400235" cy="3794760"/>
-          </a:xfrm>
-          <a:prstGeom prst="rect">
-            <a:avLst/>
-          </a:prstGeom>
-        </p:spPr>
-      </p:pic>
-      <p:sp>
-        <p:nvSpPr>
-          <p:cNvPr id="5" name="TextBox 4"/>
-          <p:cNvSpPr txBox="1"/>
-          <p:nvPr/>
-        </p:nvSpPr>
-        <p:spPr>
-          <a:xfrm>
-            <a:off x="640080" y="5029200"/>
-            <a:ext cx="5394960" cy="1737360"/>
+            <a:off x="640080" y="1097280"/>
+            <a:ext cx="10972800" cy="640080"/>
           </a:xfrm>
           <a:prstGeom prst="rect">
             <a:avLst/>
@@ -7282,6 +8597,226 @@
           </a:bodyPr>
           <a:lstStyle/>
           <a:p>
+            <a:pPr algn="ctr"/>
+            <a:r>
+              <a:rPr sz="2400" b="0">
+                <a:solidFill>
+                  <a:srgbClr val="1E2761"/>
+                </a:solidFill>
+                <a:latin typeface="Cambria Math"/>
+              </a:rPr>
+              <a:t>P(s | u, τ)  =  (1/Z) · (s_c(u, τ) − s)ᵐ / (s + ε)ᵏ ,     0 &lt; s &lt; s_c</a:t>
+            </a:r>
+          </a:p>
+        </p:txBody>
+      </p:sp>
+      <p:sp>
+        <p:nvSpPr>
+          <p:cNvPr id="4" name="TextBox 3"/>
+          <p:cNvSpPr txBox="1"/>
+          <p:nvPr/>
+        </p:nvSpPr>
+        <p:spPr>
+          <a:xfrm>
+            <a:off x="640080" y="1737360"/>
+            <a:ext cx="10972800" cy="640080"/>
+          </a:xfrm>
+          <a:prstGeom prst="rect">
+            <a:avLst/>
+          </a:prstGeom>
+          <a:noFill/>
+        </p:spPr>
+        <p:txBody>
+          <a:bodyPr wrap="square" lIns="0" rIns="0" tIns="0" bIns="0">
+            <a:spAutoFit/>
+          </a:bodyPr>
+          <a:lstStyle/>
+          <a:p>
+            <a:pPr algn="ctr"/>
+            <a:r>
+              <a:rPr sz="1800" b="0">
+                <a:solidFill>
+                  <a:srgbClr val="6E7B85"/>
+                </a:solidFill>
+                <a:latin typeface="Cambria Math"/>
+              </a:rPr>
+              <a:t>k = 0.88,     m = 2.3,     ε = 2.8 × 10⁻⁵</a:t>
+            </a:r>
+          </a:p>
+        </p:txBody>
+      </p:sp>
+      <p:sp>
+        <p:nvSpPr>
+          <p:cNvPr id="5" name="TextBox 4"/>
+          <p:cNvSpPr txBox="1"/>
+          <p:nvPr/>
+        </p:nvSpPr>
+        <p:spPr>
+          <a:xfrm>
+            <a:off x="640080" y="2514600"/>
+            <a:ext cx="10972800" cy="4114800"/>
+          </a:xfrm>
+          <a:prstGeom prst="rect">
+            <a:avLst/>
+          </a:prstGeom>
+          <a:noFill/>
+        </p:spPr>
+        <p:txBody>
+          <a:bodyPr wrap="square" lIns="0" rIns="0" tIns="0" bIns="0">
+            <a:spAutoFit/>
+          </a:bodyPr>
+          <a:lstStyle/>
+          <a:p>
+            <a:pPr>
+              <a:spcAft>
+                <a:spcPts val="1100"/>
+              </a:spcAft>
+            </a:pPr>
+            <a:r>
+              <a:rPr sz="1600" b="0">
+                <a:solidFill>
+                  <a:srgbClr val="1E2761"/>
+                </a:solidFill>
+                <a:latin typeface="Cambria Math"/>
+              </a:rPr>
+              <a:t>(s + ε)⁻ᵏ   </a:t>
+            </a:r>
+            <a:r>
+              <a:rPr sz="1500" b="1">
+                <a:solidFill>
+                  <a:srgbClr val="212121"/>
+                </a:solidFill>
+                <a:latin typeface="Calibri"/>
+              </a:rPr>
+              <a:t>power-law decay</a:t>
+            </a:r>
+            <a:r>
+              <a:rPr sz="1500" b="0">
+                <a:solidFill>
+                  <a:srgbClr val="212121"/>
+                </a:solidFill>
+                <a:latin typeface="Calibri"/>
+              </a:rPr>
+              <a:t> with exponent k ≈ 0.9; ε rounds it off below about 3 × 10⁻⁵, so there is no lower cutoff</a:t>
+            </a:r>
+          </a:p>
+          <a:p>
+            <a:pPr>
+              <a:spcAft>
+                <a:spcPts val="1100"/>
+              </a:spcAft>
+            </a:pPr>
+            <a:r>
+              <a:rPr sz="1600" b="0">
+                <a:solidFill>
+                  <a:srgbClr val="1E2761"/>
+                </a:solidFill>
+                <a:latin typeface="Cambria Math"/>
+              </a:rPr>
+              <a:t>(s_c − s)ᵐ   </a:t>
+            </a:r>
+            <a:r>
+              <a:rPr sz="1500" b="1">
+                <a:solidFill>
+                  <a:srgbClr val="212121"/>
+                </a:solidFill>
+                <a:latin typeface="Calibri"/>
+              </a:rPr>
+              <a:t>hard ceiling</a:t>
+            </a:r>
+            <a:r>
+              <a:rPr sz="1500" b="0">
+                <a:solidFill>
+                  <a:srgbClr val="212121"/>
+                </a:solidFill>
+                <a:latin typeface="Calibri"/>
+              </a:rPr>
+              <a:t>: density is zero at s = s_c. With m ≈ 2 it vanishes gently, so the largest observed event sits a few percent below s_c</a:t>
+            </a:r>
+          </a:p>
+          <a:p>
+            <a:pPr>
+              <a:spcAft>
+                <a:spcPts val="1100"/>
+              </a:spcAft>
+            </a:pPr>
+            <a:r>
+              <a:rPr sz="1600" b="0">
+                <a:solidFill>
+                  <a:srgbClr val="1E2761"/>
+                </a:solidFill>
+                <a:latin typeface="Cambria Math"/>
+              </a:rPr>
+              <a:t>s_c(u, τ)   </a:t>
+            </a:r>
+            <a:r>
+              <a:rPr sz="1500" b="1">
+                <a:solidFill>
+                  <a:srgbClr val="212121"/>
+                </a:solidFill>
+                <a:latin typeface="Calibri"/>
+              </a:rPr>
+              <a:t>the only place the state enters</a:t>
+            </a:r>
+            <a:r>
+              <a:rPr sz="1500" b="0">
+                <a:solidFill>
+                  <a:srgbClr val="212121"/>
+                </a:solidFill>
+                <a:latin typeface="Calibri"/>
+              </a:rPr>
+              <a:t>: 146× range over the plane (0.02 cold and unloaded, 3 in flow); ln s_c ≈ (u-part) + (τ-part) at 95.5% of the variance</a:t>
+            </a:r>
+          </a:p>
+          <a:p>
+            <a:pPr>
+              <a:spcAft>
+                <a:spcPts val="1100"/>
+              </a:spcAft>
+            </a:pPr>
+            <a:r>
+              <a:rPr sz="1600" b="0">
+                <a:solidFill>
+                  <a:srgbClr val="1E2761"/>
+                </a:solidFill>
+                <a:latin typeface="Cambria Math"/>
+              </a:rPr>
+              <a:t>Z   </a:t>
+            </a:r>
+            <a:r>
+              <a:rPr sz="1500" b="0">
+                <a:solidFill>
+                  <a:srgbClr val="212121"/>
+                </a:solidFill>
+                <a:latin typeface="Calibri"/>
+              </a:rPr>
+              <a:t>normalization, computed numerically</a:t>
+            </a:r>
+          </a:p>
+        </p:txBody>
+      </p:sp>
+      <p:sp>
+        <p:nvSpPr>
+          <p:cNvPr id="6" name="TextBox 5"/>
+          <p:cNvSpPr txBox="1"/>
+          <p:nvPr/>
+        </p:nvSpPr>
+        <p:spPr>
+          <a:xfrm>
+            <a:off x="640080" y="4709160"/>
+            <a:ext cx="10972800" cy="1371600"/>
+          </a:xfrm>
+          <a:prstGeom prst="rect">
+            <a:avLst/>
+          </a:prstGeom>
+          <a:noFill/>
+        </p:spPr>
+        <p:txBody>
+          <a:bodyPr wrap="square" lIns="0" rIns="0" tIns="0" bIns="0">
+            <a:spAutoFit/>
+          </a:bodyPr>
+          <a:lstStyle/>
+          <a:p>
             <a:pPr>
               <a:spcAft>
                 <a:spcPts val="600"/>
@@ -7294,7 +8829,7 @@
                 </a:solidFill>
                 <a:latin typeface="Calibri"/>
               </a:rPr>
-              <a:t>All 850 runs, forward from their measured initial states</a:t>
+              <a:t>Versus the literature forms (slide 4)</a:t>
             </a:r>
           </a:p>
           <a:p>
@@ -7311,7 +8846,7 @@
                 </a:solidFill>
                 <a:latin typeface="Calibri"/>
               </a:rPr>
-              <a:t>Each step at Δγ = 10⁻⁵: elastic drift at 2μ, an event with probability p(u, τ), size drawn from the law</a:t>
+              <a:t>Truncated power law s⁻ᵏ e^(−s/s*): an exponential tail suppresses large events but never forbids them. It sits inside the search space at complexity 7, never made a Pareto front, and loses every likelihood contest that follows</a:t>
             </a:r>
           </a:p>
           <a:p>
@@ -7328,116 +8863,7 @@
                 </a:solidFill>
                 <a:latin typeface="Calibri"/>
               </a:rPr>
-              <a:t>MD solid, model dashed: elastic rise, </a:t>
-            </a:r>
-            <a:r>
-              <a:rPr sz="1350" b="1">
-                <a:solidFill>
-                  <a:srgbClr val="212121"/>
-                </a:solidFill>
-                <a:latin typeface="Calibri"/>
-              </a:rPr>
-              <a:t>yield overshoot across 256× in cooling rate</a:t>
-            </a:r>
-            <a:r>
-              <a:rPr sz="1350" b="0">
-                <a:solidFill>
-                  <a:srgbClr val="212121"/>
-                </a:solidFill>
-                <a:latin typeface="Calibri"/>
-              </a:rPr>
-              <a:t>, post-yield decay, flow stress (±5%)</a:t>
-            </a:r>
-          </a:p>
-        </p:txBody>
-      </p:sp>
-      <p:sp>
-        <p:nvSpPr>
-          <p:cNvPr id="6" name="TextBox 5"/>
-          <p:cNvSpPr txBox="1"/>
-          <p:nvPr/>
-        </p:nvSpPr>
-        <p:spPr>
-          <a:xfrm>
-            <a:off x="6355080" y="5029200"/>
-            <a:ext cx="5303520" cy="1737360"/>
-          </a:xfrm>
-          <a:prstGeom prst="rect">
-            <a:avLst/>
-          </a:prstGeom>
-          <a:noFill/>
-        </p:spPr>
-        <p:txBody>
-          <a:bodyPr wrap="square" lIns="0" rIns="0" tIns="0" bIns="0">
-            <a:spAutoFit/>
-          </a:bodyPr>
-          <a:lstStyle/>
-          <a:p>
-            <a:pPr>
-              <a:spcAft>
-                <a:spcPts val="600"/>
-              </a:spcAft>
-            </a:pPr>
-            <a:r>
-              <a:rPr sz="1600" b="1">
-                <a:solidFill>
-                  <a:srgbClr val="1E2761"/>
-                </a:solidFill>
-                <a:latin typeface="Calibri"/>
-              </a:rPr>
-              <a:t>The 850 yield peaks</a:t>
-            </a:r>
-          </a:p>
-          <a:p>
-            <a:pPr marL="228600" indent="-228600">
-              <a:spcAft>
-                <a:spcPts val="800"/>
-              </a:spcAft>
-              <a:buChar char="•"/>
-            </a:pPr>
-            <a:r>
-              <a:rPr sz="1350" b="0">
-                <a:solidFill>
-                  <a:srgbClr val="212121"/>
-                </a:solidFill>
-                <a:latin typeface="Calibri"/>
-              </a:rPr>
-              <a:t>Ceiling law </a:t>
-            </a:r>
-            <a:r>
-              <a:rPr sz="1350" b="1">
-                <a:solidFill>
-                  <a:srgbClr val="212121"/>
-                </a:solidFill>
-                <a:latin typeface="Calibri"/>
-              </a:rPr>
-              <a:t>RMS 2.5%</a:t>
-            </a:r>
-            <a:r>
-              <a:rPr sz="1350" b="0">
-                <a:solidFill>
-                  <a:srgbClr val="212121"/>
-                </a:solidFill>
-                <a:latin typeface="Calibri"/>
-              </a:rPr>
-              <a:t> (worst rate 4.3%); TPL 1.4%; raw-event resampling 0.9%</a:t>
-            </a:r>
-          </a:p>
-          <a:p>
-            <a:pPr marL="228600" indent="-228600">
-              <a:spcAft>
-                <a:spcPts val="800"/>
-              </a:spcAft>
-              <a:buChar char="•"/>
-            </a:pPr>
-            <a:r>
-              <a:rPr sz="1350" b="0">
-                <a:solidFill>
-                  <a:srgbClr val="212121"/>
-                </a:solidFill>
-                <a:latin typeface="Calibri"/>
-              </a:rPr>
-              <a:t>Peaks feel only the mean event size, so they do not discriminate size laws</a:t>
+              <a:t>Budrikis et al. (2017) eq. 1, fitted the same way: behind the TPL in all eight large cells (ΔAIC +130 to +268 vs the ceiling law; TPL +67 to +120)</a:t>
             </a:r>
           </a:p>
         </p:txBody>
@@ -7768,4 +9194,319 @@
   </a:objectDefaults>
   <a:extraClrSchemeLst/>
 </a:theme>
+</file>
+
+<file path=ppt/theme/theme2.xml><?xml version="1.0" encoding="utf-8"?>
+<a:theme xmlns:a="http://schemas.openxmlformats.org/drawingml/2006/main" name="Office Theme">
+  <a:themeElements>
+    <a:clrScheme name="Office">
+      <a:dk1>
+        <a:sysClr val="windowText" lastClr="000000"/>
+      </a:dk1>
+      <a:lt1>
+        <a:sysClr val="window" lastClr="FFFFFF"/>
+      </a:lt1>
+      <a:dk2>
+        <a:srgbClr val="0E2841"/>
+      </a:dk2>
+      <a:lt2>
+        <a:srgbClr val="E8E8E8"/>
+      </a:lt2>
+      <a:accent1>
+        <a:srgbClr val="156082"/>
+      </a:accent1>
+      <a:accent2>
+        <a:srgbClr val="E97132"/>
+      </a:accent2>
+      <a:accent3>
+        <a:srgbClr val="196B24"/>
+      </a:accent3>
+      <a:accent4>
+        <a:srgbClr val="0F9ED5"/>
+      </a:accent4>
+      <a:accent5>
+        <a:srgbClr val="A02B93"/>
+      </a:accent5>
+      <a:accent6>
+        <a:srgbClr val="4EA72E"/>
+      </a:accent6>
+      <a:hlink>
+        <a:srgbClr val="467886"/>
+      </a:hlink>
+      <a:folHlink>
+        <a:srgbClr val="96607D"/>
+      </a:folHlink>
+    </a:clrScheme>
+    <a:fontScheme name="Office">
+      <a:majorFont>
+        <a:latin typeface="Aptos Display" panose="02110004020202020204"/>
+        <a:ea typeface=""/>
+        <a:cs typeface=""/>
+        <a:font script="Jpan" typeface="游ゴシック Light"/>
+        <a:font script="Hang" typeface="맑은 고딕"/>
+        <a:font script="Hans" typeface="等线 Light"/>
+        <a:font script="Hant" typeface="新細明體"/>
+        <a:font script="Arab" typeface="Times New Roman"/>
+        <a:font script="Hebr" typeface="Times New Roman"/>
+        <a:font script="Thai" typeface="Angsana New"/>
+        <a:font script="Ethi" typeface="Nyala"/>
+        <a:font script="Beng" typeface="Vrinda"/>
+        <a:font script="Gujr" typeface="Shruti"/>
+        <a:font script="Khmr" typeface="MoolBoran"/>
+        <a:font script="Knda" typeface="Tunga"/>
+        <a:font script="Guru" typeface="Raavi"/>
+        <a:font script="Cans" typeface="Euphemia"/>
+        <a:font script="Cher" typeface="Plantagenet Cherokee"/>
+        <a:font script="Yiii" typeface="Microsoft Yi Baiti"/>
+        <a:font script="Tibt" typeface="Microsoft Himalaya"/>
+        <a:font script="Thaa" typeface="MV Boli"/>
+        <a:font script="Deva" typeface="Mangal"/>
+        <a:font script="Telu" typeface="Gautami"/>
+        <a:font script="Taml" typeface="Latha"/>
+        <a:font script="Syrc" typeface="Estrangelo Edessa"/>
+        <a:font script="Orya" typeface="Kalinga"/>
+        <a:font script="Mlym" typeface="Kartika"/>
+        <a:font script="Laoo" typeface="DokChampa"/>
+        <a:font script="Sinh" typeface="Iskoola Pota"/>
+        <a:font script="Mong" typeface="Mongolian Baiti"/>
+        <a:font script="Viet" typeface="Times New Roman"/>
+        <a:font script="Uigh" typeface="Microsoft Uighur"/>
+        <a:font script="Geor" typeface="Sylfaen"/>
+        <a:font script="Armn" typeface="Arial"/>
+        <a:font script="Bugi" typeface="Leelawadee UI"/>
+        <a:font script="Bopo" typeface="Microsoft JhengHei"/>
+        <a:font script="Java" typeface="Javanese Text"/>
+        <a:font script="Lisu" typeface="Segoe UI"/>
+        <a:font script="Mymr" typeface="Myanmar Text"/>
+        <a:font script="Nkoo" typeface="Ebrima"/>
+        <a:font script="Olck" typeface="Nirmala UI"/>
+        <a:font script="Osma" typeface="Ebrima"/>
+        <a:font script="Phag" typeface="Phagspa"/>
+        <a:font script="Syrn" typeface="Estrangelo Edessa"/>
+        <a:font script="Syrj" typeface="Estrangelo Edessa"/>
+        <a:font script="Syre" typeface="Estrangelo Edessa"/>
+        <a:font script="Sora" typeface="Nirmala UI"/>
+        <a:font script="Tale" typeface="Microsoft Tai Le"/>
+        <a:font script="Talu" typeface="Microsoft New Tai Lue"/>
+        <a:font script="Tfng" typeface="Ebrima"/>
+      </a:majorFont>
+      <a:minorFont>
+        <a:latin typeface="Aptos" panose="02110004020202020204"/>
+        <a:ea typeface=""/>
+        <a:cs typeface=""/>
+        <a:font script="Jpan" typeface="游ゴシック"/>
+        <a:font script="Hang" typeface="맑은 고딕"/>
+        <a:font script="Hans" typeface="等线"/>
+        <a:font script="Hant" typeface="新細明體"/>
+        <a:font script="Arab" typeface="Arial"/>
+        <a:font script="Hebr" typeface="Arial"/>
+        <a:font script="Thai" typeface="Cordia New"/>
+        <a:font script="Ethi" typeface="Nyala"/>
+        <a:font script="Beng" typeface="Vrinda"/>
+        <a:font script="Gujr" typeface="Shruti"/>
+        <a:font script="Khmr" typeface="DaunPenh"/>
+        <a:font script="Knda" typeface="Tunga"/>
+        <a:font script="Guru" typeface="Raavi"/>
+        <a:font script="Cans" typeface="Euphemia"/>
+        <a:font script="Cher" typeface="Plantagenet Cherokee"/>
+        <a:font script="Yiii" typeface="Microsoft Yi Baiti"/>
+        <a:font script="Tibt" typeface="Microsoft Himalaya"/>
+        <a:font script="Thaa" typeface="MV Boli"/>
+        <a:font script="Deva" typeface="Mangal"/>
+        <a:font script="Telu" typeface="Gautami"/>
+        <a:font script="Taml" typeface="Latha"/>
+        <a:font script="Syrc" typeface="Estrangelo Edessa"/>
+        <a:font script="Orya" typeface="Kalinga"/>
+        <a:font script="Mlym" typeface="Kartika"/>
+        <a:font script="Laoo" typeface="DokChampa"/>
+        <a:font script="Sinh" typeface="Iskoola Pota"/>
+        <a:font script="Mong" typeface="Mongolian Baiti"/>
+        <a:font script="Viet" typeface="Arial"/>
+        <a:font script="Uigh" typeface="Microsoft Uighur"/>
+        <a:font script="Geor" typeface="Sylfaen"/>
+        <a:font script="Armn" typeface="Arial"/>
+        <a:font script="Bugi" typeface="Leelawadee UI"/>
+        <a:font script="Bopo" typeface="Microsoft JhengHei"/>
+        <a:font script="Java" typeface="Javanese Text"/>
+        <a:font script="Lisu" typeface="Segoe UI"/>
+        <a:font script="Mymr" typeface="Myanmar Text"/>
+        <a:font script="Nkoo" typeface="Ebrima"/>
+        <a:font script="Olck" typeface="Nirmala UI"/>
+        <a:font script="Osma" typeface="Ebrima"/>
+        <a:font script="Phag" typeface="Phagspa"/>
+        <a:font script="Syrn" typeface="Estrangelo Edessa"/>
+        <a:font script="Syrj" typeface="Estrangelo Edessa"/>
+        <a:font script="Syre" typeface="Estrangelo Edessa"/>
+        <a:font script="Sora" typeface="Nirmala UI"/>
+        <a:font script="Tale" typeface="Microsoft Tai Le"/>
+        <a:font script="Talu" typeface="Microsoft New Tai Lue"/>
+        <a:font script="Tfng" typeface="Ebrima"/>
+      </a:minorFont>
+    </a:fontScheme>
+    <a:fmtScheme name="Office">
+      <a:fillStyleLst>
+        <a:solidFill>
+          <a:schemeClr val="phClr"/>
+        </a:solidFill>
+        <a:gradFill rotWithShape="1">
+          <a:gsLst>
+            <a:gs pos="0">
+              <a:schemeClr val="phClr">
+                <a:lumMod val="110000"/>
+                <a:satMod val="105000"/>
+                <a:tint val="67000"/>
+              </a:schemeClr>
+            </a:gs>
+            <a:gs pos="50000">
+              <a:schemeClr val="phClr">
+                <a:lumMod val="105000"/>
+                <a:satMod val="103000"/>
+                <a:tint val="73000"/>
+              </a:schemeClr>
+            </a:gs>
+            <a:gs pos="100000">
+              <a:schemeClr val="phClr">
+                <a:lumMod val="105000"/>
+                <a:satMod val="109000"/>
+                <a:tint val="81000"/>
+              </a:schemeClr>
+            </a:gs>
+          </a:gsLst>
+          <a:lin ang="5400000" scaled="0"/>
+        </a:gradFill>
+        <a:gradFill rotWithShape="1">
+          <a:gsLst>
+            <a:gs pos="0">
+              <a:schemeClr val="phClr">
+                <a:satMod val="103000"/>
+                <a:lumMod val="102000"/>
+                <a:tint val="94000"/>
+              </a:schemeClr>
+            </a:gs>
+            <a:gs pos="50000">
+              <a:schemeClr val="phClr">
+                <a:satMod val="110000"/>
+                <a:lumMod val="100000"/>
+                <a:shade val="100000"/>
+              </a:schemeClr>
+            </a:gs>
+            <a:gs pos="100000">
+              <a:schemeClr val="phClr">
+                <a:lumMod val="99000"/>
+                <a:satMod val="120000"/>
+                <a:shade val="78000"/>
+              </a:schemeClr>
+            </a:gs>
+          </a:gsLst>
+          <a:lin ang="5400000" scaled="0"/>
+        </a:gradFill>
+      </a:fillStyleLst>
+      <a:lnStyleLst>
+        <a:ln w="12700" cap="flat" cmpd="sng" algn="ctr">
+          <a:solidFill>
+            <a:schemeClr val="phClr"/>
+          </a:solidFill>
+          <a:prstDash val="solid"/>
+          <a:miter lim="800000"/>
+        </a:ln>
+        <a:ln w="19050" cap="flat" cmpd="sng" algn="ctr">
+          <a:solidFill>
+            <a:schemeClr val="phClr"/>
+          </a:solidFill>
+          <a:prstDash val="solid"/>
+          <a:miter lim="800000"/>
+        </a:ln>
+        <a:ln w="25400" cap="flat" cmpd="sng" algn="ctr">
+          <a:solidFill>
+            <a:schemeClr val="phClr"/>
+          </a:solidFill>
+          <a:prstDash val="solid"/>
+          <a:miter lim="800000"/>
+        </a:ln>
+      </a:lnStyleLst>
+      <a:effectStyleLst>
+        <a:effectStyle>
+          <a:effectLst/>
+        </a:effectStyle>
+        <a:effectStyle>
+          <a:effectLst/>
+        </a:effectStyle>
+        <a:effectStyle>
+          <a:effectLst>
+            <a:outerShdw blurRad="57150" dist="19050" dir="5400000" algn="ctr" rotWithShape="0">
+              <a:srgbClr val="000000">
+                <a:alpha val="63000"/>
+              </a:srgbClr>
+            </a:outerShdw>
+          </a:effectLst>
+        </a:effectStyle>
+      </a:effectStyleLst>
+      <a:bgFillStyleLst>
+        <a:solidFill>
+          <a:schemeClr val="phClr"/>
+        </a:solidFill>
+        <a:solidFill>
+          <a:schemeClr val="phClr">
+            <a:tint val="95000"/>
+            <a:satMod val="170000"/>
+          </a:schemeClr>
+        </a:solidFill>
+        <a:gradFill rotWithShape="1">
+          <a:gsLst>
+            <a:gs pos="0">
+              <a:schemeClr val="phClr">
+                <a:tint val="93000"/>
+                <a:satMod val="150000"/>
+                <a:shade val="98000"/>
+                <a:lumMod val="102000"/>
+              </a:schemeClr>
+            </a:gs>
+            <a:gs pos="50000">
+              <a:schemeClr val="phClr">
+                <a:tint val="98000"/>
+                <a:satMod val="130000"/>
+                <a:shade val="90000"/>
+                <a:lumMod val="103000"/>
+              </a:schemeClr>
+            </a:gs>
+            <a:gs pos="100000">
+              <a:schemeClr val="phClr">
+                <a:shade val="63000"/>
+                <a:satMod val="120000"/>
+              </a:schemeClr>
+            </a:gs>
+          </a:gsLst>
+          <a:lin ang="5400000" scaled="0"/>
+        </a:gradFill>
+      </a:bgFillStyleLst>
+    </a:fmtScheme>
+  </a:themeElements>
+  <a:objectDefaults>
+    <a:lnDef>
+      <a:spPr/>
+      <a:bodyPr/>
+      <a:lstStyle/>
+      <a:style>
+        <a:lnRef idx="2">
+          <a:schemeClr val="accent1"/>
+        </a:lnRef>
+        <a:fillRef idx="0">
+          <a:schemeClr val="accent1"/>
+        </a:fillRef>
+        <a:effectRef idx="1">
+          <a:schemeClr val="accent1"/>
+        </a:effectRef>
+        <a:fontRef idx="minor">
+          <a:schemeClr val="tx1"/>
+        </a:fontRef>
+      </a:style>
+    </a:lnDef>
+  </a:objectDefaults>
+  <a:extraClrSchemeLst/>
+  <a:extLst>
+    <a:ext uri="{05A4C25C-085E-4340-85A3-A5531E510DB2}">
+      <thm15:themeFamily xmlns:thm15="http://schemas.microsoft.com/office/thememl/2012/main" name="Office Theme" id="{2E142A2C-CD16-42D6-873A-C26D2A0506FA}" vid="{1BDDFF52-6CD6-40A5-AB3C-68EB2F1E4D0A}"/>
+    </a:ext>
+  </a:extLst>
+</a:theme>
 </file>